--- a/Equip_28/Results/Analisis_PAP_and_ABL_RapidExpres_2026_11_05.pptx
+++ b/Equip_28/Results/Analisis_PAP_and_ABL_RapidExpres_2026_11_05.pptx
@@ -19,14 +19,14 @@
     <p:sldId id="298" r:id="rId10"/>
     <p:sldId id="302" r:id="rId11"/>
     <p:sldId id="303" r:id="rId12"/>
-    <p:sldId id="297" r:id="rId13"/>
-    <p:sldId id="258" r:id="rId14"/>
-    <p:sldId id="260" r:id="rId15"/>
-    <p:sldId id="287" r:id="rId16"/>
-    <p:sldId id="284" r:id="rId17"/>
-    <p:sldId id="285" r:id="rId18"/>
-    <p:sldId id="295" r:id="rId19"/>
-    <p:sldId id="288" r:id="rId20"/>
+    <p:sldId id="288" r:id="rId13"/>
+    <p:sldId id="297" r:id="rId14"/>
+    <p:sldId id="258" r:id="rId15"/>
+    <p:sldId id="260" r:id="rId16"/>
+    <p:sldId id="287" r:id="rId17"/>
+    <p:sldId id="284" r:id="rId18"/>
+    <p:sldId id="285" r:id="rId19"/>
+    <p:sldId id="295" r:id="rId20"/>
     <p:sldId id="289" r:id="rId21"/>
     <p:sldId id="257" r:id="rId22"/>
     <p:sldId id="291" r:id="rId23"/>
@@ -1076,6 +1076,133 @@
   <p:cSld>
     <p:spTree>
       <p:nvGrpSpPr>
+        <p:cNvPr id="1" name="Shape 277">
+          <a:extLst>
+            <a:ext uri="{FF2B5EF4-FFF2-40B4-BE49-F238E27FC236}">
+              <a16:creationId xmlns:a16="http://schemas.microsoft.com/office/drawing/2014/main" id="{68033C6D-CA4B-39C8-3566-B3082BE34F0C}"/>
+            </a:ext>
+          </a:extLst>
+        </p:cNvPr>
+        <p:cNvGrpSpPr/>
+        <p:nvPr/>
+      </p:nvGrpSpPr>
+      <p:grpSpPr>
+        <a:xfrm>
+          <a:off x="0" y="0"/>
+          <a:ext cx="0" cy="0"/>
+          <a:chOff x="0" y="0"/>
+          <a:chExt cx="0" cy="0"/>
+        </a:xfrm>
+      </p:grpSpPr>
+      <p:sp>
+        <p:nvSpPr>
+          <p:cNvPr id="278" name="Google Shape;278;p11:notes">
+            <a:extLst>
+              <a:ext uri="{FF2B5EF4-FFF2-40B4-BE49-F238E27FC236}">
+                <a16:creationId xmlns:a16="http://schemas.microsoft.com/office/drawing/2014/main" id="{99F3EF2D-1DA0-6769-2A84-7EB054C8FA0D}"/>
+              </a:ext>
+            </a:extLst>
+          </p:cNvPr>
+          <p:cNvSpPr txBox="1">
+            <a:spLocks noGrp="1"/>
+          </p:cNvSpPr>
+          <p:nvPr>
+            <p:ph type="body" idx="1"/>
+          </p:nvPr>
+        </p:nvSpPr>
+        <p:spPr>
+          <a:xfrm>
+            <a:off x="685800" y="4343400"/>
+            <a:ext cx="5486400" cy="4114800"/>
+          </a:xfrm>
+          <a:prstGeom prst="rect">
+            <a:avLst/>
+          </a:prstGeom>
+        </p:spPr>
+        <p:txBody>
+          <a:bodyPr spcFirstLastPara="1" wrap="square" lIns="91425" tIns="91425" rIns="91425" bIns="91425" anchor="t" anchorCtr="0">
+            <a:noAutofit/>
+          </a:bodyPr>
+          <a:lstStyle/>
+          <a:p>
+            <a:pPr marL="0" lvl="0" indent="0" algn="l" rtl="0">
+              <a:spcBef>
+                <a:spcPts val="0"/>
+              </a:spcBef>
+              <a:spcAft>
+                <a:spcPts val="0"/>
+              </a:spcAft>
+              <a:buNone/>
+            </a:pPr>
+            <a:endParaRPr/>
+          </a:p>
+        </p:txBody>
+      </p:sp>
+      <p:sp>
+        <p:nvSpPr>
+          <p:cNvPr id="279" name="Google Shape;279;p11:notes">
+            <a:extLst>
+              <a:ext uri="{FF2B5EF4-FFF2-40B4-BE49-F238E27FC236}">
+                <a16:creationId xmlns:a16="http://schemas.microsoft.com/office/drawing/2014/main" id="{13F44B19-8F08-E089-5982-64FED72C4EBC}"/>
+              </a:ext>
+            </a:extLst>
+          </p:cNvPr>
+          <p:cNvSpPr>
+            <a:spLocks noGrp="1" noRot="1" noChangeAspect="1"/>
+          </p:cNvSpPr>
+          <p:nvPr>
+            <p:ph type="sldImg" idx="2"/>
+          </p:nvPr>
+        </p:nvSpPr>
+        <p:spPr>
+          <a:xfrm>
+            <a:off x="381000" y="685800"/>
+            <a:ext cx="6096000" cy="3429000"/>
+          </a:xfrm>
+          <a:custGeom>
+            <a:avLst/>
+            <a:gdLst/>
+            <a:ahLst/>
+            <a:cxnLst/>
+            <a:rect l="l" t="t" r="r" b="b"/>
+            <a:pathLst>
+              <a:path w="120000" h="120000" extrusionOk="0">
+                <a:moveTo>
+                  <a:pt x="0" y="0"/>
+                </a:moveTo>
+                <a:lnTo>
+                  <a:pt x="120000" y="0"/>
+                </a:lnTo>
+                <a:lnTo>
+                  <a:pt x="120000" y="120000"/>
+                </a:lnTo>
+                <a:lnTo>
+                  <a:pt x="0" y="120000"/>
+                </a:lnTo>
+                <a:close/>
+              </a:path>
+            </a:pathLst>
+          </a:custGeom>
+        </p:spPr>
+      </p:sp>
+    </p:spTree>
+    <p:extLst>
+      <p:ext uri="{BB962C8B-B14F-4D97-AF65-F5344CB8AC3E}">
+        <p14:creationId xmlns:p14="http://schemas.microsoft.com/office/powerpoint/2010/main" val="3042925861"/>
+      </p:ext>
+    </p:extLst>
+  </p:cSld>
+  <p:clrMapOvr>
+    <a:masterClrMapping/>
+  </p:clrMapOvr>
+</p:notes>
+</file>
+
+<file path=ppt/notesSlides/notesSlide13.xml><?xml version="1.0" encoding="utf-8"?>
+<p:notes xmlns:a="http://schemas.openxmlformats.org/drawingml/2006/main" xmlns:r="http://schemas.openxmlformats.org/officeDocument/2006/relationships" xmlns:p="http://schemas.openxmlformats.org/presentationml/2006/main" showMasterSp="0" showMasterPhAnim="0">
+  <p:cSld>
+    <p:spTree>
+      <p:nvGrpSpPr>
         <p:cNvPr id="1" name="Shape 80"/>
         <p:cNvGrpSpPr/>
         <p:nvPr/>
@@ -1180,7 +1307,7 @@
 </p:notes>
 </file>
 
-<file path=ppt/notesSlides/notesSlide13.xml><?xml version="1.0" encoding="utf-8"?>
+<file path=ppt/notesSlides/notesSlide14.xml><?xml version="1.0" encoding="utf-8"?>
 <p:notes xmlns:a="http://schemas.openxmlformats.org/drawingml/2006/main" xmlns:r="http://schemas.openxmlformats.org/officeDocument/2006/relationships" xmlns:p="http://schemas.openxmlformats.org/presentationml/2006/main" showMasterSp="0" showMasterPhAnim="0">
   <p:cSld>
     <p:spTree>
@@ -1284,7 +1411,7 @@
 </p:notes>
 </file>
 
-<file path=ppt/notesSlides/notesSlide14.xml><?xml version="1.0" encoding="utf-8"?>
+<file path=ppt/notesSlides/notesSlide15.xml><?xml version="1.0" encoding="utf-8"?>
 <p:notes xmlns:a="http://schemas.openxmlformats.org/drawingml/2006/main" xmlns:r="http://schemas.openxmlformats.org/officeDocument/2006/relationships" xmlns:p="http://schemas.openxmlformats.org/presentationml/2006/main" showMasterSp="0" showMasterPhAnim="0">
   <p:cSld>
     <p:spTree>
@@ -1388,7 +1515,7 @@
 </p:notes>
 </file>
 
-<file path=ppt/notesSlides/notesSlide15.xml><?xml version="1.0" encoding="utf-8"?>
+<file path=ppt/notesSlides/notesSlide16.xml><?xml version="1.0" encoding="utf-8"?>
 <p:notes xmlns:a="http://schemas.openxmlformats.org/drawingml/2006/main" xmlns:r="http://schemas.openxmlformats.org/officeDocument/2006/relationships" xmlns:p="http://schemas.openxmlformats.org/presentationml/2006/main" showMasterSp="0" showMasterPhAnim="0">
   <p:cSld>
     <p:spTree>
@@ -1515,7 +1642,7 @@
 </p:notes>
 </file>
 
-<file path=ppt/notesSlides/notesSlide16.xml><?xml version="1.0" encoding="utf-8"?>
+<file path=ppt/notesSlides/notesSlide17.xml><?xml version="1.0" encoding="utf-8"?>
 <p:notes xmlns:a="http://schemas.openxmlformats.org/drawingml/2006/main" xmlns:r="http://schemas.openxmlformats.org/officeDocument/2006/relationships" xmlns:p="http://schemas.openxmlformats.org/presentationml/2006/main" showMasterSp="0" showMasterPhAnim="0">
   <p:cSld>
     <p:spTree>
@@ -1633,133 +1760,6 @@
     <p:extLst>
       <p:ext uri="{BB962C8B-B14F-4D97-AF65-F5344CB8AC3E}">
         <p14:creationId xmlns:p14="http://schemas.microsoft.com/office/powerpoint/2010/main" val="2275216246"/>
-      </p:ext>
-    </p:extLst>
-  </p:cSld>
-  <p:clrMapOvr>
-    <a:masterClrMapping/>
-  </p:clrMapOvr>
-</p:notes>
-</file>
-
-<file path=ppt/notesSlides/notesSlide17.xml><?xml version="1.0" encoding="utf-8"?>
-<p:notes xmlns:a="http://schemas.openxmlformats.org/drawingml/2006/main" xmlns:r="http://schemas.openxmlformats.org/officeDocument/2006/relationships" xmlns:p="http://schemas.openxmlformats.org/presentationml/2006/main" showMasterSp="0" showMasterPhAnim="0">
-  <p:cSld>
-    <p:spTree>
-      <p:nvGrpSpPr>
-        <p:cNvPr id="1" name="Shape 157">
-          <a:extLst>
-            <a:ext uri="{FF2B5EF4-FFF2-40B4-BE49-F238E27FC236}">
-              <a16:creationId xmlns:a16="http://schemas.microsoft.com/office/drawing/2014/main" id="{FCF5328D-5EF3-B3C2-ED5D-E6B9C72C504A}"/>
-            </a:ext>
-          </a:extLst>
-        </p:cNvPr>
-        <p:cNvGrpSpPr/>
-        <p:nvPr/>
-      </p:nvGrpSpPr>
-      <p:grpSpPr>
-        <a:xfrm>
-          <a:off x="0" y="0"/>
-          <a:ext cx="0" cy="0"/>
-          <a:chOff x="0" y="0"/>
-          <a:chExt cx="0" cy="0"/>
-        </a:xfrm>
-      </p:grpSpPr>
-      <p:sp>
-        <p:nvSpPr>
-          <p:cNvPr id="158" name="Google Shape;158;p4:notes">
-            <a:extLst>
-              <a:ext uri="{FF2B5EF4-FFF2-40B4-BE49-F238E27FC236}">
-                <a16:creationId xmlns:a16="http://schemas.microsoft.com/office/drawing/2014/main" id="{2D46FA33-ABC3-5982-513A-88AF808BFDFD}"/>
-              </a:ext>
-            </a:extLst>
-          </p:cNvPr>
-          <p:cNvSpPr txBox="1">
-            <a:spLocks noGrp="1"/>
-          </p:cNvSpPr>
-          <p:nvPr>
-            <p:ph type="body" idx="1"/>
-          </p:nvPr>
-        </p:nvSpPr>
-        <p:spPr>
-          <a:xfrm>
-            <a:off x="685800" y="4343400"/>
-            <a:ext cx="5486400" cy="4114800"/>
-          </a:xfrm>
-          <a:prstGeom prst="rect">
-            <a:avLst/>
-          </a:prstGeom>
-        </p:spPr>
-        <p:txBody>
-          <a:bodyPr spcFirstLastPara="1" wrap="square" lIns="91425" tIns="91425" rIns="91425" bIns="91425" anchor="t" anchorCtr="0">
-            <a:noAutofit/>
-          </a:bodyPr>
-          <a:lstStyle/>
-          <a:p>
-            <a:pPr marL="0" lvl="0" indent="0" algn="l" rtl="0">
-              <a:spcBef>
-                <a:spcPts val="0"/>
-              </a:spcBef>
-              <a:spcAft>
-                <a:spcPts val="0"/>
-              </a:spcAft>
-              <a:buNone/>
-            </a:pPr>
-            <a:endParaRPr/>
-          </a:p>
-        </p:txBody>
-      </p:sp>
-      <p:sp>
-        <p:nvSpPr>
-          <p:cNvPr id="159" name="Google Shape;159;p4:notes">
-            <a:extLst>
-              <a:ext uri="{FF2B5EF4-FFF2-40B4-BE49-F238E27FC236}">
-                <a16:creationId xmlns:a16="http://schemas.microsoft.com/office/drawing/2014/main" id="{C456DE22-CE1E-6447-C306-D3F9178E76A0}"/>
-              </a:ext>
-            </a:extLst>
-          </p:cNvPr>
-          <p:cNvSpPr>
-            <a:spLocks noGrp="1" noRot="1" noChangeAspect="1"/>
-          </p:cNvSpPr>
-          <p:nvPr>
-            <p:ph type="sldImg" idx="2"/>
-          </p:nvPr>
-        </p:nvSpPr>
-        <p:spPr>
-          <a:xfrm>
-            <a:off x="381000" y="685800"/>
-            <a:ext cx="6096000" cy="3429000"/>
-          </a:xfrm>
-          <a:custGeom>
-            <a:avLst/>
-            <a:gdLst/>
-            <a:ahLst/>
-            <a:cxnLst/>
-            <a:rect l="l" t="t" r="r" b="b"/>
-            <a:pathLst>
-              <a:path w="120000" h="120000" extrusionOk="0">
-                <a:moveTo>
-                  <a:pt x="0" y="0"/>
-                </a:moveTo>
-                <a:lnTo>
-                  <a:pt x="120000" y="0"/>
-                </a:lnTo>
-                <a:lnTo>
-                  <a:pt x="120000" y="120000"/>
-                </a:lnTo>
-                <a:lnTo>
-                  <a:pt x="0" y="120000"/>
-                </a:lnTo>
-                <a:close/>
-              </a:path>
-            </a:pathLst>
-          </a:custGeom>
-        </p:spPr>
-      </p:sp>
-    </p:spTree>
-    <p:extLst>
-      <p:ext uri="{BB962C8B-B14F-4D97-AF65-F5344CB8AC3E}">
-        <p14:creationId xmlns:p14="http://schemas.microsoft.com/office/powerpoint/2010/main" val="3384843925"/>
       </p:ext>
     </p:extLst>
   </p:cSld>
@@ -1886,7 +1886,7 @@
     </p:spTree>
     <p:extLst>
       <p:ext uri="{BB962C8B-B14F-4D97-AF65-F5344CB8AC3E}">
-        <p14:creationId xmlns:p14="http://schemas.microsoft.com/office/powerpoint/2010/main" val="4038510907"/>
+        <p14:creationId xmlns:p14="http://schemas.microsoft.com/office/powerpoint/2010/main" val="3384843925"/>
       </p:ext>
     </p:extLst>
   </p:cSld>
@@ -1901,10 +1901,10 @@
   <p:cSld>
     <p:spTree>
       <p:nvGrpSpPr>
-        <p:cNvPr id="1" name="Shape 277">
+        <p:cNvPr id="1" name="Shape 157">
           <a:extLst>
             <a:ext uri="{FF2B5EF4-FFF2-40B4-BE49-F238E27FC236}">
-              <a16:creationId xmlns:a16="http://schemas.microsoft.com/office/drawing/2014/main" id="{68033C6D-CA4B-39C8-3566-B3082BE34F0C}"/>
+              <a16:creationId xmlns:a16="http://schemas.microsoft.com/office/drawing/2014/main" id="{FCF5328D-5EF3-B3C2-ED5D-E6B9C72C504A}"/>
             </a:ext>
           </a:extLst>
         </p:cNvPr>
@@ -1921,10 +1921,10 @@
       </p:grpSpPr>
       <p:sp>
         <p:nvSpPr>
-          <p:cNvPr id="278" name="Google Shape;278;p11:notes">
+          <p:cNvPr id="158" name="Google Shape;158;p4:notes">
             <a:extLst>
               <a:ext uri="{FF2B5EF4-FFF2-40B4-BE49-F238E27FC236}">
-                <a16:creationId xmlns:a16="http://schemas.microsoft.com/office/drawing/2014/main" id="{99F3EF2D-1DA0-6769-2A84-7EB054C8FA0D}"/>
+                <a16:creationId xmlns:a16="http://schemas.microsoft.com/office/drawing/2014/main" id="{2D46FA33-ABC3-5982-513A-88AF808BFDFD}"/>
               </a:ext>
             </a:extLst>
           </p:cNvPr>
@@ -1965,10 +1965,10 @@
       </p:sp>
       <p:sp>
         <p:nvSpPr>
-          <p:cNvPr id="279" name="Google Shape;279;p11:notes">
+          <p:cNvPr id="159" name="Google Shape;159;p4:notes">
             <a:extLst>
               <a:ext uri="{FF2B5EF4-FFF2-40B4-BE49-F238E27FC236}">
-                <a16:creationId xmlns:a16="http://schemas.microsoft.com/office/drawing/2014/main" id="{13F44B19-8F08-E089-5982-64FED72C4EBC}"/>
+                <a16:creationId xmlns:a16="http://schemas.microsoft.com/office/drawing/2014/main" id="{C456DE22-CE1E-6447-C306-D3F9178E76A0}"/>
               </a:ext>
             </a:extLst>
           </p:cNvPr>
@@ -2013,7 +2013,7 @@
     </p:spTree>
     <p:extLst>
       <p:ext uri="{BB962C8B-B14F-4D97-AF65-F5344CB8AC3E}">
-        <p14:creationId xmlns:p14="http://schemas.microsoft.com/office/powerpoint/2010/main" val="3042925861"/>
+        <p14:creationId xmlns:p14="http://schemas.microsoft.com/office/powerpoint/2010/main" val="4038510907"/>
       </p:ext>
     </p:extLst>
   </p:cSld>
@@ -14994,6 +14994,48 @@
           </a:prstGeom>
         </p:spPr>
       </p:pic>
+      <p:sp>
+        <p:nvSpPr>
+          <p:cNvPr id="9" name="QuadreDeText 8">
+            <a:extLst>
+              <a:ext uri="{FF2B5EF4-FFF2-40B4-BE49-F238E27FC236}">
+                <a16:creationId xmlns:a16="http://schemas.microsoft.com/office/drawing/2014/main" id="{94872647-7527-45A5-AB2A-5C75504F1D1F}"/>
+              </a:ext>
+            </a:extLst>
+          </p:cNvPr>
+          <p:cNvSpPr txBox="1"/>
+          <p:nvPr/>
+        </p:nvSpPr>
+        <p:spPr>
+          <a:xfrm>
+            <a:off x="11857218" y="9787306"/>
+            <a:ext cx="9233942" cy="307777"/>
+          </a:xfrm>
+          <a:prstGeom prst="rect">
+            <a:avLst/>
+          </a:prstGeom>
+          <a:noFill/>
+        </p:spPr>
+        <p:txBody>
+          <a:bodyPr wrap="square">
+            <a:spAutoFit/>
+          </a:bodyPr>
+          <a:lstStyle/>
+          <a:p>
+            <a:r>
+              <a:rPr lang="es-ES" dirty="0"/>
+              <a:t>Fuente: </a:t>
+            </a:r>
+            <a:r>
+              <a:rPr lang="es-ES" dirty="0">
+                <a:hlinkClick r:id="rId6"/>
+              </a:rPr>
+              <a:t>Encuesta Anual Laboral. Ministerio de Trabajo y Economía Social</a:t>
+            </a:r>
+            <a:endParaRPr lang="es-ES" dirty="0"/>
+          </a:p>
+        </p:txBody>
+      </p:sp>
     </p:spTree>
     <p:extLst>
       <p:ext uri="{BB962C8B-B14F-4D97-AF65-F5344CB8AC3E}">
@@ -15008,6 +15050,980 @@
 </file>
 
 <file path=ppt/slides/slide12.xml><?xml version="1.0" encoding="utf-8"?>
+<p:sld xmlns:a="http://schemas.openxmlformats.org/drawingml/2006/main" xmlns:r="http://schemas.openxmlformats.org/officeDocument/2006/relationships" xmlns:p="http://schemas.openxmlformats.org/presentationml/2006/main">
+  <p:cSld>
+    <p:bg>
+      <p:bgPr>
+        <a:solidFill>
+          <a:srgbClr val="E0E9F9"/>
+        </a:solidFill>
+        <a:effectLst/>
+      </p:bgPr>
+    </p:bg>
+    <p:spTree>
+      <p:nvGrpSpPr>
+        <p:cNvPr id="1" name="Shape 280">
+          <a:extLst>
+            <a:ext uri="{FF2B5EF4-FFF2-40B4-BE49-F238E27FC236}">
+              <a16:creationId xmlns:a16="http://schemas.microsoft.com/office/drawing/2014/main" id="{9CF05CD1-42CF-1415-2507-014F0D5DAD6D}"/>
+            </a:ext>
+          </a:extLst>
+        </p:cNvPr>
+        <p:cNvGrpSpPr/>
+        <p:nvPr/>
+      </p:nvGrpSpPr>
+      <p:grpSpPr>
+        <a:xfrm>
+          <a:off x="0" y="0"/>
+          <a:ext cx="0" cy="0"/>
+          <a:chOff x="0" y="0"/>
+          <a:chExt cx="0" cy="0"/>
+        </a:xfrm>
+      </p:grpSpPr>
+      <p:grpSp>
+        <p:nvGrpSpPr>
+          <p:cNvPr id="281" name="Google Shape;281;p23">
+            <a:extLst>
+              <a:ext uri="{FF2B5EF4-FFF2-40B4-BE49-F238E27FC236}">
+                <a16:creationId xmlns:a16="http://schemas.microsoft.com/office/drawing/2014/main" id="{FBD2D488-777B-F881-321D-7414A6F7B18A}"/>
+              </a:ext>
+            </a:extLst>
+          </p:cNvPr>
+          <p:cNvGrpSpPr/>
+          <p:nvPr/>
+        </p:nvGrpSpPr>
+        <p:grpSpPr>
+          <a:xfrm>
+            <a:off x="8647101" y="1554020"/>
+            <a:ext cx="1382928" cy="1389712"/>
+            <a:chOff x="0" y="-9525"/>
+            <a:chExt cx="963809" cy="968537"/>
+          </a:xfrm>
+        </p:grpSpPr>
+        <p:sp>
+          <p:nvSpPr>
+            <p:cNvPr id="282" name="Google Shape;282;p23">
+              <a:extLst>
+                <a:ext uri="{FF2B5EF4-FFF2-40B4-BE49-F238E27FC236}">
+                  <a16:creationId xmlns:a16="http://schemas.microsoft.com/office/drawing/2014/main" id="{0904FE46-466E-A0FE-64A7-933E7269DDAC}"/>
+                </a:ext>
+              </a:extLst>
+            </p:cNvPr>
+            <p:cNvSpPr/>
+            <p:nvPr/>
+          </p:nvSpPr>
+          <p:spPr>
+            <a:xfrm>
+              <a:off x="0" y="0"/>
+              <a:ext cx="963809" cy="959012"/>
+            </a:xfrm>
+            <a:custGeom>
+              <a:avLst/>
+              <a:gdLst/>
+              <a:ahLst/>
+              <a:cxnLst/>
+              <a:rect l="l" t="t" r="r" b="b"/>
+              <a:pathLst>
+                <a:path w="963809" h="959012" extrusionOk="0">
+                  <a:moveTo>
+                    <a:pt x="0" y="0"/>
+                  </a:moveTo>
+                  <a:lnTo>
+                    <a:pt x="963809" y="0"/>
+                  </a:lnTo>
+                  <a:lnTo>
+                    <a:pt x="963809" y="959012"/>
+                  </a:lnTo>
+                  <a:lnTo>
+                    <a:pt x="0" y="959012"/>
+                  </a:lnTo>
+                  <a:close/>
+                </a:path>
+              </a:pathLst>
+            </a:custGeom>
+            <a:solidFill>
+              <a:srgbClr val="FFFFFF"/>
+            </a:solidFill>
+            <a:ln w="28575" cap="sq" cmpd="sng">
+              <a:solidFill>
+                <a:srgbClr val="004AAD"/>
+              </a:solidFill>
+              <a:prstDash val="solid"/>
+              <a:miter lim="8000"/>
+              <a:headEnd type="none" w="sm" len="sm"/>
+              <a:tailEnd type="none" w="sm" len="sm"/>
+            </a:ln>
+          </p:spPr>
+          <p:txBody>
+            <a:bodyPr/>
+            <a:lstStyle/>
+            <a:p>
+              <a:endParaRPr lang="es-ES_tradnl" dirty="0"/>
+            </a:p>
+          </p:txBody>
+        </p:sp>
+        <p:sp>
+          <p:nvSpPr>
+            <p:cNvPr id="283" name="Google Shape;283;p23">
+              <a:extLst>
+                <a:ext uri="{FF2B5EF4-FFF2-40B4-BE49-F238E27FC236}">
+                  <a16:creationId xmlns:a16="http://schemas.microsoft.com/office/drawing/2014/main" id="{35B35C79-17F9-73C2-E425-160AB7E1FED4}"/>
+                </a:ext>
+              </a:extLst>
+            </p:cNvPr>
+            <p:cNvSpPr txBox="1"/>
+            <p:nvPr/>
+          </p:nvSpPr>
+          <p:spPr>
+            <a:xfrm>
+              <a:off x="0" y="-9525"/>
+              <a:ext cx="963809" cy="968537"/>
+            </a:xfrm>
+            <a:prstGeom prst="rect">
+              <a:avLst/>
+            </a:prstGeom>
+            <a:noFill/>
+            <a:ln>
+              <a:noFill/>
+            </a:ln>
+          </p:spPr>
+          <p:txBody>
+            <a:bodyPr spcFirstLastPara="1" wrap="square" lIns="50800" tIns="50800" rIns="50800" bIns="50800" anchor="ctr" anchorCtr="0">
+              <a:noAutofit/>
+            </a:bodyPr>
+            <a:lstStyle/>
+            <a:p>
+              <a:pPr marL="0" marR="0" lvl="0" indent="0" algn="ctr" rtl="0">
+                <a:lnSpc>
+                  <a:spcPct val="113000"/>
+                </a:lnSpc>
+                <a:spcBef>
+                  <a:spcPts val="0"/>
+                </a:spcBef>
+                <a:spcAft>
+                  <a:spcPts val="0"/>
+                </a:spcAft>
+                <a:buNone/>
+              </a:pPr>
+              <a:r>
+                <a:rPr lang="es-ES_tradnl" sz="5000" b="1" i="0" u="none" strike="noStrike" cap="none" dirty="0">
+                  <a:solidFill>
+                    <a:srgbClr val="004AAD"/>
+                  </a:solidFill>
+                  <a:latin typeface="Poppins Black"/>
+                  <a:ea typeface="Poppins Black"/>
+                  <a:cs typeface="Poppins Black"/>
+                  <a:sym typeface="Poppins Black"/>
+                </a:rPr>
+                <a:t>1</a:t>
+              </a:r>
+              <a:endParaRPr lang="es-ES_tradnl" dirty="0"/>
+            </a:p>
+          </p:txBody>
+        </p:sp>
+      </p:grpSp>
+      <p:grpSp>
+        <p:nvGrpSpPr>
+          <p:cNvPr id="284" name="Google Shape;284;p23">
+            <a:extLst>
+              <a:ext uri="{FF2B5EF4-FFF2-40B4-BE49-F238E27FC236}">
+                <a16:creationId xmlns:a16="http://schemas.microsoft.com/office/drawing/2014/main" id="{D4DCD8B5-19F0-0D56-7A66-19EBF123EFC1}"/>
+              </a:ext>
+            </a:extLst>
+          </p:cNvPr>
+          <p:cNvGrpSpPr/>
+          <p:nvPr/>
+        </p:nvGrpSpPr>
+        <p:grpSpPr>
+          <a:xfrm>
+            <a:off x="8647101" y="3546536"/>
+            <a:ext cx="1382928" cy="1389712"/>
+            <a:chOff x="0" y="-9525"/>
+            <a:chExt cx="963809" cy="968537"/>
+          </a:xfrm>
+        </p:grpSpPr>
+        <p:sp>
+          <p:nvSpPr>
+            <p:cNvPr id="285" name="Google Shape;285;p23">
+              <a:extLst>
+                <a:ext uri="{FF2B5EF4-FFF2-40B4-BE49-F238E27FC236}">
+                  <a16:creationId xmlns:a16="http://schemas.microsoft.com/office/drawing/2014/main" id="{D9191FA8-EB35-68D8-CBB9-8124915F3660}"/>
+                </a:ext>
+              </a:extLst>
+            </p:cNvPr>
+            <p:cNvSpPr/>
+            <p:nvPr/>
+          </p:nvSpPr>
+          <p:spPr>
+            <a:xfrm>
+              <a:off x="0" y="0"/>
+              <a:ext cx="963809" cy="959012"/>
+            </a:xfrm>
+            <a:custGeom>
+              <a:avLst/>
+              <a:gdLst/>
+              <a:ahLst/>
+              <a:cxnLst/>
+              <a:rect l="l" t="t" r="r" b="b"/>
+              <a:pathLst>
+                <a:path w="963809" h="959012" extrusionOk="0">
+                  <a:moveTo>
+                    <a:pt x="0" y="0"/>
+                  </a:moveTo>
+                  <a:lnTo>
+                    <a:pt x="963809" y="0"/>
+                  </a:lnTo>
+                  <a:lnTo>
+                    <a:pt x="963809" y="959012"/>
+                  </a:lnTo>
+                  <a:lnTo>
+                    <a:pt x="0" y="959012"/>
+                  </a:lnTo>
+                  <a:close/>
+                </a:path>
+              </a:pathLst>
+            </a:custGeom>
+            <a:solidFill>
+              <a:srgbClr val="FFFFFF"/>
+            </a:solidFill>
+            <a:ln w="28575" cap="sq" cmpd="sng">
+              <a:solidFill>
+                <a:srgbClr val="004AAD"/>
+              </a:solidFill>
+              <a:prstDash val="solid"/>
+              <a:miter lim="8000"/>
+              <a:headEnd type="none" w="sm" len="sm"/>
+              <a:tailEnd type="none" w="sm" len="sm"/>
+            </a:ln>
+          </p:spPr>
+          <p:txBody>
+            <a:bodyPr/>
+            <a:lstStyle/>
+            <a:p>
+              <a:endParaRPr lang="es-ES_tradnl" dirty="0"/>
+            </a:p>
+          </p:txBody>
+        </p:sp>
+        <p:sp>
+          <p:nvSpPr>
+            <p:cNvPr id="286" name="Google Shape;286;p23">
+              <a:extLst>
+                <a:ext uri="{FF2B5EF4-FFF2-40B4-BE49-F238E27FC236}">
+                  <a16:creationId xmlns:a16="http://schemas.microsoft.com/office/drawing/2014/main" id="{5D2F282B-5CFE-6353-0E3A-8E7AC934BA03}"/>
+                </a:ext>
+              </a:extLst>
+            </p:cNvPr>
+            <p:cNvSpPr txBox="1"/>
+            <p:nvPr/>
+          </p:nvSpPr>
+          <p:spPr>
+            <a:xfrm>
+              <a:off x="0" y="-9525"/>
+              <a:ext cx="963809" cy="968537"/>
+            </a:xfrm>
+            <a:prstGeom prst="rect">
+              <a:avLst/>
+            </a:prstGeom>
+            <a:noFill/>
+            <a:ln>
+              <a:noFill/>
+            </a:ln>
+          </p:spPr>
+          <p:txBody>
+            <a:bodyPr spcFirstLastPara="1" wrap="square" lIns="50800" tIns="50800" rIns="50800" bIns="50800" anchor="ctr" anchorCtr="0">
+              <a:noAutofit/>
+            </a:bodyPr>
+            <a:lstStyle/>
+            <a:p>
+              <a:pPr marL="0" marR="0" lvl="0" indent="0" algn="ctr" rtl="0">
+                <a:lnSpc>
+                  <a:spcPct val="113000"/>
+                </a:lnSpc>
+                <a:spcBef>
+                  <a:spcPts val="0"/>
+                </a:spcBef>
+                <a:spcAft>
+                  <a:spcPts val="0"/>
+                </a:spcAft>
+                <a:buNone/>
+              </a:pPr>
+              <a:r>
+                <a:rPr lang="es-ES_tradnl" sz="5000" b="1" i="0" u="none" strike="noStrike" cap="none" dirty="0">
+                  <a:solidFill>
+                    <a:srgbClr val="004AAD"/>
+                  </a:solidFill>
+                  <a:latin typeface="Poppins Black"/>
+                  <a:ea typeface="Poppins Black"/>
+                  <a:cs typeface="Poppins Black"/>
+                  <a:sym typeface="Poppins Black"/>
+                </a:rPr>
+                <a:t>2</a:t>
+              </a:r>
+              <a:endParaRPr lang="es-ES_tradnl" dirty="0"/>
+            </a:p>
+          </p:txBody>
+        </p:sp>
+      </p:grpSp>
+      <p:grpSp>
+        <p:nvGrpSpPr>
+          <p:cNvPr id="287" name="Google Shape;287;p23">
+            <a:extLst>
+              <a:ext uri="{FF2B5EF4-FFF2-40B4-BE49-F238E27FC236}">
+                <a16:creationId xmlns:a16="http://schemas.microsoft.com/office/drawing/2014/main" id="{736B4F0E-699C-B9C6-CB17-B4A44D8566BE}"/>
+              </a:ext>
+            </a:extLst>
+          </p:cNvPr>
+          <p:cNvGrpSpPr/>
+          <p:nvPr/>
+        </p:nvGrpSpPr>
+        <p:grpSpPr>
+          <a:xfrm>
+            <a:off x="8647101" y="5578255"/>
+            <a:ext cx="1382928" cy="1389712"/>
+            <a:chOff x="0" y="-9525"/>
+            <a:chExt cx="963809" cy="968537"/>
+          </a:xfrm>
+        </p:grpSpPr>
+        <p:sp>
+          <p:nvSpPr>
+            <p:cNvPr id="288" name="Google Shape;288;p23">
+              <a:extLst>
+                <a:ext uri="{FF2B5EF4-FFF2-40B4-BE49-F238E27FC236}">
+                  <a16:creationId xmlns:a16="http://schemas.microsoft.com/office/drawing/2014/main" id="{534FAD3D-081E-452B-11A8-EF8FC4505649}"/>
+                </a:ext>
+              </a:extLst>
+            </p:cNvPr>
+            <p:cNvSpPr/>
+            <p:nvPr/>
+          </p:nvSpPr>
+          <p:spPr>
+            <a:xfrm>
+              <a:off x="0" y="0"/>
+              <a:ext cx="963809" cy="959012"/>
+            </a:xfrm>
+            <a:custGeom>
+              <a:avLst/>
+              <a:gdLst/>
+              <a:ahLst/>
+              <a:cxnLst/>
+              <a:rect l="l" t="t" r="r" b="b"/>
+              <a:pathLst>
+                <a:path w="963809" h="959012" extrusionOk="0">
+                  <a:moveTo>
+                    <a:pt x="0" y="0"/>
+                  </a:moveTo>
+                  <a:lnTo>
+                    <a:pt x="963809" y="0"/>
+                  </a:lnTo>
+                  <a:lnTo>
+                    <a:pt x="963809" y="959012"/>
+                  </a:lnTo>
+                  <a:lnTo>
+                    <a:pt x="0" y="959012"/>
+                  </a:lnTo>
+                  <a:close/>
+                </a:path>
+              </a:pathLst>
+            </a:custGeom>
+            <a:solidFill>
+              <a:srgbClr val="FFFFFF"/>
+            </a:solidFill>
+            <a:ln w="28575" cap="sq" cmpd="sng">
+              <a:solidFill>
+                <a:srgbClr val="004AAD"/>
+              </a:solidFill>
+              <a:prstDash val="solid"/>
+              <a:miter lim="8000"/>
+              <a:headEnd type="none" w="sm" len="sm"/>
+              <a:tailEnd type="none" w="sm" len="sm"/>
+            </a:ln>
+          </p:spPr>
+          <p:txBody>
+            <a:bodyPr/>
+            <a:lstStyle/>
+            <a:p>
+              <a:endParaRPr lang="es-ES_tradnl" dirty="0"/>
+            </a:p>
+          </p:txBody>
+        </p:sp>
+        <p:sp>
+          <p:nvSpPr>
+            <p:cNvPr id="289" name="Google Shape;289;p23">
+              <a:extLst>
+                <a:ext uri="{FF2B5EF4-FFF2-40B4-BE49-F238E27FC236}">
+                  <a16:creationId xmlns:a16="http://schemas.microsoft.com/office/drawing/2014/main" id="{F1D1B048-040C-1AF5-81F9-0F64D112826F}"/>
+                </a:ext>
+              </a:extLst>
+            </p:cNvPr>
+            <p:cNvSpPr txBox="1"/>
+            <p:nvPr/>
+          </p:nvSpPr>
+          <p:spPr>
+            <a:xfrm>
+              <a:off x="0" y="-9525"/>
+              <a:ext cx="963809" cy="968537"/>
+            </a:xfrm>
+            <a:prstGeom prst="rect">
+              <a:avLst/>
+            </a:prstGeom>
+            <a:noFill/>
+            <a:ln>
+              <a:noFill/>
+            </a:ln>
+          </p:spPr>
+          <p:txBody>
+            <a:bodyPr spcFirstLastPara="1" wrap="square" lIns="50800" tIns="50800" rIns="50800" bIns="50800" anchor="ctr" anchorCtr="0">
+              <a:noAutofit/>
+            </a:bodyPr>
+            <a:lstStyle/>
+            <a:p>
+              <a:pPr marL="0" marR="0" lvl="0" indent="0" algn="ctr" rtl="0">
+                <a:lnSpc>
+                  <a:spcPct val="113000"/>
+                </a:lnSpc>
+                <a:spcBef>
+                  <a:spcPts val="0"/>
+                </a:spcBef>
+                <a:spcAft>
+                  <a:spcPts val="0"/>
+                </a:spcAft>
+                <a:buNone/>
+              </a:pPr>
+              <a:r>
+                <a:rPr lang="es-ES_tradnl" sz="5000" b="1" i="0" u="none" strike="noStrike" cap="none" dirty="0">
+                  <a:solidFill>
+                    <a:srgbClr val="004AAD"/>
+                  </a:solidFill>
+                  <a:latin typeface="Poppins Black"/>
+                  <a:ea typeface="Poppins Black"/>
+                  <a:cs typeface="Poppins Black"/>
+                  <a:sym typeface="Poppins Black"/>
+                </a:rPr>
+                <a:t>3</a:t>
+              </a:r>
+              <a:endParaRPr lang="es-ES_tradnl" dirty="0"/>
+            </a:p>
+          </p:txBody>
+        </p:sp>
+      </p:grpSp>
+      <p:sp>
+        <p:nvSpPr>
+          <p:cNvPr id="293" name="Google Shape;293;p23">
+            <a:extLst>
+              <a:ext uri="{FF2B5EF4-FFF2-40B4-BE49-F238E27FC236}">
+                <a16:creationId xmlns:a16="http://schemas.microsoft.com/office/drawing/2014/main" id="{FFFE66FB-28AD-1476-E82E-46A9B8533C7C}"/>
+              </a:ext>
+            </a:extLst>
+          </p:cNvPr>
+          <p:cNvSpPr/>
+          <p:nvPr/>
+        </p:nvSpPr>
+        <p:spPr>
+          <a:xfrm>
+            <a:off x="-1518115" y="5138796"/>
+            <a:ext cx="7760440" cy="6137802"/>
+          </a:xfrm>
+          <a:custGeom>
+            <a:avLst/>
+            <a:gdLst/>
+            <a:ahLst/>
+            <a:cxnLst/>
+            <a:rect l="l" t="t" r="r" b="b"/>
+            <a:pathLst>
+              <a:path w="7760440" h="6137802" extrusionOk="0">
+                <a:moveTo>
+                  <a:pt x="0" y="0"/>
+                </a:moveTo>
+                <a:lnTo>
+                  <a:pt x="7760439" y="0"/>
+                </a:lnTo>
+                <a:lnTo>
+                  <a:pt x="7760439" y="6137802"/>
+                </a:lnTo>
+                <a:lnTo>
+                  <a:pt x="0" y="6137802"/>
+                </a:lnTo>
+                <a:lnTo>
+                  <a:pt x="0" y="0"/>
+                </a:lnTo>
+                <a:close/>
+              </a:path>
+            </a:pathLst>
+          </a:custGeom>
+          <a:blipFill rotWithShape="1">
+            <a:blip r:embed="rId3">
+              <a:alphaModFix/>
+            </a:blip>
+            <a:stretch>
+              <a:fillRect/>
+            </a:stretch>
+          </a:blipFill>
+          <a:ln>
+            <a:noFill/>
+          </a:ln>
+        </p:spPr>
+        <p:txBody>
+          <a:bodyPr/>
+          <a:lstStyle/>
+          <a:p>
+            <a:endParaRPr lang="es-ES_tradnl" dirty="0"/>
+          </a:p>
+        </p:txBody>
+      </p:sp>
+      <p:sp>
+        <p:nvSpPr>
+          <p:cNvPr id="294" name="Google Shape;294;p23">
+            <a:extLst>
+              <a:ext uri="{FF2B5EF4-FFF2-40B4-BE49-F238E27FC236}">
+                <a16:creationId xmlns:a16="http://schemas.microsoft.com/office/drawing/2014/main" id="{4335AF22-10B3-0245-6A1E-A7044BFDA00C}"/>
+              </a:ext>
+            </a:extLst>
+          </p:cNvPr>
+          <p:cNvSpPr txBox="1"/>
+          <p:nvPr/>
+        </p:nvSpPr>
+        <p:spPr>
+          <a:xfrm>
+            <a:off x="1357220" y="2067019"/>
+            <a:ext cx="5989500" cy="2011513"/>
+          </a:xfrm>
+          <a:prstGeom prst="rect">
+            <a:avLst/>
+          </a:prstGeom>
+          <a:noFill/>
+          <a:ln>
+            <a:noFill/>
+          </a:ln>
+        </p:spPr>
+        <p:txBody>
+          <a:bodyPr spcFirstLastPara="1" wrap="square" lIns="0" tIns="0" rIns="0" bIns="0" anchor="t" anchorCtr="0">
+            <a:spAutoFit/>
+          </a:bodyPr>
+          <a:lstStyle/>
+          <a:p>
+            <a:pPr marL="0" marR="0" lvl="0" indent="0" algn="l" rtl="0">
+              <a:lnSpc>
+                <a:spcPct val="121055"/>
+              </a:lnSpc>
+              <a:spcBef>
+                <a:spcPts val="0"/>
+              </a:spcBef>
+              <a:spcAft>
+                <a:spcPts val="0"/>
+              </a:spcAft>
+              <a:buNone/>
+            </a:pPr>
+            <a:r>
+              <a:rPr lang="es-ES_tradnl" sz="3601" b="1" dirty="0">
+                <a:solidFill>
+                  <a:srgbClr val="004AAD"/>
+                </a:solidFill>
+                <a:latin typeface="Poppins"/>
+                <a:ea typeface="Poppins"/>
+                <a:cs typeface="Poppins"/>
+                <a:sym typeface="Poppins"/>
+              </a:rPr>
+              <a:t>ESTRATEGIAS DE FORMACIÓNES ORGANIZACIONALES</a:t>
+            </a:r>
+            <a:endParaRPr lang="es-ES_tradnl" dirty="0"/>
+          </a:p>
+        </p:txBody>
+      </p:sp>
+      <p:sp>
+        <p:nvSpPr>
+          <p:cNvPr id="298" name="Google Shape;298;p23">
+            <a:extLst>
+              <a:ext uri="{FF2B5EF4-FFF2-40B4-BE49-F238E27FC236}">
+                <a16:creationId xmlns:a16="http://schemas.microsoft.com/office/drawing/2014/main" id="{186A78B8-C8E3-38CC-833A-72225D4995D6}"/>
+              </a:ext>
+            </a:extLst>
+          </p:cNvPr>
+          <p:cNvSpPr txBox="1"/>
+          <p:nvPr/>
+        </p:nvSpPr>
+        <p:spPr>
+          <a:xfrm>
+            <a:off x="10393716" y="2031037"/>
+            <a:ext cx="5989502" cy="878959"/>
+          </a:xfrm>
+          <a:prstGeom prst="rect">
+            <a:avLst/>
+          </a:prstGeom>
+          <a:noFill/>
+          <a:ln>
+            <a:noFill/>
+          </a:ln>
+        </p:spPr>
+        <p:txBody>
+          <a:bodyPr spcFirstLastPara="1" wrap="square" lIns="0" tIns="0" rIns="0" bIns="0" anchor="t" anchorCtr="0">
+            <a:spAutoFit/>
+          </a:bodyPr>
+          <a:lstStyle/>
+          <a:p>
+            <a:pPr marL="0" marR="0" lvl="1" indent="0" algn="l" rtl="0">
+              <a:lnSpc>
+                <a:spcPct val="119000"/>
+              </a:lnSpc>
+              <a:spcBef>
+                <a:spcPts val="0"/>
+              </a:spcBef>
+              <a:spcAft>
+                <a:spcPts val="0"/>
+              </a:spcAft>
+              <a:buNone/>
+            </a:pPr>
+            <a:r>
+              <a:rPr lang="es-ES_tradnl" sz="2400" b="1" i="0" u="none" strike="noStrike" cap="none" dirty="0">
+                <a:solidFill>
+                  <a:srgbClr val="004AAD"/>
+                </a:solidFill>
+                <a:latin typeface="Poppins"/>
+                <a:ea typeface="Poppins"/>
+                <a:cs typeface="Poppins"/>
+                <a:sym typeface="Poppins"/>
+              </a:rPr>
+              <a:t>APLANAMIENTO DE LA CURVA DE TRABAJO</a:t>
+            </a:r>
+            <a:endParaRPr lang="es-ES_tradnl" dirty="0"/>
+          </a:p>
+        </p:txBody>
+      </p:sp>
+      <p:sp>
+        <p:nvSpPr>
+          <p:cNvPr id="301" name="Google Shape;301;p23">
+            <a:extLst>
+              <a:ext uri="{FF2B5EF4-FFF2-40B4-BE49-F238E27FC236}">
+                <a16:creationId xmlns:a16="http://schemas.microsoft.com/office/drawing/2014/main" id="{0EB0886F-3824-8864-5A8D-63D9B2DF248C}"/>
+              </a:ext>
+            </a:extLst>
+          </p:cNvPr>
+          <p:cNvSpPr txBox="1"/>
+          <p:nvPr/>
+        </p:nvSpPr>
+        <p:spPr>
+          <a:xfrm>
+            <a:off x="10393716" y="4021652"/>
+            <a:ext cx="5989502" cy="439479"/>
+          </a:xfrm>
+          <a:prstGeom prst="rect">
+            <a:avLst/>
+          </a:prstGeom>
+          <a:noFill/>
+          <a:ln>
+            <a:noFill/>
+          </a:ln>
+        </p:spPr>
+        <p:txBody>
+          <a:bodyPr spcFirstLastPara="1" wrap="square" lIns="0" tIns="0" rIns="0" bIns="0" anchor="t" anchorCtr="0">
+            <a:spAutoFit/>
+          </a:bodyPr>
+          <a:lstStyle/>
+          <a:p>
+            <a:pPr marL="0" marR="0" lvl="1" indent="0" algn="l" rtl="0">
+              <a:lnSpc>
+                <a:spcPct val="119000"/>
+              </a:lnSpc>
+              <a:spcBef>
+                <a:spcPts val="0"/>
+              </a:spcBef>
+              <a:spcAft>
+                <a:spcPts val="0"/>
+              </a:spcAft>
+              <a:buNone/>
+            </a:pPr>
+            <a:r>
+              <a:rPr lang="es-ES_tradnl" sz="2400" b="1" i="0" u="none" strike="noStrike" cap="none" dirty="0">
+                <a:solidFill>
+                  <a:srgbClr val="004AAD"/>
+                </a:solidFill>
+                <a:latin typeface="Poppins"/>
+                <a:ea typeface="Poppins"/>
+                <a:cs typeface="Poppins"/>
+                <a:sym typeface="Poppins"/>
+              </a:rPr>
+              <a:t>PLANIFICACIÓN ESTACIONAL</a:t>
+            </a:r>
+            <a:endParaRPr lang="es-ES_tradnl" dirty="0"/>
+          </a:p>
+        </p:txBody>
+      </p:sp>
+      <p:sp>
+        <p:nvSpPr>
+          <p:cNvPr id="304" name="Google Shape;304;p23">
+            <a:extLst>
+              <a:ext uri="{FF2B5EF4-FFF2-40B4-BE49-F238E27FC236}">
+                <a16:creationId xmlns:a16="http://schemas.microsoft.com/office/drawing/2014/main" id="{D81F7156-2EA7-892B-78D9-A6A96CEF51FB}"/>
+              </a:ext>
+            </a:extLst>
+          </p:cNvPr>
+          <p:cNvSpPr txBox="1"/>
+          <p:nvPr/>
+        </p:nvSpPr>
+        <p:spPr>
+          <a:xfrm>
+            <a:off x="10393716" y="6053371"/>
+            <a:ext cx="5989502" cy="439479"/>
+          </a:xfrm>
+          <a:prstGeom prst="rect">
+            <a:avLst/>
+          </a:prstGeom>
+          <a:noFill/>
+          <a:ln>
+            <a:noFill/>
+          </a:ln>
+        </p:spPr>
+        <p:txBody>
+          <a:bodyPr spcFirstLastPara="1" wrap="square" lIns="0" tIns="0" rIns="0" bIns="0" anchor="t" anchorCtr="0">
+            <a:spAutoFit/>
+          </a:bodyPr>
+          <a:lstStyle/>
+          <a:p>
+            <a:pPr marL="0" marR="0" lvl="1" indent="0" algn="l" rtl="0">
+              <a:lnSpc>
+                <a:spcPct val="119000"/>
+              </a:lnSpc>
+              <a:spcBef>
+                <a:spcPts val="0"/>
+              </a:spcBef>
+              <a:spcAft>
+                <a:spcPts val="0"/>
+              </a:spcAft>
+              <a:buNone/>
+            </a:pPr>
+            <a:r>
+              <a:rPr lang="es-ES_tradnl" sz="2400" b="1" i="0" u="none" strike="noStrike" cap="none" dirty="0">
+                <a:solidFill>
+                  <a:srgbClr val="004AAD"/>
+                </a:solidFill>
+                <a:latin typeface="Poppins"/>
+                <a:ea typeface="Poppins"/>
+                <a:cs typeface="Poppins"/>
+                <a:sym typeface="Poppins"/>
+              </a:rPr>
+              <a:t>DESMITIFICACIÓN DE LA ANTIGÜEDAD</a:t>
+            </a:r>
+            <a:endParaRPr lang="es-ES_tradnl" dirty="0"/>
+          </a:p>
+        </p:txBody>
+      </p:sp>
+      <p:grpSp>
+        <p:nvGrpSpPr>
+          <p:cNvPr id="308" name="Google Shape;308;p23">
+            <a:extLst>
+              <a:ext uri="{FF2B5EF4-FFF2-40B4-BE49-F238E27FC236}">
+                <a16:creationId xmlns:a16="http://schemas.microsoft.com/office/drawing/2014/main" id="{B3C6E7B3-9D31-55CD-CA26-CF5430B1F92E}"/>
+              </a:ext>
+            </a:extLst>
+          </p:cNvPr>
+          <p:cNvGrpSpPr/>
+          <p:nvPr/>
+        </p:nvGrpSpPr>
+        <p:grpSpPr>
+          <a:xfrm>
+            <a:off x="0" y="5"/>
+            <a:ext cx="2163413" cy="1886345"/>
+            <a:chOff x="12784175" y="3675030"/>
+            <a:chExt cx="2163413" cy="1886345"/>
+          </a:xfrm>
+        </p:grpSpPr>
+        <p:sp>
+          <p:nvSpPr>
+            <p:cNvPr id="309" name="Google Shape;309;p23">
+              <a:extLst>
+                <a:ext uri="{FF2B5EF4-FFF2-40B4-BE49-F238E27FC236}">
+                  <a16:creationId xmlns:a16="http://schemas.microsoft.com/office/drawing/2014/main" id="{22DC04A7-9158-BB4E-F48C-FFFCB3796275}"/>
+                </a:ext>
+              </a:extLst>
+            </p:cNvPr>
+            <p:cNvSpPr txBox="1"/>
+            <p:nvPr/>
+          </p:nvSpPr>
+          <p:spPr>
+            <a:xfrm rot="1830973">
+              <a:off x="12805773" y="4425496"/>
+              <a:ext cx="2081405" cy="652657"/>
+            </a:xfrm>
+            <a:prstGeom prst="rect">
+              <a:avLst/>
+            </a:prstGeom>
+            <a:noFill/>
+            <a:ln>
+              <a:noFill/>
+            </a:ln>
+          </p:spPr>
+          <p:txBody>
+            <a:bodyPr spcFirstLastPara="1" wrap="square" lIns="91425" tIns="91425" rIns="91425" bIns="91425" anchor="t" anchorCtr="0">
+              <a:noAutofit/>
+            </a:bodyPr>
+            <a:lstStyle/>
+            <a:p>
+              <a:pPr marL="0" lvl="0" indent="0" algn="l" rtl="0">
+                <a:spcBef>
+                  <a:spcPts val="0"/>
+                </a:spcBef>
+                <a:spcAft>
+                  <a:spcPts val="0"/>
+                </a:spcAft>
+                <a:buNone/>
+              </a:pPr>
+              <a:r>
+                <a:rPr lang="es-ES_tradnl" sz="2300" b="1" i="1" dirty="0">
+                  <a:solidFill>
+                    <a:srgbClr val="E69138"/>
+                  </a:solidFill>
+                  <a:latin typeface="Calibri"/>
+                  <a:ea typeface="Calibri"/>
+                  <a:cs typeface="Calibri"/>
+                  <a:sym typeface="Calibri"/>
+                </a:rPr>
+                <a:t>RAPID EXPRESS </a:t>
+              </a:r>
+            </a:p>
+          </p:txBody>
+        </p:sp>
+        <p:sp>
+          <p:nvSpPr>
+            <p:cNvPr id="310" name="Google Shape;310;p23">
+              <a:extLst>
+                <a:ext uri="{FF2B5EF4-FFF2-40B4-BE49-F238E27FC236}">
+                  <a16:creationId xmlns:a16="http://schemas.microsoft.com/office/drawing/2014/main" id="{61FD26A3-7C65-7F64-5E8A-A0DC8DCC11F4}"/>
+                </a:ext>
+              </a:extLst>
+            </p:cNvPr>
+            <p:cNvSpPr/>
+            <p:nvPr/>
+          </p:nvSpPr>
+          <p:spPr>
+            <a:xfrm>
+              <a:off x="13335203" y="3675030"/>
+              <a:ext cx="1612385" cy="1275250"/>
+            </a:xfrm>
+            <a:custGeom>
+              <a:avLst/>
+              <a:gdLst/>
+              <a:ahLst/>
+              <a:cxnLst/>
+              <a:rect l="l" t="t" r="r" b="b"/>
+              <a:pathLst>
+                <a:path w="1612385" h="1275250" extrusionOk="0">
+                  <a:moveTo>
+                    <a:pt x="0" y="0"/>
+                  </a:moveTo>
+                  <a:lnTo>
+                    <a:pt x="1612384" y="0"/>
+                  </a:lnTo>
+                  <a:lnTo>
+                    <a:pt x="1612384" y="1275249"/>
+                  </a:lnTo>
+                  <a:lnTo>
+                    <a:pt x="0" y="1275249"/>
+                  </a:lnTo>
+                  <a:lnTo>
+                    <a:pt x="0" y="0"/>
+                  </a:lnTo>
+                  <a:close/>
+                </a:path>
+              </a:pathLst>
+            </a:custGeom>
+            <a:blipFill rotWithShape="1">
+              <a:blip r:embed="rId4">
+                <a:alphaModFix/>
+              </a:blip>
+              <a:stretch>
+                <a:fillRect/>
+              </a:stretch>
+            </a:blipFill>
+            <a:ln>
+              <a:noFill/>
+            </a:ln>
+          </p:spPr>
+          <p:txBody>
+            <a:bodyPr/>
+            <a:lstStyle/>
+            <a:p>
+              <a:endParaRPr lang="es-ES_tradnl" dirty="0"/>
+            </a:p>
+          </p:txBody>
+        </p:sp>
+      </p:grpSp>
+      <p:sp>
+        <p:nvSpPr>
+          <p:cNvPr id="20" name="Google Shape;162;p18">
+            <a:extLst>
+              <a:ext uri="{FF2B5EF4-FFF2-40B4-BE49-F238E27FC236}">
+                <a16:creationId xmlns:a16="http://schemas.microsoft.com/office/drawing/2014/main" id="{A239F5B4-C207-4A51-AE2F-F621521A6B0F}"/>
+              </a:ext>
+            </a:extLst>
+          </p:cNvPr>
+          <p:cNvSpPr/>
+          <p:nvPr/>
+        </p:nvSpPr>
+        <p:spPr>
+          <a:xfrm>
+            <a:off x="14226839" y="7928731"/>
+            <a:ext cx="2156379" cy="1936821"/>
+          </a:xfrm>
+          <a:custGeom>
+            <a:avLst/>
+            <a:gdLst/>
+            <a:ahLst/>
+            <a:cxnLst/>
+            <a:rect l="l" t="t" r="r" b="b"/>
+            <a:pathLst>
+              <a:path w="4469180" h="4014136" extrusionOk="0">
+                <a:moveTo>
+                  <a:pt x="0" y="0"/>
+                </a:moveTo>
+                <a:lnTo>
+                  <a:pt x="4469180" y="0"/>
+                </a:lnTo>
+                <a:lnTo>
+                  <a:pt x="4469180" y="4014136"/>
+                </a:lnTo>
+                <a:lnTo>
+                  <a:pt x="0" y="4014136"/>
+                </a:lnTo>
+                <a:lnTo>
+                  <a:pt x="0" y="0"/>
+                </a:lnTo>
+                <a:close/>
+              </a:path>
+            </a:pathLst>
+          </a:custGeom>
+          <a:blipFill rotWithShape="1">
+            <a:blip r:embed="rId5">
+              <a:alphaModFix/>
+            </a:blip>
+            <a:stretch>
+              <a:fillRect/>
+            </a:stretch>
+          </a:blipFill>
+          <a:ln>
+            <a:noFill/>
+          </a:ln>
+        </p:spPr>
+        <p:txBody>
+          <a:bodyPr/>
+          <a:lstStyle/>
+          <a:p>
+            <a:endParaRPr lang="es-ES_tradnl" dirty="0"/>
+          </a:p>
+        </p:txBody>
+      </p:sp>
+    </p:spTree>
+    <p:extLst>
+      <p:ext uri="{BB962C8B-B14F-4D97-AF65-F5344CB8AC3E}">
+        <p14:creationId xmlns:p14="http://schemas.microsoft.com/office/powerpoint/2010/main" val="1549375143"/>
+      </p:ext>
+    </p:extLst>
+  </p:cSld>
+  <p:clrMapOvr>
+    <a:masterClrMapping/>
+  </p:clrMapOvr>
+</p:sld>
+</file>
+
+<file path=ppt/slides/slide13.xml><?xml version="1.0" encoding="utf-8"?>
 <p:sld xmlns:a="http://schemas.openxmlformats.org/drawingml/2006/main" xmlns:r="http://schemas.openxmlformats.org/officeDocument/2006/relationships" xmlns:p="http://schemas.openxmlformats.org/presentationml/2006/main">
   <p:cSld>
     <p:bg>
@@ -15713,7 +16729,7 @@
 </p:sld>
 </file>
 
-<file path=ppt/slides/slide13.xml><?xml version="1.0" encoding="utf-8"?>
+<file path=ppt/slides/slide14.xml><?xml version="1.0" encoding="utf-8"?>
 <p:sld xmlns:a="http://schemas.openxmlformats.org/drawingml/2006/main" xmlns:r="http://schemas.openxmlformats.org/officeDocument/2006/relationships" xmlns:p="http://schemas.openxmlformats.org/presentationml/2006/main">
   <p:cSld>
     <p:bg>
@@ -16957,7 +17973,7 @@
 </p:sld>
 </file>
 
-<file path=ppt/slides/slide14.xml><?xml version="1.0" encoding="utf-8"?>
+<file path=ppt/slides/slide15.xml><?xml version="1.0" encoding="utf-8"?>
 <p:sld xmlns:a="http://schemas.openxmlformats.org/drawingml/2006/main" xmlns:r="http://schemas.openxmlformats.org/officeDocument/2006/relationships" xmlns:p="http://schemas.openxmlformats.org/presentationml/2006/main">
   <p:cSld>
     <p:bg>
@@ -17958,7 +18974,7 @@
 </p:sld>
 </file>
 
-<file path=ppt/slides/slide15.xml><?xml version="1.0" encoding="utf-8"?>
+<file path=ppt/slides/slide16.xml><?xml version="1.0" encoding="utf-8"?>
 <p:sld xmlns:a="http://schemas.openxmlformats.org/drawingml/2006/main" xmlns:r="http://schemas.openxmlformats.org/officeDocument/2006/relationships" xmlns:p="http://schemas.openxmlformats.org/presentationml/2006/main">
   <p:cSld>
     <p:bg>
@@ -18295,7 +19311,7 @@
 </p:sld>
 </file>
 
-<file path=ppt/slides/slide16.xml><?xml version="1.0" encoding="utf-8"?>
+<file path=ppt/slides/slide17.xml><?xml version="1.0" encoding="utf-8"?>
 <p:sld xmlns:a="http://schemas.openxmlformats.org/drawingml/2006/main" xmlns:r="http://schemas.openxmlformats.org/officeDocument/2006/relationships" xmlns:p="http://schemas.openxmlformats.org/presentationml/2006/main">
   <p:cSld>
     <p:bg>
@@ -19121,7 +20137,7 @@
 </p:sld>
 </file>
 
-<file path=ppt/slides/slide17.xml><?xml version="1.0" encoding="utf-8"?>
+<file path=ppt/slides/slide18.xml><?xml version="1.0" encoding="utf-8"?>
 <p:sld xmlns:a="http://schemas.openxmlformats.org/drawingml/2006/main" xmlns:r="http://schemas.openxmlformats.org/officeDocument/2006/relationships" xmlns:p="http://schemas.openxmlformats.org/presentationml/2006/main">
   <p:cSld>
     <p:bg>
@@ -21161,7 +22177,7 @@
 </p:sld>
 </file>
 
-<file path=ppt/slides/slide18.xml><?xml version="1.0" encoding="utf-8"?>
+<file path=ppt/slides/slide19.xml><?xml version="1.0" encoding="utf-8"?>
 <p:sld xmlns:a="http://schemas.openxmlformats.org/drawingml/2006/main" xmlns:r="http://schemas.openxmlformats.org/officeDocument/2006/relationships" xmlns:p="http://schemas.openxmlformats.org/presentationml/2006/main">
   <p:cSld>
     <p:bg>
@@ -23292,980 +24308,6 @@
     <p:extLst>
       <p:ext uri="{BB962C8B-B14F-4D97-AF65-F5344CB8AC3E}">
         <p14:creationId xmlns:p14="http://schemas.microsoft.com/office/powerpoint/2010/main" val="3044485445"/>
-      </p:ext>
-    </p:extLst>
-  </p:cSld>
-  <p:clrMapOvr>
-    <a:masterClrMapping/>
-  </p:clrMapOvr>
-</p:sld>
-</file>
-
-<file path=ppt/slides/slide19.xml><?xml version="1.0" encoding="utf-8"?>
-<p:sld xmlns:a="http://schemas.openxmlformats.org/drawingml/2006/main" xmlns:r="http://schemas.openxmlformats.org/officeDocument/2006/relationships" xmlns:p="http://schemas.openxmlformats.org/presentationml/2006/main">
-  <p:cSld>
-    <p:bg>
-      <p:bgPr>
-        <a:solidFill>
-          <a:srgbClr val="E0E9F9"/>
-        </a:solidFill>
-        <a:effectLst/>
-      </p:bgPr>
-    </p:bg>
-    <p:spTree>
-      <p:nvGrpSpPr>
-        <p:cNvPr id="1" name="Shape 280">
-          <a:extLst>
-            <a:ext uri="{FF2B5EF4-FFF2-40B4-BE49-F238E27FC236}">
-              <a16:creationId xmlns:a16="http://schemas.microsoft.com/office/drawing/2014/main" id="{9CF05CD1-42CF-1415-2507-014F0D5DAD6D}"/>
-            </a:ext>
-          </a:extLst>
-        </p:cNvPr>
-        <p:cNvGrpSpPr/>
-        <p:nvPr/>
-      </p:nvGrpSpPr>
-      <p:grpSpPr>
-        <a:xfrm>
-          <a:off x="0" y="0"/>
-          <a:ext cx="0" cy="0"/>
-          <a:chOff x="0" y="0"/>
-          <a:chExt cx="0" cy="0"/>
-        </a:xfrm>
-      </p:grpSpPr>
-      <p:grpSp>
-        <p:nvGrpSpPr>
-          <p:cNvPr id="281" name="Google Shape;281;p23">
-            <a:extLst>
-              <a:ext uri="{FF2B5EF4-FFF2-40B4-BE49-F238E27FC236}">
-                <a16:creationId xmlns:a16="http://schemas.microsoft.com/office/drawing/2014/main" id="{FBD2D488-777B-F881-321D-7414A6F7B18A}"/>
-              </a:ext>
-            </a:extLst>
-          </p:cNvPr>
-          <p:cNvGrpSpPr/>
-          <p:nvPr/>
-        </p:nvGrpSpPr>
-        <p:grpSpPr>
-          <a:xfrm>
-            <a:off x="8647101" y="1554020"/>
-            <a:ext cx="1382928" cy="1389712"/>
-            <a:chOff x="0" y="-9525"/>
-            <a:chExt cx="963809" cy="968537"/>
-          </a:xfrm>
-        </p:grpSpPr>
-        <p:sp>
-          <p:nvSpPr>
-            <p:cNvPr id="282" name="Google Shape;282;p23">
-              <a:extLst>
-                <a:ext uri="{FF2B5EF4-FFF2-40B4-BE49-F238E27FC236}">
-                  <a16:creationId xmlns:a16="http://schemas.microsoft.com/office/drawing/2014/main" id="{0904FE46-466E-A0FE-64A7-933E7269DDAC}"/>
-                </a:ext>
-              </a:extLst>
-            </p:cNvPr>
-            <p:cNvSpPr/>
-            <p:nvPr/>
-          </p:nvSpPr>
-          <p:spPr>
-            <a:xfrm>
-              <a:off x="0" y="0"/>
-              <a:ext cx="963809" cy="959012"/>
-            </a:xfrm>
-            <a:custGeom>
-              <a:avLst/>
-              <a:gdLst/>
-              <a:ahLst/>
-              <a:cxnLst/>
-              <a:rect l="l" t="t" r="r" b="b"/>
-              <a:pathLst>
-                <a:path w="963809" h="959012" extrusionOk="0">
-                  <a:moveTo>
-                    <a:pt x="0" y="0"/>
-                  </a:moveTo>
-                  <a:lnTo>
-                    <a:pt x="963809" y="0"/>
-                  </a:lnTo>
-                  <a:lnTo>
-                    <a:pt x="963809" y="959012"/>
-                  </a:lnTo>
-                  <a:lnTo>
-                    <a:pt x="0" y="959012"/>
-                  </a:lnTo>
-                  <a:close/>
-                </a:path>
-              </a:pathLst>
-            </a:custGeom>
-            <a:solidFill>
-              <a:srgbClr val="FFFFFF"/>
-            </a:solidFill>
-            <a:ln w="28575" cap="sq" cmpd="sng">
-              <a:solidFill>
-                <a:srgbClr val="004AAD"/>
-              </a:solidFill>
-              <a:prstDash val="solid"/>
-              <a:miter lim="8000"/>
-              <a:headEnd type="none" w="sm" len="sm"/>
-              <a:tailEnd type="none" w="sm" len="sm"/>
-            </a:ln>
-          </p:spPr>
-          <p:txBody>
-            <a:bodyPr/>
-            <a:lstStyle/>
-            <a:p>
-              <a:endParaRPr lang="es-ES_tradnl" dirty="0"/>
-            </a:p>
-          </p:txBody>
-        </p:sp>
-        <p:sp>
-          <p:nvSpPr>
-            <p:cNvPr id="283" name="Google Shape;283;p23">
-              <a:extLst>
-                <a:ext uri="{FF2B5EF4-FFF2-40B4-BE49-F238E27FC236}">
-                  <a16:creationId xmlns:a16="http://schemas.microsoft.com/office/drawing/2014/main" id="{35B35C79-17F9-73C2-E425-160AB7E1FED4}"/>
-                </a:ext>
-              </a:extLst>
-            </p:cNvPr>
-            <p:cNvSpPr txBox="1"/>
-            <p:nvPr/>
-          </p:nvSpPr>
-          <p:spPr>
-            <a:xfrm>
-              <a:off x="0" y="-9525"/>
-              <a:ext cx="963809" cy="968537"/>
-            </a:xfrm>
-            <a:prstGeom prst="rect">
-              <a:avLst/>
-            </a:prstGeom>
-            <a:noFill/>
-            <a:ln>
-              <a:noFill/>
-            </a:ln>
-          </p:spPr>
-          <p:txBody>
-            <a:bodyPr spcFirstLastPara="1" wrap="square" lIns="50800" tIns="50800" rIns="50800" bIns="50800" anchor="ctr" anchorCtr="0">
-              <a:noAutofit/>
-            </a:bodyPr>
-            <a:lstStyle/>
-            <a:p>
-              <a:pPr marL="0" marR="0" lvl="0" indent="0" algn="ctr" rtl="0">
-                <a:lnSpc>
-                  <a:spcPct val="113000"/>
-                </a:lnSpc>
-                <a:spcBef>
-                  <a:spcPts val="0"/>
-                </a:spcBef>
-                <a:spcAft>
-                  <a:spcPts val="0"/>
-                </a:spcAft>
-                <a:buNone/>
-              </a:pPr>
-              <a:r>
-                <a:rPr lang="es-ES_tradnl" sz="5000" b="1" i="0" u="none" strike="noStrike" cap="none" dirty="0">
-                  <a:solidFill>
-                    <a:srgbClr val="004AAD"/>
-                  </a:solidFill>
-                  <a:latin typeface="Poppins Black"/>
-                  <a:ea typeface="Poppins Black"/>
-                  <a:cs typeface="Poppins Black"/>
-                  <a:sym typeface="Poppins Black"/>
-                </a:rPr>
-                <a:t>1</a:t>
-              </a:r>
-              <a:endParaRPr lang="es-ES_tradnl" dirty="0"/>
-            </a:p>
-          </p:txBody>
-        </p:sp>
-      </p:grpSp>
-      <p:grpSp>
-        <p:nvGrpSpPr>
-          <p:cNvPr id="284" name="Google Shape;284;p23">
-            <a:extLst>
-              <a:ext uri="{FF2B5EF4-FFF2-40B4-BE49-F238E27FC236}">
-                <a16:creationId xmlns:a16="http://schemas.microsoft.com/office/drawing/2014/main" id="{D4DCD8B5-19F0-0D56-7A66-19EBF123EFC1}"/>
-              </a:ext>
-            </a:extLst>
-          </p:cNvPr>
-          <p:cNvGrpSpPr/>
-          <p:nvPr/>
-        </p:nvGrpSpPr>
-        <p:grpSpPr>
-          <a:xfrm>
-            <a:off x="8647101" y="3546536"/>
-            <a:ext cx="1382928" cy="1389712"/>
-            <a:chOff x="0" y="-9525"/>
-            <a:chExt cx="963809" cy="968537"/>
-          </a:xfrm>
-        </p:grpSpPr>
-        <p:sp>
-          <p:nvSpPr>
-            <p:cNvPr id="285" name="Google Shape;285;p23">
-              <a:extLst>
-                <a:ext uri="{FF2B5EF4-FFF2-40B4-BE49-F238E27FC236}">
-                  <a16:creationId xmlns:a16="http://schemas.microsoft.com/office/drawing/2014/main" id="{D9191FA8-EB35-68D8-CBB9-8124915F3660}"/>
-                </a:ext>
-              </a:extLst>
-            </p:cNvPr>
-            <p:cNvSpPr/>
-            <p:nvPr/>
-          </p:nvSpPr>
-          <p:spPr>
-            <a:xfrm>
-              <a:off x="0" y="0"/>
-              <a:ext cx="963809" cy="959012"/>
-            </a:xfrm>
-            <a:custGeom>
-              <a:avLst/>
-              <a:gdLst/>
-              <a:ahLst/>
-              <a:cxnLst/>
-              <a:rect l="l" t="t" r="r" b="b"/>
-              <a:pathLst>
-                <a:path w="963809" h="959012" extrusionOk="0">
-                  <a:moveTo>
-                    <a:pt x="0" y="0"/>
-                  </a:moveTo>
-                  <a:lnTo>
-                    <a:pt x="963809" y="0"/>
-                  </a:lnTo>
-                  <a:lnTo>
-                    <a:pt x="963809" y="959012"/>
-                  </a:lnTo>
-                  <a:lnTo>
-                    <a:pt x="0" y="959012"/>
-                  </a:lnTo>
-                  <a:close/>
-                </a:path>
-              </a:pathLst>
-            </a:custGeom>
-            <a:solidFill>
-              <a:srgbClr val="FFFFFF"/>
-            </a:solidFill>
-            <a:ln w="28575" cap="sq" cmpd="sng">
-              <a:solidFill>
-                <a:srgbClr val="004AAD"/>
-              </a:solidFill>
-              <a:prstDash val="solid"/>
-              <a:miter lim="8000"/>
-              <a:headEnd type="none" w="sm" len="sm"/>
-              <a:tailEnd type="none" w="sm" len="sm"/>
-            </a:ln>
-          </p:spPr>
-          <p:txBody>
-            <a:bodyPr/>
-            <a:lstStyle/>
-            <a:p>
-              <a:endParaRPr lang="es-ES_tradnl" dirty="0"/>
-            </a:p>
-          </p:txBody>
-        </p:sp>
-        <p:sp>
-          <p:nvSpPr>
-            <p:cNvPr id="286" name="Google Shape;286;p23">
-              <a:extLst>
-                <a:ext uri="{FF2B5EF4-FFF2-40B4-BE49-F238E27FC236}">
-                  <a16:creationId xmlns:a16="http://schemas.microsoft.com/office/drawing/2014/main" id="{5D2F282B-5CFE-6353-0E3A-8E7AC934BA03}"/>
-                </a:ext>
-              </a:extLst>
-            </p:cNvPr>
-            <p:cNvSpPr txBox="1"/>
-            <p:nvPr/>
-          </p:nvSpPr>
-          <p:spPr>
-            <a:xfrm>
-              <a:off x="0" y="-9525"/>
-              <a:ext cx="963809" cy="968537"/>
-            </a:xfrm>
-            <a:prstGeom prst="rect">
-              <a:avLst/>
-            </a:prstGeom>
-            <a:noFill/>
-            <a:ln>
-              <a:noFill/>
-            </a:ln>
-          </p:spPr>
-          <p:txBody>
-            <a:bodyPr spcFirstLastPara="1" wrap="square" lIns="50800" tIns="50800" rIns="50800" bIns="50800" anchor="ctr" anchorCtr="0">
-              <a:noAutofit/>
-            </a:bodyPr>
-            <a:lstStyle/>
-            <a:p>
-              <a:pPr marL="0" marR="0" lvl="0" indent="0" algn="ctr" rtl="0">
-                <a:lnSpc>
-                  <a:spcPct val="113000"/>
-                </a:lnSpc>
-                <a:spcBef>
-                  <a:spcPts val="0"/>
-                </a:spcBef>
-                <a:spcAft>
-                  <a:spcPts val="0"/>
-                </a:spcAft>
-                <a:buNone/>
-              </a:pPr>
-              <a:r>
-                <a:rPr lang="es-ES_tradnl" sz="5000" b="1" i="0" u="none" strike="noStrike" cap="none" dirty="0">
-                  <a:solidFill>
-                    <a:srgbClr val="004AAD"/>
-                  </a:solidFill>
-                  <a:latin typeface="Poppins Black"/>
-                  <a:ea typeface="Poppins Black"/>
-                  <a:cs typeface="Poppins Black"/>
-                  <a:sym typeface="Poppins Black"/>
-                </a:rPr>
-                <a:t>2</a:t>
-              </a:r>
-              <a:endParaRPr lang="es-ES_tradnl" dirty="0"/>
-            </a:p>
-          </p:txBody>
-        </p:sp>
-      </p:grpSp>
-      <p:grpSp>
-        <p:nvGrpSpPr>
-          <p:cNvPr id="287" name="Google Shape;287;p23">
-            <a:extLst>
-              <a:ext uri="{FF2B5EF4-FFF2-40B4-BE49-F238E27FC236}">
-                <a16:creationId xmlns:a16="http://schemas.microsoft.com/office/drawing/2014/main" id="{736B4F0E-699C-B9C6-CB17-B4A44D8566BE}"/>
-              </a:ext>
-            </a:extLst>
-          </p:cNvPr>
-          <p:cNvGrpSpPr/>
-          <p:nvPr/>
-        </p:nvGrpSpPr>
-        <p:grpSpPr>
-          <a:xfrm>
-            <a:off x="8647101" y="5578255"/>
-            <a:ext cx="1382928" cy="1389712"/>
-            <a:chOff x="0" y="-9525"/>
-            <a:chExt cx="963809" cy="968537"/>
-          </a:xfrm>
-        </p:grpSpPr>
-        <p:sp>
-          <p:nvSpPr>
-            <p:cNvPr id="288" name="Google Shape;288;p23">
-              <a:extLst>
-                <a:ext uri="{FF2B5EF4-FFF2-40B4-BE49-F238E27FC236}">
-                  <a16:creationId xmlns:a16="http://schemas.microsoft.com/office/drawing/2014/main" id="{534FAD3D-081E-452B-11A8-EF8FC4505649}"/>
-                </a:ext>
-              </a:extLst>
-            </p:cNvPr>
-            <p:cNvSpPr/>
-            <p:nvPr/>
-          </p:nvSpPr>
-          <p:spPr>
-            <a:xfrm>
-              <a:off x="0" y="0"/>
-              <a:ext cx="963809" cy="959012"/>
-            </a:xfrm>
-            <a:custGeom>
-              <a:avLst/>
-              <a:gdLst/>
-              <a:ahLst/>
-              <a:cxnLst/>
-              <a:rect l="l" t="t" r="r" b="b"/>
-              <a:pathLst>
-                <a:path w="963809" h="959012" extrusionOk="0">
-                  <a:moveTo>
-                    <a:pt x="0" y="0"/>
-                  </a:moveTo>
-                  <a:lnTo>
-                    <a:pt x="963809" y="0"/>
-                  </a:lnTo>
-                  <a:lnTo>
-                    <a:pt x="963809" y="959012"/>
-                  </a:lnTo>
-                  <a:lnTo>
-                    <a:pt x="0" y="959012"/>
-                  </a:lnTo>
-                  <a:close/>
-                </a:path>
-              </a:pathLst>
-            </a:custGeom>
-            <a:solidFill>
-              <a:srgbClr val="FFFFFF"/>
-            </a:solidFill>
-            <a:ln w="28575" cap="sq" cmpd="sng">
-              <a:solidFill>
-                <a:srgbClr val="004AAD"/>
-              </a:solidFill>
-              <a:prstDash val="solid"/>
-              <a:miter lim="8000"/>
-              <a:headEnd type="none" w="sm" len="sm"/>
-              <a:tailEnd type="none" w="sm" len="sm"/>
-            </a:ln>
-          </p:spPr>
-          <p:txBody>
-            <a:bodyPr/>
-            <a:lstStyle/>
-            <a:p>
-              <a:endParaRPr lang="es-ES_tradnl" dirty="0"/>
-            </a:p>
-          </p:txBody>
-        </p:sp>
-        <p:sp>
-          <p:nvSpPr>
-            <p:cNvPr id="289" name="Google Shape;289;p23">
-              <a:extLst>
-                <a:ext uri="{FF2B5EF4-FFF2-40B4-BE49-F238E27FC236}">
-                  <a16:creationId xmlns:a16="http://schemas.microsoft.com/office/drawing/2014/main" id="{F1D1B048-040C-1AF5-81F9-0F64D112826F}"/>
-                </a:ext>
-              </a:extLst>
-            </p:cNvPr>
-            <p:cNvSpPr txBox="1"/>
-            <p:nvPr/>
-          </p:nvSpPr>
-          <p:spPr>
-            <a:xfrm>
-              <a:off x="0" y="-9525"/>
-              <a:ext cx="963809" cy="968537"/>
-            </a:xfrm>
-            <a:prstGeom prst="rect">
-              <a:avLst/>
-            </a:prstGeom>
-            <a:noFill/>
-            <a:ln>
-              <a:noFill/>
-            </a:ln>
-          </p:spPr>
-          <p:txBody>
-            <a:bodyPr spcFirstLastPara="1" wrap="square" lIns="50800" tIns="50800" rIns="50800" bIns="50800" anchor="ctr" anchorCtr="0">
-              <a:noAutofit/>
-            </a:bodyPr>
-            <a:lstStyle/>
-            <a:p>
-              <a:pPr marL="0" marR="0" lvl="0" indent="0" algn="ctr" rtl="0">
-                <a:lnSpc>
-                  <a:spcPct val="113000"/>
-                </a:lnSpc>
-                <a:spcBef>
-                  <a:spcPts val="0"/>
-                </a:spcBef>
-                <a:spcAft>
-                  <a:spcPts val="0"/>
-                </a:spcAft>
-                <a:buNone/>
-              </a:pPr>
-              <a:r>
-                <a:rPr lang="es-ES_tradnl" sz="5000" b="1" i="0" u="none" strike="noStrike" cap="none" dirty="0">
-                  <a:solidFill>
-                    <a:srgbClr val="004AAD"/>
-                  </a:solidFill>
-                  <a:latin typeface="Poppins Black"/>
-                  <a:ea typeface="Poppins Black"/>
-                  <a:cs typeface="Poppins Black"/>
-                  <a:sym typeface="Poppins Black"/>
-                </a:rPr>
-                <a:t>3</a:t>
-              </a:r>
-              <a:endParaRPr lang="es-ES_tradnl" dirty="0"/>
-            </a:p>
-          </p:txBody>
-        </p:sp>
-      </p:grpSp>
-      <p:sp>
-        <p:nvSpPr>
-          <p:cNvPr id="293" name="Google Shape;293;p23">
-            <a:extLst>
-              <a:ext uri="{FF2B5EF4-FFF2-40B4-BE49-F238E27FC236}">
-                <a16:creationId xmlns:a16="http://schemas.microsoft.com/office/drawing/2014/main" id="{FFFE66FB-28AD-1476-E82E-46A9B8533C7C}"/>
-              </a:ext>
-            </a:extLst>
-          </p:cNvPr>
-          <p:cNvSpPr/>
-          <p:nvPr/>
-        </p:nvSpPr>
-        <p:spPr>
-          <a:xfrm>
-            <a:off x="-1518115" y="5138796"/>
-            <a:ext cx="7760440" cy="6137802"/>
-          </a:xfrm>
-          <a:custGeom>
-            <a:avLst/>
-            <a:gdLst/>
-            <a:ahLst/>
-            <a:cxnLst/>
-            <a:rect l="l" t="t" r="r" b="b"/>
-            <a:pathLst>
-              <a:path w="7760440" h="6137802" extrusionOk="0">
-                <a:moveTo>
-                  <a:pt x="0" y="0"/>
-                </a:moveTo>
-                <a:lnTo>
-                  <a:pt x="7760439" y="0"/>
-                </a:lnTo>
-                <a:lnTo>
-                  <a:pt x="7760439" y="6137802"/>
-                </a:lnTo>
-                <a:lnTo>
-                  <a:pt x="0" y="6137802"/>
-                </a:lnTo>
-                <a:lnTo>
-                  <a:pt x="0" y="0"/>
-                </a:lnTo>
-                <a:close/>
-              </a:path>
-            </a:pathLst>
-          </a:custGeom>
-          <a:blipFill rotWithShape="1">
-            <a:blip r:embed="rId3">
-              <a:alphaModFix/>
-            </a:blip>
-            <a:stretch>
-              <a:fillRect/>
-            </a:stretch>
-          </a:blipFill>
-          <a:ln>
-            <a:noFill/>
-          </a:ln>
-        </p:spPr>
-        <p:txBody>
-          <a:bodyPr/>
-          <a:lstStyle/>
-          <a:p>
-            <a:endParaRPr lang="es-ES_tradnl" dirty="0"/>
-          </a:p>
-        </p:txBody>
-      </p:sp>
-      <p:sp>
-        <p:nvSpPr>
-          <p:cNvPr id="294" name="Google Shape;294;p23">
-            <a:extLst>
-              <a:ext uri="{FF2B5EF4-FFF2-40B4-BE49-F238E27FC236}">
-                <a16:creationId xmlns:a16="http://schemas.microsoft.com/office/drawing/2014/main" id="{4335AF22-10B3-0245-6A1E-A7044BFDA00C}"/>
-              </a:ext>
-            </a:extLst>
-          </p:cNvPr>
-          <p:cNvSpPr txBox="1"/>
-          <p:nvPr/>
-        </p:nvSpPr>
-        <p:spPr>
-          <a:xfrm>
-            <a:off x="1357220" y="2067019"/>
-            <a:ext cx="5989500" cy="1341008"/>
-          </a:xfrm>
-          <a:prstGeom prst="rect">
-            <a:avLst/>
-          </a:prstGeom>
-          <a:noFill/>
-          <a:ln>
-            <a:noFill/>
-          </a:ln>
-        </p:spPr>
-        <p:txBody>
-          <a:bodyPr spcFirstLastPara="1" wrap="square" lIns="0" tIns="0" rIns="0" bIns="0" anchor="t" anchorCtr="0">
-            <a:spAutoFit/>
-          </a:bodyPr>
-          <a:lstStyle/>
-          <a:p>
-            <a:pPr marL="0" marR="0" lvl="0" indent="0" algn="l" rtl="0">
-              <a:lnSpc>
-                <a:spcPct val="121055"/>
-              </a:lnSpc>
-              <a:spcBef>
-                <a:spcPts val="0"/>
-              </a:spcBef>
-              <a:spcAft>
-                <a:spcPts val="0"/>
-              </a:spcAft>
-              <a:buNone/>
-            </a:pPr>
-            <a:r>
-              <a:rPr lang="es-ES_tradnl" sz="3601" b="1" dirty="0">
-                <a:solidFill>
-                  <a:srgbClr val="004AAD"/>
-                </a:solidFill>
-                <a:latin typeface="Poppins"/>
-                <a:ea typeface="Poppins"/>
-                <a:cs typeface="Poppins"/>
-                <a:sym typeface="Poppins"/>
-              </a:rPr>
-              <a:t>ESTRATEGIAS Y AJUSTES ORGANIZACIONALES</a:t>
-            </a:r>
-            <a:endParaRPr lang="es-ES_tradnl" dirty="0"/>
-          </a:p>
-        </p:txBody>
-      </p:sp>
-      <p:sp>
-        <p:nvSpPr>
-          <p:cNvPr id="298" name="Google Shape;298;p23">
-            <a:extLst>
-              <a:ext uri="{FF2B5EF4-FFF2-40B4-BE49-F238E27FC236}">
-                <a16:creationId xmlns:a16="http://schemas.microsoft.com/office/drawing/2014/main" id="{186A78B8-C8E3-38CC-833A-72225D4995D6}"/>
-              </a:ext>
-            </a:extLst>
-          </p:cNvPr>
-          <p:cNvSpPr txBox="1"/>
-          <p:nvPr/>
-        </p:nvSpPr>
-        <p:spPr>
-          <a:xfrm>
-            <a:off x="10393716" y="2031037"/>
-            <a:ext cx="5989502" cy="878959"/>
-          </a:xfrm>
-          <a:prstGeom prst="rect">
-            <a:avLst/>
-          </a:prstGeom>
-          <a:noFill/>
-          <a:ln>
-            <a:noFill/>
-          </a:ln>
-        </p:spPr>
-        <p:txBody>
-          <a:bodyPr spcFirstLastPara="1" wrap="square" lIns="0" tIns="0" rIns="0" bIns="0" anchor="t" anchorCtr="0">
-            <a:spAutoFit/>
-          </a:bodyPr>
-          <a:lstStyle/>
-          <a:p>
-            <a:pPr marL="0" marR="0" lvl="1" indent="0" algn="l" rtl="0">
-              <a:lnSpc>
-                <a:spcPct val="119000"/>
-              </a:lnSpc>
-              <a:spcBef>
-                <a:spcPts val="0"/>
-              </a:spcBef>
-              <a:spcAft>
-                <a:spcPts val="0"/>
-              </a:spcAft>
-              <a:buNone/>
-            </a:pPr>
-            <a:r>
-              <a:rPr lang="es-ES_tradnl" sz="2400" b="1" i="0" u="none" strike="noStrike" cap="none" dirty="0">
-                <a:solidFill>
-                  <a:srgbClr val="004AAD"/>
-                </a:solidFill>
-                <a:latin typeface="Poppins"/>
-                <a:ea typeface="Poppins"/>
-                <a:cs typeface="Poppins"/>
-                <a:sym typeface="Poppins"/>
-              </a:rPr>
-              <a:t>APLANAMIENTO DE LA CURVA DE TRABAJO</a:t>
-            </a:r>
-            <a:endParaRPr lang="es-ES_tradnl" dirty="0"/>
-          </a:p>
-        </p:txBody>
-      </p:sp>
-      <p:sp>
-        <p:nvSpPr>
-          <p:cNvPr id="301" name="Google Shape;301;p23">
-            <a:extLst>
-              <a:ext uri="{FF2B5EF4-FFF2-40B4-BE49-F238E27FC236}">
-                <a16:creationId xmlns:a16="http://schemas.microsoft.com/office/drawing/2014/main" id="{0EB0886F-3824-8864-5A8D-63D9B2DF248C}"/>
-              </a:ext>
-            </a:extLst>
-          </p:cNvPr>
-          <p:cNvSpPr txBox="1"/>
-          <p:nvPr/>
-        </p:nvSpPr>
-        <p:spPr>
-          <a:xfrm>
-            <a:off x="10393716" y="4021652"/>
-            <a:ext cx="5989502" cy="439479"/>
-          </a:xfrm>
-          <a:prstGeom prst="rect">
-            <a:avLst/>
-          </a:prstGeom>
-          <a:noFill/>
-          <a:ln>
-            <a:noFill/>
-          </a:ln>
-        </p:spPr>
-        <p:txBody>
-          <a:bodyPr spcFirstLastPara="1" wrap="square" lIns="0" tIns="0" rIns="0" bIns="0" anchor="t" anchorCtr="0">
-            <a:spAutoFit/>
-          </a:bodyPr>
-          <a:lstStyle/>
-          <a:p>
-            <a:pPr marL="0" marR="0" lvl="1" indent="0" algn="l" rtl="0">
-              <a:lnSpc>
-                <a:spcPct val="119000"/>
-              </a:lnSpc>
-              <a:spcBef>
-                <a:spcPts val="0"/>
-              </a:spcBef>
-              <a:spcAft>
-                <a:spcPts val="0"/>
-              </a:spcAft>
-              <a:buNone/>
-            </a:pPr>
-            <a:r>
-              <a:rPr lang="es-ES_tradnl" sz="2400" b="1" i="0" u="none" strike="noStrike" cap="none" dirty="0">
-                <a:solidFill>
-                  <a:srgbClr val="004AAD"/>
-                </a:solidFill>
-                <a:latin typeface="Poppins"/>
-                <a:ea typeface="Poppins"/>
-                <a:cs typeface="Poppins"/>
-                <a:sym typeface="Poppins"/>
-              </a:rPr>
-              <a:t>PLANIFICACIÓN ESTACIONAL</a:t>
-            </a:r>
-            <a:endParaRPr lang="es-ES_tradnl" dirty="0"/>
-          </a:p>
-        </p:txBody>
-      </p:sp>
-      <p:sp>
-        <p:nvSpPr>
-          <p:cNvPr id="304" name="Google Shape;304;p23">
-            <a:extLst>
-              <a:ext uri="{FF2B5EF4-FFF2-40B4-BE49-F238E27FC236}">
-                <a16:creationId xmlns:a16="http://schemas.microsoft.com/office/drawing/2014/main" id="{D81F7156-2EA7-892B-78D9-A6A96CEF51FB}"/>
-              </a:ext>
-            </a:extLst>
-          </p:cNvPr>
-          <p:cNvSpPr txBox="1"/>
-          <p:nvPr/>
-        </p:nvSpPr>
-        <p:spPr>
-          <a:xfrm>
-            <a:off x="10393716" y="6053371"/>
-            <a:ext cx="5989502" cy="439479"/>
-          </a:xfrm>
-          <a:prstGeom prst="rect">
-            <a:avLst/>
-          </a:prstGeom>
-          <a:noFill/>
-          <a:ln>
-            <a:noFill/>
-          </a:ln>
-        </p:spPr>
-        <p:txBody>
-          <a:bodyPr spcFirstLastPara="1" wrap="square" lIns="0" tIns="0" rIns="0" bIns="0" anchor="t" anchorCtr="0">
-            <a:spAutoFit/>
-          </a:bodyPr>
-          <a:lstStyle/>
-          <a:p>
-            <a:pPr marL="0" marR="0" lvl="1" indent="0" algn="l" rtl="0">
-              <a:lnSpc>
-                <a:spcPct val="119000"/>
-              </a:lnSpc>
-              <a:spcBef>
-                <a:spcPts val="0"/>
-              </a:spcBef>
-              <a:spcAft>
-                <a:spcPts val="0"/>
-              </a:spcAft>
-              <a:buNone/>
-            </a:pPr>
-            <a:r>
-              <a:rPr lang="es-ES_tradnl" sz="2400" b="1" i="0" u="none" strike="noStrike" cap="none" dirty="0">
-                <a:solidFill>
-                  <a:srgbClr val="004AAD"/>
-                </a:solidFill>
-                <a:latin typeface="Poppins"/>
-                <a:ea typeface="Poppins"/>
-                <a:cs typeface="Poppins"/>
-                <a:sym typeface="Poppins"/>
-              </a:rPr>
-              <a:t>DESMITIFICACIÓN DE LA ANTIGÜEDAD</a:t>
-            </a:r>
-            <a:endParaRPr lang="es-ES_tradnl" dirty="0"/>
-          </a:p>
-        </p:txBody>
-      </p:sp>
-      <p:grpSp>
-        <p:nvGrpSpPr>
-          <p:cNvPr id="308" name="Google Shape;308;p23">
-            <a:extLst>
-              <a:ext uri="{FF2B5EF4-FFF2-40B4-BE49-F238E27FC236}">
-                <a16:creationId xmlns:a16="http://schemas.microsoft.com/office/drawing/2014/main" id="{B3C6E7B3-9D31-55CD-CA26-CF5430B1F92E}"/>
-              </a:ext>
-            </a:extLst>
-          </p:cNvPr>
-          <p:cNvGrpSpPr/>
-          <p:nvPr/>
-        </p:nvGrpSpPr>
-        <p:grpSpPr>
-          <a:xfrm>
-            <a:off x="0" y="5"/>
-            <a:ext cx="2163413" cy="1886345"/>
-            <a:chOff x="12784175" y="3675030"/>
-            <a:chExt cx="2163413" cy="1886345"/>
-          </a:xfrm>
-        </p:grpSpPr>
-        <p:sp>
-          <p:nvSpPr>
-            <p:cNvPr id="309" name="Google Shape;309;p23">
-              <a:extLst>
-                <a:ext uri="{FF2B5EF4-FFF2-40B4-BE49-F238E27FC236}">
-                  <a16:creationId xmlns:a16="http://schemas.microsoft.com/office/drawing/2014/main" id="{22DC04A7-9158-BB4E-F48C-FFFCB3796275}"/>
-                </a:ext>
-              </a:extLst>
-            </p:cNvPr>
-            <p:cNvSpPr txBox="1"/>
-            <p:nvPr/>
-          </p:nvSpPr>
-          <p:spPr>
-            <a:xfrm rot="1830973">
-              <a:off x="12805773" y="4425496"/>
-              <a:ext cx="2081405" cy="652657"/>
-            </a:xfrm>
-            <a:prstGeom prst="rect">
-              <a:avLst/>
-            </a:prstGeom>
-            <a:noFill/>
-            <a:ln>
-              <a:noFill/>
-            </a:ln>
-          </p:spPr>
-          <p:txBody>
-            <a:bodyPr spcFirstLastPara="1" wrap="square" lIns="91425" tIns="91425" rIns="91425" bIns="91425" anchor="t" anchorCtr="0">
-              <a:noAutofit/>
-            </a:bodyPr>
-            <a:lstStyle/>
-            <a:p>
-              <a:pPr marL="0" lvl="0" indent="0" algn="l" rtl="0">
-                <a:spcBef>
-                  <a:spcPts val="0"/>
-                </a:spcBef>
-                <a:spcAft>
-                  <a:spcPts val="0"/>
-                </a:spcAft>
-                <a:buNone/>
-              </a:pPr>
-              <a:r>
-                <a:rPr lang="es-ES_tradnl" sz="2300" b="1" i="1" dirty="0">
-                  <a:solidFill>
-                    <a:srgbClr val="E69138"/>
-                  </a:solidFill>
-                  <a:latin typeface="Calibri"/>
-                  <a:ea typeface="Calibri"/>
-                  <a:cs typeface="Calibri"/>
-                  <a:sym typeface="Calibri"/>
-                </a:rPr>
-                <a:t>RAPID EXPRESS </a:t>
-              </a:r>
-            </a:p>
-          </p:txBody>
-        </p:sp>
-        <p:sp>
-          <p:nvSpPr>
-            <p:cNvPr id="310" name="Google Shape;310;p23">
-              <a:extLst>
-                <a:ext uri="{FF2B5EF4-FFF2-40B4-BE49-F238E27FC236}">
-                  <a16:creationId xmlns:a16="http://schemas.microsoft.com/office/drawing/2014/main" id="{61FD26A3-7C65-7F64-5E8A-A0DC8DCC11F4}"/>
-                </a:ext>
-              </a:extLst>
-            </p:cNvPr>
-            <p:cNvSpPr/>
-            <p:nvPr/>
-          </p:nvSpPr>
-          <p:spPr>
-            <a:xfrm>
-              <a:off x="13335203" y="3675030"/>
-              <a:ext cx="1612385" cy="1275250"/>
-            </a:xfrm>
-            <a:custGeom>
-              <a:avLst/>
-              <a:gdLst/>
-              <a:ahLst/>
-              <a:cxnLst/>
-              <a:rect l="l" t="t" r="r" b="b"/>
-              <a:pathLst>
-                <a:path w="1612385" h="1275250" extrusionOk="0">
-                  <a:moveTo>
-                    <a:pt x="0" y="0"/>
-                  </a:moveTo>
-                  <a:lnTo>
-                    <a:pt x="1612384" y="0"/>
-                  </a:lnTo>
-                  <a:lnTo>
-                    <a:pt x="1612384" y="1275249"/>
-                  </a:lnTo>
-                  <a:lnTo>
-                    <a:pt x="0" y="1275249"/>
-                  </a:lnTo>
-                  <a:lnTo>
-                    <a:pt x="0" y="0"/>
-                  </a:lnTo>
-                  <a:close/>
-                </a:path>
-              </a:pathLst>
-            </a:custGeom>
-            <a:blipFill rotWithShape="1">
-              <a:blip r:embed="rId4">
-                <a:alphaModFix/>
-              </a:blip>
-              <a:stretch>
-                <a:fillRect/>
-              </a:stretch>
-            </a:blipFill>
-            <a:ln>
-              <a:noFill/>
-            </a:ln>
-          </p:spPr>
-          <p:txBody>
-            <a:bodyPr/>
-            <a:lstStyle/>
-            <a:p>
-              <a:endParaRPr lang="es-ES_tradnl" dirty="0"/>
-            </a:p>
-          </p:txBody>
-        </p:sp>
-      </p:grpSp>
-      <p:sp>
-        <p:nvSpPr>
-          <p:cNvPr id="20" name="Google Shape;162;p18">
-            <a:extLst>
-              <a:ext uri="{FF2B5EF4-FFF2-40B4-BE49-F238E27FC236}">
-                <a16:creationId xmlns:a16="http://schemas.microsoft.com/office/drawing/2014/main" id="{A239F5B4-C207-4A51-AE2F-F621521A6B0F}"/>
-              </a:ext>
-            </a:extLst>
-          </p:cNvPr>
-          <p:cNvSpPr/>
-          <p:nvPr/>
-        </p:nvSpPr>
-        <p:spPr>
-          <a:xfrm>
-            <a:off x="14226839" y="7928731"/>
-            <a:ext cx="2156379" cy="1936821"/>
-          </a:xfrm>
-          <a:custGeom>
-            <a:avLst/>
-            <a:gdLst/>
-            <a:ahLst/>
-            <a:cxnLst/>
-            <a:rect l="l" t="t" r="r" b="b"/>
-            <a:pathLst>
-              <a:path w="4469180" h="4014136" extrusionOk="0">
-                <a:moveTo>
-                  <a:pt x="0" y="0"/>
-                </a:moveTo>
-                <a:lnTo>
-                  <a:pt x="4469180" y="0"/>
-                </a:lnTo>
-                <a:lnTo>
-                  <a:pt x="4469180" y="4014136"/>
-                </a:lnTo>
-                <a:lnTo>
-                  <a:pt x="0" y="4014136"/>
-                </a:lnTo>
-                <a:lnTo>
-                  <a:pt x="0" y="0"/>
-                </a:lnTo>
-                <a:close/>
-              </a:path>
-            </a:pathLst>
-          </a:custGeom>
-          <a:blipFill rotWithShape="1">
-            <a:blip r:embed="rId5">
-              <a:alphaModFix/>
-            </a:blip>
-            <a:stretch>
-              <a:fillRect/>
-            </a:stretch>
-          </a:blipFill>
-          <a:ln>
-            <a:noFill/>
-          </a:ln>
-        </p:spPr>
-        <p:txBody>
-          <a:bodyPr/>
-          <a:lstStyle/>
-          <a:p>
-            <a:endParaRPr lang="es-ES_tradnl" dirty="0"/>
-          </a:p>
-        </p:txBody>
-      </p:sp>
-    </p:spTree>
-    <p:extLst>
-      <p:ext uri="{BB962C8B-B14F-4D97-AF65-F5344CB8AC3E}">
-        <p14:creationId xmlns:p14="http://schemas.microsoft.com/office/powerpoint/2010/main" val="1549375143"/>
       </p:ext>
     </p:extLst>
   </p:cSld>
@@ -34778,6 +34820,48 @@
           </a:prstGeom>
         </p:spPr>
       </p:pic>
+      <p:sp>
+        <p:nvSpPr>
+          <p:cNvPr id="2" name="QuadreDeText 1">
+            <a:extLst>
+              <a:ext uri="{FF2B5EF4-FFF2-40B4-BE49-F238E27FC236}">
+                <a16:creationId xmlns:a16="http://schemas.microsoft.com/office/drawing/2014/main" id="{2BEC3BD1-E06F-4A88-94A2-80FFCE6D4F87}"/>
+              </a:ext>
+            </a:extLst>
+          </p:cNvPr>
+          <p:cNvSpPr txBox="1"/>
+          <p:nvPr/>
+        </p:nvSpPr>
+        <p:spPr>
+          <a:xfrm>
+            <a:off x="11287593" y="9458793"/>
+            <a:ext cx="6045245" cy="307777"/>
+          </a:xfrm>
+          <a:prstGeom prst="rect">
+            <a:avLst/>
+          </a:prstGeom>
+          <a:noFill/>
+        </p:spPr>
+        <p:txBody>
+          <a:bodyPr wrap="none" rtlCol="0">
+            <a:spAutoFit/>
+          </a:bodyPr>
+          <a:lstStyle/>
+          <a:p>
+            <a:r>
+              <a:rPr lang="es-ES" dirty="0"/>
+              <a:t>Fuente: </a:t>
+            </a:r>
+            <a:r>
+              <a:rPr lang="es-ES" dirty="0">
+                <a:hlinkClick r:id="rId6"/>
+              </a:rPr>
+              <a:t>Encuesta Anual Laboral. Ministerio de Trabajo y Economía Social</a:t>
+            </a:r>
+            <a:endParaRPr lang="es-ES" dirty="0"/>
+          </a:p>
+        </p:txBody>
+      </p:sp>
     </p:spTree>
   </p:cSld>
   <p:clrMapOvr>
@@ -35188,6 +35272,48 @@
           </a:p>
         </p:txBody>
       </p:sp>
+      <p:sp>
+        <p:nvSpPr>
+          <p:cNvPr id="13" name="QuadreDeText 12">
+            <a:extLst>
+              <a:ext uri="{FF2B5EF4-FFF2-40B4-BE49-F238E27FC236}">
+                <a16:creationId xmlns:a16="http://schemas.microsoft.com/office/drawing/2014/main" id="{EC4ED6EC-FC33-4F3E-B445-1FDB1C856B6A}"/>
+              </a:ext>
+            </a:extLst>
+          </p:cNvPr>
+          <p:cNvSpPr txBox="1"/>
+          <p:nvPr/>
+        </p:nvSpPr>
+        <p:spPr>
+          <a:xfrm>
+            <a:off x="11172881" y="9454919"/>
+            <a:ext cx="9173980" cy="307777"/>
+          </a:xfrm>
+          <a:prstGeom prst="rect">
+            <a:avLst/>
+          </a:prstGeom>
+          <a:noFill/>
+        </p:spPr>
+        <p:txBody>
+          <a:bodyPr wrap="square">
+            <a:spAutoFit/>
+          </a:bodyPr>
+          <a:lstStyle/>
+          <a:p>
+            <a:r>
+              <a:rPr lang="es-ES" dirty="0"/>
+              <a:t>Fuente: </a:t>
+            </a:r>
+            <a:r>
+              <a:rPr lang="es-ES" dirty="0">
+                <a:hlinkClick r:id="rId6"/>
+              </a:rPr>
+              <a:t>Encuesta Anual Laboral. Ministerio de Trabajo y Economía Social</a:t>
+            </a:r>
+            <a:endParaRPr lang="es-ES" dirty="0"/>
+          </a:p>
+        </p:txBody>
+      </p:sp>
     </p:spTree>
     <p:extLst>
       <p:ext uri="{BB962C8B-B14F-4D97-AF65-F5344CB8AC3E}">
@@ -35603,6 +35729,48 @@
           </a:p>
         </p:txBody>
       </p:sp>
+      <p:sp>
+        <p:nvSpPr>
+          <p:cNvPr id="13" name="QuadreDeText 12">
+            <a:extLst>
+              <a:ext uri="{FF2B5EF4-FFF2-40B4-BE49-F238E27FC236}">
+                <a16:creationId xmlns:a16="http://schemas.microsoft.com/office/drawing/2014/main" id="{5196AD66-857B-445F-8ACA-8B5866848235}"/>
+              </a:ext>
+            </a:extLst>
+          </p:cNvPr>
+          <p:cNvSpPr txBox="1"/>
+          <p:nvPr/>
+        </p:nvSpPr>
+        <p:spPr>
+          <a:xfrm>
+            <a:off x="10598046" y="9157862"/>
+            <a:ext cx="9173980" cy="307777"/>
+          </a:xfrm>
+          <a:prstGeom prst="rect">
+            <a:avLst/>
+          </a:prstGeom>
+          <a:noFill/>
+        </p:spPr>
+        <p:txBody>
+          <a:bodyPr wrap="square">
+            <a:spAutoFit/>
+          </a:bodyPr>
+          <a:lstStyle/>
+          <a:p>
+            <a:r>
+              <a:rPr lang="es-ES" dirty="0"/>
+              <a:t>Fuente: </a:t>
+            </a:r>
+            <a:r>
+              <a:rPr lang="es-ES" dirty="0">
+                <a:hlinkClick r:id="rId6"/>
+              </a:rPr>
+              <a:t>Encuesta Anual Laboral. Ministerio de Trabajo y Economía Social</a:t>
+            </a:r>
+            <a:endParaRPr lang="es-ES" dirty="0"/>
+          </a:p>
+        </p:txBody>
+      </p:sp>
     </p:spTree>
     <p:extLst>
       <p:ext uri="{BB962C8B-B14F-4D97-AF65-F5344CB8AC3E}">
@@ -35964,6 +36132,48 @@
           </a:p>
         </p:txBody>
       </p:sp>
+      <p:sp>
+        <p:nvSpPr>
+          <p:cNvPr id="10" name="QuadreDeText 9">
+            <a:extLst>
+              <a:ext uri="{FF2B5EF4-FFF2-40B4-BE49-F238E27FC236}">
+                <a16:creationId xmlns:a16="http://schemas.microsoft.com/office/drawing/2014/main" id="{BFD99AF1-9DAA-451E-83AF-1058AB19BE6B}"/>
+              </a:ext>
+            </a:extLst>
+          </p:cNvPr>
+          <p:cNvSpPr txBox="1"/>
+          <p:nvPr/>
+        </p:nvSpPr>
+        <p:spPr>
+          <a:xfrm>
+            <a:off x="11587397" y="9295283"/>
+            <a:ext cx="9173980" cy="307777"/>
+          </a:xfrm>
+          <a:prstGeom prst="rect">
+            <a:avLst/>
+          </a:prstGeom>
+          <a:noFill/>
+        </p:spPr>
+        <p:txBody>
+          <a:bodyPr wrap="square">
+            <a:spAutoFit/>
+          </a:bodyPr>
+          <a:lstStyle/>
+          <a:p>
+            <a:r>
+              <a:rPr lang="es-ES" dirty="0"/>
+              <a:t>Fuente: </a:t>
+            </a:r>
+            <a:r>
+              <a:rPr lang="es-ES" dirty="0">
+                <a:hlinkClick r:id="rId6"/>
+              </a:rPr>
+              <a:t>Encuesta Anual Laboral. Ministerio de Trabajo y Economía Social</a:t>
+            </a:r>
+            <a:endParaRPr lang="es-ES" dirty="0"/>
+          </a:p>
+        </p:txBody>
+      </p:sp>
     </p:spTree>
     <p:extLst>
       <p:ext uri="{BB962C8B-B14F-4D97-AF65-F5344CB8AC3E}">
@@ -36370,6 +36580,48 @@
           <a:p>
             <a:pPr algn="ctr"/>
             <a:endParaRPr lang="es-ES"/>
+          </a:p>
+        </p:txBody>
+      </p:sp>
+      <p:sp>
+        <p:nvSpPr>
+          <p:cNvPr id="10" name="QuadreDeText 9">
+            <a:extLst>
+              <a:ext uri="{FF2B5EF4-FFF2-40B4-BE49-F238E27FC236}">
+                <a16:creationId xmlns:a16="http://schemas.microsoft.com/office/drawing/2014/main" id="{78EA8AD0-7D3A-4D72-BC07-3134E7C59809}"/>
+              </a:ext>
+            </a:extLst>
+          </p:cNvPr>
+          <p:cNvSpPr txBox="1"/>
+          <p:nvPr/>
+        </p:nvSpPr>
+        <p:spPr>
+          <a:xfrm>
+            <a:off x="12037101" y="9762696"/>
+            <a:ext cx="9173980" cy="307777"/>
+          </a:xfrm>
+          <a:prstGeom prst="rect">
+            <a:avLst/>
+          </a:prstGeom>
+          <a:noFill/>
+        </p:spPr>
+        <p:txBody>
+          <a:bodyPr wrap="square">
+            <a:spAutoFit/>
+          </a:bodyPr>
+          <a:lstStyle/>
+          <a:p>
+            <a:r>
+              <a:rPr lang="es-ES" dirty="0"/>
+              <a:t>Fuente: </a:t>
+            </a:r>
+            <a:r>
+              <a:rPr lang="es-ES" dirty="0">
+                <a:hlinkClick r:id="rId6"/>
+              </a:rPr>
+              <a:t>Encuesta Anual Laboral. Ministerio de Trabajo y Economía Social</a:t>
+            </a:r>
+            <a:endParaRPr lang="es-ES" dirty="0"/>
           </a:p>
         </p:txBody>
       </p:sp>

--- a/Equip_28/Results/Analisis_PAP_and_ABL_RapidExpres_2026_11_05.pptx
+++ b/Equip_28/Results/Analisis_PAP_and_ABL_RapidExpres_2026_11_05.pptx
@@ -5,59 +5,60 @@
     <p:sldMasterId id="2147483659" r:id="rId1"/>
   </p:sldMasterIdLst>
   <p:notesMasterIdLst>
-    <p:notesMasterId r:id="rId29"/>
+    <p:notesMasterId r:id="rId30"/>
   </p:notesMasterIdLst>
   <p:sldIdLst>
     <p:sldId id="256" r:id="rId2"/>
     <p:sldId id="281" r:id="rId3"/>
     <p:sldId id="296" r:id="rId4"/>
     <p:sldId id="290" r:id="rId5"/>
-    <p:sldId id="259" r:id="rId6"/>
-    <p:sldId id="299" r:id="rId7"/>
-    <p:sldId id="300" r:id="rId8"/>
-    <p:sldId id="301" r:id="rId9"/>
-    <p:sldId id="298" r:id="rId10"/>
-    <p:sldId id="302" r:id="rId11"/>
-    <p:sldId id="303" r:id="rId12"/>
-    <p:sldId id="288" r:id="rId13"/>
-    <p:sldId id="297" r:id="rId14"/>
-    <p:sldId id="258" r:id="rId15"/>
-    <p:sldId id="260" r:id="rId16"/>
-    <p:sldId id="287" r:id="rId17"/>
-    <p:sldId id="284" r:id="rId18"/>
-    <p:sldId id="285" r:id="rId19"/>
-    <p:sldId id="295" r:id="rId20"/>
-    <p:sldId id="289" r:id="rId21"/>
-    <p:sldId id="257" r:id="rId22"/>
-    <p:sldId id="291" r:id="rId23"/>
-    <p:sldId id="292" r:id="rId24"/>
-    <p:sldId id="261" r:id="rId25"/>
-    <p:sldId id="262" r:id="rId26"/>
-    <p:sldId id="293" r:id="rId27"/>
-    <p:sldId id="279" r:id="rId28"/>
+    <p:sldId id="304" r:id="rId6"/>
+    <p:sldId id="259" r:id="rId7"/>
+    <p:sldId id="299" r:id="rId8"/>
+    <p:sldId id="300" r:id="rId9"/>
+    <p:sldId id="301" r:id="rId10"/>
+    <p:sldId id="298" r:id="rId11"/>
+    <p:sldId id="302" r:id="rId12"/>
+    <p:sldId id="303" r:id="rId13"/>
+    <p:sldId id="288" r:id="rId14"/>
+    <p:sldId id="297" r:id="rId15"/>
+    <p:sldId id="258" r:id="rId16"/>
+    <p:sldId id="260" r:id="rId17"/>
+    <p:sldId id="287" r:id="rId18"/>
+    <p:sldId id="284" r:id="rId19"/>
+    <p:sldId id="285" r:id="rId20"/>
+    <p:sldId id="295" r:id="rId21"/>
+    <p:sldId id="289" r:id="rId22"/>
+    <p:sldId id="257" r:id="rId23"/>
+    <p:sldId id="291" r:id="rId24"/>
+    <p:sldId id="292" r:id="rId25"/>
+    <p:sldId id="261" r:id="rId26"/>
+    <p:sldId id="262" r:id="rId27"/>
+    <p:sldId id="293" r:id="rId28"/>
+    <p:sldId id="279" r:id="rId29"/>
   </p:sldIdLst>
   <p:sldSz cx="18288000" cy="10287000"/>
   <p:notesSz cx="6858000" cy="9144000"/>
   <p:embeddedFontLst>
     <p:embeddedFont>
       <p:font typeface="Calibri" panose="020F0502020204030204" pitchFamily="34" charset="0"/>
-      <p:regular r:id="rId30"/>
-      <p:bold r:id="rId31"/>
-      <p:italic r:id="rId32"/>
-      <p:boldItalic r:id="rId33"/>
+      <p:regular r:id="rId31"/>
+      <p:bold r:id="rId32"/>
+      <p:italic r:id="rId33"/>
+      <p:boldItalic r:id="rId34"/>
     </p:embeddedFont>
     <p:embeddedFont>
       <p:font typeface="Poppins" panose="00000500000000000000" pitchFamily="2" charset="0"/>
-      <p:regular r:id="rId34"/>
-      <p:bold r:id="rId35"/>
-      <p:italic r:id="rId36"/>
-      <p:boldItalic r:id="rId37"/>
+      <p:regular r:id="rId35"/>
+      <p:bold r:id="rId36"/>
+      <p:italic r:id="rId37"/>
+      <p:boldItalic r:id="rId38"/>
     </p:embeddedFont>
     <p:embeddedFont>
       <p:font typeface="Poppins Black" panose="00000A00000000000000" pitchFamily="2" charset="0"/>
-      <p:bold r:id="rId38"/>
-      <p:italic r:id="rId39"/>
-      <p:boldItalic r:id="rId40"/>
+      <p:bold r:id="rId39"/>
+      <p:italic r:id="rId40"/>
+      <p:boldItalic r:id="rId41"/>
     </p:embeddedFont>
   </p:embeddedFontLst>
   <p:defaultTextStyle>
@@ -952,7 +953,7 @@
     </p:spTree>
     <p:extLst>
       <p:ext uri="{BB962C8B-B14F-4D97-AF65-F5344CB8AC3E}">
-        <p14:creationId xmlns:p14="http://schemas.microsoft.com/office/powerpoint/2010/main" val="39675430"/>
+        <p14:creationId xmlns:p14="http://schemas.microsoft.com/office/powerpoint/2010/main" val="3436316797"/>
       </p:ext>
     </p:extLst>
   </p:cSld>
@@ -1061,6 +1062,115 @@
     </p:spTree>
     <p:extLst>
       <p:ext uri="{BB962C8B-B14F-4D97-AF65-F5344CB8AC3E}">
+        <p14:creationId xmlns:p14="http://schemas.microsoft.com/office/powerpoint/2010/main" val="39675430"/>
+      </p:ext>
+    </p:extLst>
+  </p:cSld>
+  <p:clrMapOvr>
+    <a:masterClrMapping/>
+  </p:clrMapOvr>
+</p:notes>
+</file>
+
+<file path=ppt/notesSlides/notesSlide12.xml><?xml version="1.0" encoding="utf-8"?>
+<p:notes xmlns:a="http://schemas.openxmlformats.org/drawingml/2006/main" xmlns:r="http://schemas.openxmlformats.org/officeDocument/2006/relationships" xmlns:p="http://schemas.openxmlformats.org/presentationml/2006/main" showMasterSp="0" showMasterPhAnim="0">
+  <p:cSld>
+    <p:spTree>
+      <p:nvGrpSpPr>
+        <p:cNvPr id="1" name="Shape 135"/>
+        <p:cNvGrpSpPr/>
+        <p:nvPr/>
+      </p:nvGrpSpPr>
+      <p:grpSpPr>
+        <a:xfrm>
+          <a:off x="0" y="0"/>
+          <a:ext cx="0" cy="0"/>
+          <a:chOff x="0" y="0"/>
+          <a:chExt cx="0" cy="0"/>
+        </a:xfrm>
+      </p:grpSpPr>
+      <p:sp>
+        <p:nvSpPr>
+          <p:cNvPr id="136" name="Google Shape;136;p3:notes"/>
+          <p:cNvSpPr txBox="1">
+            <a:spLocks noGrp="1"/>
+          </p:cNvSpPr>
+          <p:nvPr>
+            <p:ph type="body" idx="1"/>
+          </p:nvPr>
+        </p:nvSpPr>
+        <p:spPr>
+          <a:xfrm>
+            <a:off x="685800" y="4343400"/>
+            <a:ext cx="5486400" cy="4114800"/>
+          </a:xfrm>
+          <a:prstGeom prst="rect">
+            <a:avLst/>
+          </a:prstGeom>
+        </p:spPr>
+        <p:txBody>
+          <a:bodyPr spcFirstLastPara="1" wrap="square" lIns="91425" tIns="91425" rIns="91425" bIns="91425" anchor="t" anchorCtr="0">
+            <a:noAutofit/>
+          </a:bodyPr>
+          <a:lstStyle/>
+          <a:p>
+            <a:pPr marL="0" lvl="0" indent="0" algn="l" rtl="0">
+              <a:spcBef>
+                <a:spcPts val="0"/>
+              </a:spcBef>
+              <a:spcAft>
+                <a:spcPts val="0"/>
+              </a:spcAft>
+              <a:buNone/>
+            </a:pPr>
+            <a:endParaRPr/>
+          </a:p>
+        </p:txBody>
+      </p:sp>
+      <p:sp>
+        <p:nvSpPr>
+          <p:cNvPr id="137" name="Google Shape;137;p3:notes"/>
+          <p:cNvSpPr>
+            <a:spLocks noGrp="1" noRot="1" noChangeAspect="1"/>
+          </p:cNvSpPr>
+          <p:nvPr>
+            <p:ph type="sldImg" idx="2"/>
+          </p:nvPr>
+        </p:nvSpPr>
+        <p:spPr>
+          <a:xfrm>
+            <a:off x="381000" y="685800"/>
+            <a:ext cx="6096000" cy="3429000"/>
+          </a:xfrm>
+          <a:custGeom>
+            <a:avLst/>
+            <a:gdLst/>
+            <a:ahLst/>
+            <a:cxnLst/>
+            <a:rect l="l" t="t" r="r" b="b"/>
+            <a:pathLst>
+              <a:path w="120000" h="120000" extrusionOk="0">
+                <a:moveTo>
+                  <a:pt x="0" y="0"/>
+                </a:moveTo>
+                <a:lnTo>
+                  <a:pt x="120000" y="0"/>
+                </a:lnTo>
+                <a:lnTo>
+                  <a:pt x="120000" y="120000"/>
+                </a:lnTo>
+                <a:lnTo>
+                  <a:pt x="0" y="120000"/>
+                </a:lnTo>
+                <a:close/>
+              </a:path>
+            </a:pathLst>
+          </a:custGeom>
+        </p:spPr>
+      </p:sp>
+    </p:spTree>
+    <p:extLst>
+      <p:ext uri="{BB962C8B-B14F-4D97-AF65-F5344CB8AC3E}">
         <p14:creationId xmlns:p14="http://schemas.microsoft.com/office/powerpoint/2010/main" val="224063088"/>
       </p:ext>
     </p:extLst>
@@ -1071,7 +1181,7 @@
 </p:notes>
 </file>
 
-<file path=ppt/notesSlides/notesSlide12.xml><?xml version="1.0" encoding="utf-8"?>
+<file path=ppt/notesSlides/notesSlide13.xml><?xml version="1.0" encoding="utf-8"?>
 <p:notes xmlns:a="http://schemas.openxmlformats.org/drawingml/2006/main" xmlns:r="http://schemas.openxmlformats.org/officeDocument/2006/relationships" xmlns:p="http://schemas.openxmlformats.org/presentationml/2006/main" showMasterSp="0" showMasterPhAnim="0">
   <p:cSld>
     <p:spTree>
@@ -1198,7 +1308,7 @@
 </p:notes>
 </file>
 
-<file path=ppt/notesSlides/notesSlide13.xml><?xml version="1.0" encoding="utf-8"?>
+<file path=ppt/notesSlides/notesSlide14.xml><?xml version="1.0" encoding="utf-8"?>
 <p:notes xmlns:a="http://schemas.openxmlformats.org/drawingml/2006/main" xmlns:r="http://schemas.openxmlformats.org/officeDocument/2006/relationships" xmlns:p="http://schemas.openxmlformats.org/presentationml/2006/main" showMasterSp="0" showMasterPhAnim="0">
   <p:cSld>
     <p:spTree>
@@ -1307,7 +1417,7 @@
 </p:notes>
 </file>
 
-<file path=ppt/notesSlides/notesSlide14.xml><?xml version="1.0" encoding="utf-8"?>
+<file path=ppt/notesSlides/notesSlide15.xml><?xml version="1.0" encoding="utf-8"?>
 <p:notes xmlns:a="http://schemas.openxmlformats.org/drawingml/2006/main" xmlns:r="http://schemas.openxmlformats.org/officeDocument/2006/relationships" xmlns:p="http://schemas.openxmlformats.org/presentationml/2006/main" showMasterSp="0" showMasterPhAnim="0">
   <p:cSld>
     <p:spTree>
@@ -1411,7 +1521,7 @@
 </p:notes>
 </file>
 
-<file path=ppt/notesSlides/notesSlide15.xml><?xml version="1.0" encoding="utf-8"?>
+<file path=ppt/notesSlides/notesSlide16.xml><?xml version="1.0" encoding="utf-8"?>
 <p:notes xmlns:a="http://schemas.openxmlformats.org/drawingml/2006/main" xmlns:r="http://schemas.openxmlformats.org/officeDocument/2006/relationships" xmlns:p="http://schemas.openxmlformats.org/presentationml/2006/main" showMasterSp="0" showMasterPhAnim="0">
   <p:cSld>
     <p:spTree>
@@ -1515,7 +1625,7 @@
 </p:notes>
 </file>
 
-<file path=ppt/notesSlides/notesSlide16.xml><?xml version="1.0" encoding="utf-8"?>
+<file path=ppt/notesSlides/notesSlide17.xml><?xml version="1.0" encoding="utf-8"?>
 <p:notes xmlns:a="http://schemas.openxmlformats.org/drawingml/2006/main" xmlns:r="http://schemas.openxmlformats.org/officeDocument/2006/relationships" xmlns:p="http://schemas.openxmlformats.org/presentationml/2006/main" showMasterSp="0" showMasterPhAnim="0">
   <p:cSld>
     <p:spTree>
@@ -1642,7 +1752,7 @@
 </p:notes>
 </file>
 
-<file path=ppt/notesSlides/notesSlide17.xml><?xml version="1.0" encoding="utf-8"?>
+<file path=ppt/notesSlides/notesSlide18.xml><?xml version="1.0" encoding="utf-8"?>
 <p:notes xmlns:a="http://schemas.openxmlformats.org/drawingml/2006/main" xmlns:r="http://schemas.openxmlformats.org/officeDocument/2006/relationships" xmlns:p="http://schemas.openxmlformats.org/presentationml/2006/main" showMasterSp="0" showMasterPhAnim="0">
   <p:cSld>
     <p:spTree>
@@ -1760,133 +1870,6 @@
     <p:extLst>
       <p:ext uri="{BB962C8B-B14F-4D97-AF65-F5344CB8AC3E}">
         <p14:creationId xmlns:p14="http://schemas.microsoft.com/office/powerpoint/2010/main" val="2275216246"/>
-      </p:ext>
-    </p:extLst>
-  </p:cSld>
-  <p:clrMapOvr>
-    <a:masterClrMapping/>
-  </p:clrMapOvr>
-</p:notes>
-</file>
-
-<file path=ppt/notesSlides/notesSlide18.xml><?xml version="1.0" encoding="utf-8"?>
-<p:notes xmlns:a="http://schemas.openxmlformats.org/drawingml/2006/main" xmlns:r="http://schemas.openxmlformats.org/officeDocument/2006/relationships" xmlns:p="http://schemas.openxmlformats.org/presentationml/2006/main" showMasterSp="0" showMasterPhAnim="0">
-  <p:cSld>
-    <p:spTree>
-      <p:nvGrpSpPr>
-        <p:cNvPr id="1" name="Shape 157">
-          <a:extLst>
-            <a:ext uri="{FF2B5EF4-FFF2-40B4-BE49-F238E27FC236}">
-              <a16:creationId xmlns:a16="http://schemas.microsoft.com/office/drawing/2014/main" id="{FCF5328D-5EF3-B3C2-ED5D-E6B9C72C504A}"/>
-            </a:ext>
-          </a:extLst>
-        </p:cNvPr>
-        <p:cNvGrpSpPr/>
-        <p:nvPr/>
-      </p:nvGrpSpPr>
-      <p:grpSpPr>
-        <a:xfrm>
-          <a:off x="0" y="0"/>
-          <a:ext cx="0" cy="0"/>
-          <a:chOff x="0" y="0"/>
-          <a:chExt cx="0" cy="0"/>
-        </a:xfrm>
-      </p:grpSpPr>
-      <p:sp>
-        <p:nvSpPr>
-          <p:cNvPr id="158" name="Google Shape;158;p4:notes">
-            <a:extLst>
-              <a:ext uri="{FF2B5EF4-FFF2-40B4-BE49-F238E27FC236}">
-                <a16:creationId xmlns:a16="http://schemas.microsoft.com/office/drawing/2014/main" id="{2D46FA33-ABC3-5982-513A-88AF808BFDFD}"/>
-              </a:ext>
-            </a:extLst>
-          </p:cNvPr>
-          <p:cNvSpPr txBox="1">
-            <a:spLocks noGrp="1"/>
-          </p:cNvSpPr>
-          <p:nvPr>
-            <p:ph type="body" idx="1"/>
-          </p:nvPr>
-        </p:nvSpPr>
-        <p:spPr>
-          <a:xfrm>
-            <a:off x="685800" y="4343400"/>
-            <a:ext cx="5486400" cy="4114800"/>
-          </a:xfrm>
-          <a:prstGeom prst="rect">
-            <a:avLst/>
-          </a:prstGeom>
-        </p:spPr>
-        <p:txBody>
-          <a:bodyPr spcFirstLastPara="1" wrap="square" lIns="91425" tIns="91425" rIns="91425" bIns="91425" anchor="t" anchorCtr="0">
-            <a:noAutofit/>
-          </a:bodyPr>
-          <a:lstStyle/>
-          <a:p>
-            <a:pPr marL="0" lvl="0" indent="0" algn="l" rtl="0">
-              <a:spcBef>
-                <a:spcPts val="0"/>
-              </a:spcBef>
-              <a:spcAft>
-                <a:spcPts val="0"/>
-              </a:spcAft>
-              <a:buNone/>
-            </a:pPr>
-            <a:endParaRPr/>
-          </a:p>
-        </p:txBody>
-      </p:sp>
-      <p:sp>
-        <p:nvSpPr>
-          <p:cNvPr id="159" name="Google Shape;159;p4:notes">
-            <a:extLst>
-              <a:ext uri="{FF2B5EF4-FFF2-40B4-BE49-F238E27FC236}">
-                <a16:creationId xmlns:a16="http://schemas.microsoft.com/office/drawing/2014/main" id="{C456DE22-CE1E-6447-C306-D3F9178E76A0}"/>
-              </a:ext>
-            </a:extLst>
-          </p:cNvPr>
-          <p:cNvSpPr>
-            <a:spLocks noGrp="1" noRot="1" noChangeAspect="1"/>
-          </p:cNvSpPr>
-          <p:nvPr>
-            <p:ph type="sldImg" idx="2"/>
-          </p:nvPr>
-        </p:nvSpPr>
-        <p:spPr>
-          <a:xfrm>
-            <a:off x="381000" y="685800"/>
-            <a:ext cx="6096000" cy="3429000"/>
-          </a:xfrm>
-          <a:custGeom>
-            <a:avLst/>
-            <a:gdLst/>
-            <a:ahLst/>
-            <a:cxnLst/>
-            <a:rect l="l" t="t" r="r" b="b"/>
-            <a:pathLst>
-              <a:path w="120000" h="120000" extrusionOk="0">
-                <a:moveTo>
-                  <a:pt x="0" y="0"/>
-                </a:moveTo>
-                <a:lnTo>
-                  <a:pt x="120000" y="0"/>
-                </a:lnTo>
-                <a:lnTo>
-                  <a:pt x="120000" y="120000"/>
-                </a:lnTo>
-                <a:lnTo>
-                  <a:pt x="0" y="120000"/>
-                </a:lnTo>
-                <a:close/>
-              </a:path>
-            </a:pathLst>
-          </a:custGeom>
-        </p:spPr>
-      </p:sp>
-    </p:spTree>
-    <p:extLst>
-      <p:ext uri="{BB962C8B-B14F-4D97-AF65-F5344CB8AC3E}">
-        <p14:creationId xmlns:p14="http://schemas.microsoft.com/office/powerpoint/2010/main" val="3384843925"/>
       </p:ext>
     </p:extLst>
   </p:cSld>
@@ -2013,7 +1996,7 @@
     </p:spTree>
     <p:extLst>
       <p:ext uri="{BB962C8B-B14F-4D97-AF65-F5344CB8AC3E}">
-        <p14:creationId xmlns:p14="http://schemas.microsoft.com/office/powerpoint/2010/main" val="4038510907"/>
+        <p14:creationId xmlns:p14="http://schemas.microsoft.com/office/powerpoint/2010/main" val="3384843925"/>
       </p:ext>
     </p:extLst>
   </p:cSld>
@@ -2137,6 +2120,133 @@
   <p:cSld>
     <p:spTree>
       <p:nvGrpSpPr>
+        <p:cNvPr id="1" name="Shape 157">
+          <a:extLst>
+            <a:ext uri="{FF2B5EF4-FFF2-40B4-BE49-F238E27FC236}">
+              <a16:creationId xmlns:a16="http://schemas.microsoft.com/office/drawing/2014/main" id="{FCF5328D-5EF3-B3C2-ED5D-E6B9C72C504A}"/>
+            </a:ext>
+          </a:extLst>
+        </p:cNvPr>
+        <p:cNvGrpSpPr/>
+        <p:nvPr/>
+      </p:nvGrpSpPr>
+      <p:grpSpPr>
+        <a:xfrm>
+          <a:off x="0" y="0"/>
+          <a:ext cx="0" cy="0"/>
+          <a:chOff x="0" y="0"/>
+          <a:chExt cx="0" cy="0"/>
+        </a:xfrm>
+      </p:grpSpPr>
+      <p:sp>
+        <p:nvSpPr>
+          <p:cNvPr id="158" name="Google Shape;158;p4:notes">
+            <a:extLst>
+              <a:ext uri="{FF2B5EF4-FFF2-40B4-BE49-F238E27FC236}">
+                <a16:creationId xmlns:a16="http://schemas.microsoft.com/office/drawing/2014/main" id="{2D46FA33-ABC3-5982-513A-88AF808BFDFD}"/>
+              </a:ext>
+            </a:extLst>
+          </p:cNvPr>
+          <p:cNvSpPr txBox="1">
+            <a:spLocks noGrp="1"/>
+          </p:cNvSpPr>
+          <p:nvPr>
+            <p:ph type="body" idx="1"/>
+          </p:nvPr>
+        </p:nvSpPr>
+        <p:spPr>
+          <a:xfrm>
+            <a:off x="685800" y="4343400"/>
+            <a:ext cx="5486400" cy="4114800"/>
+          </a:xfrm>
+          <a:prstGeom prst="rect">
+            <a:avLst/>
+          </a:prstGeom>
+        </p:spPr>
+        <p:txBody>
+          <a:bodyPr spcFirstLastPara="1" wrap="square" lIns="91425" tIns="91425" rIns="91425" bIns="91425" anchor="t" anchorCtr="0">
+            <a:noAutofit/>
+          </a:bodyPr>
+          <a:lstStyle/>
+          <a:p>
+            <a:pPr marL="0" lvl="0" indent="0" algn="l" rtl="0">
+              <a:spcBef>
+                <a:spcPts val="0"/>
+              </a:spcBef>
+              <a:spcAft>
+                <a:spcPts val="0"/>
+              </a:spcAft>
+              <a:buNone/>
+            </a:pPr>
+            <a:endParaRPr/>
+          </a:p>
+        </p:txBody>
+      </p:sp>
+      <p:sp>
+        <p:nvSpPr>
+          <p:cNvPr id="159" name="Google Shape;159;p4:notes">
+            <a:extLst>
+              <a:ext uri="{FF2B5EF4-FFF2-40B4-BE49-F238E27FC236}">
+                <a16:creationId xmlns:a16="http://schemas.microsoft.com/office/drawing/2014/main" id="{C456DE22-CE1E-6447-C306-D3F9178E76A0}"/>
+              </a:ext>
+            </a:extLst>
+          </p:cNvPr>
+          <p:cNvSpPr>
+            <a:spLocks noGrp="1" noRot="1" noChangeAspect="1"/>
+          </p:cNvSpPr>
+          <p:nvPr>
+            <p:ph type="sldImg" idx="2"/>
+          </p:nvPr>
+        </p:nvSpPr>
+        <p:spPr>
+          <a:xfrm>
+            <a:off x="381000" y="685800"/>
+            <a:ext cx="6096000" cy="3429000"/>
+          </a:xfrm>
+          <a:custGeom>
+            <a:avLst/>
+            <a:gdLst/>
+            <a:ahLst/>
+            <a:cxnLst/>
+            <a:rect l="l" t="t" r="r" b="b"/>
+            <a:pathLst>
+              <a:path w="120000" h="120000" extrusionOk="0">
+                <a:moveTo>
+                  <a:pt x="0" y="0"/>
+                </a:moveTo>
+                <a:lnTo>
+                  <a:pt x="120000" y="0"/>
+                </a:lnTo>
+                <a:lnTo>
+                  <a:pt x="120000" y="120000"/>
+                </a:lnTo>
+                <a:lnTo>
+                  <a:pt x="0" y="120000"/>
+                </a:lnTo>
+                <a:close/>
+              </a:path>
+            </a:pathLst>
+          </a:custGeom>
+        </p:spPr>
+      </p:sp>
+    </p:spTree>
+    <p:extLst>
+      <p:ext uri="{BB962C8B-B14F-4D97-AF65-F5344CB8AC3E}">
+        <p14:creationId xmlns:p14="http://schemas.microsoft.com/office/powerpoint/2010/main" val="4038510907"/>
+      </p:ext>
+    </p:extLst>
+  </p:cSld>
+  <p:clrMapOvr>
+    <a:masterClrMapping/>
+  </p:clrMapOvr>
+</p:notes>
+</file>
+
+<file path=ppt/notesSlides/notesSlide21.xml><?xml version="1.0" encoding="utf-8"?>
+<p:notes xmlns:a="http://schemas.openxmlformats.org/drawingml/2006/main" xmlns:r="http://schemas.openxmlformats.org/officeDocument/2006/relationships" xmlns:p="http://schemas.openxmlformats.org/presentationml/2006/main" showMasterSp="0" showMasterPhAnim="0">
+  <p:cSld>
+    <p:spTree>
+      <p:nvGrpSpPr>
         <p:cNvPr id="1" name="Shape 80"/>
         <p:cNvGrpSpPr/>
         <p:nvPr/>
@@ -2236,7 +2346,7 @@
 </p:notes>
 </file>
 
-<file path=ppt/notesSlides/notesSlide21.xml><?xml version="1.0" encoding="utf-8"?>
+<file path=ppt/notesSlides/notesSlide22.xml><?xml version="1.0" encoding="utf-8"?>
 <p:notes xmlns:a="http://schemas.openxmlformats.org/drawingml/2006/main" xmlns:r="http://schemas.openxmlformats.org/officeDocument/2006/relationships" xmlns:p="http://schemas.openxmlformats.org/presentationml/2006/main" showMasterSp="0" showMasterPhAnim="0">
   <p:cSld>
     <p:spTree>
@@ -2340,7 +2450,7 @@
 </p:notes>
 </file>
 
-<file path=ppt/notesSlides/notesSlide22.xml><?xml version="1.0" encoding="utf-8"?>
+<file path=ppt/notesSlides/notesSlide23.xml><?xml version="1.0" encoding="utf-8"?>
 <p:notes xmlns:a="http://schemas.openxmlformats.org/drawingml/2006/main" xmlns:r="http://schemas.openxmlformats.org/officeDocument/2006/relationships" xmlns:p="http://schemas.openxmlformats.org/presentationml/2006/main" showMasterSp="0" showMasterPhAnim="0">
   <p:cSld>
     <p:spTree>
@@ -2444,7 +2554,7 @@
 </p:notes>
 </file>
 
-<file path=ppt/notesSlides/notesSlide23.xml><?xml version="1.0" encoding="utf-8"?>
+<file path=ppt/notesSlides/notesSlide24.xml><?xml version="1.0" encoding="utf-8"?>
 <p:notes xmlns:a="http://schemas.openxmlformats.org/drawingml/2006/main" xmlns:r="http://schemas.openxmlformats.org/officeDocument/2006/relationships" xmlns:p="http://schemas.openxmlformats.org/presentationml/2006/main" showMasterSp="0" showMasterPhAnim="0">
   <p:cSld>
     <p:spTree>
@@ -2548,7 +2658,7 @@
 </p:notes>
 </file>
 
-<file path=ppt/notesSlides/notesSlide24.xml><?xml version="1.0" encoding="utf-8"?>
+<file path=ppt/notesSlides/notesSlide25.xml><?xml version="1.0" encoding="utf-8"?>
 <p:notes xmlns:a="http://schemas.openxmlformats.org/drawingml/2006/main" xmlns:r="http://schemas.openxmlformats.org/officeDocument/2006/relationships" xmlns:p="http://schemas.openxmlformats.org/presentationml/2006/main" showMasterSp="0" showMasterPhAnim="0">
   <p:cSld>
     <p:spTree>
@@ -2652,7 +2762,7 @@
 </p:notes>
 </file>
 
-<file path=ppt/notesSlides/notesSlide25.xml><?xml version="1.0" encoding="utf-8"?>
+<file path=ppt/notesSlides/notesSlide26.xml><?xml version="1.0" encoding="utf-8"?>
 <p:notes xmlns:a="http://schemas.openxmlformats.org/drawingml/2006/main" xmlns:r="http://schemas.openxmlformats.org/officeDocument/2006/relationships" xmlns:p="http://schemas.openxmlformats.org/presentationml/2006/main" showMasterSp="0" showMasterPhAnim="0">
   <p:cSld>
     <p:spTree>
@@ -2756,7 +2866,7 @@
 </p:notes>
 </file>
 
-<file path=ppt/notesSlides/notesSlide26.xml><?xml version="1.0" encoding="utf-8"?>
+<file path=ppt/notesSlides/notesSlide27.xml><?xml version="1.0" encoding="utf-8"?>
 <p:notes xmlns:a="http://schemas.openxmlformats.org/drawingml/2006/main" xmlns:r="http://schemas.openxmlformats.org/officeDocument/2006/relationships" xmlns:p="http://schemas.openxmlformats.org/presentationml/2006/main" showMasterSp="0" showMasterPhAnim="0">
   <p:cSld>
     <p:spTree>
@@ -2860,7 +2970,7 @@
 </p:notes>
 </file>
 
-<file path=ppt/notesSlides/notesSlide27.xml><?xml version="1.0" encoding="utf-8"?>
+<file path=ppt/notesSlides/notesSlide28.xml><?xml version="1.0" encoding="utf-8"?>
 <p:notes xmlns:a="http://schemas.openxmlformats.org/drawingml/2006/main" xmlns:r="http://schemas.openxmlformats.org/officeDocument/2006/relationships" xmlns:p="http://schemas.openxmlformats.org/presentationml/2006/main" showMasterSp="0" showMasterPhAnim="0">
   <p:cSld>
     <p:spTree>
@@ -3182,7 +3292,7 @@
   <p:cSld>
     <p:spTree>
       <p:nvGrpSpPr>
-        <p:cNvPr id="1" name="Shape 135"/>
+        <p:cNvPr id="1" name="Shape 119"/>
         <p:cNvGrpSpPr/>
         <p:nvPr/>
       </p:nvGrpSpPr>
@@ -3196,7 +3306,7 @@
       </p:grpSpPr>
       <p:sp>
         <p:nvSpPr>
-          <p:cNvPr id="136" name="Google Shape;136;p3:notes"/>
+          <p:cNvPr id="120" name="Google Shape;120;g3dbe1710380_1_211:notes"/>
           <p:cNvSpPr txBox="1">
             <a:spLocks noGrp="1"/>
           </p:cNvSpPr>
@@ -3234,7 +3344,7 @@
       </p:sp>
       <p:sp>
         <p:nvSpPr>
-          <p:cNvPr id="137" name="Google Shape;137;p3:notes"/>
+          <p:cNvPr id="121" name="Google Shape;121;g3dbe1710380_1_211:notes"/>
           <p:cNvSpPr>
             <a:spLocks noGrp="1" noRot="1" noChangeAspect="1"/>
           </p:cNvSpPr>
@@ -3378,11 +3488,6 @@
         </p:spPr>
       </p:sp>
     </p:spTree>
-    <p:extLst>
-      <p:ext uri="{BB962C8B-B14F-4D97-AF65-F5344CB8AC3E}">
-        <p14:creationId xmlns:p14="http://schemas.microsoft.com/office/powerpoint/2010/main" val="3541165483"/>
-      </p:ext>
-    </p:extLst>
   </p:cSld>
   <p:clrMapOvr>
     <a:masterClrMapping/>
@@ -3489,7 +3594,7 @@
     </p:spTree>
     <p:extLst>
       <p:ext uri="{BB962C8B-B14F-4D97-AF65-F5344CB8AC3E}">
-        <p14:creationId xmlns:p14="http://schemas.microsoft.com/office/powerpoint/2010/main" val="4104036851"/>
+        <p14:creationId xmlns:p14="http://schemas.microsoft.com/office/powerpoint/2010/main" val="3541165483"/>
       </p:ext>
     </p:extLst>
   </p:cSld>
@@ -3598,7 +3703,7 @@
     </p:spTree>
     <p:extLst>
       <p:ext uri="{BB962C8B-B14F-4D97-AF65-F5344CB8AC3E}">
-        <p14:creationId xmlns:p14="http://schemas.microsoft.com/office/powerpoint/2010/main" val="739215490"/>
+        <p14:creationId xmlns:p14="http://schemas.microsoft.com/office/powerpoint/2010/main" val="4104036851"/>
       </p:ext>
     </p:extLst>
   </p:cSld>
@@ -3707,7 +3812,7 @@
     </p:spTree>
     <p:extLst>
       <p:ext uri="{BB962C8B-B14F-4D97-AF65-F5344CB8AC3E}">
-        <p14:creationId xmlns:p14="http://schemas.microsoft.com/office/powerpoint/2010/main" val="3436316797"/>
+        <p14:creationId xmlns:p14="http://schemas.microsoft.com/office/powerpoint/2010/main" val="739215490"/>
       </p:ext>
     </p:extLst>
   </p:cSld>
@@ -14334,10 +14439,10 @@
       </p:sp>
       <p:pic>
         <p:nvPicPr>
-          <p:cNvPr id="4" name="Imatge 3">
+          <p:cNvPr id="3" name="Imatge 2">
             <a:extLst>
               <a:ext uri="{FF2B5EF4-FFF2-40B4-BE49-F238E27FC236}">
-                <a16:creationId xmlns:a16="http://schemas.microsoft.com/office/drawing/2014/main" id="{5350F70C-B643-4590-B86F-BF44DB0AF4C2}"/>
+                <a16:creationId xmlns:a16="http://schemas.microsoft.com/office/drawing/2014/main" id="{0B9CE290-D1C1-4189-9E21-0E59FAC078F3}"/>
               </a:ext>
             </a:extLst>
           </p:cNvPr>
@@ -14354,8 +14459,8 @@
         </p:blipFill>
         <p:spPr>
           <a:xfrm>
-            <a:off x="534994" y="1452208"/>
-            <a:ext cx="14763064" cy="8820277"/>
+            <a:off x="371483" y="1137967"/>
+            <a:ext cx="13299546" cy="9104063"/>
           </a:xfrm>
           <a:prstGeom prst="rect">
             <a:avLst/>
@@ -14599,6 +14704,457 @@
         </p:nvSpPr>
         <p:spPr>
           <a:xfrm>
+            <a:off x="2848133" y="4337802"/>
+            <a:ext cx="9773586" cy="365760"/>
+          </a:xfrm>
+          <a:prstGeom prst="roundRect">
+            <a:avLst/>
+          </a:prstGeom>
+          <a:noFill/>
+          <a:ln w="28575">
+            <a:solidFill>
+              <a:schemeClr val="accent6">
+                <a:lumMod val="75000"/>
+              </a:schemeClr>
+            </a:solidFill>
+          </a:ln>
+        </p:spPr>
+        <p:style>
+          <a:lnRef idx="2">
+            <a:schemeClr val="accent1">
+              <a:shade val="15000"/>
+            </a:schemeClr>
+          </a:lnRef>
+          <a:fillRef idx="1">
+            <a:schemeClr val="accent1"/>
+          </a:fillRef>
+          <a:effectRef idx="0">
+            <a:schemeClr val="accent1"/>
+          </a:effectRef>
+          <a:fontRef idx="minor">
+            <a:schemeClr val="lt1"/>
+          </a:fontRef>
+        </p:style>
+        <p:txBody>
+          <a:bodyPr rtlCol="0" anchor="ctr"/>
+          <a:lstStyle/>
+          <a:p>
+            <a:pPr algn="ctr"/>
+            <a:endParaRPr lang="es-ES"/>
+          </a:p>
+        </p:txBody>
+      </p:sp>
+      <p:sp>
+        <p:nvSpPr>
+          <p:cNvPr id="10" name="QuadreDeText 9">
+            <a:extLst>
+              <a:ext uri="{FF2B5EF4-FFF2-40B4-BE49-F238E27FC236}">
+                <a16:creationId xmlns:a16="http://schemas.microsoft.com/office/drawing/2014/main" id="{78EA8AD0-7D3A-4D72-BC07-3134E7C59809}"/>
+              </a:ext>
+            </a:extLst>
+          </p:cNvPr>
+          <p:cNvSpPr txBox="1"/>
+          <p:nvPr/>
+        </p:nvSpPr>
+        <p:spPr>
+          <a:xfrm>
+            <a:off x="12037101" y="9762696"/>
+            <a:ext cx="9173980" cy="307777"/>
+          </a:xfrm>
+          <a:prstGeom prst="rect">
+            <a:avLst/>
+          </a:prstGeom>
+          <a:noFill/>
+        </p:spPr>
+        <p:txBody>
+          <a:bodyPr wrap="square">
+            <a:spAutoFit/>
+          </a:bodyPr>
+          <a:lstStyle/>
+          <a:p>
+            <a:r>
+              <a:rPr lang="es-ES" dirty="0"/>
+              <a:t>Fuente: </a:t>
+            </a:r>
+            <a:r>
+              <a:rPr lang="es-ES" dirty="0">
+                <a:hlinkClick r:id="rId6"/>
+              </a:rPr>
+              <a:t>Encuesta Anual Laboral. Ministerio de Trabajo y Economía Social</a:t>
+            </a:r>
+            <a:endParaRPr lang="es-ES" dirty="0"/>
+          </a:p>
+        </p:txBody>
+      </p:sp>
+    </p:spTree>
+    <p:extLst>
+      <p:ext uri="{BB962C8B-B14F-4D97-AF65-F5344CB8AC3E}">
+        <p14:creationId xmlns:p14="http://schemas.microsoft.com/office/powerpoint/2010/main" val="2184726870"/>
+      </p:ext>
+    </p:extLst>
+  </p:cSld>
+  <p:clrMapOvr>
+    <a:masterClrMapping/>
+  </p:clrMapOvr>
+</p:sld>
+</file>
+
+<file path=ppt/slides/slide11.xml><?xml version="1.0" encoding="utf-8"?>
+<p:sld xmlns:a="http://schemas.openxmlformats.org/drawingml/2006/main" xmlns:r="http://schemas.openxmlformats.org/officeDocument/2006/relationships" xmlns:p="http://schemas.openxmlformats.org/presentationml/2006/main">
+  <p:cSld>
+    <p:bg>
+      <p:bgPr>
+        <a:solidFill>
+          <a:srgbClr val="E0E9F9"/>
+        </a:solidFill>
+        <a:effectLst/>
+      </p:bgPr>
+    </p:bg>
+    <p:spTree>
+      <p:nvGrpSpPr>
+        <p:cNvPr id="1" name="Shape 138"/>
+        <p:cNvGrpSpPr/>
+        <p:nvPr/>
+      </p:nvGrpSpPr>
+      <p:grpSpPr>
+        <a:xfrm>
+          <a:off x="0" y="0"/>
+          <a:ext cx="0" cy="0"/>
+          <a:chOff x="0" y="0"/>
+          <a:chExt cx="0" cy="0"/>
+        </a:xfrm>
+      </p:grpSpPr>
+      <p:sp>
+        <p:nvSpPr>
+          <p:cNvPr id="11" name="Google Shape;150;p17">
+            <a:extLst>
+              <a:ext uri="{FF2B5EF4-FFF2-40B4-BE49-F238E27FC236}">
+                <a16:creationId xmlns:a16="http://schemas.microsoft.com/office/drawing/2014/main" id="{DC31FCA6-E624-4F0D-9CEA-5147EAFF7540}"/>
+              </a:ext>
+            </a:extLst>
+          </p:cNvPr>
+          <p:cNvSpPr/>
+          <p:nvPr/>
+        </p:nvSpPr>
+        <p:spPr>
+          <a:xfrm>
+            <a:off x="13727091" y="2555717"/>
+            <a:ext cx="4065560" cy="5646612"/>
+          </a:xfrm>
+          <a:custGeom>
+            <a:avLst/>
+            <a:gdLst/>
+            <a:ahLst/>
+            <a:cxnLst/>
+            <a:rect l="l" t="t" r="r" b="b"/>
+            <a:pathLst>
+              <a:path w="6557355" h="9107438" extrusionOk="0">
+                <a:moveTo>
+                  <a:pt x="0" y="0"/>
+                </a:moveTo>
+                <a:lnTo>
+                  <a:pt x="6557355" y="0"/>
+                </a:lnTo>
+                <a:lnTo>
+                  <a:pt x="6557355" y="9107438"/>
+                </a:lnTo>
+                <a:lnTo>
+                  <a:pt x="0" y="9107438"/>
+                </a:lnTo>
+                <a:lnTo>
+                  <a:pt x="0" y="0"/>
+                </a:lnTo>
+                <a:close/>
+              </a:path>
+            </a:pathLst>
+          </a:custGeom>
+          <a:blipFill rotWithShape="1">
+            <a:blip r:embed="rId3">
+              <a:alphaModFix/>
+            </a:blip>
+            <a:stretch>
+              <a:fillRect/>
+            </a:stretch>
+          </a:blipFill>
+          <a:ln>
+            <a:noFill/>
+          </a:ln>
+        </p:spPr>
+        <p:txBody>
+          <a:bodyPr/>
+          <a:lstStyle/>
+          <a:p>
+            <a:endParaRPr lang="es-ES_tradnl" dirty="0"/>
+          </a:p>
+        </p:txBody>
+      </p:sp>
+      <p:pic>
+        <p:nvPicPr>
+          <p:cNvPr id="4" name="Imatge 3">
+            <a:extLst>
+              <a:ext uri="{FF2B5EF4-FFF2-40B4-BE49-F238E27FC236}">
+                <a16:creationId xmlns:a16="http://schemas.microsoft.com/office/drawing/2014/main" id="{5350F70C-B643-4590-B86F-BF44DB0AF4C2}"/>
+              </a:ext>
+            </a:extLst>
+          </p:cNvPr>
+          <p:cNvPicPr>
+            <a:picLocks noChangeAspect="1"/>
+          </p:cNvPicPr>
+          <p:nvPr/>
+        </p:nvPicPr>
+        <p:blipFill>
+          <a:blip r:embed="rId4"/>
+          <a:stretch>
+            <a:fillRect/>
+          </a:stretch>
+        </p:blipFill>
+        <p:spPr>
+          <a:xfrm>
+            <a:off x="534994" y="1452208"/>
+            <a:ext cx="14763064" cy="8820277"/>
+          </a:xfrm>
+          <a:prstGeom prst="rect">
+            <a:avLst/>
+          </a:prstGeom>
+        </p:spPr>
+      </p:pic>
+      <p:sp>
+        <p:nvSpPr>
+          <p:cNvPr id="142" name="Google Shape;142;p16"/>
+          <p:cNvSpPr txBox="1"/>
+          <p:nvPr/>
+        </p:nvSpPr>
+        <p:spPr>
+          <a:xfrm>
+            <a:off x="4000546" y="524304"/>
+            <a:ext cx="9594965" cy="670505"/>
+          </a:xfrm>
+          <a:prstGeom prst="rect">
+            <a:avLst/>
+          </a:prstGeom>
+          <a:noFill/>
+          <a:ln>
+            <a:noFill/>
+          </a:ln>
+        </p:spPr>
+        <p:txBody>
+          <a:bodyPr spcFirstLastPara="1" wrap="square" lIns="0" tIns="0" rIns="0" bIns="0" anchor="t" anchorCtr="0">
+            <a:spAutoFit/>
+          </a:bodyPr>
+          <a:lstStyle/>
+          <a:p>
+            <a:pPr marL="0" marR="0" lvl="0" indent="0" algn="l" rtl="0">
+              <a:lnSpc>
+                <a:spcPct val="121055"/>
+              </a:lnSpc>
+              <a:spcBef>
+                <a:spcPts val="0"/>
+              </a:spcBef>
+              <a:spcAft>
+                <a:spcPts val="0"/>
+              </a:spcAft>
+              <a:buNone/>
+            </a:pPr>
+            <a:r>
+              <a:rPr lang="es-ES_tradnl" sz="3601" b="1" i="0" u="none" strike="noStrike" cap="none" dirty="0">
+                <a:solidFill>
+                  <a:srgbClr val="004AAD"/>
+                </a:solidFill>
+                <a:latin typeface="Poppins"/>
+                <a:ea typeface="Poppins"/>
+                <a:cs typeface="Poppins"/>
+                <a:sym typeface="Poppins"/>
+              </a:rPr>
+              <a:t>Análisis por </a:t>
+            </a:r>
+            <a:r>
+              <a:rPr lang="es-ES_tradnl" sz="3601" b="1" dirty="0">
+                <a:solidFill>
+                  <a:srgbClr val="004AAD"/>
+                </a:solidFill>
+                <a:latin typeface="Poppins"/>
+                <a:ea typeface="Poppins"/>
+                <a:cs typeface="Poppins"/>
+                <a:sym typeface="Poppins"/>
+              </a:rPr>
+              <a:t>C</a:t>
+            </a:r>
+            <a:r>
+              <a:rPr lang="es-ES_tradnl" sz="3601" b="1" i="0" u="none" strike="noStrike" cap="none" dirty="0">
+                <a:solidFill>
+                  <a:srgbClr val="004AAD"/>
+                </a:solidFill>
+                <a:latin typeface="Poppins"/>
+                <a:ea typeface="Poppins"/>
+                <a:cs typeface="Poppins"/>
+                <a:sym typeface="Poppins"/>
+              </a:rPr>
+              <a:t>omunidad </a:t>
+            </a:r>
+            <a:r>
+              <a:rPr lang="es-ES_tradnl" sz="3601" b="1" dirty="0">
+                <a:solidFill>
+                  <a:srgbClr val="004AAD"/>
+                </a:solidFill>
+                <a:latin typeface="Poppins"/>
+                <a:ea typeface="Poppins"/>
+                <a:cs typeface="Poppins"/>
+                <a:sym typeface="Poppins"/>
+              </a:rPr>
+              <a:t>A</a:t>
+            </a:r>
+            <a:r>
+              <a:rPr lang="es-ES_tradnl" sz="3601" b="1" i="0" u="none" strike="noStrike" cap="none" dirty="0">
+                <a:solidFill>
+                  <a:srgbClr val="004AAD"/>
+                </a:solidFill>
+                <a:latin typeface="Poppins"/>
+                <a:ea typeface="Poppins"/>
+                <a:cs typeface="Poppins"/>
+                <a:sym typeface="Poppins"/>
+              </a:rPr>
+              <a:t>utónoma</a:t>
+            </a:r>
+            <a:endParaRPr lang="es-ES_tradnl" dirty="0"/>
+          </a:p>
+        </p:txBody>
+      </p:sp>
+      <p:grpSp>
+        <p:nvGrpSpPr>
+          <p:cNvPr id="143" name="Google Shape;143;p16"/>
+          <p:cNvGrpSpPr/>
+          <p:nvPr/>
+        </p:nvGrpSpPr>
+        <p:grpSpPr>
+          <a:xfrm>
+            <a:off x="0" y="5"/>
+            <a:ext cx="2163413" cy="1886345"/>
+            <a:chOff x="12784175" y="3675030"/>
+            <a:chExt cx="2163413" cy="1886345"/>
+          </a:xfrm>
+        </p:grpSpPr>
+        <p:sp>
+          <p:nvSpPr>
+            <p:cNvPr id="144" name="Google Shape;144;p16"/>
+            <p:cNvSpPr txBox="1"/>
+            <p:nvPr/>
+          </p:nvSpPr>
+          <p:spPr>
+            <a:xfrm rot="1830973">
+              <a:off x="12805773" y="4425496"/>
+              <a:ext cx="2081405" cy="652657"/>
+            </a:xfrm>
+            <a:prstGeom prst="rect">
+              <a:avLst/>
+            </a:prstGeom>
+            <a:noFill/>
+            <a:ln>
+              <a:noFill/>
+            </a:ln>
+          </p:spPr>
+          <p:txBody>
+            <a:bodyPr spcFirstLastPara="1" wrap="square" lIns="91425" tIns="91425" rIns="91425" bIns="91425" anchor="t" anchorCtr="0">
+              <a:noAutofit/>
+            </a:bodyPr>
+            <a:lstStyle/>
+            <a:p>
+              <a:pPr marL="0" lvl="0" indent="0" algn="l" rtl="0">
+                <a:spcBef>
+                  <a:spcPts val="0"/>
+                </a:spcBef>
+                <a:spcAft>
+                  <a:spcPts val="0"/>
+                </a:spcAft>
+                <a:buNone/>
+              </a:pPr>
+              <a:r>
+                <a:rPr lang="es-ES_tradnl" sz="2300" b="1" i="1" dirty="0">
+                  <a:solidFill>
+                    <a:srgbClr val="E69138"/>
+                  </a:solidFill>
+                  <a:latin typeface="Calibri"/>
+                  <a:ea typeface="Calibri"/>
+                  <a:cs typeface="Calibri"/>
+                  <a:sym typeface="Calibri"/>
+                </a:rPr>
+                <a:t>RAPID EXPRESS </a:t>
+              </a:r>
+            </a:p>
+          </p:txBody>
+        </p:sp>
+        <p:sp>
+          <p:nvSpPr>
+            <p:cNvPr id="145" name="Google Shape;145;p16"/>
+            <p:cNvSpPr/>
+            <p:nvPr/>
+          </p:nvSpPr>
+          <p:spPr>
+            <a:xfrm>
+              <a:off x="13335203" y="3675030"/>
+              <a:ext cx="1612385" cy="1275250"/>
+            </a:xfrm>
+            <a:custGeom>
+              <a:avLst/>
+              <a:gdLst/>
+              <a:ahLst/>
+              <a:cxnLst/>
+              <a:rect l="l" t="t" r="r" b="b"/>
+              <a:pathLst>
+                <a:path w="1612385" h="1275250" extrusionOk="0">
+                  <a:moveTo>
+                    <a:pt x="0" y="0"/>
+                  </a:moveTo>
+                  <a:lnTo>
+                    <a:pt x="1612384" y="0"/>
+                  </a:lnTo>
+                  <a:lnTo>
+                    <a:pt x="1612384" y="1275249"/>
+                  </a:lnTo>
+                  <a:lnTo>
+                    <a:pt x="0" y="1275249"/>
+                  </a:lnTo>
+                  <a:lnTo>
+                    <a:pt x="0" y="0"/>
+                  </a:lnTo>
+                  <a:close/>
+                </a:path>
+              </a:pathLst>
+            </a:custGeom>
+            <a:blipFill rotWithShape="1">
+              <a:blip r:embed="rId5">
+                <a:alphaModFix/>
+              </a:blip>
+              <a:stretch>
+                <a:fillRect/>
+              </a:stretch>
+            </a:blipFill>
+            <a:ln>
+              <a:noFill/>
+            </a:ln>
+          </p:spPr>
+          <p:txBody>
+            <a:bodyPr/>
+            <a:lstStyle/>
+            <a:p>
+              <a:endParaRPr lang="es-ES_tradnl" dirty="0"/>
+            </a:p>
+          </p:txBody>
+        </p:sp>
+      </p:grpSp>
+      <p:sp>
+        <p:nvSpPr>
+          <p:cNvPr id="5" name="Rectángulo redondeado 4">
+            <a:extLst>
+              <a:ext uri="{FF2B5EF4-FFF2-40B4-BE49-F238E27FC236}">
+                <a16:creationId xmlns:a16="http://schemas.microsoft.com/office/drawing/2014/main" id="{4662BFC3-4DAD-4767-15A8-BAC1AD191C5D}"/>
+              </a:ext>
+            </a:extLst>
+          </p:cNvPr>
+          <p:cNvSpPr/>
+          <p:nvPr/>
+        </p:nvSpPr>
+        <p:spPr>
+          <a:xfrm>
             <a:off x="2964245" y="4381344"/>
             <a:ext cx="11521011" cy="365760"/>
           </a:xfrm>
@@ -14652,7 +15208,7 @@
 </p:sld>
 </file>
 
-<file path=ppt/slides/slide11.xml><?xml version="1.0" encoding="utf-8"?>
+<file path=ppt/slides/slide12.xml><?xml version="1.0" encoding="utf-8"?>
 <p:sld xmlns:a="http://schemas.openxmlformats.org/drawingml/2006/main" xmlns:r="http://schemas.openxmlformats.org/officeDocument/2006/relationships" xmlns:p="http://schemas.openxmlformats.org/presentationml/2006/main">
   <p:cSld>
     <p:bg>
@@ -15049,7 +15605,7 @@
 </p:sld>
 </file>
 
-<file path=ppt/slides/slide12.xml><?xml version="1.0" encoding="utf-8"?>
+<file path=ppt/slides/slide13.xml><?xml version="1.0" encoding="utf-8"?>
 <p:sld xmlns:a="http://schemas.openxmlformats.org/drawingml/2006/main" xmlns:r="http://schemas.openxmlformats.org/officeDocument/2006/relationships" xmlns:p="http://schemas.openxmlformats.org/presentationml/2006/main">
   <p:cSld>
     <p:bg>
@@ -16023,7 +16579,7 @@
 </p:sld>
 </file>
 
-<file path=ppt/slides/slide13.xml><?xml version="1.0" encoding="utf-8"?>
+<file path=ppt/slides/slide14.xml><?xml version="1.0" encoding="utf-8"?>
 <p:sld xmlns:a="http://schemas.openxmlformats.org/drawingml/2006/main" xmlns:r="http://schemas.openxmlformats.org/officeDocument/2006/relationships" xmlns:p="http://schemas.openxmlformats.org/presentationml/2006/main">
   <p:cSld>
     <p:bg>
@@ -16729,7 +17285,7 @@
 </p:sld>
 </file>
 
-<file path=ppt/slides/slide14.xml><?xml version="1.0" encoding="utf-8"?>
+<file path=ppt/slides/slide15.xml><?xml version="1.0" encoding="utf-8"?>
 <p:sld xmlns:a="http://schemas.openxmlformats.org/drawingml/2006/main" xmlns:r="http://schemas.openxmlformats.org/officeDocument/2006/relationships" xmlns:p="http://schemas.openxmlformats.org/presentationml/2006/main">
   <p:cSld>
     <p:bg>
@@ -17973,7 +18529,7 @@
 </p:sld>
 </file>
 
-<file path=ppt/slides/slide15.xml><?xml version="1.0" encoding="utf-8"?>
+<file path=ppt/slides/slide16.xml><?xml version="1.0" encoding="utf-8"?>
 <p:sld xmlns:a="http://schemas.openxmlformats.org/drawingml/2006/main" xmlns:r="http://schemas.openxmlformats.org/officeDocument/2006/relationships" xmlns:p="http://schemas.openxmlformats.org/presentationml/2006/main">
   <p:cSld>
     <p:bg>
@@ -18974,7 +19530,7 @@
 </p:sld>
 </file>
 
-<file path=ppt/slides/slide16.xml><?xml version="1.0" encoding="utf-8"?>
+<file path=ppt/slides/slide17.xml><?xml version="1.0" encoding="utf-8"?>
 <p:sld xmlns:a="http://schemas.openxmlformats.org/drawingml/2006/main" xmlns:r="http://schemas.openxmlformats.org/officeDocument/2006/relationships" xmlns:p="http://schemas.openxmlformats.org/presentationml/2006/main">
   <p:cSld>
     <p:bg>
@@ -19311,7 +19867,7 @@
 </p:sld>
 </file>
 
-<file path=ppt/slides/slide17.xml><?xml version="1.0" encoding="utf-8"?>
+<file path=ppt/slides/slide18.xml><?xml version="1.0" encoding="utf-8"?>
 <p:sld xmlns:a="http://schemas.openxmlformats.org/drawingml/2006/main" xmlns:r="http://schemas.openxmlformats.org/officeDocument/2006/relationships" xmlns:p="http://schemas.openxmlformats.org/presentationml/2006/main">
   <p:cSld>
     <p:bg>
@@ -20137,7 +20693,7 @@
 </p:sld>
 </file>
 
-<file path=ppt/slides/slide18.xml><?xml version="1.0" encoding="utf-8"?>
+<file path=ppt/slides/slide19.xml><?xml version="1.0" encoding="utf-8"?>
 <p:sld xmlns:a="http://schemas.openxmlformats.org/drawingml/2006/main" xmlns:r="http://schemas.openxmlformats.org/officeDocument/2006/relationships" xmlns:p="http://schemas.openxmlformats.org/presentationml/2006/main">
   <p:cSld>
     <p:bg>
@@ -22168,2146 +22724,6 @@
     <p:extLst>
       <p:ext uri="{BB962C8B-B14F-4D97-AF65-F5344CB8AC3E}">
         <p14:creationId xmlns:p14="http://schemas.microsoft.com/office/powerpoint/2010/main" val="1477851174"/>
-      </p:ext>
-    </p:extLst>
-  </p:cSld>
-  <p:clrMapOvr>
-    <a:masterClrMapping/>
-  </p:clrMapOvr>
-</p:sld>
-</file>
-
-<file path=ppt/slides/slide19.xml><?xml version="1.0" encoding="utf-8"?>
-<p:sld xmlns:a="http://schemas.openxmlformats.org/drawingml/2006/main" xmlns:r="http://schemas.openxmlformats.org/officeDocument/2006/relationships" xmlns:p="http://schemas.openxmlformats.org/presentationml/2006/main">
-  <p:cSld>
-    <p:bg>
-      <p:bgPr>
-        <a:solidFill>
-          <a:srgbClr val="E0E9F9"/>
-        </a:solidFill>
-        <a:effectLst/>
-      </p:bgPr>
-    </p:bg>
-    <p:spTree>
-      <p:nvGrpSpPr>
-        <p:cNvPr id="1" name="Shape 160">
-          <a:extLst>
-            <a:ext uri="{FF2B5EF4-FFF2-40B4-BE49-F238E27FC236}">
-              <a16:creationId xmlns:a16="http://schemas.microsoft.com/office/drawing/2014/main" id="{DA297602-4BBB-8124-85EA-38BC67F0ED50}"/>
-            </a:ext>
-          </a:extLst>
-        </p:cNvPr>
-        <p:cNvGrpSpPr/>
-        <p:nvPr/>
-      </p:nvGrpSpPr>
-      <p:grpSpPr>
-        <a:xfrm>
-          <a:off x="0" y="0"/>
-          <a:ext cx="0" cy="0"/>
-          <a:chOff x="0" y="0"/>
-          <a:chExt cx="0" cy="0"/>
-        </a:xfrm>
-      </p:grpSpPr>
-      <p:sp>
-        <p:nvSpPr>
-          <p:cNvPr id="161" name="Google Shape;161;p18">
-            <a:extLst>
-              <a:ext uri="{FF2B5EF4-FFF2-40B4-BE49-F238E27FC236}">
-                <a16:creationId xmlns:a16="http://schemas.microsoft.com/office/drawing/2014/main" id="{FA7FADFD-60A0-32BE-B0F0-F90CE928063D}"/>
-              </a:ext>
-            </a:extLst>
-          </p:cNvPr>
-          <p:cNvSpPr/>
-          <p:nvPr/>
-        </p:nvSpPr>
-        <p:spPr>
-          <a:xfrm>
-            <a:off x="-411641" y="7198177"/>
-            <a:ext cx="4653133" cy="3680205"/>
-          </a:xfrm>
-          <a:custGeom>
-            <a:avLst/>
-            <a:gdLst/>
-            <a:ahLst/>
-            <a:cxnLst/>
-            <a:rect l="l" t="t" r="r" b="b"/>
-            <a:pathLst>
-              <a:path w="9643798" h="7627368" extrusionOk="0">
-                <a:moveTo>
-                  <a:pt x="0" y="0"/>
-                </a:moveTo>
-                <a:lnTo>
-                  <a:pt x="9643798" y="0"/>
-                </a:lnTo>
-                <a:lnTo>
-                  <a:pt x="9643798" y="7627368"/>
-                </a:lnTo>
-                <a:lnTo>
-                  <a:pt x="0" y="7627368"/>
-                </a:lnTo>
-                <a:lnTo>
-                  <a:pt x="0" y="0"/>
-                </a:lnTo>
-                <a:close/>
-              </a:path>
-            </a:pathLst>
-          </a:custGeom>
-          <a:blipFill rotWithShape="1">
-            <a:blip r:embed="rId3">
-              <a:alphaModFix/>
-            </a:blip>
-            <a:stretch>
-              <a:fillRect/>
-            </a:stretch>
-          </a:blipFill>
-          <a:ln>
-            <a:noFill/>
-          </a:ln>
-        </p:spPr>
-        <p:txBody>
-          <a:bodyPr/>
-          <a:lstStyle/>
-          <a:p>
-            <a:endParaRPr lang="es-ES_tradnl" dirty="0"/>
-          </a:p>
-        </p:txBody>
-      </p:sp>
-      <p:sp>
-        <p:nvSpPr>
-          <p:cNvPr id="162" name="Google Shape;162;p18">
-            <a:extLst>
-              <a:ext uri="{FF2B5EF4-FFF2-40B4-BE49-F238E27FC236}">
-                <a16:creationId xmlns:a16="http://schemas.microsoft.com/office/drawing/2014/main" id="{C440BC94-E658-41A3-E378-7422709BA398}"/>
-              </a:ext>
-            </a:extLst>
-          </p:cNvPr>
-          <p:cNvSpPr/>
-          <p:nvPr/>
-        </p:nvSpPr>
-        <p:spPr>
-          <a:xfrm>
-            <a:off x="5482809" y="8188196"/>
-            <a:ext cx="2156379" cy="1936821"/>
-          </a:xfrm>
-          <a:custGeom>
-            <a:avLst/>
-            <a:gdLst/>
-            <a:ahLst/>
-            <a:cxnLst/>
-            <a:rect l="l" t="t" r="r" b="b"/>
-            <a:pathLst>
-              <a:path w="4469180" h="4014136" extrusionOk="0">
-                <a:moveTo>
-                  <a:pt x="0" y="0"/>
-                </a:moveTo>
-                <a:lnTo>
-                  <a:pt x="4469180" y="0"/>
-                </a:lnTo>
-                <a:lnTo>
-                  <a:pt x="4469180" y="4014136"/>
-                </a:lnTo>
-                <a:lnTo>
-                  <a:pt x="0" y="4014136"/>
-                </a:lnTo>
-                <a:lnTo>
-                  <a:pt x="0" y="0"/>
-                </a:lnTo>
-                <a:close/>
-              </a:path>
-            </a:pathLst>
-          </a:custGeom>
-          <a:blipFill rotWithShape="1">
-            <a:blip r:embed="rId4">
-              <a:alphaModFix/>
-            </a:blip>
-            <a:stretch>
-              <a:fillRect/>
-            </a:stretch>
-          </a:blipFill>
-          <a:ln>
-            <a:noFill/>
-          </a:ln>
-        </p:spPr>
-        <p:txBody>
-          <a:bodyPr/>
-          <a:lstStyle/>
-          <a:p>
-            <a:endParaRPr lang="es-ES_tradnl" dirty="0"/>
-          </a:p>
-        </p:txBody>
-      </p:sp>
-      <p:sp>
-        <p:nvSpPr>
-          <p:cNvPr id="163" name="Google Shape;163;p18">
-            <a:extLst>
-              <a:ext uri="{FF2B5EF4-FFF2-40B4-BE49-F238E27FC236}">
-                <a16:creationId xmlns:a16="http://schemas.microsoft.com/office/drawing/2014/main" id="{CFCEAEBD-EF5E-82A0-0B56-8E2B61FEEFA3}"/>
-              </a:ext>
-            </a:extLst>
-          </p:cNvPr>
-          <p:cNvSpPr/>
-          <p:nvPr/>
-        </p:nvSpPr>
-        <p:spPr>
-          <a:xfrm>
-            <a:off x="9504429" y="8159082"/>
-            <a:ext cx="2156379" cy="1936821"/>
-          </a:xfrm>
-          <a:custGeom>
-            <a:avLst/>
-            <a:gdLst/>
-            <a:ahLst/>
-            <a:cxnLst/>
-            <a:rect l="l" t="t" r="r" b="b"/>
-            <a:pathLst>
-              <a:path w="4469180" h="4014136" extrusionOk="0">
-                <a:moveTo>
-                  <a:pt x="0" y="0"/>
-                </a:moveTo>
-                <a:lnTo>
-                  <a:pt x="4469180" y="0"/>
-                </a:lnTo>
-                <a:lnTo>
-                  <a:pt x="4469180" y="4014136"/>
-                </a:lnTo>
-                <a:lnTo>
-                  <a:pt x="0" y="4014136"/>
-                </a:lnTo>
-                <a:lnTo>
-                  <a:pt x="0" y="0"/>
-                </a:lnTo>
-                <a:close/>
-              </a:path>
-            </a:pathLst>
-          </a:custGeom>
-          <a:blipFill rotWithShape="1">
-            <a:blip r:embed="rId4">
-              <a:alphaModFix/>
-            </a:blip>
-            <a:stretch>
-              <a:fillRect/>
-            </a:stretch>
-          </a:blipFill>
-          <a:ln>
-            <a:noFill/>
-          </a:ln>
-        </p:spPr>
-        <p:txBody>
-          <a:bodyPr/>
-          <a:lstStyle/>
-          <a:p>
-            <a:endParaRPr lang="es-ES_tradnl" dirty="0"/>
-          </a:p>
-        </p:txBody>
-      </p:sp>
-      <p:sp>
-        <p:nvSpPr>
-          <p:cNvPr id="167" name="Google Shape;167;p18">
-            <a:extLst>
-              <a:ext uri="{FF2B5EF4-FFF2-40B4-BE49-F238E27FC236}">
-                <a16:creationId xmlns:a16="http://schemas.microsoft.com/office/drawing/2014/main" id="{31C7F14F-C1D2-243D-7A0B-9520357B6CFB}"/>
-              </a:ext>
-            </a:extLst>
-          </p:cNvPr>
-          <p:cNvSpPr txBox="1"/>
-          <p:nvPr/>
-        </p:nvSpPr>
-        <p:spPr>
-          <a:xfrm>
-            <a:off x="5794045" y="553200"/>
-            <a:ext cx="6022200" cy="670505"/>
-          </a:xfrm>
-          <a:prstGeom prst="rect">
-            <a:avLst/>
-          </a:prstGeom>
-          <a:noFill/>
-          <a:ln>
-            <a:noFill/>
-          </a:ln>
-        </p:spPr>
-        <p:txBody>
-          <a:bodyPr spcFirstLastPara="1" wrap="square" lIns="0" tIns="0" rIns="0" bIns="0" anchor="t" anchorCtr="0">
-            <a:spAutoFit/>
-          </a:bodyPr>
-          <a:lstStyle/>
-          <a:p>
-            <a:pPr marL="0" marR="0" lvl="0" indent="0" algn="ctr" rtl="0">
-              <a:lnSpc>
-                <a:spcPct val="121055"/>
-              </a:lnSpc>
-              <a:spcBef>
-                <a:spcPts val="0"/>
-              </a:spcBef>
-              <a:spcAft>
-                <a:spcPts val="0"/>
-              </a:spcAft>
-              <a:buNone/>
-            </a:pPr>
-            <a:r>
-              <a:rPr lang="es-ES_tradnl" sz="3601" b="1" dirty="0">
-                <a:solidFill>
-                  <a:srgbClr val="004AAD"/>
-                </a:solidFill>
-                <a:latin typeface="Poppins"/>
-                <a:cs typeface="Poppins"/>
-                <a:sym typeface="Poppins"/>
-              </a:rPr>
-              <a:t>Identificación de perfiles</a:t>
-            </a:r>
-            <a:endParaRPr lang="es-ES_tradnl" dirty="0"/>
-          </a:p>
-        </p:txBody>
-      </p:sp>
-      <p:sp>
-        <p:nvSpPr>
-          <p:cNvPr id="11" name="Rectangle 10">
-            <a:extLst>
-              <a:ext uri="{FF2B5EF4-FFF2-40B4-BE49-F238E27FC236}">
-                <a16:creationId xmlns:a16="http://schemas.microsoft.com/office/drawing/2014/main" id="{1AF05D9C-A020-4BB4-E559-6C31990412CF}"/>
-              </a:ext>
-            </a:extLst>
-          </p:cNvPr>
-          <p:cNvSpPr/>
-          <p:nvPr/>
-        </p:nvSpPr>
-        <p:spPr>
-          <a:xfrm>
-            <a:off x="7177595" y="1772428"/>
-            <a:ext cx="3255100" cy="1106906"/>
-          </a:xfrm>
-          <a:prstGeom prst="rect">
-            <a:avLst/>
-          </a:prstGeom>
-          <a:solidFill>
-            <a:schemeClr val="bg1"/>
-          </a:solidFill>
-          <a:ln>
-            <a:solidFill>
-              <a:schemeClr val="bg2"/>
-            </a:solidFill>
-          </a:ln>
-        </p:spPr>
-        <p:style>
-          <a:lnRef idx="2">
-            <a:schemeClr val="accent1">
-              <a:shade val="50000"/>
-            </a:schemeClr>
-          </a:lnRef>
-          <a:fillRef idx="1">
-            <a:schemeClr val="accent1"/>
-          </a:fillRef>
-          <a:effectRef idx="0">
-            <a:schemeClr val="accent1"/>
-          </a:effectRef>
-          <a:fontRef idx="minor">
-            <a:schemeClr val="lt1"/>
-          </a:fontRef>
-        </p:style>
-        <p:txBody>
-          <a:bodyPr rtlCol="0" anchor="ctr"/>
-          <a:lstStyle/>
-          <a:p>
-            <a:pPr algn="ctr"/>
-            <a:r>
-              <a:rPr lang="es-ES_tradnl" sz="2400" b="1" dirty="0">
-                <a:solidFill>
-                  <a:schemeClr val="bg2"/>
-                </a:solidFill>
-              </a:rPr>
-              <a:t>PERFIL ÓPTIMO</a:t>
-            </a:r>
-          </a:p>
-        </p:txBody>
-      </p:sp>
-      <p:sp>
-        <p:nvSpPr>
-          <p:cNvPr id="13" name="Rectangle 12">
-            <a:extLst>
-              <a:ext uri="{FF2B5EF4-FFF2-40B4-BE49-F238E27FC236}">
-                <a16:creationId xmlns:a16="http://schemas.microsoft.com/office/drawing/2014/main" id="{0EA71E87-3B90-32C4-7C27-58EDCC2D761B}"/>
-              </a:ext>
-            </a:extLst>
-          </p:cNvPr>
-          <p:cNvSpPr/>
-          <p:nvPr/>
-        </p:nvSpPr>
-        <p:spPr>
-          <a:xfrm>
-            <a:off x="1213913" y="2362717"/>
-            <a:ext cx="3255100" cy="1106906"/>
-          </a:xfrm>
-          <a:prstGeom prst="rect">
-            <a:avLst/>
-          </a:prstGeom>
-          <a:solidFill>
-            <a:schemeClr val="bg1"/>
-          </a:solidFill>
-          <a:ln>
-            <a:solidFill>
-              <a:schemeClr val="bg2"/>
-            </a:solidFill>
-          </a:ln>
-        </p:spPr>
-        <p:style>
-          <a:lnRef idx="2">
-            <a:schemeClr val="accent1">
-              <a:shade val="50000"/>
-            </a:schemeClr>
-          </a:lnRef>
-          <a:fillRef idx="1">
-            <a:schemeClr val="accent1"/>
-          </a:fillRef>
-          <a:effectRef idx="0">
-            <a:schemeClr val="accent1"/>
-          </a:effectRef>
-          <a:fontRef idx="minor">
-            <a:schemeClr val="lt1"/>
-          </a:fontRef>
-        </p:style>
-        <p:txBody>
-          <a:bodyPr rtlCol="0" anchor="ctr"/>
-          <a:lstStyle/>
-          <a:p>
-            <a:pPr algn="ctr"/>
-            <a:r>
-              <a:rPr lang="es-ES_tradnl" sz="2400" b="1" dirty="0">
-                <a:solidFill>
-                  <a:schemeClr val="bg2"/>
-                </a:solidFill>
-              </a:rPr>
-              <a:t>PERFIL CRÍTICO</a:t>
-            </a:r>
-          </a:p>
-        </p:txBody>
-      </p:sp>
-      <p:sp>
-        <p:nvSpPr>
-          <p:cNvPr id="14" name="Rectangle 13">
-            <a:extLst>
-              <a:ext uri="{FF2B5EF4-FFF2-40B4-BE49-F238E27FC236}">
-                <a16:creationId xmlns:a16="http://schemas.microsoft.com/office/drawing/2014/main" id="{302D5BD7-5072-A712-E89D-315E1246CCD2}"/>
-              </a:ext>
-            </a:extLst>
-          </p:cNvPr>
-          <p:cNvSpPr/>
-          <p:nvPr/>
-        </p:nvSpPr>
-        <p:spPr>
-          <a:xfrm>
-            <a:off x="13262477" y="2335213"/>
-            <a:ext cx="3255100" cy="1106906"/>
-          </a:xfrm>
-          <a:prstGeom prst="rect">
-            <a:avLst/>
-          </a:prstGeom>
-          <a:solidFill>
-            <a:schemeClr val="bg1"/>
-          </a:solidFill>
-          <a:ln>
-            <a:solidFill>
-              <a:schemeClr val="bg2"/>
-            </a:solidFill>
-          </a:ln>
-        </p:spPr>
-        <p:style>
-          <a:lnRef idx="2">
-            <a:schemeClr val="accent1">
-              <a:shade val="50000"/>
-            </a:schemeClr>
-          </a:lnRef>
-          <a:fillRef idx="1">
-            <a:schemeClr val="accent1"/>
-          </a:fillRef>
-          <a:effectRef idx="0">
-            <a:schemeClr val="accent1"/>
-          </a:effectRef>
-          <a:fontRef idx="minor">
-            <a:schemeClr val="lt1"/>
-          </a:fontRef>
-        </p:style>
-        <p:txBody>
-          <a:bodyPr rtlCol="0" anchor="ctr"/>
-          <a:lstStyle/>
-          <a:p>
-            <a:pPr algn="ctr"/>
-            <a:r>
-              <a:rPr lang="es-ES_tradnl" sz="2400" b="1" dirty="0">
-                <a:solidFill>
-                  <a:schemeClr val="bg2"/>
-                </a:solidFill>
-              </a:rPr>
-              <a:t>PERFIL SATURADO</a:t>
-            </a:r>
-          </a:p>
-        </p:txBody>
-      </p:sp>
-      <p:sp>
-        <p:nvSpPr>
-          <p:cNvPr id="15" name="Rectangle 14">
-            <a:extLst>
-              <a:ext uri="{FF2B5EF4-FFF2-40B4-BE49-F238E27FC236}">
-                <a16:creationId xmlns:a16="http://schemas.microsoft.com/office/drawing/2014/main" id="{65FA6F57-08F9-AB33-9203-BBB34C284455}"/>
-              </a:ext>
-            </a:extLst>
-          </p:cNvPr>
-          <p:cNvSpPr/>
-          <p:nvPr/>
-        </p:nvSpPr>
-        <p:spPr>
-          <a:xfrm>
-            <a:off x="3083700" y="4226329"/>
-            <a:ext cx="2156379" cy="809011"/>
-          </a:xfrm>
-          <a:prstGeom prst="rect">
-            <a:avLst/>
-          </a:prstGeom>
-          <a:solidFill>
-            <a:schemeClr val="bg1"/>
-          </a:solidFill>
-          <a:ln>
-            <a:solidFill>
-              <a:schemeClr val="bg2"/>
-            </a:solidFill>
-          </a:ln>
-        </p:spPr>
-        <p:style>
-          <a:lnRef idx="2">
-            <a:schemeClr val="accent1">
-              <a:shade val="50000"/>
-            </a:schemeClr>
-          </a:lnRef>
-          <a:fillRef idx="1">
-            <a:schemeClr val="accent1"/>
-          </a:fillRef>
-          <a:effectRef idx="0">
-            <a:schemeClr val="accent1"/>
-          </a:effectRef>
-          <a:fontRef idx="minor">
-            <a:schemeClr val="lt1"/>
-          </a:fontRef>
-        </p:style>
-        <p:txBody>
-          <a:bodyPr rtlCol="0" anchor="ctr"/>
-          <a:lstStyle/>
-          <a:p>
-            <a:pPr algn="ctr"/>
-            <a:r>
-              <a:rPr lang="es-ES_tradnl" sz="2400" b="1" dirty="0">
-                <a:solidFill>
-                  <a:schemeClr val="bg2"/>
-                </a:solidFill>
-              </a:rPr>
-              <a:t>DESEMPEÑO</a:t>
-            </a:r>
-          </a:p>
-        </p:txBody>
-      </p:sp>
-      <p:grpSp>
-        <p:nvGrpSpPr>
-          <p:cNvPr id="164" name="Google Shape;164;p18">
-            <a:extLst>
-              <a:ext uri="{FF2B5EF4-FFF2-40B4-BE49-F238E27FC236}">
-                <a16:creationId xmlns:a16="http://schemas.microsoft.com/office/drawing/2014/main" id="{5C8F871A-0C94-7ACA-9EC2-2CF655A37500}"/>
-              </a:ext>
-            </a:extLst>
-          </p:cNvPr>
-          <p:cNvGrpSpPr/>
-          <p:nvPr/>
-        </p:nvGrpSpPr>
-        <p:grpSpPr>
-          <a:xfrm>
-            <a:off x="-118494" y="0"/>
-            <a:ext cx="2163413" cy="1886345"/>
-            <a:chOff x="12784175" y="3675030"/>
-            <a:chExt cx="2163413" cy="1886345"/>
-          </a:xfrm>
-        </p:grpSpPr>
-        <p:sp>
-          <p:nvSpPr>
-            <p:cNvPr id="165" name="Google Shape;165;p18">
-              <a:extLst>
-                <a:ext uri="{FF2B5EF4-FFF2-40B4-BE49-F238E27FC236}">
-                  <a16:creationId xmlns:a16="http://schemas.microsoft.com/office/drawing/2014/main" id="{0F8A5375-035A-B275-BEA1-4DAECA3886FE}"/>
-                </a:ext>
-              </a:extLst>
-            </p:cNvPr>
-            <p:cNvSpPr txBox="1"/>
-            <p:nvPr/>
-          </p:nvSpPr>
-          <p:spPr>
-            <a:xfrm rot="1830973">
-              <a:off x="12805773" y="4425496"/>
-              <a:ext cx="2081405" cy="652657"/>
-            </a:xfrm>
-            <a:prstGeom prst="rect">
-              <a:avLst/>
-            </a:prstGeom>
-            <a:noFill/>
-            <a:ln>
-              <a:noFill/>
-            </a:ln>
-          </p:spPr>
-          <p:txBody>
-            <a:bodyPr spcFirstLastPara="1" wrap="square" lIns="91425" tIns="91425" rIns="91425" bIns="91425" anchor="t" anchorCtr="0">
-              <a:noAutofit/>
-            </a:bodyPr>
-            <a:lstStyle/>
-            <a:p>
-              <a:pPr marL="0" lvl="0" indent="0" algn="l" rtl="0">
-                <a:spcBef>
-                  <a:spcPts val="0"/>
-                </a:spcBef>
-                <a:spcAft>
-                  <a:spcPts val="0"/>
-                </a:spcAft>
-                <a:buNone/>
-              </a:pPr>
-              <a:r>
-                <a:rPr lang="es-ES_tradnl" sz="2300" b="1" i="1" dirty="0">
-                  <a:solidFill>
-                    <a:srgbClr val="E69138"/>
-                  </a:solidFill>
-                  <a:latin typeface="Calibri"/>
-                  <a:ea typeface="Calibri"/>
-                  <a:cs typeface="Calibri"/>
-                  <a:sym typeface="Calibri"/>
-                </a:rPr>
-                <a:t>RAPID EXPRESS </a:t>
-              </a:r>
-            </a:p>
-          </p:txBody>
-        </p:sp>
-        <p:sp>
-          <p:nvSpPr>
-            <p:cNvPr id="166" name="Google Shape;166;p18">
-              <a:extLst>
-                <a:ext uri="{FF2B5EF4-FFF2-40B4-BE49-F238E27FC236}">
-                  <a16:creationId xmlns:a16="http://schemas.microsoft.com/office/drawing/2014/main" id="{5E8E3819-634B-8278-8583-C3C352EA55E4}"/>
-                </a:ext>
-              </a:extLst>
-            </p:cNvPr>
-            <p:cNvSpPr/>
-            <p:nvPr/>
-          </p:nvSpPr>
-          <p:spPr>
-            <a:xfrm>
-              <a:off x="13335203" y="3675030"/>
-              <a:ext cx="1612385" cy="1275250"/>
-            </a:xfrm>
-            <a:custGeom>
-              <a:avLst/>
-              <a:gdLst/>
-              <a:ahLst/>
-              <a:cxnLst/>
-              <a:rect l="l" t="t" r="r" b="b"/>
-              <a:pathLst>
-                <a:path w="1612385" h="1275250" extrusionOk="0">
-                  <a:moveTo>
-                    <a:pt x="0" y="0"/>
-                  </a:moveTo>
-                  <a:lnTo>
-                    <a:pt x="1612384" y="0"/>
-                  </a:lnTo>
-                  <a:lnTo>
-                    <a:pt x="1612384" y="1275249"/>
-                  </a:lnTo>
-                  <a:lnTo>
-                    <a:pt x="0" y="1275249"/>
-                  </a:lnTo>
-                  <a:lnTo>
-                    <a:pt x="0" y="0"/>
-                  </a:lnTo>
-                  <a:close/>
-                </a:path>
-              </a:pathLst>
-            </a:custGeom>
-            <a:blipFill rotWithShape="1">
-              <a:blip r:embed="rId3">
-                <a:alphaModFix/>
-              </a:blip>
-              <a:stretch>
-                <a:fillRect/>
-              </a:stretch>
-            </a:blipFill>
-            <a:ln>
-              <a:noFill/>
-            </a:ln>
-          </p:spPr>
-          <p:txBody>
-            <a:bodyPr/>
-            <a:lstStyle/>
-            <a:p>
-              <a:endParaRPr lang="es-ES_tradnl" dirty="0"/>
-            </a:p>
-          </p:txBody>
-        </p:sp>
-      </p:grpSp>
-      <p:sp>
-        <p:nvSpPr>
-          <p:cNvPr id="2" name="Rectangle 14">
-            <a:extLst>
-              <a:ext uri="{FF2B5EF4-FFF2-40B4-BE49-F238E27FC236}">
-                <a16:creationId xmlns:a16="http://schemas.microsoft.com/office/drawing/2014/main" id="{2C4573BD-4062-5928-8D40-C2F880FE60B9}"/>
-              </a:ext>
-            </a:extLst>
-          </p:cNvPr>
-          <p:cNvSpPr/>
-          <p:nvPr/>
-        </p:nvSpPr>
-        <p:spPr>
-          <a:xfrm>
-            <a:off x="845798" y="4246407"/>
-            <a:ext cx="1894041" cy="788933"/>
-          </a:xfrm>
-          <a:prstGeom prst="rect">
-            <a:avLst/>
-          </a:prstGeom>
-          <a:solidFill>
-            <a:schemeClr val="bg1"/>
-          </a:solidFill>
-          <a:ln>
-            <a:solidFill>
-              <a:schemeClr val="bg2"/>
-            </a:solidFill>
-          </a:ln>
-        </p:spPr>
-        <p:style>
-          <a:lnRef idx="2">
-            <a:schemeClr val="accent1">
-              <a:shade val="50000"/>
-            </a:schemeClr>
-          </a:lnRef>
-          <a:fillRef idx="1">
-            <a:schemeClr val="accent1"/>
-          </a:fillRef>
-          <a:effectRef idx="0">
-            <a:schemeClr val="accent1"/>
-          </a:effectRef>
-          <a:fontRef idx="minor">
-            <a:schemeClr val="lt1"/>
-          </a:fontRef>
-        </p:style>
-        <p:txBody>
-          <a:bodyPr rtlCol="0" anchor="ctr"/>
-          <a:lstStyle/>
-          <a:p>
-            <a:pPr algn="ctr"/>
-            <a:r>
-              <a:rPr lang="es-ES_tradnl" sz="2400" b="1" dirty="0">
-                <a:solidFill>
-                  <a:schemeClr val="bg2"/>
-                </a:solidFill>
-              </a:rPr>
-              <a:t>CARGA DE TRABAJO</a:t>
-            </a:r>
-          </a:p>
-        </p:txBody>
-      </p:sp>
-      <p:sp>
-        <p:nvSpPr>
-          <p:cNvPr id="3" name="Rectangle 14">
-            <a:extLst>
-              <a:ext uri="{FF2B5EF4-FFF2-40B4-BE49-F238E27FC236}">
-                <a16:creationId xmlns:a16="http://schemas.microsoft.com/office/drawing/2014/main" id="{D73DF1B4-7E07-1FFB-F523-7DC8DC5EECDF}"/>
-              </a:ext>
-            </a:extLst>
-          </p:cNvPr>
-          <p:cNvSpPr/>
-          <p:nvPr/>
-        </p:nvSpPr>
-        <p:spPr>
-          <a:xfrm>
-            <a:off x="9021997" y="3616080"/>
-            <a:ext cx="2156379" cy="809011"/>
-          </a:xfrm>
-          <a:prstGeom prst="rect">
-            <a:avLst/>
-          </a:prstGeom>
-          <a:solidFill>
-            <a:schemeClr val="bg1"/>
-          </a:solidFill>
-          <a:ln>
-            <a:solidFill>
-              <a:schemeClr val="bg2"/>
-            </a:solidFill>
-          </a:ln>
-        </p:spPr>
-        <p:style>
-          <a:lnRef idx="2">
-            <a:schemeClr val="accent1">
-              <a:shade val="50000"/>
-            </a:schemeClr>
-          </a:lnRef>
-          <a:fillRef idx="1">
-            <a:schemeClr val="accent1"/>
-          </a:fillRef>
-          <a:effectRef idx="0">
-            <a:schemeClr val="accent1"/>
-          </a:effectRef>
-          <a:fontRef idx="minor">
-            <a:schemeClr val="lt1"/>
-          </a:fontRef>
-        </p:style>
-        <p:txBody>
-          <a:bodyPr rtlCol="0" anchor="ctr"/>
-          <a:lstStyle/>
-          <a:p>
-            <a:pPr algn="ctr"/>
-            <a:r>
-              <a:rPr lang="es-ES_tradnl" sz="2400" b="1" dirty="0">
-                <a:solidFill>
-                  <a:schemeClr val="bg2"/>
-                </a:solidFill>
-              </a:rPr>
-              <a:t>DESEMPEÑO</a:t>
-            </a:r>
-          </a:p>
-        </p:txBody>
-      </p:sp>
-      <p:sp>
-        <p:nvSpPr>
-          <p:cNvPr id="4" name="Rectangle 14">
-            <a:extLst>
-              <a:ext uri="{FF2B5EF4-FFF2-40B4-BE49-F238E27FC236}">
-                <a16:creationId xmlns:a16="http://schemas.microsoft.com/office/drawing/2014/main" id="{5E7CDE07-09E1-9659-2686-57651D05F2A7}"/>
-              </a:ext>
-            </a:extLst>
-          </p:cNvPr>
-          <p:cNvSpPr/>
-          <p:nvPr/>
-        </p:nvSpPr>
-        <p:spPr>
-          <a:xfrm>
-            <a:off x="6692170" y="3626941"/>
-            <a:ext cx="1894041" cy="788933"/>
-          </a:xfrm>
-          <a:prstGeom prst="rect">
-            <a:avLst/>
-          </a:prstGeom>
-          <a:solidFill>
-            <a:schemeClr val="bg1"/>
-          </a:solidFill>
-          <a:ln>
-            <a:solidFill>
-              <a:schemeClr val="bg2"/>
-            </a:solidFill>
-          </a:ln>
-        </p:spPr>
-        <p:style>
-          <a:lnRef idx="2">
-            <a:schemeClr val="accent1">
-              <a:shade val="50000"/>
-            </a:schemeClr>
-          </a:lnRef>
-          <a:fillRef idx="1">
-            <a:schemeClr val="accent1"/>
-          </a:fillRef>
-          <a:effectRef idx="0">
-            <a:schemeClr val="accent1"/>
-          </a:effectRef>
-          <a:fontRef idx="minor">
-            <a:schemeClr val="lt1"/>
-          </a:fontRef>
-        </p:style>
-        <p:txBody>
-          <a:bodyPr rtlCol="0" anchor="ctr"/>
-          <a:lstStyle/>
-          <a:p>
-            <a:pPr algn="ctr"/>
-            <a:r>
-              <a:rPr lang="es-ES_tradnl" sz="2400" b="1" dirty="0">
-                <a:solidFill>
-                  <a:schemeClr val="bg2"/>
-                </a:solidFill>
-              </a:rPr>
-              <a:t>CARGA DE TRABAJO</a:t>
-            </a:r>
-          </a:p>
-        </p:txBody>
-      </p:sp>
-      <p:sp>
-        <p:nvSpPr>
-          <p:cNvPr id="5" name="Rectangle 14">
-            <a:extLst>
-              <a:ext uri="{FF2B5EF4-FFF2-40B4-BE49-F238E27FC236}">
-                <a16:creationId xmlns:a16="http://schemas.microsoft.com/office/drawing/2014/main" id="{7B9DE141-DEAD-5D5C-77C3-4E9EF984166B}"/>
-              </a:ext>
-            </a:extLst>
-          </p:cNvPr>
-          <p:cNvSpPr/>
-          <p:nvPr/>
-        </p:nvSpPr>
-        <p:spPr>
-          <a:xfrm>
-            <a:off x="15076684" y="4226329"/>
-            <a:ext cx="2156379" cy="809011"/>
-          </a:xfrm>
-          <a:prstGeom prst="rect">
-            <a:avLst/>
-          </a:prstGeom>
-          <a:solidFill>
-            <a:schemeClr val="bg1"/>
-          </a:solidFill>
-          <a:ln>
-            <a:solidFill>
-              <a:schemeClr val="bg2"/>
-            </a:solidFill>
-          </a:ln>
-        </p:spPr>
-        <p:style>
-          <a:lnRef idx="2">
-            <a:schemeClr val="accent1">
-              <a:shade val="50000"/>
-            </a:schemeClr>
-          </a:lnRef>
-          <a:fillRef idx="1">
-            <a:schemeClr val="accent1"/>
-          </a:fillRef>
-          <a:effectRef idx="0">
-            <a:schemeClr val="accent1"/>
-          </a:effectRef>
-          <a:fontRef idx="minor">
-            <a:schemeClr val="lt1"/>
-          </a:fontRef>
-        </p:style>
-        <p:txBody>
-          <a:bodyPr rtlCol="0" anchor="ctr"/>
-          <a:lstStyle/>
-          <a:p>
-            <a:pPr algn="ctr"/>
-            <a:r>
-              <a:rPr lang="es-ES_tradnl" sz="2400" b="1" dirty="0">
-                <a:solidFill>
-                  <a:schemeClr val="bg2"/>
-                </a:solidFill>
-              </a:rPr>
-              <a:t>DESEMPEÑO</a:t>
-            </a:r>
-          </a:p>
-        </p:txBody>
-      </p:sp>
-      <p:sp>
-        <p:nvSpPr>
-          <p:cNvPr id="6" name="Rectangle 14">
-            <a:extLst>
-              <a:ext uri="{FF2B5EF4-FFF2-40B4-BE49-F238E27FC236}">
-                <a16:creationId xmlns:a16="http://schemas.microsoft.com/office/drawing/2014/main" id="{AAA1FC9E-85E7-5CC1-7D4C-008E402DA12E}"/>
-              </a:ext>
-            </a:extLst>
-          </p:cNvPr>
-          <p:cNvSpPr/>
-          <p:nvPr/>
-        </p:nvSpPr>
-        <p:spPr>
-          <a:xfrm>
-            <a:off x="12872043" y="4246407"/>
-            <a:ext cx="1894041" cy="788933"/>
-          </a:xfrm>
-          <a:prstGeom prst="rect">
-            <a:avLst/>
-          </a:prstGeom>
-          <a:solidFill>
-            <a:schemeClr val="bg1"/>
-          </a:solidFill>
-          <a:ln>
-            <a:solidFill>
-              <a:schemeClr val="bg2"/>
-            </a:solidFill>
-          </a:ln>
-        </p:spPr>
-        <p:style>
-          <a:lnRef idx="2">
-            <a:schemeClr val="accent1">
-              <a:shade val="50000"/>
-            </a:schemeClr>
-          </a:lnRef>
-          <a:fillRef idx="1">
-            <a:schemeClr val="accent1"/>
-          </a:fillRef>
-          <a:effectRef idx="0">
-            <a:schemeClr val="accent1"/>
-          </a:effectRef>
-          <a:fontRef idx="minor">
-            <a:schemeClr val="lt1"/>
-          </a:fontRef>
-        </p:style>
-        <p:txBody>
-          <a:bodyPr rtlCol="0" anchor="ctr"/>
-          <a:lstStyle/>
-          <a:p>
-            <a:pPr algn="ctr"/>
-            <a:r>
-              <a:rPr lang="es-ES_tradnl" sz="2400" b="1" dirty="0">
-                <a:solidFill>
-                  <a:schemeClr val="bg2"/>
-                </a:solidFill>
-              </a:rPr>
-              <a:t>CARGA DE TRABAJO</a:t>
-            </a:r>
-          </a:p>
-        </p:txBody>
-      </p:sp>
-      <p:sp>
-        <p:nvSpPr>
-          <p:cNvPr id="7" name="Rectangle 14">
-            <a:extLst>
-              <a:ext uri="{FF2B5EF4-FFF2-40B4-BE49-F238E27FC236}">
-                <a16:creationId xmlns:a16="http://schemas.microsoft.com/office/drawing/2014/main" id="{1A371D18-CFF7-7C81-AB14-A754411D14F9}"/>
-              </a:ext>
-            </a:extLst>
-          </p:cNvPr>
-          <p:cNvSpPr/>
-          <p:nvPr/>
-        </p:nvSpPr>
-        <p:spPr>
-          <a:xfrm>
-            <a:off x="3161026" y="5891203"/>
-            <a:ext cx="1569433" cy="751127"/>
-          </a:xfrm>
-          <a:prstGeom prst="rect">
-            <a:avLst/>
-          </a:prstGeom>
-          <a:solidFill>
-            <a:schemeClr val="bg1"/>
-          </a:solidFill>
-          <a:ln>
-            <a:solidFill>
-              <a:schemeClr val="bg2"/>
-            </a:solidFill>
-          </a:ln>
-        </p:spPr>
-        <p:style>
-          <a:lnRef idx="2">
-            <a:schemeClr val="accent1">
-              <a:shade val="50000"/>
-            </a:schemeClr>
-          </a:lnRef>
-          <a:fillRef idx="1">
-            <a:schemeClr val="accent1"/>
-          </a:fillRef>
-          <a:effectRef idx="0">
-            <a:schemeClr val="accent1"/>
-          </a:effectRef>
-          <a:fontRef idx="minor">
-            <a:schemeClr val="lt1"/>
-          </a:fontRef>
-        </p:style>
-        <p:txBody>
-          <a:bodyPr rtlCol="0" anchor="ctr"/>
-          <a:lstStyle/>
-          <a:p>
-            <a:pPr algn="ctr"/>
-            <a:r>
-              <a:rPr lang="es-ES_tradnl" sz="2400" b="1" dirty="0">
-                <a:solidFill>
-                  <a:schemeClr val="bg2"/>
-                </a:solidFill>
-              </a:rPr>
-              <a:t>81%</a:t>
-            </a:r>
-          </a:p>
-        </p:txBody>
-      </p:sp>
-      <p:sp>
-        <p:nvSpPr>
-          <p:cNvPr id="8" name="Rectangle 14">
-            <a:extLst>
-              <a:ext uri="{FF2B5EF4-FFF2-40B4-BE49-F238E27FC236}">
-                <a16:creationId xmlns:a16="http://schemas.microsoft.com/office/drawing/2014/main" id="{FFF26C2C-4A64-4E35-607C-B6984CE1B315}"/>
-              </a:ext>
-            </a:extLst>
-          </p:cNvPr>
-          <p:cNvSpPr/>
-          <p:nvPr/>
-        </p:nvSpPr>
-        <p:spPr>
-          <a:xfrm>
-            <a:off x="845798" y="5888343"/>
-            <a:ext cx="1894041" cy="788933"/>
-          </a:xfrm>
-          <a:prstGeom prst="rect">
-            <a:avLst/>
-          </a:prstGeom>
-          <a:solidFill>
-            <a:schemeClr val="bg1"/>
-          </a:solidFill>
-          <a:ln>
-            <a:solidFill>
-              <a:schemeClr val="bg2"/>
-            </a:solidFill>
-          </a:ln>
-        </p:spPr>
-        <p:style>
-          <a:lnRef idx="2">
-            <a:schemeClr val="accent1">
-              <a:shade val="50000"/>
-            </a:schemeClr>
-          </a:lnRef>
-          <a:fillRef idx="1">
-            <a:schemeClr val="accent1"/>
-          </a:fillRef>
-          <a:effectRef idx="0">
-            <a:schemeClr val="accent1"/>
-          </a:effectRef>
-          <a:fontRef idx="minor">
-            <a:schemeClr val="lt1"/>
-          </a:fontRef>
-        </p:style>
-        <p:txBody>
-          <a:bodyPr rtlCol="0" anchor="ctr"/>
-          <a:lstStyle/>
-          <a:p>
-            <a:pPr algn="ctr"/>
-            <a:r>
-              <a:rPr lang="es-ES_tradnl" sz="2400" b="1" dirty="0">
-                <a:solidFill>
-                  <a:schemeClr val="bg2"/>
-                </a:solidFill>
-              </a:rPr>
-              <a:t>289 – 298 paquetes</a:t>
-            </a:r>
-          </a:p>
-        </p:txBody>
-      </p:sp>
-      <p:sp>
-        <p:nvSpPr>
-          <p:cNvPr id="9" name="Rectangle 14">
-            <a:extLst>
-              <a:ext uri="{FF2B5EF4-FFF2-40B4-BE49-F238E27FC236}">
-                <a16:creationId xmlns:a16="http://schemas.microsoft.com/office/drawing/2014/main" id="{2C786784-9FA6-D511-DA8C-F5E16FE4EADD}"/>
-              </a:ext>
-            </a:extLst>
-          </p:cNvPr>
-          <p:cNvSpPr/>
-          <p:nvPr/>
-        </p:nvSpPr>
-        <p:spPr>
-          <a:xfrm>
-            <a:off x="9021996" y="5143501"/>
-            <a:ext cx="1569433" cy="760440"/>
-          </a:xfrm>
-          <a:prstGeom prst="rect">
-            <a:avLst/>
-          </a:prstGeom>
-          <a:solidFill>
-            <a:schemeClr val="bg1"/>
-          </a:solidFill>
-          <a:ln>
-            <a:solidFill>
-              <a:schemeClr val="bg2"/>
-            </a:solidFill>
-          </a:ln>
-        </p:spPr>
-        <p:style>
-          <a:lnRef idx="2">
-            <a:schemeClr val="accent1">
-              <a:shade val="50000"/>
-            </a:schemeClr>
-          </a:lnRef>
-          <a:fillRef idx="1">
-            <a:schemeClr val="accent1"/>
-          </a:fillRef>
-          <a:effectRef idx="0">
-            <a:schemeClr val="accent1"/>
-          </a:effectRef>
-          <a:fontRef idx="minor">
-            <a:schemeClr val="lt1"/>
-          </a:fontRef>
-        </p:style>
-        <p:txBody>
-          <a:bodyPr rtlCol="0" anchor="ctr"/>
-          <a:lstStyle/>
-          <a:p>
-            <a:pPr algn="ctr"/>
-            <a:r>
-              <a:rPr lang="es-ES_tradnl" sz="2400" b="1" dirty="0">
-                <a:solidFill>
-                  <a:schemeClr val="bg2"/>
-                </a:solidFill>
-              </a:rPr>
-              <a:t>98.7%</a:t>
-            </a:r>
-          </a:p>
-        </p:txBody>
-      </p:sp>
-      <p:sp>
-        <p:nvSpPr>
-          <p:cNvPr id="10" name="Rectangle 14">
-            <a:extLst>
-              <a:ext uri="{FF2B5EF4-FFF2-40B4-BE49-F238E27FC236}">
-                <a16:creationId xmlns:a16="http://schemas.microsoft.com/office/drawing/2014/main" id="{AA30C771-E6A3-FE09-F41C-D9F5FEC85A32}"/>
-              </a:ext>
-            </a:extLst>
-          </p:cNvPr>
-          <p:cNvSpPr/>
-          <p:nvPr/>
-        </p:nvSpPr>
-        <p:spPr>
-          <a:xfrm>
-            <a:off x="6692169" y="5143500"/>
-            <a:ext cx="1894041" cy="788933"/>
-          </a:xfrm>
-          <a:prstGeom prst="rect">
-            <a:avLst/>
-          </a:prstGeom>
-          <a:solidFill>
-            <a:schemeClr val="bg1"/>
-          </a:solidFill>
-          <a:ln>
-            <a:solidFill>
-              <a:schemeClr val="bg2"/>
-            </a:solidFill>
-          </a:ln>
-        </p:spPr>
-        <p:style>
-          <a:lnRef idx="2">
-            <a:schemeClr val="accent1">
-              <a:shade val="50000"/>
-            </a:schemeClr>
-          </a:lnRef>
-          <a:fillRef idx="1">
-            <a:schemeClr val="accent1"/>
-          </a:fillRef>
-          <a:effectRef idx="0">
-            <a:schemeClr val="accent1"/>
-          </a:effectRef>
-          <a:fontRef idx="minor">
-            <a:schemeClr val="lt1"/>
-          </a:fontRef>
-        </p:style>
-        <p:txBody>
-          <a:bodyPr rtlCol="0" anchor="ctr"/>
-          <a:lstStyle/>
-          <a:p>
-            <a:pPr algn="ctr"/>
-            <a:r>
-              <a:rPr lang="es-ES_tradnl" sz="2400" b="1" dirty="0">
-                <a:solidFill>
-                  <a:schemeClr val="bg2"/>
-                </a:solidFill>
-              </a:rPr>
-              <a:t>237 – 239 paquetes</a:t>
-            </a:r>
-          </a:p>
-        </p:txBody>
-      </p:sp>
-      <p:sp>
-        <p:nvSpPr>
-          <p:cNvPr id="12" name="Rectangle 14">
-            <a:extLst>
-              <a:ext uri="{FF2B5EF4-FFF2-40B4-BE49-F238E27FC236}">
-                <a16:creationId xmlns:a16="http://schemas.microsoft.com/office/drawing/2014/main" id="{BCA2D389-3019-B741-E06C-B5218ED92F60}"/>
-              </a:ext>
-            </a:extLst>
-          </p:cNvPr>
-          <p:cNvSpPr/>
-          <p:nvPr/>
-        </p:nvSpPr>
-        <p:spPr>
-          <a:xfrm>
-            <a:off x="15187271" y="5880162"/>
-            <a:ext cx="1587813" cy="751128"/>
-          </a:xfrm>
-          <a:prstGeom prst="rect">
-            <a:avLst/>
-          </a:prstGeom>
-          <a:solidFill>
-            <a:schemeClr val="bg1"/>
-          </a:solidFill>
-          <a:ln>
-            <a:solidFill>
-              <a:schemeClr val="bg2"/>
-            </a:solidFill>
-          </a:ln>
-        </p:spPr>
-        <p:style>
-          <a:lnRef idx="2">
-            <a:schemeClr val="accent1">
-              <a:shade val="50000"/>
-            </a:schemeClr>
-          </a:lnRef>
-          <a:fillRef idx="1">
-            <a:schemeClr val="accent1"/>
-          </a:fillRef>
-          <a:effectRef idx="0">
-            <a:schemeClr val="accent1"/>
-          </a:effectRef>
-          <a:fontRef idx="minor">
-            <a:schemeClr val="lt1"/>
-          </a:fontRef>
-        </p:style>
-        <p:txBody>
-          <a:bodyPr rtlCol="0" anchor="ctr"/>
-          <a:lstStyle/>
-          <a:p>
-            <a:pPr algn="ctr"/>
-            <a:r>
-              <a:rPr lang="es-ES_tradnl" sz="2400" b="1" dirty="0">
-                <a:solidFill>
-                  <a:schemeClr val="bg2"/>
-                </a:solidFill>
-              </a:rPr>
-              <a:t>95.5%</a:t>
-            </a:r>
-          </a:p>
-        </p:txBody>
-      </p:sp>
-      <p:sp>
-        <p:nvSpPr>
-          <p:cNvPr id="18" name="Rectangle 14">
-            <a:extLst>
-              <a:ext uri="{FF2B5EF4-FFF2-40B4-BE49-F238E27FC236}">
-                <a16:creationId xmlns:a16="http://schemas.microsoft.com/office/drawing/2014/main" id="{07227D69-5E0C-A63D-B5C0-BD57482FD335}"/>
-              </a:ext>
-            </a:extLst>
-          </p:cNvPr>
-          <p:cNvSpPr/>
-          <p:nvPr/>
-        </p:nvSpPr>
-        <p:spPr>
-          <a:xfrm>
-            <a:off x="12872043" y="5890483"/>
-            <a:ext cx="1894041" cy="788933"/>
-          </a:xfrm>
-          <a:prstGeom prst="rect">
-            <a:avLst/>
-          </a:prstGeom>
-          <a:solidFill>
-            <a:schemeClr val="bg1"/>
-          </a:solidFill>
-          <a:ln>
-            <a:solidFill>
-              <a:schemeClr val="bg2"/>
-            </a:solidFill>
-          </a:ln>
-        </p:spPr>
-        <p:style>
-          <a:lnRef idx="2">
-            <a:schemeClr val="accent1">
-              <a:shade val="50000"/>
-            </a:schemeClr>
-          </a:lnRef>
-          <a:fillRef idx="1">
-            <a:schemeClr val="accent1"/>
-          </a:fillRef>
-          <a:effectRef idx="0">
-            <a:schemeClr val="accent1"/>
-          </a:effectRef>
-          <a:fontRef idx="minor">
-            <a:schemeClr val="lt1"/>
-          </a:fontRef>
-        </p:style>
-        <p:txBody>
-          <a:bodyPr rtlCol="0" anchor="ctr"/>
-          <a:lstStyle/>
-          <a:p>
-            <a:pPr algn="ctr"/>
-            <a:r>
-              <a:rPr lang="es-ES_tradnl" sz="2400" b="1" dirty="0">
-                <a:solidFill>
-                  <a:schemeClr val="bg2"/>
-                </a:solidFill>
-              </a:rPr>
-              <a:t>&gt; 304</a:t>
-            </a:r>
-            <a:br>
-              <a:rPr lang="es-ES_tradnl" sz="2400" b="1" dirty="0">
-                <a:solidFill>
-                  <a:schemeClr val="bg2"/>
-                </a:solidFill>
-              </a:rPr>
-            </a:br>
-            <a:r>
-              <a:rPr lang="es-ES_tradnl" sz="2400" b="1" dirty="0">
-                <a:solidFill>
-                  <a:schemeClr val="bg2"/>
-                </a:solidFill>
-              </a:rPr>
-              <a:t>paquetes</a:t>
-            </a:r>
-          </a:p>
-        </p:txBody>
-      </p:sp>
-      <p:sp>
-        <p:nvSpPr>
-          <p:cNvPr id="19" name="Flecha abajo 18">
-            <a:extLst>
-              <a:ext uri="{FF2B5EF4-FFF2-40B4-BE49-F238E27FC236}">
-                <a16:creationId xmlns:a16="http://schemas.microsoft.com/office/drawing/2014/main" id="{06892AA4-0E84-0998-2A87-8514C668B258}"/>
-              </a:ext>
-            </a:extLst>
-          </p:cNvPr>
-          <p:cNvSpPr/>
-          <p:nvPr/>
-        </p:nvSpPr>
-        <p:spPr>
-          <a:xfrm>
-            <a:off x="7639189" y="2947681"/>
-            <a:ext cx="349135" cy="590931"/>
-          </a:xfrm>
-          <a:prstGeom prst="downArrow">
-            <a:avLst/>
-          </a:prstGeom>
-          <a:solidFill>
-            <a:srgbClr val="00B050"/>
-          </a:solidFill>
-          <a:ln>
-            <a:solidFill>
-              <a:schemeClr val="accent3">
-                <a:lumMod val="75000"/>
-              </a:schemeClr>
-            </a:solidFill>
-          </a:ln>
-        </p:spPr>
-        <p:style>
-          <a:lnRef idx="2">
-            <a:schemeClr val="accent1">
-              <a:shade val="15000"/>
-            </a:schemeClr>
-          </a:lnRef>
-          <a:fillRef idx="1">
-            <a:schemeClr val="accent1"/>
-          </a:fillRef>
-          <a:effectRef idx="0">
-            <a:schemeClr val="accent1"/>
-          </a:effectRef>
-          <a:fontRef idx="minor">
-            <a:schemeClr val="lt1"/>
-          </a:fontRef>
-        </p:style>
-        <p:txBody>
-          <a:bodyPr rtlCol="0" anchor="ctr"/>
-          <a:lstStyle/>
-          <a:p>
-            <a:pPr algn="ctr"/>
-            <a:endParaRPr lang="es-ES"/>
-          </a:p>
-        </p:txBody>
-      </p:sp>
-      <p:sp>
-        <p:nvSpPr>
-          <p:cNvPr id="20" name="Flecha abajo 19">
-            <a:extLst>
-              <a:ext uri="{FF2B5EF4-FFF2-40B4-BE49-F238E27FC236}">
-                <a16:creationId xmlns:a16="http://schemas.microsoft.com/office/drawing/2014/main" id="{27DF9403-FC07-1FE3-C630-B4CCB48243CD}"/>
-              </a:ext>
-            </a:extLst>
-          </p:cNvPr>
-          <p:cNvSpPr/>
-          <p:nvPr/>
-        </p:nvSpPr>
-        <p:spPr>
-          <a:xfrm>
-            <a:off x="9504430" y="2961410"/>
-            <a:ext cx="349135" cy="590931"/>
-          </a:xfrm>
-          <a:prstGeom prst="downArrow">
-            <a:avLst/>
-          </a:prstGeom>
-          <a:solidFill>
-            <a:srgbClr val="00B050"/>
-          </a:solidFill>
-          <a:ln>
-            <a:solidFill>
-              <a:schemeClr val="accent3">
-                <a:lumMod val="75000"/>
-              </a:schemeClr>
-            </a:solidFill>
-          </a:ln>
-        </p:spPr>
-        <p:style>
-          <a:lnRef idx="2">
-            <a:schemeClr val="accent1">
-              <a:shade val="15000"/>
-            </a:schemeClr>
-          </a:lnRef>
-          <a:fillRef idx="1">
-            <a:schemeClr val="accent1"/>
-          </a:fillRef>
-          <a:effectRef idx="0">
-            <a:schemeClr val="accent1"/>
-          </a:effectRef>
-          <a:fontRef idx="minor">
-            <a:schemeClr val="lt1"/>
-          </a:fontRef>
-        </p:style>
-        <p:txBody>
-          <a:bodyPr rtlCol="0" anchor="ctr"/>
-          <a:lstStyle/>
-          <a:p>
-            <a:pPr algn="ctr"/>
-            <a:endParaRPr lang="es-ES"/>
-          </a:p>
-        </p:txBody>
-      </p:sp>
-      <p:sp>
-        <p:nvSpPr>
-          <p:cNvPr id="21" name="Flecha abajo 20">
-            <a:extLst>
-              <a:ext uri="{FF2B5EF4-FFF2-40B4-BE49-F238E27FC236}">
-                <a16:creationId xmlns:a16="http://schemas.microsoft.com/office/drawing/2014/main" id="{4AE8A597-AD4C-6807-9C29-6DF665B918CA}"/>
-              </a:ext>
-            </a:extLst>
-          </p:cNvPr>
-          <p:cNvSpPr/>
-          <p:nvPr/>
-        </p:nvSpPr>
-        <p:spPr>
-          <a:xfrm>
-            <a:off x="7639188" y="4504203"/>
-            <a:ext cx="349135" cy="590931"/>
-          </a:xfrm>
-          <a:prstGeom prst="downArrow">
-            <a:avLst/>
-          </a:prstGeom>
-          <a:solidFill>
-            <a:srgbClr val="00B050"/>
-          </a:solidFill>
-          <a:ln>
-            <a:solidFill>
-              <a:schemeClr val="accent3">
-                <a:lumMod val="75000"/>
-              </a:schemeClr>
-            </a:solidFill>
-          </a:ln>
-        </p:spPr>
-        <p:style>
-          <a:lnRef idx="2">
-            <a:schemeClr val="accent1">
-              <a:shade val="15000"/>
-            </a:schemeClr>
-          </a:lnRef>
-          <a:fillRef idx="1">
-            <a:schemeClr val="accent1"/>
-          </a:fillRef>
-          <a:effectRef idx="0">
-            <a:schemeClr val="accent1"/>
-          </a:effectRef>
-          <a:fontRef idx="minor">
-            <a:schemeClr val="lt1"/>
-          </a:fontRef>
-        </p:style>
-        <p:txBody>
-          <a:bodyPr rtlCol="0" anchor="ctr"/>
-          <a:lstStyle/>
-          <a:p>
-            <a:pPr algn="ctr"/>
-            <a:endParaRPr lang="es-ES"/>
-          </a:p>
-        </p:txBody>
-      </p:sp>
-      <p:sp>
-        <p:nvSpPr>
-          <p:cNvPr id="22" name="Flecha abajo 21">
-            <a:extLst>
-              <a:ext uri="{FF2B5EF4-FFF2-40B4-BE49-F238E27FC236}">
-                <a16:creationId xmlns:a16="http://schemas.microsoft.com/office/drawing/2014/main" id="{07ECE06B-223A-0567-4341-27AA5F848363}"/>
-              </a:ext>
-            </a:extLst>
-          </p:cNvPr>
-          <p:cNvSpPr/>
-          <p:nvPr/>
-        </p:nvSpPr>
-        <p:spPr>
-          <a:xfrm>
-            <a:off x="9504429" y="4504203"/>
-            <a:ext cx="349135" cy="590931"/>
-          </a:xfrm>
-          <a:prstGeom prst="downArrow">
-            <a:avLst/>
-          </a:prstGeom>
-          <a:solidFill>
-            <a:srgbClr val="00B050"/>
-          </a:solidFill>
-          <a:ln>
-            <a:solidFill>
-              <a:schemeClr val="accent3">
-                <a:lumMod val="75000"/>
-              </a:schemeClr>
-            </a:solidFill>
-          </a:ln>
-        </p:spPr>
-        <p:style>
-          <a:lnRef idx="2">
-            <a:schemeClr val="accent1">
-              <a:shade val="15000"/>
-            </a:schemeClr>
-          </a:lnRef>
-          <a:fillRef idx="1">
-            <a:schemeClr val="accent1"/>
-          </a:fillRef>
-          <a:effectRef idx="0">
-            <a:schemeClr val="accent1"/>
-          </a:effectRef>
-          <a:fontRef idx="minor">
-            <a:schemeClr val="lt1"/>
-          </a:fontRef>
-        </p:style>
-        <p:txBody>
-          <a:bodyPr rtlCol="0" anchor="ctr"/>
-          <a:lstStyle/>
-          <a:p>
-            <a:pPr algn="ctr"/>
-            <a:endParaRPr lang="es-ES"/>
-          </a:p>
-        </p:txBody>
-      </p:sp>
-      <p:sp>
-        <p:nvSpPr>
-          <p:cNvPr id="23" name="Flecha abajo 22">
-            <a:extLst>
-              <a:ext uri="{FF2B5EF4-FFF2-40B4-BE49-F238E27FC236}">
-                <a16:creationId xmlns:a16="http://schemas.microsoft.com/office/drawing/2014/main" id="{356C1CDD-C354-2A09-BFC9-FADEB6A7E64A}"/>
-              </a:ext>
-            </a:extLst>
-          </p:cNvPr>
-          <p:cNvSpPr/>
-          <p:nvPr/>
-        </p:nvSpPr>
-        <p:spPr>
-          <a:xfrm>
-            <a:off x="13672226" y="3598578"/>
-            <a:ext cx="349135" cy="590931"/>
-          </a:xfrm>
-          <a:prstGeom prst="downArrow">
-            <a:avLst/>
-          </a:prstGeom>
-          <a:solidFill>
-            <a:schemeClr val="accent6">
-              <a:lumMod val="75000"/>
-            </a:schemeClr>
-          </a:solidFill>
-          <a:ln>
-            <a:solidFill>
-              <a:schemeClr val="accent6">
-                <a:lumMod val="50000"/>
-              </a:schemeClr>
-            </a:solidFill>
-          </a:ln>
-        </p:spPr>
-        <p:style>
-          <a:lnRef idx="2">
-            <a:schemeClr val="accent1">
-              <a:shade val="15000"/>
-            </a:schemeClr>
-          </a:lnRef>
-          <a:fillRef idx="1">
-            <a:schemeClr val="accent1"/>
-          </a:fillRef>
-          <a:effectRef idx="0">
-            <a:schemeClr val="accent1"/>
-          </a:effectRef>
-          <a:fontRef idx="minor">
-            <a:schemeClr val="lt1"/>
-          </a:fontRef>
-        </p:style>
-        <p:txBody>
-          <a:bodyPr rtlCol="0" anchor="ctr"/>
-          <a:lstStyle/>
-          <a:p>
-            <a:pPr algn="ctr"/>
-            <a:endParaRPr lang="es-ES"/>
-          </a:p>
-        </p:txBody>
-      </p:sp>
-      <p:sp>
-        <p:nvSpPr>
-          <p:cNvPr id="24" name="Flecha abajo 23">
-            <a:extLst>
-              <a:ext uri="{FF2B5EF4-FFF2-40B4-BE49-F238E27FC236}">
-                <a16:creationId xmlns:a16="http://schemas.microsoft.com/office/drawing/2014/main" id="{7C533EBD-554B-77AE-8C4D-66526DB7A975}"/>
-              </a:ext>
-            </a:extLst>
-          </p:cNvPr>
-          <p:cNvSpPr/>
-          <p:nvPr/>
-        </p:nvSpPr>
-        <p:spPr>
-          <a:xfrm>
-            <a:off x="15537467" y="3612307"/>
-            <a:ext cx="349135" cy="590931"/>
-          </a:xfrm>
-          <a:prstGeom prst="downArrow">
-            <a:avLst/>
-          </a:prstGeom>
-          <a:solidFill>
-            <a:schemeClr val="accent6">
-              <a:lumMod val="75000"/>
-            </a:schemeClr>
-          </a:solidFill>
-          <a:ln>
-            <a:solidFill>
-              <a:schemeClr val="accent6">
-                <a:lumMod val="50000"/>
-              </a:schemeClr>
-            </a:solidFill>
-          </a:ln>
-        </p:spPr>
-        <p:style>
-          <a:lnRef idx="2">
-            <a:schemeClr val="accent1">
-              <a:shade val="15000"/>
-            </a:schemeClr>
-          </a:lnRef>
-          <a:fillRef idx="1">
-            <a:schemeClr val="accent1"/>
-          </a:fillRef>
-          <a:effectRef idx="0">
-            <a:schemeClr val="accent1"/>
-          </a:effectRef>
-          <a:fontRef idx="minor">
-            <a:schemeClr val="lt1"/>
-          </a:fontRef>
-        </p:style>
-        <p:txBody>
-          <a:bodyPr rtlCol="0" anchor="ctr"/>
-          <a:lstStyle/>
-          <a:p>
-            <a:pPr algn="ctr"/>
-            <a:endParaRPr lang="es-ES"/>
-          </a:p>
-        </p:txBody>
-      </p:sp>
-      <p:sp>
-        <p:nvSpPr>
-          <p:cNvPr id="25" name="Flecha abajo 24">
-            <a:extLst>
-              <a:ext uri="{FF2B5EF4-FFF2-40B4-BE49-F238E27FC236}">
-                <a16:creationId xmlns:a16="http://schemas.microsoft.com/office/drawing/2014/main" id="{36297C3E-7832-B3A4-DE68-A8D5264D0CDB}"/>
-              </a:ext>
-            </a:extLst>
-          </p:cNvPr>
-          <p:cNvSpPr/>
-          <p:nvPr/>
-        </p:nvSpPr>
-        <p:spPr>
-          <a:xfrm>
-            <a:off x="13672225" y="5155100"/>
-            <a:ext cx="349135" cy="590931"/>
-          </a:xfrm>
-          <a:prstGeom prst="downArrow">
-            <a:avLst/>
-          </a:prstGeom>
-          <a:solidFill>
-            <a:schemeClr val="accent6">
-              <a:lumMod val="75000"/>
-            </a:schemeClr>
-          </a:solidFill>
-          <a:ln>
-            <a:solidFill>
-              <a:schemeClr val="accent6">
-                <a:lumMod val="50000"/>
-              </a:schemeClr>
-            </a:solidFill>
-          </a:ln>
-        </p:spPr>
-        <p:style>
-          <a:lnRef idx="2">
-            <a:schemeClr val="accent1">
-              <a:shade val="15000"/>
-            </a:schemeClr>
-          </a:lnRef>
-          <a:fillRef idx="1">
-            <a:schemeClr val="accent1"/>
-          </a:fillRef>
-          <a:effectRef idx="0">
-            <a:schemeClr val="accent1"/>
-          </a:effectRef>
-          <a:fontRef idx="minor">
-            <a:schemeClr val="lt1"/>
-          </a:fontRef>
-        </p:style>
-        <p:txBody>
-          <a:bodyPr rtlCol="0" anchor="ctr"/>
-          <a:lstStyle/>
-          <a:p>
-            <a:pPr algn="ctr"/>
-            <a:endParaRPr lang="es-ES"/>
-          </a:p>
-        </p:txBody>
-      </p:sp>
-      <p:sp>
-        <p:nvSpPr>
-          <p:cNvPr id="26" name="Flecha abajo 25">
-            <a:extLst>
-              <a:ext uri="{FF2B5EF4-FFF2-40B4-BE49-F238E27FC236}">
-                <a16:creationId xmlns:a16="http://schemas.microsoft.com/office/drawing/2014/main" id="{464B6C5F-A562-BF84-839D-9AC0DBF1899D}"/>
-              </a:ext>
-            </a:extLst>
-          </p:cNvPr>
-          <p:cNvSpPr/>
-          <p:nvPr/>
-        </p:nvSpPr>
-        <p:spPr>
-          <a:xfrm>
-            <a:off x="15537466" y="5155100"/>
-            <a:ext cx="349135" cy="590931"/>
-          </a:xfrm>
-          <a:prstGeom prst="downArrow">
-            <a:avLst/>
-          </a:prstGeom>
-          <a:solidFill>
-            <a:schemeClr val="accent6">
-              <a:lumMod val="75000"/>
-            </a:schemeClr>
-          </a:solidFill>
-          <a:ln>
-            <a:solidFill>
-              <a:schemeClr val="accent6">
-                <a:lumMod val="50000"/>
-              </a:schemeClr>
-            </a:solidFill>
-          </a:ln>
-        </p:spPr>
-        <p:style>
-          <a:lnRef idx="2">
-            <a:schemeClr val="accent1">
-              <a:shade val="15000"/>
-            </a:schemeClr>
-          </a:lnRef>
-          <a:fillRef idx="1">
-            <a:schemeClr val="accent1"/>
-          </a:fillRef>
-          <a:effectRef idx="0">
-            <a:schemeClr val="accent1"/>
-          </a:effectRef>
-          <a:fontRef idx="minor">
-            <a:schemeClr val="lt1"/>
-          </a:fontRef>
-        </p:style>
-        <p:txBody>
-          <a:bodyPr rtlCol="0" anchor="ctr"/>
-          <a:lstStyle/>
-          <a:p>
-            <a:pPr algn="ctr"/>
-            <a:endParaRPr lang="es-ES"/>
-          </a:p>
-        </p:txBody>
-      </p:sp>
-      <p:sp>
-        <p:nvSpPr>
-          <p:cNvPr id="27" name="Flecha abajo 26">
-            <a:extLst>
-              <a:ext uri="{FF2B5EF4-FFF2-40B4-BE49-F238E27FC236}">
-                <a16:creationId xmlns:a16="http://schemas.microsoft.com/office/drawing/2014/main" id="{53168283-7E04-F1E2-E520-A02E58E33E99}"/>
-              </a:ext>
-            </a:extLst>
-          </p:cNvPr>
-          <p:cNvSpPr/>
-          <p:nvPr/>
-        </p:nvSpPr>
-        <p:spPr>
-          <a:xfrm>
-            <a:off x="1725016" y="3563204"/>
-            <a:ext cx="349135" cy="590931"/>
-          </a:xfrm>
-          <a:prstGeom prst="downArrow">
-            <a:avLst/>
-          </a:prstGeom>
-          <a:solidFill>
-            <a:srgbClr val="FF0000"/>
-          </a:solidFill>
-          <a:ln>
-            <a:solidFill>
-              <a:srgbClr val="C00000"/>
-            </a:solidFill>
-          </a:ln>
-        </p:spPr>
-        <p:style>
-          <a:lnRef idx="2">
-            <a:schemeClr val="accent1">
-              <a:shade val="15000"/>
-            </a:schemeClr>
-          </a:lnRef>
-          <a:fillRef idx="1">
-            <a:schemeClr val="accent1"/>
-          </a:fillRef>
-          <a:effectRef idx="0">
-            <a:schemeClr val="accent1"/>
-          </a:effectRef>
-          <a:fontRef idx="minor">
-            <a:schemeClr val="lt1"/>
-          </a:fontRef>
-        </p:style>
-        <p:txBody>
-          <a:bodyPr rtlCol="0" anchor="ctr"/>
-          <a:lstStyle/>
-          <a:p>
-            <a:pPr algn="ctr"/>
-            <a:endParaRPr lang="es-ES"/>
-          </a:p>
-        </p:txBody>
-      </p:sp>
-      <p:sp>
-        <p:nvSpPr>
-          <p:cNvPr id="28" name="Flecha abajo 27">
-            <a:extLst>
-              <a:ext uri="{FF2B5EF4-FFF2-40B4-BE49-F238E27FC236}">
-                <a16:creationId xmlns:a16="http://schemas.microsoft.com/office/drawing/2014/main" id="{DBF47D44-AEE3-B620-5B96-0CD65447D6A3}"/>
-              </a:ext>
-            </a:extLst>
-          </p:cNvPr>
-          <p:cNvSpPr/>
-          <p:nvPr/>
-        </p:nvSpPr>
-        <p:spPr>
-          <a:xfrm>
-            <a:off x="3590257" y="3576933"/>
-            <a:ext cx="349135" cy="590931"/>
-          </a:xfrm>
-          <a:prstGeom prst="downArrow">
-            <a:avLst/>
-          </a:prstGeom>
-          <a:solidFill>
-            <a:srgbClr val="FF0000"/>
-          </a:solidFill>
-          <a:ln>
-            <a:solidFill>
-              <a:srgbClr val="C00000"/>
-            </a:solidFill>
-          </a:ln>
-        </p:spPr>
-        <p:style>
-          <a:lnRef idx="2">
-            <a:schemeClr val="accent1">
-              <a:shade val="15000"/>
-            </a:schemeClr>
-          </a:lnRef>
-          <a:fillRef idx="1">
-            <a:schemeClr val="accent1"/>
-          </a:fillRef>
-          <a:effectRef idx="0">
-            <a:schemeClr val="accent1"/>
-          </a:effectRef>
-          <a:fontRef idx="minor">
-            <a:schemeClr val="lt1"/>
-          </a:fontRef>
-        </p:style>
-        <p:txBody>
-          <a:bodyPr rtlCol="0" anchor="ctr"/>
-          <a:lstStyle/>
-          <a:p>
-            <a:pPr algn="ctr"/>
-            <a:endParaRPr lang="es-ES">
-              <a:solidFill>
-                <a:srgbClr val="FF0000"/>
-              </a:solidFill>
-            </a:endParaRPr>
-          </a:p>
-        </p:txBody>
-      </p:sp>
-      <p:sp>
-        <p:nvSpPr>
-          <p:cNvPr id="29" name="Flecha abajo 28">
-            <a:extLst>
-              <a:ext uri="{FF2B5EF4-FFF2-40B4-BE49-F238E27FC236}">
-                <a16:creationId xmlns:a16="http://schemas.microsoft.com/office/drawing/2014/main" id="{3EF09888-3FB9-8476-A9C9-58D4C2AA24B7}"/>
-              </a:ext>
-            </a:extLst>
-          </p:cNvPr>
-          <p:cNvSpPr/>
-          <p:nvPr/>
-        </p:nvSpPr>
-        <p:spPr>
-          <a:xfrm>
-            <a:off x="1725015" y="5119726"/>
-            <a:ext cx="349135" cy="590931"/>
-          </a:xfrm>
-          <a:prstGeom prst="downArrow">
-            <a:avLst/>
-          </a:prstGeom>
-          <a:solidFill>
-            <a:srgbClr val="FF0000"/>
-          </a:solidFill>
-          <a:ln>
-            <a:solidFill>
-              <a:srgbClr val="C00000"/>
-            </a:solidFill>
-          </a:ln>
-        </p:spPr>
-        <p:style>
-          <a:lnRef idx="2">
-            <a:schemeClr val="accent1">
-              <a:shade val="15000"/>
-            </a:schemeClr>
-          </a:lnRef>
-          <a:fillRef idx="1">
-            <a:schemeClr val="accent1"/>
-          </a:fillRef>
-          <a:effectRef idx="0">
-            <a:schemeClr val="accent1"/>
-          </a:effectRef>
-          <a:fontRef idx="minor">
-            <a:schemeClr val="lt1"/>
-          </a:fontRef>
-        </p:style>
-        <p:txBody>
-          <a:bodyPr rtlCol="0" anchor="ctr"/>
-          <a:lstStyle/>
-          <a:p>
-            <a:pPr algn="ctr"/>
-            <a:endParaRPr lang="es-ES"/>
-          </a:p>
-        </p:txBody>
-      </p:sp>
-      <p:sp>
-        <p:nvSpPr>
-          <p:cNvPr id="30" name="Flecha abajo 29">
-            <a:extLst>
-              <a:ext uri="{FF2B5EF4-FFF2-40B4-BE49-F238E27FC236}">
-                <a16:creationId xmlns:a16="http://schemas.microsoft.com/office/drawing/2014/main" id="{030F277A-7CD4-62F5-A2EE-C651FF9F555A}"/>
-              </a:ext>
-            </a:extLst>
-          </p:cNvPr>
-          <p:cNvSpPr/>
-          <p:nvPr/>
-        </p:nvSpPr>
-        <p:spPr>
-          <a:xfrm>
-            <a:off x="3590256" y="5119726"/>
-            <a:ext cx="349135" cy="590931"/>
-          </a:xfrm>
-          <a:prstGeom prst="downArrow">
-            <a:avLst/>
-          </a:prstGeom>
-          <a:solidFill>
-            <a:srgbClr val="FF0000"/>
-          </a:solidFill>
-          <a:ln>
-            <a:solidFill>
-              <a:srgbClr val="C00000"/>
-            </a:solidFill>
-          </a:ln>
-        </p:spPr>
-        <p:style>
-          <a:lnRef idx="2">
-            <a:schemeClr val="accent1">
-              <a:shade val="15000"/>
-            </a:schemeClr>
-          </a:lnRef>
-          <a:fillRef idx="1">
-            <a:schemeClr val="accent1"/>
-          </a:fillRef>
-          <a:effectRef idx="0">
-            <a:schemeClr val="accent1"/>
-          </a:effectRef>
-          <a:fontRef idx="minor">
-            <a:schemeClr val="lt1"/>
-          </a:fontRef>
-        </p:style>
-        <p:txBody>
-          <a:bodyPr rtlCol="0" anchor="ctr"/>
-          <a:lstStyle/>
-          <a:p>
-            <a:pPr algn="ctr"/>
-            <a:endParaRPr lang="es-ES"/>
-          </a:p>
-        </p:txBody>
-      </p:sp>
-      <p:sp>
-        <p:nvSpPr>
-          <p:cNvPr id="36" name="Fletxa: corbada cap amunt 35">
-            <a:extLst>
-              <a:ext uri="{FF2B5EF4-FFF2-40B4-BE49-F238E27FC236}">
-                <a16:creationId xmlns:a16="http://schemas.microsoft.com/office/drawing/2014/main" id="{DB43EA59-B123-40D4-8071-6AFA381F64F5}"/>
-              </a:ext>
-            </a:extLst>
-          </p:cNvPr>
-          <p:cNvSpPr/>
-          <p:nvPr/>
-        </p:nvSpPr>
-        <p:spPr>
-          <a:xfrm rot="21121263">
-            <a:off x="2436267" y="6479680"/>
-            <a:ext cx="5311961" cy="1364949"/>
-          </a:xfrm>
-          <a:prstGeom prst="curvedUpArrow">
-            <a:avLst/>
-          </a:prstGeom>
-        </p:spPr>
-        <p:style>
-          <a:lnRef idx="2">
-            <a:schemeClr val="accent1">
-              <a:shade val="50000"/>
-            </a:schemeClr>
-          </a:lnRef>
-          <a:fillRef idx="1">
-            <a:schemeClr val="accent1"/>
-          </a:fillRef>
-          <a:effectRef idx="0">
-            <a:schemeClr val="accent1"/>
-          </a:effectRef>
-          <a:fontRef idx="minor">
-            <a:schemeClr val="lt1"/>
-          </a:fontRef>
-        </p:style>
-        <p:txBody>
-          <a:bodyPr rtlCol="0" anchor="ctr"/>
-          <a:lstStyle/>
-          <a:p>
-            <a:pPr algn="ctr"/>
-            <a:endParaRPr lang="es-ES">
-              <a:solidFill>
-                <a:schemeClr val="tx1"/>
-              </a:solidFill>
-            </a:endParaRPr>
-          </a:p>
-        </p:txBody>
-      </p:sp>
-      <p:sp>
-        <p:nvSpPr>
-          <p:cNvPr id="37" name="Fletxa: corbada cap amunt 36">
-            <a:extLst>
-              <a:ext uri="{FF2B5EF4-FFF2-40B4-BE49-F238E27FC236}">
-                <a16:creationId xmlns:a16="http://schemas.microsoft.com/office/drawing/2014/main" id="{B62AEE80-2CB0-4905-9F53-C2B97175BC79}"/>
-              </a:ext>
-            </a:extLst>
-          </p:cNvPr>
-          <p:cNvSpPr/>
-          <p:nvPr/>
-        </p:nvSpPr>
-        <p:spPr>
-          <a:xfrm rot="11217565" flipV="1">
-            <a:off x="7694672" y="6500352"/>
-            <a:ext cx="5410960" cy="1320943"/>
-          </a:xfrm>
-          <a:prstGeom prst="curvedUpArrow">
-            <a:avLst/>
-          </a:prstGeom>
-        </p:spPr>
-        <p:style>
-          <a:lnRef idx="2">
-            <a:schemeClr val="accent1">
-              <a:shade val="50000"/>
-            </a:schemeClr>
-          </a:lnRef>
-          <a:fillRef idx="1">
-            <a:schemeClr val="accent1"/>
-          </a:fillRef>
-          <a:effectRef idx="0">
-            <a:schemeClr val="accent1"/>
-          </a:effectRef>
-          <a:fontRef idx="minor">
-            <a:schemeClr val="lt1"/>
-          </a:fontRef>
-        </p:style>
-        <p:txBody>
-          <a:bodyPr rtlCol="0" anchor="ctr"/>
-          <a:lstStyle/>
-          <a:p>
-            <a:pPr algn="ctr"/>
-            <a:endParaRPr lang="es-ES">
-              <a:solidFill>
-                <a:schemeClr val="tx1"/>
-              </a:solidFill>
-            </a:endParaRPr>
-          </a:p>
-        </p:txBody>
-      </p:sp>
-    </p:spTree>
-    <p:extLst>
-      <p:ext uri="{BB962C8B-B14F-4D97-AF65-F5344CB8AC3E}">
-        <p14:creationId xmlns:p14="http://schemas.microsoft.com/office/powerpoint/2010/main" val="3044485445"/>
       </p:ext>
     </p:extLst>
   </p:cSld>
@@ -25036,6 +23452,2146 @@
     </p:bg>
     <p:spTree>
       <p:nvGrpSpPr>
+        <p:cNvPr id="1" name="Shape 160">
+          <a:extLst>
+            <a:ext uri="{FF2B5EF4-FFF2-40B4-BE49-F238E27FC236}">
+              <a16:creationId xmlns:a16="http://schemas.microsoft.com/office/drawing/2014/main" id="{DA297602-4BBB-8124-85EA-38BC67F0ED50}"/>
+            </a:ext>
+          </a:extLst>
+        </p:cNvPr>
+        <p:cNvGrpSpPr/>
+        <p:nvPr/>
+      </p:nvGrpSpPr>
+      <p:grpSpPr>
+        <a:xfrm>
+          <a:off x="0" y="0"/>
+          <a:ext cx="0" cy="0"/>
+          <a:chOff x="0" y="0"/>
+          <a:chExt cx="0" cy="0"/>
+        </a:xfrm>
+      </p:grpSpPr>
+      <p:sp>
+        <p:nvSpPr>
+          <p:cNvPr id="161" name="Google Shape;161;p18">
+            <a:extLst>
+              <a:ext uri="{FF2B5EF4-FFF2-40B4-BE49-F238E27FC236}">
+                <a16:creationId xmlns:a16="http://schemas.microsoft.com/office/drawing/2014/main" id="{FA7FADFD-60A0-32BE-B0F0-F90CE928063D}"/>
+              </a:ext>
+            </a:extLst>
+          </p:cNvPr>
+          <p:cNvSpPr/>
+          <p:nvPr/>
+        </p:nvSpPr>
+        <p:spPr>
+          <a:xfrm>
+            <a:off x="-411641" y="7198177"/>
+            <a:ext cx="4653133" cy="3680205"/>
+          </a:xfrm>
+          <a:custGeom>
+            <a:avLst/>
+            <a:gdLst/>
+            <a:ahLst/>
+            <a:cxnLst/>
+            <a:rect l="l" t="t" r="r" b="b"/>
+            <a:pathLst>
+              <a:path w="9643798" h="7627368" extrusionOk="0">
+                <a:moveTo>
+                  <a:pt x="0" y="0"/>
+                </a:moveTo>
+                <a:lnTo>
+                  <a:pt x="9643798" y="0"/>
+                </a:lnTo>
+                <a:lnTo>
+                  <a:pt x="9643798" y="7627368"/>
+                </a:lnTo>
+                <a:lnTo>
+                  <a:pt x="0" y="7627368"/>
+                </a:lnTo>
+                <a:lnTo>
+                  <a:pt x="0" y="0"/>
+                </a:lnTo>
+                <a:close/>
+              </a:path>
+            </a:pathLst>
+          </a:custGeom>
+          <a:blipFill rotWithShape="1">
+            <a:blip r:embed="rId3">
+              <a:alphaModFix/>
+            </a:blip>
+            <a:stretch>
+              <a:fillRect/>
+            </a:stretch>
+          </a:blipFill>
+          <a:ln>
+            <a:noFill/>
+          </a:ln>
+        </p:spPr>
+        <p:txBody>
+          <a:bodyPr/>
+          <a:lstStyle/>
+          <a:p>
+            <a:endParaRPr lang="es-ES_tradnl" dirty="0"/>
+          </a:p>
+        </p:txBody>
+      </p:sp>
+      <p:sp>
+        <p:nvSpPr>
+          <p:cNvPr id="162" name="Google Shape;162;p18">
+            <a:extLst>
+              <a:ext uri="{FF2B5EF4-FFF2-40B4-BE49-F238E27FC236}">
+                <a16:creationId xmlns:a16="http://schemas.microsoft.com/office/drawing/2014/main" id="{C440BC94-E658-41A3-E378-7422709BA398}"/>
+              </a:ext>
+            </a:extLst>
+          </p:cNvPr>
+          <p:cNvSpPr/>
+          <p:nvPr/>
+        </p:nvSpPr>
+        <p:spPr>
+          <a:xfrm>
+            <a:off x="5482809" y="8188196"/>
+            <a:ext cx="2156379" cy="1936821"/>
+          </a:xfrm>
+          <a:custGeom>
+            <a:avLst/>
+            <a:gdLst/>
+            <a:ahLst/>
+            <a:cxnLst/>
+            <a:rect l="l" t="t" r="r" b="b"/>
+            <a:pathLst>
+              <a:path w="4469180" h="4014136" extrusionOk="0">
+                <a:moveTo>
+                  <a:pt x="0" y="0"/>
+                </a:moveTo>
+                <a:lnTo>
+                  <a:pt x="4469180" y="0"/>
+                </a:lnTo>
+                <a:lnTo>
+                  <a:pt x="4469180" y="4014136"/>
+                </a:lnTo>
+                <a:lnTo>
+                  <a:pt x="0" y="4014136"/>
+                </a:lnTo>
+                <a:lnTo>
+                  <a:pt x="0" y="0"/>
+                </a:lnTo>
+                <a:close/>
+              </a:path>
+            </a:pathLst>
+          </a:custGeom>
+          <a:blipFill rotWithShape="1">
+            <a:blip r:embed="rId4">
+              <a:alphaModFix/>
+            </a:blip>
+            <a:stretch>
+              <a:fillRect/>
+            </a:stretch>
+          </a:blipFill>
+          <a:ln>
+            <a:noFill/>
+          </a:ln>
+        </p:spPr>
+        <p:txBody>
+          <a:bodyPr/>
+          <a:lstStyle/>
+          <a:p>
+            <a:endParaRPr lang="es-ES_tradnl" dirty="0"/>
+          </a:p>
+        </p:txBody>
+      </p:sp>
+      <p:sp>
+        <p:nvSpPr>
+          <p:cNvPr id="163" name="Google Shape;163;p18">
+            <a:extLst>
+              <a:ext uri="{FF2B5EF4-FFF2-40B4-BE49-F238E27FC236}">
+                <a16:creationId xmlns:a16="http://schemas.microsoft.com/office/drawing/2014/main" id="{CFCEAEBD-EF5E-82A0-0B56-8E2B61FEEFA3}"/>
+              </a:ext>
+            </a:extLst>
+          </p:cNvPr>
+          <p:cNvSpPr/>
+          <p:nvPr/>
+        </p:nvSpPr>
+        <p:spPr>
+          <a:xfrm>
+            <a:off x="9504429" y="8159082"/>
+            <a:ext cx="2156379" cy="1936821"/>
+          </a:xfrm>
+          <a:custGeom>
+            <a:avLst/>
+            <a:gdLst/>
+            <a:ahLst/>
+            <a:cxnLst/>
+            <a:rect l="l" t="t" r="r" b="b"/>
+            <a:pathLst>
+              <a:path w="4469180" h="4014136" extrusionOk="0">
+                <a:moveTo>
+                  <a:pt x="0" y="0"/>
+                </a:moveTo>
+                <a:lnTo>
+                  <a:pt x="4469180" y="0"/>
+                </a:lnTo>
+                <a:lnTo>
+                  <a:pt x="4469180" y="4014136"/>
+                </a:lnTo>
+                <a:lnTo>
+                  <a:pt x="0" y="4014136"/>
+                </a:lnTo>
+                <a:lnTo>
+                  <a:pt x="0" y="0"/>
+                </a:lnTo>
+                <a:close/>
+              </a:path>
+            </a:pathLst>
+          </a:custGeom>
+          <a:blipFill rotWithShape="1">
+            <a:blip r:embed="rId4">
+              <a:alphaModFix/>
+            </a:blip>
+            <a:stretch>
+              <a:fillRect/>
+            </a:stretch>
+          </a:blipFill>
+          <a:ln>
+            <a:noFill/>
+          </a:ln>
+        </p:spPr>
+        <p:txBody>
+          <a:bodyPr/>
+          <a:lstStyle/>
+          <a:p>
+            <a:endParaRPr lang="es-ES_tradnl" dirty="0"/>
+          </a:p>
+        </p:txBody>
+      </p:sp>
+      <p:sp>
+        <p:nvSpPr>
+          <p:cNvPr id="167" name="Google Shape;167;p18">
+            <a:extLst>
+              <a:ext uri="{FF2B5EF4-FFF2-40B4-BE49-F238E27FC236}">
+                <a16:creationId xmlns:a16="http://schemas.microsoft.com/office/drawing/2014/main" id="{31C7F14F-C1D2-243D-7A0B-9520357B6CFB}"/>
+              </a:ext>
+            </a:extLst>
+          </p:cNvPr>
+          <p:cNvSpPr txBox="1"/>
+          <p:nvPr/>
+        </p:nvSpPr>
+        <p:spPr>
+          <a:xfrm>
+            <a:off x="5794045" y="553200"/>
+            <a:ext cx="6022200" cy="670505"/>
+          </a:xfrm>
+          <a:prstGeom prst="rect">
+            <a:avLst/>
+          </a:prstGeom>
+          <a:noFill/>
+          <a:ln>
+            <a:noFill/>
+          </a:ln>
+        </p:spPr>
+        <p:txBody>
+          <a:bodyPr spcFirstLastPara="1" wrap="square" lIns="0" tIns="0" rIns="0" bIns="0" anchor="t" anchorCtr="0">
+            <a:spAutoFit/>
+          </a:bodyPr>
+          <a:lstStyle/>
+          <a:p>
+            <a:pPr marL="0" marR="0" lvl="0" indent="0" algn="ctr" rtl="0">
+              <a:lnSpc>
+                <a:spcPct val="121055"/>
+              </a:lnSpc>
+              <a:spcBef>
+                <a:spcPts val="0"/>
+              </a:spcBef>
+              <a:spcAft>
+                <a:spcPts val="0"/>
+              </a:spcAft>
+              <a:buNone/>
+            </a:pPr>
+            <a:r>
+              <a:rPr lang="es-ES_tradnl" sz="3601" b="1" dirty="0">
+                <a:solidFill>
+                  <a:srgbClr val="004AAD"/>
+                </a:solidFill>
+                <a:latin typeface="Poppins"/>
+                <a:cs typeface="Poppins"/>
+                <a:sym typeface="Poppins"/>
+              </a:rPr>
+              <a:t>Identificación de perfiles</a:t>
+            </a:r>
+            <a:endParaRPr lang="es-ES_tradnl" dirty="0"/>
+          </a:p>
+        </p:txBody>
+      </p:sp>
+      <p:sp>
+        <p:nvSpPr>
+          <p:cNvPr id="11" name="Rectangle 10">
+            <a:extLst>
+              <a:ext uri="{FF2B5EF4-FFF2-40B4-BE49-F238E27FC236}">
+                <a16:creationId xmlns:a16="http://schemas.microsoft.com/office/drawing/2014/main" id="{1AF05D9C-A020-4BB4-E559-6C31990412CF}"/>
+              </a:ext>
+            </a:extLst>
+          </p:cNvPr>
+          <p:cNvSpPr/>
+          <p:nvPr/>
+        </p:nvSpPr>
+        <p:spPr>
+          <a:xfrm>
+            <a:off x="7177595" y="1772428"/>
+            <a:ext cx="3255100" cy="1106906"/>
+          </a:xfrm>
+          <a:prstGeom prst="rect">
+            <a:avLst/>
+          </a:prstGeom>
+          <a:solidFill>
+            <a:schemeClr val="bg1"/>
+          </a:solidFill>
+          <a:ln>
+            <a:solidFill>
+              <a:schemeClr val="bg2"/>
+            </a:solidFill>
+          </a:ln>
+        </p:spPr>
+        <p:style>
+          <a:lnRef idx="2">
+            <a:schemeClr val="accent1">
+              <a:shade val="50000"/>
+            </a:schemeClr>
+          </a:lnRef>
+          <a:fillRef idx="1">
+            <a:schemeClr val="accent1"/>
+          </a:fillRef>
+          <a:effectRef idx="0">
+            <a:schemeClr val="accent1"/>
+          </a:effectRef>
+          <a:fontRef idx="minor">
+            <a:schemeClr val="lt1"/>
+          </a:fontRef>
+        </p:style>
+        <p:txBody>
+          <a:bodyPr rtlCol="0" anchor="ctr"/>
+          <a:lstStyle/>
+          <a:p>
+            <a:pPr algn="ctr"/>
+            <a:r>
+              <a:rPr lang="es-ES_tradnl" sz="2400" b="1" dirty="0">
+                <a:solidFill>
+                  <a:schemeClr val="bg2"/>
+                </a:solidFill>
+              </a:rPr>
+              <a:t>PERFIL ÓPTIMO</a:t>
+            </a:r>
+          </a:p>
+        </p:txBody>
+      </p:sp>
+      <p:sp>
+        <p:nvSpPr>
+          <p:cNvPr id="13" name="Rectangle 12">
+            <a:extLst>
+              <a:ext uri="{FF2B5EF4-FFF2-40B4-BE49-F238E27FC236}">
+                <a16:creationId xmlns:a16="http://schemas.microsoft.com/office/drawing/2014/main" id="{0EA71E87-3B90-32C4-7C27-58EDCC2D761B}"/>
+              </a:ext>
+            </a:extLst>
+          </p:cNvPr>
+          <p:cNvSpPr/>
+          <p:nvPr/>
+        </p:nvSpPr>
+        <p:spPr>
+          <a:xfrm>
+            <a:off x="1213913" y="2362717"/>
+            <a:ext cx="3255100" cy="1106906"/>
+          </a:xfrm>
+          <a:prstGeom prst="rect">
+            <a:avLst/>
+          </a:prstGeom>
+          <a:solidFill>
+            <a:schemeClr val="bg1"/>
+          </a:solidFill>
+          <a:ln>
+            <a:solidFill>
+              <a:schemeClr val="bg2"/>
+            </a:solidFill>
+          </a:ln>
+        </p:spPr>
+        <p:style>
+          <a:lnRef idx="2">
+            <a:schemeClr val="accent1">
+              <a:shade val="50000"/>
+            </a:schemeClr>
+          </a:lnRef>
+          <a:fillRef idx="1">
+            <a:schemeClr val="accent1"/>
+          </a:fillRef>
+          <a:effectRef idx="0">
+            <a:schemeClr val="accent1"/>
+          </a:effectRef>
+          <a:fontRef idx="minor">
+            <a:schemeClr val="lt1"/>
+          </a:fontRef>
+        </p:style>
+        <p:txBody>
+          <a:bodyPr rtlCol="0" anchor="ctr"/>
+          <a:lstStyle/>
+          <a:p>
+            <a:pPr algn="ctr"/>
+            <a:r>
+              <a:rPr lang="es-ES_tradnl" sz="2400" b="1" dirty="0">
+                <a:solidFill>
+                  <a:schemeClr val="bg2"/>
+                </a:solidFill>
+              </a:rPr>
+              <a:t>PERFIL CRÍTICO</a:t>
+            </a:r>
+          </a:p>
+        </p:txBody>
+      </p:sp>
+      <p:sp>
+        <p:nvSpPr>
+          <p:cNvPr id="14" name="Rectangle 13">
+            <a:extLst>
+              <a:ext uri="{FF2B5EF4-FFF2-40B4-BE49-F238E27FC236}">
+                <a16:creationId xmlns:a16="http://schemas.microsoft.com/office/drawing/2014/main" id="{302D5BD7-5072-A712-E89D-315E1246CCD2}"/>
+              </a:ext>
+            </a:extLst>
+          </p:cNvPr>
+          <p:cNvSpPr/>
+          <p:nvPr/>
+        </p:nvSpPr>
+        <p:spPr>
+          <a:xfrm>
+            <a:off x="13262477" y="2335213"/>
+            <a:ext cx="3255100" cy="1106906"/>
+          </a:xfrm>
+          <a:prstGeom prst="rect">
+            <a:avLst/>
+          </a:prstGeom>
+          <a:solidFill>
+            <a:schemeClr val="bg1"/>
+          </a:solidFill>
+          <a:ln>
+            <a:solidFill>
+              <a:schemeClr val="bg2"/>
+            </a:solidFill>
+          </a:ln>
+        </p:spPr>
+        <p:style>
+          <a:lnRef idx="2">
+            <a:schemeClr val="accent1">
+              <a:shade val="50000"/>
+            </a:schemeClr>
+          </a:lnRef>
+          <a:fillRef idx="1">
+            <a:schemeClr val="accent1"/>
+          </a:fillRef>
+          <a:effectRef idx="0">
+            <a:schemeClr val="accent1"/>
+          </a:effectRef>
+          <a:fontRef idx="minor">
+            <a:schemeClr val="lt1"/>
+          </a:fontRef>
+        </p:style>
+        <p:txBody>
+          <a:bodyPr rtlCol="0" anchor="ctr"/>
+          <a:lstStyle/>
+          <a:p>
+            <a:pPr algn="ctr"/>
+            <a:r>
+              <a:rPr lang="es-ES_tradnl" sz="2400" b="1" dirty="0">
+                <a:solidFill>
+                  <a:schemeClr val="bg2"/>
+                </a:solidFill>
+              </a:rPr>
+              <a:t>PERFIL SATURADO</a:t>
+            </a:r>
+          </a:p>
+        </p:txBody>
+      </p:sp>
+      <p:sp>
+        <p:nvSpPr>
+          <p:cNvPr id="15" name="Rectangle 14">
+            <a:extLst>
+              <a:ext uri="{FF2B5EF4-FFF2-40B4-BE49-F238E27FC236}">
+                <a16:creationId xmlns:a16="http://schemas.microsoft.com/office/drawing/2014/main" id="{65FA6F57-08F9-AB33-9203-BBB34C284455}"/>
+              </a:ext>
+            </a:extLst>
+          </p:cNvPr>
+          <p:cNvSpPr/>
+          <p:nvPr/>
+        </p:nvSpPr>
+        <p:spPr>
+          <a:xfrm>
+            <a:off x="3083700" y="4226329"/>
+            <a:ext cx="2156379" cy="809011"/>
+          </a:xfrm>
+          <a:prstGeom prst="rect">
+            <a:avLst/>
+          </a:prstGeom>
+          <a:solidFill>
+            <a:schemeClr val="bg1"/>
+          </a:solidFill>
+          <a:ln>
+            <a:solidFill>
+              <a:schemeClr val="bg2"/>
+            </a:solidFill>
+          </a:ln>
+        </p:spPr>
+        <p:style>
+          <a:lnRef idx="2">
+            <a:schemeClr val="accent1">
+              <a:shade val="50000"/>
+            </a:schemeClr>
+          </a:lnRef>
+          <a:fillRef idx="1">
+            <a:schemeClr val="accent1"/>
+          </a:fillRef>
+          <a:effectRef idx="0">
+            <a:schemeClr val="accent1"/>
+          </a:effectRef>
+          <a:fontRef idx="minor">
+            <a:schemeClr val="lt1"/>
+          </a:fontRef>
+        </p:style>
+        <p:txBody>
+          <a:bodyPr rtlCol="0" anchor="ctr"/>
+          <a:lstStyle/>
+          <a:p>
+            <a:pPr algn="ctr"/>
+            <a:r>
+              <a:rPr lang="es-ES_tradnl" sz="2400" b="1" dirty="0">
+                <a:solidFill>
+                  <a:schemeClr val="bg2"/>
+                </a:solidFill>
+              </a:rPr>
+              <a:t>DESEMPEÑO</a:t>
+            </a:r>
+          </a:p>
+        </p:txBody>
+      </p:sp>
+      <p:grpSp>
+        <p:nvGrpSpPr>
+          <p:cNvPr id="164" name="Google Shape;164;p18">
+            <a:extLst>
+              <a:ext uri="{FF2B5EF4-FFF2-40B4-BE49-F238E27FC236}">
+                <a16:creationId xmlns:a16="http://schemas.microsoft.com/office/drawing/2014/main" id="{5C8F871A-0C94-7ACA-9EC2-2CF655A37500}"/>
+              </a:ext>
+            </a:extLst>
+          </p:cNvPr>
+          <p:cNvGrpSpPr/>
+          <p:nvPr/>
+        </p:nvGrpSpPr>
+        <p:grpSpPr>
+          <a:xfrm>
+            <a:off x="-118494" y="0"/>
+            <a:ext cx="2163413" cy="1886345"/>
+            <a:chOff x="12784175" y="3675030"/>
+            <a:chExt cx="2163413" cy="1886345"/>
+          </a:xfrm>
+        </p:grpSpPr>
+        <p:sp>
+          <p:nvSpPr>
+            <p:cNvPr id="165" name="Google Shape;165;p18">
+              <a:extLst>
+                <a:ext uri="{FF2B5EF4-FFF2-40B4-BE49-F238E27FC236}">
+                  <a16:creationId xmlns:a16="http://schemas.microsoft.com/office/drawing/2014/main" id="{0F8A5375-035A-B275-BEA1-4DAECA3886FE}"/>
+                </a:ext>
+              </a:extLst>
+            </p:cNvPr>
+            <p:cNvSpPr txBox="1"/>
+            <p:nvPr/>
+          </p:nvSpPr>
+          <p:spPr>
+            <a:xfrm rot="1830973">
+              <a:off x="12805773" y="4425496"/>
+              <a:ext cx="2081405" cy="652657"/>
+            </a:xfrm>
+            <a:prstGeom prst="rect">
+              <a:avLst/>
+            </a:prstGeom>
+            <a:noFill/>
+            <a:ln>
+              <a:noFill/>
+            </a:ln>
+          </p:spPr>
+          <p:txBody>
+            <a:bodyPr spcFirstLastPara="1" wrap="square" lIns="91425" tIns="91425" rIns="91425" bIns="91425" anchor="t" anchorCtr="0">
+              <a:noAutofit/>
+            </a:bodyPr>
+            <a:lstStyle/>
+            <a:p>
+              <a:pPr marL="0" lvl="0" indent="0" algn="l" rtl="0">
+                <a:spcBef>
+                  <a:spcPts val="0"/>
+                </a:spcBef>
+                <a:spcAft>
+                  <a:spcPts val="0"/>
+                </a:spcAft>
+                <a:buNone/>
+              </a:pPr>
+              <a:r>
+                <a:rPr lang="es-ES_tradnl" sz="2300" b="1" i="1" dirty="0">
+                  <a:solidFill>
+                    <a:srgbClr val="E69138"/>
+                  </a:solidFill>
+                  <a:latin typeface="Calibri"/>
+                  <a:ea typeface="Calibri"/>
+                  <a:cs typeface="Calibri"/>
+                  <a:sym typeface="Calibri"/>
+                </a:rPr>
+                <a:t>RAPID EXPRESS </a:t>
+              </a:r>
+            </a:p>
+          </p:txBody>
+        </p:sp>
+        <p:sp>
+          <p:nvSpPr>
+            <p:cNvPr id="166" name="Google Shape;166;p18">
+              <a:extLst>
+                <a:ext uri="{FF2B5EF4-FFF2-40B4-BE49-F238E27FC236}">
+                  <a16:creationId xmlns:a16="http://schemas.microsoft.com/office/drawing/2014/main" id="{5E8E3819-634B-8278-8583-C3C352EA55E4}"/>
+                </a:ext>
+              </a:extLst>
+            </p:cNvPr>
+            <p:cNvSpPr/>
+            <p:nvPr/>
+          </p:nvSpPr>
+          <p:spPr>
+            <a:xfrm>
+              <a:off x="13335203" y="3675030"/>
+              <a:ext cx="1612385" cy="1275250"/>
+            </a:xfrm>
+            <a:custGeom>
+              <a:avLst/>
+              <a:gdLst/>
+              <a:ahLst/>
+              <a:cxnLst/>
+              <a:rect l="l" t="t" r="r" b="b"/>
+              <a:pathLst>
+                <a:path w="1612385" h="1275250" extrusionOk="0">
+                  <a:moveTo>
+                    <a:pt x="0" y="0"/>
+                  </a:moveTo>
+                  <a:lnTo>
+                    <a:pt x="1612384" y="0"/>
+                  </a:lnTo>
+                  <a:lnTo>
+                    <a:pt x="1612384" y="1275249"/>
+                  </a:lnTo>
+                  <a:lnTo>
+                    <a:pt x="0" y="1275249"/>
+                  </a:lnTo>
+                  <a:lnTo>
+                    <a:pt x="0" y="0"/>
+                  </a:lnTo>
+                  <a:close/>
+                </a:path>
+              </a:pathLst>
+            </a:custGeom>
+            <a:blipFill rotWithShape="1">
+              <a:blip r:embed="rId3">
+                <a:alphaModFix/>
+              </a:blip>
+              <a:stretch>
+                <a:fillRect/>
+              </a:stretch>
+            </a:blipFill>
+            <a:ln>
+              <a:noFill/>
+            </a:ln>
+          </p:spPr>
+          <p:txBody>
+            <a:bodyPr/>
+            <a:lstStyle/>
+            <a:p>
+              <a:endParaRPr lang="es-ES_tradnl" dirty="0"/>
+            </a:p>
+          </p:txBody>
+        </p:sp>
+      </p:grpSp>
+      <p:sp>
+        <p:nvSpPr>
+          <p:cNvPr id="2" name="Rectangle 14">
+            <a:extLst>
+              <a:ext uri="{FF2B5EF4-FFF2-40B4-BE49-F238E27FC236}">
+                <a16:creationId xmlns:a16="http://schemas.microsoft.com/office/drawing/2014/main" id="{2C4573BD-4062-5928-8D40-C2F880FE60B9}"/>
+              </a:ext>
+            </a:extLst>
+          </p:cNvPr>
+          <p:cNvSpPr/>
+          <p:nvPr/>
+        </p:nvSpPr>
+        <p:spPr>
+          <a:xfrm>
+            <a:off x="845798" y="4246407"/>
+            <a:ext cx="1894041" cy="788933"/>
+          </a:xfrm>
+          <a:prstGeom prst="rect">
+            <a:avLst/>
+          </a:prstGeom>
+          <a:solidFill>
+            <a:schemeClr val="bg1"/>
+          </a:solidFill>
+          <a:ln>
+            <a:solidFill>
+              <a:schemeClr val="bg2"/>
+            </a:solidFill>
+          </a:ln>
+        </p:spPr>
+        <p:style>
+          <a:lnRef idx="2">
+            <a:schemeClr val="accent1">
+              <a:shade val="50000"/>
+            </a:schemeClr>
+          </a:lnRef>
+          <a:fillRef idx="1">
+            <a:schemeClr val="accent1"/>
+          </a:fillRef>
+          <a:effectRef idx="0">
+            <a:schemeClr val="accent1"/>
+          </a:effectRef>
+          <a:fontRef idx="minor">
+            <a:schemeClr val="lt1"/>
+          </a:fontRef>
+        </p:style>
+        <p:txBody>
+          <a:bodyPr rtlCol="0" anchor="ctr"/>
+          <a:lstStyle/>
+          <a:p>
+            <a:pPr algn="ctr"/>
+            <a:r>
+              <a:rPr lang="es-ES_tradnl" sz="2400" b="1" dirty="0">
+                <a:solidFill>
+                  <a:schemeClr val="bg2"/>
+                </a:solidFill>
+              </a:rPr>
+              <a:t>CARGA DE TRABAJO</a:t>
+            </a:r>
+          </a:p>
+        </p:txBody>
+      </p:sp>
+      <p:sp>
+        <p:nvSpPr>
+          <p:cNvPr id="3" name="Rectangle 14">
+            <a:extLst>
+              <a:ext uri="{FF2B5EF4-FFF2-40B4-BE49-F238E27FC236}">
+                <a16:creationId xmlns:a16="http://schemas.microsoft.com/office/drawing/2014/main" id="{D73DF1B4-7E07-1FFB-F523-7DC8DC5EECDF}"/>
+              </a:ext>
+            </a:extLst>
+          </p:cNvPr>
+          <p:cNvSpPr/>
+          <p:nvPr/>
+        </p:nvSpPr>
+        <p:spPr>
+          <a:xfrm>
+            <a:off x="9021997" y="3616080"/>
+            <a:ext cx="2156379" cy="809011"/>
+          </a:xfrm>
+          <a:prstGeom prst="rect">
+            <a:avLst/>
+          </a:prstGeom>
+          <a:solidFill>
+            <a:schemeClr val="bg1"/>
+          </a:solidFill>
+          <a:ln>
+            <a:solidFill>
+              <a:schemeClr val="bg2"/>
+            </a:solidFill>
+          </a:ln>
+        </p:spPr>
+        <p:style>
+          <a:lnRef idx="2">
+            <a:schemeClr val="accent1">
+              <a:shade val="50000"/>
+            </a:schemeClr>
+          </a:lnRef>
+          <a:fillRef idx="1">
+            <a:schemeClr val="accent1"/>
+          </a:fillRef>
+          <a:effectRef idx="0">
+            <a:schemeClr val="accent1"/>
+          </a:effectRef>
+          <a:fontRef idx="minor">
+            <a:schemeClr val="lt1"/>
+          </a:fontRef>
+        </p:style>
+        <p:txBody>
+          <a:bodyPr rtlCol="0" anchor="ctr"/>
+          <a:lstStyle/>
+          <a:p>
+            <a:pPr algn="ctr"/>
+            <a:r>
+              <a:rPr lang="es-ES_tradnl" sz="2400" b="1" dirty="0">
+                <a:solidFill>
+                  <a:schemeClr val="bg2"/>
+                </a:solidFill>
+              </a:rPr>
+              <a:t>DESEMPEÑO</a:t>
+            </a:r>
+          </a:p>
+        </p:txBody>
+      </p:sp>
+      <p:sp>
+        <p:nvSpPr>
+          <p:cNvPr id="4" name="Rectangle 14">
+            <a:extLst>
+              <a:ext uri="{FF2B5EF4-FFF2-40B4-BE49-F238E27FC236}">
+                <a16:creationId xmlns:a16="http://schemas.microsoft.com/office/drawing/2014/main" id="{5E7CDE07-09E1-9659-2686-57651D05F2A7}"/>
+              </a:ext>
+            </a:extLst>
+          </p:cNvPr>
+          <p:cNvSpPr/>
+          <p:nvPr/>
+        </p:nvSpPr>
+        <p:spPr>
+          <a:xfrm>
+            <a:off x="6692170" y="3626941"/>
+            <a:ext cx="1894041" cy="788933"/>
+          </a:xfrm>
+          <a:prstGeom prst="rect">
+            <a:avLst/>
+          </a:prstGeom>
+          <a:solidFill>
+            <a:schemeClr val="bg1"/>
+          </a:solidFill>
+          <a:ln>
+            <a:solidFill>
+              <a:schemeClr val="bg2"/>
+            </a:solidFill>
+          </a:ln>
+        </p:spPr>
+        <p:style>
+          <a:lnRef idx="2">
+            <a:schemeClr val="accent1">
+              <a:shade val="50000"/>
+            </a:schemeClr>
+          </a:lnRef>
+          <a:fillRef idx="1">
+            <a:schemeClr val="accent1"/>
+          </a:fillRef>
+          <a:effectRef idx="0">
+            <a:schemeClr val="accent1"/>
+          </a:effectRef>
+          <a:fontRef idx="minor">
+            <a:schemeClr val="lt1"/>
+          </a:fontRef>
+        </p:style>
+        <p:txBody>
+          <a:bodyPr rtlCol="0" anchor="ctr"/>
+          <a:lstStyle/>
+          <a:p>
+            <a:pPr algn="ctr"/>
+            <a:r>
+              <a:rPr lang="es-ES_tradnl" sz="2400" b="1" dirty="0">
+                <a:solidFill>
+                  <a:schemeClr val="bg2"/>
+                </a:solidFill>
+              </a:rPr>
+              <a:t>CARGA DE TRABAJO</a:t>
+            </a:r>
+          </a:p>
+        </p:txBody>
+      </p:sp>
+      <p:sp>
+        <p:nvSpPr>
+          <p:cNvPr id="5" name="Rectangle 14">
+            <a:extLst>
+              <a:ext uri="{FF2B5EF4-FFF2-40B4-BE49-F238E27FC236}">
+                <a16:creationId xmlns:a16="http://schemas.microsoft.com/office/drawing/2014/main" id="{7B9DE141-DEAD-5D5C-77C3-4E9EF984166B}"/>
+              </a:ext>
+            </a:extLst>
+          </p:cNvPr>
+          <p:cNvSpPr/>
+          <p:nvPr/>
+        </p:nvSpPr>
+        <p:spPr>
+          <a:xfrm>
+            <a:off x="15076684" y="4226329"/>
+            <a:ext cx="2156379" cy="809011"/>
+          </a:xfrm>
+          <a:prstGeom prst="rect">
+            <a:avLst/>
+          </a:prstGeom>
+          <a:solidFill>
+            <a:schemeClr val="bg1"/>
+          </a:solidFill>
+          <a:ln>
+            <a:solidFill>
+              <a:schemeClr val="bg2"/>
+            </a:solidFill>
+          </a:ln>
+        </p:spPr>
+        <p:style>
+          <a:lnRef idx="2">
+            <a:schemeClr val="accent1">
+              <a:shade val="50000"/>
+            </a:schemeClr>
+          </a:lnRef>
+          <a:fillRef idx="1">
+            <a:schemeClr val="accent1"/>
+          </a:fillRef>
+          <a:effectRef idx="0">
+            <a:schemeClr val="accent1"/>
+          </a:effectRef>
+          <a:fontRef idx="minor">
+            <a:schemeClr val="lt1"/>
+          </a:fontRef>
+        </p:style>
+        <p:txBody>
+          <a:bodyPr rtlCol="0" anchor="ctr"/>
+          <a:lstStyle/>
+          <a:p>
+            <a:pPr algn="ctr"/>
+            <a:r>
+              <a:rPr lang="es-ES_tradnl" sz="2400" b="1" dirty="0">
+                <a:solidFill>
+                  <a:schemeClr val="bg2"/>
+                </a:solidFill>
+              </a:rPr>
+              <a:t>DESEMPEÑO</a:t>
+            </a:r>
+          </a:p>
+        </p:txBody>
+      </p:sp>
+      <p:sp>
+        <p:nvSpPr>
+          <p:cNvPr id="6" name="Rectangle 14">
+            <a:extLst>
+              <a:ext uri="{FF2B5EF4-FFF2-40B4-BE49-F238E27FC236}">
+                <a16:creationId xmlns:a16="http://schemas.microsoft.com/office/drawing/2014/main" id="{AAA1FC9E-85E7-5CC1-7D4C-008E402DA12E}"/>
+              </a:ext>
+            </a:extLst>
+          </p:cNvPr>
+          <p:cNvSpPr/>
+          <p:nvPr/>
+        </p:nvSpPr>
+        <p:spPr>
+          <a:xfrm>
+            <a:off x="12872043" y="4246407"/>
+            <a:ext cx="1894041" cy="788933"/>
+          </a:xfrm>
+          <a:prstGeom prst="rect">
+            <a:avLst/>
+          </a:prstGeom>
+          <a:solidFill>
+            <a:schemeClr val="bg1"/>
+          </a:solidFill>
+          <a:ln>
+            <a:solidFill>
+              <a:schemeClr val="bg2"/>
+            </a:solidFill>
+          </a:ln>
+        </p:spPr>
+        <p:style>
+          <a:lnRef idx="2">
+            <a:schemeClr val="accent1">
+              <a:shade val="50000"/>
+            </a:schemeClr>
+          </a:lnRef>
+          <a:fillRef idx="1">
+            <a:schemeClr val="accent1"/>
+          </a:fillRef>
+          <a:effectRef idx="0">
+            <a:schemeClr val="accent1"/>
+          </a:effectRef>
+          <a:fontRef idx="minor">
+            <a:schemeClr val="lt1"/>
+          </a:fontRef>
+        </p:style>
+        <p:txBody>
+          <a:bodyPr rtlCol="0" anchor="ctr"/>
+          <a:lstStyle/>
+          <a:p>
+            <a:pPr algn="ctr"/>
+            <a:r>
+              <a:rPr lang="es-ES_tradnl" sz="2400" b="1" dirty="0">
+                <a:solidFill>
+                  <a:schemeClr val="bg2"/>
+                </a:solidFill>
+              </a:rPr>
+              <a:t>CARGA DE TRABAJO</a:t>
+            </a:r>
+          </a:p>
+        </p:txBody>
+      </p:sp>
+      <p:sp>
+        <p:nvSpPr>
+          <p:cNvPr id="7" name="Rectangle 14">
+            <a:extLst>
+              <a:ext uri="{FF2B5EF4-FFF2-40B4-BE49-F238E27FC236}">
+                <a16:creationId xmlns:a16="http://schemas.microsoft.com/office/drawing/2014/main" id="{1A371D18-CFF7-7C81-AB14-A754411D14F9}"/>
+              </a:ext>
+            </a:extLst>
+          </p:cNvPr>
+          <p:cNvSpPr/>
+          <p:nvPr/>
+        </p:nvSpPr>
+        <p:spPr>
+          <a:xfrm>
+            <a:off x="3161026" y="5891203"/>
+            <a:ext cx="1569433" cy="751127"/>
+          </a:xfrm>
+          <a:prstGeom prst="rect">
+            <a:avLst/>
+          </a:prstGeom>
+          <a:solidFill>
+            <a:schemeClr val="bg1"/>
+          </a:solidFill>
+          <a:ln>
+            <a:solidFill>
+              <a:schemeClr val="bg2"/>
+            </a:solidFill>
+          </a:ln>
+        </p:spPr>
+        <p:style>
+          <a:lnRef idx="2">
+            <a:schemeClr val="accent1">
+              <a:shade val="50000"/>
+            </a:schemeClr>
+          </a:lnRef>
+          <a:fillRef idx="1">
+            <a:schemeClr val="accent1"/>
+          </a:fillRef>
+          <a:effectRef idx="0">
+            <a:schemeClr val="accent1"/>
+          </a:effectRef>
+          <a:fontRef idx="minor">
+            <a:schemeClr val="lt1"/>
+          </a:fontRef>
+        </p:style>
+        <p:txBody>
+          <a:bodyPr rtlCol="0" anchor="ctr"/>
+          <a:lstStyle/>
+          <a:p>
+            <a:pPr algn="ctr"/>
+            <a:r>
+              <a:rPr lang="es-ES_tradnl" sz="2400" b="1" dirty="0">
+                <a:solidFill>
+                  <a:schemeClr val="bg2"/>
+                </a:solidFill>
+              </a:rPr>
+              <a:t>81%</a:t>
+            </a:r>
+          </a:p>
+        </p:txBody>
+      </p:sp>
+      <p:sp>
+        <p:nvSpPr>
+          <p:cNvPr id="8" name="Rectangle 14">
+            <a:extLst>
+              <a:ext uri="{FF2B5EF4-FFF2-40B4-BE49-F238E27FC236}">
+                <a16:creationId xmlns:a16="http://schemas.microsoft.com/office/drawing/2014/main" id="{FFF26C2C-4A64-4E35-607C-B6984CE1B315}"/>
+              </a:ext>
+            </a:extLst>
+          </p:cNvPr>
+          <p:cNvSpPr/>
+          <p:nvPr/>
+        </p:nvSpPr>
+        <p:spPr>
+          <a:xfrm>
+            <a:off x="845798" y="5888343"/>
+            <a:ext cx="1894041" cy="788933"/>
+          </a:xfrm>
+          <a:prstGeom prst="rect">
+            <a:avLst/>
+          </a:prstGeom>
+          <a:solidFill>
+            <a:schemeClr val="bg1"/>
+          </a:solidFill>
+          <a:ln>
+            <a:solidFill>
+              <a:schemeClr val="bg2"/>
+            </a:solidFill>
+          </a:ln>
+        </p:spPr>
+        <p:style>
+          <a:lnRef idx="2">
+            <a:schemeClr val="accent1">
+              <a:shade val="50000"/>
+            </a:schemeClr>
+          </a:lnRef>
+          <a:fillRef idx="1">
+            <a:schemeClr val="accent1"/>
+          </a:fillRef>
+          <a:effectRef idx="0">
+            <a:schemeClr val="accent1"/>
+          </a:effectRef>
+          <a:fontRef idx="minor">
+            <a:schemeClr val="lt1"/>
+          </a:fontRef>
+        </p:style>
+        <p:txBody>
+          <a:bodyPr rtlCol="0" anchor="ctr"/>
+          <a:lstStyle/>
+          <a:p>
+            <a:pPr algn="ctr"/>
+            <a:r>
+              <a:rPr lang="es-ES_tradnl" sz="2400" b="1" dirty="0">
+                <a:solidFill>
+                  <a:schemeClr val="bg2"/>
+                </a:solidFill>
+              </a:rPr>
+              <a:t>289 – 298 paquetes</a:t>
+            </a:r>
+          </a:p>
+        </p:txBody>
+      </p:sp>
+      <p:sp>
+        <p:nvSpPr>
+          <p:cNvPr id="9" name="Rectangle 14">
+            <a:extLst>
+              <a:ext uri="{FF2B5EF4-FFF2-40B4-BE49-F238E27FC236}">
+                <a16:creationId xmlns:a16="http://schemas.microsoft.com/office/drawing/2014/main" id="{2C786784-9FA6-D511-DA8C-F5E16FE4EADD}"/>
+              </a:ext>
+            </a:extLst>
+          </p:cNvPr>
+          <p:cNvSpPr/>
+          <p:nvPr/>
+        </p:nvSpPr>
+        <p:spPr>
+          <a:xfrm>
+            <a:off x="9021996" y="5143501"/>
+            <a:ext cx="1569433" cy="760440"/>
+          </a:xfrm>
+          <a:prstGeom prst="rect">
+            <a:avLst/>
+          </a:prstGeom>
+          <a:solidFill>
+            <a:schemeClr val="bg1"/>
+          </a:solidFill>
+          <a:ln>
+            <a:solidFill>
+              <a:schemeClr val="bg2"/>
+            </a:solidFill>
+          </a:ln>
+        </p:spPr>
+        <p:style>
+          <a:lnRef idx="2">
+            <a:schemeClr val="accent1">
+              <a:shade val="50000"/>
+            </a:schemeClr>
+          </a:lnRef>
+          <a:fillRef idx="1">
+            <a:schemeClr val="accent1"/>
+          </a:fillRef>
+          <a:effectRef idx="0">
+            <a:schemeClr val="accent1"/>
+          </a:effectRef>
+          <a:fontRef idx="minor">
+            <a:schemeClr val="lt1"/>
+          </a:fontRef>
+        </p:style>
+        <p:txBody>
+          <a:bodyPr rtlCol="0" anchor="ctr"/>
+          <a:lstStyle/>
+          <a:p>
+            <a:pPr algn="ctr"/>
+            <a:r>
+              <a:rPr lang="es-ES_tradnl" sz="2400" b="1" dirty="0">
+                <a:solidFill>
+                  <a:schemeClr val="bg2"/>
+                </a:solidFill>
+              </a:rPr>
+              <a:t>98.7%</a:t>
+            </a:r>
+          </a:p>
+        </p:txBody>
+      </p:sp>
+      <p:sp>
+        <p:nvSpPr>
+          <p:cNvPr id="10" name="Rectangle 14">
+            <a:extLst>
+              <a:ext uri="{FF2B5EF4-FFF2-40B4-BE49-F238E27FC236}">
+                <a16:creationId xmlns:a16="http://schemas.microsoft.com/office/drawing/2014/main" id="{AA30C771-E6A3-FE09-F41C-D9F5FEC85A32}"/>
+              </a:ext>
+            </a:extLst>
+          </p:cNvPr>
+          <p:cNvSpPr/>
+          <p:nvPr/>
+        </p:nvSpPr>
+        <p:spPr>
+          <a:xfrm>
+            <a:off x="6692169" y="5143500"/>
+            <a:ext cx="1894041" cy="788933"/>
+          </a:xfrm>
+          <a:prstGeom prst="rect">
+            <a:avLst/>
+          </a:prstGeom>
+          <a:solidFill>
+            <a:schemeClr val="bg1"/>
+          </a:solidFill>
+          <a:ln>
+            <a:solidFill>
+              <a:schemeClr val="bg2"/>
+            </a:solidFill>
+          </a:ln>
+        </p:spPr>
+        <p:style>
+          <a:lnRef idx="2">
+            <a:schemeClr val="accent1">
+              <a:shade val="50000"/>
+            </a:schemeClr>
+          </a:lnRef>
+          <a:fillRef idx="1">
+            <a:schemeClr val="accent1"/>
+          </a:fillRef>
+          <a:effectRef idx="0">
+            <a:schemeClr val="accent1"/>
+          </a:effectRef>
+          <a:fontRef idx="minor">
+            <a:schemeClr val="lt1"/>
+          </a:fontRef>
+        </p:style>
+        <p:txBody>
+          <a:bodyPr rtlCol="0" anchor="ctr"/>
+          <a:lstStyle/>
+          <a:p>
+            <a:pPr algn="ctr"/>
+            <a:r>
+              <a:rPr lang="es-ES_tradnl" sz="2400" b="1" dirty="0">
+                <a:solidFill>
+                  <a:schemeClr val="bg2"/>
+                </a:solidFill>
+              </a:rPr>
+              <a:t>237 – 239 paquetes</a:t>
+            </a:r>
+          </a:p>
+        </p:txBody>
+      </p:sp>
+      <p:sp>
+        <p:nvSpPr>
+          <p:cNvPr id="12" name="Rectangle 14">
+            <a:extLst>
+              <a:ext uri="{FF2B5EF4-FFF2-40B4-BE49-F238E27FC236}">
+                <a16:creationId xmlns:a16="http://schemas.microsoft.com/office/drawing/2014/main" id="{BCA2D389-3019-B741-E06C-B5218ED92F60}"/>
+              </a:ext>
+            </a:extLst>
+          </p:cNvPr>
+          <p:cNvSpPr/>
+          <p:nvPr/>
+        </p:nvSpPr>
+        <p:spPr>
+          <a:xfrm>
+            <a:off x="15187271" y="5880162"/>
+            <a:ext cx="1587813" cy="751128"/>
+          </a:xfrm>
+          <a:prstGeom prst="rect">
+            <a:avLst/>
+          </a:prstGeom>
+          <a:solidFill>
+            <a:schemeClr val="bg1"/>
+          </a:solidFill>
+          <a:ln>
+            <a:solidFill>
+              <a:schemeClr val="bg2"/>
+            </a:solidFill>
+          </a:ln>
+        </p:spPr>
+        <p:style>
+          <a:lnRef idx="2">
+            <a:schemeClr val="accent1">
+              <a:shade val="50000"/>
+            </a:schemeClr>
+          </a:lnRef>
+          <a:fillRef idx="1">
+            <a:schemeClr val="accent1"/>
+          </a:fillRef>
+          <a:effectRef idx="0">
+            <a:schemeClr val="accent1"/>
+          </a:effectRef>
+          <a:fontRef idx="minor">
+            <a:schemeClr val="lt1"/>
+          </a:fontRef>
+        </p:style>
+        <p:txBody>
+          <a:bodyPr rtlCol="0" anchor="ctr"/>
+          <a:lstStyle/>
+          <a:p>
+            <a:pPr algn="ctr"/>
+            <a:r>
+              <a:rPr lang="es-ES_tradnl" sz="2400" b="1" dirty="0">
+                <a:solidFill>
+                  <a:schemeClr val="bg2"/>
+                </a:solidFill>
+              </a:rPr>
+              <a:t>95.5%</a:t>
+            </a:r>
+          </a:p>
+        </p:txBody>
+      </p:sp>
+      <p:sp>
+        <p:nvSpPr>
+          <p:cNvPr id="18" name="Rectangle 14">
+            <a:extLst>
+              <a:ext uri="{FF2B5EF4-FFF2-40B4-BE49-F238E27FC236}">
+                <a16:creationId xmlns:a16="http://schemas.microsoft.com/office/drawing/2014/main" id="{07227D69-5E0C-A63D-B5C0-BD57482FD335}"/>
+              </a:ext>
+            </a:extLst>
+          </p:cNvPr>
+          <p:cNvSpPr/>
+          <p:nvPr/>
+        </p:nvSpPr>
+        <p:spPr>
+          <a:xfrm>
+            <a:off x="12872043" y="5890483"/>
+            <a:ext cx="1894041" cy="788933"/>
+          </a:xfrm>
+          <a:prstGeom prst="rect">
+            <a:avLst/>
+          </a:prstGeom>
+          <a:solidFill>
+            <a:schemeClr val="bg1"/>
+          </a:solidFill>
+          <a:ln>
+            <a:solidFill>
+              <a:schemeClr val="bg2"/>
+            </a:solidFill>
+          </a:ln>
+        </p:spPr>
+        <p:style>
+          <a:lnRef idx="2">
+            <a:schemeClr val="accent1">
+              <a:shade val="50000"/>
+            </a:schemeClr>
+          </a:lnRef>
+          <a:fillRef idx="1">
+            <a:schemeClr val="accent1"/>
+          </a:fillRef>
+          <a:effectRef idx="0">
+            <a:schemeClr val="accent1"/>
+          </a:effectRef>
+          <a:fontRef idx="minor">
+            <a:schemeClr val="lt1"/>
+          </a:fontRef>
+        </p:style>
+        <p:txBody>
+          <a:bodyPr rtlCol="0" anchor="ctr"/>
+          <a:lstStyle/>
+          <a:p>
+            <a:pPr algn="ctr"/>
+            <a:r>
+              <a:rPr lang="es-ES_tradnl" sz="2400" b="1" dirty="0">
+                <a:solidFill>
+                  <a:schemeClr val="bg2"/>
+                </a:solidFill>
+              </a:rPr>
+              <a:t>&gt; 304</a:t>
+            </a:r>
+            <a:br>
+              <a:rPr lang="es-ES_tradnl" sz="2400" b="1" dirty="0">
+                <a:solidFill>
+                  <a:schemeClr val="bg2"/>
+                </a:solidFill>
+              </a:rPr>
+            </a:br>
+            <a:r>
+              <a:rPr lang="es-ES_tradnl" sz="2400" b="1" dirty="0">
+                <a:solidFill>
+                  <a:schemeClr val="bg2"/>
+                </a:solidFill>
+              </a:rPr>
+              <a:t>paquetes</a:t>
+            </a:r>
+          </a:p>
+        </p:txBody>
+      </p:sp>
+      <p:sp>
+        <p:nvSpPr>
+          <p:cNvPr id="19" name="Flecha abajo 18">
+            <a:extLst>
+              <a:ext uri="{FF2B5EF4-FFF2-40B4-BE49-F238E27FC236}">
+                <a16:creationId xmlns:a16="http://schemas.microsoft.com/office/drawing/2014/main" id="{06892AA4-0E84-0998-2A87-8514C668B258}"/>
+              </a:ext>
+            </a:extLst>
+          </p:cNvPr>
+          <p:cNvSpPr/>
+          <p:nvPr/>
+        </p:nvSpPr>
+        <p:spPr>
+          <a:xfrm>
+            <a:off x="7639189" y="2947681"/>
+            <a:ext cx="349135" cy="590931"/>
+          </a:xfrm>
+          <a:prstGeom prst="downArrow">
+            <a:avLst/>
+          </a:prstGeom>
+          <a:solidFill>
+            <a:srgbClr val="00B050"/>
+          </a:solidFill>
+          <a:ln>
+            <a:solidFill>
+              <a:schemeClr val="accent3">
+                <a:lumMod val="75000"/>
+              </a:schemeClr>
+            </a:solidFill>
+          </a:ln>
+        </p:spPr>
+        <p:style>
+          <a:lnRef idx="2">
+            <a:schemeClr val="accent1">
+              <a:shade val="15000"/>
+            </a:schemeClr>
+          </a:lnRef>
+          <a:fillRef idx="1">
+            <a:schemeClr val="accent1"/>
+          </a:fillRef>
+          <a:effectRef idx="0">
+            <a:schemeClr val="accent1"/>
+          </a:effectRef>
+          <a:fontRef idx="minor">
+            <a:schemeClr val="lt1"/>
+          </a:fontRef>
+        </p:style>
+        <p:txBody>
+          <a:bodyPr rtlCol="0" anchor="ctr"/>
+          <a:lstStyle/>
+          <a:p>
+            <a:pPr algn="ctr"/>
+            <a:endParaRPr lang="es-ES"/>
+          </a:p>
+        </p:txBody>
+      </p:sp>
+      <p:sp>
+        <p:nvSpPr>
+          <p:cNvPr id="20" name="Flecha abajo 19">
+            <a:extLst>
+              <a:ext uri="{FF2B5EF4-FFF2-40B4-BE49-F238E27FC236}">
+                <a16:creationId xmlns:a16="http://schemas.microsoft.com/office/drawing/2014/main" id="{27DF9403-FC07-1FE3-C630-B4CCB48243CD}"/>
+              </a:ext>
+            </a:extLst>
+          </p:cNvPr>
+          <p:cNvSpPr/>
+          <p:nvPr/>
+        </p:nvSpPr>
+        <p:spPr>
+          <a:xfrm>
+            <a:off x="9504430" y="2961410"/>
+            <a:ext cx="349135" cy="590931"/>
+          </a:xfrm>
+          <a:prstGeom prst="downArrow">
+            <a:avLst/>
+          </a:prstGeom>
+          <a:solidFill>
+            <a:srgbClr val="00B050"/>
+          </a:solidFill>
+          <a:ln>
+            <a:solidFill>
+              <a:schemeClr val="accent3">
+                <a:lumMod val="75000"/>
+              </a:schemeClr>
+            </a:solidFill>
+          </a:ln>
+        </p:spPr>
+        <p:style>
+          <a:lnRef idx="2">
+            <a:schemeClr val="accent1">
+              <a:shade val="15000"/>
+            </a:schemeClr>
+          </a:lnRef>
+          <a:fillRef idx="1">
+            <a:schemeClr val="accent1"/>
+          </a:fillRef>
+          <a:effectRef idx="0">
+            <a:schemeClr val="accent1"/>
+          </a:effectRef>
+          <a:fontRef idx="minor">
+            <a:schemeClr val="lt1"/>
+          </a:fontRef>
+        </p:style>
+        <p:txBody>
+          <a:bodyPr rtlCol="0" anchor="ctr"/>
+          <a:lstStyle/>
+          <a:p>
+            <a:pPr algn="ctr"/>
+            <a:endParaRPr lang="es-ES"/>
+          </a:p>
+        </p:txBody>
+      </p:sp>
+      <p:sp>
+        <p:nvSpPr>
+          <p:cNvPr id="21" name="Flecha abajo 20">
+            <a:extLst>
+              <a:ext uri="{FF2B5EF4-FFF2-40B4-BE49-F238E27FC236}">
+                <a16:creationId xmlns:a16="http://schemas.microsoft.com/office/drawing/2014/main" id="{4AE8A597-AD4C-6807-9C29-6DF665B918CA}"/>
+              </a:ext>
+            </a:extLst>
+          </p:cNvPr>
+          <p:cNvSpPr/>
+          <p:nvPr/>
+        </p:nvSpPr>
+        <p:spPr>
+          <a:xfrm>
+            <a:off x="7639188" y="4504203"/>
+            <a:ext cx="349135" cy="590931"/>
+          </a:xfrm>
+          <a:prstGeom prst="downArrow">
+            <a:avLst/>
+          </a:prstGeom>
+          <a:solidFill>
+            <a:srgbClr val="00B050"/>
+          </a:solidFill>
+          <a:ln>
+            <a:solidFill>
+              <a:schemeClr val="accent3">
+                <a:lumMod val="75000"/>
+              </a:schemeClr>
+            </a:solidFill>
+          </a:ln>
+        </p:spPr>
+        <p:style>
+          <a:lnRef idx="2">
+            <a:schemeClr val="accent1">
+              <a:shade val="15000"/>
+            </a:schemeClr>
+          </a:lnRef>
+          <a:fillRef idx="1">
+            <a:schemeClr val="accent1"/>
+          </a:fillRef>
+          <a:effectRef idx="0">
+            <a:schemeClr val="accent1"/>
+          </a:effectRef>
+          <a:fontRef idx="minor">
+            <a:schemeClr val="lt1"/>
+          </a:fontRef>
+        </p:style>
+        <p:txBody>
+          <a:bodyPr rtlCol="0" anchor="ctr"/>
+          <a:lstStyle/>
+          <a:p>
+            <a:pPr algn="ctr"/>
+            <a:endParaRPr lang="es-ES"/>
+          </a:p>
+        </p:txBody>
+      </p:sp>
+      <p:sp>
+        <p:nvSpPr>
+          <p:cNvPr id="22" name="Flecha abajo 21">
+            <a:extLst>
+              <a:ext uri="{FF2B5EF4-FFF2-40B4-BE49-F238E27FC236}">
+                <a16:creationId xmlns:a16="http://schemas.microsoft.com/office/drawing/2014/main" id="{07ECE06B-223A-0567-4341-27AA5F848363}"/>
+              </a:ext>
+            </a:extLst>
+          </p:cNvPr>
+          <p:cNvSpPr/>
+          <p:nvPr/>
+        </p:nvSpPr>
+        <p:spPr>
+          <a:xfrm>
+            <a:off x="9504429" y="4504203"/>
+            <a:ext cx="349135" cy="590931"/>
+          </a:xfrm>
+          <a:prstGeom prst="downArrow">
+            <a:avLst/>
+          </a:prstGeom>
+          <a:solidFill>
+            <a:srgbClr val="00B050"/>
+          </a:solidFill>
+          <a:ln>
+            <a:solidFill>
+              <a:schemeClr val="accent3">
+                <a:lumMod val="75000"/>
+              </a:schemeClr>
+            </a:solidFill>
+          </a:ln>
+        </p:spPr>
+        <p:style>
+          <a:lnRef idx="2">
+            <a:schemeClr val="accent1">
+              <a:shade val="15000"/>
+            </a:schemeClr>
+          </a:lnRef>
+          <a:fillRef idx="1">
+            <a:schemeClr val="accent1"/>
+          </a:fillRef>
+          <a:effectRef idx="0">
+            <a:schemeClr val="accent1"/>
+          </a:effectRef>
+          <a:fontRef idx="minor">
+            <a:schemeClr val="lt1"/>
+          </a:fontRef>
+        </p:style>
+        <p:txBody>
+          <a:bodyPr rtlCol="0" anchor="ctr"/>
+          <a:lstStyle/>
+          <a:p>
+            <a:pPr algn="ctr"/>
+            <a:endParaRPr lang="es-ES"/>
+          </a:p>
+        </p:txBody>
+      </p:sp>
+      <p:sp>
+        <p:nvSpPr>
+          <p:cNvPr id="23" name="Flecha abajo 22">
+            <a:extLst>
+              <a:ext uri="{FF2B5EF4-FFF2-40B4-BE49-F238E27FC236}">
+                <a16:creationId xmlns:a16="http://schemas.microsoft.com/office/drawing/2014/main" id="{356C1CDD-C354-2A09-BFC9-FADEB6A7E64A}"/>
+              </a:ext>
+            </a:extLst>
+          </p:cNvPr>
+          <p:cNvSpPr/>
+          <p:nvPr/>
+        </p:nvSpPr>
+        <p:spPr>
+          <a:xfrm>
+            <a:off x="13672226" y="3598578"/>
+            <a:ext cx="349135" cy="590931"/>
+          </a:xfrm>
+          <a:prstGeom prst="downArrow">
+            <a:avLst/>
+          </a:prstGeom>
+          <a:solidFill>
+            <a:schemeClr val="accent6">
+              <a:lumMod val="75000"/>
+            </a:schemeClr>
+          </a:solidFill>
+          <a:ln>
+            <a:solidFill>
+              <a:schemeClr val="accent6">
+                <a:lumMod val="50000"/>
+              </a:schemeClr>
+            </a:solidFill>
+          </a:ln>
+        </p:spPr>
+        <p:style>
+          <a:lnRef idx="2">
+            <a:schemeClr val="accent1">
+              <a:shade val="15000"/>
+            </a:schemeClr>
+          </a:lnRef>
+          <a:fillRef idx="1">
+            <a:schemeClr val="accent1"/>
+          </a:fillRef>
+          <a:effectRef idx="0">
+            <a:schemeClr val="accent1"/>
+          </a:effectRef>
+          <a:fontRef idx="minor">
+            <a:schemeClr val="lt1"/>
+          </a:fontRef>
+        </p:style>
+        <p:txBody>
+          <a:bodyPr rtlCol="0" anchor="ctr"/>
+          <a:lstStyle/>
+          <a:p>
+            <a:pPr algn="ctr"/>
+            <a:endParaRPr lang="es-ES"/>
+          </a:p>
+        </p:txBody>
+      </p:sp>
+      <p:sp>
+        <p:nvSpPr>
+          <p:cNvPr id="24" name="Flecha abajo 23">
+            <a:extLst>
+              <a:ext uri="{FF2B5EF4-FFF2-40B4-BE49-F238E27FC236}">
+                <a16:creationId xmlns:a16="http://schemas.microsoft.com/office/drawing/2014/main" id="{7C533EBD-554B-77AE-8C4D-66526DB7A975}"/>
+              </a:ext>
+            </a:extLst>
+          </p:cNvPr>
+          <p:cNvSpPr/>
+          <p:nvPr/>
+        </p:nvSpPr>
+        <p:spPr>
+          <a:xfrm>
+            <a:off x="15537467" y="3612307"/>
+            <a:ext cx="349135" cy="590931"/>
+          </a:xfrm>
+          <a:prstGeom prst="downArrow">
+            <a:avLst/>
+          </a:prstGeom>
+          <a:solidFill>
+            <a:schemeClr val="accent6">
+              <a:lumMod val="75000"/>
+            </a:schemeClr>
+          </a:solidFill>
+          <a:ln>
+            <a:solidFill>
+              <a:schemeClr val="accent6">
+                <a:lumMod val="50000"/>
+              </a:schemeClr>
+            </a:solidFill>
+          </a:ln>
+        </p:spPr>
+        <p:style>
+          <a:lnRef idx="2">
+            <a:schemeClr val="accent1">
+              <a:shade val="15000"/>
+            </a:schemeClr>
+          </a:lnRef>
+          <a:fillRef idx="1">
+            <a:schemeClr val="accent1"/>
+          </a:fillRef>
+          <a:effectRef idx="0">
+            <a:schemeClr val="accent1"/>
+          </a:effectRef>
+          <a:fontRef idx="minor">
+            <a:schemeClr val="lt1"/>
+          </a:fontRef>
+        </p:style>
+        <p:txBody>
+          <a:bodyPr rtlCol="0" anchor="ctr"/>
+          <a:lstStyle/>
+          <a:p>
+            <a:pPr algn="ctr"/>
+            <a:endParaRPr lang="es-ES"/>
+          </a:p>
+        </p:txBody>
+      </p:sp>
+      <p:sp>
+        <p:nvSpPr>
+          <p:cNvPr id="25" name="Flecha abajo 24">
+            <a:extLst>
+              <a:ext uri="{FF2B5EF4-FFF2-40B4-BE49-F238E27FC236}">
+                <a16:creationId xmlns:a16="http://schemas.microsoft.com/office/drawing/2014/main" id="{36297C3E-7832-B3A4-DE68-A8D5264D0CDB}"/>
+              </a:ext>
+            </a:extLst>
+          </p:cNvPr>
+          <p:cNvSpPr/>
+          <p:nvPr/>
+        </p:nvSpPr>
+        <p:spPr>
+          <a:xfrm>
+            <a:off x="13672225" y="5155100"/>
+            <a:ext cx="349135" cy="590931"/>
+          </a:xfrm>
+          <a:prstGeom prst="downArrow">
+            <a:avLst/>
+          </a:prstGeom>
+          <a:solidFill>
+            <a:schemeClr val="accent6">
+              <a:lumMod val="75000"/>
+            </a:schemeClr>
+          </a:solidFill>
+          <a:ln>
+            <a:solidFill>
+              <a:schemeClr val="accent6">
+                <a:lumMod val="50000"/>
+              </a:schemeClr>
+            </a:solidFill>
+          </a:ln>
+        </p:spPr>
+        <p:style>
+          <a:lnRef idx="2">
+            <a:schemeClr val="accent1">
+              <a:shade val="15000"/>
+            </a:schemeClr>
+          </a:lnRef>
+          <a:fillRef idx="1">
+            <a:schemeClr val="accent1"/>
+          </a:fillRef>
+          <a:effectRef idx="0">
+            <a:schemeClr val="accent1"/>
+          </a:effectRef>
+          <a:fontRef idx="minor">
+            <a:schemeClr val="lt1"/>
+          </a:fontRef>
+        </p:style>
+        <p:txBody>
+          <a:bodyPr rtlCol="0" anchor="ctr"/>
+          <a:lstStyle/>
+          <a:p>
+            <a:pPr algn="ctr"/>
+            <a:endParaRPr lang="es-ES"/>
+          </a:p>
+        </p:txBody>
+      </p:sp>
+      <p:sp>
+        <p:nvSpPr>
+          <p:cNvPr id="26" name="Flecha abajo 25">
+            <a:extLst>
+              <a:ext uri="{FF2B5EF4-FFF2-40B4-BE49-F238E27FC236}">
+                <a16:creationId xmlns:a16="http://schemas.microsoft.com/office/drawing/2014/main" id="{464B6C5F-A562-BF84-839D-9AC0DBF1899D}"/>
+              </a:ext>
+            </a:extLst>
+          </p:cNvPr>
+          <p:cNvSpPr/>
+          <p:nvPr/>
+        </p:nvSpPr>
+        <p:spPr>
+          <a:xfrm>
+            <a:off x="15537466" y="5155100"/>
+            <a:ext cx="349135" cy="590931"/>
+          </a:xfrm>
+          <a:prstGeom prst="downArrow">
+            <a:avLst/>
+          </a:prstGeom>
+          <a:solidFill>
+            <a:schemeClr val="accent6">
+              <a:lumMod val="75000"/>
+            </a:schemeClr>
+          </a:solidFill>
+          <a:ln>
+            <a:solidFill>
+              <a:schemeClr val="accent6">
+                <a:lumMod val="50000"/>
+              </a:schemeClr>
+            </a:solidFill>
+          </a:ln>
+        </p:spPr>
+        <p:style>
+          <a:lnRef idx="2">
+            <a:schemeClr val="accent1">
+              <a:shade val="15000"/>
+            </a:schemeClr>
+          </a:lnRef>
+          <a:fillRef idx="1">
+            <a:schemeClr val="accent1"/>
+          </a:fillRef>
+          <a:effectRef idx="0">
+            <a:schemeClr val="accent1"/>
+          </a:effectRef>
+          <a:fontRef idx="minor">
+            <a:schemeClr val="lt1"/>
+          </a:fontRef>
+        </p:style>
+        <p:txBody>
+          <a:bodyPr rtlCol="0" anchor="ctr"/>
+          <a:lstStyle/>
+          <a:p>
+            <a:pPr algn="ctr"/>
+            <a:endParaRPr lang="es-ES"/>
+          </a:p>
+        </p:txBody>
+      </p:sp>
+      <p:sp>
+        <p:nvSpPr>
+          <p:cNvPr id="27" name="Flecha abajo 26">
+            <a:extLst>
+              <a:ext uri="{FF2B5EF4-FFF2-40B4-BE49-F238E27FC236}">
+                <a16:creationId xmlns:a16="http://schemas.microsoft.com/office/drawing/2014/main" id="{53168283-7E04-F1E2-E520-A02E58E33E99}"/>
+              </a:ext>
+            </a:extLst>
+          </p:cNvPr>
+          <p:cNvSpPr/>
+          <p:nvPr/>
+        </p:nvSpPr>
+        <p:spPr>
+          <a:xfrm>
+            <a:off x="1725016" y="3563204"/>
+            <a:ext cx="349135" cy="590931"/>
+          </a:xfrm>
+          <a:prstGeom prst="downArrow">
+            <a:avLst/>
+          </a:prstGeom>
+          <a:solidFill>
+            <a:srgbClr val="FF0000"/>
+          </a:solidFill>
+          <a:ln>
+            <a:solidFill>
+              <a:srgbClr val="C00000"/>
+            </a:solidFill>
+          </a:ln>
+        </p:spPr>
+        <p:style>
+          <a:lnRef idx="2">
+            <a:schemeClr val="accent1">
+              <a:shade val="15000"/>
+            </a:schemeClr>
+          </a:lnRef>
+          <a:fillRef idx="1">
+            <a:schemeClr val="accent1"/>
+          </a:fillRef>
+          <a:effectRef idx="0">
+            <a:schemeClr val="accent1"/>
+          </a:effectRef>
+          <a:fontRef idx="minor">
+            <a:schemeClr val="lt1"/>
+          </a:fontRef>
+        </p:style>
+        <p:txBody>
+          <a:bodyPr rtlCol="0" anchor="ctr"/>
+          <a:lstStyle/>
+          <a:p>
+            <a:pPr algn="ctr"/>
+            <a:endParaRPr lang="es-ES"/>
+          </a:p>
+        </p:txBody>
+      </p:sp>
+      <p:sp>
+        <p:nvSpPr>
+          <p:cNvPr id="28" name="Flecha abajo 27">
+            <a:extLst>
+              <a:ext uri="{FF2B5EF4-FFF2-40B4-BE49-F238E27FC236}">
+                <a16:creationId xmlns:a16="http://schemas.microsoft.com/office/drawing/2014/main" id="{DBF47D44-AEE3-B620-5B96-0CD65447D6A3}"/>
+              </a:ext>
+            </a:extLst>
+          </p:cNvPr>
+          <p:cNvSpPr/>
+          <p:nvPr/>
+        </p:nvSpPr>
+        <p:spPr>
+          <a:xfrm>
+            <a:off x="3590257" y="3576933"/>
+            <a:ext cx="349135" cy="590931"/>
+          </a:xfrm>
+          <a:prstGeom prst="downArrow">
+            <a:avLst/>
+          </a:prstGeom>
+          <a:solidFill>
+            <a:srgbClr val="FF0000"/>
+          </a:solidFill>
+          <a:ln>
+            <a:solidFill>
+              <a:srgbClr val="C00000"/>
+            </a:solidFill>
+          </a:ln>
+        </p:spPr>
+        <p:style>
+          <a:lnRef idx="2">
+            <a:schemeClr val="accent1">
+              <a:shade val="15000"/>
+            </a:schemeClr>
+          </a:lnRef>
+          <a:fillRef idx="1">
+            <a:schemeClr val="accent1"/>
+          </a:fillRef>
+          <a:effectRef idx="0">
+            <a:schemeClr val="accent1"/>
+          </a:effectRef>
+          <a:fontRef idx="minor">
+            <a:schemeClr val="lt1"/>
+          </a:fontRef>
+        </p:style>
+        <p:txBody>
+          <a:bodyPr rtlCol="0" anchor="ctr"/>
+          <a:lstStyle/>
+          <a:p>
+            <a:pPr algn="ctr"/>
+            <a:endParaRPr lang="es-ES">
+              <a:solidFill>
+                <a:srgbClr val="FF0000"/>
+              </a:solidFill>
+            </a:endParaRPr>
+          </a:p>
+        </p:txBody>
+      </p:sp>
+      <p:sp>
+        <p:nvSpPr>
+          <p:cNvPr id="29" name="Flecha abajo 28">
+            <a:extLst>
+              <a:ext uri="{FF2B5EF4-FFF2-40B4-BE49-F238E27FC236}">
+                <a16:creationId xmlns:a16="http://schemas.microsoft.com/office/drawing/2014/main" id="{3EF09888-3FB9-8476-A9C9-58D4C2AA24B7}"/>
+              </a:ext>
+            </a:extLst>
+          </p:cNvPr>
+          <p:cNvSpPr/>
+          <p:nvPr/>
+        </p:nvSpPr>
+        <p:spPr>
+          <a:xfrm>
+            <a:off x="1725015" y="5119726"/>
+            <a:ext cx="349135" cy="590931"/>
+          </a:xfrm>
+          <a:prstGeom prst="downArrow">
+            <a:avLst/>
+          </a:prstGeom>
+          <a:solidFill>
+            <a:srgbClr val="FF0000"/>
+          </a:solidFill>
+          <a:ln>
+            <a:solidFill>
+              <a:srgbClr val="C00000"/>
+            </a:solidFill>
+          </a:ln>
+        </p:spPr>
+        <p:style>
+          <a:lnRef idx="2">
+            <a:schemeClr val="accent1">
+              <a:shade val="15000"/>
+            </a:schemeClr>
+          </a:lnRef>
+          <a:fillRef idx="1">
+            <a:schemeClr val="accent1"/>
+          </a:fillRef>
+          <a:effectRef idx="0">
+            <a:schemeClr val="accent1"/>
+          </a:effectRef>
+          <a:fontRef idx="minor">
+            <a:schemeClr val="lt1"/>
+          </a:fontRef>
+        </p:style>
+        <p:txBody>
+          <a:bodyPr rtlCol="0" anchor="ctr"/>
+          <a:lstStyle/>
+          <a:p>
+            <a:pPr algn="ctr"/>
+            <a:endParaRPr lang="es-ES"/>
+          </a:p>
+        </p:txBody>
+      </p:sp>
+      <p:sp>
+        <p:nvSpPr>
+          <p:cNvPr id="30" name="Flecha abajo 29">
+            <a:extLst>
+              <a:ext uri="{FF2B5EF4-FFF2-40B4-BE49-F238E27FC236}">
+                <a16:creationId xmlns:a16="http://schemas.microsoft.com/office/drawing/2014/main" id="{030F277A-7CD4-62F5-A2EE-C651FF9F555A}"/>
+              </a:ext>
+            </a:extLst>
+          </p:cNvPr>
+          <p:cNvSpPr/>
+          <p:nvPr/>
+        </p:nvSpPr>
+        <p:spPr>
+          <a:xfrm>
+            <a:off x="3590256" y="5119726"/>
+            <a:ext cx="349135" cy="590931"/>
+          </a:xfrm>
+          <a:prstGeom prst="downArrow">
+            <a:avLst/>
+          </a:prstGeom>
+          <a:solidFill>
+            <a:srgbClr val="FF0000"/>
+          </a:solidFill>
+          <a:ln>
+            <a:solidFill>
+              <a:srgbClr val="C00000"/>
+            </a:solidFill>
+          </a:ln>
+        </p:spPr>
+        <p:style>
+          <a:lnRef idx="2">
+            <a:schemeClr val="accent1">
+              <a:shade val="15000"/>
+            </a:schemeClr>
+          </a:lnRef>
+          <a:fillRef idx="1">
+            <a:schemeClr val="accent1"/>
+          </a:fillRef>
+          <a:effectRef idx="0">
+            <a:schemeClr val="accent1"/>
+          </a:effectRef>
+          <a:fontRef idx="minor">
+            <a:schemeClr val="lt1"/>
+          </a:fontRef>
+        </p:style>
+        <p:txBody>
+          <a:bodyPr rtlCol="0" anchor="ctr"/>
+          <a:lstStyle/>
+          <a:p>
+            <a:pPr algn="ctr"/>
+            <a:endParaRPr lang="es-ES"/>
+          </a:p>
+        </p:txBody>
+      </p:sp>
+      <p:sp>
+        <p:nvSpPr>
+          <p:cNvPr id="36" name="Fletxa: corbada cap amunt 35">
+            <a:extLst>
+              <a:ext uri="{FF2B5EF4-FFF2-40B4-BE49-F238E27FC236}">
+                <a16:creationId xmlns:a16="http://schemas.microsoft.com/office/drawing/2014/main" id="{DB43EA59-B123-40D4-8071-6AFA381F64F5}"/>
+              </a:ext>
+            </a:extLst>
+          </p:cNvPr>
+          <p:cNvSpPr/>
+          <p:nvPr/>
+        </p:nvSpPr>
+        <p:spPr>
+          <a:xfrm rot="21121263">
+            <a:off x="2436267" y="6479680"/>
+            <a:ext cx="5311961" cy="1364949"/>
+          </a:xfrm>
+          <a:prstGeom prst="curvedUpArrow">
+            <a:avLst/>
+          </a:prstGeom>
+        </p:spPr>
+        <p:style>
+          <a:lnRef idx="2">
+            <a:schemeClr val="accent1">
+              <a:shade val="50000"/>
+            </a:schemeClr>
+          </a:lnRef>
+          <a:fillRef idx="1">
+            <a:schemeClr val="accent1"/>
+          </a:fillRef>
+          <a:effectRef idx="0">
+            <a:schemeClr val="accent1"/>
+          </a:effectRef>
+          <a:fontRef idx="minor">
+            <a:schemeClr val="lt1"/>
+          </a:fontRef>
+        </p:style>
+        <p:txBody>
+          <a:bodyPr rtlCol="0" anchor="ctr"/>
+          <a:lstStyle/>
+          <a:p>
+            <a:pPr algn="ctr"/>
+            <a:endParaRPr lang="es-ES">
+              <a:solidFill>
+                <a:schemeClr val="tx1"/>
+              </a:solidFill>
+            </a:endParaRPr>
+          </a:p>
+        </p:txBody>
+      </p:sp>
+      <p:sp>
+        <p:nvSpPr>
+          <p:cNvPr id="37" name="Fletxa: corbada cap amunt 36">
+            <a:extLst>
+              <a:ext uri="{FF2B5EF4-FFF2-40B4-BE49-F238E27FC236}">
+                <a16:creationId xmlns:a16="http://schemas.microsoft.com/office/drawing/2014/main" id="{B62AEE80-2CB0-4905-9F53-C2B97175BC79}"/>
+              </a:ext>
+            </a:extLst>
+          </p:cNvPr>
+          <p:cNvSpPr/>
+          <p:nvPr/>
+        </p:nvSpPr>
+        <p:spPr>
+          <a:xfrm rot="11217565" flipV="1">
+            <a:off x="7694672" y="6500352"/>
+            <a:ext cx="5410960" cy="1320943"/>
+          </a:xfrm>
+          <a:prstGeom prst="curvedUpArrow">
+            <a:avLst/>
+          </a:prstGeom>
+        </p:spPr>
+        <p:style>
+          <a:lnRef idx="2">
+            <a:schemeClr val="accent1">
+              <a:shade val="50000"/>
+            </a:schemeClr>
+          </a:lnRef>
+          <a:fillRef idx="1">
+            <a:schemeClr val="accent1"/>
+          </a:fillRef>
+          <a:effectRef idx="0">
+            <a:schemeClr val="accent1"/>
+          </a:effectRef>
+          <a:fontRef idx="minor">
+            <a:schemeClr val="lt1"/>
+          </a:fontRef>
+        </p:style>
+        <p:txBody>
+          <a:bodyPr rtlCol="0" anchor="ctr"/>
+          <a:lstStyle/>
+          <a:p>
+            <a:pPr algn="ctr"/>
+            <a:endParaRPr lang="es-ES">
+              <a:solidFill>
+                <a:schemeClr val="tx1"/>
+              </a:solidFill>
+            </a:endParaRPr>
+          </a:p>
+        </p:txBody>
+      </p:sp>
+    </p:spTree>
+    <p:extLst>
+      <p:ext uri="{BB962C8B-B14F-4D97-AF65-F5344CB8AC3E}">
+        <p14:creationId xmlns:p14="http://schemas.microsoft.com/office/powerpoint/2010/main" val="3044485445"/>
+      </p:ext>
+    </p:extLst>
+  </p:cSld>
+  <p:clrMapOvr>
+    <a:masterClrMapping/>
+  </p:clrMapOvr>
+</p:sld>
+</file>
+
+<file path=ppt/slides/slide21.xml><?xml version="1.0" encoding="utf-8"?>
+<p:sld xmlns:a="http://schemas.openxmlformats.org/drawingml/2006/main" xmlns:r="http://schemas.openxmlformats.org/officeDocument/2006/relationships" xmlns:p="http://schemas.openxmlformats.org/presentationml/2006/main">
+  <p:cSld>
+    <p:bg>
+      <p:bgPr>
+        <a:solidFill>
+          <a:srgbClr val="E0E9F9"/>
+        </a:solidFill>
+        <a:effectLst/>
+      </p:bgPr>
+    </p:bg>
+    <p:spTree>
+      <p:nvGrpSpPr>
         <p:cNvPr id="1" name="Shape 83"/>
         <p:cNvGrpSpPr/>
         <p:nvPr/>
@@ -25703,7 +26259,7 @@
 </p:sld>
 </file>
 
-<file path=ppt/slides/slide21.xml><?xml version="1.0" encoding="utf-8"?>
+<file path=ppt/slides/slide22.xml><?xml version="1.0" encoding="utf-8"?>
 <p:sld xmlns:a="http://schemas.openxmlformats.org/drawingml/2006/main" xmlns:r="http://schemas.openxmlformats.org/officeDocument/2006/relationships" xmlns:p="http://schemas.openxmlformats.org/presentationml/2006/main">
   <p:cSld>
     <p:bg>
@@ -26784,7 +27340,7 @@
 </p:sld>
 </file>
 
-<file path=ppt/slides/slide22.xml><?xml version="1.0" encoding="utf-8"?>
+<file path=ppt/slides/slide23.xml><?xml version="1.0" encoding="utf-8"?>
 <p:sld xmlns:a="http://schemas.openxmlformats.org/drawingml/2006/main" xmlns:r="http://schemas.openxmlformats.org/officeDocument/2006/relationships" xmlns:p="http://schemas.openxmlformats.org/presentationml/2006/main">
   <p:cSld>
     <p:bg>
@@ -28104,7 +28660,7 @@
 </p:sld>
 </file>
 
-<file path=ppt/slides/slide23.xml><?xml version="1.0" encoding="utf-8"?>
+<file path=ppt/slides/slide24.xml><?xml version="1.0" encoding="utf-8"?>
 <p:sld xmlns:a="http://schemas.openxmlformats.org/drawingml/2006/main" xmlns:r="http://schemas.openxmlformats.org/officeDocument/2006/relationships" xmlns:p="http://schemas.openxmlformats.org/presentationml/2006/main">
   <p:cSld>
     <p:bg>
@@ -28830,7 +29386,7 @@
 </p:sld>
 </file>
 
-<file path=ppt/slides/slide24.xml><?xml version="1.0" encoding="utf-8"?>
+<file path=ppt/slides/slide25.xml><?xml version="1.0" encoding="utf-8"?>
 <p:sld xmlns:a="http://schemas.openxmlformats.org/drawingml/2006/main" xmlns:r="http://schemas.openxmlformats.org/officeDocument/2006/relationships" xmlns:p="http://schemas.openxmlformats.org/presentationml/2006/main">
   <p:cSld>
     <p:bg>
@@ -29424,7 +29980,7 @@
 </p:sld>
 </file>
 
-<file path=ppt/slides/slide25.xml><?xml version="1.0" encoding="utf-8"?>
+<file path=ppt/slides/slide26.xml><?xml version="1.0" encoding="utf-8"?>
 <p:sld xmlns:a="http://schemas.openxmlformats.org/drawingml/2006/main" xmlns:r="http://schemas.openxmlformats.org/officeDocument/2006/relationships" xmlns:p="http://schemas.openxmlformats.org/presentationml/2006/main">
   <p:cSld>
     <p:bg>
@@ -30304,7 +30860,7 @@
 </p:sld>
 </file>
 
-<file path=ppt/slides/slide26.xml><?xml version="1.0" encoding="utf-8"?>
+<file path=ppt/slides/slide27.xml><?xml version="1.0" encoding="utf-8"?>
 <p:sld xmlns:a="http://schemas.openxmlformats.org/drawingml/2006/main" xmlns:r="http://schemas.openxmlformats.org/officeDocument/2006/relationships" xmlns:p="http://schemas.openxmlformats.org/presentationml/2006/main">
   <p:cSld>
     <p:bg>
@@ -31657,7 +32213,7 @@
 </p:sld>
 </file>
 
-<file path=ppt/slides/slide27.xml><?xml version="1.0" encoding="utf-8"?>
+<file path=ppt/slides/slide28.xml><?xml version="1.0" encoding="utf-8"?>
 <p:sld xmlns:a="http://schemas.openxmlformats.org/drawingml/2006/main" xmlns:r="http://schemas.openxmlformats.org/officeDocument/2006/relationships" xmlns:p="http://schemas.openxmlformats.org/presentationml/2006/main">
   <p:cSld>
     <p:bg>
@@ -34517,6 +35073,1328 @@
 <file path=ppt/slides/slide5.xml><?xml version="1.0" encoding="utf-8"?>
 <p:sld xmlns:a="http://schemas.openxmlformats.org/drawingml/2006/main" xmlns:r="http://schemas.openxmlformats.org/officeDocument/2006/relationships" xmlns:p="http://schemas.openxmlformats.org/presentationml/2006/main">
   <p:cSld>
+    <p:spTree>
+      <p:nvGrpSpPr>
+        <p:cNvPr id="1" name="Shape 122"/>
+        <p:cNvGrpSpPr/>
+        <p:nvPr/>
+      </p:nvGrpSpPr>
+      <p:grpSpPr>
+        <a:xfrm>
+          <a:off x="0" y="0"/>
+          <a:ext cx="0" cy="0"/>
+          <a:chOff x="0" y="0"/>
+          <a:chExt cx="0" cy="0"/>
+        </a:xfrm>
+      </p:grpSpPr>
+      <p:cxnSp>
+        <p:nvCxnSpPr>
+          <p:cNvPr id="123" name="Google Shape;123;g3dbe1710380_1_211"/>
+          <p:cNvCxnSpPr/>
+          <p:nvPr/>
+        </p:nvCxnSpPr>
+        <p:spPr>
+          <a:xfrm>
+            <a:off x="7198632" y="-330798"/>
+            <a:ext cx="0" cy="10946700"/>
+          </a:xfrm>
+          <a:prstGeom prst="straightConnector1">
+            <a:avLst/>
+          </a:prstGeom>
+          <a:noFill/>
+          <a:ln w="114300" cap="rnd" cmpd="sng">
+            <a:solidFill>
+              <a:srgbClr val="004AAD"/>
+            </a:solidFill>
+            <a:prstDash val="solid"/>
+            <a:round/>
+            <a:headEnd type="none" w="sm" len="sm"/>
+            <a:tailEnd type="none" w="sm" len="sm"/>
+          </a:ln>
+        </p:spPr>
+      </p:cxnSp>
+      <p:grpSp>
+        <p:nvGrpSpPr>
+          <p:cNvPr id="124" name="Google Shape;124;g3dbe1710380_1_211"/>
+          <p:cNvGrpSpPr/>
+          <p:nvPr/>
+        </p:nvGrpSpPr>
+        <p:grpSpPr>
+          <a:xfrm>
+            <a:off x="6904192" y="843911"/>
+            <a:ext cx="588874" cy="595774"/>
+            <a:chOff x="0" y="-9525"/>
+            <a:chExt cx="812800" cy="822325"/>
+          </a:xfrm>
+        </p:grpSpPr>
+        <p:sp>
+          <p:nvSpPr>
+            <p:cNvPr id="125" name="Google Shape;125;g3dbe1710380_1_211"/>
+            <p:cNvSpPr/>
+            <p:nvPr/>
+          </p:nvSpPr>
+          <p:spPr>
+            <a:xfrm>
+              <a:off x="0" y="0"/>
+              <a:ext cx="812800" cy="812800"/>
+            </a:xfrm>
+            <a:custGeom>
+              <a:avLst/>
+              <a:gdLst/>
+              <a:ahLst/>
+              <a:cxnLst/>
+              <a:rect l="l" t="t" r="r" b="b"/>
+              <a:pathLst>
+                <a:path w="812800" h="812800" extrusionOk="0">
+                  <a:moveTo>
+                    <a:pt x="0" y="0"/>
+                  </a:moveTo>
+                  <a:lnTo>
+                    <a:pt x="812800" y="0"/>
+                  </a:lnTo>
+                  <a:lnTo>
+                    <a:pt x="812800" y="812800"/>
+                  </a:lnTo>
+                  <a:lnTo>
+                    <a:pt x="0" y="812800"/>
+                  </a:lnTo>
+                  <a:close/>
+                </a:path>
+              </a:pathLst>
+            </a:custGeom>
+            <a:solidFill>
+              <a:srgbClr val="FFFFFF"/>
+            </a:solidFill>
+            <a:ln w="28575" cap="sq" cmpd="sng">
+              <a:solidFill>
+                <a:srgbClr val="004AAD"/>
+              </a:solidFill>
+              <a:prstDash val="solid"/>
+              <a:miter lim="8000"/>
+              <a:headEnd type="none" w="sm" len="sm"/>
+              <a:tailEnd type="none" w="sm" len="sm"/>
+            </a:ln>
+          </p:spPr>
+        </p:sp>
+        <p:sp>
+          <p:nvSpPr>
+            <p:cNvPr id="126" name="Google Shape;126;g3dbe1710380_1_211"/>
+            <p:cNvSpPr txBox="1"/>
+            <p:nvPr/>
+          </p:nvSpPr>
+          <p:spPr>
+            <a:xfrm>
+              <a:off x="0" y="-9525"/>
+              <a:ext cx="812700" cy="822300"/>
+            </a:xfrm>
+            <a:prstGeom prst="rect">
+              <a:avLst/>
+            </a:prstGeom>
+            <a:noFill/>
+            <a:ln>
+              <a:noFill/>
+            </a:ln>
+          </p:spPr>
+          <p:txBody>
+            <a:bodyPr spcFirstLastPara="1" wrap="square" lIns="50800" tIns="50800" rIns="50800" bIns="50800" anchor="ctr" anchorCtr="0">
+              <a:noAutofit/>
+            </a:bodyPr>
+            <a:lstStyle/>
+            <a:p>
+              <a:pPr marL="0" marR="0" lvl="0" indent="0" algn="ctr" rtl="0">
+                <a:lnSpc>
+                  <a:spcPct val="313888"/>
+                </a:lnSpc>
+                <a:spcBef>
+                  <a:spcPts val="0"/>
+                </a:spcBef>
+                <a:spcAft>
+                  <a:spcPts val="0"/>
+                </a:spcAft>
+                <a:buNone/>
+              </a:pPr>
+              <a:endParaRPr sz="1800" b="0" i="0" u="none" strike="noStrike" cap="none">
+                <a:solidFill>
+                  <a:schemeClr val="dk1"/>
+                </a:solidFill>
+                <a:latin typeface="Calibri"/>
+                <a:ea typeface="Calibri"/>
+                <a:cs typeface="Calibri"/>
+                <a:sym typeface="Calibri"/>
+              </a:endParaRPr>
+            </a:p>
+          </p:txBody>
+        </p:sp>
+      </p:grpSp>
+      <p:grpSp>
+        <p:nvGrpSpPr>
+          <p:cNvPr id="127" name="Google Shape;127;g3dbe1710380_1_211"/>
+          <p:cNvGrpSpPr/>
+          <p:nvPr/>
+        </p:nvGrpSpPr>
+        <p:grpSpPr>
+          <a:xfrm>
+            <a:off x="6904192" y="2979331"/>
+            <a:ext cx="588874" cy="595774"/>
+            <a:chOff x="0" y="-9525"/>
+            <a:chExt cx="812800" cy="822325"/>
+          </a:xfrm>
+        </p:grpSpPr>
+        <p:sp>
+          <p:nvSpPr>
+            <p:cNvPr id="128" name="Google Shape;128;g3dbe1710380_1_211"/>
+            <p:cNvSpPr/>
+            <p:nvPr/>
+          </p:nvSpPr>
+          <p:spPr>
+            <a:xfrm>
+              <a:off x="0" y="0"/>
+              <a:ext cx="812800" cy="812800"/>
+            </a:xfrm>
+            <a:custGeom>
+              <a:avLst/>
+              <a:gdLst/>
+              <a:ahLst/>
+              <a:cxnLst/>
+              <a:rect l="l" t="t" r="r" b="b"/>
+              <a:pathLst>
+                <a:path w="812800" h="812800" extrusionOk="0">
+                  <a:moveTo>
+                    <a:pt x="0" y="0"/>
+                  </a:moveTo>
+                  <a:lnTo>
+                    <a:pt x="812800" y="0"/>
+                  </a:lnTo>
+                  <a:lnTo>
+                    <a:pt x="812800" y="812800"/>
+                  </a:lnTo>
+                  <a:lnTo>
+                    <a:pt x="0" y="812800"/>
+                  </a:lnTo>
+                  <a:close/>
+                </a:path>
+              </a:pathLst>
+            </a:custGeom>
+            <a:solidFill>
+              <a:srgbClr val="FFFFFF"/>
+            </a:solidFill>
+            <a:ln w="28575" cap="sq" cmpd="sng">
+              <a:solidFill>
+                <a:srgbClr val="004AAD"/>
+              </a:solidFill>
+              <a:prstDash val="solid"/>
+              <a:miter lim="8000"/>
+              <a:headEnd type="none" w="sm" len="sm"/>
+              <a:tailEnd type="none" w="sm" len="sm"/>
+            </a:ln>
+          </p:spPr>
+        </p:sp>
+        <p:sp>
+          <p:nvSpPr>
+            <p:cNvPr id="129" name="Google Shape;129;g3dbe1710380_1_211"/>
+            <p:cNvSpPr txBox="1"/>
+            <p:nvPr/>
+          </p:nvSpPr>
+          <p:spPr>
+            <a:xfrm>
+              <a:off x="0" y="-9525"/>
+              <a:ext cx="812700" cy="822300"/>
+            </a:xfrm>
+            <a:prstGeom prst="rect">
+              <a:avLst/>
+            </a:prstGeom>
+            <a:noFill/>
+            <a:ln>
+              <a:noFill/>
+            </a:ln>
+          </p:spPr>
+          <p:txBody>
+            <a:bodyPr spcFirstLastPara="1" wrap="square" lIns="50800" tIns="50800" rIns="50800" bIns="50800" anchor="ctr" anchorCtr="0">
+              <a:noAutofit/>
+            </a:bodyPr>
+            <a:lstStyle/>
+            <a:p>
+              <a:pPr marL="0" marR="0" lvl="0" indent="0" algn="ctr" rtl="0">
+                <a:lnSpc>
+                  <a:spcPct val="313888"/>
+                </a:lnSpc>
+                <a:spcBef>
+                  <a:spcPts val="0"/>
+                </a:spcBef>
+                <a:spcAft>
+                  <a:spcPts val="0"/>
+                </a:spcAft>
+                <a:buNone/>
+              </a:pPr>
+              <a:endParaRPr sz="1800" b="0" i="0" u="none" strike="noStrike" cap="none">
+                <a:solidFill>
+                  <a:schemeClr val="dk1"/>
+                </a:solidFill>
+                <a:latin typeface="Calibri"/>
+                <a:ea typeface="Calibri"/>
+                <a:cs typeface="Calibri"/>
+                <a:sym typeface="Calibri"/>
+              </a:endParaRPr>
+            </a:p>
+          </p:txBody>
+        </p:sp>
+      </p:grpSp>
+      <p:grpSp>
+        <p:nvGrpSpPr>
+          <p:cNvPr id="130" name="Google Shape;130;g3dbe1710380_1_211"/>
+          <p:cNvGrpSpPr/>
+          <p:nvPr/>
+        </p:nvGrpSpPr>
+        <p:grpSpPr>
+          <a:xfrm>
+            <a:off x="6922001" y="4953563"/>
+            <a:ext cx="588874" cy="595774"/>
+            <a:chOff x="0" y="-9525"/>
+            <a:chExt cx="812800" cy="822325"/>
+          </a:xfrm>
+        </p:grpSpPr>
+        <p:sp>
+          <p:nvSpPr>
+            <p:cNvPr id="131" name="Google Shape;131;g3dbe1710380_1_211"/>
+            <p:cNvSpPr/>
+            <p:nvPr/>
+          </p:nvSpPr>
+          <p:spPr>
+            <a:xfrm>
+              <a:off x="0" y="0"/>
+              <a:ext cx="812800" cy="812800"/>
+            </a:xfrm>
+            <a:custGeom>
+              <a:avLst/>
+              <a:gdLst/>
+              <a:ahLst/>
+              <a:cxnLst/>
+              <a:rect l="l" t="t" r="r" b="b"/>
+              <a:pathLst>
+                <a:path w="812800" h="812800" extrusionOk="0">
+                  <a:moveTo>
+                    <a:pt x="0" y="0"/>
+                  </a:moveTo>
+                  <a:lnTo>
+                    <a:pt x="812800" y="0"/>
+                  </a:lnTo>
+                  <a:lnTo>
+                    <a:pt x="812800" y="812800"/>
+                  </a:lnTo>
+                  <a:lnTo>
+                    <a:pt x="0" y="812800"/>
+                  </a:lnTo>
+                  <a:close/>
+                </a:path>
+              </a:pathLst>
+            </a:custGeom>
+            <a:solidFill>
+              <a:srgbClr val="FFFFFF"/>
+            </a:solidFill>
+            <a:ln w="28575" cap="sq" cmpd="sng">
+              <a:solidFill>
+                <a:srgbClr val="004AAD"/>
+              </a:solidFill>
+              <a:prstDash val="solid"/>
+              <a:miter lim="8000"/>
+              <a:headEnd type="none" w="sm" len="sm"/>
+              <a:tailEnd type="none" w="sm" len="sm"/>
+            </a:ln>
+          </p:spPr>
+        </p:sp>
+        <p:sp>
+          <p:nvSpPr>
+            <p:cNvPr id="132" name="Google Shape;132;g3dbe1710380_1_211"/>
+            <p:cNvSpPr txBox="1"/>
+            <p:nvPr/>
+          </p:nvSpPr>
+          <p:spPr>
+            <a:xfrm>
+              <a:off x="0" y="-9525"/>
+              <a:ext cx="812700" cy="822300"/>
+            </a:xfrm>
+            <a:prstGeom prst="rect">
+              <a:avLst/>
+            </a:prstGeom>
+            <a:noFill/>
+            <a:ln>
+              <a:noFill/>
+            </a:ln>
+          </p:spPr>
+          <p:txBody>
+            <a:bodyPr spcFirstLastPara="1" wrap="square" lIns="50800" tIns="50800" rIns="50800" bIns="50800" anchor="ctr" anchorCtr="0">
+              <a:noAutofit/>
+            </a:bodyPr>
+            <a:lstStyle/>
+            <a:p>
+              <a:pPr marL="0" marR="0" lvl="0" indent="0" algn="ctr" rtl="0">
+                <a:lnSpc>
+                  <a:spcPct val="313888"/>
+                </a:lnSpc>
+                <a:spcBef>
+                  <a:spcPts val="0"/>
+                </a:spcBef>
+                <a:spcAft>
+                  <a:spcPts val="0"/>
+                </a:spcAft>
+                <a:buNone/>
+              </a:pPr>
+              <a:endParaRPr sz="1800" b="0" i="0" u="none" strike="noStrike" cap="none">
+                <a:solidFill>
+                  <a:schemeClr val="dk1"/>
+                </a:solidFill>
+                <a:latin typeface="Calibri"/>
+                <a:ea typeface="Calibri"/>
+                <a:cs typeface="Calibri"/>
+                <a:sym typeface="Calibri"/>
+              </a:endParaRPr>
+            </a:p>
+          </p:txBody>
+        </p:sp>
+      </p:grpSp>
+      <p:grpSp>
+        <p:nvGrpSpPr>
+          <p:cNvPr id="133" name="Google Shape;133;g3dbe1710380_1_211"/>
+          <p:cNvGrpSpPr/>
+          <p:nvPr/>
+        </p:nvGrpSpPr>
+        <p:grpSpPr>
+          <a:xfrm>
+            <a:off x="6904192" y="7062089"/>
+            <a:ext cx="588874" cy="595774"/>
+            <a:chOff x="0" y="-9525"/>
+            <a:chExt cx="812800" cy="822325"/>
+          </a:xfrm>
+        </p:grpSpPr>
+        <p:sp>
+          <p:nvSpPr>
+            <p:cNvPr id="134" name="Google Shape;134;g3dbe1710380_1_211"/>
+            <p:cNvSpPr/>
+            <p:nvPr/>
+          </p:nvSpPr>
+          <p:spPr>
+            <a:xfrm>
+              <a:off x="0" y="0"/>
+              <a:ext cx="812800" cy="812800"/>
+            </a:xfrm>
+            <a:custGeom>
+              <a:avLst/>
+              <a:gdLst/>
+              <a:ahLst/>
+              <a:cxnLst/>
+              <a:rect l="l" t="t" r="r" b="b"/>
+              <a:pathLst>
+                <a:path w="812800" h="812800" extrusionOk="0">
+                  <a:moveTo>
+                    <a:pt x="0" y="0"/>
+                  </a:moveTo>
+                  <a:lnTo>
+                    <a:pt x="812800" y="0"/>
+                  </a:lnTo>
+                  <a:lnTo>
+                    <a:pt x="812800" y="812800"/>
+                  </a:lnTo>
+                  <a:lnTo>
+                    <a:pt x="0" y="812800"/>
+                  </a:lnTo>
+                  <a:close/>
+                </a:path>
+              </a:pathLst>
+            </a:custGeom>
+            <a:solidFill>
+              <a:srgbClr val="FFFFFF"/>
+            </a:solidFill>
+            <a:ln w="28575" cap="sq" cmpd="sng">
+              <a:solidFill>
+                <a:srgbClr val="004AAD"/>
+              </a:solidFill>
+              <a:prstDash val="solid"/>
+              <a:miter lim="8000"/>
+              <a:headEnd type="none" w="sm" len="sm"/>
+              <a:tailEnd type="none" w="sm" len="sm"/>
+            </a:ln>
+          </p:spPr>
+        </p:sp>
+        <p:sp>
+          <p:nvSpPr>
+            <p:cNvPr id="135" name="Google Shape;135;g3dbe1710380_1_211"/>
+            <p:cNvSpPr txBox="1"/>
+            <p:nvPr/>
+          </p:nvSpPr>
+          <p:spPr>
+            <a:xfrm>
+              <a:off x="0" y="-9525"/>
+              <a:ext cx="812700" cy="822300"/>
+            </a:xfrm>
+            <a:prstGeom prst="rect">
+              <a:avLst/>
+            </a:prstGeom>
+            <a:noFill/>
+            <a:ln>
+              <a:noFill/>
+            </a:ln>
+          </p:spPr>
+          <p:txBody>
+            <a:bodyPr spcFirstLastPara="1" wrap="square" lIns="50800" tIns="50800" rIns="50800" bIns="50800" anchor="ctr" anchorCtr="0">
+              <a:noAutofit/>
+            </a:bodyPr>
+            <a:lstStyle/>
+            <a:p>
+              <a:pPr marL="0" marR="0" lvl="0" indent="0" algn="ctr" rtl="0">
+                <a:lnSpc>
+                  <a:spcPct val="313888"/>
+                </a:lnSpc>
+                <a:spcBef>
+                  <a:spcPts val="0"/>
+                </a:spcBef>
+                <a:spcAft>
+                  <a:spcPts val="0"/>
+                </a:spcAft>
+                <a:buNone/>
+              </a:pPr>
+              <a:endParaRPr sz="1800" b="0" i="0" u="none" strike="noStrike" cap="none">
+                <a:solidFill>
+                  <a:schemeClr val="dk1"/>
+                </a:solidFill>
+                <a:latin typeface="Calibri"/>
+                <a:ea typeface="Calibri"/>
+                <a:cs typeface="Calibri"/>
+                <a:sym typeface="Calibri"/>
+              </a:endParaRPr>
+            </a:p>
+          </p:txBody>
+        </p:sp>
+      </p:grpSp>
+      <p:sp>
+        <p:nvSpPr>
+          <p:cNvPr id="136" name="Google Shape;136;g3dbe1710380_1_211"/>
+          <p:cNvSpPr/>
+          <p:nvPr/>
+        </p:nvSpPr>
+        <p:spPr>
+          <a:xfrm>
+            <a:off x="13196004" y="3159413"/>
+            <a:ext cx="6521776" cy="7305451"/>
+          </a:xfrm>
+          <a:custGeom>
+            <a:avLst/>
+            <a:gdLst/>
+            <a:ahLst/>
+            <a:cxnLst/>
+            <a:rect l="l" t="t" r="r" b="b"/>
+            <a:pathLst>
+              <a:path w="6521776" h="7305451" extrusionOk="0">
+                <a:moveTo>
+                  <a:pt x="0" y="0"/>
+                </a:moveTo>
+                <a:lnTo>
+                  <a:pt x="6521776" y="0"/>
+                </a:lnTo>
+                <a:lnTo>
+                  <a:pt x="6521776" y="7305452"/>
+                </a:lnTo>
+                <a:lnTo>
+                  <a:pt x="0" y="7305452"/>
+                </a:lnTo>
+                <a:lnTo>
+                  <a:pt x="0" y="0"/>
+                </a:lnTo>
+                <a:close/>
+              </a:path>
+            </a:pathLst>
+          </a:custGeom>
+          <a:blipFill rotWithShape="1">
+            <a:blip r:embed="rId3">
+              <a:alphaModFix/>
+            </a:blip>
+            <a:stretch>
+              <a:fillRect/>
+            </a:stretch>
+          </a:blipFill>
+          <a:ln>
+            <a:noFill/>
+          </a:ln>
+        </p:spPr>
+      </p:sp>
+      <p:sp>
+        <p:nvSpPr>
+          <p:cNvPr id="137" name="Google Shape;137;g3dbe1710380_1_211"/>
+          <p:cNvSpPr/>
+          <p:nvPr/>
+        </p:nvSpPr>
+        <p:spPr>
+          <a:xfrm>
+            <a:off x="13196004" y="-703241"/>
+            <a:ext cx="6521776" cy="7305451"/>
+          </a:xfrm>
+          <a:custGeom>
+            <a:avLst/>
+            <a:gdLst/>
+            <a:ahLst/>
+            <a:cxnLst/>
+            <a:rect l="l" t="t" r="r" b="b"/>
+            <a:pathLst>
+              <a:path w="6521776" h="7305451" extrusionOk="0">
+                <a:moveTo>
+                  <a:pt x="0" y="0"/>
+                </a:moveTo>
+                <a:lnTo>
+                  <a:pt x="6521776" y="0"/>
+                </a:lnTo>
+                <a:lnTo>
+                  <a:pt x="6521776" y="7305452"/>
+                </a:lnTo>
+                <a:lnTo>
+                  <a:pt x="0" y="7305452"/>
+                </a:lnTo>
+                <a:lnTo>
+                  <a:pt x="0" y="0"/>
+                </a:lnTo>
+                <a:close/>
+              </a:path>
+            </a:pathLst>
+          </a:custGeom>
+          <a:blipFill rotWithShape="1">
+            <a:blip r:embed="rId3">
+              <a:alphaModFix/>
+            </a:blip>
+            <a:stretch>
+              <a:fillRect/>
+            </a:stretch>
+          </a:blipFill>
+          <a:ln>
+            <a:noFill/>
+          </a:ln>
+        </p:spPr>
+      </p:sp>
+      <p:sp>
+        <p:nvSpPr>
+          <p:cNvPr id="138" name="Google Shape;138;g3dbe1710380_1_211"/>
+          <p:cNvSpPr txBox="1"/>
+          <p:nvPr/>
+        </p:nvSpPr>
+        <p:spPr>
+          <a:xfrm>
+            <a:off x="1028700" y="2777601"/>
+            <a:ext cx="4530600" cy="1341008"/>
+          </a:xfrm>
+          <a:prstGeom prst="rect">
+            <a:avLst/>
+          </a:prstGeom>
+          <a:noFill/>
+          <a:ln>
+            <a:noFill/>
+          </a:ln>
+        </p:spPr>
+        <p:txBody>
+          <a:bodyPr spcFirstLastPara="1" wrap="square" lIns="0" tIns="0" rIns="0" bIns="0" anchor="t" anchorCtr="0">
+            <a:spAutoFit/>
+          </a:bodyPr>
+          <a:lstStyle/>
+          <a:p>
+            <a:pPr marL="0" marR="0" lvl="0" indent="0" algn="l" rtl="0">
+              <a:lnSpc>
+                <a:spcPct val="121055"/>
+              </a:lnSpc>
+              <a:spcBef>
+                <a:spcPts val="0"/>
+              </a:spcBef>
+              <a:spcAft>
+                <a:spcPts val="0"/>
+              </a:spcAft>
+              <a:buNone/>
+            </a:pPr>
+            <a:r>
+              <a:rPr lang="en-US" sz="3601" b="1" dirty="0">
+                <a:solidFill>
+                  <a:srgbClr val="004AAD"/>
+                </a:solidFill>
+                <a:latin typeface="Poppins"/>
+                <a:cs typeface="Poppins"/>
+                <a:sym typeface="Poppins"/>
+              </a:rPr>
+              <a:t>MEDIOS DE FORMACIÓN</a:t>
+            </a:r>
+            <a:endParaRPr dirty="0"/>
+          </a:p>
+        </p:txBody>
+      </p:sp>
+      <p:sp>
+        <p:nvSpPr>
+          <p:cNvPr id="139" name="Google Shape;139;g3dbe1710380_1_211"/>
+          <p:cNvSpPr txBox="1"/>
+          <p:nvPr/>
+        </p:nvSpPr>
+        <p:spPr>
+          <a:xfrm>
+            <a:off x="7941024" y="4803327"/>
+            <a:ext cx="4635000" cy="1015663"/>
+          </a:xfrm>
+          <a:prstGeom prst="rect">
+            <a:avLst/>
+          </a:prstGeom>
+          <a:noFill/>
+          <a:ln>
+            <a:noFill/>
+          </a:ln>
+        </p:spPr>
+        <p:txBody>
+          <a:bodyPr spcFirstLastPara="1" wrap="square" lIns="0" tIns="0" rIns="0" bIns="0" anchor="t" anchorCtr="0">
+            <a:spAutoFit/>
+          </a:bodyPr>
+          <a:lstStyle/>
+          <a:p>
+            <a:pPr marL="0" marR="0" lvl="0" indent="0" algn="l" rtl="0">
+              <a:lnSpc>
+                <a:spcPct val="110000"/>
+              </a:lnSpc>
+              <a:spcBef>
+                <a:spcPts val="0"/>
+              </a:spcBef>
+              <a:spcAft>
+                <a:spcPts val="0"/>
+              </a:spcAft>
+              <a:buNone/>
+            </a:pPr>
+            <a:r>
+              <a:rPr lang="en-US" sz="3000" b="1" dirty="0">
+                <a:solidFill>
+                  <a:srgbClr val="004AAD"/>
+                </a:solidFill>
+                <a:latin typeface="Poppins"/>
+                <a:cs typeface="Poppins"/>
+                <a:sym typeface="Poppins"/>
+              </a:rPr>
+              <a:t>FORMACIÓN EN EL PUESTO DE TRABAJO</a:t>
+            </a:r>
+            <a:endParaRPr sz="3000" dirty="0"/>
+          </a:p>
+        </p:txBody>
+      </p:sp>
+      <p:sp>
+        <p:nvSpPr>
+          <p:cNvPr id="141" name="Google Shape;141;g3dbe1710380_1_211"/>
+          <p:cNvSpPr txBox="1"/>
+          <p:nvPr/>
+        </p:nvSpPr>
+        <p:spPr>
+          <a:xfrm>
+            <a:off x="8045399" y="752171"/>
+            <a:ext cx="4530600" cy="1015663"/>
+          </a:xfrm>
+          <a:prstGeom prst="rect">
+            <a:avLst/>
+          </a:prstGeom>
+          <a:noFill/>
+          <a:ln>
+            <a:noFill/>
+          </a:ln>
+        </p:spPr>
+        <p:txBody>
+          <a:bodyPr spcFirstLastPara="1" wrap="square" lIns="0" tIns="0" rIns="0" bIns="0" anchor="t" anchorCtr="0">
+            <a:spAutoFit/>
+          </a:bodyPr>
+          <a:lstStyle/>
+          <a:p>
+            <a:pPr marL="0" marR="0" lvl="0" indent="0" algn="l" rtl="0">
+              <a:lnSpc>
+                <a:spcPct val="110000"/>
+              </a:lnSpc>
+              <a:spcBef>
+                <a:spcPts val="0"/>
+              </a:spcBef>
+              <a:spcAft>
+                <a:spcPts val="0"/>
+              </a:spcAft>
+              <a:buNone/>
+            </a:pPr>
+            <a:r>
+              <a:rPr lang="es-ES" sz="3000" b="1" dirty="0">
+                <a:solidFill>
+                  <a:srgbClr val="004AAD"/>
+                </a:solidFill>
+                <a:latin typeface="Poppins"/>
+                <a:cs typeface="Poppins"/>
+                <a:sym typeface="Poppins"/>
+              </a:rPr>
+              <a:t>CURSOS EN LA PROPIA EMPRESA</a:t>
+            </a:r>
+            <a:endParaRPr lang="es-ES" sz="2600" dirty="0"/>
+          </a:p>
+        </p:txBody>
+      </p:sp>
+      <p:sp>
+        <p:nvSpPr>
+          <p:cNvPr id="142" name="Google Shape;142;g3dbe1710380_1_211"/>
+          <p:cNvSpPr txBox="1"/>
+          <p:nvPr/>
+        </p:nvSpPr>
+        <p:spPr>
+          <a:xfrm>
+            <a:off x="8294419" y="1583162"/>
+            <a:ext cx="3805800" cy="775597"/>
+          </a:xfrm>
+          <a:prstGeom prst="rect">
+            <a:avLst/>
+          </a:prstGeom>
+          <a:noFill/>
+          <a:ln>
+            <a:noFill/>
+          </a:ln>
+        </p:spPr>
+        <p:txBody>
+          <a:bodyPr spcFirstLastPara="1" wrap="square" lIns="0" tIns="0" rIns="0" bIns="0" anchor="t" anchorCtr="0">
+            <a:spAutoFit/>
+          </a:bodyPr>
+          <a:lstStyle/>
+          <a:p>
+            <a:pPr marL="0" marR="0" lvl="0" indent="0" algn="l" rtl="0">
+              <a:lnSpc>
+                <a:spcPct val="140000"/>
+              </a:lnSpc>
+              <a:spcBef>
+                <a:spcPts val="0"/>
+              </a:spcBef>
+              <a:spcAft>
+                <a:spcPts val="0"/>
+              </a:spcAft>
+              <a:buNone/>
+            </a:pPr>
+            <a:r>
+              <a:rPr lang="en-US" sz="3600" dirty="0">
+                <a:solidFill>
+                  <a:srgbClr val="004AAD"/>
+                </a:solidFill>
+                <a:latin typeface="Poppins"/>
+                <a:ea typeface="Poppins"/>
+                <a:cs typeface="Poppins"/>
+                <a:sym typeface="Poppins"/>
+              </a:rPr>
+              <a:t> </a:t>
+            </a:r>
+            <a:endParaRPr sz="3600" dirty="0"/>
+          </a:p>
+        </p:txBody>
+      </p:sp>
+      <p:sp>
+        <p:nvSpPr>
+          <p:cNvPr id="143" name="Google Shape;143;g3dbe1710380_1_211"/>
+          <p:cNvSpPr txBox="1"/>
+          <p:nvPr/>
+        </p:nvSpPr>
+        <p:spPr>
+          <a:xfrm>
+            <a:off x="7941031" y="2820016"/>
+            <a:ext cx="3805800" cy="1015663"/>
+          </a:xfrm>
+          <a:prstGeom prst="rect">
+            <a:avLst/>
+          </a:prstGeom>
+          <a:noFill/>
+          <a:ln>
+            <a:noFill/>
+          </a:ln>
+        </p:spPr>
+        <p:txBody>
+          <a:bodyPr spcFirstLastPara="1" wrap="square" lIns="0" tIns="0" rIns="0" bIns="0" anchor="t" anchorCtr="0">
+            <a:spAutoFit/>
+          </a:bodyPr>
+          <a:lstStyle/>
+          <a:p>
+            <a:pPr marL="0" marR="0" lvl="0" indent="0" algn="l" rtl="0">
+              <a:lnSpc>
+                <a:spcPct val="110000"/>
+              </a:lnSpc>
+              <a:spcBef>
+                <a:spcPts val="0"/>
+              </a:spcBef>
+              <a:spcAft>
+                <a:spcPts val="0"/>
+              </a:spcAft>
+              <a:buNone/>
+            </a:pPr>
+            <a:r>
+              <a:rPr lang="en-US" sz="3000" b="1" dirty="0">
+                <a:solidFill>
+                  <a:srgbClr val="004AAD"/>
+                </a:solidFill>
+                <a:latin typeface="Poppins"/>
+                <a:cs typeface="Poppins"/>
+                <a:sym typeface="Poppins"/>
+              </a:rPr>
+              <a:t>CURSOS EN OTRA ORGANIZACIÓN</a:t>
+            </a:r>
+            <a:endParaRPr sz="2600" dirty="0"/>
+          </a:p>
+        </p:txBody>
+      </p:sp>
+      <p:sp>
+        <p:nvSpPr>
+          <p:cNvPr id="145" name="Google Shape;145;g3dbe1710380_1_211"/>
+          <p:cNvSpPr txBox="1"/>
+          <p:nvPr/>
+        </p:nvSpPr>
+        <p:spPr>
+          <a:xfrm>
+            <a:off x="7939888" y="6903274"/>
+            <a:ext cx="5150700" cy="981807"/>
+          </a:xfrm>
+          <a:prstGeom prst="rect">
+            <a:avLst/>
+          </a:prstGeom>
+          <a:noFill/>
+          <a:ln>
+            <a:noFill/>
+          </a:ln>
+        </p:spPr>
+        <p:txBody>
+          <a:bodyPr spcFirstLastPara="1" wrap="square" lIns="0" tIns="0" rIns="0" bIns="0" anchor="t" anchorCtr="0">
+            <a:spAutoFit/>
+          </a:bodyPr>
+          <a:lstStyle/>
+          <a:p>
+            <a:pPr marL="0" marR="0" lvl="0" indent="0" algn="l" rtl="0">
+              <a:lnSpc>
+                <a:spcPct val="110000"/>
+              </a:lnSpc>
+              <a:spcBef>
+                <a:spcPts val="0"/>
+              </a:spcBef>
+              <a:spcAft>
+                <a:spcPts val="0"/>
+              </a:spcAft>
+              <a:buNone/>
+            </a:pPr>
+            <a:r>
+              <a:rPr lang="en-US" sz="2900" b="1" dirty="0">
+                <a:solidFill>
+                  <a:srgbClr val="004AAD"/>
+                </a:solidFill>
+                <a:latin typeface="Poppins"/>
+                <a:cs typeface="Poppins"/>
+                <a:sym typeface="Poppins"/>
+              </a:rPr>
+              <a:t>ROTACIÓN /INTERCAMBIO</a:t>
+            </a:r>
+          </a:p>
+          <a:p>
+            <a:pPr marL="0" marR="0" lvl="0" indent="0" algn="l" rtl="0">
+              <a:lnSpc>
+                <a:spcPct val="110000"/>
+              </a:lnSpc>
+              <a:spcBef>
+                <a:spcPts val="0"/>
+              </a:spcBef>
+              <a:spcAft>
+                <a:spcPts val="0"/>
+              </a:spcAft>
+              <a:buNone/>
+            </a:pPr>
+            <a:r>
+              <a:rPr lang="en-US" sz="2900" b="1" dirty="0">
+                <a:solidFill>
+                  <a:srgbClr val="004AAD"/>
+                </a:solidFill>
+                <a:latin typeface="Poppins"/>
+                <a:cs typeface="Poppins"/>
+                <a:sym typeface="Poppins"/>
+              </a:rPr>
+              <a:t>DE PUESTOS</a:t>
+            </a:r>
+            <a:endParaRPr sz="2900" dirty="0"/>
+          </a:p>
+        </p:txBody>
+      </p:sp>
+      <p:grpSp>
+        <p:nvGrpSpPr>
+          <p:cNvPr id="147" name="Google Shape;147;g3dbe1710380_1_211"/>
+          <p:cNvGrpSpPr/>
+          <p:nvPr/>
+        </p:nvGrpSpPr>
+        <p:grpSpPr>
+          <a:xfrm>
+            <a:off x="0" y="5"/>
+            <a:ext cx="2163413" cy="1886345"/>
+            <a:chOff x="12784175" y="3675030"/>
+            <a:chExt cx="2163413" cy="1886345"/>
+          </a:xfrm>
+        </p:grpSpPr>
+        <p:sp>
+          <p:nvSpPr>
+            <p:cNvPr id="148" name="Google Shape;148;g3dbe1710380_1_211"/>
+            <p:cNvSpPr txBox="1"/>
+            <p:nvPr/>
+          </p:nvSpPr>
+          <p:spPr>
+            <a:xfrm rot="1830973">
+              <a:off x="12805773" y="4425496"/>
+              <a:ext cx="2081405" cy="652657"/>
+            </a:xfrm>
+            <a:prstGeom prst="rect">
+              <a:avLst/>
+            </a:prstGeom>
+            <a:noFill/>
+            <a:ln>
+              <a:noFill/>
+            </a:ln>
+          </p:spPr>
+          <p:txBody>
+            <a:bodyPr spcFirstLastPara="1" wrap="square" lIns="91425" tIns="91425" rIns="91425" bIns="91425" anchor="t" anchorCtr="0">
+              <a:noAutofit/>
+            </a:bodyPr>
+            <a:lstStyle/>
+            <a:p>
+              <a:pPr marL="0" lvl="0" indent="0" algn="l" rtl="0">
+                <a:spcBef>
+                  <a:spcPts val="0"/>
+                </a:spcBef>
+                <a:spcAft>
+                  <a:spcPts val="0"/>
+                </a:spcAft>
+                <a:buNone/>
+              </a:pPr>
+              <a:r>
+                <a:rPr lang="en-US" sz="2300" b="1" i="1">
+                  <a:solidFill>
+                    <a:srgbClr val="E69138"/>
+                  </a:solidFill>
+                  <a:latin typeface="Calibri"/>
+                  <a:ea typeface="Calibri"/>
+                  <a:cs typeface="Calibri"/>
+                  <a:sym typeface="Calibri"/>
+                </a:rPr>
+                <a:t>RAPID EXPRESS </a:t>
+              </a:r>
+              <a:endParaRPr sz="2300" b="1" i="1">
+                <a:solidFill>
+                  <a:srgbClr val="E69138"/>
+                </a:solidFill>
+                <a:latin typeface="Calibri"/>
+                <a:ea typeface="Calibri"/>
+                <a:cs typeface="Calibri"/>
+                <a:sym typeface="Calibri"/>
+              </a:endParaRPr>
+            </a:p>
+          </p:txBody>
+        </p:sp>
+        <p:sp>
+          <p:nvSpPr>
+            <p:cNvPr id="149" name="Google Shape;149;g3dbe1710380_1_211"/>
+            <p:cNvSpPr/>
+            <p:nvPr/>
+          </p:nvSpPr>
+          <p:spPr>
+            <a:xfrm>
+              <a:off x="13335203" y="3675030"/>
+              <a:ext cx="1612385" cy="1275250"/>
+            </a:xfrm>
+            <a:custGeom>
+              <a:avLst/>
+              <a:gdLst/>
+              <a:ahLst/>
+              <a:cxnLst/>
+              <a:rect l="l" t="t" r="r" b="b"/>
+              <a:pathLst>
+                <a:path w="1612385" h="1275250" extrusionOk="0">
+                  <a:moveTo>
+                    <a:pt x="0" y="0"/>
+                  </a:moveTo>
+                  <a:lnTo>
+                    <a:pt x="1612384" y="0"/>
+                  </a:lnTo>
+                  <a:lnTo>
+                    <a:pt x="1612384" y="1275249"/>
+                  </a:lnTo>
+                  <a:lnTo>
+                    <a:pt x="0" y="1275249"/>
+                  </a:lnTo>
+                  <a:lnTo>
+                    <a:pt x="0" y="0"/>
+                  </a:lnTo>
+                  <a:close/>
+                </a:path>
+              </a:pathLst>
+            </a:custGeom>
+            <a:blipFill rotWithShape="1">
+              <a:blip r:embed="rId4">
+                <a:alphaModFix/>
+              </a:blip>
+              <a:stretch>
+                <a:fillRect/>
+              </a:stretch>
+            </a:blipFill>
+            <a:ln>
+              <a:noFill/>
+            </a:ln>
+          </p:spPr>
+        </p:sp>
+      </p:grpSp>
+      <p:grpSp>
+        <p:nvGrpSpPr>
+          <p:cNvPr id="29" name="Google Shape;124;g3dbe1710380_1_211">
+            <a:extLst>
+              <a:ext uri="{FF2B5EF4-FFF2-40B4-BE49-F238E27FC236}">
+                <a16:creationId xmlns:a16="http://schemas.microsoft.com/office/drawing/2014/main" id="{D89EB990-901C-45D6-AF83-9EF917EFEEA7}"/>
+              </a:ext>
+            </a:extLst>
+          </p:cNvPr>
+          <p:cNvGrpSpPr/>
+          <p:nvPr/>
+        </p:nvGrpSpPr>
+        <p:grpSpPr>
+          <a:xfrm>
+            <a:off x="6886431" y="9082822"/>
+            <a:ext cx="588874" cy="595774"/>
+            <a:chOff x="0" y="-9525"/>
+            <a:chExt cx="812800" cy="822325"/>
+          </a:xfrm>
+        </p:grpSpPr>
+        <p:sp>
+          <p:nvSpPr>
+            <p:cNvPr id="30" name="Google Shape;125;g3dbe1710380_1_211">
+              <a:extLst>
+                <a:ext uri="{FF2B5EF4-FFF2-40B4-BE49-F238E27FC236}">
+                  <a16:creationId xmlns:a16="http://schemas.microsoft.com/office/drawing/2014/main" id="{E5E3EAC1-FACE-46C7-A3BB-195DDA4C4661}"/>
+                </a:ext>
+              </a:extLst>
+            </p:cNvPr>
+            <p:cNvSpPr/>
+            <p:nvPr/>
+          </p:nvSpPr>
+          <p:spPr>
+            <a:xfrm>
+              <a:off x="0" y="0"/>
+              <a:ext cx="812800" cy="812800"/>
+            </a:xfrm>
+            <a:custGeom>
+              <a:avLst/>
+              <a:gdLst/>
+              <a:ahLst/>
+              <a:cxnLst/>
+              <a:rect l="l" t="t" r="r" b="b"/>
+              <a:pathLst>
+                <a:path w="812800" h="812800" extrusionOk="0">
+                  <a:moveTo>
+                    <a:pt x="0" y="0"/>
+                  </a:moveTo>
+                  <a:lnTo>
+                    <a:pt x="812800" y="0"/>
+                  </a:lnTo>
+                  <a:lnTo>
+                    <a:pt x="812800" y="812800"/>
+                  </a:lnTo>
+                  <a:lnTo>
+                    <a:pt x="0" y="812800"/>
+                  </a:lnTo>
+                  <a:close/>
+                </a:path>
+              </a:pathLst>
+            </a:custGeom>
+            <a:solidFill>
+              <a:srgbClr val="FFFFFF"/>
+            </a:solidFill>
+            <a:ln w="28575" cap="sq" cmpd="sng">
+              <a:solidFill>
+                <a:srgbClr val="004AAD"/>
+              </a:solidFill>
+              <a:prstDash val="solid"/>
+              <a:miter lim="8000"/>
+              <a:headEnd type="none" w="sm" len="sm"/>
+              <a:tailEnd type="none" w="sm" len="sm"/>
+            </a:ln>
+          </p:spPr>
+        </p:sp>
+        <p:sp>
+          <p:nvSpPr>
+            <p:cNvPr id="31" name="Google Shape;126;g3dbe1710380_1_211">
+              <a:extLst>
+                <a:ext uri="{FF2B5EF4-FFF2-40B4-BE49-F238E27FC236}">
+                  <a16:creationId xmlns:a16="http://schemas.microsoft.com/office/drawing/2014/main" id="{67D4FF60-F0A4-48F8-9A4D-1F7AD66E31F1}"/>
+                </a:ext>
+              </a:extLst>
+            </p:cNvPr>
+            <p:cNvSpPr txBox="1"/>
+            <p:nvPr/>
+          </p:nvSpPr>
+          <p:spPr>
+            <a:xfrm>
+              <a:off x="0" y="-9525"/>
+              <a:ext cx="812700" cy="822300"/>
+            </a:xfrm>
+            <a:prstGeom prst="rect">
+              <a:avLst/>
+            </a:prstGeom>
+            <a:noFill/>
+            <a:ln>
+              <a:noFill/>
+            </a:ln>
+          </p:spPr>
+          <p:txBody>
+            <a:bodyPr spcFirstLastPara="1" wrap="square" lIns="50800" tIns="50800" rIns="50800" bIns="50800" anchor="ctr" anchorCtr="0">
+              <a:noAutofit/>
+            </a:bodyPr>
+            <a:lstStyle/>
+            <a:p>
+              <a:pPr marL="0" marR="0" lvl="0" indent="0" algn="ctr" rtl="0">
+                <a:lnSpc>
+                  <a:spcPct val="313888"/>
+                </a:lnSpc>
+                <a:spcBef>
+                  <a:spcPts val="0"/>
+                </a:spcBef>
+                <a:spcAft>
+                  <a:spcPts val="0"/>
+                </a:spcAft>
+                <a:buNone/>
+              </a:pPr>
+              <a:endParaRPr sz="1800" b="0" i="0" u="none" strike="noStrike" cap="none">
+                <a:solidFill>
+                  <a:schemeClr val="dk1"/>
+                </a:solidFill>
+                <a:latin typeface="Calibri"/>
+                <a:ea typeface="Calibri"/>
+                <a:cs typeface="Calibri"/>
+                <a:sym typeface="Calibri"/>
+              </a:endParaRPr>
+            </a:p>
+          </p:txBody>
+        </p:sp>
+      </p:grpSp>
+      <p:sp>
+        <p:nvSpPr>
+          <p:cNvPr id="32" name="Google Shape;145;g3dbe1710380_1_211">
+            <a:extLst>
+              <a:ext uri="{FF2B5EF4-FFF2-40B4-BE49-F238E27FC236}">
+                <a16:creationId xmlns:a16="http://schemas.microsoft.com/office/drawing/2014/main" id="{22A2114F-E21B-4E83-8CE9-B05E57033A4E}"/>
+              </a:ext>
+            </a:extLst>
+          </p:cNvPr>
+          <p:cNvSpPr txBox="1"/>
+          <p:nvPr/>
+        </p:nvSpPr>
+        <p:spPr>
+          <a:xfrm>
+            <a:off x="7916329" y="8919360"/>
+            <a:ext cx="5150700" cy="981807"/>
+          </a:xfrm>
+          <a:prstGeom prst="rect">
+            <a:avLst/>
+          </a:prstGeom>
+          <a:noFill/>
+          <a:ln>
+            <a:noFill/>
+          </a:ln>
+        </p:spPr>
+        <p:txBody>
+          <a:bodyPr spcFirstLastPara="1" wrap="square" lIns="0" tIns="0" rIns="0" bIns="0" anchor="t" anchorCtr="0">
+            <a:spAutoFit/>
+          </a:bodyPr>
+          <a:lstStyle/>
+          <a:p>
+            <a:pPr marL="0" marR="0" lvl="0" indent="0" algn="l" rtl="0">
+              <a:lnSpc>
+                <a:spcPct val="110000"/>
+              </a:lnSpc>
+              <a:spcBef>
+                <a:spcPts val="0"/>
+              </a:spcBef>
+              <a:spcAft>
+                <a:spcPts val="0"/>
+              </a:spcAft>
+              <a:buNone/>
+            </a:pPr>
+            <a:r>
+              <a:rPr lang="en-US" sz="2900" b="1" dirty="0">
+                <a:solidFill>
+                  <a:srgbClr val="004AAD"/>
+                </a:solidFill>
+                <a:latin typeface="Poppins"/>
+                <a:cs typeface="Poppins"/>
+                <a:sym typeface="Poppins"/>
+              </a:rPr>
+              <a:t>CONFERENCIAS,TALLERES Y</a:t>
+            </a:r>
+          </a:p>
+          <a:p>
+            <a:pPr marL="0" marR="0" lvl="0" indent="0" algn="l" rtl="0">
+              <a:lnSpc>
+                <a:spcPct val="110000"/>
+              </a:lnSpc>
+              <a:spcBef>
+                <a:spcPts val="0"/>
+              </a:spcBef>
+              <a:spcAft>
+                <a:spcPts val="0"/>
+              </a:spcAft>
+              <a:buNone/>
+            </a:pPr>
+            <a:r>
+              <a:rPr lang="en-US" sz="2900" b="1" dirty="0">
+                <a:solidFill>
+                  <a:srgbClr val="004AAD"/>
+                </a:solidFill>
+                <a:latin typeface="Poppins"/>
+                <a:cs typeface="Poppins"/>
+                <a:sym typeface="Poppins"/>
+              </a:rPr>
+              <a:t>SEMINARIOS</a:t>
+            </a:r>
+          </a:p>
+        </p:txBody>
+      </p:sp>
+      <p:sp>
+        <p:nvSpPr>
+          <p:cNvPr id="33" name="QuadreDeText 32">
+            <a:extLst>
+              <a:ext uri="{FF2B5EF4-FFF2-40B4-BE49-F238E27FC236}">
+                <a16:creationId xmlns:a16="http://schemas.microsoft.com/office/drawing/2014/main" id="{934E4FD5-D080-4B3C-880C-81EE84B769EB}"/>
+              </a:ext>
+            </a:extLst>
+          </p:cNvPr>
+          <p:cNvSpPr txBox="1"/>
+          <p:nvPr/>
+        </p:nvSpPr>
+        <p:spPr>
+          <a:xfrm>
+            <a:off x="400090" y="9395172"/>
+            <a:ext cx="6045245" cy="307777"/>
+          </a:xfrm>
+          <a:prstGeom prst="rect">
+            <a:avLst/>
+          </a:prstGeom>
+          <a:noFill/>
+        </p:spPr>
+        <p:txBody>
+          <a:bodyPr wrap="none" rtlCol="0">
+            <a:spAutoFit/>
+          </a:bodyPr>
+          <a:lstStyle/>
+          <a:p>
+            <a:r>
+              <a:rPr lang="es-ES" dirty="0"/>
+              <a:t>Fuente: </a:t>
+            </a:r>
+            <a:r>
+              <a:rPr lang="es-ES" dirty="0">
+                <a:hlinkClick r:id="rId5"/>
+              </a:rPr>
+              <a:t>Encuesta Anual Laboral. Ministerio de Trabajo y Economía Social</a:t>
+            </a:r>
+            <a:endParaRPr lang="es-ES" dirty="0"/>
+          </a:p>
+        </p:txBody>
+      </p:sp>
+    </p:spTree>
+  </p:cSld>
+  <p:clrMapOvr>
+    <a:masterClrMapping/>
+  </p:clrMapOvr>
+</p:sld>
+</file>
+
+<file path=ppt/slides/slide6.xml><?xml version="1.0" encoding="utf-8"?>
+<p:sld xmlns:a="http://schemas.openxmlformats.org/drawingml/2006/main" xmlns:r="http://schemas.openxmlformats.org/officeDocument/2006/relationships" xmlns:p="http://schemas.openxmlformats.org/presentationml/2006/main">
+  <p:cSld>
     <p:bg>
       <p:bgPr>
         <a:solidFill>
@@ -34870,7 +36748,7 @@
 </p:sld>
 </file>
 
-<file path=ppt/slides/slide6.xml><?xml version="1.0" encoding="utf-8"?>
+<file path=ppt/slides/slide7.xml><?xml version="1.0" encoding="utf-8"?>
 <p:sld xmlns:a="http://schemas.openxmlformats.org/drawingml/2006/main" xmlns:r="http://schemas.openxmlformats.org/officeDocument/2006/relationships" xmlns:p="http://schemas.openxmlformats.org/presentationml/2006/main">
   <p:cSld>
     <p:bg>
@@ -35327,7 +37205,7 @@
 </p:sld>
 </file>
 
-<file path=ppt/slides/slide7.xml><?xml version="1.0" encoding="utf-8"?>
+<file path=ppt/slides/slide8.xml><?xml version="1.0" encoding="utf-8"?>
 <p:sld xmlns:a="http://schemas.openxmlformats.org/drawingml/2006/main" xmlns:r="http://schemas.openxmlformats.org/officeDocument/2006/relationships" xmlns:p="http://schemas.openxmlformats.org/presentationml/2006/main">
   <p:cSld>
     <p:bg>
@@ -35784,7 +37662,7 @@
 </p:sld>
 </file>
 
-<file path=ppt/slides/slide8.xml><?xml version="1.0" encoding="utf-8"?>
+<file path=ppt/slides/slide9.xml><?xml version="1.0" encoding="utf-8"?>
 <p:sld xmlns:a="http://schemas.openxmlformats.org/drawingml/2006/main" xmlns:r="http://schemas.openxmlformats.org/officeDocument/2006/relationships" xmlns:p="http://schemas.openxmlformats.org/presentationml/2006/main">
   <p:cSld>
     <p:bg>
@@ -36178,457 +38056,6 @@
     <p:extLst>
       <p:ext uri="{BB962C8B-B14F-4D97-AF65-F5344CB8AC3E}">
         <p14:creationId xmlns:p14="http://schemas.microsoft.com/office/powerpoint/2010/main" val="1860337386"/>
-      </p:ext>
-    </p:extLst>
-  </p:cSld>
-  <p:clrMapOvr>
-    <a:masterClrMapping/>
-  </p:clrMapOvr>
-</p:sld>
-</file>
-
-<file path=ppt/slides/slide9.xml><?xml version="1.0" encoding="utf-8"?>
-<p:sld xmlns:a="http://schemas.openxmlformats.org/drawingml/2006/main" xmlns:r="http://schemas.openxmlformats.org/officeDocument/2006/relationships" xmlns:p="http://schemas.openxmlformats.org/presentationml/2006/main">
-  <p:cSld>
-    <p:bg>
-      <p:bgPr>
-        <a:solidFill>
-          <a:srgbClr val="E0E9F9"/>
-        </a:solidFill>
-        <a:effectLst/>
-      </p:bgPr>
-    </p:bg>
-    <p:spTree>
-      <p:nvGrpSpPr>
-        <p:cNvPr id="1" name="Shape 138"/>
-        <p:cNvGrpSpPr/>
-        <p:nvPr/>
-      </p:nvGrpSpPr>
-      <p:grpSpPr>
-        <a:xfrm>
-          <a:off x="0" y="0"/>
-          <a:ext cx="0" cy="0"/>
-          <a:chOff x="0" y="0"/>
-          <a:chExt cx="0" cy="0"/>
-        </a:xfrm>
-      </p:grpSpPr>
-      <p:sp>
-        <p:nvSpPr>
-          <p:cNvPr id="11" name="Google Shape;150;p17">
-            <a:extLst>
-              <a:ext uri="{FF2B5EF4-FFF2-40B4-BE49-F238E27FC236}">
-                <a16:creationId xmlns:a16="http://schemas.microsoft.com/office/drawing/2014/main" id="{DC31FCA6-E624-4F0D-9CEA-5147EAFF7540}"/>
-              </a:ext>
-            </a:extLst>
-          </p:cNvPr>
-          <p:cNvSpPr/>
-          <p:nvPr/>
-        </p:nvSpPr>
-        <p:spPr>
-          <a:xfrm>
-            <a:off x="13727091" y="2555717"/>
-            <a:ext cx="4065560" cy="5646612"/>
-          </a:xfrm>
-          <a:custGeom>
-            <a:avLst/>
-            <a:gdLst/>
-            <a:ahLst/>
-            <a:cxnLst/>
-            <a:rect l="l" t="t" r="r" b="b"/>
-            <a:pathLst>
-              <a:path w="6557355" h="9107438" extrusionOk="0">
-                <a:moveTo>
-                  <a:pt x="0" y="0"/>
-                </a:moveTo>
-                <a:lnTo>
-                  <a:pt x="6557355" y="0"/>
-                </a:lnTo>
-                <a:lnTo>
-                  <a:pt x="6557355" y="9107438"/>
-                </a:lnTo>
-                <a:lnTo>
-                  <a:pt x="0" y="9107438"/>
-                </a:lnTo>
-                <a:lnTo>
-                  <a:pt x="0" y="0"/>
-                </a:lnTo>
-                <a:close/>
-              </a:path>
-            </a:pathLst>
-          </a:custGeom>
-          <a:blipFill rotWithShape="1">
-            <a:blip r:embed="rId3">
-              <a:alphaModFix/>
-            </a:blip>
-            <a:stretch>
-              <a:fillRect/>
-            </a:stretch>
-          </a:blipFill>
-          <a:ln>
-            <a:noFill/>
-          </a:ln>
-        </p:spPr>
-        <p:txBody>
-          <a:bodyPr/>
-          <a:lstStyle/>
-          <a:p>
-            <a:endParaRPr lang="es-ES_tradnl" dirty="0"/>
-          </a:p>
-        </p:txBody>
-      </p:sp>
-      <p:pic>
-        <p:nvPicPr>
-          <p:cNvPr id="3" name="Imatge 2">
-            <a:extLst>
-              <a:ext uri="{FF2B5EF4-FFF2-40B4-BE49-F238E27FC236}">
-                <a16:creationId xmlns:a16="http://schemas.microsoft.com/office/drawing/2014/main" id="{0B9CE290-D1C1-4189-9E21-0E59FAC078F3}"/>
-              </a:ext>
-            </a:extLst>
-          </p:cNvPr>
-          <p:cNvPicPr>
-            <a:picLocks noChangeAspect="1"/>
-          </p:cNvPicPr>
-          <p:nvPr/>
-        </p:nvPicPr>
-        <p:blipFill>
-          <a:blip r:embed="rId4"/>
-          <a:stretch>
-            <a:fillRect/>
-          </a:stretch>
-        </p:blipFill>
-        <p:spPr>
-          <a:xfrm>
-            <a:off x="371483" y="1137967"/>
-            <a:ext cx="13299546" cy="9104063"/>
-          </a:xfrm>
-          <a:prstGeom prst="rect">
-            <a:avLst/>
-          </a:prstGeom>
-        </p:spPr>
-      </p:pic>
-      <p:sp>
-        <p:nvSpPr>
-          <p:cNvPr id="142" name="Google Shape;142;p16"/>
-          <p:cNvSpPr txBox="1"/>
-          <p:nvPr/>
-        </p:nvSpPr>
-        <p:spPr>
-          <a:xfrm>
-            <a:off x="4000546" y="524304"/>
-            <a:ext cx="9594965" cy="670505"/>
-          </a:xfrm>
-          <a:prstGeom prst="rect">
-            <a:avLst/>
-          </a:prstGeom>
-          <a:noFill/>
-          <a:ln>
-            <a:noFill/>
-          </a:ln>
-        </p:spPr>
-        <p:txBody>
-          <a:bodyPr spcFirstLastPara="1" wrap="square" lIns="0" tIns="0" rIns="0" bIns="0" anchor="t" anchorCtr="0">
-            <a:spAutoFit/>
-          </a:bodyPr>
-          <a:lstStyle/>
-          <a:p>
-            <a:pPr marL="0" marR="0" lvl="0" indent="0" algn="l" rtl="0">
-              <a:lnSpc>
-                <a:spcPct val="121055"/>
-              </a:lnSpc>
-              <a:spcBef>
-                <a:spcPts val="0"/>
-              </a:spcBef>
-              <a:spcAft>
-                <a:spcPts val="0"/>
-              </a:spcAft>
-              <a:buNone/>
-            </a:pPr>
-            <a:r>
-              <a:rPr lang="es-ES_tradnl" sz="3601" b="1" i="0" u="none" strike="noStrike" cap="none" dirty="0">
-                <a:solidFill>
-                  <a:srgbClr val="004AAD"/>
-                </a:solidFill>
-                <a:latin typeface="Poppins"/>
-                <a:ea typeface="Poppins"/>
-                <a:cs typeface="Poppins"/>
-                <a:sym typeface="Poppins"/>
-              </a:rPr>
-              <a:t>Análisis por </a:t>
-            </a:r>
-            <a:r>
-              <a:rPr lang="es-ES_tradnl" sz="3601" b="1" dirty="0">
-                <a:solidFill>
-                  <a:srgbClr val="004AAD"/>
-                </a:solidFill>
-                <a:latin typeface="Poppins"/>
-                <a:ea typeface="Poppins"/>
-                <a:cs typeface="Poppins"/>
-                <a:sym typeface="Poppins"/>
-              </a:rPr>
-              <a:t>C</a:t>
-            </a:r>
-            <a:r>
-              <a:rPr lang="es-ES_tradnl" sz="3601" b="1" i="0" u="none" strike="noStrike" cap="none" dirty="0">
-                <a:solidFill>
-                  <a:srgbClr val="004AAD"/>
-                </a:solidFill>
-                <a:latin typeface="Poppins"/>
-                <a:ea typeface="Poppins"/>
-                <a:cs typeface="Poppins"/>
-                <a:sym typeface="Poppins"/>
-              </a:rPr>
-              <a:t>omunidad </a:t>
-            </a:r>
-            <a:r>
-              <a:rPr lang="es-ES_tradnl" sz="3601" b="1" dirty="0">
-                <a:solidFill>
-                  <a:srgbClr val="004AAD"/>
-                </a:solidFill>
-                <a:latin typeface="Poppins"/>
-                <a:ea typeface="Poppins"/>
-                <a:cs typeface="Poppins"/>
-                <a:sym typeface="Poppins"/>
-              </a:rPr>
-              <a:t>A</a:t>
-            </a:r>
-            <a:r>
-              <a:rPr lang="es-ES_tradnl" sz="3601" b="1" i="0" u="none" strike="noStrike" cap="none" dirty="0">
-                <a:solidFill>
-                  <a:srgbClr val="004AAD"/>
-                </a:solidFill>
-                <a:latin typeface="Poppins"/>
-                <a:ea typeface="Poppins"/>
-                <a:cs typeface="Poppins"/>
-                <a:sym typeface="Poppins"/>
-              </a:rPr>
-              <a:t>utónoma</a:t>
-            </a:r>
-            <a:endParaRPr lang="es-ES_tradnl" dirty="0"/>
-          </a:p>
-        </p:txBody>
-      </p:sp>
-      <p:grpSp>
-        <p:nvGrpSpPr>
-          <p:cNvPr id="143" name="Google Shape;143;p16"/>
-          <p:cNvGrpSpPr/>
-          <p:nvPr/>
-        </p:nvGrpSpPr>
-        <p:grpSpPr>
-          <a:xfrm>
-            <a:off x="0" y="5"/>
-            <a:ext cx="2163413" cy="1886345"/>
-            <a:chOff x="12784175" y="3675030"/>
-            <a:chExt cx="2163413" cy="1886345"/>
-          </a:xfrm>
-        </p:grpSpPr>
-        <p:sp>
-          <p:nvSpPr>
-            <p:cNvPr id="144" name="Google Shape;144;p16"/>
-            <p:cNvSpPr txBox="1"/>
-            <p:nvPr/>
-          </p:nvSpPr>
-          <p:spPr>
-            <a:xfrm rot="1830973">
-              <a:off x="12805773" y="4425496"/>
-              <a:ext cx="2081405" cy="652657"/>
-            </a:xfrm>
-            <a:prstGeom prst="rect">
-              <a:avLst/>
-            </a:prstGeom>
-            <a:noFill/>
-            <a:ln>
-              <a:noFill/>
-            </a:ln>
-          </p:spPr>
-          <p:txBody>
-            <a:bodyPr spcFirstLastPara="1" wrap="square" lIns="91425" tIns="91425" rIns="91425" bIns="91425" anchor="t" anchorCtr="0">
-              <a:noAutofit/>
-            </a:bodyPr>
-            <a:lstStyle/>
-            <a:p>
-              <a:pPr marL="0" lvl="0" indent="0" algn="l" rtl="0">
-                <a:spcBef>
-                  <a:spcPts val="0"/>
-                </a:spcBef>
-                <a:spcAft>
-                  <a:spcPts val="0"/>
-                </a:spcAft>
-                <a:buNone/>
-              </a:pPr>
-              <a:r>
-                <a:rPr lang="es-ES_tradnl" sz="2300" b="1" i="1" dirty="0">
-                  <a:solidFill>
-                    <a:srgbClr val="E69138"/>
-                  </a:solidFill>
-                  <a:latin typeface="Calibri"/>
-                  <a:ea typeface="Calibri"/>
-                  <a:cs typeface="Calibri"/>
-                  <a:sym typeface="Calibri"/>
-                </a:rPr>
-                <a:t>RAPID EXPRESS </a:t>
-              </a:r>
-            </a:p>
-          </p:txBody>
-        </p:sp>
-        <p:sp>
-          <p:nvSpPr>
-            <p:cNvPr id="145" name="Google Shape;145;p16"/>
-            <p:cNvSpPr/>
-            <p:nvPr/>
-          </p:nvSpPr>
-          <p:spPr>
-            <a:xfrm>
-              <a:off x="13335203" y="3675030"/>
-              <a:ext cx="1612385" cy="1275250"/>
-            </a:xfrm>
-            <a:custGeom>
-              <a:avLst/>
-              <a:gdLst/>
-              <a:ahLst/>
-              <a:cxnLst/>
-              <a:rect l="l" t="t" r="r" b="b"/>
-              <a:pathLst>
-                <a:path w="1612385" h="1275250" extrusionOk="0">
-                  <a:moveTo>
-                    <a:pt x="0" y="0"/>
-                  </a:moveTo>
-                  <a:lnTo>
-                    <a:pt x="1612384" y="0"/>
-                  </a:lnTo>
-                  <a:lnTo>
-                    <a:pt x="1612384" y="1275249"/>
-                  </a:lnTo>
-                  <a:lnTo>
-                    <a:pt x="0" y="1275249"/>
-                  </a:lnTo>
-                  <a:lnTo>
-                    <a:pt x="0" y="0"/>
-                  </a:lnTo>
-                  <a:close/>
-                </a:path>
-              </a:pathLst>
-            </a:custGeom>
-            <a:blipFill rotWithShape="1">
-              <a:blip r:embed="rId5">
-                <a:alphaModFix/>
-              </a:blip>
-              <a:stretch>
-                <a:fillRect/>
-              </a:stretch>
-            </a:blipFill>
-            <a:ln>
-              <a:noFill/>
-            </a:ln>
-          </p:spPr>
-          <p:txBody>
-            <a:bodyPr/>
-            <a:lstStyle/>
-            <a:p>
-              <a:endParaRPr lang="es-ES_tradnl" dirty="0"/>
-            </a:p>
-          </p:txBody>
-        </p:sp>
-      </p:grpSp>
-      <p:sp>
-        <p:nvSpPr>
-          <p:cNvPr id="5" name="Rectángulo redondeado 4">
-            <a:extLst>
-              <a:ext uri="{FF2B5EF4-FFF2-40B4-BE49-F238E27FC236}">
-                <a16:creationId xmlns:a16="http://schemas.microsoft.com/office/drawing/2014/main" id="{4662BFC3-4DAD-4767-15A8-BAC1AD191C5D}"/>
-              </a:ext>
-            </a:extLst>
-          </p:cNvPr>
-          <p:cNvSpPr/>
-          <p:nvPr/>
-        </p:nvSpPr>
-        <p:spPr>
-          <a:xfrm>
-            <a:off x="2848133" y="4337802"/>
-            <a:ext cx="9773586" cy="365760"/>
-          </a:xfrm>
-          <a:prstGeom prst="roundRect">
-            <a:avLst/>
-          </a:prstGeom>
-          <a:noFill/>
-          <a:ln w="28575">
-            <a:solidFill>
-              <a:schemeClr val="accent6">
-                <a:lumMod val="75000"/>
-              </a:schemeClr>
-            </a:solidFill>
-          </a:ln>
-        </p:spPr>
-        <p:style>
-          <a:lnRef idx="2">
-            <a:schemeClr val="accent1">
-              <a:shade val="15000"/>
-            </a:schemeClr>
-          </a:lnRef>
-          <a:fillRef idx="1">
-            <a:schemeClr val="accent1"/>
-          </a:fillRef>
-          <a:effectRef idx="0">
-            <a:schemeClr val="accent1"/>
-          </a:effectRef>
-          <a:fontRef idx="minor">
-            <a:schemeClr val="lt1"/>
-          </a:fontRef>
-        </p:style>
-        <p:txBody>
-          <a:bodyPr rtlCol="0" anchor="ctr"/>
-          <a:lstStyle/>
-          <a:p>
-            <a:pPr algn="ctr"/>
-            <a:endParaRPr lang="es-ES"/>
-          </a:p>
-        </p:txBody>
-      </p:sp>
-      <p:sp>
-        <p:nvSpPr>
-          <p:cNvPr id="10" name="QuadreDeText 9">
-            <a:extLst>
-              <a:ext uri="{FF2B5EF4-FFF2-40B4-BE49-F238E27FC236}">
-                <a16:creationId xmlns:a16="http://schemas.microsoft.com/office/drawing/2014/main" id="{78EA8AD0-7D3A-4D72-BC07-3134E7C59809}"/>
-              </a:ext>
-            </a:extLst>
-          </p:cNvPr>
-          <p:cNvSpPr txBox="1"/>
-          <p:nvPr/>
-        </p:nvSpPr>
-        <p:spPr>
-          <a:xfrm>
-            <a:off x="12037101" y="9762696"/>
-            <a:ext cx="9173980" cy="307777"/>
-          </a:xfrm>
-          <a:prstGeom prst="rect">
-            <a:avLst/>
-          </a:prstGeom>
-          <a:noFill/>
-        </p:spPr>
-        <p:txBody>
-          <a:bodyPr wrap="square">
-            <a:spAutoFit/>
-          </a:bodyPr>
-          <a:lstStyle/>
-          <a:p>
-            <a:r>
-              <a:rPr lang="es-ES" dirty="0"/>
-              <a:t>Fuente: </a:t>
-            </a:r>
-            <a:r>
-              <a:rPr lang="es-ES" dirty="0">
-                <a:hlinkClick r:id="rId6"/>
-              </a:rPr>
-              <a:t>Encuesta Anual Laboral. Ministerio de Trabajo y Economía Social</a:t>
-            </a:r>
-            <a:endParaRPr lang="es-ES" dirty="0"/>
-          </a:p>
-        </p:txBody>
-      </p:sp>
-    </p:spTree>
-    <p:extLst>
-      <p:ext uri="{BB962C8B-B14F-4D97-AF65-F5344CB8AC3E}">
-        <p14:creationId xmlns:p14="http://schemas.microsoft.com/office/powerpoint/2010/main" val="2184726870"/>
       </p:ext>
     </p:extLst>
   </p:cSld>

--- a/Equip_28/Results/Analisis_PAP_and_ABL_RapidExpres_2026_11_05.pptx
+++ b/Equip_28/Results/Analisis_PAP_and_ABL_RapidExpres_2026_11_05.pptx
@@ -5,60 +5,61 @@
     <p:sldMasterId id="2147483659" r:id="rId1"/>
   </p:sldMasterIdLst>
   <p:notesMasterIdLst>
-    <p:notesMasterId r:id="rId30"/>
+    <p:notesMasterId r:id="rId31"/>
   </p:notesMasterIdLst>
   <p:sldIdLst>
     <p:sldId id="256" r:id="rId2"/>
     <p:sldId id="281" r:id="rId3"/>
     <p:sldId id="296" r:id="rId4"/>
     <p:sldId id="290" r:id="rId5"/>
-    <p:sldId id="304" r:id="rId6"/>
-    <p:sldId id="259" r:id="rId7"/>
-    <p:sldId id="299" r:id="rId8"/>
-    <p:sldId id="300" r:id="rId9"/>
-    <p:sldId id="301" r:id="rId10"/>
-    <p:sldId id="298" r:id="rId11"/>
-    <p:sldId id="302" r:id="rId12"/>
-    <p:sldId id="303" r:id="rId13"/>
-    <p:sldId id="288" r:id="rId14"/>
-    <p:sldId id="297" r:id="rId15"/>
-    <p:sldId id="258" r:id="rId16"/>
-    <p:sldId id="260" r:id="rId17"/>
-    <p:sldId id="287" r:id="rId18"/>
-    <p:sldId id="284" r:id="rId19"/>
-    <p:sldId id="285" r:id="rId20"/>
-    <p:sldId id="295" r:id="rId21"/>
-    <p:sldId id="289" r:id="rId22"/>
-    <p:sldId id="257" r:id="rId23"/>
-    <p:sldId id="291" r:id="rId24"/>
-    <p:sldId id="292" r:id="rId25"/>
-    <p:sldId id="261" r:id="rId26"/>
-    <p:sldId id="262" r:id="rId27"/>
-    <p:sldId id="293" r:id="rId28"/>
-    <p:sldId id="279" r:id="rId29"/>
+    <p:sldId id="305" r:id="rId6"/>
+    <p:sldId id="304" r:id="rId7"/>
+    <p:sldId id="259" r:id="rId8"/>
+    <p:sldId id="299" r:id="rId9"/>
+    <p:sldId id="300" r:id="rId10"/>
+    <p:sldId id="301" r:id="rId11"/>
+    <p:sldId id="298" r:id="rId12"/>
+    <p:sldId id="302" r:id="rId13"/>
+    <p:sldId id="303" r:id="rId14"/>
+    <p:sldId id="288" r:id="rId15"/>
+    <p:sldId id="297" r:id="rId16"/>
+    <p:sldId id="258" r:id="rId17"/>
+    <p:sldId id="260" r:id="rId18"/>
+    <p:sldId id="287" r:id="rId19"/>
+    <p:sldId id="284" r:id="rId20"/>
+    <p:sldId id="285" r:id="rId21"/>
+    <p:sldId id="295" r:id="rId22"/>
+    <p:sldId id="289" r:id="rId23"/>
+    <p:sldId id="257" r:id="rId24"/>
+    <p:sldId id="291" r:id="rId25"/>
+    <p:sldId id="292" r:id="rId26"/>
+    <p:sldId id="261" r:id="rId27"/>
+    <p:sldId id="262" r:id="rId28"/>
+    <p:sldId id="293" r:id="rId29"/>
+    <p:sldId id="279" r:id="rId30"/>
   </p:sldIdLst>
   <p:sldSz cx="18288000" cy="10287000"/>
   <p:notesSz cx="6858000" cy="9144000"/>
   <p:embeddedFontLst>
     <p:embeddedFont>
       <p:font typeface="Calibri" panose="020F0502020204030204" pitchFamily="34" charset="0"/>
-      <p:regular r:id="rId31"/>
-      <p:bold r:id="rId32"/>
-      <p:italic r:id="rId33"/>
-      <p:boldItalic r:id="rId34"/>
+      <p:regular r:id="rId32"/>
+      <p:bold r:id="rId33"/>
+      <p:italic r:id="rId34"/>
+      <p:boldItalic r:id="rId35"/>
     </p:embeddedFont>
     <p:embeddedFont>
       <p:font typeface="Poppins" panose="00000500000000000000" pitchFamily="2" charset="0"/>
-      <p:regular r:id="rId35"/>
-      <p:bold r:id="rId36"/>
-      <p:italic r:id="rId37"/>
-      <p:boldItalic r:id="rId38"/>
+      <p:regular r:id="rId36"/>
+      <p:bold r:id="rId37"/>
+      <p:italic r:id="rId38"/>
+      <p:boldItalic r:id="rId39"/>
     </p:embeddedFont>
     <p:embeddedFont>
       <p:font typeface="Poppins Black" panose="00000A00000000000000" pitchFamily="2" charset="0"/>
-      <p:bold r:id="rId39"/>
-      <p:italic r:id="rId40"/>
-      <p:boldItalic r:id="rId41"/>
+      <p:bold r:id="rId40"/>
+      <p:italic r:id="rId41"/>
+      <p:boldItalic r:id="rId42"/>
     </p:embeddedFont>
   </p:embeddedFontLst>
   <p:defaultTextStyle>
@@ -953,7 +954,7 @@
     </p:spTree>
     <p:extLst>
       <p:ext uri="{BB962C8B-B14F-4D97-AF65-F5344CB8AC3E}">
-        <p14:creationId xmlns:p14="http://schemas.microsoft.com/office/powerpoint/2010/main" val="3436316797"/>
+        <p14:creationId xmlns:p14="http://schemas.microsoft.com/office/powerpoint/2010/main" val="739215490"/>
       </p:ext>
     </p:extLst>
   </p:cSld>
@@ -1062,7 +1063,7 @@
     </p:spTree>
     <p:extLst>
       <p:ext uri="{BB962C8B-B14F-4D97-AF65-F5344CB8AC3E}">
-        <p14:creationId xmlns:p14="http://schemas.microsoft.com/office/powerpoint/2010/main" val="39675430"/>
+        <p14:creationId xmlns:p14="http://schemas.microsoft.com/office/powerpoint/2010/main" val="3436316797"/>
       </p:ext>
     </p:extLst>
   </p:cSld>
@@ -1171,6 +1172,115 @@
     </p:spTree>
     <p:extLst>
       <p:ext uri="{BB962C8B-B14F-4D97-AF65-F5344CB8AC3E}">
+        <p14:creationId xmlns:p14="http://schemas.microsoft.com/office/powerpoint/2010/main" val="39675430"/>
+      </p:ext>
+    </p:extLst>
+  </p:cSld>
+  <p:clrMapOvr>
+    <a:masterClrMapping/>
+  </p:clrMapOvr>
+</p:notes>
+</file>
+
+<file path=ppt/notesSlides/notesSlide13.xml><?xml version="1.0" encoding="utf-8"?>
+<p:notes xmlns:a="http://schemas.openxmlformats.org/drawingml/2006/main" xmlns:r="http://schemas.openxmlformats.org/officeDocument/2006/relationships" xmlns:p="http://schemas.openxmlformats.org/presentationml/2006/main" showMasterSp="0" showMasterPhAnim="0">
+  <p:cSld>
+    <p:spTree>
+      <p:nvGrpSpPr>
+        <p:cNvPr id="1" name="Shape 135"/>
+        <p:cNvGrpSpPr/>
+        <p:nvPr/>
+      </p:nvGrpSpPr>
+      <p:grpSpPr>
+        <a:xfrm>
+          <a:off x="0" y="0"/>
+          <a:ext cx="0" cy="0"/>
+          <a:chOff x="0" y="0"/>
+          <a:chExt cx="0" cy="0"/>
+        </a:xfrm>
+      </p:grpSpPr>
+      <p:sp>
+        <p:nvSpPr>
+          <p:cNvPr id="136" name="Google Shape;136;p3:notes"/>
+          <p:cNvSpPr txBox="1">
+            <a:spLocks noGrp="1"/>
+          </p:cNvSpPr>
+          <p:nvPr>
+            <p:ph type="body" idx="1"/>
+          </p:nvPr>
+        </p:nvSpPr>
+        <p:spPr>
+          <a:xfrm>
+            <a:off x="685800" y="4343400"/>
+            <a:ext cx="5486400" cy="4114800"/>
+          </a:xfrm>
+          <a:prstGeom prst="rect">
+            <a:avLst/>
+          </a:prstGeom>
+        </p:spPr>
+        <p:txBody>
+          <a:bodyPr spcFirstLastPara="1" wrap="square" lIns="91425" tIns="91425" rIns="91425" bIns="91425" anchor="t" anchorCtr="0">
+            <a:noAutofit/>
+          </a:bodyPr>
+          <a:lstStyle/>
+          <a:p>
+            <a:pPr marL="0" lvl="0" indent="0" algn="l" rtl="0">
+              <a:spcBef>
+                <a:spcPts val="0"/>
+              </a:spcBef>
+              <a:spcAft>
+                <a:spcPts val="0"/>
+              </a:spcAft>
+              <a:buNone/>
+            </a:pPr>
+            <a:endParaRPr/>
+          </a:p>
+        </p:txBody>
+      </p:sp>
+      <p:sp>
+        <p:nvSpPr>
+          <p:cNvPr id="137" name="Google Shape;137;p3:notes"/>
+          <p:cNvSpPr>
+            <a:spLocks noGrp="1" noRot="1" noChangeAspect="1"/>
+          </p:cNvSpPr>
+          <p:nvPr>
+            <p:ph type="sldImg" idx="2"/>
+          </p:nvPr>
+        </p:nvSpPr>
+        <p:spPr>
+          <a:xfrm>
+            <a:off x="381000" y="685800"/>
+            <a:ext cx="6096000" cy="3429000"/>
+          </a:xfrm>
+          <a:custGeom>
+            <a:avLst/>
+            <a:gdLst/>
+            <a:ahLst/>
+            <a:cxnLst/>
+            <a:rect l="l" t="t" r="r" b="b"/>
+            <a:pathLst>
+              <a:path w="120000" h="120000" extrusionOk="0">
+                <a:moveTo>
+                  <a:pt x="0" y="0"/>
+                </a:moveTo>
+                <a:lnTo>
+                  <a:pt x="120000" y="0"/>
+                </a:lnTo>
+                <a:lnTo>
+                  <a:pt x="120000" y="120000"/>
+                </a:lnTo>
+                <a:lnTo>
+                  <a:pt x="0" y="120000"/>
+                </a:lnTo>
+                <a:close/>
+              </a:path>
+            </a:pathLst>
+          </a:custGeom>
+        </p:spPr>
+      </p:sp>
+    </p:spTree>
+    <p:extLst>
+      <p:ext uri="{BB962C8B-B14F-4D97-AF65-F5344CB8AC3E}">
         <p14:creationId xmlns:p14="http://schemas.microsoft.com/office/powerpoint/2010/main" val="224063088"/>
       </p:ext>
     </p:extLst>
@@ -1181,7 +1291,7 @@
 </p:notes>
 </file>
 
-<file path=ppt/notesSlides/notesSlide13.xml><?xml version="1.0" encoding="utf-8"?>
+<file path=ppt/notesSlides/notesSlide14.xml><?xml version="1.0" encoding="utf-8"?>
 <p:notes xmlns:a="http://schemas.openxmlformats.org/drawingml/2006/main" xmlns:r="http://schemas.openxmlformats.org/officeDocument/2006/relationships" xmlns:p="http://schemas.openxmlformats.org/presentationml/2006/main" showMasterSp="0" showMasterPhAnim="0">
   <p:cSld>
     <p:spTree>
@@ -1308,7 +1418,7 @@
 </p:notes>
 </file>
 
-<file path=ppt/notesSlides/notesSlide14.xml><?xml version="1.0" encoding="utf-8"?>
+<file path=ppt/notesSlides/notesSlide15.xml><?xml version="1.0" encoding="utf-8"?>
 <p:notes xmlns:a="http://schemas.openxmlformats.org/drawingml/2006/main" xmlns:r="http://schemas.openxmlformats.org/officeDocument/2006/relationships" xmlns:p="http://schemas.openxmlformats.org/presentationml/2006/main" showMasterSp="0" showMasterPhAnim="0">
   <p:cSld>
     <p:spTree>
@@ -1417,7 +1527,7 @@
 </p:notes>
 </file>
 
-<file path=ppt/notesSlides/notesSlide15.xml><?xml version="1.0" encoding="utf-8"?>
+<file path=ppt/notesSlides/notesSlide16.xml><?xml version="1.0" encoding="utf-8"?>
 <p:notes xmlns:a="http://schemas.openxmlformats.org/drawingml/2006/main" xmlns:r="http://schemas.openxmlformats.org/officeDocument/2006/relationships" xmlns:p="http://schemas.openxmlformats.org/presentationml/2006/main" showMasterSp="0" showMasterPhAnim="0">
   <p:cSld>
     <p:spTree>
@@ -1521,7 +1631,7 @@
 </p:notes>
 </file>
 
-<file path=ppt/notesSlides/notesSlide16.xml><?xml version="1.0" encoding="utf-8"?>
+<file path=ppt/notesSlides/notesSlide17.xml><?xml version="1.0" encoding="utf-8"?>
 <p:notes xmlns:a="http://schemas.openxmlformats.org/drawingml/2006/main" xmlns:r="http://schemas.openxmlformats.org/officeDocument/2006/relationships" xmlns:p="http://schemas.openxmlformats.org/presentationml/2006/main" showMasterSp="0" showMasterPhAnim="0">
   <p:cSld>
     <p:spTree>
@@ -1625,7 +1735,7 @@
 </p:notes>
 </file>
 
-<file path=ppt/notesSlides/notesSlide17.xml><?xml version="1.0" encoding="utf-8"?>
+<file path=ppt/notesSlides/notesSlide18.xml><?xml version="1.0" encoding="utf-8"?>
 <p:notes xmlns:a="http://schemas.openxmlformats.org/drawingml/2006/main" xmlns:r="http://schemas.openxmlformats.org/officeDocument/2006/relationships" xmlns:p="http://schemas.openxmlformats.org/presentationml/2006/main" showMasterSp="0" showMasterPhAnim="0">
   <p:cSld>
     <p:spTree>
@@ -1752,7 +1862,7 @@
 </p:notes>
 </file>
 
-<file path=ppt/notesSlides/notesSlide18.xml><?xml version="1.0" encoding="utf-8"?>
+<file path=ppt/notesSlides/notesSlide19.xml><?xml version="1.0" encoding="utf-8"?>
 <p:notes xmlns:a="http://schemas.openxmlformats.org/drawingml/2006/main" xmlns:r="http://schemas.openxmlformats.org/officeDocument/2006/relationships" xmlns:p="http://schemas.openxmlformats.org/presentationml/2006/main" showMasterSp="0" showMasterPhAnim="0">
   <p:cSld>
     <p:spTree>
@@ -1870,133 +1980,6 @@
     <p:extLst>
       <p:ext uri="{BB962C8B-B14F-4D97-AF65-F5344CB8AC3E}">
         <p14:creationId xmlns:p14="http://schemas.microsoft.com/office/powerpoint/2010/main" val="2275216246"/>
-      </p:ext>
-    </p:extLst>
-  </p:cSld>
-  <p:clrMapOvr>
-    <a:masterClrMapping/>
-  </p:clrMapOvr>
-</p:notes>
-</file>
-
-<file path=ppt/notesSlides/notesSlide19.xml><?xml version="1.0" encoding="utf-8"?>
-<p:notes xmlns:a="http://schemas.openxmlformats.org/drawingml/2006/main" xmlns:r="http://schemas.openxmlformats.org/officeDocument/2006/relationships" xmlns:p="http://schemas.openxmlformats.org/presentationml/2006/main" showMasterSp="0" showMasterPhAnim="0">
-  <p:cSld>
-    <p:spTree>
-      <p:nvGrpSpPr>
-        <p:cNvPr id="1" name="Shape 157">
-          <a:extLst>
-            <a:ext uri="{FF2B5EF4-FFF2-40B4-BE49-F238E27FC236}">
-              <a16:creationId xmlns:a16="http://schemas.microsoft.com/office/drawing/2014/main" id="{FCF5328D-5EF3-B3C2-ED5D-E6B9C72C504A}"/>
-            </a:ext>
-          </a:extLst>
-        </p:cNvPr>
-        <p:cNvGrpSpPr/>
-        <p:nvPr/>
-      </p:nvGrpSpPr>
-      <p:grpSpPr>
-        <a:xfrm>
-          <a:off x="0" y="0"/>
-          <a:ext cx="0" cy="0"/>
-          <a:chOff x="0" y="0"/>
-          <a:chExt cx="0" cy="0"/>
-        </a:xfrm>
-      </p:grpSpPr>
-      <p:sp>
-        <p:nvSpPr>
-          <p:cNvPr id="158" name="Google Shape;158;p4:notes">
-            <a:extLst>
-              <a:ext uri="{FF2B5EF4-FFF2-40B4-BE49-F238E27FC236}">
-                <a16:creationId xmlns:a16="http://schemas.microsoft.com/office/drawing/2014/main" id="{2D46FA33-ABC3-5982-513A-88AF808BFDFD}"/>
-              </a:ext>
-            </a:extLst>
-          </p:cNvPr>
-          <p:cNvSpPr txBox="1">
-            <a:spLocks noGrp="1"/>
-          </p:cNvSpPr>
-          <p:nvPr>
-            <p:ph type="body" idx="1"/>
-          </p:nvPr>
-        </p:nvSpPr>
-        <p:spPr>
-          <a:xfrm>
-            <a:off x="685800" y="4343400"/>
-            <a:ext cx="5486400" cy="4114800"/>
-          </a:xfrm>
-          <a:prstGeom prst="rect">
-            <a:avLst/>
-          </a:prstGeom>
-        </p:spPr>
-        <p:txBody>
-          <a:bodyPr spcFirstLastPara="1" wrap="square" lIns="91425" tIns="91425" rIns="91425" bIns="91425" anchor="t" anchorCtr="0">
-            <a:noAutofit/>
-          </a:bodyPr>
-          <a:lstStyle/>
-          <a:p>
-            <a:pPr marL="0" lvl="0" indent="0" algn="l" rtl="0">
-              <a:spcBef>
-                <a:spcPts val="0"/>
-              </a:spcBef>
-              <a:spcAft>
-                <a:spcPts val="0"/>
-              </a:spcAft>
-              <a:buNone/>
-            </a:pPr>
-            <a:endParaRPr/>
-          </a:p>
-        </p:txBody>
-      </p:sp>
-      <p:sp>
-        <p:nvSpPr>
-          <p:cNvPr id="159" name="Google Shape;159;p4:notes">
-            <a:extLst>
-              <a:ext uri="{FF2B5EF4-FFF2-40B4-BE49-F238E27FC236}">
-                <a16:creationId xmlns:a16="http://schemas.microsoft.com/office/drawing/2014/main" id="{C456DE22-CE1E-6447-C306-D3F9178E76A0}"/>
-              </a:ext>
-            </a:extLst>
-          </p:cNvPr>
-          <p:cNvSpPr>
-            <a:spLocks noGrp="1" noRot="1" noChangeAspect="1"/>
-          </p:cNvSpPr>
-          <p:nvPr>
-            <p:ph type="sldImg" idx="2"/>
-          </p:nvPr>
-        </p:nvSpPr>
-        <p:spPr>
-          <a:xfrm>
-            <a:off x="381000" y="685800"/>
-            <a:ext cx="6096000" cy="3429000"/>
-          </a:xfrm>
-          <a:custGeom>
-            <a:avLst/>
-            <a:gdLst/>
-            <a:ahLst/>
-            <a:cxnLst/>
-            <a:rect l="l" t="t" r="r" b="b"/>
-            <a:pathLst>
-              <a:path w="120000" h="120000" extrusionOk="0">
-                <a:moveTo>
-                  <a:pt x="0" y="0"/>
-                </a:moveTo>
-                <a:lnTo>
-                  <a:pt x="120000" y="0"/>
-                </a:lnTo>
-                <a:lnTo>
-                  <a:pt x="120000" y="120000"/>
-                </a:lnTo>
-                <a:lnTo>
-                  <a:pt x="0" y="120000"/>
-                </a:lnTo>
-                <a:close/>
-              </a:path>
-            </a:pathLst>
-          </a:custGeom>
-        </p:spPr>
-      </p:sp>
-    </p:spTree>
-    <p:extLst>
-      <p:ext uri="{BB962C8B-B14F-4D97-AF65-F5344CB8AC3E}">
-        <p14:creationId xmlns:p14="http://schemas.microsoft.com/office/powerpoint/2010/main" val="3384843925"/>
       </p:ext>
     </p:extLst>
   </p:cSld>
@@ -2232,6 +2215,133 @@
     </p:spTree>
     <p:extLst>
       <p:ext uri="{BB962C8B-B14F-4D97-AF65-F5344CB8AC3E}">
+        <p14:creationId xmlns:p14="http://schemas.microsoft.com/office/powerpoint/2010/main" val="3384843925"/>
+      </p:ext>
+    </p:extLst>
+  </p:cSld>
+  <p:clrMapOvr>
+    <a:masterClrMapping/>
+  </p:clrMapOvr>
+</p:notes>
+</file>
+
+<file path=ppt/notesSlides/notesSlide21.xml><?xml version="1.0" encoding="utf-8"?>
+<p:notes xmlns:a="http://schemas.openxmlformats.org/drawingml/2006/main" xmlns:r="http://schemas.openxmlformats.org/officeDocument/2006/relationships" xmlns:p="http://schemas.openxmlformats.org/presentationml/2006/main" showMasterSp="0" showMasterPhAnim="0">
+  <p:cSld>
+    <p:spTree>
+      <p:nvGrpSpPr>
+        <p:cNvPr id="1" name="Shape 157">
+          <a:extLst>
+            <a:ext uri="{FF2B5EF4-FFF2-40B4-BE49-F238E27FC236}">
+              <a16:creationId xmlns:a16="http://schemas.microsoft.com/office/drawing/2014/main" id="{FCF5328D-5EF3-B3C2-ED5D-E6B9C72C504A}"/>
+            </a:ext>
+          </a:extLst>
+        </p:cNvPr>
+        <p:cNvGrpSpPr/>
+        <p:nvPr/>
+      </p:nvGrpSpPr>
+      <p:grpSpPr>
+        <a:xfrm>
+          <a:off x="0" y="0"/>
+          <a:ext cx="0" cy="0"/>
+          <a:chOff x="0" y="0"/>
+          <a:chExt cx="0" cy="0"/>
+        </a:xfrm>
+      </p:grpSpPr>
+      <p:sp>
+        <p:nvSpPr>
+          <p:cNvPr id="158" name="Google Shape;158;p4:notes">
+            <a:extLst>
+              <a:ext uri="{FF2B5EF4-FFF2-40B4-BE49-F238E27FC236}">
+                <a16:creationId xmlns:a16="http://schemas.microsoft.com/office/drawing/2014/main" id="{2D46FA33-ABC3-5982-513A-88AF808BFDFD}"/>
+              </a:ext>
+            </a:extLst>
+          </p:cNvPr>
+          <p:cNvSpPr txBox="1">
+            <a:spLocks noGrp="1"/>
+          </p:cNvSpPr>
+          <p:nvPr>
+            <p:ph type="body" idx="1"/>
+          </p:nvPr>
+        </p:nvSpPr>
+        <p:spPr>
+          <a:xfrm>
+            <a:off x="685800" y="4343400"/>
+            <a:ext cx="5486400" cy="4114800"/>
+          </a:xfrm>
+          <a:prstGeom prst="rect">
+            <a:avLst/>
+          </a:prstGeom>
+        </p:spPr>
+        <p:txBody>
+          <a:bodyPr spcFirstLastPara="1" wrap="square" lIns="91425" tIns="91425" rIns="91425" bIns="91425" anchor="t" anchorCtr="0">
+            <a:noAutofit/>
+          </a:bodyPr>
+          <a:lstStyle/>
+          <a:p>
+            <a:pPr marL="0" lvl="0" indent="0" algn="l" rtl="0">
+              <a:spcBef>
+                <a:spcPts val="0"/>
+              </a:spcBef>
+              <a:spcAft>
+                <a:spcPts val="0"/>
+              </a:spcAft>
+              <a:buNone/>
+            </a:pPr>
+            <a:endParaRPr/>
+          </a:p>
+        </p:txBody>
+      </p:sp>
+      <p:sp>
+        <p:nvSpPr>
+          <p:cNvPr id="159" name="Google Shape;159;p4:notes">
+            <a:extLst>
+              <a:ext uri="{FF2B5EF4-FFF2-40B4-BE49-F238E27FC236}">
+                <a16:creationId xmlns:a16="http://schemas.microsoft.com/office/drawing/2014/main" id="{C456DE22-CE1E-6447-C306-D3F9178E76A0}"/>
+              </a:ext>
+            </a:extLst>
+          </p:cNvPr>
+          <p:cNvSpPr>
+            <a:spLocks noGrp="1" noRot="1" noChangeAspect="1"/>
+          </p:cNvSpPr>
+          <p:nvPr>
+            <p:ph type="sldImg" idx="2"/>
+          </p:nvPr>
+        </p:nvSpPr>
+        <p:spPr>
+          <a:xfrm>
+            <a:off x="381000" y="685800"/>
+            <a:ext cx="6096000" cy="3429000"/>
+          </a:xfrm>
+          <a:custGeom>
+            <a:avLst/>
+            <a:gdLst/>
+            <a:ahLst/>
+            <a:cxnLst/>
+            <a:rect l="l" t="t" r="r" b="b"/>
+            <a:pathLst>
+              <a:path w="120000" h="120000" extrusionOk="0">
+                <a:moveTo>
+                  <a:pt x="0" y="0"/>
+                </a:moveTo>
+                <a:lnTo>
+                  <a:pt x="120000" y="0"/>
+                </a:lnTo>
+                <a:lnTo>
+                  <a:pt x="120000" y="120000"/>
+                </a:lnTo>
+                <a:lnTo>
+                  <a:pt x="0" y="120000"/>
+                </a:lnTo>
+                <a:close/>
+              </a:path>
+            </a:pathLst>
+          </a:custGeom>
+        </p:spPr>
+      </p:sp>
+    </p:spTree>
+    <p:extLst>
+      <p:ext uri="{BB962C8B-B14F-4D97-AF65-F5344CB8AC3E}">
         <p14:creationId xmlns:p14="http://schemas.microsoft.com/office/powerpoint/2010/main" val="4038510907"/>
       </p:ext>
     </p:extLst>
@@ -2242,7 +2352,7 @@
 </p:notes>
 </file>
 
-<file path=ppt/notesSlides/notesSlide21.xml><?xml version="1.0" encoding="utf-8"?>
+<file path=ppt/notesSlides/notesSlide22.xml><?xml version="1.0" encoding="utf-8"?>
 <p:notes xmlns:a="http://schemas.openxmlformats.org/drawingml/2006/main" xmlns:r="http://schemas.openxmlformats.org/officeDocument/2006/relationships" xmlns:p="http://schemas.openxmlformats.org/presentationml/2006/main" showMasterSp="0" showMasterPhAnim="0">
   <p:cSld>
     <p:spTree>
@@ -2346,7 +2456,7 @@
 </p:notes>
 </file>
 
-<file path=ppt/notesSlides/notesSlide22.xml><?xml version="1.0" encoding="utf-8"?>
+<file path=ppt/notesSlides/notesSlide23.xml><?xml version="1.0" encoding="utf-8"?>
 <p:notes xmlns:a="http://schemas.openxmlformats.org/drawingml/2006/main" xmlns:r="http://schemas.openxmlformats.org/officeDocument/2006/relationships" xmlns:p="http://schemas.openxmlformats.org/presentationml/2006/main" showMasterSp="0" showMasterPhAnim="0">
   <p:cSld>
     <p:spTree>
@@ -2450,7 +2560,7 @@
 </p:notes>
 </file>
 
-<file path=ppt/notesSlides/notesSlide23.xml><?xml version="1.0" encoding="utf-8"?>
+<file path=ppt/notesSlides/notesSlide24.xml><?xml version="1.0" encoding="utf-8"?>
 <p:notes xmlns:a="http://schemas.openxmlformats.org/drawingml/2006/main" xmlns:r="http://schemas.openxmlformats.org/officeDocument/2006/relationships" xmlns:p="http://schemas.openxmlformats.org/presentationml/2006/main" showMasterSp="0" showMasterPhAnim="0">
   <p:cSld>
     <p:spTree>
@@ -2554,7 +2664,7 @@
 </p:notes>
 </file>
 
-<file path=ppt/notesSlides/notesSlide24.xml><?xml version="1.0" encoding="utf-8"?>
+<file path=ppt/notesSlides/notesSlide25.xml><?xml version="1.0" encoding="utf-8"?>
 <p:notes xmlns:a="http://schemas.openxmlformats.org/drawingml/2006/main" xmlns:r="http://schemas.openxmlformats.org/officeDocument/2006/relationships" xmlns:p="http://schemas.openxmlformats.org/presentationml/2006/main" showMasterSp="0" showMasterPhAnim="0">
   <p:cSld>
     <p:spTree>
@@ -2658,7 +2768,7 @@
 </p:notes>
 </file>
 
-<file path=ppt/notesSlides/notesSlide25.xml><?xml version="1.0" encoding="utf-8"?>
+<file path=ppt/notesSlides/notesSlide26.xml><?xml version="1.0" encoding="utf-8"?>
 <p:notes xmlns:a="http://schemas.openxmlformats.org/drawingml/2006/main" xmlns:r="http://schemas.openxmlformats.org/officeDocument/2006/relationships" xmlns:p="http://schemas.openxmlformats.org/presentationml/2006/main" showMasterSp="0" showMasterPhAnim="0">
   <p:cSld>
     <p:spTree>
@@ -2762,7 +2872,7 @@
 </p:notes>
 </file>
 
-<file path=ppt/notesSlides/notesSlide26.xml><?xml version="1.0" encoding="utf-8"?>
+<file path=ppt/notesSlides/notesSlide27.xml><?xml version="1.0" encoding="utf-8"?>
 <p:notes xmlns:a="http://schemas.openxmlformats.org/drawingml/2006/main" xmlns:r="http://schemas.openxmlformats.org/officeDocument/2006/relationships" xmlns:p="http://schemas.openxmlformats.org/presentationml/2006/main" showMasterSp="0" showMasterPhAnim="0">
   <p:cSld>
     <p:spTree>
@@ -2866,7 +2976,7 @@
 </p:notes>
 </file>
 
-<file path=ppt/notesSlides/notesSlide27.xml><?xml version="1.0" encoding="utf-8"?>
+<file path=ppt/notesSlides/notesSlide28.xml><?xml version="1.0" encoding="utf-8"?>
 <p:notes xmlns:a="http://schemas.openxmlformats.org/drawingml/2006/main" xmlns:r="http://schemas.openxmlformats.org/officeDocument/2006/relationships" xmlns:p="http://schemas.openxmlformats.org/presentationml/2006/main" showMasterSp="0" showMasterPhAnim="0">
   <p:cSld>
     <p:spTree>
@@ -2970,7 +3080,7 @@
 </p:notes>
 </file>
 
-<file path=ppt/notesSlides/notesSlide28.xml><?xml version="1.0" encoding="utf-8"?>
+<file path=ppt/notesSlides/notesSlide29.xml><?xml version="1.0" encoding="utf-8"?>
 <p:notes xmlns:a="http://schemas.openxmlformats.org/drawingml/2006/main" xmlns:r="http://schemas.openxmlformats.org/officeDocument/2006/relationships" xmlns:p="http://schemas.openxmlformats.org/presentationml/2006/main" showMasterSp="0" showMasterPhAnim="0">
   <p:cSld>
     <p:spTree>
@@ -3292,6 +3402,110 @@
   <p:cSld>
     <p:spTree>
       <p:nvGrpSpPr>
+        <p:cNvPr id="1" name="Shape 146"/>
+        <p:cNvGrpSpPr/>
+        <p:nvPr/>
+      </p:nvGrpSpPr>
+      <p:grpSpPr>
+        <a:xfrm>
+          <a:off x="0" y="0"/>
+          <a:ext cx="0" cy="0"/>
+          <a:chOff x="0" y="0"/>
+          <a:chExt cx="0" cy="0"/>
+        </a:xfrm>
+      </p:grpSpPr>
+      <p:sp>
+        <p:nvSpPr>
+          <p:cNvPr id="147" name="Google Shape;147;g3dbe1710380_1_69:notes"/>
+          <p:cNvSpPr txBox="1">
+            <a:spLocks noGrp="1"/>
+          </p:cNvSpPr>
+          <p:nvPr>
+            <p:ph type="body" idx="1"/>
+          </p:nvPr>
+        </p:nvSpPr>
+        <p:spPr>
+          <a:xfrm>
+            <a:off x="685800" y="4343400"/>
+            <a:ext cx="5486400" cy="4114800"/>
+          </a:xfrm>
+          <a:prstGeom prst="rect">
+            <a:avLst/>
+          </a:prstGeom>
+        </p:spPr>
+        <p:txBody>
+          <a:bodyPr spcFirstLastPara="1" wrap="square" lIns="91425" tIns="91425" rIns="91425" bIns="91425" anchor="t" anchorCtr="0">
+            <a:noAutofit/>
+          </a:bodyPr>
+          <a:lstStyle/>
+          <a:p>
+            <a:pPr marL="0" lvl="0" indent="0" algn="l" rtl="0">
+              <a:spcBef>
+                <a:spcPts val="0"/>
+              </a:spcBef>
+              <a:spcAft>
+                <a:spcPts val="0"/>
+              </a:spcAft>
+              <a:buNone/>
+            </a:pPr>
+            <a:endParaRPr/>
+          </a:p>
+        </p:txBody>
+      </p:sp>
+      <p:sp>
+        <p:nvSpPr>
+          <p:cNvPr id="148" name="Google Shape;148;g3dbe1710380_1_69:notes"/>
+          <p:cNvSpPr>
+            <a:spLocks noGrp="1" noRot="1" noChangeAspect="1"/>
+          </p:cNvSpPr>
+          <p:nvPr>
+            <p:ph type="sldImg" idx="2"/>
+          </p:nvPr>
+        </p:nvSpPr>
+        <p:spPr>
+          <a:xfrm>
+            <a:off x="381000" y="685800"/>
+            <a:ext cx="6096000" cy="3429000"/>
+          </a:xfrm>
+          <a:custGeom>
+            <a:avLst/>
+            <a:gdLst/>
+            <a:ahLst/>
+            <a:cxnLst/>
+            <a:rect l="l" t="t" r="r" b="b"/>
+            <a:pathLst>
+              <a:path w="120000" h="120000" extrusionOk="0">
+                <a:moveTo>
+                  <a:pt x="0" y="0"/>
+                </a:moveTo>
+                <a:lnTo>
+                  <a:pt x="120000" y="0"/>
+                </a:lnTo>
+                <a:lnTo>
+                  <a:pt x="120000" y="120000"/>
+                </a:lnTo>
+                <a:lnTo>
+                  <a:pt x="0" y="120000"/>
+                </a:lnTo>
+                <a:close/>
+              </a:path>
+            </a:pathLst>
+          </a:custGeom>
+        </p:spPr>
+      </p:sp>
+    </p:spTree>
+  </p:cSld>
+  <p:clrMapOvr>
+    <a:masterClrMapping/>
+  </p:clrMapOvr>
+</p:notes>
+</file>
+
+<file path=ppt/notesSlides/notesSlide6.xml><?xml version="1.0" encoding="utf-8"?>
+<p:notes xmlns:a="http://schemas.openxmlformats.org/drawingml/2006/main" xmlns:r="http://schemas.openxmlformats.org/officeDocument/2006/relationships" xmlns:p="http://schemas.openxmlformats.org/presentationml/2006/main" showMasterSp="0" showMasterPhAnim="0">
+  <p:cSld>
+    <p:spTree>
+      <p:nvGrpSpPr>
         <p:cNvPr id="1" name="Shape 119"/>
         <p:cNvGrpSpPr/>
         <p:nvPr/>
@@ -3345,110 +3559,6 @@
       <p:sp>
         <p:nvSpPr>
           <p:cNvPr id="121" name="Google Shape;121;g3dbe1710380_1_211:notes"/>
-          <p:cNvSpPr>
-            <a:spLocks noGrp="1" noRot="1" noChangeAspect="1"/>
-          </p:cNvSpPr>
-          <p:nvPr>
-            <p:ph type="sldImg" idx="2"/>
-          </p:nvPr>
-        </p:nvSpPr>
-        <p:spPr>
-          <a:xfrm>
-            <a:off x="381000" y="685800"/>
-            <a:ext cx="6096000" cy="3429000"/>
-          </a:xfrm>
-          <a:custGeom>
-            <a:avLst/>
-            <a:gdLst/>
-            <a:ahLst/>
-            <a:cxnLst/>
-            <a:rect l="l" t="t" r="r" b="b"/>
-            <a:pathLst>
-              <a:path w="120000" h="120000" extrusionOk="0">
-                <a:moveTo>
-                  <a:pt x="0" y="0"/>
-                </a:moveTo>
-                <a:lnTo>
-                  <a:pt x="120000" y="0"/>
-                </a:lnTo>
-                <a:lnTo>
-                  <a:pt x="120000" y="120000"/>
-                </a:lnTo>
-                <a:lnTo>
-                  <a:pt x="0" y="120000"/>
-                </a:lnTo>
-                <a:close/>
-              </a:path>
-            </a:pathLst>
-          </a:custGeom>
-        </p:spPr>
-      </p:sp>
-    </p:spTree>
-  </p:cSld>
-  <p:clrMapOvr>
-    <a:masterClrMapping/>
-  </p:clrMapOvr>
-</p:notes>
-</file>
-
-<file path=ppt/notesSlides/notesSlide6.xml><?xml version="1.0" encoding="utf-8"?>
-<p:notes xmlns:a="http://schemas.openxmlformats.org/drawingml/2006/main" xmlns:r="http://schemas.openxmlformats.org/officeDocument/2006/relationships" xmlns:p="http://schemas.openxmlformats.org/presentationml/2006/main" showMasterSp="0" showMasterPhAnim="0">
-  <p:cSld>
-    <p:spTree>
-      <p:nvGrpSpPr>
-        <p:cNvPr id="1" name="Shape 135"/>
-        <p:cNvGrpSpPr/>
-        <p:nvPr/>
-      </p:nvGrpSpPr>
-      <p:grpSpPr>
-        <a:xfrm>
-          <a:off x="0" y="0"/>
-          <a:ext cx="0" cy="0"/>
-          <a:chOff x="0" y="0"/>
-          <a:chExt cx="0" cy="0"/>
-        </a:xfrm>
-      </p:grpSpPr>
-      <p:sp>
-        <p:nvSpPr>
-          <p:cNvPr id="136" name="Google Shape;136;p3:notes"/>
-          <p:cNvSpPr txBox="1">
-            <a:spLocks noGrp="1"/>
-          </p:cNvSpPr>
-          <p:nvPr>
-            <p:ph type="body" idx="1"/>
-          </p:nvPr>
-        </p:nvSpPr>
-        <p:spPr>
-          <a:xfrm>
-            <a:off x="685800" y="4343400"/>
-            <a:ext cx="5486400" cy="4114800"/>
-          </a:xfrm>
-          <a:prstGeom prst="rect">
-            <a:avLst/>
-          </a:prstGeom>
-        </p:spPr>
-        <p:txBody>
-          <a:bodyPr spcFirstLastPara="1" wrap="square" lIns="91425" tIns="91425" rIns="91425" bIns="91425" anchor="t" anchorCtr="0">
-            <a:noAutofit/>
-          </a:bodyPr>
-          <a:lstStyle/>
-          <a:p>
-            <a:pPr marL="0" lvl="0" indent="0" algn="l" rtl="0">
-              <a:spcBef>
-                <a:spcPts val="0"/>
-              </a:spcBef>
-              <a:spcAft>
-                <a:spcPts val="0"/>
-              </a:spcAft>
-              <a:buNone/>
-            </a:pPr>
-            <a:endParaRPr/>
-          </a:p>
-        </p:txBody>
-      </p:sp>
-      <p:sp>
-        <p:nvSpPr>
-          <p:cNvPr id="137" name="Google Shape;137;p3:notes"/>
           <p:cNvSpPr>
             <a:spLocks noGrp="1" noRot="1" noChangeAspect="1"/>
           </p:cNvSpPr>
@@ -3592,11 +3702,6 @@
         </p:spPr>
       </p:sp>
     </p:spTree>
-    <p:extLst>
-      <p:ext uri="{BB962C8B-B14F-4D97-AF65-F5344CB8AC3E}">
-        <p14:creationId xmlns:p14="http://schemas.microsoft.com/office/powerpoint/2010/main" val="3541165483"/>
-      </p:ext>
-    </p:extLst>
   </p:cSld>
   <p:clrMapOvr>
     <a:masterClrMapping/>
@@ -3703,7 +3808,7 @@
     </p:spTree>
     <p:extLst>
       <p:ext uri="{BB962C8B-B14F-4D97-AF65-F5344CB8AC3E}">
-        <p14:creationId xmlns:p14="http://schemas.microsoft.com/office/powerpoint/2010/main" val="4104036851"/>
+        <p14:creationId xmlns:p14="http://schemas.microsoft.com/office/powerpoint/2010/main" val="3541165483"/>
       </p:ext>
     </p:extLst>
   </p:cSld>
@@ -3812,7 +3917,7 @@
     </p:spTree>
     <p:extLst>
       <p:ext uri="{BB962C8B-B14F-4D97-AF65-F5344CB8AC3E}">
-        <p14:creationId xmlns:p14="http://schemas.microsoft.com/office/powerpoint/2010/main" val="739215490"/>
+        <p14:creationId xmlns:p14="http://schemas.microsoft.com/office/powerpoint/2010/main" val="4104036851"/>
       </p:ext>
     </p:extLst>
   </p:cSld>
@@ -14193,19 +14298,7 @@
                 <a:cs typeface="Poppins"/>
                 <a:sym typeface="Poppins"/>
               </a:rPr>
-              <a:t>Tendencias de </a:t>
-            </a:r>
-            <a:r>
-              <a:rPr lang="es-ES_tradnl" sz="6000" b="1">
-                <a:solidFill>
-                  <a:srgbClr val="004AAD"/>
-                </a:solidFill>
-                <a:latin typeface="Poppins"/>
-                <a:ea typeface="Poppins"/>
-                <a:cs typeface="Poppins"/>
-                <a:sym typeface="Poppins"/>
-              </a:rPr>
-              <a:t>Formación Laboral</a:t>
+              <a:t>Tendencias de Formación Laboral</a:t>
             </a:r>
           </a:p>
           <a:p>
@@ -14439,10 +14532,10 @@
       </p:sp>
       <p:pic>
         <p:nvPicPr>
-          <p:cNvPr id="3" name="Imatge 2">
+          <p:cNvPr id="4" name="Imatge 3">
             <a:extLst>
               <a:ext uri="{FF2B5EF4-FFF2-40B4-BE49-F238E27FC236}">
-                <a16:creationId xmlns:a16="http://schemas.microsoft.com/office/drawing/2014/main" id="{0B9CE290-D1C1-4189-9E21-0E59FAC078F3}"/>
+                <a16:creationId xmlns:a16="http://schemas.microsoft.com/office/drawing/2014/main" id="{42D5B2CC-4A8D-4CDB-8063-732212E764BB}"/>
               </a:ext>
             </a:extLst>
           </p:cNvPr>
@@ -14459,8 +14552,8 @@
         </p:blipFill>
         <p:spPr>
           <a:xfrm>
-            <a:off x="371483" y="1137967"/>
-            <a:ext cx="13299546" cy="9104063"/>
+            <a:off x="2714395" y="1275255"/>
+            <a:ext cx="10200871" cy="8929706"/>
           </a:xfrm>
           <a:prstGeom prst="rect">
             <a:avLst/>
@@ -14514,7 +14607,7 @@
                 <a:cs typeface="Poppins"/>
                 <a:sym typeface="Poppins"/>
               </a:rPr>
-              <a:t>Análisis por </a:t>
+              <a:t>Análisis </a:t>
             </a:r>
             <a:r>
               <a:rPr lang="es-ES_tradnl" sz="3601" b="1" dirty="0">
@@ -14526,7 +14619,7 @@
                 <a:cs typeface="Poppins"/>
                 <a:sym typeface="Poppins"/>
               </a:rPr>
-              <a:t>C</a:t>
+              <a:t>por</a:t>
             </a:r>
             <a:r>
               <a:rPr lang="es-ES_tradnl" sz="3601" b="1" i="0" u="none" strike="noStrike" cap="none" dirty="0">
@@ -14538,31 +14631,7 @@
                 <a:cs typeface="Poppins"/>
                 <a:sym typeface="Poppins"/>
               </a:rPr>
-              <a:t>omunidad </a:t>
-            </a:r>
-            <a:r>
-              <a:rPr lang="es-ES_tradnl" sz="3601" b="1" dirty="0">
-                <a:solidFill>
-                  <a:srgbClr val="004AAD"/>
-                </a:solidFill>
-                <a:latin typeface="Poppins"/>
-                <a:ea typeface="Poppins"/>
-                <a:cs typeface="Poppins"/>
-                <a:sym typeface="Poppins"/>
-              </a:rPr>
-              <a:t>A</a:t>
-            </a:r>
-            <a:r>
-              <a:rPr lang="es-ES_tradnl" sz="3601" b="1" i="0" u="none" strike="noStrike" cap="none" dirty="0">
-                <a:solidFill>
-                  <a:srgbClr val="004AAD"/>
-                </a:solidFill>
-                <a:latin typeface="Poppins"/>
-                <a:ea typeface="Poppins"/>
-                <a:cs typeface="Poppins"/>
-                <a:sym typeface="Poppins"/>
-              </a:rPr>
-              <a:t>utónoma</a:t>
+              <a:t> sector económico</a:t>
             </a:r>
             <a:endParaRPr lang="es-ES_tradnl" dirty="0"/>
           </a:p>
@@ -14703,9 +14772,9 @@
           <p:nvPr/>
         </p:nvSpPr>
         <p:spPr>
-          <a:xfrm>
-            <a:off x="2848133" y="4337802"/>
-            <a:ext cx="9773586" cy="365760"/>
+          <a:xfrm rot="5400000">
+            <a:off x="5260632" y="2354376"/>
+            <a:ext cx="2598821" cy="1034324"/>
           </a:xfrm>
           <a:prstGeom prst="roundRect">
             <a:avLst/>
@@ -14749,7 +14818,7 @@
           <p:cNvPr id="10" name="QuadreDeText 9">
             <a:extLst>
               <a:ext uri="{FF2B5EF4-FFF2-40B4-BE49-F238E27FC236}">
-                <a16:creationId xmlns:a16="http://schemas.microsoft.com/office/drawing/2014/main" id="{78EA8AD0-7D3A-4D72-BC07-3134E7C59809}"/>
+                <a16:creationId xmlns:a16="http://schemas.microsoft.com/office/drawing/2014/main" id="{BFD99AF1-9DAA-451E-83AF-1058AB19BE6B}"/>
               </a:ext>
             </a:extLst>
           </p:cNvPr>
@@ -14758,7 +14827,7 @@
         </p:nvSpPr>
         <p:spPr>
           <a:xfrm>
-            <a:off x="12037101" y="9762696"/>
+            <a:off x="11587397" y="9295283"/>
             <a:ext cx="9173980" cy="307777"/>
           </a:xfrm>
           <a:prstGeom prst="rect">
@@ -14786,10 +14855,64 @@
           </a:p>
         </p:txBody>
       </p:sp>
+      <p:sp>
+        <p:nvSpPr>
+          <p:cNvPr id="12" name="Rectángulo redondeado 4">
+            <a:extLst>
+              <a:ext uri="{FF2B5EF4-FFF2-40B4-BE49-F238E27FC236}">
+                <a16:creationId xmlns:a16="http://schemas.microsoft.com/office/drawing/2014/main" id="{EBBBF2B7-0BAE-486F-B9FD-CBE0F700B7FD}"/>
+              </a:ext>
+            </a:extLst>
+          </p:cNvPr>
+          <p:cNvSpPr/>
+          <p:nvPr/>
+        </p:nvSpPr>
+        <p:spPr>
+          <a:xfrm rot="5400000">
+            <a:off x="5284696" y="5266018"/>
+            <a:ext cx="2598821" cy="1034324"/>
+          </a:xfrm>
+          <a:prstGeom prst="roundRect">
+            <a:avLst/>
+          </a:prstGeom>
+          <a:noFill/>
+          <a:ln w="28575">
+            <a:solidFill>
+              <a:schemeClr val="accent6">
+                <a:lumMod val="75000"/>
+              </a:schemeClr>
+            </a:solidFill>
+          </a:ln>
+        </p:spPr>
+        <p:style>
+          <a:lnRef idx="2">
+            <a:schemeClr val="accent1">
+              <a:shade val="15000"/>
+            </a:schemeClr>
+          </a:lnRef>
+          <a:fillRef idx="1">
+            <a:schemeClr val="accent1"/>
+          </a:fillRef>
+          <a:effectRef idx="0">
+            <a:schemeClr val="accent1"/>
+          </a:effectRef>
+          <a:fontRef idx="minor">
+            <a:schemeClr val="lt1"/>
+          </a:fontRef>
+        </p:style>
+        <p:txBody>
+          <a:bodyPr rtlCol="0" anchor="ctr"/>
+          <a:lstStyle/>
+          <a:p>
+            <a:pPr algn="ctr"/>
+            <a:endParaRPr lang="es-ES"/>
+          </a:p>
+        </p:txBody>
+      </p:sp>
     </p:spTree>
     <p:extLst>
       <p:ext uri="{BB962C8B-B14F-4D97-AF65-F5344CB8AC3E}">
-        <p14:creationId xmlns:p14="http://schemas.microsoft.com/office/powerpoint/2010/main" val="2184726870"/>
+        <p14:creationId xmlns:p14="http://schemas.microsoft.com/office/powerpoint/2010/main" val="1860337386"/>
       </p:ext>
     </p:extLst>
   </p:cSld>
@@ -14890,10 +15013,10 @@
       </p:sp>
       <p:pic>
         <p:nvPicPr>
-          <p:cNvPr id="4" name="Imatge 3">
+          <p:cNvPr id="3" name="Imatge 2">
             <a:extLst>
               <a:ext uri="{FF2B5EF4-FFF2-40B4-BE49-F238E27FC236}">
-                <a16:creationId xmlns:a16="http://schemas.microsoft.com/office/drawing/2014/main" id="{5350F70C-B643-4590-B86F-BF44DB0AF4C2}"/>
+                <a16:creationId xmlns:a16="http://schemas.microsoft.com/office/drawing/2014/main" id="{0B9CE290-D1C1-4189-9E21-0E59FAC078F3}"/>
               </a:ext>
             </a:extLst>
           </p:cNvPr>
@@ -14910,8 +15033,8 @@
         </p:blipFill>
         <p:spPr>
           <a:xfrm>
-            <a:off x="534994" y="1452208"/>
-            <a:ext cx="14763064" cy="8820277"/>
+            <a:off x="371483" y="1137967"/>
+            <a:ext cx="13299546" cy="9104063"/>
           </a:xfrm>
           <a:prstGeom prst="rect">
             <a:avLst/>
@@ -15155,6 +15278,457 @@
         </p:nvSpPr>
         <p:spPr>
           <a:xfrm>
+            <a:off x="2848133" y="4337802"/>
+            <a:ext cx="9773586" cy="365760"/>
+          </a:xfrm>
+          <a:prstGeom prst="roundRect">
+            <a:avLst/>
+          </a:prstGeom>
+          <a:noFill/>
+          <a:ln w="28575">
+            <a:solidFill>
+              <a:schemeClr val="accent6">
+                <a:lumMod val="75000"/>
+              </a:schemeClr>
+            </a:solidFill>
+          </a:ln>
+        </p:spPr>
+        <p:style>
+          <a:lnRef idx="2">
+            <a:schemeClr val="accent1">
+              <a:shade val="15000"/>
+            </a:schemeClr>
+          </a:lnRef>
+          <a:fillRef idx="1">
+            <a:schemeClr val="accent1"/>
+          </a:fillRef>
+          <a:effectRef idx="0">
+            <a:schemeClr val="accent1"/>
+          </a:effectRef>
+          <a:fontRef idx="minor">
+            <a:schemeClr val="lt1"/>
+          </a:fontRef>
+        </p:style>
+        <p:txBody>
+          <a:bodyPr rtlCol="0" anchor="ctr"/>
+          <a:lstStyle/>
+          <a:p>
+            <a:pPr algn="ctr"/>
+            <a:endParaRPr lang="es-ES"/>
+          </a:p>
+        </p:txBody>
+      </p:sp>
+      <p:sp>
+        <p:nvSpPr>
+          <p:cNvPr id="10" name="QuadreDeText 9">
+            <a:extLst>
+              <a:ext uri="{FF2B5EF4-FFF2-40B4-BE49-F238E27FC236}">
+                <a16:creationId xmlns:a16="http://schemas.microsoft.com/office/drawing/2014/main" id="{78EA8AD0-7D3A-4D72-BC07-3134E7C59809}"/>
+              </a:ext>
+            </a:extLst>
+          </p:cNvPr>
+          <p:cNvSpPr txBox="1"/>
+          <p:nvPr/>
+        </p:nvSpPr>
+        <p:spPr>
+          <a:xfrm>
+            <a:off x="12037101" y="9762696"/>
+            <a:ext cx="9173980" cy="307777"/>
+          </a:xfrm>
+          <a:prstGeom prst="rect">
+            <a:avLst/>
+          </a:prstGeom>
+          <a:noFill/>
+        </p:spPr>
+        <p:txBody>
+          <a:bodyPr wrap="square">
+            <a:spAutoFit/>
+          </a:bodyPr>
+          <a:lstStyle/>
+          <a:p>
+            <a:r>
+              <a:rPr lang="es-ES" dirty="0"/>
+              <a:t>Fuente: </a:t>
+            </a:r>
+            <a:r>
+              <a:rPr lang="es-ES" dirty="0">
+                <a:hlinkClick r:id="rId6"/>
+              </a:rPr>
+              <a:t>Encuesta Anual Laboral. Ministerio de Trabajo y Economía Social</a:t>
+            </a:r>
+            <a:endParaRPr lang="es-ES" dirty="0"/>
+          </a:p>
+        </p:txBody>
+      </p:sp>
+    </p:spTree>
+    <p:extLst>
+      <p:ext uri="{BB962C8B-B14F-4D97-AF65-F5344CB8AC3E}">
+        <p14:creationId xmlns:p14="http://schemas.microsoft.com/office/powerpoint/2010/main" val="2184726870"/>
+      </p:ext>
+    </p:extLst>
+  </p:cSld>
+  <p:clrMapOvr>
+    <a:masterClrMapping/>
+  </p:clrMapOvr>
+</p:sld>
+</file>
+
+<file path=ppt/slides/slide12.xml><?xml version="1.0" encoding="utf-8"?>
+<p:sld xmlns:a="http://schemas.openxmlformats.org/drawingml/2006/main" xmlns:r="http://schemas.openxmlformats.org/officeDocument/2006/relationships" xmlns:p="http://schemas.openxmlformats.org/presentationml/2006/main">
+  <p:cSld>
+    <p:bg>
+      <p:bgPr>
+        <a:solidFill>
+          <a:srgbClr val="E0E9F9"/>
+        </a:solidFill>
+        <a:effectLst/>
+      </p:bgPr>
+    </p:bg>
+    <p:spTree>
+      <p:nvGrpSpPr>
+        <p:cNvPr id="1" name="Shape 138"/>
+        <p:cNvGrpSpPr/>
+        <p:nvPr/>
+      </p:nvGrpSpPr>
+      <p:grpSpPr>
+        <a:xfrm>
+          <a:off x="0" y="0"/>
+          <a:ext cx="0" cy="0"/>
+          <a:chOff x="0" y="0"/>
+          <a:chExt cx="0" cy="0"/>
+        </a:xfrm>
+      </p:grpSpPr>
+      <p:sp>
+        <p:nvSpPr>
+          <p:cNvPr id="11" name="Google Shape;150;p17">
+            <a:extLst>
+              <a:ext uri="{FF2B5EF4-FFF2-40B4-BE49-F238E27FC236}">
+                <a16:creationId xmlns:a16="http://schemas.microsoft.com/office/drawing/2014/main" id="{DC31FCA6-E624-4F0D-9CEA-5147EAFF7540}"/>
+              </a:ext>
+            </a:extLst>
+          </p:cNvPr>
+          <p:cNvSpPr/>
+          <p:nvPr/>
+        </p:nvSpPr>
+        <p:spPr>
+          <a:xfrm>
+            <a:off x="13727091" y="2555717"/>
+            <a:ext cx="4065560" cy="5646612"/>
+          </a:xfrm>
+          <a:custGeom>
+            <a:avLst/>
+            <a:gdLst/>
+            <a:ahLst/>
+            <a:cxnLst/>
+            <a:rect l="l" t="t" r="r" b="b"/>
+            <a:pathLst>
+              <a:path w="6557355" h="9107438" extrusionOk="0">
+                <a:moveTo>
+                  <a:pt x="0" y="0"/>
+                </a:moveTo>
+                <a:lnTo>
+                  <a:pt x="6557355" y="0"/>
+                </a:lnTo>
+                <a:lnTo>
+                  <a:pt x="6557355" y="9107438"/>
+                </a:lnTo>
+                <a:lnTo>
+                  <a:pt x="0" y="9107438"/>
+                </a:lnTo>
+                <a:lnTo>
+                  <a:pt x="0" y="0"/>
+                </a:lnTo>
+                <a:close/>
+              </a:path>
+            </a:pathLst>
+          </a:custGeom>
+          <a:blipFill rotWithShape="1">
+            <a:blip r:embed="rId3">
+              <a:alphaModFix/>
+            </a:blip>
+            <a:stretch>
+              <a:fillRect/>
+            </a:stretch>
+          </a:blipFill>
+          <a:ln>
+            <a:noFill/>
+          </a:ln>
+        </p:spPr>
+        <p:txBody>
+          <a:bodyPr/>
+          <a:lstStyle/>
+          <a:p>
+            <a:endParaRPr lang="es-ES_tradnl" dirty="0"/>
+          </a:p>
+        </p:txBody>
+      </p:sp>
+      <p:pic>
+        <p:nvPicPr>
+          <p:cNvPr id="4" name="Imatge 3">
+            <a:extLst>
+              <a:ext uri="{FF2B5EF4-FFF2-40B4-BE49-F238E27FC236}">
+                <a16:creationId xmlns:a16="http://schemas.microsoft.com/office/drawing/2014/main" id="{5350F70C-B643-4590-B86F-BF44DB0AF4C2}"/>
+              </a:ext>
+            </a:extLst>
+          </p:cNvPr>
+          <p:cNvPicPr>
+            <a:picLocks noChangeAspect="1"/>
+          </p:cNvPicPr>
+          <p:nvPr/>
+        </p:nvPicPr>
+        <p:blipFill>
+          <a:blip r:embed="rId4"/>
+          <a:stretch>
+            <a:fillRect/>
+          </a:stretch>
+        </p:blipFill>
+        <p:spPr>
+          <a:xfrm>
+            <a:off x="534994" y="1452208"/>
+            <a:ext cx="14763064" cy="8820277"/>
+          </a:xfrm>
+          <a:prstGeom prst="rect">
+            <a:avLst/>
+          </a:prstGeom>
+        </p:spPr>
+      </p:pic>
+      <p:sp>
+        <p:nvSpPr>
+          <p:cNvPr id="142" name="Google Shape;142;p16"/>
+          <p:cNvSpPr txBox="1"/>
+          <p:nvPr/>
+        </p:nvSpPr>
+        <p:spPr>
+          <a:xfrm>
+            <a:off x="4000546" y="524304"/>
+            <a:ext cx="9594965" cy="670505"/>
+          </a:xfrm>
+          <a:prstGeom prst="rect">
+            <a:avLst/>
+          </a:prstGeom>
+          <a:noFill/>
+          <a:ln>
+            <a:noFill/>
+          </a:ln>
+        </p:spPr>
+        <p:txBody>
+          <a:bodyPr spcFirstLastPara="1" wrap="square" lIns="0" tIns="0" rIns="0" bIns="0" anchor="t" anchorCtr="0">
+            <a:spAutoFit/>
+          </a:bodyPr>
+          <a:lstStyle/>
+          <a:p>
+            <a:pPr marL="0" marR="0" lvl="0" indent="0" algn="l" rtl="0">
+              <a:lnSpc>
+                <a:spcPct val="121055"/>
+              </a:lnSpc>
+              <a:spcBef>
+                <a:spcPts val="0"/>
+              </a:spcBef>
+              <a:spcAft>
+                <a:spcPts val="0"/>
+              </a:spcAft>
+              <a:buNone/>
+            </a:pPr>
+            <a:r>
+              <a:rPr lang="es-ES_tradnl" sz="3601" b="1" i="0" u="none" strike="noStrike" cap="none" dirty="0">
+                <a:solidFill>
+                  <a:srgbClr val="004AAD"/>
+                </a:solidFill>
+                <a:latin typeface="Poppins"/>
+                <a:ea typeface="Poppins"/>
+                <a:cs typeface="Poppins"/>
+                <a:sym typeface="Poppins"/>
+              </a:rPr>
+              <a:t>Análisis por </a:t>
+            </a:r>
+            <a:r>
+              <a:rPr lang="es-ES_tradnl" sz="3601" b="1" dirty="0">
+                <a:solidFill>
+                  <a:srgbClr val="004AAD"/>
+                </a:solidFill>
+                <a:latin typeface="Poppins"/>
+                <a:ea typeface="Poppins"/>
+                <a:cs typeface="Poppins"/>
+                <a:sym typeface="Poppins"/>
+              </a:rPr>
+              <a:t>C</a:t>
+            </a:r>
+            <a:r>
+              <a:rPr lang="es-ES_tradnl" sz="3601" b="1" i="0" u="none" strike="noStrike" cap="none" dirty="0">
+                <a:solidFill>
+                  <a:srgbClr val="004AAD"/>
+                </a:solidFill>
+                <a:latin typeface="Poppins"/>
+                <a:ea typeface="Poppins"/>
+                <a:cs typeface="Poppins"/>
+                <a:sym typeface="Poppins"/>
+              </a:rPr>
+              <a:t>omunidad </a:t>
+            </a:r>
+            <a:r>
+              <a:rPr lang="es-ES_tradnl" sz="3601" b="1" dirty="0">
+                <a:solidFill>
+                  <a:srgbClr val="004AAD"/>
+                </a:solidFill>
+                <a:latin typeface="Poppins"/>
+                <a:ea typeface="Poppins"/>
+                <a:cs typeface="Poppins"/>
+                <a:sym typeface="Poppins"/>
+              </a:rPr>
+              <a:t>A</a:t>
+            </a:r>
+            <a:r>
+              <a:rPr lang="es-ES_tradnl" sz="3601" b="1" i="0" u="none" strike="noStrike" cap="none" dirty="0">
+                <a:solidFill>
+                  <a:srgbClr val="004AAD"/>
+                </a:solidFill>
+                <a:latin typeface="Poppins"/>
+                <a:ea typeface="Poppins"/>
+                <a:cs typeface="Poppins"/>
+                <a:sym typeface="Poppins"/>
+              </a:rPr>
+              <a:t>utónoma</a:t>
+            </a:r>
+            <a:endParaRPr lang="es-ES_tradnl" dirty="0"/>
+          </a:p>
+        </p:txBody>
+      </p:sp>
+      <p:grpSp>
+        <p:nvGrpSpPr>
+          <p:cNvPr id="143" name="Google Shape;143;p16"/>
+          <p:cNvGrpSpPr/>
+          <p:nvPr/>
+        </p:nvGrpSpPr>
+        <p:grpSpPr>
+          <a:xfrm>
+            <a:off x="0" y="5"/>
+            <a:ext cx="2163413" cy="1886345"/>
+            <a:chOff x="12784175" y="3675030"/>
+            <a:chExt cx="2163413" cy="1886345"/>
+          </a:xfrm>
+        </p:grpSpPr>
+        <p:sp>
+          <p:nvSpPr>
+            <p:cNvPr id="144" name="Google Shape;144;p16"/>
+            <p:cNvSpPr txBox="1"/>
+            <p:nvPr/>
+          </p:nvSpPr>
+          <p:spPr>
+            <a:xfrm rot="1830973">
+              <a:off x="12805773" y="4425496"/>
+              <a:ext cx="2081405" cy="652657"/>
+            </a:xfrm>
+            <a:prstGeom prst="rect">
+              <a:avLst/>
+            </a:prstGeom>
+            <a:noFill/>
+            <a:ln>
+              <a:noFill/>
+            </a:ln>
+          </p:spPr>
+          <p:txBody>
+            <a:bodyPr spcFirstLastPara="1" wrap="square" lIns="91425" tIns="91425" rIns="91425" bIns="91425" anchor="t" anchorCtr="0">
+              <a:noAutofit/>
+            </a:bodyPr>
+            <a:lstStyle/>
+            <a:p>
+              <a:pPr marL="0" lvl="0" indent="0" algn="l" rtl="0">
+                <a:spcBef>
+                  <a:spcPts val="0"/>
+                </a:spcBef>
+                <a:spcAft>
+                  <a:spcPts val="0"/>
+                </a:spcAft>
+                <a:buNone/>
+              </a:pPr>
+              <a:r>
+                <a:rPr lang="es-ES_tradnl" sz="2300" b="1" i="1" dirty="0">
+                  <a:solidFill>
+                    <a:srgbClr val="E69138"/>
+                  </a:solidFill>
+                  <a:latin typeface="Calibri"/>
+                  <a:ea typeface="Calibri"/>
+                  <a:cs typeface="Calibri"/>
+                  <a:sym typeface="Calibri"/>
+                </a:rPr>
+                <a:t>RAPID EXPRESS </a:t>
+              </a:r>
+            </a:p>
+          </p:txBody>
+        </p:sp>
+        <p:sp>
+          <p:nvSpPr>
+            <p:cNvPr id="145" name="Google Shape;145;p16"/>
+            <p:cNvSpPr/>
+            <p:nvPr/>
+          </p:nvSpPr>
+          <p:spPr>
+            <a:xfrm>
+              <a:off x="13335203" y="3675030"/>
+              <a:ext cx="1612385" cy="1275250"/>
+            </a:xfrm>
+            <a:custGeom>
+              <a:avLst/>
+              <a:gdLst/>
+              <a:ahLst/>
+              <a:cxnLst/>
+              <a:rect l="l" t="t" r="r" b="b"/>
+              <a:pathLst>
+                <a:path w="1612385" h="1275250" extrusionOk="0">
+                  <a:moveTo>
+                    <a:pt x="0" y="0"/>
+                  </a:moveTo>
+                  <a:lnTo>
+                    <a:pt x="1612384" y="0"/>
+                  </a:lnTo>
+                  <a:lnTo>
+                    <a:pt x="1612384" y="1275249"/>
+                  </a:lnTo>
+                  <a:lnTo>
+                    <a:pt x="0" y="1275249"/>
+                  </a:lnTo>
+                  <a:lnTo>
+                    <a:pt x="0" y="0"/>
+                  </a:lnTo>
+                  <a:close/>
+                </a:path>
+              </a:pathLst>
+            </a:custGeom>
+            <a:blipFill rotWithShape="1">
+              <a:blip r:embed="rId5">
+                <a:alphaModFix/>
+              </a:blip>
+              <a:stretch>
+                <a:fillRect/>
+              </a:stretch>
+            </a:blipFill>
+            <a:ln>
+              <a:noFill/>
+            </a:ln>
+          </p:spPr>
+          <p:txBody>
+            <a:bodyPr/>
+            <a:lstStyle/>
+            <a:p>
+              <a:endParaRPr lang="es-ES_tradnl" dirty="0"/>
+            </a:p>
+          </p:txBody>
+        </p:sp>
+      </p:grpSp>
+      <p:sp>
+        <p:nvSpPr>
+          <p:cNvPr id="5" name="Rectángulo redondeado 4">
+            <a:extLst>
+              <a:ext uri="{FF2B5EF4-FFF2-40B4-BE49-F238E27FC236}">
+                <a16:creationId xmlns:a16="http://schemas.microsoft.com/office/drawing/2014/main" id="{4662BFC3-4DAD-4767-15A8-BAC1AD191C5D}"/>
+              </a:ext>
+            </a:extLst>
+          </p:cNvPr>
+          <p:cNvSpPr/>
+          <p:nvPr/>
+        </p:nvSpPr>
+        <p:spPr>
+          <a:xfrm>
             <a:off x="2964245" y="4381344"/>
             <a:ext cx="11521011" cy="365760"/>
           </a:xfrm>
@@ -15208,7 +15782,7 @@
 </p:sld>
 </file>
 
-<file path=ppt/slides/slide12.xml><?xml version="1.0" encoding="utf-8"?>
+<file path=ppt/slides/slide13.xml><?xml version="1.0" encoding="utf-8"?>
 <p:sld xmlns:a="http://schemas.openxmlformats.org/drawingml/2006/main" xmlns:r="http://schemas.openxmlformats.org/officeDocument/2006/relationships" xmlns:p="http://schemas.openxmlformats.org/presentationml/2006/main">
   <p:cSld>
     <p:bg>
@@ -15605,7 +16179,7 @@
 </p:sld>
 </file>
 
-<file path=ppt/slides/slide13.xml><?xml version="1.0" encoding="utf-8"?>
+<file path=ppt/slides/slide14.xml><?xml version="1.0" encoding="utf-8"?>
 <p:sld xmlns:a="http://schemas.openxmlformats.org/drawingml/2006/main" xmlns:r="http://schemas.openxmlformats.org/officeDocument/2006/relationships" xmlns:p="http://schemas.openxmlformats.org/presentationml/2006/main">
   <p:cSld>
     <p:bg>
@@ -16141,7 +16715,7 @@
         <p:spPr>
           <a:xfrm>
             <a:off x="1357220" y="2067019"/>
-            <a:ext cx="5989500" cy="2011513"/>
+            <a:ext cx="5989500" cy="1341008"/>
           </a:xfrm>
           <a:prstGeom prst="rect">
             <a:avLst/>
@@ -16179,7 +16753,7 @@
                 <a:cs typeface="Poppins"/>
                 <a:sym typeface="Poppins"/>
               </a:rPr>
-              <a:t>ESTRATEGIAS DE FORMACIÓNES ORGANIZACIONALES</a:t>
+              <a:t>ESTRATEGIA DE FORMACIÓN 70-20-10</a:t>
             </a:r>
             <a:endParaRPr lang="es-ES_tradnl" dirty="0"/>
           </a:p>
@@ -16200,7 +16774,7 @@
         <p:spPr>
           <a:xfrm>
             <a:off x="10393716" y="2031037"/>
-            <a:ext cx="5989502" cy="878959"/>
+            <a:ext cx="5989502" cy="439479"/>
           </a:xfrm>
           <a:prstGeom prst="rect">
             <a:avLst/>
@@ -16229,16 +16803,15 @@
               <a:buNone/>
             </a:pPr>
             <a:r>
-              <a:rPr lang="es-ES_tradnl" sz="2400" b="1" i="0" u="none" strike="noStrike" cap="none" dirty="0">
+              <a:rPr lang="es-ES_tradnl" sz="2400" b="1" dirty="0">
                 <a:solidFill>
                   <a:srgbClr val="004AAD"/>
                 </a:solidFill>
                 <a:latin typeface="Poppins"/>
-                <a:ea typeface="Poppins"/>
                 <a:cs typeface="Poppins"/>
                 <a:sym typeface="Poppins"/>
               </a:rPr>
-              <a:t>APLANAMIENTO DE LA CURVA DE TRABAJO</a:t>
+              <a:t>70% APRENDER TRABAJANDO</a:t>
             </a:r>
             <a:endParaRPr lang="es-ES_tradnl" dirty="0"/>
           </a:p>
@@ -16288,18 +16861,35 @@
               <a:buNone/>
             </a:pPr>
             <a:r>
-              <a:rPr lang="es-ES_tradnl" sz="2400" b="1" i="0" u="none" strike="noStrike" cap="none" dirty="0">
+              <a:rPr lang="es-ES_tradnl" sz="2400" b="1" dirty="0">
                 <a:solidFill>
                   <a:srgbClr val="004AAD"/>
                 </a:solidFill>
                 <a:latin typeface="Poppins"/>
-                <a:ea typeface="Poppins"/>
                 <a:cs typeface="Poppins"/>
                 <a:sym typeface="Poppins"/>
               </a:rPr>
-              <a:t>PLANIFICACIÓN ESTACIONAL</a:t>
+              <a:t>20% APRENDER DE </a:t>
             </a:r>
-            <a:endParaRPr lang="es-ES_tradnl" dirty="0"/>
+            <a:r>
+              <a:rPr lang="es-ES_tradnl" sz="2400" b="1">
+                <a:solidFill>
+                  <a:srgbClr val="004AAD"/>
+                </a:solidFill>
+                <a:latin typeface="Poppins"/>
+                <a:cs typeface="Poppins"/>
+                <a:sym typeface="Poppins"/>
+              </a:rPr>
+              <a:t>OTROS </a:t>
+            </a:r>
+            <a:endParaRPr lang="es-ES_tradnl" sz="2400" b="1" dirty="0">
+              <a:solidFill>
+                <a:srgbClr val="004AAD"/>
+              </a:solidFill>
+              <a:latin typeface="Poppins"/>
+              <a:cs typeface="Poppins"/>
+              <a:sym typeface="Poppins"/>
+            </a:endParaRPr>
           </a:p>
         </p:txBody>
       </p:sp>
@@ -16347,16 +16937,15 @@
               <a:buNone/>
             </a:pPr>
             <a:r>
-              <a:rPr lang="es-ES_tradnl" sz="2400" b="1" i="0" u="none" strike="noStrike" cap="none" dirty="0">
+              <a:rPr lang="es-ES_tradnl" sz="2400" b="1" dirty="0">
                 <a:solidFill>
                   <a:srgbClr val="004AAD"/>
                 </a:solidFill>
                 <a:latin typeface="Poppins"/>
-                <a:ea typeface="Poppins"/>
                 <a:cs typeface="Poppins"/>
                 <a:sym typeface="Poppins"/>
               </a:rPr>
-              <a:t>DESMITIFICACIÓN DE LA ANTIGÜEDAD</a:t>
+              <a:t>10% FORMACIÓN FORMAL</a:t>
             </a:r>
             <a:endParaRPr lang="es-ES_tradnl" dirty="0"/>
           </a:p>
@@ -16566,6 +17155,44 @@
           </a:p>
         </p:txBody>
       </p:sp>
+      <p:sp>
+        <p:nvSpPr>
+          <p:cNvPr id="21" name="QuadreDeText 20">
+            <a:extLst>
+              <a:ext uri="{FF2B5EF4-FFF2-40B4-BE49-F238E27FC236}">
+                <a16:creationId xmlns:a16="http://schemas.microsoft.com/office/drawing/2014/main" id="{9DFD7447-688C-4313-A7DB-F0BBD3A18814}"/>
+              </a:ext>
+            </a:extLst>
+          </p:cNvPr>
+          <p:cNvSpPr txBox="1"/>
+          <p:nvPr/>
+        </p:nvSpPr>
+        <p:spPr>
+          <a:xfrm>
+            <a:off x="3437792" y="5481981"/>
+            <a:ext cx="9900138" cy="307777"/>
+          </a:xfrm>
+          <a:prstGeom prst="rect">
+            <a:avLst/>
+          </a:prstGeom>
+          <a:noFill/>
+        </p:spPr>
+        <p:txBody>
+          <a:bodyPr wrap="square">
+            <a:spAutoFit/>
+          </a:bodyPr>
+          <a:lstStyle/>
+          <a:p>
+            <a:r>
+              <a:rPr lang="en-US" dirty="0">
+                <a:hlinkClick r:id="rId6"/>
+              </a:rPr>
+              <a:t>Developing Better Leaders For All Things Humanly Possible | CCL</a:t>
+            </a:r>
+            <a:endParaRPr lang="es-ES" dirty="0"/>
+          </a:p>
+        </p:txBody>
+      </p:sp>
     </p:spTree>
     <p:extLst>
       <p:ext uri="{BB962C8B-B14F-4D97-AF65-F5344CB8AC3E}">
@@ -16579,7 +17206,7 @@
 </p:sld>
 </file>
 
-<file path=ppt/slides/slide14.xml><?xml version="1.0" encoding="utf-8"?>
+<file path=ppt/slides/slide15.xml><?xml version="1.0" encoding="utf-8"?>
 <p:sld xmlns:a="http://schemas.openxmlformats.org/drawingml/2006/main" xmlns:r="http://schemas.openxmlformats.org/officeDocument/2006/relationships" xmlns:p="http://schemas.openxmlformats.org/presentationml/2006/main">
   <p:cSld>
     <p:bg>
@@ -17285,7 +17912,7 @@
 </p:sld>
 </file>
 
-<file path=ppt/slides/slide15.xml><?xml version="1.0" encoding="utf-8"?>
+<file path=ppt/slides/slide16.xml><?xml version="1.0" encoding="utf-8"?>
 <p:sld xmlns:a="http://schemas.openxmlformats.org/drawingml/2006/main" xmlns:r="http://schemas.openxmlformats.org/officeDocument/2006/relationships" xmlns:p="http://schemas.openxmlformats.org/presentationml/2006/main">
   <p:cSld>
     <p:bg>
@@ -18529,7 +19156,7 @@
 </p:sld>
 </file>
 
-<file path=ppt/slides/slide16.xml><?xml version="1.0" encoding="utf-8"?>
+<file path=ppt/slides/slide17.xml><?xml version="1.0" encoding="utf-8"?>
 <p:sld xmlns:a="http://schemas.openxmlformats.org/drawingml/2006/main" xmlns:r="http://schemas.openxmlformats.org/officeDocument/2006/relationships" xmlns:p="http://schemas.openxmlformats.org/presentationml/2006/main">
   <p:cSld>
     <p:bg>
@@ -19530,7 +20157,7 @@
 </p:sld>
 </file>
 
-<file path=ppt/slides/slide17.xml><?xml version="1.0" encoding="utf-8"?>
+<file path=ppt/slides/slide18.xml><?xml version="1.0" encoding="utf-8"?>
 <p:sld xmlns:a="http://schemas.openxmlformats.org/drawingml/2006/main" xmlns:r="http://schemas.openxmlformats.org/officeDocument/2006/relationships" xmlns:p="http://schemas.openxmlformats.org/presentationml/2006/main">
   <p:cSld>
     <p:bg>
@@ -19867,7 +20494,7 @@
 </p:sld>
 </file>
 
-<file path=ppt/slides/slide18.xml><?xml version="1.0" encoding="utf-8"?>
+<file path=ppt/slides/slide19.xml><?xml version="1.0" encoding="utf-8"?>
 <p:sld xmlns:a="http://schemas.openxmlformats.org/drawingml/2006/main" xmlns:r="http://schemas.openxmlformats.org/officeDocument/2006/relationships" xmlns:p="http://schemas.openxmlformats.org/presentationml/2006/main">
   <p:cSld>
     <p:bg>
@@ -20684,2046 +21311,6 @@
     <p:extLst>
       <p:ext uri="{BB962C8B-B14F-4D97-AF65-F5344CB8AC3E}">
         <p14:creationId xmlns:p14="http://schemas.microsoft.com/office/powerpoint/2010/main" val="2933242298"/>
-      </p:ext>
-    </p:extLst>
-  </p:cSld>
-  <p:clrMapOvr>
-    <a:masterClrMapping/>
-  </p:clrMapOvr>
-</p:sld>
-</file>
-
-<file path=ppt/slides/slide19.xml><?xml version="1.0" encoding="utf-8"?>
-<p:sld xmlns:a="http://schemas.openxmlformats.org/drawingml/2006/main" xmlns:r="http://schemas.openxmlformats.org/officeDocument/2006/relationships" xmlns:p="http://schemas.openxmlformats.org/presentationml/2006/main">
-  <p:cSld>
-    <p:bg>
-      <p:bgPr>
-        <a:solidFill>
-          <a:srgbClr val="E0E9F9"/>
-        </a:solidFill>
-        <a:effectLst/>
-      </p:bgPr>
-    </p:bg>
-    <p:spTree>
-      <p:nvGrpSpPr>
-        <p:cNvPr id="1" name="Shape 160">
-          <a:extLst>
-            <a:ext uri="{FF2B5EF4-FFF2-40B4-BE49-F238E27FC236}">
-              <a16:creationId xmlns:a16="http://schemas.microsoft.com/office/drawing/2014/main" id="{DA297602-4BBB-8124-85EA-38BC67F0ED50}"/>
-            </a:ext>
-          </a:extLst>
-        </p:cNvPr>
-        <p:cNvGrpSpPr/>
-        <p:nvPr/>
-      </p:nvGrpSpPr>
-      <p:grpSpPr>
-        <a:xfrm>
-          <a:off x="0" y="0"/>
-          <a:ext cx="0" cy="0"/>
-          <a:chOff x="0" y="0"/>
-          <a:chExt cx="0" cy="0"/>
-        </a:xfrm>
-      </p:grpSpPr>
-      <p:sp>
-        <p:nvSpPr>
-          <p:cNvPr id="161" name="Google Shape;161;p18">
-            <a:extLst>
-              <a:ext uri="{FF2B5EF4-FFF2-40B4-BE49-F238E27FC236}">
-                <a16:creationId xmlns:a16="http://schemas.microsoft.com/office/drawing/2014/main" id="{FA7FADFD-60A0-32BE-B0F0-F90CE928063D}"/>
-              </a:ext>
-            </a:extLst>
-          </p:cNvPr>
-          <p:cNvSpPr/>
-          <p:nvPr/>
-        </p:nvSpPr>
-        <p:spPr>
-          <a:xfrm>
-            <a:off x="-411641" y="7198177"/>
-            <a:ext cx="4653133" cy="3680205"/>
-          </a:xfrm>
-          <a:custGeom>
-            <a:avLst/>
-            <a:gdLst/>
-            <a:ahLst/>
-            <a:cxnLst/>
-            <a:rect l="l" t="t" r="r" b="b"/>
-            <a:pathLst>
-              <a:path w="9643798" h="7627368" extrusionOk="0">
-                <a:moveTo>
-                  <a:pt x="0" y="0"/>
-                </a:moveTo>
-                <a:lnTo>
-                  <a:pt x="9643798" y="0"/>
-                </a:lnTo>
-                <a:lnTo>
-                  <a:pt x="9643798" y="7627368"/>
-                </a:lnTo>
-                <a:lnTo>
-                  <a:pt x="0" y="7627368"/>
-                </a:lnTo>
-                <a:lnTo>
-                  <a:pt x="0" y="0"/>
-                </a:lnTo>
-                <a:close/>
-              </a:path>
-            </a:pathLst>
-          </a:custGeom>
-          <a:blipFill rotWithShape="1">
-            <a:blip r:embed="rId3">
-              <a:alphaModFix/>
-            </a:blip>
-            <a:stretch>
-              <a:fillRect/>
-            </a:stretch>
-          </a:blipFill>
-          <a:ln>
-            <a:noFill/>
-          </a:ln>
-        </p:spPr>
-        <p:txBody>
-          <a:bodyPr/>
-          <a:lstStyle/>
-          <a:p>
-            <a:endParaRPr lang="es-ES_tradnl" dirty="0"/>
-          </a:p>
-        </p:txBody>
-      </p:sp>
-      <p:sp>
-        <p:nvSpPr>
-          <p:cNvPr id="162" name="Google Shape;162;p18">
-            <a:extLst>
-              <a:ext uri="{FF2B5EF4-FFF2-40B4-BE49-F238E27FC236}">
-                <a16:creationId xmlns:a16="http://schemas.microsoft.com/office/drawing/2014/main" id="{C440BC94-E658-41A3-E378-7422709BA398}"/>
-              </a:ext>
-            </a:extLst>
-          </p:cNvPr>
-          <p:cNvSpPr/>
-          <p:nvPr/>
-        </p:nvSpPr>
-        <p:spPr>
-          <a:xfrm>
-            <a:off x="5482809" y="8188196"/>
-            <a:ext cx="2156379" cy="1936821"/>
-          </a:xfrm>
-          <a:custGeom>
-            <a:avLst/>
-            <a:gdLst/>
-            <a:ahLst/>
-            <a:cxnLst/>
-            <a:rect l="l" t="t" r="r" b="b"/>
-            <a:pathLst>
-              <a:path w="4469180" h="4014136" extrusionOk="0">
-                <a:moveTo>
-                  <a:pt x="0" y="0"/>
-                </a:moveTo>
-                <a:lnTo>
-                  <a:pt x="4469180" y="0"/>
-                </a:lnTo>
-                <a:lnTo>
-                  <a:pt x="4469180" y="4014136"/>
-                </a:lnTo>
-                <a:lnTo>
-                  <a:pt x="0" y="4014136"/>
-                </a:lnTo>
-                <a:lnTo>
-                  <a:pt x="0" y="0"/>
-                </a:lnTo>
-                <a:close/>
-              </a:path>
-            </a:pathLst>
-          </a:custGeom>
-          <a:blipFill rotWithShape="1">
-            <a:blip r:embed="rId4">
-              <a:alphaModFix/>
-            </a:blip>
-            <a:stretch>
-              <a:fillRect/>
-            </a:stretch>
-          </a:blipFill>
-          <a:ln>
-            <a:noFill/>
-          </a:ln>
-        </p:spPr>
-        <p:txBody>
-          <a:bodyPr/>
-          <a:lstStyle/>
-          <a:p>
-            <a:endParaRPr lang="es-ES_tradnl" dirty="0"/>
-          </a:p>
-        </p:txBody>
-      </p:sp>
-      <p:sp>
-        <p:nvSpPr>
-          <p:cNvPr id="163" name="Google Shape;163;p18">
-            <a:extLst>
-              <a:ext uri="{FF2B5EF4-FFF2-40B4-BE49-F238E27FC236}">
-                <a16:creationId xmlns:a16="http://schemas.microsoft.com/office/drawing/2014/main" id="{CFCEAEBD-EF5E-82A0-0B56-8E2B61FEEFA3}"/>
-              </a:ext>
-            </a:extLst>
-          </p:cNvPr>
-          <p:cNvSpPr/>
-          <p:nvPr/>
-        </p:nvSpPr>
-        <p:spPr>
-          <a:xfrm>
-            <a:off x="9504429" y="8159082"/>
-            <a:ext cx="2156379" cy="1936821"/>
-          </a:xfrm>
-          <a:custGeom>
-            <a:avLst/>
-            <a:gdLst/>
-            <a:ahLst/>
-            <a:cxnLst/>
-            <a:rect l="l" t="t" r="r" b="b"/>
-            <a:pathLst>
-              <a:path w="4469180" h="4014136" extrusionOk="0">
-                <a:moveTo>
-                  <a:pt x="0" y="0"/>
-                </a:moveTo>
-                <a:lnTo>
-                  <a:pt x="4469180" y="0"/>
-                </a:lnTo>
-                <a:lnTo>
-                  <a:pt x="4469180" y="4014136"/>
-                </a:lnTo>
-                <a:lnTo>
-                  <a:pt x="0" y="4014136"/>
-                </a:lnTo>
-                <a:lnTo>
-                  <a:pt x="0" y="0"/>
-                </a:lnTo>
-                <a:close/>
-              </a:path>
-            </a:pathLst>
-          </a:custGeom>
-          <a:blipFill rotWithShape="1">
-            <a:blip r:embed="rId4">
-              <a:alphaModFix/>
-            </a:blip>
-            <a:stretch>
-              <a:fillRect/>
-            </a:stretch>
-          </a:blipFill>
-          <a:ln>
-            <a:noFill/>
-          </a:ln>
-        </p:spPr>
-        <p:txBody>
-          <a:bodyPr/>
-          <a:lstStyle/>
-          <a:p>
-            <a:endParaRPr lang="es-ES_tradnl" dirty="0"/>
-          </a:p>
-        </p:txBody>
-      </p:sp>
-      <p:sp>
-        <p:nvSpPr>
-          <p:cNvPr id="167" name="Google Shape;167;p18">
-            <a:extLst>
-              <a:ext uri="{FF2B5EF4-FFF2-40B4-BE49-F238E27FC236}">
-                <a16:creationId xmlns:a16="http://schemas.microsoft.com/office/drawing/2014/main" id="{31C7F14F-C1D2-243D-7A0B-9520357B6CFB}"/>
-              </a:ext>
-            </a:extLst>
-          </p:cNvPr>
-          <p:cNvSpPr txBox="1"/>
-          <p:nvPr/>
-        </p:nvSpPr>
-        <p:spPr>
-          <a:xfrm>
-            <a:off x="5794045" y="553200"/>
-            <a:ext cx="6022200" cy="670505"/>
-          </a:xfrm>
-          <a:prstGeom prst="rect">
-            <a:avLst/>
-          </a:prstGeom>
-          <a:noFill/>
-          <a:ln>
-            <a:noFill/>
-          </a:ln>
-        </p:spPr>
-        <p:txBody>
-          <a:bodyPr spcFirstLastPara="1" wrap="square" lIns="0" tIns="0" rIns="0" bIns="0" anchor="t" anchorCtr="0">
-            <a:spAutoFit/>
-          </a:bodyPr>
-          <a:lstStyle/>
-          <a:p>
-            <a:pPr marL="0" marR="0" lvl="0" indent="0" algn="ctr" rtl="0">
-              <a:lnSpc>
-                <a:spcPct val="121055"/>
-              </a:lnSpc>
-              <a:spcBef>
-                <a:spcPts val="0"/>
-              </a:spcBef>
-              <a:spcAft>
-                <a:spcPts val="0"/>
-              </a:spcAft>
-              <a:buNone/>
-            </a:pPr>
-            <a:r>
-              <a:rPr lang="es-ES_tradnl" sz="3601" b="1" dirty="0">
-                <a:solidFill>
-                  <a:srgbClr val="004AAD"/>
-                </a:solidFill>
-                <a:latin typeface="Poppins"/>
-                <a:cs typeface="Poppins"/>
-                <a:sym typeface="Poppins"/>
-              </a:rPr>
-              <a:t>Identificación de perfiles</a:t>
-            </a:r>
-            <a:endParaRPr lang="es-ES_tradnl" dirty="0"/>
-          </a:p>
-        </p:txBody>
-      </p:sp>
-      <p:sp>
-        <p:nvSpPr>
-          <p:cNvPr id="11" name="Rectangle 10">
-            <a:extLst>
-              <a:ext uri="{FF2B5EF4-FFF2-40B4-BE49-F238E27FC236}">
-                <a16:creationId xmlns:a16="http://schemas.microsoft.com/office/drawing/2014/main" id="{1AF05D9C-A020-4BB4-E559-6C31990412CF}"/>
-              </a:ext>
-            </a:extLst>
-          </p:cNvPr>
-          <p:cNvSpPr/>
-          <p:nvPr/>
-        </p:nvSpPr>
-        <p:spPr>
-          <a:xfrm>
-            <a:off x="7177595" y="1772428"/>
-            <a:ext cx="3255100" cy="1106906"/>
-          </a:xfrm>
-          <a:prstGeom prst="rect">
-            <a:avLst/>
-          </a:prstGeom>
-          <a:solidFill>
-            <a:schemeClr val="bg1"/>
-          </a:solidFill>
-          <a:ln>
-            <a:solidFill>
-              <a:schemeClr val="bg2"/>
-            </a:solidFill>
-          </a:ln>
-        </p:spPr>
-        <p:style>
-          <a:lnRef idx="2">
-            <a:schemeClr val="accent1">
-              <a:shade val="50000"/>
-            </a:schemeClr>
-          </a:lnRef>
-          <a:fillRef idx="1">
-            <a:schemeClr val="accent1"/>
-          </a:fillRef>
-          <a:effectRef idx="0">
-            <a:schemeClr val="accent1"/>
-          </a:effectRef>
-          <a:fontRef idx="minor">
-            <a:schemeClr val="lt1"/>
-          </a:fontRef>
-        </p:style>
-        <p:txBody>
-          <a:bodyPr rtlCol="0" anchor="ctr"/>
-          <a:lstStyle/>
-          <a:p>
-            <a:pPr algn="ctr"/>
-            <a:r>
-              <a:rPr lang="es-ES_tradnl" sz="2400" b="1" dirty="0">
-                <a:solidFill>
-                  <a:schemeClr val="bg2"/>
-                </a:solidFill>
-              </a:rPr>
-              <a:t>PERFIL ÓPTIMO</a:t>
-            </a:r>
-          </a:p>
-        </p:txBody>
-      </p:sp>
-      <p:sp>
-        <p:nvSpPr>
-          <p:cNvPr id="13" name="Rectangle 12">
-            <a:extLst>
-              <a:ext uri="{FF2B5EF4-FFF2-40B4-BE49-F238E27FC236}">
-                <a16:creationId xmlns:a16="http://schemas.microsoft.com/office/drawing/2014/main" id="{0EA71E87-3B90-32C4-7C27-58EDCC2D761B}"/>
-              </a:ext>
-            </a:extLst>
-          </p:cNvPr>
-          <p:cNvSpPr/>
-          <p:nvPr/>
-        </p:nvSpPr>
-        <p:spPr>
-          <a:xfrm>
-            <a:off x="1213913" y="2362717"/>
-            <a:ext cx="3255100" cy="1106906"/>
-          </a:xfrm>
-          <a:prstGeom prst="rect">
-            <a:avLst/>
-          </a:prstGeom>
-          <a:solidFill>
-            <a:schemeClr val="bg1"/>
-          </a:solidFill>
-          <a:ln>
-            <a:solidFill>
-              <a:schemeClr val="bg2"/>
-            </a:solidFill>
-          </a:ln>
-        </p:spPr>
-        <p:style>
-          <a:lnRef idx="2">
-            <a:schemeClr val="accent1">
-              <a:shade val="50000"/>
-            </a:schemeClr>
-          </a:lnRef>
-          <a:fillRef idx="1">
-            <a:schemeClr val="accent1"/>
-          </a:fillRef>
-          <a:effectRef idx="0">
-            <a:schemeClr val="accent1"/>
-          </a:effectRef>
-          <a:fontRef idx="minor">
-            <a:schemeClr val="lt1"/>
-          </a:fontRef>
-        </p:style>
-        <p:txBody>
-          <a:bodyPr rtlCol="0" anchor="ctr"/>
-          <a:lstStyle/>
-          <a:p>
-            <a:pPr algn="ctr"/>
-            <a:r>
-              <a:rPr lang="es-ES_tradnl" sz="2400" b="1" dirty="0">
-                <a:solidFill>
-                  <a:schemeClr val="bg2"/>
-                </a:solidFill>
-              </a:rPr>
-              <a:t>PERFIL CRÍTICO</a:t>
-            </a:r>
-          </a:p>
-        </p:txBody>
-      </p:sp>
-      <p:sp>
-        <p:nvSpPr>
-          <p:cNvPr id="14" name="Rectangle 13">
-            <a:extLst>
-              <a:ext uri="{FF2B5EF4-FFF2-40B4-BE49-F238E27FC236}">
-                <a16:creationId xmlns:a16="http://schemas.microsoft.com/office/drawing/2014/main" id="{302D5BD7-5072-A712-E89D-315E1246CCD2}"/>
-              </a:ext>
-            </a:extLst>
-          </p:cNvPr>
-          <p:cNvSpPr/>
-          <p:nvPr/>
-        </p:nvSpPr>
-        <p:spPr>
-          <a:xfrm>
-            <a:off x="13262477" y="2335213"/>
-            <a:ext cx="3255100" cy="1106906"/>
-          </a:xfrm>
-          <a:prstGeom prst="rect">
-            <a:avLst/>
-          </a:prstGeom>
-          <a:solidFill>
-            <a:schemeClr val="bg1"/>
-          </a:solidFill>
-          <a:ln>
-            <a:solidFill>
-              <a:schemeClr val="bg2"/>
-            </a:solidFill>
-          </a:ln>
-        </p:spPr>
-        <p:style>
-          <a:lnRef idx="2">
-            <a:schemeClr val="accent1">
-              <a:shade val="50000"/>
-            </a:schemeClr>
-          </a:lnRef>
-          <a:fillRef idx="1">
-            <a:schemeClr val="accent1"/>
-          </a:fillRef>
-          <a:effectRef idx="0">
-            <a:schemeClr val="accent1"/>
-          </a:effectRef>
-          <a:fontRef idx="minor">
-            <a:schemeClr val="lt1"/>
-          </a:fontRef>
-        </p:style>
-        <p:txBody>
-          <a:bodyPr rtlCol="0" anchor="ctr"/>
-          <a:lstStyle/>
-          <a:p>
-            <a:pPr algn="ctr"/>
-            <a:r>
-              <a:rPr lang="es-ES_tradnl" sz="2400" b="1" dirty="0">
-                <a:solidFill>
-                  <a:schemeClr val="bg2"/>
-                </a:solidFill>
-              </a:rPr>
-              <a:t>PERFIL SATURADO</a:t>
-            </a:r>
-          </a:p>
-        </p:txBody>
-      </p:sp>
-      <p:sp>
-        <p:nvSpPr>
-          <p:cNvPr id="15" name="Rectangle 14">
-            <a:extLst>
-              <a:ext uri="{FF2B5EF4-FFF2-40B4-BE49-F238E27FC236}">
-                <a16:creationId xmlns:a16="http://schemas.microsoft.com/office/drawing/2014/main" id="{65FA6F57-08F9-AB33-9203-BBB34C284455}"/>
-              </a:ext>
-            </a:extLst>
-          </p:cNvPr>
-          <p:cNvSpPr/>
-          <p:nvPr/>
-        </p:nvSpPr>
-        <p:spPr>
-          <a:xfrm>
-            <a:off x="3083700" y="4226329"/>
-            <a:ext cx="2156379" cy="809011"/>
-          </a:xfrm>
-          <a:prstGeom prst="rect">
-            <a:avLst/>
-          </a:prstGeom>
-          <a:solidFill>
-            <a:schemeClr val="bg1"/>
-          </a:solidFill>
-          <a:ln>
-            <a:solidFill>
-              <a:schemeClr val="bg2"/>
-            </a:solidFill>
-          </a:ln>
-        </p:spPr>
-        <p:style>
-          <a:lnRef idx="2">
-            <a:schemeClr val="accent1">
-              <a:shade val="50000"/>
-            </a:schemeClr>
-          </a:lnRef>
-          <a:fillRef idx="1">
-            <a:schemeClr val="accent1"/>
-          </a:fillRef>
-          <a:effectRef idx="0">
-            <a:schemeClr val="accent1"/>
-          </a:effectRef>
-          <a:fontRef idx="minor">
-            <a:schemeClr val="lt1"/>
-          </a:fontRef>
-        </p:style>
-        <p:txBody>
-          <a:bodyPr rtlCol="0" anchor="ctr"/>
-          <a:lstStyle/>
-          <a:p>
-            <a:pPr algn="ctr"/>
-            <a:r>
-              <a:rPr lang="es-ES_tradnl" sz="2400" b="1" dirty="0">
-                <a:solidFill>
-                  <a:schemeClr val="bg2"/>
-                </a:solidFill>
-              </a:rPr>
-              <a:t>DESEMPEÑO</a:t>
-            </a:r>
-          </a:p>
-        </p:txBody>
-      </p:sp>
-      <p:grpSp>
-        <p:nvGrpSpPr>
-          <p:cNvPr id="164" name="Google Shape;164;p18">
-            <a:extLst>
-              <a:ext uri="{FF2B5EF4-FFF2-40B4-BE49-F238E27FC236}">
-                <a16:creationId xmlns:a16="http://schemas.microsoft.com/office/drawing/2014/main" id="{5C8F871A-0C94-7ACA-9EC2-2CF655A37500}"/>
-              </a:ext>
-            </a:extLst>
-          </p:cNvPr>
-          <p:cNvGrpSpPr/>
-          <p:nvPr/>
-        </p:nvGrpSpPr>
-        <p:grpSpPr>
-          <a:xfrm>
-            <a:off x="-118494" y="0"/>
-            <a:ext cx="2163413" cy="1886345"/>
-            <a:chOff x="12784175" y="3675030"/>
-            <a:chExt cx="2163413" cy="1886345"/>
-          </a:xfrm>
-        </p:grpSpPr>
-        <p:sp>
-          <p:nvSpPr>
-            <p:cNvPr id="165" name="Google Shape;165;p18">
-              <a:extLst>
-                <a:ext uri="{FF2B5EF4-FFF2-40B4-BE49-F238E27FC236}">
-                  <a16:creationId xmlns:a16="http://schemas.microsoft.com/office/drawing/2014/main" id="{0F8A5375-035A-B275-BEA1-4DAECA3886FE}"/>
-                </a:ext>
-              </a:extLst>
-            </p:cNvPr>
-            <p:cNvSpPr txBox="1"/>
-            <p:nvPr/>
-          </p:nvSpPr>
-          <p:spPr>
-            <a:xfrm rot="1830973">
-              <a:off x="12805773" y="4425496"/>
-              <a:ext cx="2081405" cy="652657"/>
-            </a:xfrm>
-            <a:prstGeom prst="rect">
-              <a:avLst/>
-            </a:prstGeom>
-            <a:noFill/>
-            <a:ln>
-              <a:noFill/>
-            </a:ln>
-          </p:spPr>
-          <p:txBody>
-            <a:bodyPr spcFirstLastPara="1" wrap="square" lIns="91425" tIns="91425" rIns="91425" bIns="91425" anchor="t" anchorCtr="0">
-              <a:noAutofit/>
-            </a:bodyPr>
-            <a:lstStyle/>
-            <a:p>
-              <a:pPr marL="0" lvl="0" indent="0" algn="l" rtl="0">
-                <a:spcBef>
-                  <a:spcPts val="0"/>
-                </a:spcBef>
-                <a:spcAft>
-                  <a:spcPts val="0"/>
-                </a:spcAft>
-                <a:buNone/>
-              </a:pPr>
-              <a:r>
-                <a:rPr lang="es-ES_tradnl" sz="2300" b="1" i="1" dirty="0">
-                  <a:solidFill>
-                    <a:srgbClr val="E69138"/>
-                  </a:solidFill>
-                  <a:latin typeface="Calibri"/>
-                  <a:ea typeface="Calibri"/>
-                  <a:cs typeface="Calibri"/>
-                  <a:sym typeface="Calibri"/>
-                </a:rPr>
-                <a:t>RAPID EXPRESS </a:t>
-              </a:r>
-            </a:p>
-          </p:txBody>
-        </p:sp>
-        <p:sp>
-          <p:nvSpPr>
-            <p:cNvPr id="166" name="Google Shape;166;p18">
-              <a:extLst>
-                <a:ext uri="{FF2B5EF4-FFF2-40B4-BE49-F238E27FC236}">
-                  <a16:creationId xmlns:a16="http://schemas.microsoft.com/office/drawing/2014/main" id="{5E8E3819-634B-8278-8583-C3C352EA55E4}"/>
-                </a:ext>
-              </a:extLst>
-            </p:cNvPr>
-            <p:cNvSpPr/>
-            <p:nvPr/>
-          </p:nvSpPr>
-          <p:spPr>
-            <a:xfrm>
-              <a:off x="13335203" y="3675030"/>
-              <a:ext cx="1612385" cy="1275250"/>
-            </a:xfrm>
-            <a:custGeom>
-              <a:avLst/>
-              <a:gdLst/>
-              <a:ahLst/>
-              <a:cxnLst/>
-              <a:rect l="l" t="t" r="r" b="b"/>
-              <a:pathLst>
-                <a:path w="1612385" h="1275250" extrusionOk="0">
-                  <a:moveTo>
-                    <a:pt x="0" y="0"/>
-                  </a:moveTo>
-                  <a:lnTo>
-                    <a:pt x="1612384" y="0"/>
-                  </a:lnTo>
-                  <a:lnTo>
-                    <a:pt x="1612384" y="1275249"/>
-                  </a:lnTo>
-                  <a:lnTo>
-                    <a:pt x="0" y="1275249"/>
-                  </a:lnTo>
-                  <a:lnTo>
-                    <a:pt x="0" y="0"/>
-                  </a:lnTo>
-                  <a:close/>
-                </a:path>
-              </a:pathLst>
-            </a:custGeom>
-            <a:blipFill rotWithShape="1">
-              <a:blip r:embed="rId3">
-                <a:alphaModFix/>
-              </a:blip>
-              <a:stretch>
-                <a:fillRect/>
-              </a:stretch>
-            </a:blipFill>
-            <a:ln>
-              <a:noFill/>
-            </a:ln>
-          </p:spPr>
-          <p:txBody>
-            <a:bodyPr/>
-            <a:lstStyle/>
-            <a:p>
-              <a:endParaRPr lang="es-ES_tradnl" dirty="0"/>
-            </a:p>
-          </p:txBody>
-        </p:sp>
-      </p:grpSp>
-      <p:sp>
-        <p:nvSpPr>
-          <p:cNvPr id="2" name="Rectangle 14">
-            <a:extLst>
-              <a:ext uri="{FF2B5EF4-FFF2-40B4-BE49-F238E27FC236}">
-                <a16:creationId xmlns:a16="http://schemas.microsoft.com/office/drawing/2014/main" id="{2C4573BD-4062-5928-8D40-C2F880FE60B9}"/>
-              </a:ext>
-            </a:extLst>
-          </p:cNvPr>
-          <p:cNvSpPr/>
-          <p:nvPr/>
-        </p:nvSpPr>
-        <p:spPr>
-          <a:xfrm>
-            <a:off x="845798" y="4246407"/>
-            <a:ext cx="1894041" cy="788933"/>
-          </a:xfrm>
-          <a:prstGeom prst="rect">
-            <a:avLst/>
-          </a:prstGeom>
-          <a:solidFill>
-            <a:schemeClr val="bg1"/>
-          </a:solidFill>
-          <a:ln>
-            <a:solidFill>
-              <a:schemeClr val="bg2"/>
-            </a:solidFill>
-          </a:ln>
-        </p:spPr>
-        <p:style>
-          <a:lnRef idx="2">
-            <a:schemeClr val="accent1">
-              <a:shade val="50000"/>
-            </a:schemeClr>
-          </a:lnRef>
-          <a:fillRef idx="1">
-            <a:schemeClr val="accent1"/>
-          </a:fillRef>
-          <a:effectRef idx="0">
-            <a:schemeClr val="accent1"/>
-          </a:effectRef>
-          <a:fontRef idx="minor">
-            <a:schemeClr val="lt1"/>
-          </a:fontRef>
-        </p:style>
-        <p:txBody>
-          <a:bodyPr rtlCol="0" anchor="ctr"/>
-          <a:lstStyle/>
-          <a:p>
-            <a:pPr algn="ctr"/>
-            <a:r>
-              <a:rPr lang="es-ES_tradnl" sz="2400" b="1" dirty="0">
-                <a:solidFill>
-                  <a:schemeClr val="bg2"/>
-                </a:solidFill>
-              </a:rPr>
-              <a:t>CARGA DE TRABAJO</a:t>
-            </a:r>
-          </a:p>
-        </p:txBody>
-      </p:sp>
-      <p:sp>
-        <p:nvSpPr>
-          <p:cNvPr id="3" name="Rectangle 14">
-            <a:extLst>
-              <a:ext uri="{FF2B5EF4-FFF2-40B4-BE49-F238E27FC236}">
-                <a16:creationId xmlns:a16="http://schemas.microsoft.com/office/drawing/2014/main" id="{D73DF1B4-7E07-1FFB-F523-7DC8DC5EECDF}"/>
-              </a:ext>
-            </a:extLst>
-          </p:cNvPr>
-          <p:cNvSpPr/>
-          <p:nvPr/>
-        </p:nvSpPr>
-        <p:spPr>
-          <a:xfrm>
-            <a:off x="9021997" y="3616080"/>
-            <a:ext cx="2156379" cy="809011"/>
-          </a:xfrm>
-          <a:prstGeom prst="rect">
-            <a:avLst/>
-          </a:prstGeom>
-          <a:solidFill>
-            <a:schemeClr val="bg1"/>
-          </a:solidFill>
-          <a:ln>
-            <a:solidFill>
-              <a:schemeClr val="bg2"/>
-            </a:solidFill>
-          </a:ln>
-        </p:spPr>
-        <p:style>
-          <a:lnRef idx="2">
-            <a:schemeClr val="accent1">
-              <a:shade val="50000"/>
-            </a:schemeClr>
-          </a:lnRef>
-          <a:fillRef idx="1">
-            <a:schemeClr val="accent1"/>
-          </a:fillRef>
-          <a:effectRef idx="0">
-            <a:schemeClr val="accent1"/>
-          </a:effectRef>
-          <a:fontRef idx="minor">
-            <a:schemeClr val="lt1"/>
-          </a:fontRef>
-        </p:style>
-        <p:txBody>
-          <a:bodyPr rtlCol="0" anchor="ctr"/>
-          <a:lstStyle/>
-          <a:p>
-            <a:pPr algn="ctr"/>
-            <a:r>
-              <a:rPr lang="es-ES_tradnl" sz="2400" b="1" dirty="0">
-                <a:solidFill>
-                  <a:schemeClr val="bg2"/>
-                </a:solidFill>
-              </a:rPr>
-              <a:t>DESEMPEÑO</a:t>
-            </a:r>
-          </a:p>
-        </p:txBody>
-      </p:sp>
-      <p:sp>
-        <p:nvSpPr>
-          <p:cNvPr id="4" name="Rectangle 14">
-            <a:extLst>
-              <a:ext uri="{FF2B5EF4-FFF2-40B4-BE49-F238E27FC236}">
-                <a16:creationId xmlns:a16="http://schemas.microsoft.com/office/drawing/2014/main" id="{5E7CDE07-09E1-9659-2686-57651D05F2A7}"/>
-              </a:ext>
-            </a:extLst>
-          </p:cNvPr>
-          <p:cNvSpPr/>
-          <p:nvPr/>
-        </p:nvSpPr>
-        <p:spPr>
-          <a:xfrm>
-            <a:off x="6692170" y="3626941"/>
-            <a:ext cx="1894041" cy="788933"/>
-          </a:xfrm>
-          <a:prstGeom prst="rect">
-            <a:avLst/>
-          </a:prstGeom>
-          <a:solidFill>
-            <a:schemeClr val="bg1"/>
-          </a:solidFill>
-          <a:ln>
-            <a:solidFill>
-              <a:schemeClr val="bg2"/>
-            </a:solidFill>
-          </a:ln>
-        </p:spPr>
-        <p:style>
-          <a:lnRef idx="2">
-            <a:schemeClr val="accent1">
-              <a:shade val="50000"/>
-            </a:schemeClr>
-          </a:lnRef>
-          <a:fillRef idx="1">
-            <a:schemeClr val="accent1"/>
-          </a:fillRef>
-          <a:effectRef idx="0">
-            <a:schemeClr val="accent1"/>
-          </a:effectRef>
-          <a:fontRef idx="minor">
-            <a:schemeClr val="lt1"/>
-          </a:fontRef>
-        </p:style>
-        <p:txBody>
-          <a:bodyPr rtlCol="0" anchor="ctr"/>
-          <a:lstStyle/>
-          <a:p>
-            <a:pPr algn="ctr"/>
-            <a:r>
-              <a:rPr lang="es-ES_tradnl" sz="2400" b="1" dirty="0">
-                <a:solidFill>
-                  <a:schemeClr val="bg2"/>
-                </a:solidFill>
-              </a:rPr>
-              <a:t>CARGA DE TRABAJO</a:t>
-            </a:r>
-          </a:p>
-        </p:txBody>
-      </p:sp>
-      <p:sp>
-        <p:nvSpPr>
-          <p:cNvPr id="5" name="Rectangle 14">
-            <a:extLst>
-              <a:ext uri="{FF2B5EF4-FFF2-40B4-BE49-F238E27FC236}">
-                <a16:creationId xmlns:a16="http://schemas.microsoft.com/office/drawing/2014/main" id="{7B9DE141-DEAD-5D5C-77C3-4E9EF984166B}"/>
-              </a:ext>
-            </a:extLst>
-          </p:cNvPr>
-          <p:cNvSpPr/>
-          <p:nvPr/>
-        </p:nvSpPr>
-        <p:spPr>
-          <a:xfrm>
-            <a:off x="15076684" y="4226329"/>
-            <a:ext cx="2156379" cy="809011"/>
-          </a:xfrm>
-          <a:prstGeom prst="rect">
-            <a:avLst/>
-          </a:prstGeom>
-          <a:solidFill>
-            <a:schemeClr val="bg1"/>
-          </a:solidFill>
-          <a:ln>
-            <a:solidFill>
-              <a:schemeClr val="bg2"/>
-            </a:solidFill>
-          </a:ln>
-        </p:spPr>
-        <p:style>
-          <a:lnRef idx="2">
-            <a:schemeClr val="accent1">
-              <a:shade val="50000"/>
-            </a:schemeClr>
-          </a:lnRef>
-          <a:fillRef idx="1">
-            <a:schemeClr val="accent1"/>
-          </a:fillRef>
-          <a:effectRef idx="0">
-            <a:schemeClr val="accent1"/>
-          </a:effectRef>
-          <a:fontRef idx="minor">
-            <a:schemeClr val="lt1"/>
-          </a:fontRef>
-        </p:style>
-        <p:txBody>
-          <a:bodyPr rtlCol="0" anchor="ctr"/>
-          <a:lstStyle/>
-          <a:p>
-            <a:pPr algn="ctr"/>
-            <a:r>
-              <a:rPr lang="es-ES_tradnl" sz="2400" b="1" dirty="0">
-                <a:solidFill>
-                  <a:schemeClr val="bg2"/>
-                </a:solidFill>
-              </a:rPr>
-              <a:t>DESEMPEÑO</a:t>
-            </a:r>
-          </a:p>
-        </p:txBody>
-      </p:sp>
-      <p:sp>
-        <p:nvSpPr>
-          <p:cNvPr id="6" name="Rectangle 14">
-            <a:extLst>
-              <a:ext uri="{FF2B5EF4-FFF2-40B4-BE49-F238E27FC236}">
-                <a16:creationId xmlns:a16="http://schemas.microsoft.com/office/drawing/2014/main" id="{AAA1FC9E-85E7-5CC1-7D4C-008E402DA12E}"/>
-              </a:ext>
-            </a:extLst>
-          </p:cNvPr>
-          <p:cNvSpPr/>
-          <p:nvPr/>
-        </p:nvSpPr>
-        <p:spPr>
-          <a:xfrm>
-            <a:off x="12872043" y="4246407"/>
-            <a:ext cx="1894041" cy="788933"/>
-          </a:xfrm>
-          <a:prstGeom prst="rect">
-            <a:avLst/>
-          </a:prstGeom>
-          <a:solidFill>
-            <a:schemeClr val="bg1"/>
-          </a:solidFill>
-          <a:ln>
-            <a:solidFill>
-              <a:schemeClr val="bg2"/>
-            </a:solidFill>
-          </a:ln>
-        </p:spPr>
-        <p:style>
-          <a:lnRef idx="2">
-            <a:schemeClr val="accent1">
-              <a:shade val="50000"/>
-            </a:schemeClr>
-          </a:lnRef>
-          <a:fillRef idx="1">
-            <a:schemeClr val="accent1"/>
-          </a:fillRef>
-          <a:effectRef idx="0">
-            <a:schemeClr val="accent1"/>
-          </a:effectRef>
-          <a:fontRef idx="minor">
-            <a:schemeClr val="lt1"/>
-          </a:fontRef>
-        </p:style>
-        <p:txBody>
-          <a:bodyPr rtlCol="0" anchor="ctr"/>
-          <a:lstStyle/>
-          <a:p>
-            <a:pPr algn="ctr"/>
-            <a:r>
-              <a:rPr lang="es-ES_tradnl" sz="2400" b="1" dirty="0">
-                <a:solidFill>
-                  <a:schemeClr val="bg2"/>
-                </a:solidFill>
-              </a:rPr>
-              <a:t>CARGA DE TRABAJO</a:t>
-            </a:r>
-          </a:p>
-        </p:txBody>
-      </p:sp>
-      <p:sp>
-        <p:nvSpPr>
-          <p:cNvPr id="7" name="Rectangle 14">
-            <a:extLst>
-              <a:ext uri="{FF2B5EF4-FFF2-40B4-BE49-F238E27FC236}">
-                <a16:creationId xmlns:a16="http://schemas.microsoft.com/office/drawing/2014/main" id="{1A371D18-CFF7-7C81-AB14-A754411D14F9}"/>
-              </a:ext>
-            </a:extLst>
-          </p:cNvPr>
-          <p:cNvSpPr/>
-          <p:nvPr/>
-        </p:nvSpPr>
-        <p:spPr>
-          <a:xfrm>
-            <a:off x="3161026" y="5891203"/>
-            <a:ext cx="1569433" cy="751127"/>
-          </a:xfrm>
-          <a:prstGeom prst="rect">
-            <a:avLst/>
-          </a:prstGeom>
-          <a:solidFill>
-            <a:schemeClr val="bg1"/>
-          </a:solidFill>
-          <a:ln>
-            <a:solidFill>
-              <a:schemeClr val="bg2"/>
-            </a:solidFill>
-          </a:ln>
-        </p:spPr>
-        <p:style>
-          <a:lnRef idx="2">
-            <a:schemeClr val="accent1">
-              <a:shade val="50000"/>
-            </a:schemeClr>
-          </a:lnRef>
-          <a:fillRef idx="1">
-            <a:schemeClr val="accent1"/>
-          </a:fillRef>
-          <a:effectRef idx="0">
-            <a:schemeClr val="accent1"/>
-          </a:effectRef>
-          <a:fontRef idx="minor">
-            <a:schemeClr val="lt1"/>
-          </a:fontRef>
-        </p:style>
-        <p:txBody>
-          <a:bodyPr rtlCol="0" anchor="ctr"/>
-          <a:lstStyle/>
-          <a:p>
-            <a:pPr algn="ctr"/>
-            <a:r>
-              <a:rPr lang="es-ES_tradnl" sz="2400" b="1" dirty="0">
-                <a:solidFill>
-                  <a:schemeClr val="bg2"/>
-                </a:solidFill>
-              </a:rPr>
-              <a:t>81%</a:t>
-            </a:r>
-          </a:p>
-        </p:txBody>
-      </p:sp>
-      <p:sp>
-        <p:nvSpPr>
-          <p:cNvPr id="8" name="Rectangle 14">
-            <a:extLst>
-              <a:ext uri="{FF2B5EF4-FFF2-40B4-BE49-F238E27FC236}">
-                <a16:creationId xmlns:a16="http://schemas.microsoft.com/office/drawing/2014/main" id="{FFF26C2C-4A64-4E35-607C-B6984CE1B315}"/>
-              </a:ext>
-            </a:extLst>
-          </p:cNvPr>
-          <p:cNvSpPr/>
-          <p:nvPr/>
-        </p:nvSpPr>
-        <p:spPr>
-          <a:xfrm>
-            <a:off x="845798" y="5888343"/>
-            <a:ext cx="1894041" cy="788933"/>
-          </a:xfrm>
-          <a:prstGeom prst="rect">
-            <a:avLst/>
-          </a:prstGeom>
-          <a:solidFill>
-            <a:schemeClr val="bg1"/>
-          </a:solidFill>
-          <a:ln>
-            <a:solidFill>
-              <a:schemeClr val="bg2"/>
-            </a:solidFill>
-          </a:ln>
-        </p:spPr>
-        <p:style>
-          <a:lnRef idx="2">
-            <a:schemeClr val="accent1">
-              <a:shade val="50000"/>
-            </a:schemeClr>
-          </a:lnRef>
-          <a:fillRef idx="1">
-            <a:schemeClr val="accent1"/>
-          </a:fillRef>
-          <a:effectRef idx="0">
-            <a:schemeClr val="accent1"/>
-          </a:effectRef>
-          <a:fontRef idx="minor">
-            <a:schemeClr val="lt1"/>
-          </a:fontRef>
-        </p:style>
-        <p:txBody>
-          <a:bodyPr rtlCol="0" anchor="ctr"/>
-          <a:lstStyle/>
-          <a:p>
-            <a:pPr algn="ctr"/>
-            <a:r>
-              <a:rPr lang="es-ES_tradnl" sz="2400" b="1" dirty="0">
-                <a:solidFill>
-                  <a:schemeClr val="bg2"/>
-                </a:solidFill>
-              </a:rPr>
-              <a:t>289 – 298 paquetes</a:t>
-            </a:r>
-          </a:p>
-        </p:txBody>
-      </p:sp>
-      <p:sp>
-        <p:nvSpPr>
-          <p:cNvPr id="9" name="Rectangle 14">
-            <a:extLst>
-              <a:ext uri="{FF2B5EF4-FFF2-40B4-BE49-F238E27FC236}">
-                <a16:creationId xmlns:a16="http://schemas.microsoft.com/office/drawing/2014/main" id="{2C786784-9FA6-D511-DA8C-F5E16FE4EADD}"/>
-              </a:ext>
-            </a:extLst>
-          </p:cNvPr>
-          <p:cNvSpPr/>
-          <p:nvPr/>
-        </p:nvSpPr>
-        <p:spPr>
-          <a:xfrm>
-            <a:off x="9021996" y="5143501"/>
-            <a:ext cx="1569433" cy="760440"/>
-          </a:xfrm>
-          <a:prstGeom prst="rect">
-            <a:avLst/>
-          </a:prstGeom>
-          <a:solidFill>
-            <a:schemeClr val="bg1"/>
-          </a:solidFill>
-          <a:ln>
-            <a:solidFill>
-              <a:schemeClr val="bg2"/>
-            </a:solidFill>
-          </a:ln>
-        </p:spPr>
-        <p:style>
-          <a:lnRef idx="2">
-            <a:schemeClr val="accent1">
-              <a:shade val="50000"/>
-            </a:schemeClr>
-          </a:lnRef>
-          <a:fillRef idx="1">
-            <a:schemeClr val="accent1"/>
-          </a:fillRef>
-          <a:effectRef idx="0">
-            <a:schemeClr val="accent1"/>
-          </a:effectRef>
-          <a:fontRef idx="minor">
-            <a:schemeClr val="lt1"/>
-          </a:fontRef>
-        </p:style>
-        <p:txBody>
-          <a:bodyPr rtlCol="0" anchor="ctr"/>
-          <a:lstStyle/>
-          <a:p>
-            <a:pPr algn="ctr"/>
-            <a:r>
-              <a:rPr lang="es-ES_tradnl" sz="2400" b="1" dirty="0">
-                <a:solidFill>
-                  <a:schemeClr val="bg2"/>
-                </a:solidFill>
-              </a:rPr>
-              <a:t>98.7%</a:t>
-            </a:r>
-          </a:p>
-        </p:txBody>
-      </p:sp>
-      <p:sp>
-        <p:nvSpPr>
-          <p:cNvPr id="10" name="Rectangle 14">
-            <a:extLst>
-              <a:ext uri="{FF2B5EF4-FFF2-40B4-BE49-F238E27FC236}">
-                <a16:creationId xmlns:a16="http://schemas.microsoft.com/office/drawing/2014/main" id="{AA30C771-E6A3-FE09-F41C-D9F5FEC85A32}"/>
-              </a:ext>
-            </a:extLst>
-          </p:cNvPr>
-          <p:cNvSpPr/>
-          <p:nvPr/>
-        </p:nvSpPr>
-        <p:spPr>
-          <a:xfrm>
-            <a:off x="6692169" y="5143500"/>
-            <a:ext cx="1894041" cy="788933"/>
-          </a:xfrm>
-          <a:prstGeom prst="rect">
-            <a:avLst/>
-          </a:prstGeom>
-          <a:solidFill>
-            <a:schemeClr val="bg1"/>
-          </a:solidFill>
-          <a:ln>
-            <a:solidFill>
-              <a:schemeClr val="bg2"/>
-            </a:solidFill>
-          </a:ln>
-        </p:spPr>
-        <p:style>
-          <a:lnRef idx="2">
-            <a:schemeClr val="accent1">
-              <a:shade val="50000"/>
-            </a:schemeClr>
-          </a:lnRef>
-          <a:fillRef idx="1">
-            <a:schemeClr val="accent1"/>
-          </a:fillRef>
-          <a:effectRef idx="0">
-            <a:schemeClr val="accent1"/>
-          </a:effectRef>
-          <a:fontRef idx="minor">
-            <a:schemeClr val="lt1"/>
-          </a:fontRef>
-        </p:style>
-        <p:txBody>
-          <a:bodyPr rtlCol="0" anchor="ctr"/>
-          <a:lstStyle/>
-          <a:p>
-            <a:pPr algn="ctr"/>
-            <a:r>
-              <a:rPr lang="es-ES_tradnl" sz="2400" b="1" dirty="0">
-                <a:solidFill>
-                  <a:schemeClr val="bg2"/>
-                </a:solidFill>
-              </a:rPr>
-              <a:t>237 – 239 paquetes</a:t>
-            </a:r>
-          </a:p>
-        </p:txBody>
-      </p:sp>
-      <p:sp>
-        <p:nvSpPr>
-          <p:cNvPr id="12" name="Rectangle 14">
-            <a:extLst>
-              <a:ext uri="{FF2B5EF4-FFF2-40B4-BE49-F238E27FC236}">
-                <a16:creationId xmlns:a16="http://schemas.microsoft.com/office/drawing/2014/main" id="{BCA2D389-3019-B741-E06C-B5218ED92F60}"/>
-              </a:ext>
-            </a:extLst>
-          </p:cNvPr>
-          <p:cNvSpPr/>
-          <p:nvPr/>
-        </p:nvSpPr>
-        <p:spPr>
-          <a:xfrm>
-            <a:off x="15187271" y="5880162"/>
-            <a:ext cx="1587813" cy="751128"/>
-          </a:xfrm>
-          <a:prstGeom prst="rect">
-            <a:avLst/>
-          </a:prstGeom>
-          <a:solidFill>
-            <a:schemeClr val="bg1"/>
-          </a:solidFill>
-          <a:ln>
-            <a:solidFill>
-              <a:schemeClr val="bg2"/>
-            </a:solidFill>
-          </a:ln>
-        </p:spPr>
-        <p:style>
-          <a:lnRef idx="2">
-            <a:schemeClr val="accent1">
-              <a:shade val="50000"/>
-            </a:schemeClr>
-          </a:lnRef>
-          <a:fillRef idx="1">
-            <a:schemeClr val="accent1"/>
-          </a:fillRef>
-          <a:effectRef idx="0">
-            <a:schemeClr val="accent1"/>
-          </a:effectRef>
-          <a:fontRef idx="minor">
-            <a:schemeClr val="lt1"/>
-          </a:fontRef>
-        </p:style>
-        <p:txBody>
-          <a:bodyPr rtlCol="0" anchor="ctr"/>
-          <a:lstStyle/>
-          <a:p>
-            <a:pPr algn="ctr"/>
-            <a:r>
-              <a:rPr lang="es-ES_tradnl" sz="2400" b="1" dirty="0">
-                <a:solidFill>
-                  <a:schemeClr val="bg2"/>
-                </a:solidFill>
-              </a:rPr>
-              <a:t>95.5%</a:t>
-            </a:r>
-          </a:p>
-        </p:txBody>
-      </p:sp>
-      <p:sp>
-        <p:nvSpPr>
-          <p:cNvPr id="18" name="Rectangle 14">
-            <a:extLst>
-              <a:ext uri="{FF2B5EF4-FFF2-40B4-BE49-F238E27FC236}">
-                <a16:creationId xmlns:a16="http://schemas.microsoft.com/office/drawing/2014/main" id="{07227D69-5E0C-A63D-B5C0-BD57482FD335}"/>
-              </a:ext>
-            </a:extLst>
-          </p:cNvPr>
-          <p:cNvSpPr/>
-          <p:nvPr/>
-        </p:nvSpPr>
-        <p:spPr>
-          <a:xfrm>
-            <a:off x="12872043" y="5890483"/>
-            <a:ext cx="1894041" cy="788933"/>
-          </a:xfrm>
-          <a:prstGeom prst="rect">
-            <a:avLst/>
-          </a:prstGeom>
-          <a:solidFill>
-            <a:schemeClr val="bg1"/>
-          </a:solidFill>
-          <a:ln>
-            <a:solidFill>
-              <a:schemeClr val="bg2"/>
-            </a:solidFill>
-          </a:ln>
-        </p:spPr>
-        <p:style>
-          <a:lnRef idx="2">
-            <a:schemeClr val="accent1">
-              <a:shade val="50000"/>
-            </a:schemeClr>
-          </a:lnRef>
-          <a:fillRef idx="1">
-            <a:schemeClr val="accent1"/>
-          </a:fillRef>
-          <a:effectRef idx="0">
-            <a:schemeClr val="accent1"/>
-          </a:effectRef>
-          <a:fontRef idx="minor">
-            <a:schemeClr val="lt1"/>
-          </a:fontRef>
-        </p:style>
-        <p:txBody>
-          <a:bodyPr rtlCol="0" anchor="ctr"/>
-          <a:lstStyle/>
-          <a:p>
-            <a:pPr algn="ctr"/>
-            <a:r>
-              <a:rPr lang="es-ES_tradnl" sz="2400" b="1" dirty="0">
-                <a:solidFill>
-                  <a:schemeClr val="bg2"/>
-                </a:solidFill>
-              </a:rPr>
-              <a:t>&gt; 304</a:t>
-            </a:r>
-            <a:br>
-              <a:rPr lang="es-ES_tradnl" sz="2400" b="1" dirty="0">
-                <a:solidFill>
-                  <a:schemeClr val="bg2"/>
-                </a:solidFill>
-              </a:rPr>
-            </a:br>
-            <a:r>
-              <a:rPr lang="es-ES_tradnl" sz="2400" b="1" dirty="0">
-                <a:solidFill>
-                  <a:schemeClr val="bg2"/>
-                </a:solidFill>
-              </a:rPr>
-              <a:t>paquetes</a:t>
-            </a:r>
-          </a:p>
-        </p:txBody>
-      </p:sp>
-      <p:sp>
-        <p:nvSpPr>
-          <p:cNvPr id="19" name="Flecha abajo 18">
-            <a:extLst>
-              <a:ext uri="{FF2B5EF4-FFF2-40B4-BE49-F238E27FC236}">
-                <a16:creationId xmlns:a16="http://schemas.microsoft.com/office/drawing/2014/main" id="{06892AA4-0E84-0998-2A87-8514C668B258}"/>
-              </a:ext>
-            </a:extLst>
-          </p:cNvPr>
-          <p:cNvSpPr/>
-          <p:nvPr/>
-        </p:nvSpPr>
-        <p:spPr>
-          <a:xfrm>
-            <a:off x="7639189" y="2947681"/>
-            <a:ext cx="349135" cy="590931"/>
-          </a:xfrm>
-          <a:prstGeom prst="downArrow">
-            <a:avLst/>
-          </a:prstGeom>
-          <a:solidFill>
-            <a:srgbClr val="00B050"/>
-          </a:solidFill>
-          <a:ln>
-            <a:solidFill>
-              <a:schemeClr val="accent3">
-                <a:lumMod val="75000"/>
-              </a:schemeClr>
-            </a:solidFill>
-          </a:ln>
-        </p:spPr>
-        <p:style>
-          <a:lnRef idx="2">
-            <a:schemeClr val="accent1">
-              <a:shade val="15000"/>
-            </a:schemeClr>
-          </a:lnRef>
-          <a:fillRef idx="1">
-            <a:schemeClr val="accent1"/>
-          </a:fillRef>
-          <a:effectRef idx="0">
-            <a:schemeClr val="accent1"/>
-          </a:effectRef>
-          <a:fontRef idx="minor">
-            <a:schemeClr val="lt1"/>
-          </a:fontRef>
-        </p:style>
-        <p:txBody>
-          <a:bodyPr rtlCol="0" anchor="ctr"/>
-          <a:lstStyle/>
-          <a:p>
-            <a:pPr algn="ctr"/>
-            <a:endParaRPr lang="es-ES"/>
-          </a:p>
-        </p:txBody>
-      </p:sp>
-      <p:sp>
-        <p:nvSpPr>
-          <p:cNvPr id="20" name="Flecha abajo 19">
-            <a:extLst>
-              <a:ext uri="{FF2B5EF4-FFF2-40B4-BE49-F238E27FC236}">
-                <a16:creationId xmlns:a16="http://schemas.microsoft.com/office/drawing/2014/main" id="{27DF9403-FC07-1FE3-C630-B4CCB48243CD}"/>
-              </a:ext>
-            </a:extLst>
-          </p:cNvPr>
-          <p:cNvSpPr/>
-          <p:nvPr/>
-        </p:nvSpPr>
-        <p:spPr>
-          <a:xfrm>
-            <a:off x="9504430" y="2961410"/>
-            <a:ext cx="349135" cy="590931"/>
-          </a:xfrm>
-          <a:prstGeom prst="downArrow">
-            <a:avLst/>
-          </a:prstGeom>
-          <a:solidFill>
-            <a:srgbClr val="00B050"/>
-          </a:solidFill>
-          <a:ln>
-            <a:solidFill>
-              <a:schemeClr val="accent3">
-                <a:lumMod val="75000"/>
-              </a:schemeClr>
-            </a:solidFill>
-          </a:ln>
-        </p:spPr>
-        <p:style>
-          <a:lnRef idx="2">
-            <a:schemeClr val="accent1">
-              <a:shade val="15000"/>
-            </a:schemeClr>
-          </a:lnRef>
-          <a:fillRef idx="1">
-            <a:schemeClr val="accent1"/>
-          </a:fillRef>
-          <a:effectRef idx="0">
-            <a:schemeClr val="accent1"/>
-          </a:effectRef>
-          <a:fontRef idx="minor">
-            <a:schemeClr val="lt1"/>
-          </a:fontRef>
-        </p:style>
-        <p:txBody>
-          <a:bodyPr rtlCol="0" anchor="ctr"/>
-          <a:lstStyle/>
-          <a:p>
-            <a:pPr algn="ctr"/>
-            <a:endParaRPr lang="es-ES"/>
-          </a:p>
-        </p:txBody>
-      </p:sp>
-      <p:sp>
-        <p:nvSpPr>
-          <p:cNvPr id="21" name="Flecha abajo 20">
-            <a:extLst>
-              <a:ext uri="{FF2B5EF4-FFF2-40B4-BE49-F238E27FC236}">
-                <a16:creationId xmlns:a16="http://schemas.microsoft.com/office/drawing/2014/main" id="{4AE8A597-AD4C-6807-9C29-6DF665B918CA}"/>
-              </a:ext>
-            </a:extLst>
-          </p:cNvPr>
-          <p:cNvSpPr/>
-          <p:nvPr/>
-        </p:nvSpPr>
-        <p:spPr>
-          <a:xfrm>
-            <a:off x="7639188" y="4504203"/>
-            <a:ext cx="349135" cy="590931"/>
-          </a:xfrm>
-          <a:prstGeom prst="downArrow">
-            <a:avLst/>
-          </a:prstGeom>
-          <a:solidFill>
-            <a:srgbClr val="00B050"/>
-          </a:solidFill>
-          <a:ln>
-            <a:solidFill>
-              <a:schemeClr val="accent3">
-                <a:lumMod val="75000"/>
-              </a:schemeClr>
-            </a:solidFill>
-          </a:ln>
-        </p:spPr>
-        <p:style>
-          <a:lnRef idx="2">
-            <a:schemeClr val="accent1">
-              <a:shade val="15000"/>
-            </a:schemeClr>
-          </a:lnRef>
-          <a:fillRef idx="1">
-            <a:schemeClr val="accent1"/>
-          </a:fillRef>
-          <a:effectRef idx="0">
-            <a:schemeClr val="accent1"/>
-          </a:effectRef>
-          <a:fontRef idx="minor">
-            <a:schemeClr val="lt1"/>
-          </a:fontRef>
-        </p:style>
-        <p:txBody>
-          <a:bodyPr rtlCol="0" anchor="ctr"/>
-          <a:lstStyle/>
-          <a:p>
-            <a:pPr algn="ctr"/>
-            <a:endParaRPr lang="es-ES"/>
-          </a:p>
-        </p:txBody>
-      </p:sp>
-      <p:sp>
-        <p:nvSpPr>
-          <p:cNvPr id="22" name="Flecha abajo 21">
-            <a:extLst>
-              <a:ext uri="{FF2B5EF4-FFF2-40B4-BE49-F238E27FC236}">
-                <a16:creationId xmlns:a16="http://schemas.microsoft.com/office/drawing/2014/main" id="{07ECE06B-223A-0567-4341-27AA5F848363}"/>
-              </a:ext>
-            </a:extLst>
-          </p:cNvPr>
-          <p:cNvSpPr/>
-          <p:nvPr/>
-        </p:nvSpPr>
-        <p:spPr>
-          <a:xfrm>
-            <a:off x="9504429" y="4504203"/>
-            <a:ext cx="349135" cy="590931"/>
-          </a:xfrm>
-          <a:prstGeom prst="downArrow">
-            <a:avLst/>
-          </a:prstGeom>
-          <a:solidFill>
-            <a:srgbClr val="00B050"/>
-          </a:solidFill>
-          <a:ln>
-            <a:solidFill>
-              <a:schemeClr val="accent3">
-                <a:lumMod val="75000"/>
-              </a:schemeClr>
-            </a:solidFill>
-          </a:ln>
-        </p:spPr>
-        <p:style>
-          <a:lnRef idx="2">
-            <a:schemeClr val="accent1">
-              <a:shade val="15000"/>
-            </a:schemeClr>
-          </a:lnRef>
-          <a:fillRef idx="1">
-            <a:schemeClr val="accent1"/>
-          </a:fillRef>
-          <a:effectRef idx="0">
-            <a:schemeClr val="accent1"/>
-          </a:effectRef>
-          <a:fontRef idx="minor">
-            <a:schemeClr val="lt1"/>
-          </a:fontRef>
-        </p:style>
-        <p:txBody>
-          <a:bodyPr rtlCol="0" anchor="ctr"/>
-          <a:lstStyle/>
-          <a:p>
-            <a:pPr algn="ctr"/>
-            <a:endParaRPr lang="es-ES"/>
-          </a:p>
-        </p:txBody>
-      </p:sp>
-      <p:sp>
-        <p:nvSpPr>
-          <p:cNvPr id="23" name="Flecha abajo 22">
-            <a:extLst>
-              <a:ext uri="{FF2B5EF4-FFF2-40B4-BE49-F238E27FC236}">
-                <a16:creationId xmlns:a16="http://schemas.microsoft.com/office/drawing/2014/main" id="{356C1CDD-C354-2A09-BFC9-FADEB6A7E64A}"/>
-              </a:ext>
-            </a:extLst>
-          </p:cNvPr>
-          <p:cNvSpPr/>
-          <p:nvPr/>
-        </p:nvSpPr>
-        <p:spPr>
-          <a:xfrm>
-            <a:off x="13672226" y="3598578"/>
-            <a:ext cx="349135" cy="590931"/>
-          </a:xfrm>
-          <a:prstGeom prst="downArrow">
-            <a:avLst/>
-          </a:prstGeom>
-          <a:solidFill>
-            <a:schemeClr val="accent6">
-              <a:lumMod val="75000"/>
-            </a:schemeClr>
-          </a:solidFill>
-          <a:ln>
-            <a:solidFill>
-              <a:schemeClr val="accent6">
-                <a:lumMod val="50000"/>
-              </a:schemeClr>
-            </a:solidFill>
-          </a:ln>
-        </p:spPr>
-        <p:style>
-          <a:lnRef idx="2">
-            <a:schemeClr val="accent1">
-              <a:shade val="15000"/>
-            </a:schemeClr>
-          </a:lnRef>
-          <a:fillRef idx="1">
-            <a:schemeClr val="accent1"/>
-          </a:fillRef>
-          <a:effectRef idx="0">
-            <a:schemeClr val="accent1"/>
-          </a:effectRef>
-          <a:fontRef idx="minor">
-            <a:schemeClr val="lt1"/>
-          </a:fontRef>
-        </p:style>
-        <p:txBody>
-          <a:bodyPr rtlCol="0" anchor="ctr"/>
-          <a:lstStyle/>
-          <a:p>
-            <a:pPr algn="ctr"/>
-            <a:endParaRPr lang="es-ES"/>
-          </a:p>
-        </p:txBody>
-      </p:sp>
-      <p:sp>
-        <p:nvSpPr>
-          <p:cNvPr id="24" name="Flecha abajo 23">
-            <a:extLst>
-              <a:ext uri="{FF2B5EF4-FFF2-40B4-BE49-F238E27FC236}">
-                <a16:creationId xmlns:a16="http://schemas.microsoft.com/office/drawing/2014/main" id="{7C533EBD-554B-77AE-8C4D-66526DB7A975}"/>
-              </a:ext>
-            </a:extLst>
-          </p:cNvPr>
-          <p:cNvSpPr/>
-          <p:nvPr/>
-        </p:nvSpPr>
-        <p:spPr>
-          <a:xfrm>
-            <a:off x="15537467" y="3612307"/>
-            <a:ext cx="349135" cy="590931"/>
-          </a:xfrm>
-          <a:prstGeom prst="downArrow">
-            <a:avLst/>
-          </a:prstGeom>
-          <a:solidFill>
-            <a:schemeClr val="accent6">
-              <a:lumMod val="75000"/>
-            </a:schemeClr>
-          </a:solidFill>
-          <a:ln>
-            <a:solidFill>
-              <a:schemeClr val="accent6">
-                <a:lumMod val="50000"/>
-              </a:schemeClr>
-            </a:solidFill>
-          </a:ln>
-        </p:spPr>
-        <p:style>
-          <a:lnRef idx="2">
-            <a:schemeClr val="accent1">
-              <a:shade val="15000"/>
-            </a:schemeClr>
-          </a:lnRef>
-          <a:fillRef idx="1">
-            <a:schemeClr val="accent1"/>
-          </a:fillRef>
-          <a:effectRef idx="0">
-            <a:schemeClr val="accent1"/>
-          </a:effectRef>
-          <a:fontRef idx="minor">
-            <a:schemeClr val="lt1"/>
-          </a:fontRef>
-        </p:style>
-        <p:txBody>
-          <a:bodyPr rtlCol="0" anchor="ctr"/>
-          <a:lstStyle/>
-          <a:p>
-            <a:pPr algn="ctr"/>
-            <a:endParaRPr lang="es-ES"/>
-          </a:p>
-        </p:txBody>
-      </p:sp>
-      <p:sp>
-        <p:nvSpPr>
-          <p:cNvPr id="25" name="Flecha abajo 24">
-            <a:extLst>
-              <a:ext uri="{FF2B5EF4-FFF2-40B4-BE49-F238E27FC236}">
-                <a16:creationId xmlns:a16="http://schemas.microsoft.com/office/drawing/2014/main" id="{36297C3E-7832-B3A4-DE68-A8D5264D0CDB}"/>
-              </a:ext>
-            </a:extLst>
-          </p:cNvPr>
-          <p:cNvSpPr/>
-          <p:nvPr/>
-        </p:nvSpPr>
-        <p:spPr>
-          <a:xfrm>
-            <a:off x="13672225" y="5155100"/>
-            <a:ext cx="349135" cy="590931"/>
-          </a:xfrm>
-          <a:prstGeom prst="downArrow">
-            <a:avLst/>
-          </a:prstGeom>
-          <a:solidFill>
-            <a:schemeClr val="accent6">
-              <a:lumMod val="75000"/>
-            </a:schemeClr>
-          </a:solidFill>
-          <a:ln>
-            <a:solidFill>
-              <a:schemeClr val="accent6">
-                <a:lumMod val="50000"/>
-              </a:schemeClr>
-            </a:solidFill>
-          </a:ln>
-        </p:spPr>
-        <p:style>
-          <a:lnRef idx="2">
-            <a:schemeClr val="accent1">
-              <a:shade val="15000"/>
-            </a:schemeClr>
-          </a:lnRef>
-          <a:fillRef idx="1">
-            <a:schemeClr val="accent1"/>
-          </a:fillRef>
-          <a:effectRef idx="0">
-            <a:schemeClr val="accent1"/>
-          </a:effectRef>
-          <a:fontRef idx="minor">
-            <a:schemeClr val="lt1"/>
-          </a:fontRef>
-        </p:style>
-        <p:txBody>
-          <a:bodyPr rtlCol="0" anchor="ctr"/>
-          <a:lstStyle/>
-          <a:p>
-            <a:pPr algn="ctr"/>
-            <a:endParaRPr lang="es-ES"/>
-          </a:p>
-        </p:txBody>
-      </p:sp>
-      <p:sp>
-        <p:nvSpPr>
-          <p:cNvPr id="26" name="Flecha abajo 25">
-            <a:extLst>
-              <a:ext uri="{FF2B5EF4-FFF2-40B4-BE49-F238E27FC236}">
-                <a16:creationId xmlns:a16="http://schemas.microsoft.com/office/drawing/2014/main" id="{464B6C5F-A562-BF84-839D-9AC0DBF1899D}"/>
-              </a:ext>
-            </a:extLst>
-          </p:cNvPr>
-          <p:cNvSpPr/>
-          <p:nvPr/>
-        </p:nvSpPr>
-        <p:spPr>
-          <a:xfrm>
-            <a:off x="15537466" y="5155100"/>
-            <a:ext cx="349135" cy="590931"/>
-          </a:xfrm>
-          <a:prstGeom prst="downArrow">
-            <a:avLst/>
-          </a:prstGeom>
-          <a:solidFill>
-            <a:schemeClr val="accent6">
-              <a:lumMod val="75000"/>
-            </a:schemeClr>
-          </a:solidFill>
-          <a:ln>
-            <a:solidFill>
-              <a:schemeClr val="accent6">
-                <a:lumMod val="50000"/>
-              </a:schemeClr>
-            </a:solidFill>
-          </a:ln>
-        </p:spPr>
-        <p:style>
-          <a:lnRef idx="2">
-            <a:schemeClr val="accent1">
-              <a:shade val="15000"/>
-            </a:schemeClr>
-          </a:lnRef>
-          <a:fillRef idx="1">
-            <a:schemeClr val="accent1"/>
-          </a:fillRef>
-          <a:effectRef idx="0">
-            <a:schemeClr val="accent1"/>
-          </a:effectRef>
-          <a:fontRef idx="minor">
-            <a:schemeClr val="lt1"/>
-          </a:fontRef>
-        </p:style>
-        <p:txBody>
-          <a:bodyPr rtlCol="0" anchor="ctr"/>
-          <a:lstStyle/>
-          <a:p>
-            <a:pPr algn="ctr"/>
-            <a:endParaRPr lang="es-ES"/>
-          </a:p>
-        </p:txBody>
-      </p:sp>
-      <p:sp>
-        <p:nvSpPr>
-          <p:cNvPr id="27" name="Flecha abajo 26">
-            <a:extLst>
-              <a:ext uri="{FF2B5EF4-FFF2-40B4-BE49-F238E27FC236}">
-                <a16:creationId xmlns:a16="http://schemas.microsoft.com/office/drawing/2014/main" id="{53168283-7E04-F1E2-E520-A02E58E33E99}"/>
-              </a:ext>
-            </a:extLst>
-          </p:cNvPr>
-          <p:cNvSpPr/>
-          <p:nvPr/>
-        </p:nvSpPr>
-        <p:spPr>
-          <a:xfrm>
-            <a:off x="1725016" y="3563204"/>
-            <a:ext cx="349135" cy="590931"/>
-          </a:xfrm>
-          <a:prstGeom prst="downArrow">
-            <a:avLst/>
-          </a:prstGeom>
-          <a:solidFill>
-            <a:srgbClr val="FF0000"/>
-          </a:solidFill>
-          <a:ln>
-            <a:solidFill>
-              <a:srgbClr val="C00000"/>
-            </a:solidFill>
-          </a:ln>
-        </p:spPr>
-        <p:style>
-          <a:lnRef idx="2">
-            <a:schemeClr val="accent1">
-              <a:shade val="15000"/>
-            </a:schemeClr>
-          </a:lnRef>
-          <a:fillRef idx="1">
-            <a:schemeClr val="accent1"/>
-          </a:fillRef>
-          <a:effectRef idx="0">
-            <a:schemeClr val="accent1"/>
-          </a:effectRef>
-          <a:fontRef idx="minor">
-            <a:schemeClr val="lt1"/>
-          </a:fontRef>
-        </p:style>
-        <p:txBody>
-          <a:bodyPr rtlCol="0" anchor="ctr"/>
-          <a:lstStyle/>
-          <a:p>
-            <a:pPr algn="ctr"/>
-            <a:endParaRPr lang="es-ES"/>
-          </a:p>
-        </p:txBody>
-      </p:sp>
-      <p:sp>
-        <p:nvSpPr>
-          <p:cNvPr id="28" name="Flecha abajo 27">
-            <a:extLst>
-              <a:ext uri="{FF2B5EF4-FFF2-40B4-BE49-F238E27FC236}">
-                <a16:creationId xmlns:a16="http://schemas.microsoft.com/office/drawing/2014/main" id="{DBF47D44-AEE3-B620-5B96-0CD65447D6A3}"/>
-              </a:ext>
-            </a:extLst>
-          </p:cNvPr>
-          <p:cNvSpPr/>
-          <p:nvPr/>
-        </p:nvSpPr>
-        <p:spPr>
-          <a:xfrm>
-            <a:off x="3590257" y="3576933"/>
-            <a:ext cx="349135" cy="590931"/>
-          </a:xfrm>
-          <a:prstGeom prst="downArrow">
-            <a:avLst/>
-          </a:prstGeom>
-          <a:solidFill>
-            <a:srgbClr val="FF0000"/>
-          </a:solidFill>
-          <a:ln>
-            <a:solidFill>
-              <a:srgbClr val="C00000"/>
-            </a:solidFill>
-          </a:ln>
-        </p:spPr>
-        <p:style>
-          <a:lnRef idx="2">
-            <a:schemeClr val="accent1">
-              <a:shade val="15000"/>
-            </a:schemeClr>
-          </a:lnRef>
-          <a:fillRef idx="1">
-            <a:schemeClr val="accent1"/>
-          </a:fillRef>
-          <a:effectRef idx="0">
-            <a:schemeClr val="accent1"/>
-          </a:effectRef>
-          <a:fontRef idx="minor">
-            <a:schemeClr val="lt1"/>
-          </a:fontRef>
-        </p:style>
-        <p:txBody>
-          <a:bodyPr rtlCol="0" anchor="ctr"/>
-          <a:lstStyle/>
-          <a:p>
-            <a:pPr algn="ctr"/>
-            <a:endParaRPr lang="es-ES">
-              <a:solidFill>
-                <a:srgbClr val="FF0000"/>
-              </a:solidFill>
-            </a:endParaRPr>
-          </a:p>
-        </p:txBody>
-      </p:sp>
-      <p:sp>
-        <p:nvSpPr>
-          <p:cNvPr id="29" name="Flecha abajo 28">
-            <a:extLst>
-              <a:ext uri="{FF2B5EF4-FFF2-40B4-BE49-F238E27FC236}">
-                <a16:creationId xmlns:a16="http://schemas.microsoft.com/office/drawing/2014/main" id="{3EF09888-3FB9-8476-A9C9-58D4C2AA24B7}"/>
-              </a:ext>
-            </a:extLst>
-          </p:cNvPr>
-          <p:cNvSpPr/>
-          <p:nvPr/>
-        </p:nvSpPr>
-        <p:spPr>
-          <a:xfrm>
-            <a:off x="1725015" y="5119726"/>
-            <a:ext cx="349135" cy="590931"/>
-          </a:xfrm>
-          <a:prstGeom prst="downArrow">
-            <a:avLst/>
-          </a:prstGeom>
-          <a:solidFill>
-            <a:srgbClr val="FF0000"/>
-          </a:solidFill>
-          <a:ln>
-            <a:solidFill>
-              <a:srgbClr val="C00000"/>
-            </a:solidFill>
-          </a:ln>
-        </p:spPr>
-        <p:style>
-          <a:lnRef idx="2">
-            <a:schemeClr val="accent1">
-              <a:shade val="15000"/>
-            </a:schemeClr>
-          </a:lnRef>
-          <a:fillRef idx="1">
-            <a:schemeClr val="accent1"/>
-          </a:fillRef>
-          <a:effectRef idx="0">
-            <a:schemeClr val="accent1"/>
-          </a:effectRef>
-          <a:fontRef idx="minor">
-            <a:schemeClr val="lt1"/>
-          </a:fontRef>
-        </p:style>
-        <p:txBody>
-          <a:bodyPr rtlCol="0" anchor="ctr"/>
-          <a:lstStyle/>
-          <a:p>
-            <a:pPr algn="ctr"/>
-            <a:endParaRPr lang="es-ES"/>
-          </a:p>
-        </p:txBody>
-      </p:sp>
-      <p:sp>
-        <p:nvSpPr>
-          <p:cNvPr id="30" name="Flecha abajo 29">
-            <a:extLst>
-              <a:ext uri="{FF2B5EF4-FFF2-40B4-BE49-F238E27FC236}">
-                <a16:creationId xmlns:a16="http://schemas.microsoft.com/office/drawing/2014/main" id="{030F277A-7CD4-62F5-A2EE-C651FF9F555A}"/>
-              </a:ext>
-            </a:extLst>
-          </p:cNvPr>
-          <p:cNvSpPr/>
-          <p:nvPr/>
-        </p:nvSpPr>
-        <p:spPr>
-          <a:xfrm>
-            <a:off x="3590256" y="5119726"/>
-            <a:ext cx="349135" cy="590931"/>
-          </a:xfrm>
-          <a:prstGeom prst="downArrow">
-            <a:avLst/>
-          </a:prstGeom>
-          <a:solidFill>
-            <a:srgbClr val="FF0000"/>
-          </a:solidFill>
-          <a:ln>
-            <a:solidFill>
-              <a:srgbClr val="C00000"/>
-            </a:solidFill>
-          </a:ln>
-        </p:spPr>
-        <p:style>
-          <a:lnRef idx="2">
-            <a:schemeClr val="accent1">
-              <a:shade val="15000"/>
-            </a:schemeClr>
-          </a:lnRef>
-          <a:fillRef idx="1">
-            <a:schemeClr val="accent1"/>
-          </a:fillRef>
-          <a:effectRef idx="0">
-            <a:schemeClr val="accent1"/>
-          </a:effectRef>
-          <a:fontRef idx="minor">
-            <a:schemeClr val="lt1"/>
-          </a:fontRef>
-        </p:style>
-        <p:txBody>
-          <a:bodyPr rtlCol="0" anchor="ctr"/>
-          <a:lstStyle/>
-          <a:p>
-            <a:pPr algn="ctr"/>
-            <a:endParaRPr lang="es-ES"/>
-          </a:p>
-        </p:txBody>
-      </p:sp>
-    </p:spTree>
-    <p:extLst>
-      <p:ext uri="{BB962C8B-B14F-4D97-AF65-F5344CB8AC3E}">
-        <p14:creationId xmlns:p14="http://schemas.microsoft.com/office/powerpoint/2010/main" val="1477851174"/>
       </p:ext>
     </p:extLst>
   </p:cSld>
@@ -25466,6 +24053,2046 @@
           </a:p>
         </p:txBody>
       </p:sp>
+    </p:spTree>
+    <p:extLst>
+      <p:ext uri="{BB962C8B-B14F-4D97-AF65-F5344CB8AC3E}">
+        <p14:creationId xmlns:p14="http://schemas.microsoft.com/office/powerpoint/2010/main" val="1477851174"/>
+      </p:ext>
+    </p:extLst>
+  </p:cSld>
+  <p:clrMapOvr>
+    <a:masterClrMapping/>
+  </p:clrMapOvr>
+</p:sld>
+</file>
+
+<file path=ppt/slides/slide21.xml><?xml version="1.0" encoding="utf-8"?>
+<p:sld xmlns:a="http://schemas.openxmlformats.org/drawingml/2006/main" xmlns:r="http://schemas.openxmlformats.org/officeDocument/2006/relationships" xmlns:p="http://schemas.openxmlformats.org/presentationml/2006/main">
+  <p:cSld>
+    <p:bg>
+      <p:bgPr>
+        <a:solidFill>
+          <a:srgbClr val="E0E9F9"/>
+        </a:solidFill>
+        <a:effectLst/>
+      </p:bgPr>
+    </p:bg>
+    <p:spTree>
+      <p:nvGrpSpPr>
+        <p:cNvPr id="1" name="Shape 160">
+          <a:extLst>
+            <a:ext uri="{FF2B5EF4-FFF2-40B4-BE49-F238E27FC236}">
+              <a16:creationId xmlns:a16="http://schemas.microsoft.com/office/drawing/2014/main" id="{DA297602-4BBB-8124-85EA-38BC67F0ED50}"/>
+            </a:ext>
+          </a:extLst>
+        </p:cNvPr>
+        <p:cNvGrpSpPr/>
+        <p:nvPr/>
+      </p:nvGrpSpPr>
+      <p:grpSpPr>
+        <a:xfrm>
+          <a:off x="0" y="0"/>
+          <a:ext cx="0" cy="0"/>
+          <a:chOff x="0" y="0"/>
+          <a:chExt cx="0" cy="0"/>
+        </a:xfrm>
+      </p:grpSpPr>
+      <p:sp>
+        <p:nvSpPr>
+          <p:cNvPr id="161" name="Google Shape;161;p18">
+            <a:extLst>
+              <a:ext uri="{FF2B5EF4-FFF2-40B4-BE49-F238E27FC236}">
+                <a16:creationId xmlns:a16="http://schemas.microsoft.com/office/drawing/2014/main" id="{FA7FADFD-60A0-32BE-B0F0-F90CE928063D}"/>
+              </a:ext>
+            </a:extLst>
+          </p:cNvPr>
+          <p:cNvSpPr/>
+          <p:nvPr/>
+        </p:nvSpPr>
+        <p:spPr>
+          <a:xfrm>
+            <a:off x="-411641" y="7198177"/>
+            <a:ext cx="4653133" cy="3680205"/>
+          </a:xfrm>
+          <a:custGeom>
+            <a:avLst/>
+            <a:gdLst/>
+            <a:ahLst/>
+            <a:cxnLst/>
+            <a:rect l="l" t="t" r="r" b="b"/>
+            <a:pathLst>
+              <a:path w="9643798" h="7627368" extrusionOk="0">
+                <a:moveTo>
+                  <a:pt x="0" y="0"/>
+                </a:moveTo>
+                <a:lnTo>
+                  <a:pt x="9643798" y="0"/>
+                </a:lnTo>
+                <a:lnTo>
+                  <a:pt x="9643798" y="7627368"/>
+                </a:lnTo>
+                <a:lnTo>
+                  <a:pt x="0" y="7627368"/>
+                </a:lnTo>
+                <a:lnTo>
+                  <a:pt x="0" y="0"/>
+                </a:lnTo>
+                <a:close/>
+              </a:path>
+            </a:pathLst>
+          </a:custGeom>
+          <a:blipFill rotWithShape="1">
+            <a:blip r:embed="rId3">
+              <a:alphaModFix/>
+            </a:blip>
+            <a:stretch>
+              <a:fillRect/>
+            </a:stretch>
+          </a:blipFill>
+          <a:ln>
+            <a:noFill/>
+          </a:ln>
+        </p:spPr>
+        <p:txBody>
+          <a:bodyPr/>
+          <a:lstStyle/>
+          <a:p>
+            <a:endParaRPr lang="es-ES_tradnl" dirty="0"/>
+          </a:p>
+        </p:txBody>
+      </p:sp>
+      <p:sp>
+        <p:nvSpPr>
+          <p:cNvPr id="162" name="Google Shape;162;p18">
+            <a:extLst>
+              <a:ext uri="{FF2B5EF4-FFF2-40B4-BE49-F238E27FC236}">
+                <a16:creationId xmlns:a16="http://schemas.microsoft.com/office/drawing/2014/main" id="{C440BC94-E658-41A3-E378-7422709BA398}"/>
+              </a:ext>
+            </a:extLst>
+          </p:cNvPr>
+          <p:cNvSpPr/>
+          <p:nvPr/>
+        </p:nvSpPr>
+        <p:spPr>
+          <a:xfrm>
+            <a:off x="5482809" y="8188196"/>
+            <a:ext cx="2156379" cy="1936821"/>
+          </a:xfrm>
+          <a:custGeom>
+            <a:avLst/>
+            <a:gdLst/>
+            <a:ahLst/>
+            <a:cxnLst/>
+            <a:rect l="l" t="t" r="r" b="b"/>
+            <a:pathLst>
+              <a:path w="4469180" h="4014136" extrusionOk="0">
+                <a:moveTo>
+                  <a:pt x="0" y="0"/>
+                </a:moveTo>
+                <a:lnTo>
+                  <a:pt x="4469180" y="0"/>
+                </a:lnTo>
+                <a:lnTo>
+                  <a:pt x="4469180" y="4014136"/>
+                </a:lnTo>
+                <a:lnTo>
+                  <a:pt x="0" y="4014136"/>
+                </a:lnTo>
+                <a:lnTo>
+                  <a:pt x="0" y="0"/>
+                </a:lnTo>
+                <a:close/>
+              </a:path>
+            </a:pathLst>
+          </a:custGeom>
+          <a:blipFill rotWithShape="1">
+            <a:blip r:embed="rId4">
+              <a:alphaModFix/>
+            </a:blip>
+            <a:stretch>
+              <a:fillRect/>
+            </a:stretch>
+          </a:blipFill>
+          <a:ln>
+            <a:noFill/>
+          </a:ln>
+        </p:spPr>
+        <p:txBody>
+          <a:bodyPr/>
+          <a:lstStyle/>
+          <a:p>
+            <a:endParaRPr lang="es-ES_tradnl" dirty="0"/>
+          </a:p>
+        </p:txBody>
+      </p:sp>
+      <p:sp>
+        <p:nvSpPr>
+          <p:cNvPr id="163" name="Google Shape;163;p18">
+            <a:extLst>
+              <a:ext uri="{FF2B5EF4-FFF2-40B4-BE49-F238E27FC236}">
+                <a16:creationId xmlns:a16="http://schemas.microsoft.com/office/drawing/2014/main" id="{CFCEAEBD-EF5E-82A0-0B56-8E2B61FEEFA3}"/>
+              </a:ext>
+            </a:extLst>
+          </p:cNvPr>
+          <p:cNvSpPr/>
+          <p:nvPr/>
+        </p:nvSpPr>
+        <p:spPr>
+          <a:xfrm>
+            <a:off x="9504429" y="8159082"/>
+            <a:ext cx="2156379" cy="1936821"/>
+          </a:xfrm>
+          <a:custGeom>
+            <a:avLst/>
+            <a:gdLst/>
+            <a:ahLst/>
+            <a:cxnLst/>
+            <a:rect l="l" t="t" r="r" b="b"/>
+            <a:pathLst>
+              <a:path w="4469180" h="4014136" extrusionOk="0">
+                <a:moveTo>
+                  <a:pt x="0" y="0"/>
+                </a:moveTo>
+                <a:lnTo>
+                  <a:pt x="4469180" y="0"/>
+                </a:lnTo>
+                <a:lnTo>
+                  <a:pt x="4469180" y="4014136"/>
+                </a:lnTo>
+                <a:lnTo>
+                  <a:pt x="0" y="4014136"/>
+                </a:lnTo>
+                <a:lnTo>
+                  <a:pt x="0" y="0"/>
+                </a:lnTo>
+                <a:close/>
+              </a:path>
+            </a:pathLst>
+          </a:custGeom>
+          <a:blipFill rotWithShape="1">
+            <a:blip r:embed="rId4">
+              <a:alphaModFix/>
+            </a:blip>
+            <a:stretch>
+              <a:fillRect/>
+            </a:stretch>
+          </a:blipFill>
+          <a:ln>
+            <a:noFill/>
+          </a:ln>
+        </p:spPr>
+        <p:txBody>
+          <a:bodyPr/>
+          <a:lstStyle/>
+          <a:p>
+            <a:endParaRPr lang="es-ES_tradnl" dirty="0"/>
+          </a:p>
+        </p:txBody>
+      </p:sp>
+      <p:sp>
+        <p:nvSpPr>
+          <p:cNvPr id="167" name="Google Shape;167;p18">
+            <a:extLst>
+              <a:ext uri="{FF2B5EF4-FFF2-40B4-BE49-F238E27FC236}">
+                <a16:creationId xmlns:a16="http://schemas.microsoft.com/office/drawing/2014/main" id="{31C7F14F-C1D2-243D-7A0B-9520357B6CFB}"/>
+              </a:ext>
+            </a:extLst>
+          </p:cNvPr>
+          <p:cNvSpPr txBox="1"/>
+          <p:nvPr/>
+        </p:nvSpPr>
+        <p:spPr>
+          <a:xfrm>
+            <a:off x="5794045" y="553200"/>
+            <a:ext cx="6022200" cy="670505"/>
+          </a:xfrm>
+          <a:prstGeom prst="rect">
+            <a:avLst/>
+          </a:prstGeom>
+          <a:noFill/>
+          <a:ln>
+            <a:noFill/>
+          </a:ln>
+        </p:spPr>
+        <p:txBody>
+          <a:bodyPr spcFirstLastPara="1" wrap="square" lIns="0" tIns="0" rIns="0" bIns="0" anchor="t" anchorCtr="0">
+            <a:spAutoFit/>
+          </a:bodyPr>
+          <a:lstStyle/>
+          <a:p>
+            <a:pPr marL="0" marR="0" lvl="0" indent="0" algn="ctr" rtl="0">
+              <a:lnSpc>
+                <a:spcPct val="121055"/>
+              </a:lnSpc>
+              <a:spcBef>
+                <a:spcPts val="0"/>
+              </a:spcBef>
+              <a:spcAft>
+                <a:spcPts val="0"/>
+              </a:spcAft>
+              <a:buNone/>
+            </a:pPr>
+            <a:r>
+              <a:rPr lang="es-ES_tradnl" sz="3601" b="1" dirty="0">
+                <a:solidFill>
+                  <a:srgbClr val="004AAD"/>
+                </a:solidFill>
+                <a:latin typeface="Poppins"/>
+                <a:cs typeface="Poppins"/>
+                <a:sym typeface="Poppins"/>
+              </a:rPr>
+              <a:t>Identificación de perfiles</a:t>
+            </a:r>
+            <a:endParaRPr lang="es-ES_tradnl" dirty="0"/>
+          </a:p>
+        </p:txBody>
+      </p:sp>
+      <p:sp>
+        <p:nvSpPr>
+          <p:cNvPr id="11" name="Rectangle 10">
+            <a:extLst>
+              <a:ext uri="{FF2B5EF4-FFF2-40B4-BE49-F238E27FC236}">
+                <a16:creationId xmlns:a16="http://schemas.microsoft.com/office/drawing/2014/main" id="{1AF05D9C-A020-4BB4-E559-6C31990412CF}"/>
+              </a:ext>
+            </a:extLst>
+          </p:cNvPr>
+          <p:cNvSpPr/>
+          <p:nvPr/>
+        </p:nvSpPr>
+        <p:spPr>
+          <a:xfrm>
+            <a:off x="7177595" y="1772428"/>
+            <a:ext cx="3255100" cy="1106906"/>
+          </a:xfrm>
+          <a:prstGeom prst="rect">
+            <a:avLst/>
+          </a:prstGeom>
+          <a:solidFill>
+            <a:schemeClr val="bg1"/>
+          </a:solidFill>
+          <a:ln>
+            <a:solidFill>
+              <a:schemeClr val="bg2"/>
+            </a:solidFill>
+          </a:ln>
+        </p:spPr>
+        <p:style>
+          <a:lnRef idx="2">
+            <a:schemeClr val="accent1">
+              <a:shade val="50000"/>
+            </a:schemeClr>
+          </a:lnRef>
+          <a:fillRef idx="1">
+            <a:schemeClr val="accent1"/>
+          </a:fillRef>
+          <a:effectRef idx="0">
+            <a:schemeClr val="accent1"/>
+          </a:effectRef>
+          <a:fontRef idx="minor">
+            <a:schemeClr val="lt1"/>
+          </a:fontRef>
+        </p:style>
+        <p:txBody>
+          <a:bodyPr rtlCol="0" anchor="ctr"/>
+          <a:lstStyle/>
+          <a:p>
+            <a:pPr algn="ctr"/>
+            <a:r>
+              <a:rPr lang="es-ES_tradnl" sz="2400" b="1" dirty="0">
+                <a:solidFill>
+                  <a:schemeClr val="bg2"/>
+                </a:solidFill>
+              </a:rPr>
+              <a:t>PERFIL ÓPTIMO</a:t>
+            </a:r>
+          </a:p>
+        </p:txBody>
+      </p:sp>
+      <p:sp>
+        <p:nvSpPr>
+          <p:cNvPr id="13" name="Rectangle 12">
+            <a:extLst>
+              <a:ext uri="{FF2B5EF4-FFF2-40B4-BE49-F238E27FC236}">
+                <a16:creationId xmlns:a16="http://schemas.microsoft.com/office/drawing/2014/main" id="{0EA71E87-3B90-32C4-7C27-58EDCC2D761B}"/>
+              </a:ext>
+            </a:extLst>
+          </p:cNvPr>
+          <p:cNvSpPr/>
+          <p:nvPr/>
+        </p:nvSpPr>
+        <p:spPr>
+          <a:xfrm>
+            <a:off x="1213913" y="2362717"/>
+            <a:ext cx="3255100" cy="1106906"/>
+          </a:xfrm>
+          <a:prstGeom prst="rect">
+            <a:avLst/>
+          </a:prstGeom>
+          <a:solidFill>
+            <a:schemeClr val="bg1"/>
+          </a:solidFill>
+          <a:ln>
+            <a:solidFill>
+              <a:schemeClr val="bg2"/>
+            </a:solidFill>
+          </a:ln>
+        </p:spPr>
+        <p:style>
+          <a:lnRef idx="2">
+            <a:schemeClr val="accent1">
+              <a:shade val="50000"/>
+            </a:schemeClr>
+          </a:lnRef>
+          <a:fillRef idx="1">
+            <a:schemeClr val="accent1"/>
+          </a:fillRef>
+          <a:effectRef idx="0">
+            <a:schemeClr val="accent1"/>
+          </a:effectRef>
+          <a:fontRef idx="minor">
+            <a:schemeClr val="lt1"/>
+          </a:fontRef>
+        </p:style>
+        <p:txBody>
+          <a:bodyPr rtlCol="0" anchor="ctr"/>
+          <a:lstStyle/>
+          <a:p>
+            <a:pPr algn="ctr"/>
+            <a:r>
+              <a:rPr lang="es-ES_tradnl" sz="2400" b="1" dirty="0">
+                <a:solidFill>
+                  <a:schemeClr val="bg2"/>
+                </a:solidFill>
+              </a:rPr>
+              <a:t>PERFIL CRÍTICO</a:t>
+            </a:r>
+          </a:p>
+        </p:txBody>
+      </p:sp>
+      <p:sp>
+        <p:nvSpPr>
+          <p:cNvPr id="14" name="Rectangle 13">
+            <a:extLst>
+              <a:ext uri="{FF2B5EF4-FFF2-40B4-BE49-F238E27FC236}">
+                <a16:creationId xmlns:a16="http://schemas.microsoft.com/office/drawing/2014/main" id="{302D5BD7-5072-A712-E89D-315E1246CCD2}"/>
+              </a:ext>
+            </a:extLst>
+          </p:cNvPr>
+          <p:cNvSpPr/>
+          <p:nvPr/>
+        </p:nvSpPr>
+        <p:spPr>
+          <a:xfrm>
+            <a:off x="13262477" y="2335213"/>
+            <a:ext cx="3255100" cy="1106906"/>
+          </a:xfrm>
+          <a:prstGeom prst="rect">
+            <a:avLst/>
+          </a:prstGeom>
+          <a:solidFill>
+            <a:schemeClr val="bg1"/>
+          </a:solidFill>
+          <a:ln>
+            <a:solidFill>
+              <a:schemeClr val="bg2"/>
+            </a:solidFill>
+          </a:ln>
+        </p:spPr>
+        <p:style>
+          <a:lnRef idx="2">
+            <a:schemeClr val="accent1">
+              <a:shade val="50000"/>
+            </a:schemeClr>
+          </a:lnRef>
+          <a:fillRef idx="1">
+            <a:schemeClr val="accent1"/>
+          </a:fillRef>
+          <a:effectRef idx="0">
+            <a:schemeClr val="accent1"/>
+          </a:effectRef>
+          <a:fontRef idx="minor">
+            <a:schemeClr val="lt1"/>
+          </a:fontRef>
+        </p:style>
+        <p:txBody>
+          <a:bodyPr rtlCol="0" anchor="ctr"/>
+          <a:lstStyle/>
+          <a:p>
+            <a:pPr algn="ctr"/>
+            <a:r>
+              <a:rPr lang="es-ES_tradnl" sz="2400" b="1" dirty="0">
+                <a:solidFill>
+                  <a:schemeClr val="bg2"/>
+                </a:solidFill>
+              </a:rPr>
+              <a:t>PERFIL SATURADO</a:t>
+            </a:r>
+          </a:p>
+        </p:txBody>
+      </p:sp>
+      <p:sp>
+        <p:nvSpPr>
+          <p:cNvPr id="15" name="Rectangle 14">
+            <a:extLst>
+              <a:ext uri="{FF2B5EF4-FFF2-40B4-BE49-F238E27FC236}">
+                <a16:creationId xmlns:a16="http://schemas.microsoft.com/office/drawing/2014/main" id="{65FA6F57-08F9-AB33-9203-BBB34C284455}"/>
+              </a:ext>
+            </a:extLst>
+          </p:cNvPr>
+          <p:cNvSpPr/>
+          <p:nvPr/>
+        </p:nvSpPr>
+        <p:spPr>
+          <a:xfrm>
+            <a:off x="3083700" y="4226329"/>
+            <a:ext cx="2156379" cy="809011"/>
+          </a:xfrm>
+          <a:prstGeom prst="rect">
+            <a:avLst/>
+          </a:prstGeom>
+          <a:solidFill>
+            <a:schemeClr val="bg1"/>
+          </a:solidFill>
+          <a:ln>
+            <a:solidFill>
+              <a:schemeClr val="bg2"/>
+            </a:solidFill>
+          </a:ln>
+        </p:spPr>
+        <p:style>
+          <a:lnRef idx="2">
+            <a:schemeClr val="accent1">
+              <a:shade val="50000"/>
+            </a:schemeClr>
+          </a:lnRef>
+          <a:fillRef idx="1">
+            <a:schemeClr val="accent1"/>
+          </a:fillRef>
+          <a:effectRef idx="0">
+            <a:schemeClr val="accent1"/>
+          </a:effectRef>
+          <a:fontRef idx="minor">
+            <a:schemeClr val="lt1"/>
+          </a:fontRef>
+        </p:style>
+        <p:txBody>
+          <a:bodyPr rtlCol="0" anchor="ctr"/>
+          <a:lstStyle/>
+          <a:p>
+            <a:pPr algn="ctr"/>
+            <a:r>
+              <a:rPr lang="es-ES_tradnl" sz="2400" b="1" dirty="0">
+                <a:solidFill>
+                  <a:schemeClr val="bg2"/>
+                </a:solidFill>
+              </a:rPr>
+              <a:t>DESEMPEÑO</a:t>
+            </a:r>
+          </a:p>
+        </p:txBody>
+      </p:sp>
+      <p:grpSp>
+        <p:nvGrpSpPr>
+          <p:cNvPr id="164" name="Google Shape;164;p18">
+            <a:extLst>
+              <a:ext uri="{FF2B5EF4-FFF2-40B4-BE49-F238E27FC236}">
+                <a16:creationId xmlns:a16="http://schemas.microsoft.com/office/drawing/2014/main" id="{5C8F871A-0C94-7ACA-9EC2-2CF655A37500}"/>
+              </a:ext>
+            </a:extLst>
+          </p:cNvPr>
+          <p:cNvGrpSpPr/>
+          <p:nvPr/>
+        </p:nvGrpSpPr>
+        <p:grpSpPr>
+          <a:xfrm>
+            <a:off x="-118494" y="0"/>
+            <a:ext cx="2163413" cy="1886345"/>
+            <a:chOff x="12784175" y="3675030"/>
+            <a:chExt cx="2163413" cy="1886345"/>
+          </a:xfrm>
+        </p:grpSpPr>
+        <p:sp>
+          <p:nvSpPr>
+            <p:cNvPr id="165" name="Google Shape;165;p18">
+              <a:extLst>
+                <a:ext uri="{FF2B5EF4-FFF2-40B4-BE49-F238E27FC236}">
+                  <a16:creationId xmlns:a16="http://schemas.microsoft.com/office/drawing/2014/main" id="{0F8A5375-035A-B275-BEA1-4DAECA3886FE}"/>
+                </a:ext>
+              </a:extLst>
+            </p:cNvPr>
+            <p:cNvSpPr txBox="1"/>
+            <p:nvPr/>
+          </p:nvSpPr>
+          <p:spPr>
+            <a:xfrm rot="1830973">
+              <a:off x="12805773" y="4425496"/>
+              <a:ext cx="2081405" cy="652657"/>
+            </a:xfrm>
+            <a:prstGeom prst="rect">
+              <a:avLst/>
+            </a:prstGeom>
+            <a:noFill/>
+            <a:ln>
+              <a:noFill/>
+            </a:ln>
+          </p:spPr>
+          <p:txBody>
+            <a:bodyPr spcFirstLastPara="1" wrap="square" lIns="91425" tIns="91425" rIns="91425" bIns="91425" anchor="t" anchorCtr="0">
+              <a:noAutofit/>
+            </a:bodyPr>
+            <a:lstStyle/>
+            <a:p>
+              <a:pPr marL="0" lvl="0" indent="0" algn="l" rtl="0">
+                <a:spcBef>
+                  <a:spcPts val="0"/>
+                </a:spcBef>
+                <a:spcAft>
+                  <a:spcPts val="0"/>
+                </a:spcAft>
+                <a:buNone/>
+              </a:pPr>
+              <a:r>
+                <a:rPr lang="es-ES_tradnl" sz="2300" b="1" i="1" dirty="0">
+                  <a:solidFill>
+                    <a:srgbClr val="E69138"/>
+                  </a:solidFill>
+                  <a:latin typeface="Calibri"/>
+                  <a:ea typeface="Calibri"/>
+                  <a:cs typeface="Calibri"/>
+                  <a:sym typeface="Calibri"/>
+                </a:rPr>
+                <a:t>RAPID EXPRESS </a:t>
+              </a:r>
+            </a:p>
+          </p:txBody>
+        </p:sp>
+        <p:sp>
+          <p:nvSpPr>
+            <p:cNvPr id="166" name="Google Shape;166;p18">
+              <a:extLst>
+                <a:ext uri="{FF2B5EF4-FFF2-40B4-BE49-F238E27FC236}">
+                  <a16:creationId xmlns:a16="http://schemas.microsoft.com/office/drawing/2014/main" id="{5E8E3819-634B-8278-8583-C3C352EA55E4}"/>
+                </a:ext>
+              </a:extLst>
+            </p:cNvPr>
+            <p:cNvSpPr/>
+            <p:nvPr/>
+          </p:nvSpPr>
+          <p:spPr>
+            <a:xfrm>
+              <a:off x="13335203" y="3675030"/>
+              <a:ext cx="1612385" cy="1275250"/>
+            </a:xfrm>
+            <a:custGeom>
+              <a:avLst/>
+              <a:gdLst/>
+              <a:ahLst/>
+              <a:cxnLst/>
+              <a:rect l="l" t="t" r="r" b="b"/>
+              <a:pathLst>
+                <a:path w="1612385" h="1275250" extrusionOk="0">
+                  <a:moveTo>
+                    <a:pt x="0" y="0"/>
+                  </a:moveTo>
+                  <a:lnTo>
+                    <a:pt x="1612384" y="0"/>
+                  </a:lnTo>
+                  <a:lnTo>
+                    <a:pt x="1612384" y="1275249"/>
+                  </a:lnTo>
+                  <a:lnTo>
+                    <a:pt x="0" y="1275249"/>
+                  </a:lnTo>
+                  <a:lnTo>
+                    <a:pt x="0" y="0"/>
+                  </a:lnTo>
+                  <a:close/>
+                </a:path>
+              </a:pathLst>
+            </a:custGeom>
+            <a:blipFill rotWithShape="1">
+              <a:blip r:embed="rId3">
+                <a:alphaModFix/>
+              </a:blip>
+              <a:stretch>
+                <a:fillRect/>
+              </a:stretch>
+            </a:blipFill>
+            <a:ln>
+              <a:noFill/>
+            </a:ln>
+          </p:spPr>
+          <p:txBody>
+            <a:bodyPr/>
+            <a:lstStyle/>
+            <a:p>
+              <a:endParaRPr lang="es-ES_tradnl" dirty="0"/>
+            </a:p>
+          </p:txBody>
+        </p:sp>
+      </p:grpSp>
+      <p:sp>
+        <p:nvSpPr>
+          <p:cNvPr id="2" name="Rectangle 14">
+            <a:extLst>
+              <a:ext uri="{FF2B5EF4-FFF2-40B4-BE49-F238E27FC236}">
+                <a16:creationId xmlns:a16="http://schemas.microsoft.com/office/drawing/2014/main" id="{2C4573BD-4062-5928-8D40-C2F880FE60B9}"/>
+              </a:ext>
+            </a:extLst>
+          </p:cNvPr>
+          <p:cNvSpPr/>
+          <p:nvPr/>
+        </p:nvSpPr>
+        <p:spPr>
+          <a:xfrm>
+            <a:off x="845798" y="4246407"/>
+            <a:ext cx="1894041" cy="788933"/>
+          </a:xfrm>
+          <a:prstGeom prst="rect">
+            <a:avLst/>
+          </a:prstGeom>
+          <a:solidFill>
+            <a:schemeClr val="bg1"/>
+          </a:solidFill>
+          <a:ln>
+            <a:solidFill>
+              <a:schemeClr val="bg2"/>
+            </a:solidFill>
+          </a:ln>
+        </p:spPr>
+        <p:style>
+          <a:lnRef idx="2">
+            <a:schemeClr val="accent1">
+              <a:shade val="50000"/>
+            </a:schemeClr>
+          </a:lnRef>
+          <a:fillRef idx="1">
+            <a:schemeClr val="accent1"/>
+          </a:fillRef>
+          <a:effectRef idx="0">
+            <a:schemeClr val="accent1"/>
+          </a:effectRef>
+          <a:fontRef idx="minor">
+            <a:schemeClr val="lt1"/>
+          </a:fontRef>
+        </p:style>
+        <p:txBody>
+          <a:bodyPr rtlCol="0" anchor="ctr"/>
+          <a:lstStyle/>
+          <a:p>
+            <a:pPr algn="ctr"/>
+            <a:r>
+              <a:rPr lang="es-ES_tradnl" sz="2400" b="1" dirty="0">
+                <a:solidFill>
+                  <a:schemeClr val="bg2"/>
+                </a:solidFill>
+              </a:rPr>
+              <a:t>CARGA DE TRABAJO</a:t>
+            </a:r>
+          </a:p>
+        </p:txBody>
+      </p:sp>
+      <p:sp>
+        <p:nvSpPr>
+          <p:cNvPr id="3" name="Rectangle 14">
+            <a:extLst>
+              <a:ext uri="{FF2B5EF4-FFF2-40B4-BE49-F238E27FC236}">
+                <a16:creationId xmlns:a16="http://schemas.microsoft.com/office/drawing/2014/main" id="{D73DF1B4-7E07-1FFB-F523-7DC8DC5EECDF}"/>
+              </a:ext>
+            </a:extLst>
+          </p:cNvPr>
+          <p:cNvSpPr/>
+          <p:nvPr/>
+        </p:nvSpPr>
+        <p:spPr>
+          <a:xfrm>
+            <a:off x="9021997" y="3616080"/>
+            <a:ext cx="2156379" cy="809011"/>
+          </a:xfrm>
+          <a:prstGeom prst="rect">
+            <a:avLst/>
+          </a:prstGeom>
+          <a:solidFill>
+            <a:schemeClr val="bg1"/>
+          </a:solidFill>
+          <a:ln>
+            <a:solidFill>
+              <a:schemeClr val="bg2"/>
+            </a:solidFill>
+          </a:ln>
+        </p:spPr>
+        <p:style>
+          <a:lnRef idx="2">
+            <a:schemeClr val="accent1">
+              <a:shade val="50000"/>
+            </a:schemeClr>
+          </a:lnRef>
+          <a:fillRef idx="1">
+            <a:schemeClr val="accent1"/>
+          </a:fillRef>
+          <a:effectRef idx="0">
+            <a:schemeClr val="accent1"/>
+          </a:effectRef>
+          <a:fontRef idx="minor">
+            <a:schemeClr val="lt1"/>
+          </a:fontRef>
+        </p:style>
+        <p:txBody>
+          <a:bodyPr rtlCol="0" anchor="ctr"/>
+          <a:lstStyle/>
+          <a:p>
+            <a:pPr algn="ctr"/>
+            <a:r>
+              <a:rPr lang="es-ES_tradnl" sz="2400" b="1" dirty="0">
+                <a:solidFill>
+                  <a:schemeClr val="bg2"/>
+                </a:solidFill>
+              </a:rPr>
+              <a:t>DESEMPEÑO</a:t>
+            </a:r>
+          </a:p>
+        </p:txBody>
+      </p:sp>
+      <p:sp>
+        <p:nvSpPr>
+          <p:cNvPr id="4" name="Rectangle 14">
+            <a:extLst>
+              <a:ext uri="{FF2B5EF4-FFF2-40B4-BE49-F238E27FC236}">
+                <a16:creationId xmlns:a16="http://schemas.microsoft.com/office/drawing/2014/main" id="{5E7CDE07-09E1-9659-2686-57651D05F2A7}"/>
+              </a:ext>
+            </a:extLst>
+          </p:cNvPr>
+          <p:cNvSpPr/>
+          <p:nvPr/>
+        </p:nvSpPr>
+        <p:spPr>
+          <a:xfrm>
+            <a:off x="6692170" y="3626941"/>
+            <a:ext cx="1894041" cy="788933"/>
+          </a:xfrm>
+          <a:prstGeom prst="rect">
+            <a:avLst/>
+          </a:prstGeom>
+          <a:solidFill>
+            <a:schemeClr val="bg1"/>
+          </a:solidFill>
+          <a:ln>
+            <a:solidFill>
+              <a:schemeClr val="bg2"/>
+            </a:solidFill>
+          </a:ln>
+        </p:spPr>
+        <p:style>
+          <a:lnRef idx="2">
+            <a:schemeClr val="accent1">
+              <a:shade val="50000"/>
+            </a:schemeClr>
+          </a:lnRef>
+          <a:fillRef idx="1">
+            <a:schemeClr val="accent1"/>
+          </a:fillRef>
+          <a:effectRef idx="0">
+            <a:schemeClr val="accent1"/>
+          </a:effectRef>
+          <a:fontRef idx="minor">
+            <a:schemeClr val="lt1"/>
+          </a:fontRef>
+        </p:style>
+        <p:txBody>
+          <a:bodyPr rtlCol="0" anchor="ctr"/>
+          <a:lstStyle/>
+          <a:p>
+            <a:pPr algn="ctr"/>
+            <a:r>
+              <a:rPr lang="es-ES_tradnl" sz="2400" b="1" dirty="0">
+                <a:solidFill>
+                  <a:schemeClr val="bg2"/>
+                </a:solidFill>
+              </a:rPr>
+              <a:t>CARGA DE TRABAJO</a:t>
+            </a:r>
+          </a:p>
+        </p:txBody>
+      </p:sp>
+      <p:sp>
+        <p:nvSpPr>
+          <p:cNvPr id="5" name="Rectangle 14">
+            <a:extLst>
+              <a:ext uri="{FF2B5EF4-FFF2-40B4-BE49-F238E27FC236}">
+                <a16:creationId xmlns:a16="http://schemas.microsoft.com/office/drawing/2014/main" id="{7B9DE141-DEAD-5D5C-77C3-4E9EF984166B}"/>
+              </a:ext>
+            </a:extLst>
+          </p:cNvPr>
+          <p:cNvSpPr/>
+          <p:nvPr/>
+        </p:nvSpPr>
+        <p:spPr>
+          <a:xfrm>
+            <a:off x="15076684" y="4226329"/>
+            <a:ext cx="2156379" cy="809011"/>
+          </a:xfrm>
+          <a:prstGeom prst="rect">
+            <a:avLst/>
+          </a:prstGeom>
+          <a:solidFill>
+            <a:schemeClr val="bg1"/>
+          </a:solidFill>
+          <a:ln>
+            <a:solidFill>
+              <a:schemeClr val="bg2"/>
+            </a:solidFill>
+          </a:ln>
+        </p:spPr>
+        <p:style>
+          <a:lnRef idx="2">
+            <a:schemeClr val="accent1">
+              <a:shade val="50000"/>
+            </a:schemeClr>
+          </a:lnRef>
+          <a:fillRef idx="1">
+            <a:schemeClr val="accent1"/>
+          </a:fillRef>
+          <a:effectRef idx="0">
+            <a:schemeClr val="accent1"/>
+          </a:effectRef>
+          <a:fontRef idx="minor">
+            <a:schemeClr val="lt1"/>
+          </a:fontRef>
+        </p:style>
+        <p:txBody>
+          <a:bodyPr rtlCol="0" anchor="ctr"/>
+          <a:lstStyle/>
+          <a:p>
+            <a:pPr algn="ctr"/>
+            <a:r>
+              <a:rPr lang="es-ES_tradnl" sz="2400" b="1" dirty="0">
+                <a:solidFill>
+                  <a:schemeClr val="bg2"/>
+                </a:solidFill>
+              </a:rPr>
+              <a:t>DESEMPEÑO</a:t>
+            </a:r>
+          </a:p>
+        </p:txBody>
+      </p:sp>
+      <p:sp>
+        <p:nvSpPr>
+          <p:cNvPr id="6" name="Rectangle 14">
+            <a:extLst>
+              <a:ext uri="{FF2B5EF4-FFF2-40B4-BE49-F238E27FC236}">
+                <a16:creationId xmlns:a16="http://schemas.microsoft.com/office/drawing/2014/main" id="{AAA1FC9E-85E7-5CC1-7D4C-008E402DA12E}"/>
+              </a:ext>
+            </a:extLst>
+          </p:cNvPr>
+          <p:cNvSpPr/>
+          <p:nvPr/>
+        </p:nvSpPr>
+        <p:spPr>
+          <a:xfrm>
+            <a:off x="12872043" y="4246407"/>
+            <a:ext cx="1894041" cy="788933"/>
+          </a:xfrm>
+          <a:prstGeom prst="rect">
+            <a:avLst/>
+          </a:prstGeom>
+          <a:solidFill>
+            <a:schemeClr val="bg1"/>
+          </a:solidFill>
+          <a:ln>
+            <a:solidFill>
+              <a:schemeClr val="bg2"/>
+            </a:solidFill>
+          </a:ln>
+        </p:spPr>
+        <p:style>
+          <a:lnRef idx="2">
+            <a:schemeClr val="accent1">
+              <a:shade val="50000"/>
+            </a:schemeClr>
+          </a:lnRef>
+          <a:fillRef idx="1">
+            <a:schemeClr val="accent1"/>
+          </a:fillRef>
+          <a:effectRef idx="0">
+            <a:schemeClr val="accent1"/>
+          </a:effectRef>
+          <a:fontRef idx="minor">
+            <a:schemeClr val="lt1"/>
+          </a:fontRef>
+        </p:style>
+        <p:txBody>
+          <a:bodyPr rtlCol="0" anchor="ctr"/>
+          <a:lstStyle/>
+          <a:p>
+            <a:pPr algn="ctr"/>
+            <a:r>
+              <a:rPr lang="es-ES_tradnl" sz="2400" b="1" dirty="0">
+                <a:solidFill>
+                  <a:schemeClr val="bg2"/>
+                </a:solidFill>
+              </a:rPr>
+              <a:t>CARGA DE TRABAJO</a:t>
+            </a:r>
+          </a:p>
+        </p:txBody>
+      </p:sp>
+      <p:sp>
+        <p:nvSpPr>
+          <p:cNvPr id="7" name="Rectangle 14">
+            <a:extLst>
+              <a:ext uri="{FF2B5EF4-FFF2-40B4-BE49-F238E27FC236}">
+                <a16:creationId xmlns:a16="http://schemas.microsoft.com/office/drawing/2014/main" id="{1A371D18-CFF7-7C81-AB14-A754411D14F9}"/>
+              </a:ext>
+            </a:extLst>
+          </p:cNvPr>
+          <p:cNvSpPr/>
+          <p:nvPr/>
+        </p:nvSpPr>
+        <p:spPr>
+          <a:xfrm>
+            <a:off x="3161026" y="5891203"/>
+            <a:ext cx="1569433" cy="751127"/>
+          </a:xfrm>
+          <a:prstGeom prst="rect">
+            <a:avLst/>
+          </a:prstGeom>
+          <a:solidFill>
+            <a:schemeClr val="bg1"/>
+          </a:solidFill>
+          <a:ln>
+            <a:solidFill>
+              <a:schemeClr val="bg2"/>
+            </a:solidFill>
+          </a:ln>
+        </p:spPr>
+        <p:style>
+          <a:lnRef idx="2">
+            <a:schemeClr val="accent1">
+              <a:shade val="50000"/>
+            </a:schemeClr>
+          </a:lnRef>
+          <a:fillRef idx="1">
+            <a:schemeClr val="accent1"/>
+          </a:fillRef>
+          <a:effectRef idx="0">
+            <a:schemeClr val="accent1"/>
+          </a:effectRef>
+          <a:fontRef idx="minor">
+            <a:schemeClr val="lt1"/>
+          </a:fontRef>
+        </p:style>
+        <p:txBody>
+          <a:bodyPr rtlCol="0" anchor="ctr"/>
+          <a:lstStyle/>
+          <a:p>
+            <a:pPr algn="ctr"/>
+            <a:r>
+              <a:rPr lang="es-ES_tradnl" sz="2400" b="1" dirty="0">
+                <a:solidFill>
+                  <a:schemeClr val="bg2"/>
+                </a:solidFill>
+              </a:rPr>
+              <a:t>81%</a:t>
+            </a:r>
+          </a:p>
+        </p:txBody>
+      </p:sp>
+      <p:sp>
+        <p:nvSpPr>
+          <p:cNvPr id="8" name="Rectangle 14">
+            <a:extLst>
+              <a:ext uri="{FF2B5EF4-FFF2-40B4-BE49-F238E27FC236}">
+                <a16:creationId xmlns:a16="http://schemas.microsoft.com/office/drawing/2014/main" id="{FFF26C2C-4A64-4E35-607C-B6984CE1B315}"/>
+              </a:ext>
+            </a:extLst>
+          </p:cNvPr>
+          <p:cNvSpPr/>
+          <p:nvPr/>
+        </p:nvSpPr>
+        <p:spPr>
+          <a:xfrm>
+            <a:off x="845798" y="5888343"/>
+            <a:ext cx="1894041" cy="788933"/>
+          </a:xfrm>
+          <a:prstGeom prst="rect">
+            <a:avLst/>
+          </a:prstGeom>
+          <a:solidFill>
+            <a:schemeClr val="bg1"/>
+          </a:solidFill>
+          <a:ln>
+            <a:solidFill>
+              <a:schemeClr val="bg2"/>
+            </a:solidFill>
+          </a:ln>
+        </p:spPr>
+        <p:style>
+          <a:lnRef idx="2">
+            <a:schemeClr val="accent1">
+              <a:shade val="50000"/>
+            </a:schemeClr>
+          </a:lnRef>
+          <a:fillRef idx="1">
+            <a:schemeClr val="accent1"/>
+          </a:fillRef>
+          <a:effectRef idx="0">
+            <a:schemeClr val="accent1"/>
+          </a:effectRef>
+          <a:fontRef idx="minor">
+            <a:schemeClr val="lt1"/>
+          </a:fontRef>
+        </p:style>
+        <p:txBody>
+          <a:bodyPr rtlCol="0" anchor="ctr"/>
+          <a:lstStyle/>
+          <a:p>
+            <a:pPr algn="ctr"/>
+            <a:r>
+              <a:rPr lang="es-ES_tradnl" sz="2400" b="1" dirty="0">
+                <a:solidFill>
+                  <a:schemeClr val="bg2"/>
+                </a:solidFill>
+              </a:rPr>
+              <a:t>289 – 298 paquetes</a:t>
+            </a:r>
+          </a:p>
+        </p:txBody>
+      </p:sp>
+      <p:sp>
+        <p:nvSpPr>
+          <p:cNvPr id="9" name="Rectangle 14">
+            <a:extLst>
+              <a:ext uri="{FF2B5EF4-FFF2-40B4-BE49-F238E27FC236}">
+                <a16:creationId xmlns:a16="http://schemas.microsoft.com/office/drawing/2014/main" id="{2C786784-9FA6-D511-DA8C-F5E16FE4EADD}"/>
+              </a:ext>
+            </a:extLst>
+          </p:cNvPr>
+          <p:cNvSpPr/>
+          <p:nvPr/>
+        </p:nvSpPr>
+        <p:spPr>
+          <a:xfrm>
+            <a:off x="9021996" y="5143501"/>
+            <a:ext cx="1569433" cy="760440"/>
+          </a:xfrm>
+          <a:prstGeom prst="rect">
+            <a:avLst/>
+          </a:prstGeom>
+          <a:solidFill>
+            <a:schemeClr val="bg1"/>
+          </a:solidFill>
+          <a:ln>
+            <a:solidFill>
+              <a:schemeClr val="bg2"/>
+            </a:solidFill>
+          </a:ln>
+        </p:spPr>
+        <p:style>
+          <a:lnRef idx="2">
+            <a:schemeClr val="accent1">
+              <a:shade val="50000"/>
+            </a:schemeClr>
+          </a:lnRef>
+          <a:fillRef idx="1">
+            <a:schemeClr val="accent1"/>
+          </a:fillRef>
+          <a:effectRef idx="0">
+            <a:schemeClr val="accent1"/>
+          </a:effectRef>
+          <a:fontRef idx="minor">
+            <a:schemeClr val="lt1"/>
+          </a:fontRef>
+        </p:style>
+        <p:txBody>
+          <a:bodyPr rtlCol="0" anchor="ctr"/>
+          <a:lstStyle/>
+          <a:p>
+            <a:pPr algn="ctr"/>
+            <a:r>
+              <a:rPr lang="es-ES_tradnl" sz="2400" b="1" dirty="0">
+                <a:solidFill>
+                  <a:schemeClr val="bg2"/>
+                </a:solidFill>
+              </a:rPr>
+              <a:t>98.7%</a:t>
+            </a:r>
+          </a:p>
+        </p:txBody>
+      </p:sp>
+      <p:sp>
+        <p:nvSpPr>
+          <p:cNvPr id="10" name="Rectangle 14">
+            <a:extLst>
+              <a:ext uri="{FF2B5EF4-FFF2-40B4-BE49-F238E27FC236}">
+                <a16:creationId xmlns:a16="http://schemas.microsoft.com/office/drawing/2014/main" id="{AA30C771-E6A3-FE09-F41C-D9F5FEC85A32}"/>
+              </a:ext>
+            </a:extLst>
+          </p:cNvPr>
+          <p:cNvSpPr/>
+          <p:nvPr/>
+        </p:nvSpPr>
+        <p:spPr>
+          <a:xfrm>
+            <a:off x="6692169" y="5143500"/>
+            <a:ext cx="1894041" cy="788933"/>
+          </a:xfrm>
+          <a:prstGeom prst="rect">
+            <a:avLst/>
+          </a:prstGeom>
+          <a:solidFill>
+            <a:schemeClr val="bg1"/>
+          </a:solidFill>
+          <a:ln>
+            <a:solidFill>
+              <a:schemeClr val="bg2"/>
+            </a:solidFill>
+          </a:ln>
+        </p:spPr>
+        <p:style>
+          <a:lnRef idx="2">
+            <a:schemeClr val="accent1">
+              <a:shade val="50000"/>
+            </a:schemeClr>
+          </a:lnRef>
+          <a:fillRef idx="1">
+            <a:schemeClr val="accent1"/>
+          </a:fillRef>
+          <a:effectRef idx="0">
+            <a:schemeClr val="accent1"/>
+          </a:effectRef>
+          <a:fontRef idx="minor">
+            <a:schemeClr val="lt1"/>
+          </a:fontRef>
+        </p:style>
+        <p:txBody>
+          <a:bodyPr rtlCol="0" anchor="ctr"/>
+          <a:lstStyle/>
+          <a:p>
+            <a:pPr algn="ctr"/>
+            <a:r>
+              <a:rPr lang="es-ES_tradnl" sz="2400" b="1" dirty="0">
+                <a:solidFill>
+                  <a:schemeClr val="bg2"/>
+                </a:solidFill>
+              </a:rPr>
+              <a:t>237 – 239 paquetes</a:t>
+            </a:r>
+          </a:p>
+        </p:txBody>
+      </p:sp>
+      <p:sp>
+        <p:nvSpPr>
+          <p:cNvPr id="12" name="Rectangle 14">
+            <a:extLst>
+              <a:ext uri="{FF2B5EF4-FFF2-40B4-BE49-F238E27FC236}">
+                <a16:creationId xmlns:a16="http://schemas.microsoft.com/office/drawing/2014/main" id="{BCA2D389-3019-B741-E06C-B5218ED92F60}"/>
+              </a:ext>
+            </a:extLst>
+          </p:cNvPr>
+          <p:cNvSpPr/>
+          <p:nvPr/>
+        </p:nvSpPr>
+        <p:spPr>
+          <a:xfrm>
+            <a:off x="15187271" y="5880162"/>
+            <a:ext cx="1587813" cy="751128"/>
+          </a:xfrm>
+          <a:prstGeom prst="rect">
+            <a:avLst/>
+          </a:prstGeom>
+          <a:solidFill>
+            <a:schemeClr val="bg1"/>
+          </a:solidFill>
+          <a:ln>
+            <a:solidFill>
+              <a:schemeClr val="bg2"/>
+            </a:solidFill>
+          </a:ln>
+        </p:spPr>
+        <p:style>
+          <a:lnRef idx="2">
+            <a:schemeClr val="accent1">
+              <a:shade val="50000"/>
+            </a:schemeClr>
+          </a:lnRef>
+          <a:fillRef idx="1">
+            <a:schemeClr val="accent1"/>
+          </a:fillRef>
+          <a:effectRef idx="0">
+            <a:schemeClr val="accent1"/>
+          </a:effectRef>
+          <a:fontRef idx="minor">
+            <a:schemeClr val="lt1"/>
+          </a:fontRef>
+        </p:style>
+        <p:txBody>
+          <a:bodyPr rtlCol="0" anchor="ctr"/>
+          <a:lstStyle/>
+          <a:p>
+            <a:pPr algn="ctr"/>
+            <a:r>
+              <a:rPr lang="es-ES_tradnl" sz="2400" b="1" dirty="0">
+                <a:solidFill>
+                  <a:schemeClr val="bg2"/>
+                </a:solidFill>
+              </a:rPr>
+              <a:t>95.5%</a:t>
+            </a:r>
+          </a:p>
+        </p:txBody>
+      </p:sp>
+      <p:sp>
+        <p:nvSpPr>
+          <p:cNvPr id="18" name="Rectangle 14">
+            <a:extLst>
+              <a:ext uri="{FF2B5EF4-FFF2-40B4-BE49-F238E27FC236}">
+                <a16:creationId xmlns:a16="http://schemas.microsoft.com/office/drawing/2014/main" id="{07227D69-5E0C-A63D-B5C0-BD57482FD335}"/>
+              </a:ext>
+            </a:extLst>
+          </p:cNvPr>
+          <p:cNvSpPr/>
+          <p:nvPr/>
+        </p:nvSpPr>
+        <p:spPr>
+          <a:xfrm>
+            <a:off x="12872043" y="5890483"/>
+            <a:ext cx="1894041" cy="788933"/>
+          </a:xfrm>
+          <a:prstGeom prst="rect">
+            <a:avLst/>
+          </a:prstGeom>
+          <a:solidFill>
+            <a:schemeClr val="bg1"/>
+          </a:solidFill>
+          <a:ln>
+            <a:solidFill>
+              <a:schemeClr val="bg2"/>
+            </a:solidFill>
+          </a:ln>
+        </p:spPr>
+        <p:style>
+          <a:lnRef idx="2">
+            <a:schemeClr val="accent1">
+              <a:shade val="50000"/>
+            </a:schemeClr>
+          </a:lnRef>
+          <a:fillRef idx="1">
+            <a:schemeClr val="accent1"/>
+          </a:fillRef>
+          <a:effectRef idx="0">
+            <a:schemeClr val="accent1"/>
+          </a:effectRef>
+          <a:fontRef idx="minor">
+            <a:schemeClr val="lt1"/>
+          </a:fontRef>
+        </p:style>
+        <p:txBody>
+          <a:bodyPr rtlCol="0" anchor="ctr"/>
+          <a:lstStyle/>
+          <a:p>
+            <a:pPr algn="ctr"/>
+            <a:r>
+              <a:rPr lang="es-ES_tradnl" sz="2400" b="1" dirty="0">
+                <a:solidFill>
+                  <a:schemeClr val="bg2"/>
+                </a:solidFill>
+              </a:rPr>
+              <a:t>&gt; 304</a:t>
+            </a:r>
+            <a:br>
+              <a:rPr lang="es-ES_tradnl" sz="2400" b="1" dirty="0">
+                <a:solidFill>
+                  <a:schemeClr val="bg2"/>
+                </a:solidFill>
+              </a:rPr>
+            </a:br>
+            <a:r>
+              <a:rPr lang="es-ES_tradnl" sz="2400" b="1" dirty="0">
+                <a:solidFill>
+                  <a:schemeClr val="bg2"/>
+                </a:solidFill>
+              </a:rPr>
+              <a:t>paquetes</a:t>
+            </a:r>
+          </a:p>
+        </p:txBody>
+      </p:sp>
+      <p:sp>
+        <p:nvSpPr>
+          <p:cNvPr id="19" name="Flecha abajo 18">
+            <a:extLst>
+              <a:ext uri="{FF2B5EF4-FFF2-40B4-BE49-F238E27FC236}">
+                <a16:creationId xmlns:a16="http://schemas.microsoft.com/office/drawing/2014/main" id="{06892AA4-0E84-0998-2A87-8514C668B258}"/>
+              </a:ext>
+            </a:extLst>
+          </p:cNvPr>
+          <p:cNvSpPr/>
+          <p:nvPr/>
+        </p:nvSpPr>
+        <p:spPr>
+          <a:xfrm>
+            <a:off x="7639189" y="2947681"/>
+            <a:ext cx="349135" cy="590931"/>
+          </a:xfrm>
+          <a:prstGeom prst="downArrow">
+            <a:avLst/>
+          </a:prstGeom>
+          <a:solidFill>
+            <a:srgbClr val="00B050"/>
+          </a:solidFill>
+          <a:ln>
+            <a:solidFill>
+              <a:schemeClr val="accent3">
+                <a:lumMod val="75000"/>
+              </a:schemeClr>
+            </a:solidFill>
+          </a:ln>
+        </p:spPr>
+        <p:style>
+          <a:lnRef idx="2">
+            <a:schemeClr val="accent1">
+              <a:shade val="15000"/>
+            </a:schemeClr>
+          </a:lnRef>
+          <a:fillRef idx="1">
+            <a:schemeClr val="accent1"/>
+          </a:fillRef>
+          <a:effectRef idx="0">
+            <a:schemeClr val="accent1"/>
+          </a:effectRef>
+          <a:fontRef idx="minor">
+            <a:schemeClr val="lt1"/>
+          </a:fontRef>
+        </p:style>
+        <p:txBody>
+          <a:bodyPr rtlCol="0" anchor="ctr"/>
+          <a:lstStyle/>
+          <a:p>
+            <a:pPr algn="ctr"/>
+            <a:endParaRPr lang="es-ES"/>
+          </a:p>
+        </p:txBody>
+      </p:sp>
+      <p:sp>
+        <p:nvSpPr>
+          <p:cNvPr id="20" name="Flecha abajo 19">
+            <a:extLst>
+              <a:ext uri="{FF2B5EF4-FFF2-40B4-BE49-F238E27FC236}">
+                <a16:creationId xmlns:a16="http://schemas.microsoft.com/office/drawing/2014/main" id="{27DF9403-FC07-1FE3-C630-B4CCB48243CD}"/>
+              </a:ext>
+            </a:extLst>
+          </p:cNvPr>
+          <p:cNvSpPr/>
+          <p:nvPr/>
+        </p:nvSpPr>
+        <p:spPr>
+          <a:xfrm>
+            <a:off x="9504430" y="2961410"/>
+            <a:ext cx="349135" cy="590931"/>
+          </a:xfrm>
+          <a:prstGeom prst="downArrow">
+            <a:avLst/>
+          </a:prstGeom>
+          <a:solidFill>
+            <a:srgbClr val="00B050"/>
+          </a:solidFill>
+          <a:ln>
+            <a:solidFill>
+              <a:schemeClr val="accent3">
+                <a:lumMod val="75000"/>
+              </a:schemeClr>
+            </a:solidFill>
+          </a:ln>
+        </p:spPr>
+        <p:style>
+          <a:lnRef idx="2">
+            <a:schemeClr val="accent1">
+              <a:shade val="15000"/>
+            </a:schemeClr>
+          </a:lnRef>
+          <a:fillRef idx="1">
+            <a:schemeClr val="accent1"/>
+          </a:fillRef>
+          <a:effectRef idx="0">
+            <a:schemeClr val="accent1"/>
+          </a:effectRef>
+          <a:fontRef idx="minor">
+            <a:schemeClr val="lt1"/>
+          </a:fontRef>
+        </p:style>
+        <p:txBody>
+          <a:bodyPr rtlCol="0" anchor="ctr"/>
+          <a:lstStyle/>
+          <a:p>
+            <a:pPr algn="ctr"/>
+            <a:endParaRPr lang="es-ES"/>
+          </a:p>
+        </p:txBody>
+      </p:sp>
+      <p:sp>
+        <p:nvSpPr>
+          <p:cNvPr id="21" name="Flecha abajo 20">
+            <a:extLst>
+              <a:ext uri="{FF2B5EF4-FFF2-40B4-BE49-F238E27FC236}">
+                <a16:creationId xmlns:a16="http://schemas.microsoft.com/office/drawing/2014/main" id="{4AE8A597-AD4C-6807-9C29-6DF665B918CA}"/>
+              </a:ext>
+            </a:extLst>
+          </p:cNvPr>
+          <p:cNvSpPr/>
+          <p:nvPr/>
+        </p:nvSpPr>
+        <p:spPr>
+          <a:xfrm>
+            <a:off x="7639188" y="4504203"/>
+            <a:ext cx="349135" cy="590931"/>
+          </a:xfrm>
+          <a:prstGeom prst="downArrow">
+            <a:avLst/>
+          </a:prstGeom>
+          <a:solidFill>
+            <a:srgbClr val="00B050"/>
+          </a:solidFill>
+          <a:ln>
+            <a:solidFill>
+              <a:schemeClr val="accent3">
+                <a:lumMod val="75000"/>
+              </a:schemeClr>
+            </a:solidFill>
+          </a:ln>
+        </p:spPr>
+        <p:style>
+          <a:lnRef idx="2">
+            <a:schemeClr val="accent1">
+              <a:shade val="15000"/>
+            </a:schemeClr>
+          </a:lnRef>
+          <a:fillRef idx="1">
+            <a:schemeClr val="accent1"/>
+          </a:fillRef>
+          <a:effectRef idx="0">
+            <a:schemeClr val="accent1"/>
+          </a:effectRef>
+          <a:fontRef idx="minor">
+            <a:schemeClr val="lt1"/>
+          </a:fontRef>
+        </p:style>
+        <p:txBody>
+          <a:bodyPr rtlCol="0" anchor="ctr"/>
+          <a:lstStyle/>
+          <a:p>
+            <a:pPr algn="ctr"/>
+            <a:endParaRPr lang="es-ES"/>
+          </a:p>
+        </p:txBody>
+      </p:sp>
+      <p:sp>
+        <p:nvSpPr>
+          <p:cNvPr id="22" name="Flecha abajo 21">
+            <a:extLst>
+              <a:ext uri="{FF2B5EF4-FFF2-40B4-BE49-F238E27FC236}">
+                <a16:creationId xmlns:a16="http://schemas.microsoft.com/office/drawing/2014/main" id="{07ECE06B-223A-0567-4341-27AA5F848363}"/>
+              </a:ext>
+            </a:extLst>
+          </p:cNvPr>
+          <p:cNvSpPr/>
+          <p:nvPr/>
+        </p:nvSpPr>
+        <p:spPr>
+          <a:xfrm>
+            <a:off x="9504429" y="4504203"/>
+            <a:ext cx="349135" cy="590931"/>
+          </a:xfrm>
+          <a:prstGeom prst="downArrow">
+            <a:avLst/>
+          </a:prstGeom>
+          <a:solidFill>
+            <a:srgbClr val="00B050"/>
+          </a:solidFill>
+          <a:ln>
+            <a:solidFill>
+              <a:schemeClr val="accent3">
+                <a:lumMod val="75000"/>
+              </a:schemeClr>
+            </a:solidFill>
+          </a:ln>
+        </p:spPr>
+        <p:style>
+          <a:lnRef idx="2">
+            <a:schemeClr val="accent1">
+              <a:shade val="15000"/>
+            </a:schemeClr>
+          </a:lnRef>
+          <a:fillRef idx="1">
+            <a:schemeClr val="accent1"/>
+          </a:fillRef>
+          <a:effectRef idx="0">
+            <a:schemeClr val="accent1"/>
+          </a:effectRef>
+          <a:fontRef idx="minor">
+            <a:schemeClr val="lt1"/>
+          </a:fontRef>
+        </p:style>
+        <p:txBody>
+          <a:bodyPr rtlCol="0" anchor="ctr"/>
+          <a:lstStyle/>
+          <a:p>
+            <a:pPr algn="ctr"/>
+            <a:endParaRPr lang="es-ES"/>
+          </a:p>
+        </p:txBody>
+      </p:sp>
+      <p:sp>
+        <p:nvSpPr>
+          <p:cNvPr id="23" name="Flecha abajo 22">
+            <a:extLst>
+              <a:ext uri="{FF2B5EF4-FFF2-40B4-BE49-F238E27FC236}">
+                <a16:creationId xmlns:a16="http://schemas.microsoft.com/office/drawing/2014/main" id="{356C1CDD-C354-2A09-BFC9-FADEB6A7E64A}"/>
+              </a:ext>
+            </a:extLst>
+          </p:cNvPr>
+          <p:cNvSpPr/>
+          <p:nvPr/>
+        </p:nvSpPr>
+        <p:spPr>
+          <a:xfrm>
+            <a:off x="13672226" y="3598578"/>
+            <a:ext cx="349135" cy="590931"/>
+          </a:xfrm>
+          <a:prstGeom prst="downArrow">
+            <a:avLst/>
+          </a:prstGeom>
+          <a:solidFill>
+            <a:schemeClr val="accent6">
+              <a:lumMod val="75000"/>
+            </a:schemeClr>
+          </a:solidFill>
+          <a:ln>
+            <a:solidFill>
+              <a:schemeClr val="accent6">
+                <a:lumMod val="50000"/>
+              </a:schemeClr>
+            </a:solidFill>
+          </a:ln>
+        </p:spPr>
+        <p:style>
+          <a:lnRef idx="2">
+            <a:schemeClr val="accent1">
+              <a:shade val="15000"/>
+            </a:schemeClr>
+          </a:lnRef>
+          <a:fillRef idx="1">
+            <a:schemeClr val="accent1"/>
+          </a:fillRef>
+          <a:effectRef idx="0">
+            <a:schemeClr val="accent1"/>
+          </a:effectRef>
+          <a:fontRef idx="minor">
+            <a:schemeClr val="lt1"/>
+          </a:fontRef>
+        </p:style>
+        <p:txBody>
+          <a:bodyPr rtlCol="0" anchor="ctr"/>
+          <a:lstStyle/>
+          <a:p>
+            <a:pPr algn="ctr"/>
+            <a:endParaRPr lang="es-ES"/>
+          </a:p>
+        </p:txBody>
+      </p:sp>
+      <p:sp>
+        <p:nvSpPr>
+          <p:cNvPr id="24" name="Flecha abajo 23">
+            <a:extLst>
+              <a:ext uri="{FF2B5EF4-FFF2-40B4-BE49-F238E27FC236}">
+                <a16:creationId xmlns:a16="http://schemas.microsoft.com/office/drawing/2014/main" id="{7C533EBD-554B-77AE-8C4D-66526DB7A975}"/>
+              </a:ext>
+            </a:extLst>
+          </p:cNvPr>
+          <p:cNvSpPr/>
+          <p:nvPr/>
+        </p:nvSpPr>
+        <p:spPr>
+          <a:xfrm>
+            <a:off x="15537467" y="3612307"/>
+            <a:ext cx="349135" cy="590931"/>
+          </a:xfrm>
+          <a:prstGeom prst="downArrow">
+            <a:avLst/>
+          </a:prstGeom>
+          <a:solidFill>
+            <a:schemeClr val="accent6">
+              <a:lumMod val="75000"/>
+            </a:schemeClr>
+          </a:solidFill>
+          <a:ln>
+            <a:solidFill>
+              <a:schemeClr val="accent6">
+                <a:lumMod val="50000"/>
+              </a:schemeClr>
+            </a:solidFill>
+          </a:ln>
+        </p:spPr>
+        <p:style>
+          <a:lnRef idx="2">
+            <a:schemeClr val="accent1">
+              <a:shade val="15000"/>
+            </a:schemeClr>
+          </a:lnRef>
+          <a:fillRef idx="1">
+            <a:schemeClr val="accent1"/>
+          </a:fillRef>
+          <a:effectRef idx="0">
+            <a:schemeClr val="accent1"/>
+          </a:effectRef>
+          <a:fontRef idx="minor">
+            <a:schemeClr val="lt1"/>
+          </a:fontRef>
+        </p:style>
+        <p:txBody>
+          <a:bodyPr rtlCol="0" anchor="ctr"/>
+          <a:lstStyle/>
+          <a:p>
+            <a:pPr algn="ctr"/>
+            <a:endParaRPr lang="es-ES"/>
+          </a:p>
+        </p:txBody>
+      </p:sp>
+      <p:sp>
+        <p:nvSpPr>
+          <p:cNvPr id="25" name="Flecha abajo 24">
+            <a:extLst>
+              <a:ext uri="{FF2B5EF4-FFF2-40B4-BE49-F238E27FC236}">
+                <a16:creationId xmlns:a16="http://schemas.microsoft.com/office/drawing/2014/main" id="{36297C3E-7832-B3A4-DE68-A8D5264D0CDB}"/>
+              </a:ext>
+            </a:extLst>
+          </p:cNvPr>
+          <p:cNvSpPr/>
+          <p:nvPr/>
+        </p:nvSpPr>
+        <p:spPr>
+          <a:xfrm>
+            <a:off x="13672225" y="5155100"/>
+            <a:ext cx="349135" cy="590931"/>
+          </a:xfrm>
+          <a:prstGeom prst="downArrow">
+            <a:avLst/>
+          </a:prstGeom>
+          <a:solidFill>
+            <a:schemeClr val="accent6">
+              <a:lumMod val="75000"/>
+            </a:schemeClr>
+          </a:solidFill>
+          <a:ln>
+            <a:solidFill>
+              <a:schemeClr val="accent6">
+                <a:lumMod val="50000"/>
+              </a:schemeClr>
+            </a:solidFill>
+          </a:ln>
+        </p:spPr>
+        <p:style>
+          <a:lnRef idx="2">
+            <a:schemeClr val="accent1">
+              <a:shade val="15000"/>
+            </a:schemeClr>
+          </a:lnRef>
+          <a:fillRef idx="1">
+            <a:schemeClr val="accent1"/>
+          </a:fillRef>
+          <a:effectRef idx="0">
+            <a:schemeClr val="accent1"/>
+          </a:effectRef>
+          <a:fontRef idx="minor">
+            <a:schemeClr val="lt1"/>
+          </a:fontRef>
+        </p:style>
+        <p:txBody>
+          <a:bodyPr rtlCol="0" anchor="ctr"/>
+          <a:lstStyle/>
+          <a:p>
+            <a:pPr algn="ctr"/>
+            <a:endParaRPr lang="es-ES"/>
+          </a:p>
+        </p:txBody>
+      </p:sp>
+      <p:sp>
+        <p:nvSpPr>
+          <p:cNvPr id="26" name="Flecha abajo 25">
+            <a:extLst>
+              <a:ext uri="{FF2B5EF4-FFF2-40B4-BE49-F238E27FC236}">
+                <a16:creationId xmlns:a16="http://schemas.microsoft.com/office/drawing/2014/main" id="{464B6C5F-A562-BF84-839D-9AC0DBF1899D}"/>
+              </a:ext>
+            </a:extLst>
+          </p:cNvPr>
+          <p:cNvSpPr/>
+          <p:nvPr/>
+        </p:nvSpPr>
+        <p:spPr>
+          <a:xfrm>
+            <a:off x="15537466" y="5155100"/>
+            <a:ext cx="349135" cy="590931"/>
+          </a:xfrm>
+          <a:prstGeom prst="downArrow">
+            <a:avLst/>
+          </a:prstGeom>
+          <a:solidFill>
+            <a:schemeClr val="accent6">
+              <a:lumMod val="75000"/>
+            </a:schemeClr>
+          </a:solidFill>
+          <a:ln>
+            <a:solidFill>
+              <a:schemeClr val="accent6">
+                <a:lumMod val="50000"/>
+              </a:schemeClr>
+            </a:solidFill>
+          </a:ln>
+        </p:spPr>
+        <p:style>
+          <a:lnRef idx="2">
+            <a:schemeClr val="accent1">
+              <a:shade val="15000"/>
+            </a:schemeClr>
+          </a:lnRef>
+          <a:fillRef idx="1">
+            <a:schemeClr val="accent1"/>
+          </a:fillRef>
+          <a:effectRef idx="0">
+            <a:schemeClr val="accent1"/>
+          </a:effectRef>
+          <a:fontRef idx="minor">
+            <a:schemeClr val="lt1"/>
+          </a:fontRef>
+        </p:style>
+        <p:txBody>
+          <a:bodyPr rtlCol="0" anchor="ctr"/>
+          <a:lstStyle/>
+          <a:p>
+            <a:pPr algn="ctr"/>
+            <a:endParaRPr lang="es-ES"/>
+          </a:p>
+        </p:txBody>
+      </p:sp>
+      <p:sp>
+        <p:nvSpPr>
+          <p:cNvPr id="27" name="Flecha abajo 26">
+            <a:extLst>
+              <a:ext uri="{FF2B5EF4-FFF2-40B4-BE49-F238E27FC236}">
+                <a16:creationId xmlns:a16="http://schemas.microsoft.com/office/drawing/2014/main" id="{53168283-7E04-F1E2-E520-A02E58E33E99}"/>
+              </a:ext>
+            </a:extLst>
+          </p:cNvPr>
+          <p:cNvSpPr/>
+          <p:nvPr/>
+        </p:nvSpPr>
+        <p:spPr>
+          <a:xfrm>
+            <a:off x="1725016" y="3563204"/>
+            <a:ext cx="349135" cy="590931"/>
+          </a:xfrm>
+          <a:prstGeom prst="downArrow">
+            <a:avLst/>
+          </a:prstGeom>
+          <a:solidFill>
+            <a:srgbClr val="FF0000"/>
+          </a:solidFill>
+          <a:ln>
+            <a:solidFill>
+              <a:srgbClr val="C00000"/>
+            </a:solidFill>
+          </a:ln>
+        </p:spPr>
+        <p:style>
+          <a:lnRef idx="2">
+            <a:schemeClr val="accent1">
+              <a:shade val="15000"/>
+            </a:schemeClr>
+          </a:lnRef>
+          <a:fillRef idx="1">
+            <a:schemeClr val="accent1"/>
+          </a:fillRef>
+          <a:effectRef idx="0">
+            <a:schemeClr val="accent1"/>
+          </a:effectRef>
+          <a:fontRef idx="minor">
+            <a:schemeClr val="lt1"/>
+          </a:fontRef>
+        </p:style>
+        <p:txBody>
+          <a:bodyPr rtlCol="0" anchor="ctr"/>
+          <a:lstStyle/>
+          <a:p>
+            <a:pPr algn="ctr"/>
+            <a:endParaRPr lang="es-ES"/>
+          </a:p>
+        </p:txBody>
+      </p:sp>
+      <p:sp>
+        <p:nvSpPr>
+          <p:cNvPr id="28" name="Flecha abajo 27">
+            <a:extLst>
+              <a:ext uri="{FF2B5EF4-FFF2-40B4-BE49-F238E27FC236}">
+                <a16:creationId xmlns:a16="http://schemas.microsoft.com/office/drawing/2014/main" id="{DBF47D44-AEE3-B620-5B96-0CD65447D6A3}"/>
+              </a:ext>
+            </a:extLst>
+          </p:cNvPr>
+          <p:cNvSpPr/>
+          <p:nvPr/>
+        </p:nvSpPr>
+        <p:spPr>
+          <a:xfrm>
+            <a:off x="3590257" y="3576933"/>
+            <a:ext cx="349135" cy="590931"/>
+          </a:xfrm>
+          <a:prstGeom prst="downArrow">
+            <a:avLst/>
+          </a:prstGeom>
+          <a:solidFill>
+            <a:srgbClr val="FF0000"/>
+          </a:solidFill>
+          <a:ln>
+            <a:solidFill>
+              <a:srgbClr val="C00000"/>
+            </a:solidFill>
+          </a:ln>
+        </p:spPr>
+        <p:style>
+          <a:lnRef idx="2">
+            <a:schemeClr val="accent1">
+              <a:shade val="15000"/>
+            </a:schemeClr>
+          </a:lnRef>
+          <a:fillRef idx="1">
+            <a:schemeClr val="accent1"/>
+          </a:fillRef>
+          <a:effectRef idx="0">
+            <a:schemeClr val="accent1"/>
+          </a:effectRef>
+          <a:fontRef idx="minor">
+            <a:schemeClr val="lt1"/>
+          </a:fontRef>
+        </p:style>
+        <p:txBody>
+          <a:bodyPr rtlCol="0" anchor="ctr"/>
+          <a:lstStyle/>
+          <a:p>
+            <a:pPr algn="ctr"/>
+            <a:endParaRPr lang="es-ES">
+              <a:solidFill>
+                <a:srgbClr val="FF0000"/>
+              </a:solidFill>
+            </a:endParaRPr>
+          </a:p>
+        </p:txBody>
+      </p:sp>
+      <p:sp>
+        <p:nvSpPr>
+          <p:cNvPr id="29" name="Flecha abajo 28">
+            <a:extLst>
+              <a:ext uri="{FF2B5EF4-FFF2-40B4-BE49-F238E27FC236}">
+                <a16:creationId xmlns:a16="http://schemas.microsoft.com/office/drawing/2014/main" id="{3EF09888-3FB9-8476-A9C9-58D4C2AA24B7}"/>
+              </a:ext>
+            </a:extLst>
+          </p:cNvPr>
+          <p:cNvSpPr/>
+          <p:nvPr/>
+        </p:nvSpPr>
+        <p:spPr>
+          <a:xfrm>
+            <a:off x="1725015" y="5119726"/>
+            <a:ext cx="349135" cy="590931"/>
+          </a:xfrm>
+          <a:prstGeom prst="downArrow">
+            <a:avLst/>
+          </a:prstGeom>
+          <a:solidFill>
+            <a:srgbClr val="FF0000"/>
+          </a:solidFill>
+          <a:ln>
+            <a:solidFill>
+              <a:srgbClr val="C00000"/>
+            </a:solidFill>
+          </a:ln>
+        </p:spPr>
+        <p:style>
+          <a:lnRef idx="2">
+            <a:schemeClr val="accent1">
+              <a:shade val="15000"/>
+            </a:schemeClr>
+          </a:lnRef>
+          <a:fillRef idx="1">
+            <a:schemeClr val="accent1"/>
+          </a:fillRef>
+          <a:effectRef idx="0">
+            <a:schemeClr val="accent1"/>
+          </a:effectRef>
+          <a:fontRef idx="minor">
+            <a:schemeClr val="lt1"/>
+          </a:fontRef>
+        </p:style>
+        <p:txBody>
+          <a:bodyPr rtlCol="0" anchor="ctr"/>
+          <a:lstStyle/>
+          <a:p>
+            <a:pPr algn="ctr"/>
+            <a:endParaRPr lang="es-ES"/>
+          </a:p>
+        </p:txBody>
+      </p:sp>
+      <p:sp>
+        <p:nvSpPr>
+          <p:cNvPr id="30" name="Flecha abajo 29">
+            <a:extLst>
+              <a:ext uri="{FF2B5EF4-FFF2-40B4-BE49-F238E27FC236}">
+                <a16:creationId xmlns:a16="http://schemas.microsoft.com/office/drawing/2014/main" id="{030F277A-7CD4-62F5-A2EE-C651FF9F555A}"/>
+              </a:ext>
+            </a:extLst>
+          </p:cNvPr>
+          <p:cNvSpPr/>
+          <p:nvPr/>
+        </p:nvSpPr>
+        <p:spPr>
+          <a:xfrm>
+            <a:off x="3590256" y="5119726"/>
+            <a:ext cx="349135" cy="590931"/>
+          </a:xfrm>
+          <a:prstGeom prst="downArrow">
+            <a:avLst/>
+          </a:prstGeom>
+          <a:solidFill>
+            <a:srgbClr val="FF0000"/>
+          </a:solidFill>
+          <a:ln>
+            <a:solidFill>
+              <a:srgbClr val="C00000"/>
+            </a:solidFill>
+          </a:ln>
+        </p:spPr>
+        <p:style>
+          <a:lnRef idx="2">
+            <a:schemeClr val="accent1">
+              <a:shade val="15000"/>
+            </a:schemeClr>
+          </a:lnRef>
+          <a:fillRef idx="1">
+            <a:schemeClr val="accent1"/>
+          </a:fillRef>
+          <a:effectRef idx="0">
+            <a:schemeClr val="accent1"/>
+          </a:effectRef>
+          <a:fontRef idx="minor">
+            <a:schemeClr val="lt1"/>
+          </a:fontRef>
+        </p:style>
+        <p:txBody>
+          <a:bodyPr rtlCol="0" anchor="ctr"/>
+          <a:lstStyle/>
+          <a:p>
+            <a:pPr algn="ctr"/>
+            <a:endParaRPr lang="es-ES"/>
+          </a:p>
+        </p:txBody>
+      </p:sp>
       <p:sp>
         <p:nvSpPr>
           <p:cNvPr id="36" name="Fletxa: corbada cap amunt 35">
@@ -25579,7 +26206,7 @@
 </p:sld>
 </file>
 
-<file path=ppt/slides/slide21.xml><?xml version="1.0" encoding="utf-8"?>
+<file path=ppt/slides/slide22.xml><?xml version="1.0" encoding="utf-8"?>
 <p:sld xmlns:a="http://schemas.openxmlformats.org/drawingml/2006/main" xmlns:r="http://schemas.openxmlformats.org/officeDocument/2006/relationships" xmlns:p="http://schemas.openxmlformats.org/presentationml/2006/main">
   <p:cSld>
     <p:bg>
@@ -26259,7 +26886,7 @@
 </p:sld>
 </file>
 
-<file path=ppt/slides/slide22.xml><?xml version="1.0" encoding="utf-8"?>
+<file path=ppt/slides/slide23.xml><?xml version="1.0" encoding="utf-8"?>
 <p:sld xmlns:a="http://schemas.openxmlformats.org/drawingml/2006/main" xmlns:r="http://schemas.openxmlformats.org/officeDocument/2006/relationships" xmlns:p="http://schemas.openxmlformats.org/presentationml/2006/main">
   <p:cSld>
     <p:bg>
@@ -27340,7 +27967,7 @@
 </p:sld>
 </file>
 
-<file path=ppt/slides/slide23.xml><?xml version="1.0" encoding="utf-8"?>
+<file path=ppt/slides/slide24.xml><?xml version="1.0" encoding="utf-8"?>
 <p:sld xmlns:a="http://schemas.openxmlformats.org/drawingml/2006/main" xmlns:r="http://schemas.openxmlformats.org/officeDocument/2006/relationships" xmlns:p="http://schemas.openxmlformats.org/presentationml/2006/main">
   <p:cSld>
     <p:bg>
@@ -28660,7 +29287,7 @@
 </p:sld>
 </file>
 
-<file path=ppt/slides/slide24.xml><?xml version="1.0" encoding="utf-8"?>
+<file path=ppt/slides/slide25.xml><?xml version="1.0" encoding="utf-8"?>
 <p:sld xmlns:a="http://schemas.openxmlformats.org/drawingml/2006/main" xmlns:r="http://schemas.openxmlformats.org/officeDocument/2006/relationships" xmlns:p="http://schemas.openxmlformats.org/presentationml/2006/main">
   <p:cSld>
     <p:bg>
@@ -29386,7 +30013,7 @@
 </p:sld>
 </file>
 
-<file path=ppt/slides/slide25.xml><?xml version="1.0" encoding="utf-8"?>
+<file path=ppt/slides/slide26.xml><?xml version="1.0" encoding="utf-8"?>
 <p:sld xmlns:a="http://schemas.openxmlformats.org/drawingml/2006/main" xmlns:r="http://schemas.openxmlformats.org/officeDocument/2006/relationships" xmlns:p="http://schemas.openxmlformats.org/presentationml/2006/main">
   <p:cSld>
     <p:bg>
@@ -29980,7 +30607,7 @@
 </p:sld>
 </file>
 
-<file path=ppt/slides/slide26.xml><?xml version="1.0" encoding="utf-8"?>
+<file path=ppt/slides/slide27.xml><?xml version="1.0" encoding="utf-8"?>
 <p:sld xmlns:a="http://schemas.openxmlformats.org/drawingml/2006/main" xmlns:r="http://schemas.openxmlformats.org/officeDocument/2006/relationships" xmlns:p="http://schemas.openxmlformats.org/presentationml/2006/main">
   <p:cSld>
     <p:bg>
@@ -30860,7 +31487,7 @@
 </p:sld>
 </file>
 
-<file path=ppt/slides/slide27.xml><?xml version="1.0" encoding="utf-8"?>
+<file path=ppt/slides/slide28.xml><?xml version="1.0" encoding="utf-8"?>
 <p:sld xmlns:a="http://schemas.openxmlformats.org/drawingml/2006/main" xmlns:r="http://schemas.openxmlformats.org/officeDocument/2006/relationships" xmlns:p="http://schemas.openxmlformats.org/presentationml/2006/main">
   <p:cSld>
     <p:bg>
@@ -32213,7 +32840,7 @@
 </p:sld>
 </file>
 
-<file path=ppt/slides/slide28.xml><?xml version="1.0" encoding="utf-8"?>
+<file path=ppt/slides/slide29.xml><?xml version="1.0" encoding="utf-8"?>
 <p:sld xmlns:a="http://schemas.openxmlformats.org/drawingml/2006/main" xmlns:r="http://schemas.openxmlformats.org/officeDocument/2006/relationships" xmlns:p="http://schemas.openxmlformats.org/presentationml/2006/main">
   <p:cSld>
     <p:bg>
@@ -35075,6 +35702,811 @@
   <p:cSld>
     <p:spTree>
       <p:nvGrpSpPr>
+        <p:cNvPr id="1" name="Shape 149"/>
+        <p:cNvGrpSpPr/>
+        <p:nvPr/>
+      </p:nvGrpSpPr>
+      <p:grpSpPr>
+        <a:xfrm>
+          <a:off x="0" y="0"/>
+          <a:ext cx="0" cy="0"/>
+          <a:chOff x="0" y="0"/>
+          <a:chExt cx="0" cy="0"/>
+        </a:xfrm>
+      </p:grpSpPr>
+      <p:sp>
+        <p:nvSpPr>
+          <p:cNvPr id="150" name="Google Shape;150;p17"/>
+          <p:cNvSpPr/>
+          <p:nvPr/>
+        </p:nvSpPr>
+        <p:spPr>
+          <a:xfrm>
+            <a:off x="13727091" y="2555717"/>
+            <a:ext cx="4065560" cy="5646612"/>
+          </a:xfrm>
+          <a:custGeom>
+            <a:avLst/>
+            <a:gdLst/>
+            <a:ahLst/>
+            <a:cxnLst/>
+            <a:rect l="l" t="t" r="r" b="b"/>
+            <a:pathLst>
+              <a:path w="6557355" h="9107438" extrusionOk="0">
+                <a:moveTo>
+                  <a:pt x="0" y="0"/>
+                </a:moveTo>
+                <a:lnTo>
+                  <a:pt x="6557355" y="0"/>
+                </a:lnTo>
+                <a:lnTo>
+                  <a:pt x="6557355" y="9107438"/>
+                </a:lnTo>
+                <a:lnTo>
+                  <a:pt x="0" y="9107438"/>
+                </a:lnTo>
+                <a:lnTo>
+                  <a:pt x="0" y="0"/>
+                </a:lnTo>
+                <a:close/>
+              </a:path>
+            </a:pathLst>
+          </a:custGeom>
+          <a:blipFill rotWithShape="1">
+            <a:blip r:embed="rId3">
+              <a:alphaModFix/>
+            </a:blip>
+            <a:stretch>
+              <a:fillRect/>
+            </a:stretch>
+          </a:blipFill>
+          <a:ln>
+            <a:noFill/>
+          </a:ln>
+        </p:spPr>
+        <p:txBody>
+          <a:bodyPr/>
+          <a:lstStyle/>
+          <a:p>
+            <a:endParaRPr lang="es-ES_tradnl" dirty="0"/>
+          </a:p>
+        </p:txBody>
+      </p:sp>
+      <p:sp>
+        <p:nvSpPr>
+          <p:cNvPr id="152" name="Google Shape;152;p17"/>
+          <p:cNvSpPr txBox="1"/>
+          <p:nvPr/>
+        </p:nvSpPr>
+        <p:spPr>
+          <a:xfrm>
+            <a:off x="2092913" y="1609520"/>
+            <a:ext cx="15448212" cy="670505"/>
+          </a:xfrm>
+          <a:prstGeom prst="rect">
+            <a:avLst/>
+          </a:prstGeom>
+          <a:noFill/>
+          <a:ln>
+            <a:noFill/>
+          </a:ln>
+        </p:spPr>
+        <p:txBody>
+          <a:bodyPr spcFirstLastPara="1" wrap="square" lIns="0" tIns="0" rIns="0" bIns="0" anchor="t" anchorCtr="0">
+            <a:spAutoFit/>
+          </a:bodyPr>
+          <a:lstStyle/>
+          <a:p>
+            <a:pPr>
+              <a:lnSpc>
+                <a:spcPct val="121055"/>
+              </a:lnSpc>
+            </a:pPr>
+            <a:r>
+              <a:rPr lang="es-ES_tradnl" sz="3601" b="1" dirty="0">
+                <a:solidFill>
+                  <a:srgbClr val="004AAD"/>
+                </a:solidFill>
+                <a:latin typeface="Poppins"/>
+                <a:ea typeface="Poppins"/>
+                <a:cs typeface="Poppins"/>
+                <a:sym typeface="Poppins"/>
+              </a:rPr>
+              <a:t>Análisis de alineación de tendencias según medio de formación</a:t>
+            </a:r>
+            <a:endParaRPr lang="es-ES_tradnl" dirty="0"/>
+          </a:p>
+        </p:txBody>
+      </p:sp>
+      <p:grpSp>
+        <p:nvGrpSpPr>
+          <p:cNvPr id="153" name="Google Shape;153;p17"/>
+          <p:cNvGrpSpPr/>
+          <p:nvPr/>
+        </p:nvGrpSpPr>
+        <p:grpSpPr>
+          <a:xfrm>
+            <a:off x="-142120" y="54701"/>
+            <a:ext cx="2163413" cy="1886345"/>
+            <a:chOff x="12784175" y="3675030"/>
+            <a:chExt cx="2163413" cy="1886345"/>
+          </a:xfrm>
+        </p:grpSpPr>
+        <p:sp>
+          <p:nvSpPr>
+            <p:cNvPr id="154" name="Google Shape;154;p17"/>
+            <p:cNvSpPr txBox="1"/>
+            <p:nvPr/>
+          </p:nvSpPr>
+          <p:spPr>
+            <a:xfrm rot="1830973">
+              <a:off x="12805773" y="4425496"/>
+              <a:ext cx="2081405" cy="652657"/>
+            </a:xfrm>
+            <a:prstGeom prst="rect">
+              <a:avLst/>
+            </a:prstGeom>
+            <a:noFill/>
+            <a:ln>
+              <a:noFill/>
+            </a:ln>
+          </p:spPr>
+          <p:txBody>
+            <a:bodyPr spcFirstLastPara="1" wrap="square" lIns="91425" tIns="91425" rIns="91425" bIns="91425" anchor="t" anchorCtr="0">
+              <a:noAutofit/>
+            </a:bodyPr>
+            <a:lstStyle/>
+            <a:p>
+              <a:pPr marL="0" lvl="0" indent="0" algn="l" rtl="0">
+                <a:spcBef>
+                  <a:spcPts val="0"/>
+                </a:spcBef>
+                <a:spcAft>
+                  <a:spcPts val="0"/>
+                </a:spcAft>
+                <a:buNone/>
+              </a:pPr>
+              <a:r>
+                <a:rPr lang="es-ES_tradnl" sz="2300" b="1" i="1" dirty="0">
+                  <a:solidFill>
+                    <a:srgbClr val="E69138"/>
+                  </a:solidFill>
+                  <a:latin typeface="Calibri"/>
+                  <a:ea typeface="Calibri"/>
+                  <a:cs typeface="Calibri"/>
+                  <a:sym typeface="Calibri"/>
+                </a:rPr>
+                <a:t>RAPID EXPRESS </a:t>
+              </a:r>
+            </a:p>
+          </p:txBody>
+        </p:sp>
+        <p:sp>
+          <p:nvSpPr>
+            <p:cNvPr id="155" name="Google Shape;155;p17"/>
+            <p:cNvSpPr/>
+            <p:nvPr/>
+          </p:nvSpPr>
+          <p:spPr>
+            <a:xfrm>
+              <a:off x="13335203" y="3675030"/>
+              <a:ext cx="1612385" cy="1275250"/>
+            </a:xfrm>
+            <a:custGeom>
+              <a:avLst/>
+              <a:gdLst/>
+              <a:ahLst/>
+              <a:cxnLst/>
+              <a:rect l="l" t="t" r="r" b="b"/>
+              <a:pathLst>
+                <a:path w="1612385" h="1275250" extrusionOk="0">
+                  <a:moveTo>
+                    <a:pt x="0" y="0"/>
+                  </a:moveTo>
+                  <a:lnTo>
+                    <a:pt x="1612384" y="0"/>
+                  </a:lnTo>
+                  <a:lnTo>
+                    <a:pt x="1612384" y="1275249"/>
+                  </a:lnTo>
+                  <a:lnTo>
+                    <a:pt x="0" y="1275249"/>
+                  </a:lnTo>
+                  <a:lnTo>
+                    <a:pt x="0" y="0"/>
+                  </a:lnTo>
+                  <a:close/>
+                </a:path>
+              </a:pathLst>
+            </a:custGeom>
+            <a:blipFill rotWithShape="1">
+              <a:blip r:embed="rId4">
+                <a:alphaModFix/>
+              </a:blip>
+              <a:stretch>
+                <a:fillRect/>
+              </a:stretch>
+            </a:blipFill>
+            <a:ln>
+              <a:noFill/>
+            </a:ln>
+          </p:spPr>
+          <p:txBody>
+            <a:bodyPr/>
+            <a:lstStyle/>
+            <a:p>
+              <a:endParaRPr lang="es-ES_tradnl" dirty="0"/>
+            </a:p>
+          </p:txBody>
+        </p:sp>
+      </p:grpSp>
+      <p:sp>
+        <p:nvSpPr>
+          <p:cNvPr id="156" name="Google Shape;156;p17"/>
+          <p:cNvSpPr/>
+          <p:nvPr/>
+        </p:nvSpPr>
+        <p:spPr>
+          <a:xfrm>
+            <a:off x="746875" y="2598837"/>
+            <a:ext cx="12104601" cy="6786600"/>
+          </a:xfrm>
+          <a:prstGeom prst="rect">
+            <a:avLst/>
+          </a:prstGeom>
+          <a:solidFill>
+            <a:schemeClr val="lt2"/>
+          </a:solidFill>
+          <a:ln w="9525" cap="flat" cmpd="sng">
+            <a:solidFill>
+              <a:schemeClr val="dk2"/>
+            </a:solidFill>
+            <a:prstDash val="solid"/>
+            <a:round/>
+            <a:headEnd type="none" w="sm" len="sm"/>
+            <a:tailEnd type="none" w="sm" len="sm"/>
+          </a:ln>
+        </p:spPr>
+        <p:txBody>
+          <a:bodyPr spcFirstLastPara="1" wrap="square" lIns="91425" tIns="91425" rIns="91425" bIns="91425" anchor="ctr" anchorCtr="0">
+            <a:noAutofit/>
+          </a:bodyPr>
+          <a:lstStyle/>
+          <a:p>
+            <a:pPr marL="0" lvl="0" indent="0" algn="ctr" rtl="0">
+              <a:spcBef>
+                <a:spcPts val="0"/>
+              </a:spcBef>
+              <a:spcAft>
+                <a:spcPts val="0"/>
+              </a:spcAft>
+              <a:buNone/>
+            </a:pPr>
+            <a:endParaRPr lang="es-ES_tradnl" dirty="0">
+              <a:latin typeface="Calibri"/>
+              <a:ea typeface="Calibri"/>
+              <a:cs typeface="Calibri"/>
+              <a:sym typeface="Calibri"/>
+            </a:endParaRPr>
+          </a:p>
+        </p:txBody>
+      </p:sp>
+      <p:sp>
+        <p:nvSpPr>
+          <p:cNvPr id="2" name="Rectangle 1">
+            <a:extLst>
+              <a:ext uri="{FF2B5EF4-FFF2-40B4-BE49-F238E27FC236}">
+                <a16:creationId xmlns:a16="http://schemas.microsoft.com/office/drawing/2014/main" id="{F88B6A08-7CBD-42ED-A290-0D3CBBEBE747}"/>
+              </a:ext>
+            </a:extLst>
+          </p:cNvPr>
+          <p:cNvSpPr/>
+          <p:nvPr/>
+        </p:nvSpPr>
+        <p:spPr>
+          <a:xfrm>
+            <a:off x="2968129" y="3363356"/>
+            <a:ext cx="2598821" cy="1106906"/>
+          </a:xfrm>
+          <a:prstGeom prst="rect">
+            <a:avLst/>
+          </a:prstGeom>
+          <a:solidFill>
+            <a:schemeClr val="bg1"/>
+          </a:solidFill>
+          <a:ln>
+            <a:solidFill>
+              <a:schemeClr val="bg2"/>
+            </a:solidFill>
+          </a:ln>
+        </p:spPr>
+        <p:style>
+          <a:lnRef idx="2">
+            <a:schemeClr val="accent1">
+              <a:shade val="50000"/>
+            </a:schemeClr>
+          </a:lnRef>
+          <a:fillRef idx="1">
+            <a:schemeClr val="accent1"/>
+          </a:fillRef>
+          <a:effectRef idx="0">
+            <a:schemeClr val="accent1"/>
+          </a:effectRef>
+          <a:fontRef idx="minor">
+            <a:schemeClr val="lt1"/>
+          </a:fontRef>
+        </p:style>
+        <p:txBody>
+          <a:bodyPr rtlCol="0" anchor="ctr"/>
+          <a:lstStyle/>
+          <a:p>
+            <a:pPr algn="ctr"/>
+            <a:r>
+              <a:rPr lang="es-ES_tradnl" sz="2400" b="1" dirty="0">
+                <a:solidFill>
+                  <a:schemeClr val="bg2"/>
+                </a:solidFill>
+              </a:rPr>
+              <a:t>TAMAÑO EMPRESA</a:t>
+            </a:r>
+          </a:p>
+        </p:txBody>
+      </p:sp>
+      <p:sp>
+        <p:nvSpPr>
+          <p:cNvPr id="11" name="Rectangle 10">
+            <a:extLst>
+              <a:ext uri="{FF2B5EF4-FFF2-40B4-BE49-F238E27FC236}">
+                <a16:creationId xmlns:a16="http://schemas.microsoft.com/office/drawing/2014/main" id="{9177A92D-B3AE-49AF-9B97-C5AF0DBFBCE9}"/>
+              </a:ext>
+            </a:extLst>
+          </p:cNvPr>
+          <p:cNvSpPr/>
+          <p:nvPr/>
+        </p:nvSpPr>
+        <p:spPr>
+          <a:xfrm>
+            <a:off x="1230912" y="5374886"/>
+            <a:ext cx="2598821" cy="1106906"/>
+          </a:xfrm>
+          <a:prstGeom prst="rect">
+            <a:avLst/>
+          </a:prstGeom>
+          <a:solidFill>
+            <a:schemeClr val="bg1"/>
+          </a:solidFill>
+          <a:ln>
+            <a:solidFill>
+              <a:schemeClr val="bg2"/>
+            </a:solidFill>
+          </a:ln>
+        </p:spPr>
+        <p:style>
+          <a:lnRef idx="2">
+            <a:schemeClr val="accent1">
+              <a:shade val="50000"/>
+            </a:schemeClr>
+          </a:lnRef>
+          <a:fillRef idx="1">
+            <a:schemeClr val="accent1"/>
+          </a:fillRef>
+          <a:effectRef idx="0">
+            <a:schemeClr val="accent1"/>
+          </a:effectRef>
+          <a:fontRef idx="minor">
+            <a:schemeClr val="lt1"/>
+          </a:fontRef>
+        </p:style>
+        <p:txBody>
+          <a:bodyPr rtlCol="0" anchor="ctr"/>
+          <a:lstStyle/>
+          <a:p>
+            <a:pPr algn="ctr"/>
+            <a:r>
+              <a:rPr lang="es-ES_tradnl" sz="2400" b="1" dirty="0">
+                <a:solidFill>
+                  <a:schemeClr val="bg2"/>
+                </a:solidFill>
+              </a:rPr>
+              <a:t>SECTOR ECONÓMICO</a:t>
+            </a:r>
+          </a:p>
+        </p:txBody>
+      </p:sp>
+      <p:sp>
+        <p:nvSpPr>
+          <p:cNvPr id="12" name="Rectangle 11">
+            <a:extLst>
+              <a:ext uri="{FF2B5EF4-FFF2-40B4-BE49-F238E27FC236}">
+                <a16:creationId xmlns:a16="http://schemas.microsoft.com/office/drawing/2014/main" id="{413A90B0-3711-4C1A-B59B-049DD31A5C94}"/>
+              </a:ext>
+            </a:extLst>
+          </p:cNvPr>
+          <p:cNvSpPr/>
+          <p:nvPr/>
+        </p:nvSpPr>
+        <p:spPr>
+          <a:xfrm>
+            <a:off x="2879440" y="7571741"/>
+            <a:ext cx="2598821" cy="1106906"/>
+          </a:xfrm>
+          <a:prstGeom prst="rect">
+            <a:avLst/>
+          </a:prstGeom>
+          <a:solidFill>
+            <a:schemeClr val="bg1"/>
+          </a:solidFill>
+          <a:ln>
+            <a:solidFill>
+              <a:schemeClr val="bg2"/>
+            </a:solidFill>
+          </a:ln>
+        </p:spPr>
+        <p:style>
+          <a:lnRef idx="2">
+            <a:schemeClr val="accent1">
+              <a:shade val="50000"/>
+            </a:schemeClr>
+          </a:lnRef>
+          <a:fillRef idx="1">
+            <a:schemeClr val="accent1"/>
+          </a:fillRef>
+          <a:effectRef idx="0">
+            <a:schemeClr val="accent1"/>
+          </a:effectRef>
+          <a:fontRef idx="minor">
+            <a:schemeClr val="lt1"/>
+          </a:fontRef>
+        </p:style>
+        <p:txBody>
+          <a:bodyPr rtlCol="0" anchor="ctr"/>
+          <a:lstStyle/>
+          <a:p>
+            <a:pPr algn="ctr"/>
+            <a:r>
+              <a:rPr lang="es-ES_tradnl" sz="2400" b="1" dirty="0">
+                <a:solidFill>
+                  <a:schemeClr val="bg2"/>
+                </a:solidFill>
+              </a:rPr>
+              <a:t>COMUNIDAD</a:t>
+            </a:r>
+          </a:p>
+          <a:p>
+            <a:pPr algn="ctr"/>
+            <a:r>
+              <a:rPr lang="es-ES_tradnl" sz="2400" b="1" dirty="0">
+                <a:solidFill>
+                  <a:schemeClr val="bg2"/>
+                </a:solidFill>
+              </a:rPr>
+              <a:t>AUTÓNOMA</a:t>
+            </a:r>
+          </a:p>
+        </p:txBody>
+      </p:sp>
+      <p:sp>
+        <p:nvSpPr>
+          <p:cNvPr id="13" name="Rectangle 12">
+            <a:extLst>
+              <a:ext uri="{FF2B5EF4-FFF2-40B4-BE49-F238E27FC236}">
+                <a16:creationId xmlns:a16="http://schemas.microsoft.com/office/drawing/2014/main" id="{94FAE6EC-7E4C-4622-9755-AF6150B1BB98}"/>
+              </a:ext>
+            </a:extLst>
+          </p:cNvPr>
+          <p:cNvSpPr/>
+          <p:nvPr/>
+        </p:nvSpPr>
+        <p:spPr>
+          <a:xfrm>
+            <a:off x="5566951" y="5438684"/>
+            <a:ext cx="2598821" cy="1106906"/>
+          </a:xfrm>
+          <a:prstGeom prst="rect">
+            <a:avLst/>
+          </a:prstGeom>
+          <a:solidFill>
+            <a:schemeClr val="bg1"/>
+          </a:solidFill>
+          <a:ln>
+            <a:solidFill>
+              <a:schemeClr val="bg2"/>
+            </a:solidFill>
+          </a:ln>
+        </p:spPr>
+        <p:style>
+          <a:lnRef idx="2">
+            <a:schemeClr val="accent1">
+              <a:shade val="50000"/>
+            </a:schemeClr>
+          </a:lnRef>
+          <a:fillRef idx="1">
+            <a:schemeClr val="accent1"/>
+          </a:fillRef>
+          <a:effectRef idx="0">
+            <a:schemeClr val="accent1"/>
+          </a:effectRef>
+          <a:fontRef idx="minor">
+            <a:schemeClr val="lt1"/>
+          </a:fontRef>
+        </p:style>
+        <p:txBody>
+          <a:bodyPr rtlCol="0" anchor="ctr"/>
+          <a:lstStyle/>
+          <a:p>
+            <a:pPr algn="ctr"/>
+            <a:r>
+              <a:rPr lang="es-ES_tradnl" sz="2400" b="1" dirty="0">
+                <a:solidFill>
+                  <a:schemeClr val="bg2"/>
+                </a:solidFill>
+              </a:rPr>
+              <a:t>TENDENCIAS</a:t>
+            </a:r>
+          </a:p>
+          <a:p>
+            <a:pPr algn="ctr"/>
+            <a:r>
+              <a:rPr lang="es-ES_tradnl" sz="2400" b="1" dirty="0">
+                <a:solidFill>
+                  <a:schemeClr val="bg2"/>
+                </a:solidFill>
+              </a:rPr>
+              <a:t>FORMATIVAS</a:t>
+            </a:r>
+          </a:p>
+        </p:txBody>
+      </p:sp>
+      <p:cxnSp>
+        <p:nvCxnSpPr>
+          <p:cNvPr id="4" name="Connector de fletxa recta 3">
+            <a:extLst>
+              <a:ext uri="{FF2B5EF4-FFF2-40B4-BE49-F238E27FC236}">
+                <a16:creationId xmlns:a16="http://schemas.microsoft.com/office/drawing/2014/main" id="{6E2E7557-7AC6-41A1-9647-8CB5A5F8D857}"/>
+              </a:ext>
+            </a:extLst>
+          </p:cNvPr>
+          <p:cNvCxnSpPr>
+            <a:cxnSpLocks/>
+          </p:cNvCxnSpPr>
+          <p:nvPr/>
+        </p:nvCxnSpPr>
+        <p:spPr>
+          <a:xfrm>
+            <a:off x="4192503" y="4589121"/>
+            <a:ext cx="1226624" cy="891307"/>
+          </a:xfrm>
+          <a:prstGeom prst="straightConnector1">
+            <a:avLst/>
+          </a:prstGeom>
+          <a:ln w="76200">
+            <a:solidFill>
+              <a:schemeClr val="bg2"/>
+            </a:solidFill>
+            <a:tailEnd type="triangle"/>
+          </a:ln>
+        </p:spPr>
+        <p:style>
+          <a:lnRef idx="2">
+            <a:schemeClr val="accent1"/>
+          </a:lnRef>
+          <a:fillRef idx="0">
+            <a:schemeClr val="accent1"/>
+          </a:fillRef>
+          <a:effectRef idx="1">
+            <a:schemeClr val="accent1"/>
+          </a:effectRef>
+          <a:fontRef idx="minor">
+            <a:schemeClr val="tx1"/>
+          </a:fontRef>
+        </p:style>
+      </p:cxnSp>
+      <p:cxnSp>
+        <p:nvCxnSpPr>
+          <p:cNvPr id="18" name="Connector de fletxa recta 17">
+            <a:extLst>
+              <a:ext uri="{FF2B5EF4-FFF2-40B4-BE49-F238E27FC236}">
+                <a16:creationId xmlns:a16="http://schemas.microsoft.com/office/drawing/2014/main" id="{679C43D3-063B-471C-98B4-4F1B9C10124D}"/>
+              </a:ext>
+            </a:extLst>
+          </p:cNvPr>
+          <p:cNvCxnSpPr>
+            <a:cxnSpLocks/>
+          </p:cNvCxnSpPr>
+          <p:nvPr/>
+        </p:nvCxnSpPr>
+        <p:spPr>
+          <a:xfrm flipV="1">
+            <a:off x="4133369" y="6565045"/>
+            <a:ext cx="1262204" cy="765019"/>
+          </a:xfrm>
+          <a:prstGeom prst="straightConnector1">
+            <a:avLst/>
+          </a:prstGeom>
+          <a:ln w="76200">
+            <a:solidFill>
+              <a:schemeClr val="bg2"/>
+            </a:solidFill>
+            <a:tailEnd type="triangle"/>
+          </a:ln>
+        </p:spPr>
+        <p:style>
+          <a:lnRef idx="2">
+            <a:schemeClr val="accent1"/>
+          </a:lnRef>
+          <a:fillRef idx="0">
+            <a:schemeClr val="accent1"/>
+          </a:fillRef>
+          <a:effectRef idx="1">
+            <a:schemeClr val="accent1"/>
+          </a:effectRef>
+          <a:fontRef idx="minor">
+            <a:schemeClr val="tx1"/>
+          </a:fontRef>
+        </p:style>
+      </p:cxnSp>
+      <p:cxnSp>
+        <p:nvCxnSpPr>
+          <p:cNvPr id="20" name="Connector de fletxa recta 19">
+            <a:extLst>
+              <a:ext uri="{FF2B5EF4-FFF2-40B4-BE49-F238E27FC236}">
+                <a16:creationId xmlns:a16="http://schemas.microsoft.com/office/drawing/2014/main" id="{503C184A-52E8-4BDD-88C5-AB3981C81FC3}"/>
+              </a:ext>
+            </a:extLst>
+          </p:cNvPr>
+          <p:cNvCxnSpPr>
+            <a:cxnSpLocks/>
+          </p:cNvCxnSpPr>
+          <p:nvPr/>
+        </p:nvCxnSpPr>
+        <p:spPr>
+          <a:xfrm>
+            <a:off x="4009956" y="5992137"/>
+            <a:ext cx="1344892" cy="0"/>
+          </a:xfrm>
+          <a:prstGeom prst="straightConnector1">
+            <a:avLst/>
+          </a:prstGeom>
+          <a:ln w="76200">
+            <a:solidFill>
+              <a:schemeClr val="bg2"/>
+            </a:solidFill>
+            <a:tailEnd type="triangle"/>
+          </a:ln>
+        </p:spPr>
+        <p:style>
+          <a:lnRef idx="2">
+            <a:schemeClr val="accent1"/>
+          </a:lnRef>
+          <a:fillRef idx="0">
+            <a:schemeClr val="accent1"/>
+          </a:fillRef>
+          <a:effectRef idx="1">
+            <a:schemeClr val="accent1"/>
+          </a:effectRef>
+          <a:fontRef idx="minor">
+            <a:schemeClr val="tx1"/>
+          </a:fontRef>
+        </p:style>
+      </p:cxnSp>
+      <p:sp>
+        <p:nvSpPr>
+          <p:cNvPr id="6" name="Rectangle 10">
+            <a:extLst>
+              <a:ext uri="{FF2B5EF4-FFF2-40B4-BE49-F238E27FC236}">
+                <a16:creationId xmlns:a16="http://schemas.microsoft.com/office/drawing/2014/main" id="{1638C51A-E06C-182E-FAB6-E30671F8DFDC}"/>
+              </a:ext>
+            </a:extLst>
+          </p:cNvPr>
+          <p:cNvSpPr/>
+          <p:nvPr/>
+        </p:nvSpPr>
+        <p:spPr>
+          <a:xfrm>
+            <a:off x="10053142" y="5480428"/>
+            <a:ext cx="2598821" cy="1106906"/>
+          </a:xfrm>
+          <a:prstGeom prst="rect">
+            <a:avLst/>
+          </a:prstGeom>
+          <a:solidFill>
+            <a:schemeClr val="bg1"/>
+          </a:solidFill>
+          <a:ln>
+            <a:solidFill>
+              <a:schemeClr val="bg2"/>
+            </a:solidFill>
+          </a:ln>
+        </p:spPr>
+        <p:style>
+          <a:lnRef idx="2">
+            <a:schemeClr val="accent1">
+              <a:shade val="50000"/>
+            </a:schemeClr>
+          </a:lnRef>
+          <a:fillRef idx="1">
+            <a:schemeClr val="accent1"/>
+          </a:fillRef>
+          <a:effectRef idx="0">
+            <a:schemeClr val="accent1"/>
+          </a:effectRef>
+          <a:fontRef idx="minor">
+            <a:schemeClr val="lt1"/>
+          </a:fontRef>
+        </p:style>
+        <p:txBody>
+          <a:bodyPr rtlCol="0" anchor="ctr"/>
+          <a:lstStyle/>
+          <a:p>
+            <a:pPr algn="ctr"/>
+            <a:r>
+              <a:rPr lang="es-ES_tradnl" sz="2400" b="1" dirty="0">
+                <a:solidFill>
+                  <a:schemeClr val="bg2"/>
+                </a:solidFill>
+              </a:rPr>
+              <a:t>POLÍTICAS DE MEDIOS DE FORMACIÓN</a:t>
+            </a:r>
+          </a:p>
+        </p:txBody>
+      </p:sp>
+      <p:cxnSp>
+        <p:nvCxnSpPr>
+          <p:cNvPr id="10" name="Connector de fletxa recta 19">
+            <a:extLst>
+              <a:ext uri="{FF2B5EF4-FFF2-40B4-BE49-F238E27FC236}">
+                <a16:creationId xmlns:a16="http://schemas.microsoft.com/office/drawing/2014/main" id="{2990E9D9-7239-470F-C09C-B2DF94F24E87}"/>
+              </a:ext>
+            </a:extLst>
+          </p:cNvPr>
+          <p:cNvCxnSpPr>
+            <a:cxnSpLocks/>
+          </p:cNvCxnSpPr>
+          <p:nvPr/>
+        </p:nvCxnSpPr>
+        <p:spPr>
+          <a:xfrm flipV="1">
+            <a:off x="8345109" y="5929015"/>
+            <a:ext cx="1528696" cy="3029"/>
+          </a:xfrm>
+          <a:prstGeom prst="straightConnector1">
+            <a:avLst/>
+          </a:prstGeom>
+          <a:ln w="76200">
+            <a:solidFill>
+              <a:schemeClr val="bg2"/>
+            </a:solidFill>
+            <a:tailEnd type="triangle"/>
+          </a:ln>
+        </p:spPr>
+        <p:style>
+          <a:lnRef idx="2">
+            <a:schemeClr val="accent1"/>
+          </a:lnRef>
+          <a:fillRef idx="0">
+            <a:schemeClr val="accent1"/>
+          </a:fillRef>
+          <a:effectRef idx="1">
+            <a:schemeClr val="accent1"/>
+          </a:effectRef>
+          <a:fontRef idx="minor">
+            <a:schemeClr val="tx1"/>
+          </a:fontRef>
+        </p:style>
+      </p:cxnSp>
+    </p:spTree>
+  </p:cSld>
+  <p:clrMapOvr>
+    <a:masterClrMapping/>
+  </p:clrMapOvr>
+</p:sld>
+</file>
+
+<file path=ppt/slides/slide6.xml><?xml version="1.0" encoding="utf-8"?>
+<p:sld xmlns:a="http://schemas.openxmlformats.org/drawingml/2006/main" xmlns:r="http://schemas.openxmlformats.org/officeDocument/2006/relationships" xmlns:p="http://schemas.openxmlformats.org/presentationml/2006/main">
+  <p:cSld>
+    <p:spTree>
+      <p:nvGrpSpPr>
         <p:cNvPr id="1" name="Shape 122"/>
         <p:cNvGrpSpPr/>
         <p:nvPr/>
@@ -36392,7 +37824,7 @@
 </p:sld>
 </file>
 
-<file path=ppt/slides/slide6.xml><?xml version="1.0" encoding="utf-8"?>
+<file path=ppt/slides/slide7.xml><?xml version="1.0" encoding="utf-8"?>
 <p:sld xmlns:a="http://schemas.openxmlformats.org/drawingml/2006/main" xmlns:r="http://schemas.openxmlformats.org/officeDocument/2006/relationships" xmlns:p="http://schemas.openxmlformats.org/presentationml/2006/main">
   <p:cSld>
     <p:bg>
@@ -36668,36 +38100,6 @@
           </a:p>
         </p:txBody>
       </p:sp>
-      <p:pic>
-        <p:nvPicPr>
-          <p:cNvPr id="4" name="Imatge 3">
-            <a:extLst>
-              <a:ext uri="{FF2B5EF4-FFF2-40B4-BE49-F238E27FC236}">
-                <a16:creationId xmlns:a16="http://schemas.microsoft.com/office/drawing/2014/main" id="{4180FE63-6F89-4C88-B77B-CD2B86220523}"/>
-              </a:ext>
-            </a:extLst>
-          </p:cNvPr>
-          <p:cNvPicPr>
-            <a:picLocks noChangeAspect="1"/>
-          </p:cNvPicPr>
-          <p:nvPr/>
-        </p:nvPicPr>
-        <p:blipFill>
-          <a:blip r:embed="rId5"/>
-          <a:stretch>
-            <a:fillRect/>
-          </a:stretch>
-        </p:blipFill>
-        <p:spPr>
-          <a:xfrm>
-            <a:off x="551028" y="2153594"/>
-            <a:ext cx="14510782" cy="6638769"/>
-          </a:xfrm>
-          <a:prstGeom prst="rect">
-            <a:avLst/>
-          </a:prstGeom>
-        </p:spPr>
-      </p:pic>
       <p:sp>
         <p:nvSpPr>
           <p:cNvPr id="2" name="QuadreDeText 1">
@@ -36732,7 +38134,7 @@
             </a:r>
             <a:r>
               <a:rPr lang="es-ES" dirty="0">
-                <a:hlinkClick r:id="rId6"/>
+                <a:hlinkClick r:id="rId5"/>
               </a:rPr>
               <a:t>Encuesta Anual Laboral. Ministerio de Trabajo y Economía Social</a:t>
             </a:r>
@@ -36740,6 +38142,36 @@
           </a:p>
         </p:txBody>
       </p:sp>
+      <p:pic>
+        <p:nvPicPr>
+          <p:cNvPr id="7" name="Imatge 6">
+            <a:extLst>
+              <a:ext uri="{FF2B5EF4-FFF2-40B4-BE49-F238E27FC236}">
+                <a16:creationId xmlns:a16="http://schemas.microsoft.com/office/drawing/2014/main" id="{EF8D80AC-68BF-4C74-AF63-D036E6A522F2}"/>
+              </a:ext>
+            </a:extLst>
+          </p:cNvPr>
+          <p:cNvPicPr>
+            <a:picLocks noChangeAspect="1"/>
+          </p:cNvPicPr>
+          <p:nvPr/>
+        </p:nvPicPr>
+        <p:blipFill>
+          <a:blip r:embed="rId6"/>
+          <a:stretch>
+            <a:fillRect/>
+          </a:stretch>
+        </p:blipFill>
+        <p:spPr>
+          <a:xfrm>
+            <a:off x="82037" y="1919752"/>
+            <a:ext cx="15245681" cy="6974990"/>
+          </a:xfrm>
+          <a:prstGeom prst="rect">
+            <a:avLst/>
+          </a:prstGeom>
+        </p:spPr>
+      </p:pic>
     </p:spTree>
   </p:cSld>
   <p:clrMapOvr>
@@ -36748,7 +38180,7 @@
 </p:sld>
 </file>
 
-<file path=ppt/slides/slide7.xml><?xml version="1.0" encoding="utf-8"?>
+<file path=ppt/slides/slide8.xml><?xml version="1.0" encoding="utf-8"?>
 <p:sld xmlns:a="http://schemas.openxmlformats.org/drawingml/2006/main" xmlns:r="http://schemas.openxmlformats.org/officeDocument/2006/relationships" xmlns:p="http://schemas.openxmlformats.org/presentationml/2006/main">
   <p:cSld>
     <p:bg>
@@ -36850,7 +38282,31 @@
                 <a:cs typeface="Poppins"/>
                 <a:sym typeface="Poppins"/>
               </a:rPr>
-              <a:t>Análisis del tamaño de la Empresa</a:t>
+              <a:t>Análisis </a:t>
+            </a:r>
+            <a:r>
+              <a:rPr lang="es-ES_tradnl" sz="3601" b="1" dirty="0">
+                <a:solidFill>
+                  <a:srgbClr val="004AAD"/>
+                </a:solidFill>
+                <a:latin typeface="Poppins"/>
+                <a:ea typeface="Poppins"/>
+                <a:cs typeface="Poppins"/>
+                <a:sym typeface="Poppins"/>
+              </a:rPr>
+              <a:t>por</a:t>
+            </a:r>
+            <a:r>
+              <a:rPr lang="es-ES_tradnl" sz="3601" b="1" i="0" u="none" strike="noStrike" cap="none" dirty="0">
+                <a:solidFill>
+                  <a:srgbClr val="004AAD"/>
+                </a:solidFill>
+                <a:latin typeface="Poppins"/>
+                <a:ea typeface="Poppins"/>
+                <a:cs typeface="Poppins"/>
+                <a:sym typeface="Poppins"/>
+              </a:rPr>
+              <a:t> tamaño de la Empresa</a:t>
             </a:r>
             <a:endParaRPr lang="es-ES_tradnl" dirty="0"/>
           </a:p>
@@ -37205,7 +38661,7 @@
 </p:sld>
 </file>
 
-<file path=ppt/slides/slide8.xml><?xml version="1.0" encoding="utf-8"?>
+<file path=ppt/slides/slide9.xml><?xml version="1.0" encoding="utf-8"?>
 <p:sld xmlns:a="http://schemas.openxmlformats.org/drawingml/2006/main" xmlns:r="http://schemas.openxmlformats.org/officeDocument/2006/relationships" xmlns:p="http://schemas.openxmlformats.org/presentationml/2006/main">
   <p:cSld>
     <p:bg>
@@ -37371,7 +38827,31 @@
                 <a:cs typeface="Poppins"/>
                 <a:sym typeface="Poppins"/>
               </a:rPr>
-              <a:t>Análisis del tamaño de la Empresa</a:t>
+              <a:t>Análisis </a:t>
+            </a:r>
+            <a:r>
+              <a:rPr lang="es-ES_tradnl" sz="3601" b="1" dirty="0">
+                <a:solidFill>
+                  <a:srgbClr val="004AAD"/>
+                </a:solidFill>
+                <a:latin typeface="Poppins"/>
+                <a:ea typeface="Poppins"/>
+                <a:cs typeface="Poppins"/>
+                <a:sym typeface="Poppins"/>
+              </a:rPr>
+              <a:t>por</a:t>
+            </a:r>
+            <a:r>
+              <a:rPr lang="es-ES_tradnl" sz="3601" b="1" i="0" u="none" strike="noStrike" cap="none" dirty="0">
+                <a:solidFill>
+                  <a:srgbClr val="004AAD"/>
+                </a:solidFill>
+                <a:latin typeface="Poppins"/>
+                <a:ea typeface="Poppins"/>
+                <a:cs typeface="Poppins"/>
+                <a:sym typeface="Poppins"/>
+              </a:rPr>
+              <a:t> tamaño de la Empresa</a:t>
             </a:r>
             <a:endParaRPr lang="es-ES_tradnl" dirty="0"/>
           </a:p>
@@ -37513,7 +38993,7 @@
         </p:nvSpPr>
         <p:spPr>
           <a:xfrm rot="5400000">
-            <a:off x="3866212" y="4340793"/>
+            <a:off x="3818086" y="4340793"/>
             <a:ext cx="2805664" cy="1034324"/>
           </a:xfrm>
           <a:prstGeom prst="roundRect">
@@ -37567,7 +39047,7 @@
         </p:nvSpPr>
         <p:spPr>
           <a:xfrm rot="5400000">
-            <a:off x="9438866" y="4239665"/>
+            <a:off x="9374698" y="4239665"/>
             <a:ext cx="3037901" cy="1034325"/>
           </a:xfrm>
           <a:prstGeom prst="roundRect">
@@ -37653,409 +39133,6 @@
     <p:extLst>
       <p:ext uri="{BB962C8B-B14F-4D97-AF65-F5344CB8AC3E}">
         <p14:creationId xmlns:p14="http://schemas.microsoft.com/office/powerpoint/2010/main" val="3046405668"/>
-      </p:ext>
-    </p:extLst>
-  </p:cSld>
-  <p:clrMapOvr>
-    <a:masterClrMapping/>
-  </p:clrMapOvr>
-</p:sld>
-</file>
-
-<file path=ppt/slides/slide9.xml><?xml version="1.0" encoding="utf-8"?>
-<p:sld xmlns:a="http://schemas.openxmlformats.org/drawingml/2006/main" xmlns:r="http://schemas.openxmlformats.org/officeDocument/2006/relationships" xmlns:p="http://schemas.openxmlformats.org/presentationml/2006/main">
-  <p:cSld>
-    <p:bg>
-      <p:bgPr>
-        <a:solidFill>
-          <a:srgbClr val="E0E9F9"/>
-        </a:solidFill>
-        <a:effectLst/>
-      </p:bgPr>
-    </p:bg>
-    <p:spTree>
-      <p:nvGrpSpPr>
-        <p:cNvPr id="1" name="Shape 138"/>
-        <p:cNvGrpSpPr/>
-        <p:nvPr/>
-      </p:nvGrpSpPr>
-      <p:grpSpPr>
-        <a:xfrm>
-          <a:off x="0" y="0"/>
-          <a:ext cx="0" cy="0"/>
-          <a:chOff x="0" y="0"/>
-          <a:chExt cx="0" cy="0"/>
-        </a:xfrm>
-      </p:grpSpPr>
-      <p:pic>
-        <p:nvPicPr>
-          <p:cNvPr id="3" name="Imatge 2">
-            <a:extLst>
-              <a:ext uri="{FF2B5EF4-FFF2-40B4-BE49-F238E27FC236}">
-                <a16:creationId xmlns:a16="http://schemas.microsoft.com/office/drawing/2014/main" id="{41DD00EC-191E-415A-8EAD-81BDE2CFB411}"/>
-              </a:ext>
-            </a:extLst>
-          </p:cNvPr>
-          <p:cNvPicPr>
-            <a:picLocks noChangeAspect="1"/>
-          </p:cNvPicPr>
-          <p:nvPr/>
-        </p:nvPicPr>
-        <p:blipFill>
-          <a:blip r:embed="rId3"/>
-          <a:stretch>
-            <a:fillRect/>
-          </a:stretch>
-        </p:blipFill>
-        <p:spPr>
-          <a:xfrm>
-            <a:off x="3233744" y="1154986"/>
-            <a:ext cx="10493347" cy="9132013"/>
-          </a:xfrm>
-          <a:prstGeom prst="rect">
-            <a:avLst/>
-          </a:prstGeom>
-        </p:spPr>
-      </p:pic>
-      <p:sp>
-        <p:nvSpPr>
-          <p:cNvPr id="11" name="Google Shape;150;p17">
-            <a:extLst>
-              <a:ext uri="{FF2B5EF4-FFF2-40B4-BE49-F238E27FC236}">
-                <a16:creationId xmlns:a16="http://schemas.microsoft.com/office/drawing/2014/main" id="{DC31FCA6-E624-4F0D-9CEA-5147EAFF7540}"/>
-              </a:ext>
-            </a:extLst>
-          </p:cNvPr>
-          <p:cNvSpPr/>
-          <p:nvPr/>
-        </p:nvSpPr>
-        <p:spPr>
-          <a:xfrm>
-            <a:off x="13727091" y="2555717"/>
-            <a:ext cx="4065560" cy="5646612"/>
-          </a:xfrm>
-          <a:custGeom>
-            <a:avLst/>
-            <a:gdLst/>
-            <a:ahLst/>
-            <a:cxnLst/>
-            <a:rect l="l" t="t" r="r" b="b"/>
-            <a:pathLst>
-              <a:path w="6557355" h="9107438" extrusionOk="0">
-                <a:moveTo>
-                  <a:pt x="0" y="0"/>
-                </a:moveTo>
-                <a:lnTo>
-                  <a:pt x="6557355" y="0"/>
-                </a:lnTo>
-                <a:lnTo>
-                  <a:pt x="6557355" y="9107438"/>
-                </a:lnTo>
-                <a:lnTo>
-                  <a:pt x="0" y="9107438"/>
-                </a:lnTo>
-                <a:lnTo>
-                  <a:pt x="0" y="0"/>
-                </a:lnTo>
-                <a:close/>
-              </a:path>
-            </a:pathLst>
-          </a:custGeom>
-          <a:blipFill rotWithShape="1">
-            <a:blip r:embed="rId4">
-              <a:alphaModFix/>
-            </a:blip>
-            <a:stretch>
-              <a:fillRect/>
-            </a:stretch>
-          </a:blipFill>
-          <a:ln>
-            <a:noFill/>
-          </a:ln>
-        </p:spPr>
-        <p:txBody>
-          <a:bodyPr/>
-          <a:lstStyle/>
-          <a:p>
-            <a:endParaRPr lang="es-ES_tradnl" dirty="0"/>
-          </a:p>
-        </p:txBody>
-      </p:sp>
-      <p:sp>
-        <p:nvSpPr>
-          <p:cNvPr id="142" name="Google Shape;142;p16"/>
-          <p:cNvSpPr txBox="1"/>
-          <p:nvPr/>
-        </p:nvSpPr>
-        <p:spPr>
-          <a:xfrm>
-            <a:off x="4000546" y="524304"/>
-            <a:ext cx="9594965" cy="670505"/>
-          </a:xfrm>
-          <a:prstGeom prst="rect">
-            <a:avLst/>
-          </a:prstGeom>
-          <a:noFill/>
-          <a:ln>
-            <a:noFill/>
-          </a:ln>
-        </p:spPr>
-        <p:txBody>
-          <a:bodyPr spcFirstLastPara="1" wrap="square" lIns="0" tIns="0" rIns="0" bIns="0" anchor="t" anchorCtr="0">
-            <a:spAutoFit/>
-          </a:bodyPr>
-          <a:lstStyle/>
-          <a:p>
-            <a:pPr marL="0" marR="0" lvl="0" indent="0" algn="l" rtl="0">
-              <a:lnSpc>
-                <a:spcPct val="121055"/>
-              </a:lnSpc>
-              <a:spcBef>
-                <a:spcPts val="0"/>
-              </a:spcBef>
-              <a:spcAft>
-                <a:spcPts val="0"/>
-              </a:spcAft>
-              <a:buNone/>
-            </a:pPr>
-            <a:r>
-              <a:rPr lang="es-ES_tradnl" sz="3601" b="1" i="0" u="none" strike="noStrike" cap="none" dirty="0">
-                <a:solidFill>
-                  <a:srgbClr val="004AAD"/>
-                </a:solidFill>
-                <a:latin typeface="Poppins"/>
-                <a:ea typeface="Poppins"/>
-                <a:cs typeface="Poppins"/>
-                <a:sym typeface="Poppins"/>
-              </a:rPr>
-              <a:t>Análisis del sector económico</a:t>
-            </a:r>
-            <a:endParaRPr lang="es-ES_tradnl" dirty="0"/>
-          </a:p>
-        </p:txBody>
-      </p:sp>
-      <p:grpSp>
-        <p:nvGrpSpPr>
-          <p:cNvPr id="143" name="Google Shape;143;p16"/>
-          <p:cNvGrpSpPr/>
-          <p:nvPr/>
-        </p:nvGrpSpPr>
-        <p:grpSpPr>
-          <a:xfrm>
-            <a:off x="0" y="5"/>
-            <a:ext cx="2163413" cy="1886345"/>
-            <a:chOff x="12784175" y="3675030"/>
-            <a:chExt cx="2163413" cy="1886345"/>
-          </a:xfrm>
-        </p:grpSpPr>
-        <p:sp>
-          <p:nvSpPr>
-            <p:cNvPr id="144" name="Google Shape;144;p16"/>
-            <p:cNvSpPr txBox="1"/>
-            <p:nvPr/>
-          </p:nvSpPr>
-          <p:spPr>
-            <a:xfrm rot="1830973">
-              <a:off x="12805773" y="4425496"/>
-              <a:ext cx="2081405" cy="652657"/>
-            </a:xfrm>
-            <a:prstGeom prst="rect">
-              <a:avLst/>
-            </a:prstGeom>
-            <a:noFill/>
-            <a:ln>
-              <a:noFill/>
-            </a:ln>
-          </p:spPr>
-          <p:txBody>
-            <a:bodyPr spcFirstLastPara="1" wrap="square" lIns="91425" tIns="91425" rIns="91425" bIns="91425" anchor="t" anchorCtr="0">
-              <a:noAutofit/>
-            </a:bodyPr>
-            <a:lstStyle/>
-            <a:p>
-              <a:pPr marL="0" lvl="0" indent="0" algn="l" rtl="0">
-                <a:spcBef>
-                  <a:spcPts val="0"/>
-                </a:spcBef>
-                <a:spcAft>
-                  <a:spcPts val="0"/>
-                </a:spcAft>
-                <a:buNone/>
-              </a:pPr>
-              <a:r>
-                <a:rPr lang="es-ES_tradnl" sz="2300" b="1" i="1" dirty="0">
-                  <a:solidFill>
-                    <a:srgbClr val="E69138"/>
-                  </a:solidFill>
-                  <a:latin typeface="Calibri"/>
-                  <a:ea typeface="Calibri"/>
-                  <a:cs typeface="Calibri"/>
-                  <a:sym typeface="Calibri"/>
-                </a:rPr>
-                <a:t>RAPID EXPRESS </a:t>
-              </a:r>
-            </a:p>
-          </p:txBody>
-        </p:sp>
-        <p:sp>
-          <p:nvSpPr>
-            <p:cNvPr id="145" name="Google Shape;145;p16"/>
-            <p:cNvSpPr/>
-            <p:nvPr/>
-          </p:nvSpPr>
-          <p:spPr>
-            <a:xfrm>
-              <a:off x="13335203" y="3675030"/>
-              <a:ext cx="1612385" cy="1275250"/>
-            </a:xfrm>
-            <a:custGeom>
-              <a:avLst/>
-              <a:gdLst/>
-              <a:ahLst/>
-              <a:cxnLst/>
-              <a:rect l="l" t="t" r="r" b="b"/>
-              <a:pathLst>
-                <a:path w="1612385" h="1275250" extrusionOk="0">
-                  <a:moveTo>
-                    <a:pt x="0" y="0"/>
-                  </a:moveTo>
-                  <a:lnTo>
-                    <a:pt x="1612384" y="0"/>
-                  </a:lnTo>
-                  <a:lnTo>
-                    <a:pt x="1612384" y="1275249"/>
-                  </a:lnTo>
-                  <a:lnTo>
-                    <a:pt x="0" y="1275249"/>
-                  </a:lnTo>
-                  <a:lnTo>
-                    <a:pt x="0" y="0"/>
-                  </a:lnTo>
-                  <a:close/>
-                </a:path>
-              </a:pathLst>
-            </a:custGeom>
-            <a:blipFill rotWithShape="1">
-              <a:blip r:embed="rId5">
-                <a:alphaModFix/>
-              </a:blip>
-              <a:stretch>
-                <a:fillRect/>
-              </a:stretch>
-            </a:blipFill>
-            <a:ln>
-              <a:noFill/>
-            </a:ln>
-          </p:spPr>
-          <p:txBody>
-            <a:bodyPr/>
-            <a:lstStyle/>
-            <a:p>
-              <a:endParaRPr lang="es-ES_tradnl" dirty="0"/>
-            </a:p>
-          </p:txBody>
-        </p:sp>
-      </p:grpSp>
-      <p:sp>
-        <p:nvSpPr>
-          <p:cNvPr id="5" name="Rectángulo redondeado 4">
-            <a:extLst>
-              <a:ext uri="{FF2B5EF4-FFF2-40B4-BE49-F238E27FC236}">
-                <a16:creationId xmlns:a16="http://schemas.microsoft.com/office/drawing/2014/main" id="{4662BFC3-4DAD-4767-15A8-BAC1AD191C5D}"/>
-              </a:ext>
-            </a:extLst>
-          </p:cNvPr>
-          <p:cNvSpPr/>
-          <p:nvPr/>
-        </p:nvSpPr>
-        <p:spPr>
-          <a:xfrm rot="5400000">
-            <a:off x="5326558" y="2843081"/>
-            <a:ext cx="3782414" cy="1034324"/>
-          </a:xfrm>
-          <a:prstGeom prst="roundRect">
-            <a:avLst/>
-          </a:prstGeom>
-          <a:noFill/>
-          <a:ln w="28575">
-            <a:solidFill>
-              <a:schemeClr val="accent6">
-                <a:lumMod val="75000"/>
-              </a:schemeClr>
-            </a:solidFill>
-          </a:ln>
-        </p:spPr>
-        <p:style>
-          <a:lnRef idx="2">
-            <a:schemeClr val="accent1">
-              <a:shade val="15000"/>
-            </a:schemeClr>
-          </a:lnRef>
-          <a:fillRef idx="1">
-            <a:schemeClr val="accent1"/>
-          </a:fillRef>
-          <a:effectRef idx="0">
-            <a:schemeClr val="accent1"/>
-          </a:effectRef>
-          <a:fontRef idx="minor">
-            <a:schemeClr val="lt1"/>
-          </a:fontRef>
-        </p:style>
-        <p:txBody>
-          <a:bodyPr rtlCol="0" anchor="ctr"/>
-          <a:lstStyle/>
-          <a:p>
-            <a:pPr algn="ctr"/>
-            <a:endParaRPr lang="es-ES"/>
-          </a:p>
-        </p:txBody>
-      </p:sp>
-      <p:sp>
-        <p:nvSpPr>
-          <p:cNvPr id="10" name="QuadreDeText 9">
-            <a:extLst>
-              <a:ext uri="{FF2B5EF4-FFF2-40B4-BE49-F238E27FC236}">
-                <a16:creationId xmlns:a16="http://schemas.microsoft.com/office/drawing/2014/main" id="{BFD99AF1-9DAA-451E-83AF-1058AB19BE6B}"/>
-              </a:ext>
-            </a:extLst>
-          </p:cNvPr>
-          <p:cNvSpPr txBox="1"/>
-          <p:nvPr/>
-        </p:nvSpPr>
-        <p:spPr>
-          <a:xfrm>
-            <a:off x="11587397" y="9295283"/>
-            <a:ext cx="9173980" cy="307777"/>
-          </a:xfrm>
-          <a:prstGeom prst="rect">
-            <a:avLst/>
-          </a:prstGeom>
-          <a:noFill/>
-        </p:spPr>
-        <p:txBody>
-          <a:bodyPr wrap="square">
-            <a:spAutoFit/>
-          </a:bodyPr>
-          <a:lstStyle/>
-          <a:p>
-            <a:r>
-              <a:rPr lang="es-ES" dirty="0"/>
-              <a:t>Fuente: </a:t>
-            </a:r>
-            <a:r>
-              <a:rPr lang="es-ES" dirty="0">
-                <a:hlinkClick r:id="rId6"/>
-              </a:rPr>
-              <a:t>Encuesta Anual Laboral. Ministerio de Trabajo y Economía Social</a:t>
-            </a:r>
-            <a:endParaRPr lang="es-ES" dirty="0"/>
-          </a:p>
-        </p:txBody>
-      </p:sp>
-    </p:spTree>
-    <p:extLst>
-      <p:ext uri="{BB962C8B-B14F-4D97-AF65-F5344CB8AC3E}">
-        <p14:creationId xmlns:p14="http://schemas.microsoft.com/office/powerpoint/2010/main" val="1860337386"/>
       </p:ext>
     </p:extLst>
   </p:cSld>

--- a/Equip_28/Results/Analisis_PAP_and_ABL_RapidExpres_2026_11_05.pptx
+++ b/Equip_28/Results/Analisis_PAP_and_ABL_RapidExpres_2026_11_05.pptx
@@ -5,61 +5,60 @@
     <p:sldMasterId id="2147483659" r:id="rId1"/>
   </p:sldMasterIdLst>
   <p:notesMasterIdLst>
-    <p:notesMasterId r:id="rId31"/>
+    <p:notesMasterId r:id="rId30"/>
   </p:notesMasterIdLst>
   <p:sldIdLst>
     <p:sldId id="256" r:id="rId2"/>
     <p:sldId id="281" r:id="rId3"/>
     <p:sldId id="296" r:id="rId4"/>
-    <p:sldId id="290" r:id="rId5"/>
-    <p:sldId id="305" r:id="rId6"/>
-    <p:sldId id="304" r:id="rId7"/>
-    <p:sldId id="259" r:id="rId8"/>
-    <p:sldId id="299" r:id="rId9"/>
-    <p:sldId id="300" r:id="rId10"/>
-    <p:sldId id="301" r:id="rId11"/>
-    <p:sldId id="298" r:id="rId12"/>
-    <p:sldId id="302" r:id="rId13"/>
-    <p:sldId id="303" r:id="rId14"/>
-    <p:sldId id="288" r:id="rId15"/>
-    <p:sldId id="297" r:id="rId16"/>
-    <p:sldId id="258" r:id="rId17"/>
-    <p:sldId id="260" r:id="rId18"/>
-    <p:sldId id="287" r:id="rId19"/>
-    <p:sldId id="284" r:id="rId20"/>
-    <p:sldId id="285" r:id="rId21"/>
-    <p:sldId id="295" r:id="rId22"/>
-    <p:sldId id="289" r:id="rId23"/>
-    <p:sldId id="257" r:id="rId24"/>
-    <p:sldId id="291" r:id="rId25"/>
-    <p:sldId id="292" r:id="rId26"/>
-    <p:sldId id="261" r:id="rId27"/>
-    <p:sldId id="262" r:id="rId28"/>
-    <p:sldId id="293" r:id="rId29"/>
-    <p:sldId id="279" r:id="rId30"/>
+    <p:sldId id="305" r:id="rId5"/>
+    <p:sldId id="304" r:id="rId6"/>
+    <p:sldId id="259" r:id="rId7"/>
+    <p:sldId id="299" r:id="rId8"/>
+    <p:sldId id="300" r:id="rId9"/>
+    <p:sldId id="301" r:id="rId10"/>
+    <p:sldId id="298" r:id="rId11"/>
+    <p:sldId id="302" r:id="rId12"/>
+    <p:sldId id="303" r:id="rId13"/>
+    <p:sldId id="288" r:id="rId14"/>
+    <p:sldId id="297" r:id="rId15"/>
+    <p:sldId id="258" r:id="rId16"/>
+    <p:sldId id="260" r:id="rId17"/>
+    <p:sldId id="287" r:id="rId18"/>
+    <p:sldId id="284" r:id="rId19"/>
+    <p:sldId id="285" r:id="rId20"/>
+    <p:sldId id="295" r:id="rId21"/>
+    <p:sldId id="289" r:id="rId22"/>
+    <p:sldId id="257" r:id="rId23"/>
+    <p:sldId id="291" r:id="rId24"/>
+    <p:sldId id="292" r:id="rId25"/>
+    <p:sldId id="261" r:id="rId26"/>
+    <p:sldId id="262" r:id="rId27"/>
+    <p:sldId id="293" r:id="rId28"/>
+    <p:sldId id="279" r:id="rId29"/>
   </p:sldIdLst>
   <p:sldSz cx="18288000" cy="10287000"/>
   <p:notesSz cx="6858000" cy="9144000"/>
   <p:embeddedFontLst>
     <p:embeddedFont>
       <p:font typeface="Calibri" panose="020F0502020204030204" pitchFamily="34" charset="0"/>
-      <p:regular r:id="rId32"/>
-      <p:bold r:id="rId33"/>
-      <p:italic r:id="rId34"/>
-      <p:boldItalic r:id="rId35"/>
+      <p:regular r:id="rId31"/>
+      <p:bold r:id="rId32"/>
+      <p:italic r:id="rId33"/>
+      <p:boldItalic r:id="rId34"/>
     </p:embeddedFont>
     <p:embeddedFont>
       <p:font typeface="Poppins" panose="00000500000000000000" pitchFamily="2" charset="0"/>
-      <p:regular r:id="rId36"/>
-      <p:bold r:id="rId37"/>
-      <p:italic r:id="rId38"/>
-      <p:boldItalic r:id="rId39"/>
+      <p:regular r:id="rId35"/>
+      <p:bold r:id="rId36"/>
+      <p:italic r:id="rId37"/>
+      <p:boldItalic r:id="rId38"/>
     </p:embeddedFont>
     <p:embeddedFont>
       <p:font typeface="Poppins Black" panose="00000A00000000000000" pitchFamily="2" charset="0"/>
-      <p:bold r:id="rId40"/>
-      <p:italic r:id="rId41"/>
-      <p:boldItalic r:id="rId42"/>
+      <p:bold r:id="rId39"/>
+      <p:italic r:id="rId40"/>
+      <p:boldItalic r:id="rId41"/>
     </p:embeddedFont>
   </p:embeddedFontLst>
   <p:defaultTextStyle>
@@ -954,7 +953,7 @@
     </p:spTree>
     <p:extLst>
       <p:ext uri="{BB962C8B-B14F-4D97-AF65-F5344CB8AC3E}">
-        <p14:creationId xmlns:p14="http://schemas.microsoft.com/office/powerpoint/2010/main" val="739215490"/>
+        <p14:creationId xmlns:p14="http://schemas.microsoft.com/office/powerpoint/2010/main" val="3436316797"/>
       </p:ext>
     </p:extLst>
   </p:cSld>
@@ -1063,7 +1062,7 @@
     </p:spTree>
     <p:extLst>
       <p:ext uri="{BB962C8B-B14F-4D97-AF65-F5344CB8AC3E}">
-        <p14:creationId xmlns:p14="http://schemas.microsoft.com/office/powerpoint/2010/main" val="3436316797"/>
+        <p14:creationId xmlns:p14="http://schemas.microsoft.com/office/powerpoint/2010/main" val="39675430"/>
       </p:ext>
     </p:extLst>
   </p:cSld>
@@ -1172,7 +1171,7 @@
     </p:spTree>
     <p:extLst>
       <p:ext uri="{BB962C8B-B14F-4D97-AF65-F5344CB8AC3E}">
-        <p14:creationId xmlns:p14="http://schemas.microsoft.com/office/powerpoint/2010/main" val="39675430"/>
+        <p14:creationId xmlns:p14="http://schemas.microsoft.com/office/powerpoint/2010/main" val="224063088"/>
       </p:ext>
     </p:extLst>
   </p:cSld>
@@ -1183,115 +1182,6 @@
 </file>
 
 <file path=ppt/notesSlides/notesSlide13.xml><?xml version="1.0" encoding="utf-8"?>
-<p:notes xmlns:a="http://schemas.openxmlformats.org/drawingml/2006/main" xmlns:r="http://schemas.openxmlformats.org/officeDocument/2006/relationships" xmlns:p="http://schemas.openxmlformats.org/presentationml/2006/main" showMasterSp="0" showMasterPhAnim="0">
-  <p:cSld>
-    <p:spTree>
-      <p:nvGrpSpPr>
-        <p:cNvPr id="1" name="Shape 135"/>
-        <p:cNvGrpSpPr/>
-        <p:nvPr/>
-      </p:nvGrpSpPr>
-      <p:grpSpPr>
-        <a:xfrm>
-          <a:off x="0" y="0"/>
-          <a:ext cx="0" cy="0"/>
-          <a:chOff x="0" y="0"/>
-          <a:chExt cx="0" cy="0"/>
-        </a:xfrm>
-      </p:grpSpPr>
-      <p:sp>
-        <p:nvSpPr>
-          <p:cNvPr id="136" name="Google Shape;136;p3:notes"/>
-          <p:cNvSpPr txBox="1">
-            <a:spLocks noGrp="1"/>
-          </p:cNvSpPr>
-          <p:nvPr>
-            <p:ph type="body" idx="1"/>
-          </p:nvPr>
-        </p:nvSpPr>
-        <p:spPr>
-          <a:xfrm>
-            <a:off x="685800" y="4343400"/>
-            <a:ext cx="5486400" cy="4114800"/>
-          </a:xfrm>
-          <a:prstGeom prst="rect">
-            <a:avLst/>
-          </a:prstGeom>
-        </p:spPr>
-        <p:txBody>
-          <a:bodyPr spcFirstLastPara="1" wrap="square" lIns="91425" tIns="91425" rIns="91425" bIns="91425" anchor="t" anchorCtr="0">
-            <a:noAutofit/>
-          </a:bodyPr>
-          <a:lstStyle/>
-          <a:p>
-            <a:pPr marL="0" lvl="0" indent="0" algn="l" rtl="0">
-              <a:spcBef>
-                <a:spcPts val="0"/>
-              </a:spcBef>
-              <a:spcAft>
-                <a:spcPts val="0"/>
-              </a:spcAft>
-              <a:buNone/>
-            </a:pPr>
-            <a:endParaRPr/>
-          </a:p>
-        </p:txBody>
-      </p:sp>
-      <p:sp>
-        <p:nvSpPr>
-          <p:cNvPr id="137" name="Google Shape;137;p3:notes"/>
-          <p:cNvSpPr>
-            <a:spLocks noGrp="1" noRot="1" noChangeAspect="1"/>
-          </p:cNvSpPr>
-          <p:nvPr>
-            <p:ph type="sldImg" idx="2"/>
-          </p:nvPr>
-        </p:nvSpPr>
-        <p:spPr>
-          <a:xfrm>
-            <a:off x="381000" y="685800"/>
-            <a:ext cx="6096000" cy="3429000"/>
-          </a:xfrm>
-          <a:custGeom>
-            <a:avLst/>
-            <a:gdLst/>
-            <a:ahLst/>
-            <a:cxnLst/>
-            <a:rect l="l" t="t" r="r" b="b"/>
-            <a:pathLst>
-              <a:path w="120000" h="120000" extrusionOk="0">
-                <a:moveTo>
-                  <a:pt x="0" y="0"/>
-                </a:moveTo>
-                <a:lnTo>
-                  <a:pt x="120000" y="0"/>
-                </a:lnTo>
-                <a:lnTo>
-                  <a:pt x="120000" y="120000"/>
-                </a:lnTo>
-                <a:lnTo>
-                  <a:pt x="0" y="120000"/>
-                </a:lnTo>
-                <a:close/>
-              </a:path>
-            </a:pathLst>
-          </a:custGeom>
-        </p:spPr>
-      </p:sp>
-    </p:spTree>
-    <p:extLst>
-      <p:ext uri="{BB962C8B-B14F-4D97-AF65-F5344CB8AC3E}">
-        <p14:creationId xmlns:p14="http://schemas.microsoft.com/office/powerpoint/2010/main" val="224063088"/>
-      </p:ext>
-    </p:extLst>
-  </p:cSld>
-  <p:clrMapOvr>
-    <a:masterClrMapping/>
-  </p:clrMapOvr>
-</p:notes>
-</file>
-
-<file path=ppt/notesSlides/notesSlide14.xml><?xml version="1.0" encoding="utf-8"?>
 <p:notes xmlns:a="http://schemas.openxmlformats.org/drawingml/2006/main" xmlns:r="http://schemas.openxmlformats.org/officeDocument/2006/relationships" xmlns:p="http://schemas.openxmlformats.org/presentationml/2006/main" showMasterSp="0" showMasterPhAnim="0">
   <p:cSld>
     <p:spTree>
@@ -1418,7 +1308,7 @@
 </p:notes>
 </file>
 
-<file path=ppt/notesSlides/notesSlide15.xml><?xml version="1.0" encoding="utf-8"?>
+<file path=ppt/notesSlides/notesSlide14.xml><?xml version="1.0" encoding="utf-8"?>
 <p:notes xmlns:a="http://schemas.openxmlformats.org/drawingml/2006/main" xmlns:r="http://schemas.openxmlformats.org/officeDocument/2006/relationships" xmlns:p="http://schemas.openxmlformats.org/presentationml/2006/main" showMasterSp="0" showMasterPhAnim="0">
   <p:cSld>
     <p:spTree>
@@ -1527,7 +1417,7 @@
 </p:notes>
 </file>
 
-<file path=ppt/notesSlides/notesSlide16.xml><?xml version="1.0" encoding="utf-8"?>
+<file path=ppt/notesSlides/notesSlide15.xml><?xml version="1.0" encoding="utf-8"?>
 <p:notes xmlns:a="http://schemas.openxmlformats.org/drawingml/2006/main" xmlns:r="http://schemas.openxmlformats.org/officeDocument/2006/relationships" xmlns:p="http://schemas.openxmlformats.org/presentationml/2006/main" showMasterSp="0" showMasterPhAnim="0">
   <p:cSld>
     <p:spTree>
@@ -1631,7 +1521,7 @@
 </p:notes>
 </file>
 
-<file path=ppt/notesSlides/notesSlide17.xml><?xml version="1.0" encoding="utf-8"?>
+<file path=ppt/notesSlides/notesSlide16.xml><?xml version="1.0" encoding="utf-8"?>
 <p:notes xmlns:a="http://schemas.openxmlformats.org/drawingml/2006/main" xmlns:r="http://schemas.openxmlformats.org/officeDocument/2006/relationships" xmlns:p="http://schemas.openxmlformats.org/presentationml/2006/main" showMasterSp="0" showMasterPhAnim="0">
   <p:cSld>
     <p:spTree>
@@ -1735,7 +1625,7 @@
 </p:notes>
 </file>
 
-<file path=ppt/notesSlides/notesSlide18.xml><?xml version="1.0" encoding="utf-8"?>
+<file path=ppt/notesSlides/notesSlide17.xml><?xml version="1.0" encoding="utf-8"?>
 <p:notes xmlns:a="http://schemas.openxmlformats.org/drawingml/2006/main" xmlns:r="http://schemas.openxmlformats.org/officeDocument/2006/relationships" xmlns:p="http://schemas.openxmlformats.org/presentationml/2006/main" showMasterSp="0" showMasterPhAnim="0">
   <p:cSld>
     <p:spTree>
@@ -1862,7 +1752,7 @@
 </p:notes>
 </file>
 
-<file path=ppt/notesSlides/notesSlide19.xml><?xml version="1.0" encoding="utf-8"?>
+<file path=ppt/notesSlides/notesSlide18.xml><?xml version="1.0" encoding="utf-8"?>
 <p:notes xmlns:a="http://schemas.openxmlformats.org/drawingml/2006/main" xmlns:r="http://schemas.openxmlformats.org/officeDocument/2006/relationships" xmlns:p="http://schemas.openxmlformats.org/presentationml/2006/main" showMasterSp="0" showMasterPhAnim="0">
   <p:cSld>
     <p:spTree>
@@ -1980,6 +1870,133 @@
     <p:extLst>
       <p:ext uri="{BB962C8B-B14F-4D97-AF65-F5344CB8AC3E}">
         <p14:creationId xmlns:p14="http://schemas.microsoft.com/office/powerpoint/2010/main" val="2275216246"/>
+      </p:ext>
+    </p:extLst>
+  </p:cSld>
+  <p:clrMapOvr>
+    <a:masterClrMapping/>
+  </p:clrMapOvr>
+</p:notes>
+</file>
+
+<file path=ppt/notesSlides/notesSlide19.xml><?xml version="1.0" encoding="utf-8"?>
+<p:notes xmlns:a="http://schemas.openxmlformats.org/drawingml/2006/main" xmlns:r="http://schemas.openxmlformats.org/officeDocument/2006/relationships" xmlns:p="http://schemas.openxmlformats.org/presentationml/2006/main" showMasterSp="0" showMasterPhAnim="0">
+  <p:cSld>
+    <p:spTree>
+      <p:nvGrpSpPr>
+        <p:cNvPr id="1" name="Shape 157">
+          <a:extLst>
+            <a:ext uri="{FF2B5EF4-FFF2-40B4-BE49-F238E27FC236}">
+              <a16:creationId xmlns:a16="http://schemas.microsoft.com/office/drawing/2014/main" id="{FCF5328D-5EF3-B3C2-ED5D-E6B9C72C504A}"/>
+            </a:ext>
+          </a:extLst>
+        </p:cNvPr>
+        <p:cNvGrpSpPr/>
+        <p:nvPr/>
+      </p:nvGrpSpPr>
+      <p:grpSpPr>
+        <a:xfrm>
+          <a:off x="0" y="0"/>
+          <a:ext cx="0" cy="0"/>
+          <a:chOff x="0" y="0"/>
+          <a:chExt cx="0" cy="0"/>
+        </a:xfrm>
+      </p:grpSpPr>
+      <p:sp>
+        <p:nvSpPr>
+          <p:cNvPr id="158" name="Google Shape;158;p4:notes">
+            <a:extLst>
+              <a:ext uri="{FF2B5EF4-FFF2-40B4-BE49-F238E27FC236}">
+                <a16:creationId xmlns:a16="http://schemas.microsoft.com/office/drawing/2014/main" id="{2D46FA33-ABC3-5982-513A-88AF808BFDFD}"/>
+              </a:ext>
+            </a:extLst>
+          </p:cNvPr>
+          <p:cNvSpPr txBox="1">
+            <a:spLocks noGrp="1"/>
+          </p:cNvSpPr>
+          <p:nvPr>
+            <p:ph type="body" idx="1"/>
+          </p:nvPr>
+        </p:nvSpPr>
+        <p:spPr>
+          <a:xfrm>
+            <a:off x="685800" y="4343400"/>
+            <a:ext cx="5486400" cy="4114800"/>
+          </a:xfrm>
+          <a:prstGeom prst="rect">
+            <a:avLst/>
+          </a:prstGeom>
+        </p:spPr>
+        <p:txBody>
+          <a:bodyPr spcFirstLastPara="1" wrap="square" lIns="91425" tIns="91425" rIns="91425" bIns="91425" anchor="t" anchorCtr="0">
+            <a:noAutofit/>
+          </a:bodyPr>
+          <a:lstStyle/>
+          <a:p>
+            <a:pPr marL="0" lvl="0" indent="0" algn="l" rtl="0">
+              <a:spcBef>
+                <a:spcPts val="0"/>
+              </a:spcBef>
+              <a:spcAft>
+                <a:spcPts val="0"/>
+              </a:spcAft>
+              <a:buNone/>
+            </a:pPr>
+            <a:endParaRPr/>
+          </a:p>
+        </p:txBody>
+      </p:sp>
+      <p:sp>
+        <p:nvSpPr>
+          <p:cNvPr id="159" name="Google Shape;159;p4:notes">
+            <a:extLst>
+              <a:ext uri="{FF2B5EF4-FFF2-40B4-BE49-F238E27FC236}">
+                <a16:creationId xmlns:a16="http://schemas.microsoft.com/office/drawing/2014/main" id="{C456DE22-CE1E-6447-C306-D3F9178E76A0}"/>
+              </a:ext>
+            </a:extLst>
+          </p:cNvPr>
+          <p:cNvSpPr>
+            <a:spLocks noGrp="1" noRot="1" noChangeAspect="1"/>
+          </p:cNvSpPr>
+          <p:nvPr>
+            <p:ph type="sldImg" idx="2"/>
+          </p:nvPr>
+        </p:nvSpPr>
+        <p:spPr>
+          <a:xfrm>
+            <a:off x="381000" y="685800"/>
+            <a:ext cx="6096000" cy="3429000"/>
+          </a:xfrm>
+          <a:custGeom>
+            <a:avLst/>
+            <a:gdLst/>
+            <a:ahLst/>
+            <a:cxnLst/>
+            <a:rect l="l" t="t" r="r" b="b"/>
+            <a:pathLst>
+              <a:path w="120000" h="120000" extrusionOk="0">
+                <a:moveTo>
+                  <a:pt x="0" y="0"/>
+                </a:moveTo>
+                <a:lnTo>
+                  <a:pt x="120000" y="0"/>
+                </a:lnTo>
+                <a:lnTo>
+                  <a:pt x="120000" y="120000"/>
+                </a:lnTo>
+                <a:lnTo>
+                  <a:pt x="0" y="120000"/>
+                </a:lnTo>
+                <a:close/>
+              </a:path>
+            </a:pathLst>
+          </a:custGeom>
+        </p:spPr>
+      </p:sp>
+    </p:spTree>
+    <p:extLst>
+      <p:ext uri="{BB962C8B-B14F-4D97-AF65-F5344CB8AC3E}">
+        <p14:creationId xmlns:p14="http://schemas.microsoft.com/office/powerpoint/2010/main" val="3384843925"/>
       </p:ext>
     </p:extLst>
   </p:cSld>
@@ -2215,7 +2232,7 @@
     </p:spTree>
     <p:extLst>
       <p:ext uri="{BB962C8B-B14F-4D97-AF65-F5344CB8AC3E}">
-        <p14:creationId xmlns:p14="http://schemas.microsoft.com/office/powerpoint/2010/main" val="3384843925"/>
+        <p14:creationId xmlns:p14="http://schemas.microsoft.com/office/powerpoint/2010/main" val="4038510907"/>
       </p:ext>
     </p:extLst>
   </p:cSld>
@@ -2226,133 +2243,6 @@
 </file>
 
 <file path=ppt/notesSlides/notesSlide21.xml><?xml version="1.0" encoding="utf-8"?>
-<p:notes xmlns:a="http://schemas.openxmlformats.org/drawingml/2006/main" xmlns:r="http://schemas.openxmlformats.org/officeDocument/2006/relationships" xmlns:p="http://schemas.openxmlformats.org/presentationml/2006/main" showMasterSp="0" showMasterPhAnim="0">
-  <p:cSld>
-    <p:spTree>
-      <p:nvGrpSpPr>
-        <p:cNvPr id="1" name="Shape 157">
-          <a:extLst>
-            <a:ext uri="{FF2B5EF4-FFF2-40B4-BE49-F238E27FC236}">
-              <a16:creationId xmlns:a16="http://schemas.microsoft.com/office/drawing/2014/main" id="{FCF5328D-5EF3-B3C2-ED5D-E6B9C72C504A}"/>
-            </a:ext>
-          </a:extLst>
-        </p:cNvPr>
-        <p:cNvGrpSpPr/>
-        <p:nvPr/>
-      </p:nvGrpSpPr>
-      <p:grpSpPr>
-        <a:xfrm>
-          <a:off x="0" y="0"/>
-          <a:ext cx="0" cy="0"/>
-          <a:chOff x="0" y="0"/>
-          <a:chExt cx="0" cy="0"/>
-        </a:xfrm>
-      </p:grpSpPr>
-      <p:sp>
-        <p:nvSpPr>
-          <p:cNvPr id="158" name="Google Shape;158;p4:notes">
-            <a:extLst>
-              <a:ext uri="{FF2B5EF4-FFF2-40B4-BE49-F238E27FC236}">
-                <a16:creationId xmlns:a16="http://schemas.microsoft.com/office/drawing/2014/main" id="{2D46FA33-ABC3-5982-513A-88AF808BFDFD}"/>
-              </a:ext>
-            </a:extLst>
-          </p:cNvPr>
-          <p:cNvSpPr txBox="1">
-            <a:spLocks noGrp="1"/>
-          </p:cNvSpPr>
-          <p:nvPr>
-            <p:ph type="body" idx="1"/>
-          </p:nvPr>
-        </p:nvSpPr>
-        <p:spPr>
-          <a:xfrm>
-            <a:off x="685800" y="4343400"/>
-            <a:ext cx="5486400" cy="4114800"/>
-          </a:xfrm>
-          <a:prstGeom prst="rect">
-            <a:avLst/>
-          </a:prstGeom>
-        </p:spPr>
-        <p:txBody>
-          <a:bodyPr spcFirstLastPara="1" wrap="square" lIns="91425" tIns="91425" rIns="91425" bIns="91425" anchor="t" anchorCtr="0">
-            <a:noAutofit/>
-          </a:bodyPr>
-          <a:lstStyle/>
-          <a:p>
-            <a:pPr marL="0" lvl="0" indent="0" algn="l" rtl="0">
-              <a:spcBef>
-                <a:spcPts val="0"/>
-              </a:spcBef>
-              <a:spcAft>
-                <a:spcPts val="0"/>
-              </a:spcAft>
-              <a:buNone/>
-            </a:pPr>
-            <a:endParaRPr/>
-          </a:p>
-        </p:txBody>
-      </p:sp>
-      <p:sp>
-        <p:nvSpPr>
-          <p:cNvPr id="159" name="Google Shape;159;p4:notes">
-            <a:extLst>
-              <a:ext uri="{FF2B5EF4-FFF2-40B4-BE49-F238E27FC236}">
-                <a16:creationId xmlns:a16="http://schemas.microsoft.com/office/drawing/2014/main" id="{C456DE22-CE1E-6447-C306-D3F9178E76A0}"/>
-              </a:ext>
-            </a:extLst>
-          </p:cNvPr>
-          <p:cNvSpPr>
-            <a:spLocks noGrp="1" noRot="1" noChangeAspect="1"/>
-          </p:cNvSpPr>
-          <p:nvPr>
-            <p:ph type="sldImg" idx="2"/>
-          </p:nvPr>
-        </p:nvSpPr>
-        <p:spPr>
-          <a:xfrm>
-            <a:off x="381000" y="685800"/>
-            <a:ext cx="6096000" cy="3429000"/>
-          </a:xfrm>
-          <a:custGeom>
-            <a:avLst/>
-            <a:gdLst/>
-            <a:ahLst/>
-            <a:cxnLst/>
-            <a:rect l="l" t="t" r="r" b="b"/>
-            <a:pathLst>
-              <a:path w="120000" h="120000" extrusionOk="0">
-                <a:moveTo>
-                  <a:pt x="0" y="0"/>
-                </a:moveTo>
-                <a:lnTo>
-                  <a:pt x="120000" y="0"/>
-                </a:lnTo>
-                <a:lnTo>
-                  <a:pt x="120000" y="120000"/>
-                </a:lnTo>
-                <a:lnTo>
-                  <a:pt x="0" y="120000"/>
-                </a:lnTo>
-                <a:close/>
-              </a:path>
-            </a:pathLst>
-          </a:custGeom>
-        </p:spPr>
-      </p:sp>
-    </p:spTree>
-    <p:extLst>
-      <p:ext uri="{BB962C8B-B14F-4D97-AF65-F5344CB8AC3E}">
-        <p14:creationId xmlns:p14="http://schemas.microsoft.com/office/powerpoint/2010/main" val="4038510907"/>
-      </p:ext>
-    </p:extLst>
-  </p:cSld>
-  <p:clrMapOvr>
-    <a:masterClrMapping/>
-  </p:clrMapOvr>
-</p:notes>
-</file>
-
-<file path=ppt/notesSlides/notesSlide22.xml><?xml version="1.0" encoding="utf-8"?>
 <p:notes xmlns:a="http://schemas.openxmlformats.org/drawingml/2006/main" xmlns:r="http://schemas.openxmlformats.org/officeDocument/2006/relationships" xmlns:p="http://schemas.openxmlformats.org/presentationml/2006/main" showMasterSp="0" showMasterPhAnim="0">
   <p:cSld>
     <p:spTree>
@@ -2456,7 +2346,7 @@
 </p:notes>
 </file>
 
-<file path=ppt/notesSlides/notesSlide23.xml><?xml version="1.0" encoding="utf-8"?>
+<file path=ppt/notesSlides/notesSlide22.xml><?xml version="1.0" encoding="utf-8"?>
 <p:notes xmlns:a="http://schemas.openxmlformats.org/drawingml/2006/main" xmlns:r="http://schemas.openxmlformats.org/officeDocument/2006/relationships" xmlns:p="http://schemas.openxmlformats.org/presentationml/2006/main" showMasterSp="0" showMasterPhAnim="0">
   <p:cSld>
     <p:spTree>
@@ -2560,7 +2450,7 @@
 </p:notes>
 </file>
 
-<file path=ppt/notesSlides/notesSlide24.xml><?xml version="1.0" encoding="utf-8"?>
+<file path=ppt/notesSlides/notesSlide23.xml><?xml version="1.0" encoding="utf-8"?>
 <p:notes xmlns:a="http://schemas.openxmlformats.org/drawingml/2006/main" xmlns:r="http://schemas.openxmlformats.org/officeDocument/2006/relationships" xmlns:p="http://schemas.openxmlformats.org/presentationml/2006/main" showMasterSp="0" showMasterPhAnim="0">
   <p:cSld>
     <p:spTree>
@@ -2664,7 +2554,7 @@
 </p:notes>
 </file>
 
-<file path=ppt/notesSlides/notesSlide25.xml><?xml version="1.0" encoding="utf-8"?>
+<file path=ppt/notesSlides/notesSlide24.xml><?xml version="1.0" encoding="utf-8"?>
 <p:notes xmlns:a="http://schemas.openxmlformats.org/drawingml/2006/main" xmlns:r="http://schemas.openxmlformats.org/officeDocument/2006/relationships" xmlns:p="http://schemas.openxmlformats.org/presentationml/2006/main" showMasterSp="0" showMasterPhAnim="0">
   <p:cSld>
     <p:spTree>
@@ -2768,7 +2658,7 @@
 </p:notes>
 </file>
 
-<file path=ppt/notesSlides/notesSlide26.xml><?xml version="1.0" encoding="utf-8"?>
+<file path=ppt/notesSlides/notesSlide25.xml><?xml version="1.0" encoding="utf-8"?>
 <p:notes xmlns:a="http://schemas.openxmlformats.org/drawingml/2006/main" xmlns:r="http://schemas.openxmlformats.org/officeDocument/2006/relationships" xmlns:p="http://schemas.openxmlformats.org/presentationml/2006/main" showMasterSp="0" showMasterPhAnim="0">
   <p:cSld>
     <p:spTree>
@@ -2872,7 +2762,7 @@
 </p:notes>
 </file>
 
-<file path=ppt/notesSlides/notesSlide27.xml><?xml version="1.0" encoding="utf-8"?>
+<file path=ppt/notesSlides/notesSlide26.xml><?xml version="1.0" encoding="utf-8"?>
 <p:notes xmlns:a="http://schemas.openxmlformats.org/drawingml/2006/main" xmlns:r="http://schemas.openxmlformats.org/officeDocument/2006/relationships" xmlns:p="http://schemas.openxmlformats.org/presentationml/2006/main" showMasterSp="0" showMasterPhAnim="0">
   <p:cSld>
     <p:spTree>
@@ -2976,7 +2866,7 @@
 </p:notes>
 </file>
 
-<file path=ppt/notesSlides/notesSlide28.xml><?xml version="1.0" encoding="utf-8"?>
+<file path=ppt/notesSlides/notesSlide27.xml><?xml version="1.0" encoding="utf-8"?>
 <p:notes xmlns:a="http://schemas.openxmlformats.org/drawingml/2006/main" xmlns:r="http://schemas.openxmlformats.org/officeDocument/2006/relationships" xmlns:p="http://schemas.openxmlformats.org/presentationml/2006/main" showMasterSp="0" showMasterPhAnim="0">
   <p:cSld>
     <p:spTree>
@@ -3080,7 +2970,7 @@
 </p:notes>
 </file>
 
-<file path=ppt/notesSlides/notesSlide29.xml><?xml version="1.0" encoding="utf-8"?>
+<file path=ppt/notesSlides/notesSlide28.xml><?xml version="1.0" encoding="utf-8"?>
 <p:notes xmlns:a="http://schemas.openxmlformats.org/drawingml/2006/main" xmlns:r="http://schemas.openxmlformats.org/officeDocument/2006/relationships" xmlns:p="http://schemas.openxmlformats.org/presentationml/2006/main" showMasterSp="0" showMasterPhAnim="0">
   <p:cSld>
     <p:spTree>
@@ -3298,110 +3188,6 @@
   <p:cSld>
     <p:spTree>
       <p:nvGrpSpPr>
-        <p:cNvPr id="1" name="Shape 119"/>
-        <p:cNvGrpSpPr/>
-        <p:nvPr/>
-      </p:nvGrpSpPr>
-      <p:grpSpPr>
-        <a:xfrm>
-          <a:off x="0" y="0"/>
-          <a:ext cx="0" cy="0"/>
-          <a:chOff x="0" y="0"/>
-          <a:chExt cx="0" cy="0"/>
-        </a:xfrm>
-      </p:grpSpPr>
-      <p:sp>
-        <p:nvSpPr>
-          <p:cNvPr id="120" name="Google Shape;120;g3dbe1710380_1_211:notes"/>
-          <p:cNvSpPr txBox="1">
-            <a:spLocks noGrp="1"/>
-          </p:cNvSpPr>
-          <p:nvPr>
-            <p:ph type="body" idx="1"/>
-          </p:nvPr>
-        </p:nvSpPr>
-        <p:spPr>
-          <a:xfrm>
-            <a:off x="685800" y="4343400"/>
-            <a:ext cx="5486400" cy="4114800"/>
-          </a:xfrm>
-          <a:prstGeom prst="rect">
-            <a:avLst/>
-          </a:prstGeom>
-        </p:spPr>
-        <p:txBody>
-          <a:bodyPr spcFirstLastPara="1" wrap="square" lIns="91425" tIns="91425" rIns="91425" bIns="91425" anchor="t" anchorCtr="0">
-            <a:noAutofit/>
-          </a:bodyPr>
-          <a:lstStyle/>
-          <a:p>
-            <a:pPr marL="0" lvl="0" indent="0" algn="l" rtl="0">
-              <a:spcBef>
-                <a:spcPts val="0"/>
-              </a:spcBef>
-              <a:spcAft>
-                <a:spcPts val="0"/>
-              </a:spcAft>
-              <a:buNone/>
-            </a:pPr>
-            <a:endParaRPr/>
-          </a:p>
-        </p:txBody>
-      </p:sp>
-      <p:sp>
-        <p:nvSpPr>
-          <p:cNvPr id="121" name="Google Shape;121;g3dbe1710380_1_211:notes"/>
-          <p:cNvSpPr>
-            <a:spLocks noGrp="1" noRot="1" noChangeAspect="1"/>
-          </p:cNvSpPr>
-          <p:nvPr>
-            <p:ph type="sldImg" idx="2"/>
-          </p:nvPr>
-        </p:nvSpPr>
-        <p:spPr>
-          <a:xfrm>
-            <a:off x="381000" y="685800"/>
-            <a:ext cx="6096000" cy="3429000"/>
-          </a:xfrm>
-          <a:custGeom>
-            <a:avLst/>
-            <a:gdLst/>
-            <a:ahLst/>
-            <a:cxnLst/>
-            <a:rect l="l" t="t" r="r" b="b"/>
-            <a:pathLst>
-              <a:path w="120000" h="120000" extrusionOk="0">
-                <a:moveTo>
-                  <a:pt x="0" y="0"/>
-                </a:moveTo>
-                <a:lnTo>
-                  <a:pt x="120000" y="0"/>
-                </a:lnTo>
-                <a:lnTo>
-                  <a:pt x="120000" y="120000"/>
-                </a:lnTo>
-                <a:lnTo>
-                  <a:pt x="0" y="120000"/>
-                </a:lnTo>
-                <a:close/>
-              </a:path>
-            </a:pathLst>
-          </a:custGeom>
-        </p:spPr>
-      </p:sp>
-    </p:spTree>
-  </p:cSld>
-  <p:clrMapOvr>
-    <a:masterClrMapping/>
-  </p:clrMapOvr>
-</p:notes>
-</file>
-
-<file path=ppt/notesSlides/notesSlide5.xml><?xml version="1.0" encoding="utf-8"?>
-<p:notes xmlns:a="http://schemas.openxmlformats.org/drawingml/2006/main" xmlns:r="http://schemas.openxmlformats.org/officeDocument/2006/relationships" xmlns:p="http://schemas.openxmlformats.org/presentationml/2006/main" showMasterSp="0" showMasterPhAnim="0">
-  <p:cSld>
-    <p:spTree>
-      <p:nvGrpSpPr>
         <p:cNvPr id="1" name="Shape 146"/>
         <p:cNvGrpSpPr/>
         <p:nvPr/>
@@ -3501,7 +3287,7 @@
 </p:notes>
 </file>
 
-<file path=ppt/notesSlides/notesSlide6.xml><?xml version="1.0" encoding="utf-8"?>
+<file path=ppt/notesSlides/notesSlide5.xml><?xml version="1.0" encoding="utf-8"?>
 <p:notes xmlns:a="http://schemas.openxmlformats.org/drawingml/2006/main" xmlns:r="http://schemas.openxmlformats.org/officeDocument/2006/relationships" xmlns:p="http://schemas.openxmlformats.org/presentationml/2006/main" showMasterSp="0" showMasterPhAnim="0">
   <p:cSld>
     <p:spTree>
@@ -3559,6 +3345,110 @@
       <p:sp>
         <p:nvSpPr>
           <p:cNvPr id="121" name="Google Shape;121;g3dbe1710380_1_211:notes"/>
+          <p:cNvSpPr>
+            <a:spLocks noGrp="1" noRot="1" noChangeAspect="1"/>
+          </p:cNvSpPr>
+          <p:nvPr>
+            <p:ph type="sldImg" idx="2"/>
+          </p:nvPr>
+        </p:nvSpPr>
+        <p:spPr>
+          <a:xfrm>
+            <a:off x="381000" y="685800"/>
+            <a:ext cx="6096000" cy="3429000"/>
+          </a:xfrm>
+          <a:custGeom>
+            <a:avLst/>
+            <a:gdLst/>
+            <a:ahLst/>
+            <a:cxnLst/>
+            <a:rect l="l" t="t" r="r" b="b"/>
+            <a:pathLst>
+              <a:path w="120000" h="120000" extrusionOk="0">
+                <a:moveTo>
+                  <a:pt x="0" y="0"/>
+                </a:moveTo>
+                <a:lnTo>
+                  <a:pt x="120000" y="0"/>
+                </a:lnTo>
+                <a:lnTo>
+                  <a:pt x="120000" y="120000"/>
+                </a:lnTo>
+                <a:lnTo>
+                  <a:pt x="0" y="120000"/>
+                </a:lnTo>
+                <a:close/>
+              </a:path>
+            </a:pathLst>
+          </a:custGeom>
+        </p:spPr>
+      </p:sp>
+    </p:spTree>
+  </p:cSld>
+  <p:clrMapOvr>
+    <a:masterClrMapping/>
+  </p:clrMapOvr>
+</p:notes>
+</file>
+
+<file path=ppt/notesSlides/notesSlide6.xml><?xml version="1.0" encoding="utf-8"?>
+<p:notes xmlns:a="http://schemas.openxmlformats.org/drawingml/2006/main" xmlns:r="http://schemas.openxmlformats.org/officeDocument/2006/relationships" xmlns:p="http://schemas.openxmlformats.org/presentationml/2006/main" showMasterSp="0" showMasterPhAnim="0">
+  <p:cSld>
+    <p:spTree>
+      <p:nvGrpSpPr>
+        <p:cNvPr id="1" name="Shape 135"/>
+        <p:cNvGrpSpPr/>
+        <p:nvPr/>
+      </p:nvGrpSpPr>
+      <p:grpSpPr>
+        <a:xfrm>
+          <a:off x="0" y="0"/>
+          <a:ext cx="0" cy="0"/>
+          <a:chOff x="0" y="0"/>
+          <a:chExt cx="0" cy="0"/>
+        </a:xfrm>
+      </p:grpSpPr>
+      <p:sp>
+        <p:nvSpPr>
+          <p:cNvPr id="136" name="Google Shape;136;p3:notes"/>
+          <p:cNvSpPr txBox="1">
+            <a:spLocks noGrp="1"/>
+          </p:cNvSpPr>
+          <p:nvPr>
+            <p:ph type="body" idx="1"/>
+          </p:nvPr>
+        </p:nvSpPr>
+        <p:spPr>
+          <a:xfrm>
+            <a:off x="685800" y="4343400"/>
+            <a:ext cx="5486400" cy="4114800"/>
+          </a:xfrm>
+          <a:prstGeom prst="rect">
+            <a:avLst/>
+          </a:prstGeom>
+        </p:spPr>
+        <p:txBody>
+          <a:bodyPr spcFirstLastPara="1" wrap="square" lIns="91425" tIns="91425" rIns="91425" bIns="91425" anchor="t" anchorCtr="0">
+            <a:noAutofit/>
+          </a:bodyPr>
+          <a:lstStyle/>
+          <a:p>
+            <a:pPr marL="0" lvl="0" indent="0" algn="l" rtl="0">
+              <a:spcBef>
+                <a:spcPts val="0"/>
+              </a:spcBef>
+              <a:spcAft>
+                <a:spcPts val="0"/>
+              </a:spcAft>
+              <a:buNone/>
+            </a:pPr>
+            <a:endParaRPr/>
+          </a:p>
+        </p:txBody>
+      </p:sp>
+      <p:sp>
+        <p:nvSpPr>
+          <p:cNvPr id="137" name="Google Shape;137;p3:notes"/>
           <p:cNvSpPr>
             <a:spLocks noGrp="1" noRot="1" noChangeAspect="1"/>
           </p:cNvSpPr>
@@ -3702,6 +3592,11 @@
         </p:spPr>
       </p:sp>
     </p:spTree>
+    <p:extLst>
+      <p:ext uri="{BB962C8B-B14F-4D97-AF65-F5344CB8AC3E}">
+        <p14:creationId xmlns:p14="http://schemas.microsoft.com/office/powerpoint/2010/main" val="3541165483"/>
+      </p:ext>
+    </p:extLst>
   </p:cSld>
   <p:clrMapOvr>
     <a:masterClrMapping/>
@@ -3808,7 +3703,7 @@
     </p:spTree>
     <p:extLst>
       <p:ext uri="{BB962C8B-B14F-4D97-AF65-F5344CB8AC3E}">
-        <p14:creationId xmlns:p14="http://schemas.microsoft.com/office/powerpoint/2010/main" val="3541165483"/>
+        <p14:creationId xmlns:p14="http://schemas.microsoft.com/office/powerpoint/2010/main" val="4104036851"/>
       </p:ext>
     </p:extLst>
   </p:cSld>
@@ -3917,7 +3812,7 @@
     </p:spTree>
     <p:extLst>
       <p:ext uri="{BB962C8B-B14F-4D97-AF65-F5344CB8AC3E}">
-        <p14:creationId xmlns:p14="http://schemas.microsoft.com/office/powerpoint/2010/main" val="4104036851"/>
+        <p14:creationId xmlns:p14="http://schemas.microsoft.com/office/powerpoint/2010/main" val="739215490"/>
       </p:ext>
     </p:extLst>
   </p:cSld>
@@ -14532,10 +14427,10 @@
       </p:sp>
       <p:pic>
         <p:nvPicPr>
-          <p:cNvPr id="4" name="Imatge 3">
+          <p:cNvPr id="3" name="Imatge 2">
             <a:extLst>
               <a:ext uri="{FF2B5EF4-FFF2-40B4-BE49-F238E27FC236}">
-                <a16:creationId xmlns:a16="http://schemas.microsoft.com/office/drawing/2014/main" id="{42D5B2CC-4A8D-4CDB-8063-732212E764BB}"/>
+                <a16:creationId xmlns:a16="http://schemas.microsoft.com/office/drawing/2014/main" id="{0B9CE290-D1C1-4189-9E21-0E59FAC078F3}"/>
               </a:ext>
             </a:extLst>
           </p:cNvPr>
@@ -14552,8 +14447,8 @@
         </p:blipFill>
         <p:spPr>
           <a:xfrm>
-            <a:off x="2714395" y="1275255"/>
-            <a:ext cx="10200871" cy="8929706"/>
+            <a:off x="371483" y="1137967"/>
+            <a:ext cx="13299546" cy="9104063"/>
           </a:xfrm>
           <a:prstGeom prst="rect">
             <a:avLst/>
@@ -14607,7 +14502,7 @@
                 <a:cs typeface="Poppins"/>
                 <a:sym typeface="Poppins"/>
               </a:rPr>
-              <a:t>Análisis </a:t>
+              <a:t>Análisis por </a:t>
             </a:r>
             <a:r>
               <a:rPr lang="es-ES_tradnl" sz="3601" b="1" dirty="0">
@@ -14619,7 +14514,7 @@
                 <a:cs typeface="Poppins"/>
                 <a:sym typeface="Poppins"/>
               </a:rPr>
-              <a:t>por</a:t>
+              <a:t>C</a:t>
             </a:r>
             <a:r>
               <a:rPr lang="es-ES_tradnl" sz="3601" b="1" i="0" u="none" strike="noStrike" cap="none" dirty="0">
@@ -14631,7 +14526,31 @@
                 <a:cs typeface="Poppins"/>
                 <a:sym typeface="Poppins"/>
               </a:rPr>
-              <a:t> sector económico</a:t>
+              <a:t>omunidad </a:t>
+            </a:r>
+            <a:r>
+              <a:rPr lang="es-ES_tradnl" sz="3601" b="1" dirty="0">
+                <a:solidFill>
+                  <a:srgbClr val="004AAD"/>
+                </a:solidFill>
+                <a:latin typeface="Poppins"/>
+                <a:ea typeface="Poppins"/>
+                <a:cs typeface="Poppins"/>
+                <a:sym typeface="Poppins"/>
+              </a:rPr>
+              <a:t>A</a:t>
+            </a:r>
+            <a:r>
+              <a:rPr lang="es-ES_tradnl" sz="3601" b="1" i="0" u="none" strike="noStrike" cap="none" dirty="0">
+                <a:solidFill>
+                  <a:srgbClr val="004AAD"/>
+                </a:solidFill>
+                <a:latin typeface="Poppins"/>
+                <a:ea typeface="Poppins"/>
+                <a:cs typeface="Poppins"/>
+                <a:sym typeface="Poppins"/>
+              </a:rPr>
+              <a:t>utónoma</a:t>
             </a:r>
             <a:endParaRPr lang="es-ES_tradnl" dirty="0"/>
           </a:p>
@@ -14772,9 +14691,9 @@
           <p:nvPr/>
         </p:nvSpPr>
         <p:spPr>
-          <a:xfrm rot="5400000">
-            <a:off x="5260632" y="2354376"/>
-            <a:ext cx="2598821" cy="1034324"/>
+          <a:xfrm>
+            <a:off x="2848133" y="4337802"/>
+            <a:ext cx="9773586" cy="365760"/>
           </a:xfrm>
           <a:prstGeom prst="roundRect">
             <a:avLst/>
@@ -14818,7 +14737,7 @@
           <p:cNvPr id="10" name="QuadreDeText 9">
             <a:extLst>
               <a:ext uri="{FF2B5EF4-FFF2-40B4-BE49-F238E27FC236}">
-                <a16:creationId xmlns:a16="http://schemas.microsoft.com/office/drawing/2014/main" id="{BFD99AF1-9DAA-451E-83AF-1058AB19BE6B}"/>
+                <a16:creationId xmlns:a16="http://schemas.microsoft.com/office/drawing/2014/main" id="{78EA8AD0-7D3A-4D72-BC07-3134E7C59809}"/>
               </a:ext>
             </a:extLst>
           </p:cNvPr>
@@ -14827,7 +14746,7 @@
         </p:nvSpPr>
         <p:spPr>
           <a:xfrm>
-            <a:off x="11587397" y="9295283"/>
+            <a:off x="12037101" y="9762696"/>
             <a:ext cx="9173980" cy="307777"/>
           </a:xfrm>
           <a:prstGeom prst="rect">
@@ -14855,64 +14774,10 @@
           </a:p>
         </p:txBody>
       </p:sp>
-      <p:sp>
-        <p:nvSpPr>
-          <p:cNvPr id="12" name="Rectángulo redondeado 4">
-            <a:extLst>
-              <a:ext uri="{FF2B5EF4-FFF2-40B4-BE49-F238E27FC236}">
-                <a16:creationId xmlns:a16="http://schemas.microsoft.com/office/drawing/2014/main" id="{EBBBF2B7-0BAE-486F-B9FD-CBE0F700B7FD}"/>
-              </a:ext>
-            </a:extLst>
-          </p:cNvPr>
-          <p:cNvSpPr/>
-          <p:nvPr/>
-        </p:nvSpPr>
-        <p:spPr>
-          <a:xfrm rot="5400000">
-            <a:off x="5284696" y="5266018"/>
-            <a:ext cx="2598821" cy="1034324"/>
-          </a:xfrm>
-          <a:prstGeom prst="roundRect">
-            <a:avLst/>
-          </a:prstGeom>
-          <a:noFill/>
-          <a:ln w="28575">
-            <a:solidFill>
-              <a:schemeClr val="accent6">
-                <a:lumMod val="75000"/>
-              </a:schemeClr>
-            </a:solidFill>
-          </a:ln>
-        </p:spPr>
-        <p:style>
-          <a:lnRef idx="2">
-            <a:schemeClr val="accent1">
-              <a:shade val="15000"/>
-            </a:schemeClr>
-          </a:lnRef>
-          <a:fillRef idx="1">
-            <a:schemeClr val="accent1"/>
-          </a:fillRef>
-          <a:effectRef idx="0">
-            <a:schemeClr val="accent1"/>
-          </a:effectRef>
-          <a:fontRef idx="minor">
-            <a:schemeClr val="lt1"/>
-          </a:fontRef>
-        </p:style>
-        <p:txBody>
-          <a:bodyPr rtlCol="0" anchor="ctr"/>
-          <a:lstStyle/>
-          <a:p>
-            <a:pPr algn="ctr"/>
-            <a:endParaRPr lang="es-ES"/>
-          </a:p>
-        </p:txBody>
-      </p:sp>
     </p:spTree>
     <p:extLst>
       <p:ext uri="{BB962C8B-B14F-4D97-AF65-F5344CB8AC3E}">
-        <p14:creationId xmlns:p14="http://schemas.microsoft.com/office/powerpoint/2010/main" val="1860337386"/>
+        <p14:creationId xmlns:p14="http://schemas.microsoft.com/office/powerpoint/2010/main" val="2184726870"/>
       </p:ext>
     </p:extLst>
   </p:cSld>
@@ -15013,10 +14878,10 @@
       </p:sp>
       <p:pic>
         <p:nvPicPr>
-          <p:cNvPr id="3" name="Imatge 2">
+          <p:cNvPr id="4" name="Imatge 3">
             <a:extLst>
               <a:ext uri="{FF2B5EF4-FFF2-40B4-BE49-F238E27FC236}">
-                <a16:creationId xmlns:a16="http://schemas.microsoft.com/office/drawing/2014/main" id="{0B9CE290-D1C1-4189-9E21-0E59FAC078F3}"/>
+                <a16:creationId xmlns:a16="http://schemas.microsoft.com/office/drawing/2014/main" id="{5350F70C-B643-4590-B86F-BF44DB0AF4C2}"/>
               </a:ext>
             </a:extLst>
           </p:cNvPr>
@@ -15033,8 +14898,8 @@
         </p:blipFill>
         <p:spPr>
           <a:xfrm>
-            <a:off x="371483" y="1137967"/>
-            <a:ext cx="13299546" cy="9104063"/>
+            <a:off x="534994" y="1452208"/>
+            <a:ext cx="14763064" cy="8820277"/>
           </a:xfrm>
           <a:prstGeom prst="rect">
             <a:avLst/>
@@ -15278,457 +15143,6 @@
         </p:nvSpPr>
         <p:spPr>
           <a:xfrm>
-            <a:off x="2848133" y="4337802"/>
-            <a:ext cx="9773586" cy="365760"/>
-          </a:xfrm>
-          <a:prstGeom prst="roundRect">
-            <a:avLst/>
-          </a:prstGeom>
-          <a:noFill/>
-          <a:ln w="28575">
-            <a:solidFill>
-              <a:schemeClr val="accent6">
-                <a:lumMod val="75000"/>
-              </a:schemeClr>
-            </a:solidFill>
-          </a:ln>
-        </p:spPr>
-        <p:style>
-          <a:lnRef idx="2">
-            <a:schemeClr val="accent1">
-              <a:shade val="15000"/>
-            </a:schemeClr>
-          </a:lnRef>
-          <a:fillRef idx="1">
-            <a:schemeClr val="accent1"/>
-          </a:fillRef>
-          <a:effectRef idx="0">
-            <a:schemeClr val="accent1"/>
-          </a:effectRef>
-          <a:fontRef idx="minor">
-            <a:schemeClr val="lt1"/>
-          </a:fontRef>
-        </p:style>
-        <p:txBody>
-          <a:bodyPr rtlCol="0" anchor="ctr"/>
-          <a:lstStyle/>
-          <a:p>
-            <a:pPr algn="ctr"/>
-            <a:endParaRPr lang="es-ES"/>
-          </a:p>
-        </p:txBody>
-      </p:sp>
-      <p:sp>
-        <p:nvSpPr>
-          <p:cNvPr id="10" name="QuadreDeText 9">
-            <a:extLst>
-              <a:ext uri="{FF2B5EF4-FFF2-40B4-BE49-F238E27FC236}">
-                <a16:creationId xmlns:a16="http://schemas.microsoft.com/office/drawing/2014/main" id="{78EA8AD0-7D3A-4D72-BC07-3134E7C59809}"/>
-              </a:ext>
-            </a:extLst>
-          </p:cNvPr>
-          <p:cNvSpPr txBox="1"/>
-          <p:nvPr/>
-        </p:nvSpPr>
-        <p:spPr>
-          <a:xfrm>
-            <a:off x="12037101" y="9762696"/>
-            <a:ext cx="9173980" cy="307777"/>
-          </a:xfrm>
-          <a:prstGeom prst="rect">
-            <a:avLst/>
-          </a:prstGeom>
-          <a:noFill/>
-        </p:spPr>
-        <p:txBody>
-          <a:bodyPr wrap="square">
-            <a:spAutoFit/>
-          </a:bodyPr>
-          <a:lstStyle/>
-          <a:p>
-            <a:r>
-              <a:rPr lang="es-ES" dirty="0"/>
-              <a:t>Fuente: </a:t>
-            </a:r>
-            <a:r>
-              <a:rPr lang="es-ES" dirty="0">
-                <a:hlinkClick r:id="rId6"/>
-              </a:rPr>
-              <a:t>Encuesta Anual Laboral. Ministerio de Trabajo y Economía Social</a:t>
-            </a:r>
-            <a:endParaRPr lang="es-ES" dirty="0"/>
-          </a:p>
-        </p:txBody>
-      </p:sp>
-    </p:spTree>
-    <p:extLst>
-      <p:ext uri="{BB962C8B-B14F-4D97-AF65-F5344CB8AC3E}">
-        <p14:creationId xmlns:p14="http://schemas.microsoft.com/office/powerpoint/2010/main" val="2184726870"/>
-      </p:ext>
-    </p:extLst>
-  </p:cSld>
-  <p:clrMapOvr>
-    <a:masterClrMapping/>
-  </p:clrMapOvr>
-</p:sld>
-</file>
-
-<file path=ppt/slides/slide12.xml><?xml version="1.0" encoding="utf-8"?>
-<p:sld xmlns:a="http://schemas.openxmlformats.org/drawingml/2006/main" xmlns:r="http://schemas.openxmlformats.org/officeDocument/2006/relationships" xmlns:p="http://schemas.openxmlformats.org/presentationml/2006/main">
-  <p:cSld>
-    <p:bg>
-      <p:bgPr>
-        <a:solidFill>
-          <a:srgbClr val="E0E9F9"/>
-        </a:solidFill>
-        <a:effectLst/>
-      </p:bgPr>
-    </p:bg>
-    <p:spTree>
-      <p:nvGrpSpPr>
-        <p:cNvPr id="1" name="Shape 138"/>
-        <p:cNvGrpSpPr/>
-        <p:nvPr/>
-      </p:nvGrpSpPr>
-      <p:grpSpPr>
-        <a:xfrm>
-          <a:off x="0" y="0"/>
-          <a:ext cx="0" cy="0"/>
-          <a:chOff x="0" y="0"/>
-          <a:chExt cx="0" cy="0"/>
-        </a:xfrm>
-      </p:grpSpPr>
-      <p:sp>
-        <p:nvSpPr>
-          <p:cNvPr id="11" name="Google Shape;150;p17">
-            <a:extLst>
-              <a:ext uri="{FF2B5EF4-FFF2-40B4-BE49-F238E27FC236}">
-                <a16:creationId xmlns:a16="http://schemas.microsoft.com/office/drawing/2014/main" id="{DC31FCA6-E624-4F0D-9CEA-5147EAFF7540}"/>
-              </a:ext>
-            </a:extLst>
-          </p:cNvPr>
-          <p:cNvSpPr/>
-          <p:nvPr/>
-        </p:nvSpPr>
-        <p:spPr>
-          <a:xfrm>
-            <a:off x="13727091" y="2555717"/>
-            <a:ext cx="4065560" cy="5646612"/>
-          </a:xfrm>
-          <a:custGeom>
-            <a:avLst/>
-            <a:gdLst/>
-            <a:ahLst/>
-            <a:cxnLst/>
-            <a:rect l="l" t="t" r="r" b="b"/>
-            <a:pathLst>
-              <a:path w="6557355" h="9107438" extrusionOk="0">
-                <a:moveTo>
-                  <a:pt x="0" y="0"/>
-                </a:moveTo>
-                <a:lnTo>
-                  <a:pt x="6557355" y="0"/>
-                </a:lnTo>
-                <a:lnTo>
-                  <a:pt x="6557355" y="9107438"/>
-                </a:lnTo>
-                <a:lnTo>
-                  <a:pt x="0" y="9107438"/>
-                </a:lnTo>
-                <a:lnTo>
-                  <a:pt x="0" y="0"/>
-                </a:lnTo>
-                <a:close/>
-              </a:path>
-            </a:pathLst>
-          </a:custGeom>
-          <a:blipFill rotWithShape="1">
-            <a:blip r:embed="rId3">
-              <a:alphaModFix/>
-            </a:blip>
-            <a:stretch>
-              <a:fillRect/>
-            </a:stretch>
-          </a:blipFill>
-          <a:ln>
-            <a:noFill/>
-          </a:ln>
-        </p:spPr>
-        <p:txBody>
-          <a:bodyPr/>
-          <a:lstStyle/>
-          <a:p>
-            <a:endParaRPr lang="es-ES_tradnl" dirty="0"/>
-          </a:p>
-        </p:txBody>
-      </p:sp>
-      <p:pic>
-        <p:nvPicPr>
-          <p:cNvPr id="4" name="Imatge 3">
-            <a:extLst>
-              <a:ext uri="{FF2B5EF4-FFF2-40B4-BE49-F238E27FC236}">
-                <a16:creationId xmlns:a16="http://schemas.microsoft.com/office/drawing/2014/main" id="{5350F70C-B643-4590-B86F-BF44DB0AF4C2}"/>
-              </a:ext>
-            </a:extLst>
-          </p:cNvPr>
-          <p:cNvPicPr>
-            <a:picLocks noChangeAspect="1"/>
-          </p:cNvPicPr>
-          <p:nvPr/>
-        </p:nvPicPr>
-        <p:blipFill>
-          <a:blip r:embed="rId4"/>
-          <a:stretch>
-            <a:fillRect/>
-          </a:stretch>
-        </p:blipFill>
-        <p:spPr>
-          <a:xfrm>
-            <a:off x="534994" y="1452208"/>
-            <a:ext cx="14763064" cy="8820277"/>
-          </a:xfrm>
-          <a:prstGeom prst="rect">
-            <a:avLst/>
-          </a:prstGeom>
-        </p:spPr>
-      </p:pic>
-      <p:sp>
-        <p:nvSpPr>
-          <p:cNvPr id="142" name="Google Shape;142;p16"/>
-          <p:cNvSpPr txBox="1"/>
-          <p:nvPr/>
-        </p:nvSpPr>
-        <p:spPr>
-          <a:xfrm>
-            <a:off x="4000546" y="524304"/>
-            <a:ext cx="9594965" cy="670505"/>
-          </a:xfrm>
-          <a:prstGeom prst="rect">
-            <a:avLst/>
-          </a:prstGeom>
-          <a:noFill/>
-          <a:ln>
-            <a:noFill/>
-          </a:ln>
-        </p:spPr>
-        <p:txBody>
-          <a:bodyPr spcFirstLastPara="1" wrap="square" lIns="0" tIns="0" rIns="0" bIns="0" anchor="t" anchorCtr="0">
-            <a:spAutoFit/>
-          </a:bodyPr>
-          <a:lstStyle/>
-          <a:p>
-            <a:pPr marL="0" marR="0" lvl="0" indent="0" algn="l" rtl="0">
-              <a:lnSpc>
-                <a:spcPct val="121055"/>
-              </a:lnSpc>
-              <a:spcBef>
-                <a:spcPts val="0"/>
-              </a:spcBef>
-              <a:spcAft>
-                <a:spcPts val="0"/>
-              </a:spcAft>
-              <a:buNone/>
-            </a:pPr>
-            <a:r>
-              <a:rPr lang="es-ES_tradnl" sz="3601" b="1" i="0" u="none" strike="noStrike" cap="none" dirty="0">
-                <a:solidFill>
-                  <a:srgbClr val="004AAD"/>
-                </a:solidFill>
-                <a:latin typeface="Poppins"/>
-                <a:ea typeface="Poppins"/>
-                <a:cs typeface="Poppins"/>
-                <a:sym typeface="Poppins"/>
-              </a:rPr>
-              <a:t>Análisis por </a:t>
-            </a:r>
-            <a:r>
-              <a:rPr lang="es-ES_tradnl" sz="3601" b="1" dirty="0">
-                <a:solidFill>
-                  <a:srgbClr val="004AAD"/>
-                </a:solidFill>
-                <a:latin typeface="Poppins"/>
-                <a:ea typeface="Poppins"/>
-                <a:cs typeface="Poppins"/>
-                <a:sym typeface="Poppins"/>
-              </a:rPr>
-              <a:t>C</a:t>
-            </a:r>
-            <a:r>
-              <a:rPr lang="es-ES_tradnl" sz="3601" b="1" i="0" u="none" strike="noStrike" cap="none" dirty="0">
-                <a:solidFill>
-                  <a:srgbClr val="004AAD"/>
-                </a:solidFill>
-                <a:latin typeface="Poppins"/>
-                <a:ea typeface="Poppins"/>
-                <a:cs typeface="Poppins"/>
-                <a:sym typeface="Poppins"/>
-              </a:rPr>
-              <a:t>omunidad </a:t>
-            </a:r>
-            <a:r>
-              <a:rPr lang="es-ES_tradnl" sz="3601" b="1" dirty="0">
-                <a:solidFill>
-                  <a:srgbClr val="004AAD"/>
-                </a:solidFill>
-                <a:latin typeface="Poppins"/>
-                <a:ea typeface="Poppins"/>
-                <a:cs typeface="Poppins"/>
-                <a:sym typeface="Poppins"/>
-              </a:rPr>
-              <a:t>A</a:t>
-            </a:r>
-            <a:r>
-              <a:rPr lang="es-ES_tradnl" sz="3601" b="1" i="0" u="none" strike="noStrike" cap="none" dirty="0">
-                <a:solidFill>
-                  <a:srgbClr val="004AAD"/>
-                </a:solidFill>
-                <a:latin typeface="Poppins"/>
-                <a:ea typeface="Poppins"/>
-                <a:cs typeface="Poppins"/>
-                <a:sym typeface="Poppins"/>
-              </a:rPr>
-              <a:t>utónoma</a:t>
-            </a:r>
-            <a:endParaRPr lang="es-ES_tradnl" dirty="0"/>
-          </a:p>
-        </p:txBody>
-      </p:sp>
-      <p:grpSp>
-        <p:nvGrpSpPr>
-          <p:cNvPr id="143" name="Google Shape;143;p16"/>
-          <p:cNvGrpSpPr/>
-          <p:nvPr/>
-        </p:nvGrpSpPr>
-        <p:grpSpPr>
-          <a:xfrm>
-            <a:off x="0" y="5"/>
-            <a:ext cx="2163413" cy="1886345"/>
-            <a:chOff x="12784175" y="3675030"/>
-            <a:chExt cx="2163413" cy="1886345"/>
-          </a:xfrm>
-        </p:grpSpPr>
-        <p:sp>
-          <p:nvSpPr>
-            <p:cNvPr id="144" name="Google Shape;144;p16"/>
-            <p:cNvSpPr txBox="1"/>
-            <p:nvPr/>
-          </p:nvSpPr>
-          <p:spPr>
-            <a:xfrm rot="1830973">
-              <a:off x="12805773" y="4425496"/>
-              <a:ext cx="2081405" cy="652657"/>
-            </a:xfrm>
-            <a:prstGeom prst="rect">
-              <a:avLst/>
-            </a:prstGeom>
-            <a:noFill/>
-            <a:ln>
-              <a:noFill/>
-            </a:ln>
-          </p:spPr>
-          <p:txBody>
-            <a:bodyPr spcFirstLastPara="1" wrap="square" lIns="91425" tIns="91425" rIns="91425" bIns="91425" anchor="t" anchorCtr="0">
-              <a:noAutofit/>
-            </a:bodyPr>
-            <a:lstStyle/>
-            <a:p>
-              <a:pPr marL="0" lvl="0" indent="0" algn="l" rtl="0">
-                <a:spcBef>
-                  <a:spcPts val="0"/>
-                </a:spcBef>
-                <a:spcAft>
-                  <a:spcPts val="0"/>
-                </a:spcAft>
-                <a:buNone/>
-              </a:pPr>
-              <a:r>
-                <a:rPr lang="es-ES_tradnl" sz="2300" b="1" i="1" dirty="0">
-                  <a:solidFill>
-                    <a:srgbClr val="E69138"/>
-                  </a:solidFill>
-                  <a:latin typeface="Calibri"/>
-                  <a:ea typeface="Calibri"/>
-                  <a:cs typeface="Calibri"/>
-                  <a:sym typeface="Calibri"/>
-                </a:rPr>
-                <a:t>RAPID EXPRESS </a:t>
-              </a:r>
-            </a:p>
-          </p:txBody>
-        </p:sp>
-        <p:sp>
-          <p:nvSpPr>
-            <p:cNvPr id="145" name="Google Shape;145;p16"/>
-            <p:cNvSpPr/>
-            <p:nvPr/>
-          </p:nvSpPr>
-          <p:spPr>
-            <a:xfrm>
-              <a:off x="13335203" y="3675030"/>
-              <a:ext cx="1612385" cy="1275250"/>
-            </a:xfrm>
-            <a:custGeom>
-              <a:avLst/>
-              <a:gdLst/>
-              <a:ahLst/>
-              <a:cxnLst/>
-              <a:rect l="l" t="t" r="r" b="b"/>
-              <a:pathLst>
-                <a:path w="1612385" h="1275250" extrusionOk="0">
-                  <a:moveTo>
-                    <a:pt x="0" y="0"/>
-                  </a:moveTo>
-                  <a:lnTo>
-                    <a:pt x="1612384" y="0"/>
-                  </a:lnTo>
-                  <a:lnTo>
-                    <a:pt x="1612384" y="1275249"/>
-                  </a:lnTo>
-                  <a:lnTo>
-                    <a:pt x="0" y="1275249"/>
-                  </a:lnTo>
-                  <a:lnTo>
-                    <a:pt x="0" y="0"/>
-                  </a:lnTo>
-                  <a:close/>
-                </a:path>
-              </a:pathLst>
-            </a:custGeom>
-            <a:blipFill rotWithShape="1">
-              <a:blip r:embed="rId5">
-                <a:alphaModFix/>
-              </a:blip>
-              <a:stretch>
-                <a:fillRect/>
-              </a:stretch>
-            </a:blipFill>
-            <a:ln>
-              <a:noFill/>
-            </a:ln>
-          </p:spPr>
-          <p:txBody>
-            <a:bodyPr/>
-            <a:lstStyle/>
-            <a:p>
-              <a:endParaRPr lang="es-ES_tradnl" dirty="0"/>
-            </a:p>
-          </p:txBody>
-        </p:sp>
-      </p:grpSp>
-      <p:sp>
-        <p:nvSpPr>
-          <p:cNvPr id="5" name="Rectángulo redondeado 4">
-            <a:extLst>
-              <a:ext uri="{FF2B5EF4-FFF2-40B4-BE49-F238E27FC236}">
-                <a16:creationId xmlns:a16="http://schemas.microsoft.com/office/drawing/2014/main" id="{4662BFC3-4DAD-4767-15A8-BAC1AD191C5D}"/>
-              </a:ext>
-            </a:extLst>
-          </p:cNvPr>
-          <p:cNvSpPr/>
-          <p:nvPr/>
-        </p:nvSpPr>
-        <p:spPr>
-          <a:xfrm>
             <a:off x="2964245" y="4381344"/>
             <a:ext cx="11521011" cy="365760"/>
           </a:xfrm>
@@ -15782,7 +15196,7 @@
 </p:sld>
 </file>
 
-<file path=ppt/slides/slide13.xml><?xml version="1.0" encoding="utf-8"?>
+<file path=ppt/slides/slide12.xml><?xml version="1.0" encoding="utf-8"?>
 <p:sld xmlns:a="http://schemas.openxmlformats.org/drawingml/2006/main" xmlns:r="http://schemas.openxmlformats.org/officeDocument/2006/relationships" xmlns:p="http://schemas.openxmlformats.org/presentationml/2006/main">
   <p:cSld>
     <p:bg>
@@ -16179,7 +15593,7 @@
 </p:sld>
 </file>
 
-<file path=ppt/slides/slide14.xml><?xml version="1.0" encoding="utf-8"?>
+<file path=ppt/slides/slide13.xml><?xml version="1.0" encoding="utf-8"?>
 <p:sld xmlns:a="http://schemas.openxmlformats.org/drawingml/2006/main" xmlns:r="http://schemas.openxmlformats.org/officeDocument/2006/relationships" xmlns:p="http://schemas.openxmlformats.org/presentationml/2006/main">
   <p:cSld>
     <p:bg>
@@ -17206,7 +16620,7 @@
 </p:sld>
 </file>
 
-<file path=ppt/slides/slide15.xml><?xml version="1.0" encoding="utf-8"?>
+<file path=ppt/slides/slide14.xml><?xml version="1.0" encoding="utf-8"?>
 <p:sld xmlns:a="http://schemas.openxmlformats.org/drawingml/2006/main" xmlns:r="http://schemas.openxmlformats.org/officeDocument/2006/relationships" xmlns:p="http://schemas.openxmlformats.org/presentationml/2006/main">
   <p:cSld>
     <p:bg>
@@ -17912,7 +17326,7 @@
 </p:sld>
 </file>
 
-<file path=ppt/slides/slide16.xml><?xml version="1.0" encoding="utf-8"?>
+<file path=ppt/slides/slide15.xml><?xml version="1.0" encoding="utf-8"?>
 <p:sld xmlns:a="http://schemas.openxmlformats.org/drawingml/2006/main" xmlns:r="http://schemas.openxmlformats.org/officeDocument/2006/relationships" xmlns:p="http://schemas.openxmlformats.org/presentationml/2006/main">
   <p:cSld>
     <p:bg>
@@ -19156,7 +18570,7 @@
 </p:sld>
 </file>
 
-<file path=ppt/slides/slide17.xml><?xml version="1.0" encoding="utf-8"?>
+<file path=ppt/slides/slide16.xml><?xml version="1.0" encoding="utf-8"?>
 <p:sld xmlns:a="http://schemas.openxmlformats.org/drawingml/2006/main" xmlns:r="http://schemas.openxmlformats.org/officeDocument/2006/relationships" xmlns:p="http://schemas.openxmlformats.org/presentationml/2006/main">
   <p:cSld>
     <p:bg>
@@ -20157,7 +19571,7 @@
 </p:sld>
 </file>
 
-<file path=ppt/slides/slide18.xml><?xml version="1.0" encoding="utf-8"?>
+<file path=ppt/slides/slide17.xml><?xml version="1.0" encoding="utf-8"?>
 <p:sld xmlns:a="http://schemas.openxmlformats.org/drawingml/2006/main" xmlns:r="http://schemas.openxmlformats.org/officeDocument/2006/relationships" xmlns:p="http://schemas.openxmlformats.org/presentationml/2006/main">
   <p:cSld>
     <p:bg>
@@ -20494,7 +19908,7 @@
 </p:sld>
 </file>
 
-<file path=ppt/slides/slide19.xml><?xml version="1.0" encoding="utf-8"?>
+<file path=ppt/slides/slide18.xml><?xml version="1.0" encoding="utf-8"?>
 <p:sld xmlns:a="http://schemas.openxmlformats.org/drawingml/2006/main" xmlns:r="http://schemas.openxmlformats.org/officeDocument/2006/relationships" xmlns:p="http://schemas.openxmlformats.org/presentationml/2006/main">
   <p:cSld>
     <p:bg>
@@ -21311,6 +20725,2046 @@
     <p:extLst>
       <p:ext uri="{BB962C8B-B14F-4D97-AF65-F5344CB8AC3E}">
         <p14:creationId xmlns:p14="http://schemas.microsoft.com/office/powerpoint/2010/main" val="2933242298"/>
+      </p:ext>
+    </p:extLst>
+  </p:cSld>
+  <p:clrMapOvr>
+    <a:masterClrMapping/>
+  </p:clrMapOvr>
+</p:sld>
+</file>
+
+<file path=ppt/slides/slide19.xml><?xml version="1.0" encoding="utf-8"?>
+<p:sld xmlns:a="http://schemas.openxmlformats.org/drawingml/2006/main" xmlns:r="http://schemas.openxmlformats.org/officeDocument/2006/relationships" xmlns:p="http://schemas.openxmlformats.org/presentationml/2006/main">
+  <p:cSld>
+    <p:bg>
+      <p:bgPr>
+        <a:solidFill>
+          <a:srgbClr val="E0E9F9"/>
+        </a:solidFill>
+        <a:effectLst/>
+      </p:bgPr>
+    </p:bg>
+    <p:spTree>
+      <p:nvGrpSpPr>
+        <p:cNvPr id="1" name="Shape 160">
+          <a:extLst>
+            <a:ext uri="{FF2B5EF4-FFF2-40B4-BE49-F238E27FC236}">
+              <a16:creationId xmlns:a16="http://schemas.microsoft.com/office/drawing/2014/main" id="{DA297602-4BBB-8124-85EA-38BC67F0ED50}"/>
+            </a:ext>
+          </a:extLst>
+        </p:cNvPr>
+        <p:cNvGrpSpPr/>
+        <p:nvPr/>
+      </p:nvGrpSpPr>
+      <p:grpSpPr>
+        <a:xfrm>
+          <a:off x="0" y="0"/>
+          <a:ext cx="0" cy="0"/>
+          <a:chOff x="0" y="0"/>
+          <a:chExt cx="0" cy="0"/>
+        </a:xfrm>
+      </p:grpSpPr>
+      <p:sp>
+        <p:nvSpPr>
+          <p:cNvPr id="161" name="Google Shape;161;p18">
+            <a:extLst>
+              <a:ext uri="{FF2B5EF4-FFF2-40B4-BE49-F238E27FC236}">
+                <a16:creationId xmlns:a16="http://schemas.microsoft.com/office/drawing/2014/main" id="{FA7FADFD-60A0-32BE-B0F0-F90CE928063D}"/>
+              </a:ext>
+            </a:extLst>
+          </p:cNvPr>
+          <p:cNvSpPr/>
+          <p:nvPr/>
+        </p:nvSpPr>
+        <p:spPr>
+          <a:xfrm>
+            <a:off x="-411641" y="7198177"/>
+            <a:ext cx="4653133" cy="3680205"/>
+          </a:xfrm>
+          <a:custGeom>
+            <a:avLst/>
+            <a:gdLst/>
+            <a:ahLst/>
+            <a:cxnLst/>
+            <a:rect l="l" t="t" r="r" b="b"/>
+            <a:pathLst>
+              <a:path w="9643798" h="7627368" extrusionOk="0">
+                <a:moveTo>
+                  <a:pt x="0" y="0"/>
+                </a:moveTo>
+                <a:lnTo>
+                  <a:pt x="9643798" y="0"/>
+                </a:lnTo>
+                <a:lnTo>
+                  <a:pt x="9643798" y="7627368"/>
+                </a:lnTo>
+                <a:lnTo>
+                  <a:pt x="0" y="7627368"/>
+                </a:lnTo>
+                <a:lnTo>
+                  <a:pt x="0" y="0"/>
+                </a:lnTo>
+                <a:close/>
+              </a:path>
+            </a:pathLst>
+          </a:custGeom>
+          <a:blipFill rotWithShape="1">
+            <a:blip r:embed="rId3">
+              <a:alphaModFix/>
+            </a:blip>
+            <a:stretch>
+              <a:fillRect/>
+            </a:stretch>
+          </a:blipFill>
+          <a:ln>
+            <a:noFill/>
+          </a:ln>
+        </p:spPr>
+        <p:txBody>
+          <a:bodyPr/>
+          <a:lstStyle/>
+          <a:p>
+            <a:endParaRPr lang="es-ES_tradnl" dirty="0"/>
+          </a:p>
+        </p:txBody>
+      </p:sp>
+      <p:sp>
+        <p:nvSpPr>
+          <p:cNvPr id="162" name="Google Shape;162;p18">
+            <a:extLst>
+              <a:ext uri="{FF2B5EF4-FFF2-40B4-BE49-F238E27FC236}">
+                <a16:creationId xmlns:a16="http://schemas.microsoft.com/office/drawing/2014/main" id="{C440BC94-E658-41A3-E378-7422709BA398}"/>
+              </a:ext>
+            </a:extLst>
+          </p:cNvPr>
+          <p:cNvSpPr/>
+          <p:nvPr/>
+        </p:nvSpPr>
+        <p:spPr>
+          <a:xfrm>
+            <a:off x="5482809" y="8188196"/>
+            <a:ext cx="2156379" cy="1936821"/>
+          </a:xfrm>
+          <a:custGeom>
+            <a:avLst/>
+            <a:gdLst/>
+            <a:ahLst/>
+            <a:cxnLst/>
+            <a:rect l="l" t="t" r="r" b="b"/>
+            <a:pathLst>
+              <a:path w="4469180" h="4014136" extrusionOk="0">
+                <a:moveTo>
+                  <a:pt x="0" y="0"/>
+                </a:moveTo>
+                <a:lnTo>
+                  <a:pt x="4469180" y="0"/>
+                </a:lnTo>
+                <a:lnTo>
+                  <a:pt x="4469180" y="4014136"/>
+                </a:lnTo>
+                <a:lnTo>
+                  <a:pt x="0" y="4014136"/>
+                </a:lnTo>
+                <a:lnTo>
+                  <a:pt x="0" y="0"/>
+                </a:lnTo>
+                <a:close/>
+              </a:path>
+            </a:pathLst>
+          </a:custGeom>
+          <a:blipFill rotWithShape="1">
+            <a:blip r:embed="rId4">
+              <a:alphaModFix/>
+            </a:blip>
+            <a:stretch>
+              <a:fillRect/>
+            </a:stretch>
+          </a:blipFill>
+          <a:ln>
+            <a:noFill/>
+          </a:ln>
+        </p:spPr>
+        <p:txBody>
+          <a:bodyPr/>
+          <a:lstStyle/>
+          <a:p>
+            <a:endParaRPr lang="es-ES_tradnl" dirty="0"/>
+          </a:p>
+        </p:txBody>
+      </p:sp>
+      <p:sp>
+        <p:nvSpPr>
+          <p:cNvPr id="163" name="Google Shape;163;p18">
+            <a:extLst>
+              <a:ext uri="{FF2B5EF4-FFF2-40B4-BE49-F238E27FC236}">
+                <a16:creationId xmlns:a16="http://schemas.microsoft.com/office/drawing/2014/main" id="{CFCEAEBD-EF5E-82A0-0B56-8E2B61FEEFA3}"/>
+              </a:ext>
+            </a:extLst>
+          </p:cNvPr>
+          <p:cNvSpPr/>
+          <p:nvPr/>
+        </p:nvSpPr>
+        <p:spPr>
+          <a:xfrm>
+            <a:off x="9504429" y="8159082"/>
+            <a:ext cx="2156379" cy="1936821"/>
+          </a:xfrm>
+          <a:custGeom>
+            <a:avLst/>
+            <a:gdLst/>
+            <a:ahLst/>
+            <a:cxnLst/>
+            <a:rect l="l" t="t" r="r" b="b"/>
+            <a:pathLst>
+              <a:path w="4469180" h="4014136" extrusionOk="0">
+                <a:moveTo>
+                  <a:pt x="0" y="0"/>
+                </a:moveTo>
+                <a:lnTo>
+                  <a:pt x="4469180" y="0"/>
+                </a:lnTo>
+                <a:lnTo>
+                  <a:pt x="4469180" y="4014136"/>
+                </a:lnTo>
+                <a:lnTo>
+                  <a:pt x="0" y="4014136"/>
+                </a:lnTo>
+                <a:lnTo>
+                  <a:pt x="0" y="0"/>
+                </a:lnTo>
+                <a:close/>
+              </a:path>
+            </a:pathLst>
+          </a:custGeom>
+          <a:blipFill rotWithShape="1">
+            <a:blip r:embed="rId4">
+              <a:alphaModFix/>
+            </a:blip>
+            <a:stretch>
+              <a:fillRect/>
+            </a:stretch>
+          </a:blipFill>
+          <a:ln>
+            <a:noFill/>
+          </a:ln>
+        </p:spPr>
+        <p:txBody>
+          <a:bodyPr/>
+          <a:lstStyle/>
+          <a:p>
+            <a:endParaRPr lang="es-ES_tradnl" dirty="0"/>
+          </a:p>
+        </p:txBody>
+      </p:sp>
+      <p:sp>
+        <p:nvSpPr>
+          <p:cNvPr id="167" name="Google Shape;167;p18">
+            <a:extLst>
+              <a:ext uri="{FF2B5EF4-FFF2-40B4-BE49-F238E27FC236}">
+                <a16:creationId xmlns:a16="http://schemas.microsoft.com/office/drawing/2014/main" id="{31C7F14F-C1D2-243D-7A0B-9520357B6CFB}"/>
+              </a:ext>
+            </a:extLst>
+          </p:cNvPr>
+          <p:cNvSpPr txBox="1"/>
+          <p:nvPr/>
+        </p:nvSpPr>
+        <p:spPr>
+          <a:xfrm>
+            <a:off x="5794045" y="553200"/>
+            <a:ext cx="6022200" cy="670505"/>
+          </a:xfrm>
+          <a:prstGeom prst="rect">
+            <a:avLst/>
+          </a:prstGeom>
+          <a:noFill/>
+          <a:ln>
+            <a:noFill/>
+          </a:ln>
+        </p:spPr>
+        <p:txBody>
+          <a:bodyPr spcFirstLastPara="1" wrap="square" lIns="0" tIns="0" rIns="0" bIns="0" anchor="t" anchorCtr="0">
+            <a:spAutoFit/>
+          </a:bodyPr>
+          <a:lstStyle/>
+          <a:p>
+            <a:pPr marL="0" marR="0" lvl="0" indent="0" algn="ctr" rtl="0">
+              <a:lnSpc>
+                <a:spcPct val="121055"/>
+              </a:lnSpc>
+              <a:spcBef>
+                <a:spcPts val="0"/>
+              </a:spcBef>
+              <a:spcAft>
+                <a:spcPts val="0"/>
+              </a:spcAft>
+              <a:buNone/>
+            </a:pPr>
+            <a:r>
+              <a:rPr lang="es-ES_tradnl" sz="3601" b="1" dirty="0">
+                <a:solidFill>
+                  <a:srgbClr val="004AAD"/>
+                </a:solidFill>
+                <a:latin typeface="Poppins"/>
+                <a:cs typeface="Poppins"/>
+                <a:sym typeface="Poppins"/>
+              </a:rPr>
+              <a:t>Identificación de perfiles</a:t>
+            </a:r>
+            <a:endParaRPr lang="es-ES_tradnl" dirty="0"/>
+          </a:p>
+        </p:txBody>
+      </p:sp>
+      <p:sp>
+        <p:nvSpPr>
+          <p:cNvPr id="11" name="Rectangle 10">
+            <a:extLst>
+              <a:ext uri="{FF2B5EF4-FFF2-40B4-BE49-F238E27FC236}">
+                <a16:creationId xmlns:a16="http://schemas.microsoft.com/office/drawing/2014/main" id="{1AF05D9C-A020-4BB4-E559-6C31990412CF}"/>
+              </a:ext>
+            </a:extLst>
+          </p:cNvPr>
+          <p:cNvSpPr/>
+          <p:nvPr/>
+        </p:nvSpPr>
+        <p:spPr>
+          <a:xfrm>
+            <a:off x="7177595" y="1772428"/>
+            <a:ext cx="3255100" cy="1106906"/>
+          </a:xfrm>
+          <a:prstGeom prst="rect">
+            <a:avLst/>
+          </a:prstGeom>
+          <a:solidFill>
+            <a:schemeClr val="bg1"/>
+          </a:solidFill>
+          <a:ln>
+            <a:solidFill>
+              <a:schemeClr val="bg2"/>
+            </a:solidFill>
+          </a:ln>
+        </p:spPr>
+        <p:style>
+          <a:lnRef idx="2">
+            <a:schemeClr val="accent1">
+              <a:shade val="50000"/>
+            </a:schemeClr>
+          </a:lnRef>
+          <a:fillRef idx="1">
+            <a:schemeClr val="accent1"/>
+          </a:fillRef>
+          <a:effectRef idx="0">
+            <a:schemeClr val="accent1"/>
+          </a:effectRef>
+          <a:fontRef idx="minor">
+            <a:schemeClr val="lt1"/>
+          </a:fontRef>
+        </p:style>
+        <p:txBody>
+          <a:bodyPr rtlCol="0" anchor="ctr"/>
+          <a:lstStyle/>
+          <a:p>
+            <a:pPr algn="ctr"/>
+            <a:r>
+              <a:rPr lang="es-ES_tradnl" sz="2400" b="1" dirty="0">
+                <a:solidFill>
+                  <a:schemeClr val="bg2"/>
+                </a:solidFill>
+              </a:rPr>
+              <a:t>PERFIL ÓPTIMO</a:t>
+            </a:r>
+          </a:p>
+        </p:txBody>
+      </p:sp>
+      <p:sp>
+        <p:nvSpPr>
+          <p:cNvPr id="13" name="Rectangle 12">
+            <a:extLst>
+              <a:ext uri="{FF2B5EF4-FFF2-40B4-BE49-F238E27FC236}">
+                <a16:creationId xmlns:a16="http://schemas.microsoft.com/office/drawing/2014/main" id="{0EA71E87-3B90-32C4-7C27-58EDCC2D761B}"/>
+              </a:ext>
+            </a:extLst>
+          </p:cNvPr>
+          <p:cNvSpPr/>
+          <p:nvPr/>
+        </p:nvSpPr>
+        <p:spPr>
+          <a:xfrm>
+            <a:off x="1213913" y="2362717"/>
+            <a:ext cx="3255100" cy="1106906"/>
+          </a:xfrm>
+          <a:prstGeom prst="rect">
+            <a:avLst/>
+          </a:prstGeom>
+          <a:solidFill>
+            <a:schemeClr val="bg1"/>
+          </a:solidFill>
+          <a:ln>
+            <a:solidFill>
+              <a:schemeClr val="bg2"/>
+            </a:solidFill>
+          </a:ln>
+        </p:spPr>
+        <p:style>
+          <a:lnRef idx="2">
+            <a:schemeClr val="accent1">
+              <a:shade val="50000"/>
+            </a:schemeClr>
+          </a:lnRef>
+          <a:fillRef idx="1">
+            <a:schemeClr val="accent1"/>
+          </a:fillRef>
+          <a:effectRef idx="0">
+            <a:schemeClr val="accent1"/>
+          </a:effectRef>
+          <a:fontRef idx="minor">
+            <a:schemeClr val="lt1"/>
+          </a:fontRef>
+        </p:style>
+        <p:txBody>
+          <a:bodyPr rtlCol="0" anchor="ctr"/>
+          <a:lstStyle/>
+          <a:p>
+            <a:pPr algn="ctr"/>
+            <a:r>
+              <a:rPr lang="es-ES_tradnl" sz="2400" b="1" dirty="0">
+                <a:solidFill>
+                  <a:schemeClr val="bg2"/>
+                </a:solidFill>
+              </a:rPr>
+              <a:t>PERFIL CRÍTICO</a:t>
+            </a:r>
+          </a:p>
+        </p:txBody>
+      </p:sp>
+      <p:sp>
+        <p:nvSpPr>
+          <p:cNvPr id="14" name="Rectangle 13">
+            <a:extLst>
+              <a:ext uri="{FF2B5EF4-FFF2-40B4-BE49-F238E27FC236}">
+                <a16:creationId xmlns:a16="http://schemas.microsoft.com/office/drawing/2014/main" id="{302D5BD7-5072-A712-E89D-315E1246CCD2}"/>
+              </a:ext>
+            </a:extLst>
+          </p:cNvPr>
+          <p:cNvSpPr/>
+          <p:nvPr/>
+        </p:nvSpPr>
+        <p:spPr>
+          <a:xfrm>
+            <a:off x="13262477" y="2335213"/>
+            <a:ext cx="3255100" cy="1106906"/>
+          </a:xfrm>
+          <a:prstGeom prst="rect">
+            <a:avLst/>
+          </a:prstGeom>
+          <a:solidFill>
+            <a:schemeClr val="bg1"/>
+          </a:solidFill>
+          <a:ln>
+            <a:solidFill>
+              <a:schemeClr val="bg2"/>
+            </a:solidFill>
+          </a:ln>
+        </p:spPr>
+        <p:style>
+          <a:lnRef idx="2">
+            <a:schemeClr val="accent1">
+              <a:shade val="50000"/>
+            </a:schemeClr>
+          </a:lnRef>
+          <a:fillRef idx="1">
+            <a:schemeClr val="accent1"/>
+          </a:fillRef>
+          <a:effectRef idx="0">
+            <a:schemeClr val="accent1"/>
+          </a:effectRef>
+          <a:fontRef idx="minor">
+            <a:schemeClr val="lt1"/>
+          </a:fontRef>
+        </p:style>
+        <p:txBody>
+          <a:bodyPr rtlCol="0" anchor="ctr"/>
+          <a:lstStyle/>
+          <a:p>
+            <a:pPr algn="ctr"/>
+            <a:r>
+              <a:rPr lang="es-ES_tradnl" sz="2400" b="1" dirty="0">
+                <a:solidFill>
+                  <a:schemeClr val="bg2"/>
+                </a:solidFill>
+              </a:rPr>
+              <a:t>PERFIL SATURADO</a:t>
+            </a:r>
+          </a:p>
+        </p:txBody>
+      </p:sp>
+      <p:sp>
+        <p:nvSpPr>
+          <p:cNvPr id="15" name="Rectangle 14">
+            <a:extLst>
+              <a:ext uri="{FF2B5EF4-FFF2-40B4-BE49-F238E27FC236}">
+                <a16:creationId xmlns:a16="http://schemas.microsoft.com/office/drawing/2014/main" id="{65FA6F57-08F9-AB33-9203-BBB34C284455}"/>
+              </a:ext>
+            </a:extLst>
+          </p:cNvPr>
+          <p:cNvSpPr/>
+          <p:nvPr/>
+        </p:nvSpPr>
+        <p:spPr>
+          <a:xfrm>
+            <a:off x="3083700" y="4226329"/>
+            <a:ext cx="2156379" cy="809011"/>
+          </a:xfrm>
+          <a:prstGeom prst="rect">
+            <a:avLst/>
+          </a:prstGeom>
+          <a:solidFill>
+            <a:schemeClr val="bg1"/>
+          </a:solidFill>
+          <a:ln>
+            <a:solidFill>
+              <a:schemeClr val="bg2"/>
+            </a:solidFill>
+          </a:ln>
+        </p:spPr>
+        <p:style>
+          <a:lnRef idx="2">
+            <a:schemeClr val="accent1">
+              <a:shade val="50000"/>
+            </a:schemeClr>
+          </a:lnRef>
+          <a:fillRef idx="1">
+            <a:schemeClr val="accent1"/>
+          </a:fillRef>
+          <a:effectRef idx="0">
+            <a:schemeClr val="accent1"/>
+          </a:effectRef>
+          <a:fontRef idx="minor">
+            <a:schemeClr val="lt1"/>
+          </a:fontRef>
+        </p:style>
+        <p:txBody>
+          <a:bodyPr rtlCol="0" anchor="ctr"/>
+          <a:lstStyle/>
+          <a:p>
+            <a:pPr algn="ctr"/>
+            <a:r>
+              <a:rPr lang="es-ES_tradnl" sz="2400" b="1" dirty="0">
+                <a:solidFill>
+                  <a:schemeClr val="bg2"/>
+                </a:solidFill>
+              </a:rPr>
+              <a:t>DESEMPEÑO</a:t>
+            </a:r>
+          </a:p>
+        </p:txBody>
+      </p:sp>
+      <p:grpSp>
+        <p:nvGrpSpPr>
+          <p:cNvPr id="164" name="Google Shape;164;p18">
+            <a:extLst>
+              <a:ext uri="{FF2B5EF4-FFF2-40B4-BE49-F238E27FC236}">
+                <a16:creationId xmlns:a16="http://schemas.microsoft.com/office/drawing/2014/main" id="{5C8F871A-0C94-7ACA-9EC2-2CF655A37500}"/>
+              </a:ext>
+            </a:extLst>
+          </p:cNvPr>
+          <p:cNvGrpSpPr/>
+          <p:nvPr/>
+        </p:nvGrpSpPr>
+        <p:grpSpPr>
+          <a:xfrm>
+            <a:off x="-118494" y="0"/>
+            <a:ext cx="2163413" cy="1886345"/>
+            <a:chOff x="12784175" y="3675030"/>
+            <a:chExt cx="2163413" cy="1886345"/>
+          </a:xfrm>
+        </p:grpSpPr>
+        <p:sp>
+          <p:nvSpPr>
+            <p:cNvPr id="165" name="Google Shape;165;p18">
+              <a:extLst>
+                <a:ext uri="{FF2B5EF4-FFF2-40B4-BE49-F238E27FC236}">
+                  <a16:creationId xmlns:a16="http://schemas.microsoft.com/office/drawing/2014/main" id="{0F8A5375-035A-B275-BEA1-4DAECA3886FE}"/>
+                </a:ext>
+              </a:extLst>
+            </p:cNvPr>
+            <p:cNvSpPr txBox="1"/>
+            <p:nvPr/>
+          </p:nvSpPr>
+          <p:spPr>
+            <a:xfrm rot="1830973">
+              <a:off x="12805773" y="4425496"/>
+              <a:ext cx="2081405" cy="652657"/>
+            </a:xfrm>
+            <a:prstGeom prst="rect">
+              <a:avLst/>
+            </a:prstGeom>
+            <a:noFill/>
+            <a:ln>
+              <a:noFill/>
+            </a:ln>
+          </p:spPr>
+          <p:txBody>
+            <a:bodyPr spcFirstLastPara="1" wrap="square" lIns="91425" tIns="91425" rIns="91425" bIns="91425" anchor="t" anchorCtr="0">
+              <a:noAutofit/>
+            </a:bodyPr>
+            <a:lstStyle/>
+            <a:p>
+              <a:pPr marL="0" lvl="0" indent="0" algn="l" rtl="0">
+                <a:spcBef>
+                  <a:spcPts val="0"/>
+                </a:spcBef>
+                <a:spcAft>
+                  <a:spcPts val="0"/>
+                </a:spcAft>
+                <a:buNone/>
+              </a:pPr>
+              <a:r>
+                <a:rPr lang="es-ES_tradnl" sz="2300" b="1" i="1" dirty="0">
+                  <a:solidFill>
+                    <a:srgbClr val="E69138"/>
+                  </a:solidFill>
+                  <a:latin typeface="Calibri"/>
+                  <a:ea typeface="Calibri"/>
+                  <a:cs typeface="Calibri"/>
+                  <a:sym typeface="Calibri"/>
+                </a:rPr>
+                <a:t>RAPID EXPRESS </a:t>
+              </a:r>
+            </a:p>
+          </p:txBody>
+        </p:sp>
+        <p:sp>
+          <p:nvSpPr>
+            <p:cNvPr id="166" name="Google Shape;166;p18">
+              <a:extLst>
+                <a:ext uri="{FF2B5EF4-FFF2-40B4-BE49-F238E27FC236}">
+                  <a16:creationId xmlns:a16="http://schemas.microsoft.com/office/drawing/2014/main" id="{5E8E3819-634B-8278-8583-C3C352EA55E4}"/>
+                </a:ext>
+              </a:extLst>
+            </p:cNvPr>
+            <p:cNvSpPr/>
+            <p:nvPr/>
+          </p:nvSpPr>
+          <p:spPr>
+            <a:xfrm>
+              <a:off x="13335203" y="3675030"/>
+              <a:ext cx="1612385" cy="1275250"/>
+            </a:xfrm>
+            <a:custGeom>
+              <a:avLst/>
+              <a:gdLst/>
+              <a:ahLst/>
+              <a:cxnLst/>
+              <a:rect l="l" t="t" r="r" b="b"/>
+              <a:pathLst>
+                <a:path w="1612385" h="1275250" extrusionOk="0">
+                  <a:moveTo>
+                    <a:pt x="0" y="0"/>
+                  </a:moveTo>
+                  <a:lnTo>
+                    <a:pt x="1612384" y="0"/>
+                  </a:lnTo>
+                  <a:lnTo>
+                    <a:pt x="1612384" y="1275249"/>
+                  </a:lnTo>
+                  <a:lnTo>
+                    <a:pt x="0" y="1275249"/>
+                  </a:lnTo>
+                  <a:lnTo>
+                    <a:pt x="0" y="0"/>
+                  </a:lnTo>
+                  <a:close/>
+                </a:path>
+              </a:pathLst>
+            </a:custGeom>
+            <a:blipFill rotWithShape="1">
+              <a:blip r:embed="rId3">
+                <a:alphaModFix/>
+              </a:blip>
+              <a:stretch>
+                <a:fillRect/>
+              </a:stretch>
+            </a:blipFill>
+            <a:ln>
+              <a:noFill/>
+            </a:ln>
+          </p:spPr>
+          <p:txBody>
+            <a:bodyPr/>
+            <a:lstStyle/>
+            <a:p>
+              <a:endParaRPr lang="es-ES_tradnl" dirty="0"/>
+            </a:p>
+          </p:txBody>
+        </p:sp>
+      </p:grpSp>
+      <p:sp>
+        <p:nvSpPr>
+          <p:cNvPr id="2" name="Rectangle 14">
+            <a:extLst>
+              <a:ext uri="{FF2B5EF4-FFF2-40B4-BE49-F238E27FC236}">
+                <a16:creationId xmlns:a16="http://schemas.microsoft.com/office/drawing/2014/main" id="{2C4573BD-4062-5928-8D40-C2F880FE60B9}"/>
+              </a:ext>
+            </a:extLst>
+          </p:cNvPr>
+          <p:cNvSpPr/>
+          <p:nvPr/>
+        </p:nvSpPr>
+        <p:spPr>
+          <a:xfrm>
+            <a:off x="845798" y="4246407"/>
+            <a:ext cx="1894041" cy="788933"/>
+          </a:xfrm>
+          <a:prstGeom prst="rect">
+            <a:avLst/>
+          </a:prstGeom>
+          <a:solidFill>
+            <a:schemeClr val="bg1"/>
+          </a:solidFill>
+          <a:ln>
+            <a:solidFill>
+              <a:schemeClr val="bg2"/>
+            </a:solidFill>
+          </a:ln>
+        </p:spPr>
+        <p:style>
+          <a:lnRef idx="2">
+            <a:schemeClr val="accent1">
+              <a:shade val="50000"/>
+            </a:schemeClr>
+          </a:lnRef>
+          <a:fillRef idx="1">
+            <a:schemeClr val="accent1"/>
+          </a:fillRef>
+          <a:effectRef idx="0">
+            <a:schemeClr val="accent1"/>
+          </a:effectRef>
+          <a:fontRef idx="minor">
+            <a:schemeClr val="lt1"/>
+          </a:fontRef>
+        </p:style>
+        <p:txBody>
+          <a:bodyPr rtlCol="0" anchor="ctr"/>
+          <a:lstStyle/>
+          <a:p>
+            <a:pPr algn="ctr"/>
+            <a:r>
+              <a:rPr lang="es-ES_tradnl" sz="2400" b="1" dirty="0">
+                <a:solidFill>
+                  <a:schemeClr val="bg2"/>
+                </a:solidFill>
+              </a:rPr>
+              <a:t>CARGA DE TRABAJO</a:t>
+            </a:r>
+          </a:p>
+        </p:txBody>
+      </p:sp>
+      <p:sp>
+        <p:nvSpPr>
+          <p:cNvPr id="3" name="Rectangle 14">
+            <a:extLst>
+              <a:ext uri="{FF2B5EF4-FFF2-40B4-BE49-F238E27FC236}">
+                <a16:creationId xmlns:a16="http://schemas.microsoft.com/office/drawing/2014/main" id="{D73DF1B4-7E07-1FFB-F523-7DC8DC5EECDF}"/>
+              </a:ext>
+            </a:extLst>
+          </p:cNvPr>
+          <p:cNvSpPr/>
+          <p:nvPr/>
+        </p:nvSpPr>
+        <p:spPr>
+          <a:xfrm>
+            <a:off x="9021997" y="3616080"/>
+            <a:ext cx="2156379" cy="809011"/>
+          </a:xfrm>
+          <a:prstGeom prst="rect">
+            <a:avLst/>
+          </a:prstGeom>
+          <a:solidFill>
+            <a:schemeClr val="bg1"/>
+          </a:solidFill>
+          <a:ln>
+            <a:solidFill>
+              <a:schemeClr val="bg2"/>
+            </a:solidFill>
+          </a:ln>
+        </p:spPr>
+        <p:style>
+          <a:lnRef idx="2">
+            <a:schemeClr val="accent1">
+              <a:shade val="50000"/>
+            </a:schemeClr>
+          </a:lnRef>
+          <a:fillRef idx="1">
+            <a:schemeClr val="accent1"/>
+          </a:fillRef>
+          <a:effectRef idx="0">
+            <a:schemeClr val="accent1"/>
+          </a:effectRef>
+          <a:fontRef idx="minor">
+            <a:schemeClr val="lt1"/>
+          </a:fontRef>
+        </p:style>
+        <p:txBody>
+          <a:bodyPr rtlCol="0" anchor="ctr"/>
+          <a:lstStyle/>
+          <a:p>
+            <a:pPr algn="ctr"/>
+            <a:r>
+              <a:rPr lang="es-ES_tradnl" sz="2400" b="1" dirty="0">
+                <a:solidFill>
+                  <a:schemeClr val="bg2"/>
+                </a:solidFill>
+              </a:rPr>
+              <a:t>DESEMPEÑO</a:t>
+            </a:r>
+          </a:p>
+        </p:txBody>
+      </p:sp>
+      <p:sp>
+        <p:nvSpPr>
+          <p:cNvPr id="4" name="Rectangle 14">
+            <a:extLst>
+              <a:ext uri="{FF2B5EF4-FFF2-40B4-BE49-F238E27FC236}">
+                <a16:creationId xmlns:a16="http://schemas.microsoft.com/office/drawing/2014/main" id="{5E7CDE07-09E1-9659-2686-57651D05F2A7}"/>
+              </a:ext>
+            </a:extLst>
+          </p:cNvPr>
+          <p:cNvSpPr/>
+          <p:nvPr/>
+        </p:nvSpPr>
+        <p:spPr>
+          <a:xfrm>
+            <a:off x="6692170" y="3626941"/>
+            <a:ext cx="1894041" cy="788933"/>
+          </a:xfrm>
+          <a:prstGeom prst="rect">
+            <a:avLst/>
+          </a:prstGeom>
+          <a:solidFill>
+            <a:schemeClr val="bg1"/>
+          </a:solidFill>
+          <a:ln>
+            <a:solidFill>
+              <a:schemeClr val="bg2"/>
+            </a:solidFill>
+          </a:ln>
+        </p:spPr>
+        <p:style>
+          <a:lnRef idx="2">
+            <a:schemeClr val="accent1">
+              <a:shade val="50000"/>
+            </a:schemeClr>
+          </a:lnRef>
+          <a:fillRef idx="1">
+            <a:schemeClr val="accent1"/>
+          </a:fillRef>
+          <a:effectRef idx="0">
+            <a:schemeClr val="accent1"/>
+          </a:effectRef>
+          <a:fontRef idx="minor">
+            <a:schemeClr val="lt1"/>
+          </a:fontRef>
+        </p:style>
+        <p:txBody>
+          <a:bodyPr rtlCol="0" anchor="ctr"/>
+          <a:lstStyle/>
+          <a:p>
+            <a:pPr algn="ctr"/>
+            <a:r>
+              <a:rPr lang="es-ES_tradnl" sz="2400" b="1" dirty="0">
+                <a:solidFill>
+                  <a:schemeClr val="bg2"/>
+                </a:solidFill>
+              </a:rPr>
+              <a:t>CARGA DE TRABAJO</a:t>
+            </a:r>
+          </a:p>
+        </p:txBody>
+      </p:sp>
+      <p:sp>
+        <p:nvSpPr>
+          <p:cNvPr id="5" name="Rectangle 14">
+            <a:extLst>
+              <a:ext uri="{FF2B5EF4-FFF2-40B4-BE49-F238E27FC236}">
+                <a16:creationId xmlns:a16="http://schemas.microsoft.com/office/drawing/2014/main" id="{7B9DE141-DEAD-5D5C-77C3-4E9EF984166B}"/>
+              </a:ext>
+            </a:extLst>
+          </p:cNvPr>
+          <p:cNvSpPr/>
+          <p:nvPr/>
+        </p:nvSpPr>
+        <p:spPr>
+          <a:xfrm>
+            <a:off x="15076684" y="4226329"/>
+            <a:ext cx="2156379" cy="809011"/>
+          </a:xfrm>
+          <a:prstGeom prst="rect">
+            <a:avLst/>
+          </a:prstGeom>
+          <a:solidFill>
+            <a:schemeClr val="bg1"/>
+          </a:solidFill>
+          <a:ln>
+            <a:solidFill>
+              <a:schemeClr val="bg2"/>
+            </a:solidFill>
+          </a:ln>
+        </p:spPr>
+        <p:style>
+          <a:lnRef idx="2">
+            <a:schemeClr val="accent1">
+              <a:shade val="50000"/>
+            </a:schemeClr>
+          </a:lnRef>
+          <a:fillRef idx="1">
+            <a:schemeClr val="accent1"/>
+          </a:fillRef>
+          <a:effectRef idx="0">
+            <a:schemeClr val="accent1"/>
+          </a:effectRef>
+          <a:fontRef idx="minor">
+            <a:schemeClr val="lt1"/>
+          </a:fontRef>
+        </p:style>
+        <p:txBody>
+          <a:bodyPr rtlCol="0" anchor="ctr"/>
+          <a:lstStyle/>
+          <a:p>
+            <a:pPr algn="ctr"/>
+            <a:r>
+              <a:rPr lang="es-ES_tradnl" sz="2400" b="1" dirty="0">
+                <a:solidFill>
+                  <a:schemeClr val="bg2"/>
+                </a:solidFill>
+              </a:rPr>
+              <a:t>DESEMPEÑO</a:t>
+            </a:r>
+          </a:p>
+        </p:txBody>
+      </p:sp>
+      <p:sp>
+        <p:nvSpPr>
+          <p:cNvPr id="6" name="Rectangle 14">
+            <a:extLst>
+              <a:ext uri="{FF2B5EF4-FFF2-40B4-BE49-F238E27FC236}">
+                <a16:creationId xmlns:a16="http://schemas.microsoft.com/office/drawing/2014/main" id="{AAA1FC9E-85E7-5CC1-7D4C-008E402DA12E}"/>
+              </a:ext>
+            </a:extLst>
+          </p:cNvPr>
+          <p:cNvSpPr/>
+          <p:nvPr/>
+        </p:nvSpPr>
+        <p:spPr>
+          <a:xfrm>
+            <a:off x="12872043" y="4246407"/>
+            <a:ext cx="1894041" cy="788933"/>
+          </a:xfrm>
+          <a:prstGeom prst="rect">
+            <a:avLst/>
+          </a:prstGeom>
+          <a:solidFill>
+            <a:schemeClr val="bg1"/>
+          </a:solidFill>
+          <a:ln>
+            <a:solidFill>
+              <a:schemeClr val="bg2"/>
+            </a:solidFill>
+          </a:ln>
+        </p:spPr>
+        <p:style>
+          <a:lnRef idx="2">
+            <a:schemeClr val="accent1">
+              <a:shade val="50000"/>
+            </a:schemeClr>
+          </a:lnRef>
+          <a:fillRef idx="1">
+            <a:schemeClr val="accent1"/>
+          </a:fillRef>
+          <a:effectRef idx="0">
+            <a:schemeClr val="accent1"/>
+          </a:effectRef>
+          <a:fontRef idx="minor">
+            <a:schemeClr val="lt1"/>
+          </a:fontRef>
+        </p:style>
+        <p:txBody>
+          <a:bodyPr rtlCol="0" anchor="ctr"/>
+          <a:lstStyle/>
+          <a:p>
+            <a:pPr algn="ctr"/>
+            <a:r>
+              <a:rPr lang="es-ES_tradnl" sz="2400" b="1" dirty="0">
+                <a:solidFill>
+                  <a:schemeClr val="bg2"/>
+                </a:solidFill>
+              </a:rPr>
+              <a:t>CARGA DE TRABAJO</a:t>
+            </a:r>
+          </a:p>
+        </p:txBody>
+      </p:sp>
+      <p:sp>
+        <p:nvSpPr>
+          <p:cNvPr id="7" name="Rectangle 14">
+            <a:extLst>
+              <a:ext uri="{FF2B5EF4-FFF2-40B4-BE49-F238E27FC236}">
+                <a16:creationId xmlns:a16="http://schemas.microsoft.com/office/drawing/2014/main" id="{1A371D18-CFF7-7C81-AB14-A754411D14F9}"/>
+              </a:ext>
+            </a:extLst>
+          </p:cNvPr>
+          <p:cNvSpPr/>
+          <p:nvPr/>
+        </p:nvSpPr>
+        <p:spPr>
+          <a:xfrm>
+            <a:off x="3161026" y="5891203"/>
+            <a:ext cx="1569433" cy="751127"/>
+          </a:xfrm>
+          <a:prstGeom prst="rect">
+            <a:avLst/>
+          </a:prstGeom>
+          <a:solidFill>
+            <a:schemeClr val="bg1"/>
+          </a:solidFill>
+          <a:ln>
+            <a:solidFill>
+              <a:schemeClr val="bg2"/>
+            </a:solidFill>
+          </a:ln>
+        </p:spPr>
+        <p:style>
+          <a:lnRef idx="2">
+            <a:schemeClr val="accent1">
+              <a:shade val="50000"/>
+            </a:schemeClr>
+          </a:lnRef>
+          <a:fillRef idx="1">
+            <a:schemeClr val="accent1"/>
+          </a:fillRef>
+          <a:effectRef idx="0">
+            <a:schemeClr val="accent1"/>
+          </a:effectRef>
+          <a:fontRef idx="minor">
+            <a:schemeClr val="lt1"/>
+          </a:fontRef>
+        </p:style>
+        <p:txBody>
+          <a:bodyPr rtlCol="0" anchor="ctr"/>
+          <a:lstStyle/>
+          <a:p>
+            <a:pPr algn="ctr"/>
+            <a:r>
+              <a:rPr lang="es-ES_tradnl" sz="2400" b="1" dirty="0">
+                <a:solidFill>
+                  <a:schemeClr val="bg2"/>
+                </a:solidFill>
+              </a:rPr>
+              <a:t>81%</a:t>
+            </a:r>
+          </a:p>
+        </p:txBody>
+      </p:sp>
+      <p:sp>
+        <p:nvSpPr>
+          <p:cNvPr id="8" name="Rectangle 14">
+            <a:extLst>
+              <a:ext uri="{FF2B5EF4-FFF2-40B4-BE49-F238E27FC236}">
+                <a16:creationId xmlns:a16="http://schemas.microsoft.com/office/drawing/2014/main" id="{FFF26C2C-4A64-4E35-607C-B6984CE1B315}"/>
+              </a:ext>
+            </a:extLst>
+          </p:cNvPr>
+          <p:cNvSpPr/>
+          <p:nvPr/>
+        </p:nvSpPr>
+        <p:spPr>
+          <a:xfrm>
+            <a:off x="845798" y="5888343"/>
+            <a:ext cx="1894041" cy="788933"/>
+          </a:xfrm>
+          <a:prstGeom prst="rect">
+            <a:avLst/>
+          </a:prstGeom>
+          <a:solidFill>
+            <a:schemeClr val="bg1"/>
+          </a:solidFill>
+          <a:ln>
+            <a:solidFill>
+              <a:schemeClr val="bg2"/>
+            </a:solidFill>
+          </a:ln>
+        </p:spPr>
+        <p:style>
+          <a:lnRef idx="2">
+            <a:schemeClr val="accent1">
+              <a:shade val="50000"/>
+            </a:schemeClr>
+          </a:lnRef>
+          <a:fillRef idx="1">
+            <a:schemeClr val="accent1"/>
+          </a:fillRef>
+          <a:effectRef idx="0">
+            <a:schemeClr val="accent1"/>
+          </a:effectRef>
+          <a:fontRef idx="minor">
+            <a:schemeClr val="lt1"/>
+          </a:fontRef>
+        </p:style>
+        <p:txBody>
+          <a:bodyPr rtlCol="0" anchor="ctr"/>
+          <a:lstStyle/>
+          <a:p>
+            <a:pPr algn="ctr"/>
+            <a:r>
+              <a:rPr lang="es-ES_tradnl" sz="2400" b="1" dirty="0">
+                <a:solidFill>
+                  <a:schemeClr val="bg2"/>
+                </a:solidFill>
+              </a:rPr>
+              <a:t>289 – 298 paquetes</a:t>
+            </a:r>
+          </a:p>
+        </p:txBody>
+      </p:sp>
+      <p:sp>
+        <p:nvSpPr>
+          <p:cNvPr id="9" name="Rectangle 14">
+            <a:extLst>
+              <a:ext uri="{FF2B5EF4-FFF2-40B4-BE49-F238E27FC236}">
+                <a16:creationId xmlns:a16="http://schemas.microsoft.com/office/drawing/2014/main" id="{2C786784-9FA6-D511-DA8C-F5E16FE4EADD}"/>
+              </a:ext>
+            </a:extLst>
+          </p:cNvPr>
+          <p:cNvSpPr/>
+          <p:nvPr/>
+        </p:nvSpPr>
+        <p:spPr>
+          <a:xfrm>
+            <a:off x="9021996" y="5143501"/>
+            <a:ext cx="1569433" cy="760440"/>
+          </a:xfrm>
+          <a:prstGeom prst="rect">
+            <a:avLst/>
+          </a:prstGeom>
+          <a:solidFill>
+            <a:schemeClr val="bg1"/>
+          </a:solidFill>
+          <a:ln>
+            <a:solidFill>
+              <a:schemeClr val="bg2"/>
+            </a:solidFill>
+          </a:ln>
+        </p:spPr>
+        <p:style>
+          <a:lnRef idx="2">
+            <a:schemeClr val="accent1">
+              <a:shade val="50000"/>
+            </a:schemeClr>
+          </a:lnRef>
+          <a:fillRef idx="1">
+            <a:schemeClr val="accent1"/>
+          </a:fillRef>
+          <a:effectRef idx="0">
+            <a:schemeClr val="accent1"/>
+          </a:effectRef>
+          <a:fontRef idx="minor">
+            <a:schemeClr val="lt1"/>
+          </a:fontRef>
+        </p:style>
+        <p:txBody>
+          <a:bodyPr rtlCol="0" anchor="ctr"/>
+          <a:lstStyle/>
+          <a:p>
+            <a:pPr algn="ctr"/>
+            <a:r>
+              <a:rPr lang="es-ES_tradnl" sz="2400" b="1" dirty="0">
+                <a:solidFill>
+                  <a:schemeClr val="bg2"/>
+                </a:solidFill>
+              </a:rPr>
+              <a:t>98.7%</a:t>
+            </a:r>
+          </a:p>
+        </p:txBody>
+      </p:sp>
+      <p:sp>
+        <p:nvSpPr>
+          <p:cNvPr id="10" name="Rectangle 14">
+            <a:extLst>
+              <a:ext uri="{FF2B5EF4-FFF2-40B4-BE49-F238E27FC236}">
+                <a16:creationId xmlns:a16="http://schemas.microsoft.com/office/drawing/2014/main" id="{AA30C771-E6A3-FE09-F41C-D9F5FEC85A32}"/>
+              </a:ext>
+            </a:extLst>
+          </p:cNvPr>
+          <p:cNvSpPr/>
+          <p:nvPr/>
+        </p:nvSpPr>
+        <p:spPr>
+          <a:xfrm>
+            <a:off x="6692169" y="5143500"/>
+            <a:ext cx="1894041" cy="788933"/>
+          </a:xfrm>
+          <a:prstGeom prst="rect">
+            <a:avLst/>
+          </a:prstGeom>
+          <a:solidFill>
+            <a:schemeClr val="bg1"/>
+          </a:solidFill>
+          <a:ln>
+            <a:solidFill>
+              <a:schemeClr val="bg2"/>
+            </a:solidFill>
+          </a:ln>
+        </p:spPr>
+        <p:style>
+          <a:lnRef idx="2">
+            <a:schemeClr val="accent1">
+              <a:shade val="50000"/>
+            </a:schemeClr>
+          </a:lnRef>
+          <a:fillRef idx="1">
+            <a:schemeClr val="accent1"/>
+          </a:fillRef>
+          <a:effectRef idx="0">
+            <a:schemeClr val="accent1"/>
+          </a:effectRef>
+          <a:fontRef idx="minor">
+            <a:schemeClr val="lt1"/>
+          </a:fontRef>
+        </p:style>
+        <p:txBody>
+          <a:bodyPr rtlCol="0" anchor="ctr"/>
+          <a:lstStyle/>
+          <a:p>
+            <a:pPr algn="ctr"/>
+            <a:r>
+              <a:rPr lang="es-ES_tradnl" sz="2400" b="1" dirty="0">
+                <a:solidFill>
+                  <a:schemeClr val="bg2"/>
+                </a:solidFill>
+              </a:rPr>
+              <a:t>237 – 239 paquetes</a:t>
+            </a:r>
+          </a:p>
+        </p:txBody>
+      </p:sp>
+      <p:sp>
+        <p:nvSpPr>
+          <p:cNvPr id="12" name="Rectangle 14">
+            <a:extLst>
+              <a:ext uri="{FF2B5EF4-FFF2-40B4-BE49-F238E27FC236}">
+                <a16:creationId xmlns:a16="http://schemas.microsoft.com/office/drawing/2014/main" id="{BCA2D389-3019-B741-E06C-B5218ED92F60}"/>
+              </a:ext>
+            </a:extLst>
+          </p:cNvPr>
+          <p:cNvSpPr/>
+          <p:nvPr/>
+        </p:nvSpPr>
+        <p:spPr>
+          <a:xfrm>
+            <a:off x="15187271" y="5880162"/>
+            <a:ext cx="1587813" cy="751128"/>
+          </a:xfrm>
+          <a:prstGeom prst="rect">
+            <a:avLst/>
+          </a:prstGeom>
+          <a:solidFill>
+            <a:schemeClr val="bg1"/>
+          </a:solidFill>
+          <a:ln>
+            <a:solidFill>
+              <a:schemeClr val="bg2"/>
+            </a:solidFill>
+          </a:ln>
+        </p:spPr>
+        <p:style>
+          <a:lnRef idx="2">
+            <a:schemeClr val="accent1">
+              <a:shade val="50000"/>
+            </a:schemeClr>
+          </a:lnRef>
+          <a:fillRef idx="1">
+            <a:schemeClr val="accent1"/>
+          </a:fillRef>
+          <a:effectRef idx="0">
+            <a:schemeClr val="accent1"/>
+          </a:effectRef>
+          <a:fontRef idx="minor">
+            <a:schemeClr val="lt1"/>
+          </a:fontRef>
+        </p:style>
+        <p:txBody>
+          <a:bodyPr rtlCol="0" anchor="ctr"/>
+          <a:lstStyle/>
+          <a:p>
+            <a:pPr algn="ctr"/>
+            <a:r>
+              <a:rPr lang="es-ES_tradnl" sz="2400" b="1" dirty="0">
+                <a:solidFill>
+                  <a:schemeClr val="bg2"/>
+                </a:solidFill>
+              </a:rPr>
+              <a:t>95.5%</a:t>
+            </a:r>
+          </a:p>
+        </p:txBody>
+      </p:sp>
+      <p:sp>
+        <p:nvSpPr>
+          <p:cNvPr id="18" name="Rectangle 14">
+            <a:extLst>
+              <a:ext uri="{FF2B5EF4-FFF2-40B4-BE49-F238E27FC236}">
+                <a16:creationId xmlns:a16="http://schemas.microsoft.com/office/drawing/2014/main" id="{07227D69-5E0C-A63D-B5C0-BD57482FD335}"/>
+              </a:ext>
+            </a:extLst>
+          </p:cNvPr>
+          <p:cNvSpPr/>
+          <p:nvPr/>
+        </p:nvSpPr>
+        <p:spPr>
+          <a:xfrm>
+            <a:off x="12872043" y="5890483"/>
+            <a:ext cx="1894041" cy="788933"/>
+          </a:xfrm>
+          <a:prstGeom prst="rect">
+            <a:avLst/>
+          </a:prstGeom>
+          <a:solidFill>
+            <a:schemeClr val="bg1"/>
+          </a:solidFill>
+          <a:ln>
+            <a:solidFill>
+              <a:schemeClr val="bg2"/>
+            </a:solidFill>
+          </a:ln>
+        </p:spPr>
+        <p:style>
+          <a:lnRef idx="2">
+            <a:schemeClr val="accent1">
+              <a:shade val="50000"/>
+            </a:schemeClr>
+          </a:lnRef>
+          <a:fillRef idx="1">
+            <a:schemeClr val="accent1"/>
+          </a:fillRef>
+          <a:effectRef idx="0">
+            <a:schemeClr val="accent1"/>
+          </a:effectRef>
+          <a:fontRef idx="minor">
+            <a:schemeClr val="lt1"/>
+          </a:fontRef>
+        </p:style>
+        <p:txBody>
+          <a:bodyPr rtlCol="0" anchor="ctr"/>
+          <a:lstStyle/>
+          <a:p>
+            <a:pPr algn="ctr"/>
+            <a:r>
+              <a:rPr lang="es-ES_tradnl" sz="2400" b="1" dirty="0">
+                <a:solidFill>
+                  <a:schemeClr val="bg2"/>
+                </a:solidFill>
+              </a:rPr>
+              <a:t>&gt; 304</a:t>
+            </a:r>
+            <a:br>
+              <a:rPr lang="es-ES_tradnl" sz="2400" b="1" dirty="0">
+                <a:solidFill>
+                  <a:schemeClr val="bg2"/>
+                </a:solidFill>
+              </a:rPr>
+            </a:br>
+            <a:r>
+              <a:rPr lang="es-ES_tradnl" sz="2400" b="1" dirty="0">
+                <a:solidFill>
+                  <a:schemeClr val="bg2"/>
+                </a:solidFill>
+              </a:rPr>
+              <a:t>paquetes</a:t>
+            </a:r>
+          </a:p>
+        </p:txBody>
+      </p:sp>
+      <p:sp>
+        <p:nvSpPr>
+          <p:cNvPr id="19" name="Flecha abajo 18">
+            <a:extLst>
+              <a:ext uri="{FF2B5EF4-FFF2-40B4-BE49-F238E27FC236}">
+                <a16:creationId xmlns:a16="http://schemas.microsoft.com/office/drawing/2014/main" id="{06892AA4-0E84-0998-2A87-8514C668B258}"/>
+              </a:ext>
+            </a:extLst>
+          </p:cNvPr>
+          <p:cNvSpPr/>
+          <p:nvPr/>
+        </p:nvSpPr>
+        <p:spPr>
+          <a:xfrm>
+            <a:off x="7639189" y="2947681"/>
+            <a:ext cx="349135" cy="590931"/>
+          </a:xfrm>
+          <a:prstGeom prst="downArrow">
+            <a:avLst/>
+          </a:prstGeom>
+          <a:solidFill>
+            <a:srgbClr val="00B050"/>
+          </a:solidFill>
+          <a:ln>
+            <a:solidFill>
+              <a:schemeClr val="accent3">
+                <a:lumMod val="75000"/>
+              </a:schemeClr>
+            </a:solidFill>
+          </a:ln>
+        </p:spPr>
+        <p:style>
+          <a:lnRef idx="2">
+            <a:schemeClr val="accent1">
+              <a:shade val="15000"/>
+            </a:schemeClr>
+          </a:lnRef>
+          <a:fillRef idx="1">
+            <a:schemeClr val="accent1"/>
+          </a:fillRef>
+          <a:effectRef idx="0">
+            <a:schemeClr val="accent1"/>
+          </a:effectRef>
+          <a:fontRef idx="minor">
+            <a:schemeClr val="lt1"/>
+          </a:fontRef>
+        </p:style>
+        <p:txBody>
+          <a:bodyPr rtlCol="0" anchor="ctr"/>
+          <a:lstStyle/>
+          <a:p>
+            <a:pPr algn="ctr"/>
+            <a:endParaRPr lang="es-ES"/>
+          </a:p>
+        </p:txBody>
+      </p:sp>
+      <p:sp>
+        <p:nvSpPr>
+          <p:cNvPr id="20" name="Flecha abajo 19">
+            <a:extLst>
+              <a:ext uri="{FF2B5EF4-FFF2-40B4-BE49-F238E27FC236}">
+                <a16:creationId xmlns:a16="http://schemas.microsoft.com/office/drawing/2014/main" id="{27DF9403-FC07-1FE3-C630-B4CCB48243CD}"/>
+              </a:ext>
+            </a:extLst>
+          </p:cNvPr>
+          <p:cNvSpPr/>
+          <p:nvPr/>
+        </p:nvSpPr>
+        <p:spPr>
+          <a:xfrm>
+            <a:off x="9504430" y="2961410"/>
+            <a:ext cx="349135" cy="590931"/>
+          </a:xfrm>
+          <a:prstGeom prst="downArrow">
+            <a:avLst/>
+          </a:prstGeom>
+          <a:solidFill>
+            <a:srgbClr val="00B050"/>
+          </a:solidFill>
+          <a:ln>
+            <a:solidFill>
+              <a:schemeClr val="accent3">
+                <a:lumMod val="75000"/>
+              </a:schemeClr>
+            </a:solidFill>
+          </a:ln>
+        </p:spPr>
+        <p:style>
+          <a:lnRef idx="2">
+            <a:schemeClr val="accent1">
+              <a:shade val="15000"/>
+            </a:schemeClr>
+          </a:lnRef>
+          <a:fillRef idx="1">
+            <a:schemeClr val="accent1"/>
+          </a:fillRef>
+          <a:effectRef idx="0">
+            <a:schemeClr val="accent1"/>
+          </a:effectRef>
+          <a:fontRef idx="minor">
+            <a:schemeClr val="lt1"/>
+          </a:fontRef>
+        </p:style>
+        <p:txBody>
+          <a:bodyPr rtlCol="0" anchor="ctr"/>
+          <a:lstStyle/>
+          <a:p>
+            <a:pPr algn="ctr"/>
+            <a:endParaRPr lang="es-ES"/>
+          </a:p>
+        </p:txBody>
+      </p:sp>
+      <p:sp>
+        <p:nvSpPr>
+          <p:cNvPr id="21" name="Flecha abajo 20">
+            <a:extLst>
+              <a:ext uri="{FF2B5EF4-FFF2-40B4-BE49-F238E27FC236}">
+                <a16:creationId xmlns:a16="http://schemas.microsoft.com/office/drawing/2014/main" id="{4AE8A597-AD4C-6807-9C29-6DF665B918CA}"/>
+              </a:ext>
+            </a:extLst>
+          </p:cNvPr>
+          <p:cNvSpPr/>
+          <p:nvPr/>
+        </p:nvSpPr>
+        <p:spPr>
+          <a:xfrm>
+            <a:off x="7639188" y="4504203"/>
+            <a:ext cx="349135" cy="590931"/>
+          </a:xfrm>
+          <a:prstGeom prst="downArrow">
+            <a:avLst/>
+          </a:prstGeom>
+          <a:solidFill>
+            <a:srgbClr val="00B050"/>
+          </a:solidFill>
+          <a:ln>
+            <a:solidFill>
+              <a:schemeClr val="accent3">
+                <a:lumMod val="75000"/>
+              </a:schemeClr>
+            </a:solidFill>
+          </a:ln>
+        </p:spPr>
+        <p:style>
+          <a:lnRef idx="2">
+            <a:schemeClr val="accent1">
+              <a:shade val="15000"/>
+            </a:schemeClr>
+          </a:lnRef>
+          <a:fillRef idx="1">
+            <a:schemeClr val="accent1"/>
+          </a:fillRef>
+          <a:effectRef idx="0">
+            <a:schemeClr val="accent1"/>
+          </a:effectRef>
+          <a:fontRef idx="minor">
+            <a:schemeClr val="lt1"/>
+          </a:fontRef>
+        </p:style>
+        <p:txBody>
+          <a:bodyPr rtlCol="0" anchor="ctr"/>
+          <a:lstStyle/>
+          <a:p>
+            <a:pPr algn="ctr"/>
+            <a:endParaRPr lang="es-ES"/>
+          </a:p>
+        </p:txBody>
+      </p:sp>
+      <p:sp>
+        <p:nvSpPr>
+          <p:cNvPr id="22" name="Flecha abajo 21">
+            <a:extLst>
+              <a:ext uri="{FF2B5EF4-FFF2-40B4-BE49-F238E27FC236}">
+                <a16:creationId xmlns:a16="http://schemas.microsoft.com/office/drawing/2014/main" id="{07ECE06B-223A-0567-4341-27AA5F848363}"/>
+              </a:ext>
+            </a:extLst>
+          </p:cNvPr>
+          <p:cNvSpPr/>
+          <p:nvPr/>
+        </p:nvSpPr>
+        <p:spPr>
+          <a:xfrm>
+            <a:off x="9504429" y="4504203"/>
+            <a:ext cx="349135" cy="590931"/>
+          </a:xfrm>
+          <a:prstGeom prst="downArrow">
+            <a:avLst/>
+          </a:prstGeom>
+          <a:solidFill>
+            <a:srgbClr val="00B050"/>
+          </a:solidFill>
+          <a:ln>
+            <a:solidFill>
+              <a:schemeClr val="accent3">
+                <a:lumMod val="75000"/>
+              </a:schemeClr>
+            </a:solidFill>
+          </a:ln>
+        </p:spPr>
+        <p:style>
+          <a:lnRef idx="2">
+            <a:schemeClr val="accent1">
+              <a:shade val="15000"/>
+            </a:schemeClr>
+          </a:lnRef>
+          <a:fillRef idx="1">
+            <a:schemeClr val="accent1"/>
+          </a:fillRef>
+          <a:effectRef idx="0">
+            <a:schemeClr val="accent1"/>
+          </a:effectRef>
+          <a:fontRef idx="minor">
+            <a:schemeClr val="lt1"/>
+          </a:fontRef>
+        </p:style>
+        <p:txBody>
+          <a:bodyPr rtlCol="0" anchor="ctr"/>
+          <a:lstStyle/>
+          <a:p>
+            <a:pPr algn="ctr"/>
+            <a:endParaRPr lang="es-ES"/>
+          </a:p>
+        </p:txBody>
+      </p:sp>
+      <p:sp>
+        <p:nvSpPr>
+          <p:cNvPr id="23" name="Flecha abajo 22">
+            <a:extLst>
+              <a:ext uri="{FF2B5EF4-FFF2-40B4-BE49-F238E27FC236}">
+                <a16:creationId xmlns:a16="http://schemas.microsoft.com/office/drawing/2014/main" id="{356C1CDD-C354-2A09-BFC9-FADEB6A7E64A}"/>
+              </a:ext>
+            </a:extLst>
+          </p:cNvPr>
+          <p:cNvSpPr/>
+          <p:nvPr/>
+        </p:nvSpPr>
+        <p:spPr>
+          <a:xfrm>
+            <a:off x="13672226" y="3598578"/>
+            <a:ext cx="349135" cy="590931"/>
+          </a:xfrm>
+          <a:prstGeom prst="downArrow">
+            <a:avLst/>
+          </a:prstGeom>
+          <a:solidFill>
+            <a:schemeClr val="accent6">
+              <a:lumMod val="75000"/>
+            </a:schemeClr>
+          </a:solidFill>
+          <a:ln>
+            <a:solidFill>
+              <a:schemeClr val="accent6">
+                <a:lumMod val="50000"/>
+              </a:schemeClr>
+            </a:solidFill>
+          </a:ln>
+        </p:spPr>
+        <p:style>
+          <a:lnRef idx="2">
+            <a:schemeClr val="accent1">
+              <a:shade val="15000"/>
+            </a:schemeClr>
+          </a:lnRef>
+          <a:fillRef idx="1">
+            <a:schemeClr val="accent1"/>
+          </a:fillRef>
+          <a:effectRef idx="0">
+            <a:schemeClr val="accent1"/>
+          </a:effectRef>
+          <a:fontRef idx="minor">
+            <a:schemeClr val="lt1"/>
+          </a:fontRef>
+        </p:style>
+        <p:txBody>
+          <a:bodyPr rtlCol="0" anchor="ctr"/>
+          <a:lstStyle/>
+          <a:p>
+            <a:pPr algn="ctr"/>
+            <a:endParaRPr lang="es-ES"/>
+          </a:p>
+        </p:txBody>
+      </p:sp>
+      <p:sp>
+        <p:nvSpPr>
+          <p:cNvPr id="24" name="Flecha abajo 23">
+            <a:extLst>
+              <a:ext uri="{FF2B5EF4-FFF2-40B4-BE49-F238E27FC236}">
+                <a16:creationId xmlns:a16="http://schemas.microsoft.com/office/drawing/2014/main" id="{7C533EBD-554B-77AE-8C4D-66526DB7A975}"/>
+              </a:ext>
+            </a:extLst>
+          </p:cNvPr>
+          <p:cNvSpPr/>
+          <p:nvPr/>
+        </p:nvSpPr>
+        <p:spPr>
+          <a:xfrm>
+            <a:off x="15537467" y="3612307"/>
+            <a:ext cx="349135" cy="590931"/>
+          </a:xfrm>
+          <a:prstGeom prst="downArrow">
+            <a:avLst/>
+          </a:prstGeom>
+          <a:solidFill>
+            <a:schemeClr val="accent6">
+              <a:lumMod val="75000"/>
+            </a:schemeClr>
+          </a:solidFill>
+          <a:ln>
+            <a:solidFill>
+              <a:schemeClr val="accent6">
+                <a:lumMod val="50000"/>
+              </a:schemeClr>
+            </a:solidFill>
+          </a:ln>
+        </p:spPr>
+        <p:style>
+          <a:lnRef idx="2">
+            <a:schemeClr val="accent1">
+              <a:shade val="15000"/>
+            </a:schemeClr>
+          </a:lnRef>
+          <a:fillRef idx="1">
+            <a:schemeClr val="accent1"/>
+          </a:fillRef>
+          <a:effectRef idx="0">
+            <a:schemeClr val="accent1"/>
+          </a:effectRef>
+          <a:fontRef idx="minor">
+            <a:schemeClr val="lt1"/>
+          </a:fontRef>
+        </p:style>
+        <p:txBody>
+          <a:bodyPr rtlCol="0" anchor="ctr"/>
+          <a:lstStyle/>
+          <a:p>
+            <a:pPr algn="ctr"/>
+            <a:endParaRPr lang="es-ES"/>
+          </a:p>
+        </p:txBody>
+      </p:sp>
+      <p:sp>
+        <p:nvSpPr>
+          <p:cNvPr id="25" name="Flecha abajo 24">
+            <a:extLst>
+              <a:ext uri="{FF2B5EF4-FFF2-40B4-BE49-F238E27FC236}">
+                <a16:creationId xmlns:a16="http://schemas.microsoft.com/office/drawing/2014/main" id="{36297C3E-7832-B3A4-DE68-A8D5264D0CDB}"/>
+              </a:ext>
+            </a:extLst>
+          </p:cNvPr>
+          <p:cNvSpPr/>
+          <p:nvPr/>
+        </p:nvSpPr>
+        <p:spPr>
+          <a:xfrm>
+            <a:off x="13672225" y="5155100"/>
+            <a:ext cx="349135" cy="590931"/>
+          </a:xfrm>
+          <a:prstGeom prst="downArrow">
+            <a:avLst/>
+          </a:prstGeom>
+          <a:solidFill>
+            <a:schemeClr val="accent6">
+              <a:lumMod val="75000"/>
+            </a:schemeClr>
+          </a:solidFill>
+          <a:ln>
+            <a:solidFill>
+              <a:schemeClr val="accent6">
+                <a:lumMod val="50000"/>
+              </a:schemeClr>
+            </a:solidFill>
+          </a:ln>
+        </p:spPr>
+        <p:style>
+          <a:lnRef idx="2">
+            <a:schemeClr val="accent1">
+              <a:shade val="15000"/>
+            </a:schemeClr>
+          </a:lnRef>
+          <a:fillRef idx="1">
+            <a:schemeClr val="accent1"/>
+          </a:fillRef>
+          <a:effectRef idx="0">
+            <a:schemeClr val="accent1"/>
+          </a:effectRef>
+          <a:fontRef idx="minor">
+            <a:schemeClr val="lt1"/>
+          </a:fontRef>
+        </p:style>
+        <p:txBody>
+          <a:bodyPr rtlCol="0" anchor="ctr"/>
+          <a:lstStyle/>
+          <a:p>
+            <a:pPr algn="ctr"/>
+            <a:endParaRPr lang="es-ES"/>
+          </a:p>
+        </p:txBody>
+      </p:sp>
+      <p:sp>
+        <p:nvSpPr>
+          <p:cNvPr id="26" name="Flecha abajo 25">
+            <a:extLst>
+              <a:ext uri="{FF2B5EF4-FFF2-40B4-BE49-F238E27FC236}">
+                <a16:creationId xmlns:a16="http://schemas.microsoft.com/office/drawing/2014/main" id="{464B6C5F-A562-BF84-839D-9AC0DBF1899D}"/>
+              </a:ext>
+            </a:extLst>
+          </p:cNvPr>
+          <p:cNvSpPr/>
+          <p:nvPr/>
+        </p:nvSpPr>
+        <p:spPr>
+          <a:xfrm>
+            <a:off x="15537466" y="5155100"/>
+            <a:ext cx="349135" cy="590931"/>
+          </a:xfrm>
+          <a:prstGeom prst="downArrow">
+            <a:avLst/>
+          </a:prstGeom>
+          <a:solidFill>
+            <a:schemeClr val="accent6">
+              <a:lumMod val="75000"/>
+            </a:schemeClr>
+          </a:solidFill>
+          <a:ln>
+            <a:solidFill>
+              <a:schemeClr val="accent6">
+                <a:lumMod val="50000"/>
+              </a:schemeClr>
+            </a:solidFill>
+          </a:ln>
+        </p:spPr>
+        <p:style>
+          <a:lnRef idx="2">
+            <a:schemeClr val="accent1">
+              <a:shade val="15000"/>
+            </a:schemeClr>
+          </a:lnRef>
+          <a:fillRef idx="1">
+            <a:schemeClr val="accent1"/>
+          </a:fillRef>
+          <a:effectRef idx="0">
+            <a:schemeClr val="accent1"/>
+          </a:effectRef>
+          <a:fontRef idx="minor">
+            <a:schemeClr val="lt1"/>
+          </a:fontRef>
+        </p:style>
+        <p:txBody>
+          <a:bodyPr rtlCol="0" anchor="ctr"/>
+          <a:lstStyle/>
+          <a:p>
+            <a:pPr algn="ctr"/>
+            <a:endParaRPr lang="es-ES"/>
+          </a:p>
+        </p:txBody>
+      </p:sp>
+      <p:sp>
+        <p:nvSpPr>
+          <p:cNvPr id="27" name="Flecha abajo 26">
+            <a:extLst>
+              <a:ext uri="{FF2B5EF4-FFF2-40B4-BE49-F238E27FC236}">
+                <a16:creationId xmlns:a16="http://schemas.microsoft.com/office/drawing/2014/main" id="{53168283-7E04-F1E2-E520-A02E58E33E99}"/>
+              </a:ext>
+            </a:extLst>
+          </p:cNvPr>
+          <p:cNvSpPr/>
+          <p:nvPr/>
+        </p:nvSpPr>
+        <p:spPr>
+          <a:xfrm>
+            <a:off x="1725016" y="3563204"/>
+            <a:ext cx="349135" cy="590931"/>
+          </a:xfrm>
+          <a:prstGeom prst="downArrow">
+            <a:avLst/>
+          </a:prstGeom>
+          <a:solidFill>
+            <a:srgbClr val="FF0000"/>
+          </a:solidFill>
+          <a:ln>
+            <a:solidFill>
+              <a:srgbClr val="C00000"/>
+            </a:solidFill>
+          </a:ln>
+        </p:spPr>
+        <p:style>
+          <a:lnRef idx="2">
+            <a:schemeClr val="accent1">
+              <a:shade val="15000"/>
+            </a:schemeClr>
+          </a:lnRef>
+          <a:fillRef idx="1">
+            <a:schemeClr val="accent1"/>
+          </a:fillRef>
+          <a:effectRef idx="0">
+            <a:schemeClr val="accent1"/>
+          </a:effectRef>
+          <a:fontRef idx="minor">
+            <a:schemeClr val="lt1"/>
+          </a:fontRef>
+        </p:style>
+        <p:txBody>
+          <a:bodyPr rtlCol="0" anchor="ctr"/>
+          <a:lstStyle/>
+          <a:p>
+            <a:pPr algn="ctr"/>
+            <a:endParaRPr lang="es-ES"/>
+          </a:p>
+        </p:txBody>
+      </p:sp>
+      <p:sp>
+        <p:nvSpPr>
+          <p:cNvPr id="28" name="Flecha abajo 27">
+            <a:extLst>
+              <a:ext uri="{FF2B5EF4-FFF2-40B4-BE49-F238E27FC236}">
+                <a16:creationId xmlns:a16="http://schemas.microsoft.com/office/drawing/2014/main" id="{DBF47D44-AEE3-B620-5B96-0CD65447D6A3}"/>
+              </a:ext>
+            </a:extLst>
+          </p:cNvPr>
+          <p:cNvSpPr/>
+          <p:nvPr/>
+        </p:nvSpPr>
+        <p:spPr>
+          <a:xfrm>
+            <a:off x="3590257" y="3576933"/>
+            <a:ext cx="349135" cy="590931"/>
+          </a:xfrm>
+          <a:prstGeom prst="downArrow">
+            <a:avLst/>
+          </a:prstGeom>
+          <a:solidFill>
+            <a:srgbClr val="FF0000"/>
+          </a:solidFill>
+          <a:ln>
+            <a:solidFill>
+              <a:srgbClr val="C00000"/>
+            </a:solidFill>
+          </a:ln>
+        </p:spPr>
+        <p:style>
+          <a:lnRef idx="2">
+            <a:schemeClr val="accent1">
+              <a:shade val="15000"/>
+            </a:schemeClr>
+          </a:lnRef>
+          <a:fillRef idx="1">
+            <a:schemeClr val="accent1"/>
+          </a:fillRef>
+          <a:effectRef idx="0">
+            <a:schemeClr val="accent1"/>
+          </a:effectRef>
+          <a:fontRef idx="minor">
+            <a:schemeClr val="lt1"/>
+          </a:fontRef>
+        </p:style>
+        <p:txBody>
+          <a:bodyPr rtlCol="0" anchor="ctr"/>
+          <a:lstStyle/>
+          <a:p>
+            <a:pPr algn="ctr"/>
+            <a:endParaRPr lang="es-ES">
+              <a:solidFill>
+                <a:srgbClr val="FF0000"/>
+              </a:solidFill>
+            </a:endParaRPr>
+          </a:p>
+        </p:txBody>
+      </p:sp>
+      <p:sp>
+        <p:nvSpPr>
+          <p:cNvPr id="29" name="Flecha abajo 28">
+            <a:extLst>
+              <a:ext uri="{FF2B5EF4-FFF2-40B4-BE49-F238E27FC236}">
+                <a16:creationId xmlns:a16="http://schemas.microsoft.com/office/drawing/2014/main" id="{3EF09888-3FB9-8476-A9C9-58D4C2AA24B7}"/>
+              </a:ext>
+            </a:extLst>
+          </p:cNvPr>
+          <p:cNvSpPr/>
+          <p:nvPr/>
+        </p:nvSpPr>
+        <p:spPr>
+          <a:xfrm>
+            <a:off x="1725015" y="5119726"/>
+            <a:ext cx="349135" cy="590931"/>
+          </a:xfrm>
+          <a:prstGeom prst="downArrow">
+            <a:avLst/>
+          </a:prstGeom>
+          <a:solidFill>
+            <a:srgbClr val="FF0000"/>
+          </a:solidFill>
+          <a:ln>
+            <a:solidFill>
+              <a:srgbClr val="C00000"/>
+            </a:solidFill>
+          </a:ln>
+        </p:spPr>
+        <p:style>
+          <a:lnRef idx="2">
+            <a:schemeClr val="accent1">
+              <a:shade val="15000"/>
+            </a:schemeClr>
+          </a:lnRef>
+          <a:fillRef idx="1">
+            <a:schemeClr val="accent1"/>
+          </a:fillRef>
+          <a:effectRef idx="0">
+            <a:schemeClr val="accent1"/>
+          </a:effectRef>
+          <a:fontRef idx="minor">
+            <a:schemeClr val="lt1"/>
+          </a:fontRef>
+        </p:style>
+        <p:txBody>
+          <a:bodyPr rtlCol="0" anchor="ctr"/>
+          <a:lstStyle/>
+          <a:p>
+            <a:pPr algn="ctr"/>
+            <a:endParaRPr lang="es-ES"/>
+          </a:p>
+        </p:txBody>
+      </p:sp>
+      <p:sp>
+        <p:nvSpPr>
+          <p:cNvPr id="30" name="Flecha abajo 29">
+            <a:extLst>
+              <a:ext uri="{FF2B5EF4-FFF2-40B4-BE49-F238E27FC236}">
+                <a16:creationId xmlns:a16="http://schemas.microsoft.com/office/drawing/2014/main" id="{030F277A-7CD4-62F5-A2EE-C651FF9F555A}"/>
+              </a:ext>
+            </a:extLst>
+          </p:cNvPr>
+          <p:cNvSpPr/>
+          <p:nvPr/>
+        </p:nvSpPr>
+        <p:spPr>
+          <a:xfrm>
+            <a:off x="3590256" y="5119726"/>
+            <a:ext cx="349135" cy="590931"/>
+          </a:xfrm>
+          <a:prstGeom prst="downArrow">
+            <a:avLst/>
+          </a:prstGeom>
+          <a:solidFill>
+            <a:srgbClr val="FF0000"/>
+          </a:solidFill>
+          <a:ln>
+            <a:solidFill>
+              <a:srgbClr val="C00000"/>
+            </a:solidFill>
+          </a:ln>
+        </p:spPr>
+        <p:style>
+          <a:lnRef idx="2">
+            <a:schemeClr val="accent1">
+              <a:shade val="15000"/>
+            </a:schemeClr>
+          </a:lnRef>
+          <a:fillRef idx="1">
+            <a:schemeClr val="accent1"/>
+          </a:fillRef>
+          <a:effectRef idx="0">
+            <a:schemeClr val="accent1"/>
+          </a:effectRef>
+          <a:fontRef idx="minor">
+            <a:schemeClr val="lt1"/>
+          </a:fontRef>
+        </p:style>
+        <p:txBody>
+          <a:bodyPr rtlCol="0" anchor="ctr"/>
+          <a:lstStyle/>
+          <a:p>
+            <a:pPr algn="ctr"/>
+            <a:endParaRPr lang="es-ES"/>
+          </a:p>
+        </p:txBody>
+      </p:sp>
+    </p:spTree>
+    <p:extLst>
+      <p:ext uri="{BB962C8B-B14F-4D97-AF65-F5344CB8AC3E}">
+        <p14:creationId xmlns:p14="http://schemas.microsoft.com/office/powerpoint/2010/main" val="1477851174"/>
       </p:ext>
     </p:extLst>
   </p:cSld>
@@ -24053,2046 +25507,6 @@
           </a:p>
         </p:txBody>
       </p:sp>
-    </p:spTree>
-    <p:extLst>
-      <p:ext uri="{BB962C8B-B14F-4D97-AF65-F5344CB8AC3E}">
-        <p14:creationId xmlns:p14="http://schemas.microsoft.com/office/powerpoint/2010/main" val="1477851174"/>
-      </p:ext>
-    </p:extLst>
-  </p:cSld>
-  <p:clrMapOvr>
-    <a:masterClrMapping/>
-  </p:clrMapOvr>
-</p:sld>
-</file>
-
-<file path=ppt/slides/slide21.xml><?xml version="1.0" encoding="utf-8"?>
-<p:sld xmlns:a="http://schemas.openxmlformats.org/drawingml/2006/main" xmlns:r="http://schemas.openxmlformats.org/officeDocument/2006/relationships" xmlns:p="http://schemas.openxmlformats.org/presentationml/2006/main">
-  <p:cSld>
-    <p:bg>
-      <p:bgPr>
-        <a:solidFill>
-          <a:srgbClr val="E0E9F9"/>
-        </a:solidFill>
-        <a:effectLst/>
-      </p:bgPr>
-    </p:bg>
-    <p:spTree>
-      <p:nvGrpSpPr>
-        <p:cNvPr id="1" name="Shape 160">
-          <a:extLst>
-            <a:ext uri="{FF2B5EF4-FFF2-40B4-BE49-F238E27FC236}">
-              <a16:creationId xmlns:a16="http://schemas.microsoft.com/office/drawing/2014/main" id="{DA297602-4BBB-8124-85EA-38BC67F0ED50}"/>
-            </a:ext>
-          </a:extLst>
-        </p:cNvPr>
-        <p:cNvGrpSpPr/>
-        <p:nvPr/>
-      </p:nvGrpSpPr>
-      <p:grpSpPr>
-        <a:xfrm>
-          <a:off x="0" y="0"/>
-          <a:ext cx="0" cy="0"/>
-          <a:chOff x="0" y="0"/>
-          <a:chExt cx="0" cy="0"/>
-        </a:xfrm>
-      </p:grpSpPr>
-      <p:sp>
-        <p:nvSpPr>
-          <p:cNvPr id="161" name="Google Shape;161;p18">
-            <a:extLst>
-              <a:ext uri="{FF2B5EF4-FFF2-40B4-BE49-F238E27FC236}">
-                <a16:creationId xmlns:a16="http://schemas.microsoft.com/office/drawing/2014/main" id="{FA7FADFD-60A0-32BE-B0F0-F90CE928063D}"/>
-              </a:ext>
-            </a:extLst>
-          </p:cNvPr>
-          <p:cNvSpPr/>
-          <p:nvPr/>
-        </p:nvSpPr>
-        <p:spPr>
-          <a:xfrm>
-            <a:off x="-411641" y="7198177"/>
-            <a:ext cx="4653133" cy="3680205"/>
-          </a:xfrm>
-          <a:custGeom>
-            <a:avLst/>
-            <a:gdLst/>
-            <a:ahLst/>
-            <a:cxnLst/>
-            <a:rect l="l" t="t" r="r" b="b"/>
-            <a:pathLst>
-              <a:path w="9643798" h="7627368" extrusionOk="0">
-                <a:moveTo>
-                  <a:pt x="0" y="0"/>
-                </a:moveTo>
-                <a:lnTo>
-                  <a:pt x="9643798" y="0"/>
-                </a:lnTo>
-                <a:lnTo>
-                  <a:pt x="9643798" y="7627368"/>
-                </a:lnTo>
-                <a:lnTo>
-                  <a:pt x="0" y="7627368"/>
-                </a:lnTo>
-                <a:lnTo>
-                  <a:pt x="0" y="0"/>
-                </a:lnTo>
-                <a:close/>
-              </a:path>
-            </a:pathLst>
-          </a:custGeom>
-          <a:blipFill rotWithShape="1">
-            <a:blip r:embed="rId3">
-              <a:alphaModFix/>
-            </a:blip>
-            <a:stretch>
-              <a:fillRect/>
-            </a:stretch>
-          </a:blipFill>
-          <a:ln>
-            <a:noFill/>
-          </a:ln>
-        </p:spPr>
-        <p:txBody>
-          <a:bodyPr/>
-          <a:lstStyle/>
-          <a:p>
-            <a:endParaRPr lang="es-ES_tradnl" dirty="0"/>
-          </a:p>
-        </p:txBody>
-      </p:sp>
-      <p:sp>
-        <p:nvSpPr>
-          <p:cNvPr id="162" name="Google Shape;162;p18">
-            <a:extLst>
-              <a:ext uri="{FF2B5EF4-FFF2-40B4-BE49-F238E27FC236}">
-                <a16:creationId xmlns:a16="http://schemas.microsoft.com/office/drawing/2014/main" id="{C440BC94-E658-41A3-E378-7422709BA398}"/>
-              </a:ext>
-            </a:extLst>
-          </p:cNvPr>
-          <p:cNvSpPr/>
-          <p:nvPr/>
-        </p:nvSpPr>
-        <p:spPr>
-          <a:xfrm>
-            <a:off x="5482809" y="8188196"/>
-            <a:ext cx="2156379" cy="1936821"/>
-          </a:xfrm>
-          <a:custGeom>
-            <a:avLst/>
-            <a:gdLst/>
-            <a:ahLst/>
-            <a:cxnLst/>
-            <a:rect l="l" t="t" r="r" b="b"/>
-            <a:pathLst>
-              <a:path w="4469180" h="4014136" extrusionOk="0">
-                <a:moveTo>
-                  <a:pt x="0" y="0"/>
-                </a:moveTo>
-                <a:lnTo>
-                  <a:pt x="4469180" y="0"/>
-                </a:lnTo>
-                <a:lnTo>
-                  <a:pt x="4469180" y="4014136"/>
-                </a:lnTo>
-                <a:lnTo>
-                  <a:pt x="0" y="4014136"/>
-                </a:lnTo>
-                <a:lnTo>
-                  <a:pt x="0" y="0"/>
-                </a:lnTo>
-                <a:close/>
-              </a:path>
-            </a:pathLst>
-          </a:custGeom>
-          <a:blipFill rotWithShape="1">
-            <a:blip r:embed="rId4">
-              <a:alphaModFix/>
-            </a:blip>
-            <a:stretch>
-              <a:fillRect/>
-            </a:stretch>
-          </a:blipFill>
-          <a:ln>
-            <a:noFill/>
-          </a:ln>
-        </p:spPr>
-        <p:txBody>
-          <a:bodyPr/>
-          <a:lstStyle/>
-          <a:p>
-            <a:endParaRPr lang="es-ES_tradnl" dirty="0"/>
-          </a:p>
-        </p:txBody>
-      </p:sp>
-      <p:sp>
-        <p:nvSpPr>
-          <p:cNvPr id="163" name="Google Shape;163;p18">
-            <a:extLst>
-              <a:ext uri="{FF2B5EF4-FFF2-40B4-BE49-F238E27FC236}">
-                <a16:creationId xmlns:a16="http://schemas.microsoft.com/office/drawing/2014/main" id="{CFCEAEBD-EF5E-82A0-0B56-8E2B61FEEFA3}"/>
-              </a:ext>
-            </a:extLst>
-          </p:cNvPr>
-          <p:cNvSpPr/>
-          <p:nvPr/>
-        </p:nvSpPr>
-        <p:spPr>
-          <a:xfrm>
-            <a:off x="9504429" y="8159082"/>
-            <a:ext cx="2156379" cy="1936821"/>
-          </a:xfrm>
-          <a:custGeom>
-            <a:avLst/>
-            <a:gdLst/>
-            <a:ahLst/>
-            <a:cxnLst/>
-            <a:rect l="l" t="t" r="r" b="b"/>
-            <a:pathLst>
-              <a:path w="4469180" h="4014136" extrusionOk="0">
-                <a:moveTo>
-                  <a:pt x="0" y="0"/>
-                </a:moveTo>
-                <a:lnTo>
-                  <a:pt x="4469180" y="0"/>
-                </a:lnTo>
-                <a:lnTo>
-                  <a:pt x="4469180" y="4014136"/>
-                </a:lnTo>
-                <a:lnTo>
-                  <a:pt x="0" y="4014136"/>
-                </a:lnTo>
-                <a:lnTo>
-                  <a:pt x="0" y="0"/>
-                </a:lnTo>
-                <a:close/>
-              </a:path>
-            </a:pathLst>
-          </a:custGeom>
-          <a:blipFill rotWithShape="1">
-            <a:blip r:embed="rId4">
-              <a:alphaModFix/>
-            </a:blip>
-            <a:stretch>
-              <a:fillRect/>
-            </a:stretch>
-          </a:blipFill>
-          <a:ln>
-            <a:noFill/>
-          </a:ln>
-        </p:spPr>
-        <p:txBody>
-          <a:bodyPr/>
-          <a:lstStyle/>
-          <a:p>
-            <a:endParaRPr lang="es-ES_tradnl" dirty="0"/>
-          </a:p>
-        </p:txBody>
-      </p:sp>
-      <p:sp>
-        <p:nvSpPr>
-          <p:cNvPr id="167" name="Google Shape;167;p18">
-            <a:extLst>
-              <a:ext uri="{FF2B5EF4-FFF2-40B4-BE49-F238E27FC236}">
-                <a16:creationId xmlns:a16="http://schemas.microsoft.com/office/drawing/2014/main" id="{31C7F14F-C1D2-243D-7A0B-9520357B6CFB}"/>
-              </a:ext>
-            </a:extLst>
-          </p:cNvPr>
-          <p:cNvSpPr txBox="1"/>
-          <p:nvPr/>
-        </p:nvSpPr>
-        <p:spPr>
-          <a:xfrm>
-            <a:off x="5794045" y="553200"/>
-            <a:ext cx="6022200" cy="670505"/>
-          </a:xfrm>
-          <a:prstGeom prst="rect">
-            <a:avLst/>
-          </a:prstGeom>
-          <a:noFill/>
-          <a:ln>
-            <a:noFill/>
-          </a:ln>
-        </p:spPr>
-        <p:txBody>
-          <a:bodyPr spcFirstLastPara="1" wrap="square" lIns="0" tIns="0" rIns="0" bIns="0" anchor="t" anchorCtr="0">
-            <a:spAutoFit/>
-          </a:bodyPr>
-          <a:lstStyle/>
-          <a:p>
-            <a:pPr marL="0" marR="0" lvl="0" indent="0" algn="ctr" rtl="0">
-              <a:lnSpc>
-                <a:spcPct val="121055"/>
-              </a:lnSpc>
-              <a:spcBef>
-                <a:spcPts val="0"/>
-              </a:spcBef>
-              <a:spcAft>
-                <a:spcPts val="0"/>
-              </a:spcAft>
-              <a:buNone/>
-            </a:pPr>
-            <a:r>
-              <a:rPr lang="es-ES_tradnl" sz="3601" b="1" dirty="0">
-                <a:solidFill>
-                  <a:srgbClr val="004AAD"/>
-                </a:solidFill>
-                <a:latin typeface="Poppins"/>
-                <a:cs typeface="Poppins"/>
-                <a:sym typeface="Poppins"/>
-              </a:rPr>
-              <a:t>Identificación de perfiles</a:t>
-            </a:r>
-            <a:endParaRPr lang="es-ES_tradnl" dirty="0"/>
-          </a:p>
-        </p:txBody>
-      </p:sp>
-      <p:sp>
-        <p:nvSpPr>
-          <p:cNvPr id="11" name="Rectangle 10">
-            <a:extLst>
-              <a:ext uri="{FF2B5EF4-FFF2-40B4-BE49-F238E27FC236}">
-                <a16:creationId xmlns:a16="http://schemas.microsoft.com/office/drawing/2014/main" id="{1AF05D9C-A020-4BB4-E559-6C31990412CF}"/>
-              </a:ext>
-            </a:extLst>
-          </p:cNvPr>
-          <p:cNvSpPr/>
-          <p:nvPr/>
-        </p:nvSpPr>
-        <p:spPr>
-          <a:xfrm>
-            <a:off x="7177595" y="1772428"/>
-            <a:ext cx="3255100" cy="1106906"/>
-          </a:xfrm>
-          <a:prstGeom prst="rect">
-            <a:avLst/>
-          </a:prstGeom>
-          <a:solidFill>
-            <a:schemeClr val="bg1"/>
-          </a:solidFill>
-          <a:ln>
-            <a:solidFill>
-              <a:schemeClr val="bg2"/>
-            </a:solidFill>
-          </a:ln>
-        </p:spPr>
-        <p:style>
-          <a:lnRef idx="2">
-            <a:schemeClr val="accent1">
-              <a:shade val="50000"/>
-            </a:schemeClr>
-          </a:lnRef>
-          <a:fillRef idx="1">
-            <a:schemeClr val="accent1"/>
-          </a:fillRef>
-          <a:effectRef idx="0">
-            <a:schemeClr val="accent1"/>
-          </a:effectRef>
-          <a:fontRef idx="minor">
-            <a:schemeClr val="lt1"/>
-          </a:fontRef>
-        </p:style>
-        <p:txBody>
-          <a:bodyPr rtlCol="0" anchor="ctr"/>
-          <a:lstStyle/>
-          <a:p>
-            <a:pPr algn="ctr"/>
-            <a:r>
-              <a:rPr lang="es-ES_tradnl" sz="2400" b="1" dirty="0">
-                <a:solidFill>
-                  <a:schemeClr val="bg2"/>
-                </a:solidFill>
-              </a:rPr>
-              <a:t>PERFIL ÓPTIMO</a:t>
-            </a:r>
-          </a:p>
-        </p:txBody>
-      </p:sp>
-      <p:sp>
-        <p:nvSpPr>
-          <p:cNvPr id="13" name="Rectangle 12">
-            <a:extLst>
-              <a:ext uri="{FF2B5EF4-FFF2-40B4-BE49-F238E27FC236}">
-                <a16:creationId xmlns:a16="http://schemas.microsoft.com/office/drawing/2014/main" id="{0EA71E87-3B90-32C4-7C27-58EDCC2D761B}"/>
-              </a:ext>
-            </a:extLst>
-          </p:cNvPr>
-          <p:cNvSpPr/>
-          <p:nvPr/>
-        </p:nvSpPr>
-        <p:spPr>
-          <a:xfrm>
-            <a:off x="1213913" y="2362717"/>
-            <a:ext cx="3255100" cy="1106906"/>
-          </a:xfrm>
-          <a:prstGeom prst="rect">
-            <a:avLst/>
-          </a:prstGeom>
-          <a:solidFill>
-            <a:schemeClr val="bg1"/>
-          </a:solidFill>
-          <a:ln>
-            <a:solidFill>
-              <a:schemeClr val="bg2"/>
-            </a:solidFill>
-          </a:ln>
-        </p:spPr>
-        <p:style>
-          <a:lnRef idx="2">
-            <a:schemeClr val="accent1">
-              <a:shade val="50000"/>
-            </a:schemeClr>
-          </a:lnRef>
-          <a:fillRef idx="1">
-            <a:schemeClr val="accent1"/>
-          </a:fillRef>
-          <a:effectRef idx="0">
-            <a:schemeClr val="accent1"/>
-          </a:effectRef>
-          <a:fontRef idx="minor">
-            <a:schemeClr val="lt1"/>
-          </a:fontRef>
-        </p:style>
-        <p:txBody>
-          <a:bodyPr rtlCol="0" anchor="ctr"/>
-          <a:lstStyle/>
-          <a:p>
-            <a:pPr algn="ctr"/>
-            <a:r>
-              <a:rPr lang="es-ES_tradnl" sz="2400" b="1" dirty="0">
-                <a:solidFill>
-                  <a:schemeClr val="bg2"/>
-                </a:solidFill>
-              </a:rPr>
-              <a:t>PERFIL CRÍTICO</a:t>
-            </a:r>
-          </a:p>
-        </p:txBody>
-      </p:sp>
-      <p:sp>
-        <p:nvSpPr>
-          <p:cNvPr id="14" name="Rectangle 13">
-            <a:extLst>
-              <a:ext uri="{FF2B5EF4-FFF2-40B4-BE49-F238E27FC236}">
-                <a16:creationId xmlns:a16="http://schemas.microsoft.com/office/drawing/2014/main" id="{302D5BD7-5072-A712-E89D-315E1246CCD2}"/>
-              </a:ext>
-            </a:extLst>
-          </p:cNvPr>
-          <p:cNvSpPr/>
-          <p:nvPr/>
-        </p:nvSpPr>
-        <p:spPr>
-          <a:xfrm>
-            <a:off x="13262477" y="2335213"/>
-            <a:ext cx="3255100" cy="1106906"/>
-          </a:xfrm>
-          <a:prstGeom prst="rect">
-            <a:avLst/>
-          </a:prstGeom>
-          <a:solidFill>
-            <a:schemeClr val="bg1"/>
-          </a:solidFill>
-          <a:ln>
-            <a:solidFill>
-              <a:schemeClr val="bg2"/>
-            </a:solidFill>
-          </a:ln>
-        </p:spPr>
-        <p:style>
-          <a:lnRef idx="2">
-            <a:schemeClr val="accent1">
-              <a:shade val="50000"/>
-            </a:schemeClr>
-          </a:lnRef>
-          <a:fillRef idx="1">
-            <a:schemeClr val="accent1"/>
-          </a:fillRef>
-          <a:effectRef idx="0">
-            <a:schemeClr val="accent1"/>
-          </a:effectRef>
-          <a:fontRef idx="minor">
-            <a:schemeClr val="lt1"/>
-          </a:fontRef>
-        </p:style>
-        <p:txBody>
-          <a:bodyPr rtlCol="0" anchor="ctr"/>
-          <a:lstStyle/>
-          <a:p>
-            <a:pPr algn="ctr"/>
-            <a:r>
-              <a:rPr lang="es-ES_tradnl" sz="2400" b="1" dirty="0">
-                <a:solidFill>
-                  <a:schemeClr val="bg2"/>
-                </a:solidFill>
-              </a:rPr>
-              <a:t>PERFIL SATURADO</a:t>
-            </a:r>
-          </a:p>
-        </p:txBody>
-      </p:sp>
-      <p:sp>
-        <p:nvSpPr>
-          <p:cNvPr id="15" name="Rectangle 14">
-            <a:extLst>
-              <a:ext uri="{FF2B5EF4-FFF2-40B4-BE49-F238E27FC236}">
-                <a16:creationId xmlns:a16="http://schemas.microsoft.com/office/drawing/2014/main" id="{65FA6F57-08F9-AB33-9203-BBB34C284455}"/>
-              </a:ext>
-            </a:extLst>
-          </p:cNvPr>
-          <p:cNvSpPr/>
-          <p:nvPr/>
-        </p:nvSpPr>
-        <p:spPr>
-          <a:xfrm>
-            <a:off x="3083700" y="4226329"/>
-            <a:ext cx="2156379" cy="809011"/>
-          </a:xfrm>
-          <a:prstGeom prst="rect">
-            <a:avLst/>
-          </a:prstGeom>
-          <a:solidFill>
-            <a:schemeClr val="bg1"/>
-          </a:solidFill>
-          <a:ln>
-            <a:solidFill>
-              <a:schemeClr val="bg2"/>
-            </a:solidFill>
-          </a:ln>
-        </p:spPr>
-        <p:style>
-          <a:lnRef idx="2">
-            <a:schemeClr val="accent1">
-              <a:shade val="50000"/>
-            </a:schemeClr>
-          </a:lnRef>
-          <a:fillRef idx="1">
-            <a:schemeClr val="accent1"/>
-          </a:fillRef>
-          <a:effectRef idx="0">
-            <a:schemeClr val="accent1"/>
-          </a:effectRef>
-          <a:fontRef idx="minor">
-            <a:schemeClr val="lt1"/>
-          </a:fontRef>
-        </p:style>
-        <p:txBody>
-          <a:bodyPr rtlCol="0" anchor="ctr"/>
-          <a:lstStyle/>
-          <a:p>
-            <a:pPr algn="ctr"/>
-            <a:r>
-              <a:rPr lang="es-ES_tradnl" sz="2400" b="1" dirty="0">
-                <a:solidFill>
-                  <a:schemeClr val="bg2"/>
-                </a:solidFill>
-              </a:rPr>
-              <a:t>DESEMPEÑO</a:t>
-            </a:r>
-          </a:p>
-        </p:txBody>
-      </p:sp>
-      <p:grpSp>
-        <p:nvGrpSpPr>
-          <p:cNvPr id="164" name="Google Shape;164;p18">
-            <a:extLst>
-              <a:ext uri="{FF2B5EF4-FFF2-40B4-BE49-F238E27FC236}">
-                <a16:creationId xmlns:a16="http://schemas.microsoft.com/office/drawing/2014/main" id="{5C8F871A-0C94-7ACA-9EC2-2CF655A37500}"/>
-              </a:ext>
-            </a:extLst>
-          </p:cNvPr>
-          <p:cNvGrpSpPr/>
-          <p:nvPr/>
-        </p:nvGrpSpPr>
-        <p:grpSpPr>
-          <a:xfrm>
-            <a:off x="-118494" y="0"/>
-            <a:ext cx="2163413" cy="1886345"/>
-            <a:chOff x="12784175" y="3675030"/>
-            <a:chExt cx="2163413" cy="1886345"/>
-          </a:xfrm>
-        </p:grpSpPr>
-        <p:sp>
-          <p:nvSpPr>
-            <p:cNvPr id="165" name="Google Shape;165;p18">
-              <a:extLst>
-                <a:ext uri="{FF2B5EF4-FFF2-40B4-BE49-F238E27FC236}">
-                  <a16:creationId xmlns:a16="http://schemas.microsoft.com/office/drawing/2014/main" id="{0F8A5375-035A-B275-BEA1-4DAECA3886FE}"/>
-                </a:ext>
-              </a:extLst>
-            </p:cNvPr>
-            <p:cNvSpPr txBox="1"/>
-            <p:nvPr/>
-          </p:nvSpPr>
-          <p:spPr>
-            <a:xfrm rot="1830973">
-              <a:off x="12805773" y="4425496"/>
-              <a:ext cx="2081405" cy="652657"/>
-            </a:xfrm>
-            <a:prstGeom prst="rect">
-              <a:avLst/>
-            </a:prstGeom>
-            <a:noFill/>
-            <a:ln>
-              <a:noFill/>
-            </a:ln>
-          </p:spPr>
-          <p:txBody>
-            <a:bodyPr spcFirstLastPara="1" wrap="square" lIns="91425" tIns="91425" rIns="91425" bIns="91425" anchor="t" anchorCtr="0">
-              <a:noAutofit/>
-            </a:bodyPr>
-            <a:lstStyle/>
-            <a:p>
-              <a:pPr marL="0" lvl="0" indent="0" algn="l" rtl="0">
-                <a:spcBef>
-                  <a:spcPts val="0"/>
-                </a:spcBef>
-                <a:spcAft>
-                  <a:spcPts val="0"/>
-                </a:spcAft>
-                <a:buNone/>
-              </a:pPr>
-              <a:r>
-                <a:rPr lang="es-ES_tradnl" sz="2300" b="1" i="1" dirty="0">
-                  <a:solidFill>
-                    <a:srgbClr val="E69138"/>
-                  </a:solidFill>
-                  <a:latin typeface="Calibri"/>
-                  <a:ea typeface="Calibri"/>
-                  <a:cs typeface="Calibri"/>
-                  <a:sym typeface="Calibri"/>
-                </a:rPr>
-                <a:t>RAPID EXPRESS </a:t>
-              </a:r>
-            </a:p>
-          </p:txBody>
-        </p:sp>
-        <p:sp>
-          <p:nvSpPr>
-            <p:cNvPr id="166" name="Google Shape;166;p18">
-              <a:extLst>
-                <a:ext uri="{FF2B5EF4-FFF2-40B4-BE49-F238E27FC236}">
-                  <a16:creationId xmlns:a16="http://schemas.microsoft.com/office/drawing/2014/main" id="{5E8E3819-634B-8278-8583-C3C352EA55E4}"/>
-                </a:ext>
-              </a:extLst>
-            </p:cNvPr>
-            <p:cNvSpPr/>
-            <p:nvPr/>
-          </p:nvSpPr>
-          <p:spPr>
-            <a:xfrm>
-              <a:off x="13335203" y="3675030"/>
-              <a:ext cx="1612385" cy="1275250"/>
-            </a:xfrm>
-            <a:custGeom>
-              <a:avLst/>
-              <a:gdLst/>
-              <a:ahLst/>
-              <a:cxnLst/>
-              <a:rect l="l" t="t" r="r" b="b"/>
-              <a:pathLst>
-                <a:path w="1612385" h="1275250" extrusionOk="0">
-                  <a:moveTo>
-                    <a:pt x="0" y="0"/>
-                  </a:moveTo>
-                  <a:lnTo>
-                    <a:pt x="1612384" y="0"/>
-                  </a:lnTo>
-                  <a:lnTo>
-                    <a:pt x="1612384" y="1275249"/>
-                  </a:lnTo>
-                  <a:lnTo>
-                    <a:pt x="0" y="1275249"/>
-                  </a:lnTo>
-                  <a:lnTo>
-                    <a:pt x="0" y="0"/>
-                  </a:lnTo>
-                  <a:close/>
-                </a:path>
-              </a:pathLst>
-            </a:custGeom>
-            <a:blipFill rotWithShape="1">
-              <a:blip r:embed="rId3">
-                <a:alphaModFix/>
-              </a:blip>
-              <a:stretch>
-                <a:fillRect/>
-              </a:stretch>
-            </a:blipFill>
-            <a:ln>
-              <a:noFill/>
-            </a:ln>
-          </p:spPr>
-          <p:txBody>
-            <a:bodyPr/>
-            <a:lstStyle/>
-            <a:p>
-              <a:endParaRPr lang="es-ES_tradnl" dirty="0"/>
-            </a:p>
-          </p:txBody>
-        </p:sp>
-      </p:grpSp>
-      <p:sp>
-        <p:nvSpPr>
-          <p:cNvPr id="2" name="Rectangle 14">
-            <a:extLst>
-              <a:ext uri="{FF2B5EF4-FFF2-40B4-BE49-F238E27FC236}">
-                <a16:creationId xmlns:a16="http://schemas.microsoft.com/office/drawing/2014/main" id="{2C4573BD-4062-5928-8D40-C2F880FE60B9}"/>
-              </a:ext>
-            </a:extLst>
-          </p:cNvPr>
-          <p:cNvSpPr/>
-          <p:nvPr/>
-        </p:nvSpPr>
-        <p:spPr>
-          <a:xfrm>
-            <a:off x="845798" y="4246407"/>
-            <a:ext cx="1894041" cy="788933"/>
-          </a:xfrm>
-          <a:prstGeom prst="rect">
-            <a:avLst/>
-          </a:prstGeom>
-          <a:solidFill>
-            <a:schemeClr val="bg1"/>
-          </a:solidFill>
-          <a:ln>
-            <a:solidFill>
-              <a:schemeClr val="bg2"/>
-            </a:solidFill>
-          </a:ln>
-        </p:spPr>
-        <p:style>
-          <a:lnRef idx="2">
-            <a:schemeClr val="accent1">
-              <a:shade val="50000"/>
-            </a:schemeClr>
-          </a:lnRef>
-          <a:fillRef idx="1">
-            <a:schemeClr val="accent1"/>
-          </a:fillRef>
-          <a:effectRef idx="0">
-            <a:schemeClr val="accent1"/>
-          </a:effectRef>
-          <a:fontRef idx="minor">
-            <a:schemeClr val="lt1"/>
-          </a:fontRef>
-        </p:style>
-        <p:txBody>
-          <a:bodyPr rtlCol="0" anchor="ctr"/>
-          <a:lstStyle/>
-          <a:p>
-            <a:pPr algn="ctr"/>
-            <a:r>
-              <a:rPr lang="es-ES_tradnl" sz="2400" b="1" dirty="0">
-                <a:solidFill>
-                  <a:schemeClr val="bg2"/>
-                </a:solidFill>
-              </a:rPr>
-              <a:t>CARGA DE TRABAJO</a:t>
-            </a:r>
-          </a:p>
-        </p:txBody>
-      </p:sp>
-      <p:sp>
-        <p:nvSpPr>
-          <p:cNvPr id="3" name="Rectangle 14">
-            <a:extLst>
-              <a:ext uri="{FF2B5EF4-FFF2-40B4-BE49-F238E27FC236}">
-                <a16:creationId xmlns:a16="http://schemas.microsoft.com/office/drawing/2014/main" id="{D73DF1B4-7E07-1FFB-F523-7DC8DC5EECDF}"/>
-              </a:ext>
-            </a:extLst>
-          </p:cNvPr>
-          <p:cNvSpPr/>
-          <p:nvPr/>
-        </p:nvSpPr>
-        <p:spPr>
-          <a:xfrm>
-            <a:off x="9021997" y="3616080"/>
-            <a:ext cx="2156379" cy="809011"/>
-          </a:xfrm>
-          <a:prstGeom prst="rect">
-            <a:avLst/>
-          </a:prstGeom>
-          <a:solidFill>
-            <a:schemeClr val="bg1"/>
-          </a:solidFill>
-          <a:ln>
-            <a:solidFill>
-              <a:schemeClr val="bg2"/>
-            </a:solidFill>
-          </a:ln>
-        </p:spPr>
-        <p:style>
-          <a:lnRef idx="2">
-            <a:schemeClr val="accent1">
-              <a:shade val="50000"/>
-            </a:schemeClr>
-          </a:lnRef>
-          <a:fillRef idx="1">
-            <a:schemeClr val="accent1"/>
-          </a:fillRef>
-          <a:effectRef idx="0">
-            <a:schemeClr val="accent1"/>
-          </a:effectRef>
-          <a:fontRef idx="minor">
-            <a:schemeClr val="lt1"/>
-          </a:fontRef>
-        </p:style>
-        <p:txBody>
-          <a:bodyPr rtlCol="0" anchor="ctr"/>
-          <a:lstStyle/>
-          <a:p>
-            <a:pPr algn="ctr"/>
-            <a:r>
-              <a:rPr lang="es-ES_tradnl" sz="2400" b="1" dirty="0">
-                <a:solidFill>
-                  <a:schemeClr val="bg2"/>
-                </a:solidFill>
-              </a:rPr>
-              <a:t>DESEMPEÑO</a:t>
-            </a:r>
-          </a:p>
-        </p:txBody>
-      </p:sp>
-      <p:sp>
-        <p:nvSpPr>
-          <p:cNvPr id="4" name="Rectangle 14">
-            <a:extLst>
-              <a:ext uri="{FF2B5EF4-FFF2-40B4-BE49-F238E27FC236}">
-                <a16:creationId xmlns:a16="http://schemas.microsoft.com/office/drawing/2014/main" id="{5E7CDE07-09E1-9659-2686-57651D05F2A7}"/>
-              </a:ext>
-            </a:extLst>
-          </p:cNvPr>
-          <p:cNvSpPr/>
-          <p:nvPr/>
-        </p:nvSpPr>
-        <p:spPr>
-          <a:xfrm>
-            <a:off x="6692170" y="3626941"/>
-            <a:ext cx="1894041" cy="788933"/>
-          </a:xfrm>
-          <a:prstGeom prst="rect">
-            <a:avLst/>
-          </a:prstGeom>
-          <a:solidFill>
-            <a:schemeClr val="bg1"/>
-          </a:solidFill>
-          <a:ln>
-            <a:solidFill>
-              <a:schemeClr val="bg2"/>
-            </a:solidFill>
-          </a:ln>
-        </p:spPr>
-        <p:style>
-          <a:lnRef idx="2">
-            <a:schemeClr val="accent1">
-              <a:shade val="50000"/>
-            </a:schemeClr>
-          </a:lnRef>
-          <a:fillRef idx="1">
-            <a:schemeClr val="accent1"/>
-          </a:fillRef>
-          <a:effectRef idx="0">
-            <a:schemeClr val="accent1"/>
-          </a:effectRef>
-          <a:fontRef idx="minor">
-            <a:schemeClr val="lt1"/>
-          </a:fontRef>
-        </p:style>
-        <p:txBody>
-          <a:bodyPr rtlCol="0" anchor="ctr"/>
-          <a:lstStyle/>
-          <a:p>
-            <a:pPr algn="ctr"/>
-            <a:r>
-              <a:rPr lang="es-ES_tradnl" sz="2400" b="1" dirty="0">
-                <a:solidFill>
-                  <a:schemeClr val="bg2"/>
-                </a:solidFill>
-              </a:rPr>
-              <a:t>CARGA DE TRABAJO</a:t>
-            </a:r>
-          </a:p>
-        </p:txBody>
-      </p:sp>
-      <p:sp>
-        <p:nvSpPr>
-          <p:cNvPr id="5" name="Rectangle 14">
-            <a:extLst>
-              <a:ext uri="{FF2B5EF4-FFF2-40B4-BE49-F238E27FC236}">
-                <a16:creationId xmlns:a16="http://schemas.microsoft.com/office/drawing/2014/main" id="{7B9DE141-DEAD-5D5C-77C3-4E9EF984166B}"/>
-              </a:ext>
-            </a:extLst>
-          </p:cNvPr>
-          <p:cNvSpPr/>
-          <p:nvPr/>
-        </p:nvSpPr>
-        <p:spPr>
-          <a:xfrm>
-            <a:off x="15076684" y="4226329"/>
-            <a:ext cx="2156379" cy="809011"/>
-          </a:xfrm>
-          <a:prstGeom prst="rect">
-            <a:avLst/>
-          </a:prstGeom>
-          <a:solidFill>
-            <a:schemeClr val="bg1"/>
-          </a:solidFill>
-          <a:ln>
-            <a:solidFill>
-              <a:schemeClr val="bg2"/>
-            </a:solidFill>
-          </a:ln>
-        </p:spPr>
-        <p:style>
-          <a:lnRef idx="2">
-            <a:schemeClr val="accent1">
-              <a:shade val="50000"/>
-            </a:schemeClr>
-          </a:lnRef>
-          <a:fillRef idx="1">
-            <a:schemeClr val="accent1"/>
-          </a:fillRef>
-          <a:effectRef idx="0">
-            <a:schemeClr val="accent1"/>
-          </a:effectRef>
-          <a:fontRef idx="minor">
-            <a:schemeClr val="lt1"/>
-          </a:fontRef>
-        </p:style>
-        <p:txBody>
-          <a:bodyPr rtlCol="0" anchor="ctr"/>
-          <a:lstStyle/>
-          <a:p>
-            <a:pPr algn="ctr"/>
-            <a:r>
-              <a:rPr lang="es-ES_tradnl" sz="2400" b="1" dirty="0">
-                <a:solidFill>
-                  <a:schemeClr val="bg2"/>
-                </a:solidFill>
-              </a:rPr>
-              <a:t>DESEMPEÑO</a:t>
-            </a:r>
-          </a:p>
-        </p:txBody>
-      </p:sp>
-      <p:sp>
-        <p:nvSpPr>
-          <p:cNvPr id="6" name="Rectangle 14">
-            <a:extLst>
-              <a:ext uri="{FF2B5EF4-FFF2-40B4-BE49-F238E27FC236}">
-                <a16:creationId xmlns:a16="http://schemas.microsoft.com/office/drawing/2014/main" id="{AAA1FC9E-85E7-5CC1-7D4C-008E402DA12E}"/>
-              </a:ext>
-            </a:extLst>
-          </p:cNvPr>
-          <p:cNvSpPr/>
-          <p:nvPr/>
-        </p:nvSpPr>
-        <p:spPr>
-          <a:xfrm>
-            <a:off x="12872043" y="4246407"/>
-            <a:ext cx="1894041" cy="788933"/>
-          </a:xfrm>
-          <a:prstGeom prst="rect">
-            <a:avLst/>
-          </a:prstGeom>
-          <a:solidFill>
-            <a:schemeClr val="bg1"/>
-          </a:solidFill>
-          <a:ln>
-            <a:solidFill>
-              <a:schemeClr val="bg2"/>
-            </a:solidFill>
-          </a:ln>
-        </p:spPr>
-        <p:style>
-          <a:lnRef idx="2">
-            <a:schemeClr val="accent1">
-              <a:shade val="50000"/>
-            </a:schemeClr>
-          </a:lnRef>
-          <a:fillRef idx="1">
-            <a:schemeClr val="accent1"/>
-          </a:fillRef>
-          <a:effectRef idx="0">
-            <a:schemeClr val="accent1"/>
-          </a:effectRef>
-          <a:fontRef idx="minor">
-            <a:schemeClr val="lt1"/>
-          </a:fontRef>
-        </p:style>
-        <p:txBody>
-          <a:bodyPr rtlCol="0" anchor="ctr"/>
-          <a:lstStyle/>
-          <a:p>
-            <a:pPr algn="ctr"/>
-            <a:r>
-              <a:rPr lang="es-ES_tradnl" sz="2400" b="1" dirty="0">
-                <a:solidFill>
-                  <a:schemeClr val="bg2"/>
-                </a:solidFill>
-              </a:rPr>
-              <a:t>CARGA DE TRABAJO</a:t>
-            </a:r>
-          </a:p>
-        </p:txBody>
-      </p:sp>
-      <p:sp>
-        <p:nvSpPr>
-          <p:cNvPr id="7" name="Rectangle 14">
-            <a:extLst>
-              <a:ext uri="{FF2B5EF4-FFF2-40B4-BE49-F238E27FC236}">
-                <a16:creationId xmlns:a16="http://schemas.microsoft.com/office/drawing/2014/main" id="{1A371D18-CFF7-7C81-AB14-A754411D14F9}"/>
-              </a:ext>
-            </a:extLst>
-          </p:cNvPr>
-          <p:cNvSpPr/>
-          <p:nvPr/>
-        </p:nvSpPr>
-        <p:spPr>
-          <a:xfrm>
-            <a:off x="3161026" y="5891203"/>
-            <a:ext cx="1569433" cy="751127"/>
-          </a:xfrm>
-          <a:prstGeom prst="rect">
-            <a:avLst/>
-          </a:prstGeom>
-          <a:solidFill>
-            <a:schemeClr val="bg1"/>
-          </a:solidFill>
-          <a:ln>
-            <a:solidFill>
-              <a:schemeClr val="bg2"/>
-            </a:solidFill>
-          </a:ln>
-        </p:spPr>
-        <p:style>
-          <a:lnRef idx="2">
-            <a:schemeClr val="accent1">
-              <a:shade val="50000"/>
-            </a:schemeClr>
-          </a:lnRef>
-          <a:fillRef idx="1">
-            <a:schemeClr val="accent1"/>
-          </a:fillRef>
-          <a:effectRef idx="0">
-            <a:schemeClr val="accent1"/>
-          </a:effectRef>
-          <a:fontRef idx="minor">
-            <a:schemeClr val="lt1"/>
-          </a:fontRef>
-        </p:style>
-        <p:txBody>
-          <a:bodyPr rtlCol="0" anchor="ctr"/>
-          <a:lstStyle/>
-          <a:p>
-            <a:pPr algn="ctr"/>
-            <a:r>
-              <a:rPr lang="es-ES_tradnl" sz="2400" b="1" dirty="0">
-                <a:solidFill>
-                  <a:schemeClr val="bg2"/>
-                </a:solidFill>
-              </a:rPr>
-              <a:t>81%</a:t>
-            </a:r>
-          </a:p>
-        </p:txBody>
-      </p:sp>
-      <p:sp>
-        <p:nvSpPr>
-          <p:cNvPr id="8" name="Rectangle 14">
-            <a:extLst>
-              <a:ext uri="{FF2B5EF4-FFF2-40B4-BE49-F238E27FC236}">
-                <a16:creationId xmlns:a16="http://schemas.microsoft.com/office/drawing/2014/main" id="{FFF26C2C-4A64-4E35-607C-B6984CE1B315}"/>
-              </a:ext>
-            </a:extLst>
-          </p:cNvPr>
-          <p:cNvSpPr/>
-          <p:nvPr/>
-        </p:nvSpPr>
-        <p:spPr>
-          <a:xfrm>
-            <a:off x="845798" y="5888343"/>
-            <a:ext cx="1894041" cy="788933"/>
-          </a:xfrm>
-          <a:prstGeom prst="rect">
-            <a:avLst/>
-          </a:prstGeom>
-          <a:solidFill>
-            <a:schemeClr val="bg1"/>
-          </a:solidFill>
-          <a:ln>
-            <a:solidFill>
-              <a:schemeClr val="bg2"/>
-            </a:solidFill>
-          </a:ln>
-        </p:spPr>
-        <p:style>
-          <a:lnRef idx="2">
-            <a:schemeClr val="accent1">
-              <a:shade val="50000"/>
-            </a:schemeClr>
-          </a:lnRef>
-          <a:fillRef idx="1">
-            <a:schemeClr val="accent1"/>
-          </a:fillRef>
-          <a:effectRef idx="0">
-            <a:schemeClr val="accent1"/>
-          </a:effectRef>
-          <a:fontRef idx="minor">
-            <a:schemeClr val="lt1"/>
-          </a:fontRef>
-        </p:style>
-        <p:txBody>
-          <a:bodyPr rtlCol="0" anchor="ctr"/>
-          <a:lstStyle/>
-          <a:p>
-            <a:pPr algn="ctr"/>
-            <a:r>
-              <a:rPr lang="es-ES_tradnl" sz="2400" b="1" dirty="0">
-                <a:solidFill>
-                  <a:schemeClr val="bg2"/>
-                </a:solidFill>
-              </a:rPr>
-              <a:t>289 – 298 paquetes</a:t>
-            </a:r>
-          </a:p>
-        </p:txBody>
-      </p:sp>
-      <p:sp>
-        <p:nvSpPr>
-          <p:cNvPr id="9" name="Rectangle 14">
-            <a:extLst>
-              <a:ext uri="{FF2B5EF4-FFF2-40B4-BE49-F238E27FC236}">
-                <a16:creationId xmlns:a16="http://schemas.microsoft.com/office/drawing/2014/main" id="{2C786784-9FA6-D511-DA8C-F5E16FE4EADD}"/>
-              </a:ext>
-            </a:extLst>
-          </p:cNvPr>
-          <p:cNvSpPr/>
-          <p:nvPr/>
-        </p:nvSpPr>
-        <p:spPr>
-          <a:xfrm>
-            <a:off x="9021996" y="5143501"/>
-            <a:ext cx="1569433" cy="760440"/>
-          </a:xfrm>
-          <a:prstGeom prst="rect">
-            <a:avLst/>
-          </a:prstGeom>
-          <a:solidFill>
-            <a:schemeClr val="bg1"/>
-          </a:solidFill>
-          <a:ln>
-            <a:solidFill>
-              <a:schemeClr val="bg2"/>
-            </a:solidFill>
-          </a:ln>
-        </p:spPr>
-        <p:style>
-          <a:lnRef idx="2">
-            <a:schemeClr val="accent1">
-              <a:shade val="50000"/>
-            </a:schemeClr>
-          </a:lnRef>
-          <a:fillRef idx="1">
-            <a:schemeClr val="accent1"/>
-          </a:fillRef>
-          <a:effectRef idx="0">
-            <a:schemeClr val="accent1"/>
-          </a:effectRef>
-          <a:fontRef idx="minor">
-            <a:schemeClr val="lt1"/>
-          </a:fontRef>
-        </p:style>
-        <p:txBody>
-          <a:bodyPr rtlCol="0" anchor="ctr"/>
-          <a:lstStyle/>
-          <a:p>
-            <a:pPr algn="ctr"/>
-            <a:r>
-              <a:rPr lang="es-ES_tradnl" sz="2400" b="1" dirty="0">
-                <a:solidFill>
-                  <a:schemeClr val="bg2"/>
-                </a:solidFill>
-              </a:rPr>
-              <a:t>98.7%</a:t>
-            </a:r>
-          </a:p>
-        </p:txBody>
-      </p:sp>
-      <p:sp>
-        <p:nvSpPr>
-          <p:cNvPr id="10" name="Rectangle 14">
-            <a:extLst>
-              <a:ext uri="{FF2B5EF4-FFF2-40B4-BE49-F238E27FC236}">
-                <a16:creationId xmlns:a16="http://schemas.microsoft.com/office/drawing/2014/main" id="{AA30C771-E6A3-FE09-F41C-D9F5FEC85A32}"/>
-              </a:ext>
-            </a:extLst>
-          </p:cNvPr>
-          <p:cNvSpPr/>
-          <p:nvPr/>
-        </p:nvSpPr>
-        <p:spPr>
-          <a:xfrm>
-            <a:off x="6692169" y="5143500"/>
-            <a:ext cx="1894041" cy="788933"/>
-          </a:xfrm>
-          <a:prstGeom prst="rect">
-            <a:avLst/>
-          </a:prstGeom>
-          <a:solidFill>
-            <a:schemeClr val="bg1"/>
-          </a:solidFill>
-          <a:ln>
-            <a:solidFill>
-              <a:schemeClr val="bg2"/>
-            </a:solidFill>
-          </a:ln>
-        </p:spPr>
-        <p:style>
-          <a:lnRef idx="2">
-            <a:schemeClr val="accent1">
-              <a:shade val="50000"/>
-            </a:schemeClr>
-          </a:lnRef>
-          <a:fillRef idx="1">
-            <a:schemeClr val="accent1"/>
-          </a:fillRef>
-          <a:effectRef idx="0">
-            <a:schemeClr val="accent1"/>
-          </a:effectRef>
-          <a:fontRef idx="minor">
-            <a:schemeClr val="lt1"/>
-          </a:fontRef>
-        </p:style>
-        <p:txBody>
-          <a:bodyPr rtlCol="0" anchor="ctr"/>
-          <a:lstStyle/>
-          <a:p>
-            <a:pPr algn="ctr"/>
-            <a:r>
-              <a:rPr lang="es-ES_tradnl" sz="2400" b="1" dirty="0">
-                <a:solidFill>
-                  <a:schemeClr val="bg2"/>
-                </a:solidFill>
-              </a:rPr>
-              <a:t>237 – 239 paquetes</a:t>
-            </a:r>
-          </a:p>
-        </p:txBody>
-      </p:sp>
-      <p:sp>
-        <p:nvSpPr>
-          <p:cNvPr id="12" name="Rectangle 14">
-            <a:extLst>
-              <a:ext uri="{FF2B5EF4-FFF2-40B4-BE49-F238E27FC236}">
-                <a16:creationId xmlns:a16="http://schemas.microsoft.com/office/drawing/2014/main" id="{BCA2D389-3019-B741-E06C-B5218ED92F60}"/>
-              </a:ext>
-            </a:extLst>
-          </p:cNvPr>
-          <p:cNvSpPr/>
-          <p:nvPr/>
-        </p:nvSpPr>
-        <p:spPr>
-          <a:xfrm>
-            <a:off x="15187271" y="5880162"/>
-            <a:ext cx="1587813" cy="751128"/>
-          </a:xfrm>
-          <a:prstGeom prst="rect">
-            <a:avLst/>
-          </a:prstGeom>
-          <a:solidFill>
-            <a:schemeClr val="bg1"/>
-          </a:solidFill>
-          <a:ln>
-            <a:solidFill>
-              <a:schemeClr val="bg2"/>
-            </a:solidFill>
-          </a:ln>
-        </p:spPr>
-        <p:style>
-          <a:lnRef idx="2">
-            <a:schemeClr val="accent1">
-              <a:shade val="50000"/>
-            </a:schemeClr>
-          </a:lnRef>
-          <a:fillRef idx="1">
-            <a:schemeClr val="accent1"/>
-          </a:fillRef>
-          <a:effectRef idx="0">
-            <a:schemeClr val="accent1"/>
-          </a:effectRef>
-          <a:fontRef idx="minor">
-            <a:schemeClr val="lt1"/>
-          </a:fontRef>
-        </p:style>
-        <p:txBody>
-          <a:bodyPr rtlCol="0" anchor="ctr"/>
-          <a:lstStyle/>
-          <a:p>
-            <a:pPr algn="ctr"/>
-            <a:r>
-              <a:rPr lang="es-ES_tradnl" sz="2400" b="1" dirty="0">
-                <a:solidFill>
-                  <a:schemeClr val="bg2"/>
-                </a:solidFill>
-              </a:rPr>
-              <a:t>95.5%</a:t>
-            </a:r>
-          </a:p>
-        </p:txBody>
-      </p:sp>
-      <p:sp>
-        <p:nvSpPr>
-          <p:cNvPr id="18" name="Rectangle 14">
-            <a:extLst>
-              <a:ext uri="{FF2B5EF4-FFF2-40B4-BE49-F238E27FC236}">
-                <a16:creationId xmlns:a16="http://schemas.microsoft.com/office/drawing/2014/main" id="{07227D69-5E0C-A63D-B5C0-BD57482FD335}"/>
-              </a:ext>
-            </a:extLst>
-          </p:cNvPr>
-          <p:cNvSpPr/>
-          <p:nvPr/>
-        </p:nvSpPr>
-        <p:spPr>
-          <a:xfrm>
-            <a:off x="12872043" y="5890483"/>
-            <a:ext cx="1894041" cy="788933"/>
-          </a:xfrm>
-          <a:prstGeom prst="rect">
-            <a:avLst/>
-          </a:prstGeom>
-          <a:solidFill>
-            <a:schemeClr val="bg1"/>
-          </a:solidFill>
-          <a:ln>
-            <a:solidFill>
-              <a:schemeClr val="bg2"/>
-            </a:solidFill>
-          </a:ln>
-        </p:spPr>
-        <p:style>
-          <a:lnRef idx="2">
-            <a:schemeClr val="accent1">
-              <a:shade val="50000"/>
-            </a:schemeClr>
-          </a:lnRef>
-          <a:fillRef idx="1">
-            <a:schemeClr val="accent1"/>
-          </a:fillRef>
-          <a:effectRef idx="0">
-            <a:schemeClr val="accent1"/>
-          </a:effectRef>
-          <a:fontRef idx="minor">
-            <a:schemeClr val="lt1"/>
-          </a:fontRef>
-        </p:style>
-        <p:txBody>
-          <a:bodyPr rtlCol="0" anchor="ctr"/>
-          <a:lstStyle/>
-          <a:p>
-            <a:pPr algn="ctr"/>
-            <a:r>
-              <a:rPr lang="es-ES_tradnl" sz="2400" b="1" dirty="0">
-                <a:solidFill>
-                  <a:schemeClr val="bg2"/>
-                </a:solidFill>
-              </a:rPr>
-              <a:t>&gt; 304</a:t>
-            </a:r>
-            <a:br>
-              <a:rPr lang="es-ES_tradnl" sz="2400" b="1" dirty="0">
-                <a:solidFill>
-                  <a:schemeClr val="bg2"/>
-                </a:solidFill>
-              </a:rPr>
-            </a:br>
-            <a:r>
-              <a:rPr lang="es-ES_tradnl" sz="2400" b="1" dirty="0">
-                <a:solidFill>
-                  <a:schemeClr val="bg2"/>
-                </a:solidFill>
-              </a:rPr>
-              <a:t>paquetes</a:t>
-            </a:r>
-          </a:p>
-        </p:txBody>
-      </p:sp>
-      <p:sp>
-        <p:nvSpPr>
-          <p:cNvPr id="19" name="Flecha abajo 18">
-            <a:extLst>
-              <a:ext uri="{FF2B5EF4-FFF2-40B4-BE49-F238E27FC236}">
-                <a16:creationId xmlns:a16="http://schemas.microsoft.com/office/drawing/2014/main" id="{06892AA4-0E84-0998-2A87-8514C668B258}"/>
-              </a:ext>
-            </a:extLst>
-          </p:cNvPr>
-          <p:cNvSpPr/>
-          <p:nvPr/>
-        </p:nvSpPr>
-        <p:spPr>
-          <a:xfrm>
-            <a:off x="7639189" y="2947681"/>
-            <a:ext cx="349135" cy="590931"/>
-          </a:xfrm>
-          <a:prstGeom prst="downArrow">
-            <a:avLst/>
-          </a:prstGeom>
-          <a:solidFill>
-            <a:srgbClr val="00B050"/>
-          </a:solidFill>
-          <a:ln>
-            <a:solidFill>
-              <a:schemeClr val="accent3">
-                <a:lumMod val="75000"/>
-              </a:schemeClr>
-            </a:solidFill>
-          </a:ln>
-        </p:spPr>
-        <p:style>
-          <a:lnRef idx="2">
-            <a:schemeClr val="accent1">
-              <a:shade val="15000"/>
-            </a:schemeClr>
-          </a:lnRef>
-          <a:fillRef idx="1">
-            <a:schemeClr val="accent1"/>
-          </a:fillRef>
-          <a:effectRef idx="0">
-            <a:schemeClr val="accent1"/>
-          </a:effectRef>
-          <a:fontRef idx="minor">
-            <a:schemeClr val="lt1"/>
-          </a:fontRef>
-        </p:style>
-        <p:txBody>
-          <a:bodyPr rtlCol="0" anchor="ctr"/>
-          <a:lstStyle/>
-          <a:p>
-            <a:pPr algn="ctr"/>
-            <a:endParaRPr lang="es-ES"/>
-          </a:p>
-        </p:txBody>
-      </p:sp>
-      <p:sp>
-        <p:nvSpPr>
-          <p:cNvPr id="20" name="Flecha abajo 19">
-            <a:extLst>
-              <a:ext uri="{FF2B5EF4-FFF2-40B4-BE49-F238E27FC236}">
-                <a16:creationId xmlns:a16="http://schemas.microsoft.com/office/drawing/2014/main" id="{27DF9403-FC07-1FE3-C630-B4CCB48243CD}"/>
-              </a:ext>
-            </a:extLst>
-          </p:cNvPr>
-          <p:cNvSpPr/>
-          <p:nvPr/>
-        </p:nvSpPr>
-        <p:spPr>
-          <a:xfrm>
-            <a:off x="9504430" y="2961410"/>
-            <a:ext cx="349135" cy="590931"/>
-          </a:xfrm>
-          <a:prstGeom prst="downArrow">
-            <a:avLst/>
-          </a:prstGeom>
-          <a:solidFill>
-            <a:srgbClr val="00B050"/>
-          </a:solidFill>
-          <a:ln>
-            <a:solidFill>
-              <a:schemeClr val="accent3">
-                <a:lumMod val="75000"/>
-              </a:schemeClr>
-            </a:solidFill>
-          </a:ln>
-        </p:spPr>
-        <p:style>
-          <a:lnRef idx="2">
-            <a:schemeClr val="accent1">
-              <a:shade val="15000"/>
-            </a:schemeClr>
-          </a:lnRef>
-          <a:fillRef idx="1">
-            <a:schemeClr val="accent1"/>
-          </a:fillRef>
-          <a:effectRef idx="0">
-            <a:schemeClr val="accent1"/>
-          </a:effectRef>
-          <a:fontRef idx="minor">
-            <a:schemeClr val="lt1"/>
-          </a:fontRef>
-        </p:style>
-        <p:txBody>
-          <a:bodyPr rtlCol="0" anchor="ctr"/>
-          <a:lstStyle/>
-          <a:p>
-            <a:pPr algn="ctr"/>
-            <a:endParaRPr lang="es-ES"/>
-          </a:p>
-        </p:txBody>
-      </p:sp>
-      <p:sp>
-        <p:nvSpPr>
-          <p:cNvPr id="21" name="Flecha abajo 20">
-            <a:extLst>
-              <a:ext uri="{FF2B5EF4-FFF2-40B4-BE49-F238E27FC236}">
-                <a16:creationId xmlns:a16="http://schemas.microsoft.com/office/drawing/2014/main" id="{4AE8A597-AD4C-6807-9C29-6DF665B918CA}"/>
-              </a:ext>
-            </a:extLst>
-          </p:cNvPr>
-          <p:cNvSpPr/>
-          <p:nvPr/>
-        </p:nvSpPr>
-        <p:spPr>
-          <a:xfrm>
-            <a:off x="7639188" y="4504203"/>
-            <a:ext cx="349135" cy="590931"/>
-          </a:xfrm>
-          <a:prstGeom prst="downArrow">
-            <a:avLst/>
-          </a:prstGeom>
-          <a:solidFill>
-            <a:srgbClr val="00B050"/>
-          </a:solidFill>
-          <a:ln>
-            <a:solidFill>
-              <a:schemeClr val="accent3">
-                <a:lumMod val="75000"/>
-              </a:schemeClr>
-            </a:solidFill>
-          </a:ln>
-        </p:spPr>
-        <p:style>
-          <a:lnRef idx="2">
-            <a:schemeClr val="accent1">
-              <a:shade val="15000"/>
-            </a:schemeClr>
-          </a:lnRef>
-          <a:fillRef idx="1">
-            <a:schemeClr val="accent1"/>
-          </a:fillRef>
-          <a:effectRef idx="0">
-            <a:schemeClr val="accent1"/>
-          </a:effectRef>
-          <a:fontRef idx="minor">
-            <a:schemeClr val="lt1"/>
-          </a:fontRef>
-        </p:style>
-        <p:txBody>
-          <a:bodyPr rtlCol="0" anchor="ctr"/>
-          <a:lstStyle/>
-          <a:p>
-            <a:pPr algn="ctr"/>
-            <a:endParaRPr lang="es-ES"/>
-          </a:p>
-        </p:txBody>
-      </p:sp>
-      <p:sp>
-        <p:nvSpPr>
-          <p:cNvPr id="22" name="Flecha abajo 21">
-            <a:extLst>
-              <a:ext uri="{FF2B5EF4-FFF2-40B4-BE49-F238E27FC236}">
-                <a16:creationId xmlns:a16="http://schemas.microsoft.com/office/drawing/2014/main" id="{07ECE06B-223A-0567-4341-27AA5F848363}"/>
-              </a:ext>
-            </a:extLst>
-          </p:cNvPr>
-          <p:cNvSpPr/>
-          <p:nvPr/>
-        </p:nvSpPr>
-        <p:spPr>
-          <a:xfrm>
-            <a:off x="9504429" y="4504203"/>
-            <a:ext cx="349135" cy="590931"/>
-          </a:xfrm>
-          <a:prstGeom prst="downArrow">
-            <a:avLst/>
-          </a:prstGeom>
-          <a:solidFill>
-            <a:srgbClr val="00B050"/>
-          </a:solidFill>
-          <a:ln>
-            <a:solidFill>
-              <a:schemeClr val="accent3">
-                <a:lumMod val="75000"/>
-              </a:schemeClr>
-            </a:solidFill>
-          </a:ln>
-        </p:spPr>
-        <p:style>
-          <a:lnRef idx="2">
-            <a:schemeClr val="accent1">
-              <a:shade val="15000"/>
-            </a:schemeClr>
-          </a:lnRef>
-          <a:fillRef idx="1">
-            <a:schemeClr val="accent1"/>
-          </a:fillRef>
-          <a:effectRef idx="0">
-            <a:schemeClr val="accent1"/>
-          </a:effectRef>
-          <a:fontRef idx="minor">
-            <a:schemeClr val="lt1"/>
-          </a:fontRef>
-        </p:style>
-        <p:txBody>
-          <a:bodyPr rtlCol="0" anchor="ctr"/>
-          <a:lstStyle/>
-          <a:p>
-            <a:pPr algn="ctr"/>
-            <a:endParaRPr lang="es-ES"/>
-          </a:p>
-        </p:txBody>
-      </p:sp>
-      <p:sp>
-        <p:nvSpPr>
-          <p:cNvPr id="23" name="Flecha abajo 22">
-            <a:extLst>
-              <a:ext uri="{FF2B5EF4-FFF2-40B4-BE49-F238E27FC236}">
-                <a16:creationId xmlns:a16="http://schemas.microsoft.com/office/drawing/2014/main" id="{356C1CDD-C354-2A09-BFC9-FADEB6A7E64A}"/>
-              </a:ext>
-            </a:extLst>
-          </p:cNvPr>
-          <p:cNvSpPr/>
-          <p:nvPr/>
-        </p:nvSpPr>
-        <p:spPr>
-          <a:xfrm>
-            <a:off x="13672226" y="3598578"/>
-            <a:ext cx="349135" cy="590931"/>
-          </a:xfrm>
-          <a:prstGeom prst="downArrow">
-            <a:avLst/>
-          </a:prstGeom>
-          <a:solidFill>
-            <a:schemeClr val="accent6">
-              <a:lumMod val="75000"/>
-            </a:schemeClr>
-          </a:solidFill>
-          <a:ln>
-            <a:solidFill>
-              <a:schemeClr val="accent6">
-                <a:lumMod val="50000"/>
-              </a:schemeClr>
-            </a:solidFill>
-          </a:ln>
-        </p:spPr>
-        <p:style>
-          <a:lnRef idx="2">
-            <a:schemeClr val="accent1">
-              <a:shade val="15000"/>
-            </a:schemeClr>
-          </a:lnRef>
-          <a:fillRef idx="1">
-            <a:schemeClr val="accent1"/>
-          </a:fillRef>
-          <a:effectRef idx="0">
-            <a:schemeClr val="accent1"/>
-          </a:effectRef>
-          <a:fontRef idx="minor">
-            <a:schemeClr val="lt1"/>
-          </a:fontRef>
-        </p:style>
-        <p:txBody>
-          <a:bodyPr rtlCol="0" anchor="ctr"/>
-          <a:lstStyle/>
-          <a:p>
-            <a:pPr algn="ctr"/>
-            <a:endParaRPr lang="es-ES"/>
-          </a:p>
-        </p:txBody>
-      </p:sp>
-      <p:sp>
-        <p:nvSpPr>
-          <p:cNvPr id="24" name="Flecha abajo 23">
-            <a:extLst>
-              <a:ext uri="{FF2B5EF4-FFF2-40B4-BE49-F238E27FC236}">
-                <a16:creationId xmlns:a16="http://schemas.microsoft.com/office/drawing/2014/main" id="{7C533EBD-554B-77AE-8C4D-66526DB7A975}"/>
-              </a:ext>
-            </a:extLst>
-          </p:cNvPr>
-          <p:cNvSpPr/>
-          <p:nvPr/>
-        </p:nvSpPr>
-        <p:spPr>
-          <a:xfrm>
-            <a:off x="15537467" y="3612307"/>
-            <a:ext cx="349135" cy="590931"/>
-          </a:xfrm>
-          <a:prstGeom prst="downArrow">
-            <a:avLst/>
-          </a:prstGeom>
-          <a:solidFill>
-            <a:schemeClr val="accent6">
-              <a:lumMod val="75000"/>
-            </a:schemeClr>
-          </a:solidFill>
-          <a:ln>
-            <a:solidFill>
-              <a:schemeClr val="accent6">
-                <a:lumMod val="50000"/>
-              </a:schemeClr>
-            </a:solidFill>
-          </a:ln>
-        </p:spPr>
-        <p:style>
-          <a:lnRef idx="2">
-            <a:schemeClr val="accent1">
-              <a:shade val="15000"/>
-            </a:schemeClr>
-          </a:lnRef>
-          <a:fillRef idx="1">
-            <a:schemeClr val="accent1"/>
-          </a:fillRef>
-          <a:effectRef idx="0">
-            <a:schemeClr val="accent1"/>
-          </a:effectRef>
-          <a:fontRef idx="minor">
-            <a:schemeClr val="lt1"/>
-          </a:fontRef>
-        </p:style>
-        <p:txBody>
-          <a:bodyPr rtlCol="0" anchor="ctr"/>
-          <a:lstStyle/>
-          <a:p>
-            <a:pPr algn="ctr"/>
-            <a:endParaRPr lang="es-ES"/>
-          </a:p>
-        </p:txBody>
-      </p:sp>
-      <p:sp>
-        <p:nvSpPr>
-          <p:cNvPr id="25" name="Flecha abajo 24">
-            <a:extLst>
-              <a:ext uri="{FF2B5EF4-FFF2-40B4-BE49-F238E27FC236}">
-                <a16:creationId xmlns:a16="http://schemas.microsoft.com/office/drawing/2014/main" id="{36297C3E-7832-B3A4-DE68-A8D5264D0CDB}"/>
-              </a:ext>
-            </a:extLst>
-          </p:cNvPr>
-          <p:cNvSpPr/>
-          <p:nvPr/>
-        </p:nvSpPr>
-        <p:spPr>
-          <a:xfrm>
-            <a:off x="13672225" y="5155100"/>
-            <a:ext cx="349135" cy="590931"/>
-          </a:xfrm>
-          <a:prstGeom prst="downArrow">
-            <a:avLst/>
-          </a:prstGeom>
-          <a:solidFill>
-            <a:schemeClr val="accent6">
-              <a:lumMod val="75000"/>
-            </a:schemeClr>
-          </a:solidFill>
-          <a:ln>
-            <a:solidFill>
-              <a:schemeClr val="accent6">
-                <a:lumMod val="50000"/>
-              </a:schemeClr>
-            </a:solidFill>
-          </a:ln>
-        </p:spPr>
-        <p:style>
-          <a:lnRef idx="2">
-            <a:schemeClr val="accent1">
-              <a:shade val="15000"/>
-            </a:schemeClr>
-          </a:lnRef>
-          <a:fillRef idx="1">
-            <a:schemeClr val="accent1"/>
-          </a:fillRef>
-          <a:effectRef idx="0">
-            <a:schemeClr val="accent1"/>
-          </a:effectRef>
-          <a:fontRef idx="minor">
-            <a:schemeClr val="lt1"/>
-          </a:fontRef>
-        </p:style>
-        <p:txBody>
-          <a:bodyPr rtlCol="0" anchor="ctr"/>
-          <a:lstStyle/>
-          <a:p>
-            <a:pPr algn="ctr"/>
-            <a:endParaRPr lang="es-ES"/>
-          </a:p>
-        </p:txBody>
-      </p:sp>
-      <p:sp>
-        <p:nvSpPr>
-          <p:cNvPr id="26" name="Flecha abajo 25">
-            <a:extLst>
-              <a:ext uri="{FF2B5EF4-FFF2-40B4-BE49-F238E27FC236}">
-                <a16:creationId xmlns:a16="http://schemas.microsoft.com/office/drawing/2014/main" id="{464B6C5F-A562-BF84-839D-9AC0DBF1899D}"/>
-              </a:ext>
-            </a:extLst>
-          </p:cNvPr>
-          <p:cNvSpPr/>
-          <p:nvPr/>
-        </p:nvSpPr>
-        <p:spPr>
-          <a:xfrm>
-            <a:off x="15537466" y="5155100"/>
-            <a:ext cx="349135" cy="590931"/>
-          </a:xfrm>
-          <a:prstGeom prst="downArrow">
-            <a:avLst/>
-          </a:prstGeom>
-          <a:solidFill>
-            <a:schemeClr val="accent6">
-              <a:lumMod val="75000"/>
-            </a:schemeClr>
-          </a:solidFill>
-          <a:ln>
-            <a:solidFill>
-              <a:schemeClr val="accent6">
-                <a:lumMod val="50000"/>
-              </a:schemeClr>
-            </a:solidFill>
-          </a:ln>
-        </p:spPr>
-        <p:style>
-          <a:lnRef idx="2">
-            <a:schemeClr val="accent1">
-              <a:shade val="15000"/>
-            </a:schemeClr>
-          </a:lnRef>
-          <a:fillRef idx="1">
-            <a:schemeClr val="accent1"/>
-          </a:fillRef>
-          <a:effectRef idx="0">
-            <a:schemeClr val="accent1"/>
-          </a:effectRef>
-          <a:fontRef idx="minor">
-            <a:schemeClr val="lt1"/>
-          </a:fontRef>
-        </p:style>
-        <p:txBody>
-          <a:bodyPr rtlCol="0" anchor="ctr"/>
-          <a:lstStyle/>
-          <a:p>
-            <a:pPr algn="ctr"/>
-            <a:endParaRPr lang="es-ES"/>
-          </a:p>
-        </p:txBody>
-      </p:sp>
-      <p:sp>
-        <p:nvSpPr>
-          <p:cNvPr id="27" name="Flecha abajo 26">
-            <a:extLst>
-              <a:ext uri="{FF2B5EF4-FFF2-40B4-BE49-F238E27FC236}">
-                <a16:creationId xmlns:a16="http://schemas.microsoft.com/office/drawing/2014/main" id="{53168283-7E04-F1E2-E520-A02E58E33E99}"/>
-              </a:ext>
-            </a:extLst>
-          </p:cNvPr>
-          <p:cNvSpPr/>
-          <p:nvPr/>
-        </p:nvSpPr>
-        <p:spPr>
-          <a:xfrm>
-            <a:off x="1725016" y="3563204"/>
-            <a:ext cx="349135" cy="590931"/>
-          </a:xfrm>
-          <a:prstGeom prst="downArrow">
-            <a:avLst/>
-          </a:prstGeom>
-          <a:solidFill>
-            <a:srgbClr val="FF0000"/>
-          </a:solidFill>
-          <a:ln>
-            <a:solidFill>
-              <a:srgbClr val="C00000"/>
-            </a:solidFill>
-          </a:ln>
-        </p:spPr>
-        <p:style>
-          <a:lnRef idx="2">
-            <a:schemeClr val="accent1">
-              <a:shade val="15000"/>
-            </a:schemeClr>
-          </a:lnRef>
-          <a:fillRef idx="1">
-            <a:schemeClr val="accent1"/>
-          </a:fillRef>
-          <a:effectRef idx="0">
-            <a:schemeClr val="accent1"/>
-          </a:effectRef>
-          <a:fontRef idx="minor">
-            <a:schemeClr val="lt1"/>
-          </a:fontRef>
-        </p:style>
-        <p:txBody>
-          <a:bodyPr rtlCol="0" anchor="ctr"/>
-          <a:lstStyle/>
-          <a:p>
-            <a:pPr algn="ctr"/>
-            <a:endParaRPr lang="es-ES"/>
-          </a:p>
-        </p:txBody>
-      </p:sp>
-      <p:sp>
-        <p:nvSpPr>
-          <p:cNvPr id="28" name="Flecha abajo 27">
-            <a:extLst>
-              <a:ext uri="{FF2B5EF4-FFF2-40B4-BE49-F238E27FC236}">
-                <a16:creationId xmlns:a16="http://schemas.microsoft.com/office/drawing/2014/main" id="{DBF47D44-AEE3-B620-5B96-0CD65447D6A3}"/>
-              </a:ext>
-            </a:extLst>
-          </p:cNvPr>
-          <p:cNvSpPr/>
-          <p:nvPr/>
-        </p:nvSpPr>
-        <p:spPr>
-          <a:xfrm>
-            <a:off x="3590257" y="3576933"/>
-            <a:ext cx="349135" cy="590931"/>
-          </a:xfrm>
-          <a:prstGeom prst="downArrow">
-            <a:avLst/>
-          </a:prstGeom>
-          <a:solidFill>
-            <a:srgbClr val="FF0000"/>
-          </a:solidFill>
-          <a:ln>
-            <a:solidFill>
-              <a:srgbClr val="C00000"/>
-            </a:solidFill>
-          </a:ln>
-        </p:spPr>
-        <p:style>
-          <a:lnRef idx="2">
-            <a:schemeClr val="accent1">
-              <a:shade val="15000"/>
-            </a:schemeClr>
-          </a:lnRef>
-          <a:fillRef idx="1">
-            <a:schemeClr val="accent1"/>
-          </a:fillRef>
-          <a:effectRef idx="0">
-            <a:schemeClr val="accent1"/>
-          </a:effectRef>
-          <a:fontRef idx="minor">
-            <a:schemeClr val="lt1"/>
-          </a:fontRef>
-        </p:style>
-        <p:txBody>
-          <a:bodyPr rtlCol="0" anchor="ctr"/>
-          <a:lstStyle/>
-          <a:p>
-            <a:pPr algn="ctr"/>
-            <a:endParaRPr lang="es-ES">
-              <a:solidFill>
-                <a:srgbClr val="FF0000"/>
-              </a:solidFill>
-            </a:endParaRPr>
-          </a:p>
-        </p:txBody>
-      </p:sp>
-      <p:sp>
-        <p:nvSpPr>
-          <p:cNvPr id="29" name="Flecha abajo 28">
-            <a:extLst>
-              <a:ext uri="{FF2B5EF4-FFF2-40B4-BE49-F238E27FC236}">
-                <a16:creationId xmlns:a16="http://schemas.microsoft.com/office/drawing/2014/main" id="{3EF09888-3FB9-8476-A9C9-58D4C2AA24B7}"/>
-              </a:ext>
-            </a:extLst>
-          </p:cNvPr>
-          <p:cNvSpPr/>
-          <p:nvPr/>
-        </p:nvSpPr>
-        <p:spPr>
-          <a:xfrm>
-            <a:off x="1725015" y="5119726"/>
-            <a:ext cx="349135" cy="590931"/>
-          </a:xfrm>
-          <a:prstGeom prst="downArrow">
-            <a:avLst/>
-          </a:prstGeom>
-          <a:solidFill>
-            <a:srgbClr val="FF0000"/>
-          </a:solidFill>
-          <a:ln>
-            <a:solidFill>
-              <a:srgbClr val="C00000"/>
-            </a:solidFill>
-          </a:ln>
-        </p:spPr>
-        <p:style>
-          <a:lnRef idx="2">
-            <a:schemeClr val="accent1">
-              <a:shade val="15000"/>
-            </a:schemeClr>
-          </a:lnRef>
-          <a:fillRef idx="1">
-            <a:schemeClr val="accent1"/>
-          </a:fillRef>
-          <a:effectRef idx="0">
-            <a:schemeClr val="accent1"/>
-          </a:effectRef>
-          <a:fontRef idx="minor">
-            <a:schemeClr val="lt1"/>
-          </a:fontRef>
-        </p:style>
-        <p:txBody>
-          <a:bodyPr rtlCol="0" anchor="ctr"/>
-          <a:lstStyle/>
-          <a:p>
-            <a:pPr algn="ctr"/>
-            <a:endParaRPr lang="es-ES"/>
-          </a:p>
-        </p:txBody>
-      </p:sp>
-      <p:sp>
-        <p:nvSpPr>
-          <p:cNvPr id="30" name="Flecha abajo 29">
-            <a:extLst>
-              <a:ext uri="{FF2B5EF4-FFF2-40B4-BE49-F238E27FC236}">
-                <a16:creationId xmlns:a16="http://schemas.microsoft.com/office/drawing/2014/main" id="{030F277A-7CD4-62F5-A2EE-C651FF9F555A}"/>
-              </a:ext>
-            </a:extLst>
-          </p:cNvPr>
-          <p:cNvSpPr/>
-          <p:nvPr/>
-        </p:nvSpPr>
-        <p:spPr>
-          <a:xfrm>
-            <a:off x="3590256" y="5119726"/>
-            <a:ext cx="349135" cy="590931"/>
-          </a:xfrm>
-          <a:prstGeom prst="downArrow">
-            <a:avLst/>
-          </a:prstGeom>
-          <a:solidFill>
-            <a:srgbClr val="FF0000"/>
-          </a:solidFill>
-          <a:ln>
-            <a:solidFill>
-              <a:srgbClr val="C00000"/>
-            </a:solidFill>
-          </a:ln>
-        </p:spPr>
-        <p:style>
-          <a:lnRef idx="2">
-            <a:schemeClr val="accent1">
-              <a:shade val="15000"/>
-            </a:schemeClr>
-          </a:lnRef>
-          <a:fillRef idx="1">
-            <a:schemeClr val="accent1"/>
-          </a:fillRef>
-          <a:effectRef idx="0">
-            <a:schemeClr val="accent1"/>
-          </a:effectRef>
-          <a:fontRef idx="minor">
-            <a:schemeClr val="lt1"/>
-          </a:fontRef>
-        </p:style>
-        <p:txBody>
-          <a:bodyPr rtlCol="0" anchor="ctr"/>
-          <a:lstStyle/>
-          <a:p>
-            <a:pPr algn="ctr"/>
-            <a:endParaRPr lang="es-ES"/>
-          </a:p>
-        </p:txBody>
-      </p:sp>
       <p:sp>
         <p:nvSpPr>
           <p:cNvPr id="36" name="Fletxa: corbada cap amunt 35">
@@ -26206,7 +25620,7 @@
 </p:sld>
 </file>
 
-<file path=ppt/slides/slide22.xml><?xml version="1.0" encoding="utf-8"?>
+<file path=ppt/slides/slide21.xml><?xml version="1.0" encoding="utf-8"?>
 <p:sld xmlns:a="http://schemas.openxmlformats.org/drawingml/2006/main" xmlns:r="http://schemas.openxmlformats.org/officeDocument/2006/relationships" xmlns:p="http://schemas.openxmlformats.org/presentationml/2006/main">
   <p:cSld>
     <p:bg>
@@ -26886,7 +26300,7 @@
 </p:sld>
 </file>
 
-<file path=ppt/slides/slide23.xml><?xml version="1.0" encoding="utf-8"?>
+<file path=ppt/slides/slide22.xml><?xml version="1.0" encoding="utf-8"?>
 <p:sld xmlns:a="http://schemas.openxmlformats.org/drawingml/2006/main" xmlns:r="http://schemas.openxmlformats.org/officeDocument/2006/relationships" xmlns:p="http://schemas.openxmlformats.org/presentationml/2006/main">
   <p:cSld>
     <p:bg>
@@ -27967,7 +27381,7 @@
 </p:sld>
 </file>
 
-<file path=ppt/slides/slide24.xml><?xml version="1.0" encoding="utf-8"?>
+<file path=ppt/slides/slide23.xml><?xml version="1.0" encoding="utf-8"?>
 <p:sld xmlns:a="http://schemas.openxmlformats.org/drawingml/2006/main" xmlns:r="http://schemas.openxmlformats.org/officeDocument/2006/relationships" xmlns:p="http://schemas.openxmlformats.org/presentationml/2006/main">
   <p:cSld>
     <p:bg>
@@ -29287,7 +28701,7 @@
 </p:sld>
 </file>
 
-<file path=ppt/slides/slide25.xml><?xml version="1.0" encoding="utf-8"?>
+<file path=ppt/slides/slide24.xml><?xml version="1.0" encoding="utf-8"?>
 <p:sld xmlns:a="http://schemas.openxmlformats.org/drawingml/2006/main" xmlns:r="http://schemas.openxmlformats.org/officeDocument/2006/relationships" xmlns:p="http://schemas.openxmlformats.org/presentationml/2006/main">
   <p:cSld>
     <p:bg>
@@ -30013,7 +29427,7 @@
 </p:sld>
 </file>
 
-<file path=ppt/slides/slide26.xml><?xml version="1.0" encoding="utf-8"?>
+<file path=ppt/slides/slide25.xml><?xml version="1.0" encoding="utf-8"?>
 <p:sld xmlns:a="http://schemas.openxmlformats.org/drawingml/2006/main" xmlns:r="http://schemas.openxmlformats.org/officeDocument/2006/relationships" xmlns:p="http://schemas.openxmlformats.org/presentationml/2006/main">
   <p:cSld>
     <p:bg>
@@ -30607,7 +30021,7 @@
 </p:sld>
 </file>
 
-<file path=ppt/slides/slide27.xml><?xml version="1.0" encoding="utf-8"?>
+<file path=ppt/slides/slide26.xml><?xml version="1.0" encoding="utf-8"?>
 <p:sld xmlns:a="http://schemas.openxmlformats.org/drawingml/2006/main" xmlns:r="http://schemas.openxmlformats.org/officeDocument/2006/relationships" xmlns:p="http://schemas.openxmlformats.org/presentationml/2006/main">
   <p:cSld>
     <p:bg>
@@ -31487,7 +30901,7 @@
 </p:sld>
 </file>
 
-<file path=ppt/slides/slide28.xml><?xml version="1.0" encoding="utf-8"?>
+<file path=ppt/slides/slide27.xml><?xml version="1.0" encoding="utf-8"?>
 <p:sld xmlns:a="http://schemas.openxmlformats.org/drawingml/2006/main" xmlns:r="http://schemas.openxmlformats.org/officeDocument/2006/relationships" xmlns:p="http://schemas.openxmlformats.org/presentationml/2006/main">
   <p:cSld>
     <p:bg>
@@ -32840,7 +32254,7 @@
 </p:sld>
 </file>
 
-<file path=ppt/slides/slide29.xml><?xml version="1.0" encoding="utf-8"?>
+<file path=ppt/slides/slide28.xml><?xml version="1.0" encoding="utf-8"?>
 <p:sld xmlns:a="http://schemas.openxmlformats.org/drawingml/2006/main" xmlns:r="http://schemas.openxmlformats.org/officeDocument/2006/relationships" xmlns:p="http://schemas.openxmlformats.org/presentationml/2006/main">
   <p:cSld>
     <p:bg>
@@ -34401,1305 +33815,6 @@
 <file path=ppt/slides/slide4.xml><?xml version="1.0" encoding="utf-8"?>
 <p:sld xmlns:a="http://schemas.openxmlformats.org/drawingml/2006/main" xmlns:r="http://schemas.openxmlformats.org/officeDocument/2006/relationships" xmlns:p="http://schemas.openxmlformats.org/presentationml/2006/main">
   <p:cSld>
-    <p:bg>
-      <p:bgPr>
-        <a:solidFill>
-          <a:srgbClr val="E0E9F9"/>
-        </a:solidFill>
-        <a:effectLst/>
-      </p:bgPr>
-    </p:bg>
-    <p:spTree>
-      <p:nvGrpSpPr>
-        <p:cNvPr id="1" name="Shape 122"/>
-        <p:cNvGrpSpPr/>
-        <p:nvPr/>
-      </p:nvGrpSpPr>
-      <p:grpSpPr>
-        <a:xfrm>
-          <a:off x="0" y="0"/>
-          <a:ext cx="0" cy="0"/>
-          <a:chOff x="0" y="0"/>
-          <a:chExt cx="0" cy="0"/>
-        </a:xfrm>
-      </p:grpSpPr>
-      <p:cxnSp>
-        <p:nvCxnSpPr>
-          <p:cNvPr id="123" name="Google Shape;123;g3dbe1710380_1_211"/>
-          <p:cNvCxnSpPr/>
-          <p:nvPr/>
-        </p:nvCxnSpPr>
-        <p:spPr>
-          <a:xfrm>
-            <a:off x="7198632" y="-330798"/>
-            <a:ext cx="0" cy="10946700"/>
-          </a:xfrm>
-          <a:prstGeom prst="straightConnector1">
-            <a:avLst/>
-          </a:prstGeom>
-          <a:noFill/>
-          <a:ln w="114300" cap="rnd" cmpd="sng">
-            <a:solidFill>
-              <a:srgbClr val="004AAD"/>
-            </a:solidFill>
-            <a:prstDash val="solid"/>
-            <a:round/>
-            <a:headEnd type="none" w="sm" len="sm"/>
-            <a:tailEnd type="none" w="sm" len="sm"/>
-          </a:ln>
-        </p:spPr>
-      </p:cxnSp>
-      <p:grpSp>
-        <p:nvGrpSpPr>
-          <p:cNvPr id="124" name="Google Shape;124;g3dbe1710380_1_211"/>
-          <p:cNvGrpSpPr/>
-          <p:nvPr/>
-        </p:nvGrpSpPr>
-        <p:grpSpPr>
-          <a:xfrm>
-            <a:off x="6904192" y="1006055"/>
-            <a:ext cx="588874" cy="595774"/>
-            <a:chOff x="0" y="-9525"/>
-            <a:chExt cx="812800" cy="822325"/>
-          </a:xfrm>
-        </p:grpSpPr>
-        <p:sp>
-          <p:nvSpPr>
-            <p:cNvPr id="125" name="Google Shape;125;g3dbe1710380_1_211"/>
-            <p:cNvSpPr/>
-            <p:nvPr/>
-          </p:nvSpPr>
-          <p:spPr>
-            <a:xfrm>
-              <a:off x="0" y="0"/>
-              <a:ext cx="812800" cy="812800"/>
-            </a:xfrm>
-            <a:custGeom>
-              <a:avLst/>
-              <a:gdLst/>
-              <a:ahLst/>
-              <a:cxnLst/>
-              <a:rect l="l" t="t" r="r" b="b"/>
-              <a:pathLst>
-                <a:path w="812800" h="812800" extrusionOk="0">
-                  <a:moveTo>
-                    <a:pt x="0" y="0"/>
-                  </a:moveTo>
-                  <a:lnTo>
-                    <a:pt x="812800" y="0"/>
-                  </a:lnTo>
-                  <a:lnTo>
-                    <a:pt x="812800" y="812800"/>
-                  </a:lnTo>
-                  <a:lnTo>
-                    <a:pt x="0" y="812800"/>
-                  </a:lnTo>
-                  <a:close/>
-                </a:path>
-              </a:pathLst>
-            </a:custGeom>
-            <a:solidFill>
-              <a:srgbClr val="FFFFFF"/>
-            </a:solidFill>
-            <a:ln w="28575" cap="sq" cmpd="sng">
-              <a:solidFill>
-                <a:srgbClr val="004AAD"/>
-              </a:solidFill>
-              <a:prstDash val="solid"/>
-              <a:miter lim="8000"/>
-              <a:headEnd type="none" w="sm" len="sm"/>
-              <a:tailEnd type="none" w="sm" len="sm"/>
-            </a:ln>
-          </p:spPr>
-        </p:sp>
-        <p:sp>
-          <p:nvSpPr>
-            <p:cNvPr id="126" name="Google Shape;126;g3dbe1710380_1_211"/>
-            <p:cNvSpPr txBox="1"/>
-            <p:nvPr/>
-          </p:nvSpPr>
-          <p:spPr>
-            <a:xfrm>
-              <a:off x="0" y="-9525"/>
-              <a:ext cx="812700" cy="822300"/>
-            </a:xfrm>
-            <a:prstGeom prst="rect">
-              <a:avLst/>
-            </a:prstGeom>
-            <a:noFill/>
-            <a:ln>
-              <a:noFill/>
-            </a:ln>
-          </p:spPr>
-          <p:txBody>
-            <a:bodyPr spcFirstLastPara="1" wrap="square" lIns="50800" tIns="50800" rIns="50800" bIns="50800" anchor="ctr" anchorCtr="0">
-              <a:noAutofit/>
-            </a:bodyPr>
-            <a:lstStyle/>
-            <a:p>
-              <a:pPr marL="0" marR="0" lvl="0" indent="0" algn="ctr" rtl="0">
-                <a:lnSpc>
-                  <a:spcPct val="313888"/>
-                </a:lnSpc>
-                <a:spcBef>
-                  <a:spcPts val="0"/>
-                </a:spcBef>
-                <a:spcAft>
-                  <a:spcPts val="0"/>
-                </a:spcAft>
-                <a:buNone/>
-              </a:pPr>
-              <a:endParaRPr sz="1800" b="0" i="0" u="none" strike="noStrike" cap="none">
-                <a:solidFill>
-                  <a:schemeClr val="dk1"/>
-                </a:solidFill>
-                <a:latin typeface="Calibri"/>
-                <a:ea typeface="Calibri"/>
-                <a:cs typeface="Calibri"/>
-                <a:sym typeface="Calibri"/>
-              </a:endParaRPr>
-            </a:p>
-          </p:txBody>
-        </p:sp>
-      </p:grpSp>
-      <p:grpSp>
-        <p:nvGrpSpPr>
-          <p:cNvPr id="127" name="Google Shape;127;g3dbe1710380_1_211"/>
-          <p:cNvGrpSpPr/>
-          <p:nvPr/>
-        </p:nvGrpSpPr>
-        <p:grpSpPr>
-          <a:xfrm>
-            <a:off x="6904192" y="3210168"/>
-            <a:ext cx="588874" cy="595774"/>
-            <a:chOff x="0" y="-9525"/>
-            <a:chExt cx="812800" cy="822325"/>
-          </a:xfrm>
-        </p:grpSpPr>
-        <p:sp>
-          <p:nvSpPr>
-            <p:cNvPr id="128" name="Google Shape;128;g3dbe1710380_1_211"/>
-            <p:cNvSpPr/>
-            <p:nvPr/>
-          </p:nvSpPr>
-          <p:spPr>
-            <a:xfrm>
-              <a:off x="0" y="0"/>
-              <a:ext cx="812800" cy="812800"/>
-            </a:xfrm>
-            <a:custGeom>
-              <a:avLst/>
-              <a:gdLst/>
-              <a:ahLst/>
-              <a:cxnLst/>
-              <a:rect l="l" t="t" r="r" b="b"/>
-              <a:pathLst>
-                <a:path w="812800" h="812800" extrusionOk="0">
-                  <a:moveTo>
-                    <a:pt x="0" y="0"/>
-                  </a:moveTo>
-                  <a:lnTo>
-                    <a:pt x="812800" y="0"/>
-                  </a:lnTo>
-                  <a:lnTo>
-                    <a:pt x="812800" y="812800"/>
-                  </a:lnTo>
-                  <a:lnTo>
-                    <a:pt x="0" y="812800"/>
-                  </a:lnTo>
-                  <a:close/>
-                </a:path>
-              </a:pathLst>
-            </a:custGeom>
-            <a:solidFill>
-              <a:srgbClr val="FFFFFF"/>
-            </a:solidFill>
-            <a:ln w="28575" cap="sq" cmpd="sng">
-              <a:solidFill>
-                <a:srgbClr val="004AAD"/>
-              </a:solidFill>
-              <a:prstDash val="solid"/>
-              <a:miter lim="8000"/>
-              <a:headEnd type="none" w="sm" len="sm"/>
-              <a:tailEnd type="none" w="sm" len="sm"/>
-            </a:ln>
-          </p:spPr>
-        </p:sp>
-        <p:sp>
-          <p:nvSpPr>
-            <p:cNvPr id="129" name="Google Shape;129;g3dbe1710380_1_211"/>
-            <p:cNvSpPr txBox="1"/>
-            <p:nvPr/>
-          </p:nvSpPr>
-          <p:spPr>
-            <a:xfrm>
-              <a:off x="0" y="-9525"/>
-              <a:ext cx="812700" cy="822300"/>
-            </a:xfrm>
-            <a:prstGeom prst="rect">
-              <a:avLst/>
-            </a:prstGeom>
-            <a:noFill/>
-            <a:ln>
-              <a:noFill/>
-            </a:ln>
-          </p:spPr>
-          <p:txBody>
-            <a:bodyPr spcFirstLastPara="1" wrap="square" lIns="50800" tIns="50800" rIns="50800" bIns="50800" anchor="ctr" anchorCtr="0">
-              <a:noAutofit/>
-            </a:bodyPr>
-            <a:lstStyle/>
-            <a:p>
-              <a:pPr marL="0" marR="0" lvl="0" indent="0" algn="ctr" rtl="0">
-                <a:lnSpc>
-                  <a:spcPct val="313888"/>
-                </a:lnSpc>
-                <a:spcBef>
-                  <a:spcPts val="0"/>
-                </a:spcBef>
-                <a:spcAft>
-                  <a:spcPts val="0"/>
-                </a:spcAft>
-                <a:buNone/>
-              </a:pPr>
-              <a:endParaRPr sz="1800" b="0" i="0" u="none" strike="noStrike" cap="none">
-                <a:solidFill>
-                  <a:schemeClr val="dk1"/>
-                </a:solidFill>
-                <a:latin typeface="Calibri"/>
-                <a:ea typeface="Calibri"/>
-                <a:cs typeface="Calibri"/>
-                <a:sym typeface="Calibri"/>
-              </a:endParaRPr>
-            </a:p>
-          </p:txBody>
-        </p:sp>
-      </p:grpSp>
-      <p:grpSp>
-        <p:nvGrpSpPr>
-          <p:cNvPr id="130" name="Google Shape;130;g3dbe1710380_1_211"/>
-          <p:cNvGrpSpPr/>
-          <p:nvPr/>
-        </p:nvGrpSpPr>
-        <p:grpSpPr>
-          <a:xfrm>
-            <a:off x="6904192" y="5457240"/>
-            <a:ext cx="588874" cy="595774"/>
-            <a:chOff x="0" y="-9525"/>
-            <a:chExt cx="812800" cy="822325"/>
-          </a:xfrm>
-        </p:grpSpPr>
-        <p:sp>
-          <p:nvSpPr>
-            <p:cNvPr id="131" name="Google Shape;131;g3dbe1710380_1_211"/>
-            <p:cNvSpPr/>
-            <p:nvPr/>
-          </p:nvSpPr>
-          <p:spPr>
-            <a:xfrm>
-              <a:off x="0" y="0"/>
-              <a:ext cx="812800" cy="812800"/>
-            </a:xfrm>
-            <a:custGeom>
-              <a:avLst/>
-              <a:gdLst/>
-              <a:ahLst/>
-              <a:cxnLst/>
-              <a:rect l="l" t="t" r="r" b="b"/>
-              <a:pathLst>
-                <a:path w="812800" h="812800" extrusionOk="0">
-                  <a:moveTo>
-                    <a:pt x="0" y="0"/>
-                  </a:moveTo>
-                  <a:lnTo>
-                    <a:pt x="812800" y="0"/>
-                  </a:lnTo>
-                  <a:lnTo>
-                    <a:pt x="812800" y="812800"/>
-                  </a:lnTo>
-                  <a:lnTo>
-                    <a:pt x="0" y="812800"/>
-                  </a:lnTo>
-                  <a:close/>
-                </a:path>
-              </a:pathLst>
-            </a:custGeom>
-            <a:solidFill>
-              <a:srgbClr val="FFFFFF"/>
-            </a:solidFill>
-            <a:ln w="28575" cap="sq" cmpd="sng">
-              <a:solidFill>
-                <a:srgbClr val="004AAD"/>
-              </a:solidFill>
-              <a:prstDash val="solid"/>
-              <a:miter lim="8000"/>
-              <a:headEnd type="none" w="sm" len="sm"/>
-              <a:tailEnd type="none" w="sm" len="sm"/>
-            </a:ln>
-          </p:spPr>
-        </p:sp>
-        <p:sp>
-          <p:nvSpPr>
-            <p:cNvPr id="132" name="Google Shape;132;g3dbe1710380_1_211"/>
-            <p:cNvSpPr txBox="1"/>
-            <p:nvPr/>
-          </p:nvSpPr>
-          <p:spPr>
-            <a:xfrm>
-              <a:off x="0" y="-9525"/>
-              <a:ext cx="812700" cy="822300"/>
-            </a:xfrm>
-            <a:prstGeom prst="rect">
-              <a:avLst/>
-            </a:prstGeom>
-            <a:noFill/>
-            <a:ln>
-              <a:noFill/>
-            </a:ln>
-          </p:spPr>
-          <p:txBody>
-            <a:bodyPr spcFirstLastPara="1" wrap="square" lIns="50800" tIns="50800" rIns="50800" bIns="50800" anchor="ctr" anchorCtr="0">
-              <a:noAutofit/>
-            </a:bodyPr>
-            <a:lstStyle/>
-            <a:p>
-              <a:pPr marL="0" marR="0" lvl="0" indent="0" algn="ctr" rtl="0">
-                <a:lnSpc>
-                  <a:spcPct val="313888"/>
-                </a:lnSpc>
-                <a:spcBef>
-                  <a:spcPts val="0"/>
-                </a:spcBef>
-                <a:spcAft>
-                  <a:spcPts val="0"/>
-                </a:spcAft>
-                <a:buNone/>
-              </a:pPr>
-              <a:endParaRPr sz="1800" b="0" i="0" u="none" strike="noStrike" cap="none">
-                <a:solidFill>
-                  <a:schemeClr val="dk1"/>
-                </a:solidFill>
-                <a:latin typeface="Calibri"/>
-                <a:ea typeface="Calibri"/>
-                <a:cs typeface="Calibri"/>
-                <a:sym typeface="Calibri"/>
-              </a:endParaRPr>
-            </a:p>
-          </p:txBody>
-        </p:sp>
-      </p:grpSp>
-      <p:grpSp>
-        <p:nvGrpSpPr>
-          <p:cNvPr id="133" name="Google Shape;133;g3dbe1710380_1_211"/>
-          <p:cNvGrpSpPr/>
-          <p:nvPr/>
-        </p:nvGrpSpPr>
-        <p:grpSpPr>
-          <a:xfrm>
-            <a:off x="6904192" y="7703472"/>
-            <a:ext cx="588874" cy="595774"/>
-            <a:chOff x="0" y="-9525"/>
-            <a:chExt cx="812800" cy="822325"/>
-          </a:xfrm>
-        </p:grpSpPr>
-        <p:sp>
-          <p:nvSpPr>
-            <p:cNvPr id="134" name="Google Shape;134;g3dbe1710380_1_211"/>
-            <p:cNvSpPr/>
-            <p:nvPr/>
-          </p:nvSpPr>
-          <p:spPr>
-            <a:xfrm>
-              <a:off x="0" y="0"/>
-              <a:ext cx="812800" cy="812800"/>
-            </a:xfrm>
-            <a:custGeom>
-              <a:avLst/>
-              <a:gdLst/>
-              <a:ahLst/>
-              <a:cxnLst/>
-              <a:rect l="l" t="t" r="r" b="b"/>
-              <a:pathLst>
-                <a:path w="812800" h="812800" extrusionOk="0">
-                  <a:moveTo>
-                    <a:pt x="0" y="0"/>
-                  </a:moveTo>
-                  <a:lnTo>
-                    <a:pt x="812800" y="0"/>
-                  </a:lnTo>
-                  <a:lnTo>
-                    <a:pt x="812800" y="812800"/>
-                  </a:lnTo>
-                  <a:lnTo>
-                    <a:pt x="0" y="812800"/>
-                  </a:lnTo>
-                  <a:close/>
-                </a:path>
-              </a:pathLst>
-            </a:custGeom>
-            <a:solidFill>
-              <a:srgbClr val="FFFFFF"/>
-            </a:solidFill>
-            <a:ln w="28575" cap="sq" cmpd="sng">
-              <a:solidFill>
-                <a:srgbClr val="004AAD"/>
-              </a:solidFill>
-              <a:prstDash val="solid"/>
-              <a:miter lim="8000"/>
-              <a:headEnd type="none" w="sm" len="sm"/>
-              <a:tailEnd type="none" w="sm" len="sm"/>
-            </a:ln>
-          </p:spPr>
-        </p:sp>
-        <p:sp>
-          <p:nvSpPr>
-            <p:cNvPr id="135" name="Google Shape;135;g3dbe1710380_1_211"/>
-            <p:cNvSpPr txBox="1"/>
-            <p:nvPr/>
-          </p:nvSpPr>
-          <p:spPr>
-            <a:xfrm>
-              <a:off x="0" y="-9525"/>
-              <a:ext cx="812700" cy="822300"/>
-            </a:xfrm>
-            <a:prstGeom prst="rect">
-              <a:avLst/>
-            </a:prstGeom>
-            <a:noFill/>
-            <a:ln>
-              <a:noFill/>
-            </a:ln>
-          </p:spPr>
-          <p:txBody>
-            <a:bodyPr spcFirstLastPara="1" wrap="square" lIns="50800" tIns="50800" rIns="50800" bIns="50800" anchor="ctr" anchorCtr="0">
-              <a:noAutofit/>
-            </a:bodyPr>
-            <a:lstStyle/>
-            <a:p>
-              <a:pPr marL="0" marR="0" lvl="0" indent="0" algn="ctr" rtl="0">
-                <a:lnSpc>
-                  <a:spcPct val="313888"/>
-                </a:lnSpc>
-                <a:spcBef>
-                  <a:spcPts val="0"/>
-                </a:spcBef>
-                <a:spcAft>
-                  <a:spcPts val="0"/>
-                </a:spcAft>
-                <a:buNone/>
-              </a:pPr>
-              <a:endParaRPr sz="1800" b="0" i="0" u="none" strike="noStrike" cap="none">
-                <a:solidFill>
-                  <a:schemeClr val="dk1"/>
-                </a:solidFill>
-                <a:latin typeface="Calibri"/>
-                <a:ea typeface="Calibri"/>
-                <a:cs typeface="Calibri"/>
-                <a:sym typeface="Calibri"/>
-              </a:endParaRPr>
-            </a:p>
-          </p:txBody>
-        </p:sp>
-      </p:grpSp>
-      <p:sp>
-        <p:nvSpPr>
-          <p:cNvPr id="136" name="Google Shape;136;g3dbe1710380_1_211"/>
-          <p:cNvSpPr/>
-          <p:nvPr/>
-        </p:nvSpPr>
-        <p:spPr>
-          <a:xfrm>
-            <a:off x="13196004" y="3159413"/>
-            <a:ext cx="6521776" cy="7305451"/>
-          </a:xfrm>
-          <a:custGeom>
-            <a:avLst/>
-            <a:gdLst/>
-            <a:ahLst/>
-            <a:cxnLst/>
-            <a:rect l="l" t="t" r="r" b="b"/>
-            <a:pathLst>
-              <a:path w="6521776" h="7305451" extrusionOk="0">
-                <a:moveTo>
-                  <a:pt x="0" y="0"/>
-                </a:moveTo>
-                <a:lnTo>
-                  <a:pt x="6521776" y="0"/>
-                </a:lnTo>
-                <a:lnTo>
-                  <a:pt x="6521776" y="7305452"/>
-                </a:lnTo>
-                <a:lnTo>
-                  <a:pt x="0" y="7305452"/>
-                </a:lnTo>
-                <a:lnTo>
-                  <a:pt x="0" y="0"/>
-                </a:lnTo>
-                <a:close/>
-              </a:path>
-            </a:pathLst>
-          </a:custGeom>
-          <a:blipFill rotWithShape="1">
-            <a:blip r:embed="rId3">
-              <a:alphaModFix/>
-            </a:blip>
-            <a:stretch>
-              <a:fillRect/>
-            </a:stretch>
-          </a:blipFill>
-          <a:ln>
-            <a:noFill/>
-          </a:ln>
-        </p:spPr>
-      </p:sp>
-      <p:sp>
-        <p:nvSpPr>
-          <p:cNvPr id="137" name="Google Shape;137;g3dbe1710380_1_211"/>
-          <p:cNvSpPr/>
-          <p:nvPr/>
-        </p:nvSpPr>
-        <p:spPr>
-          <a:xfrm>
-            <a:off x="13196004" y="-703241"/>
-            <a:ext cx="6521776" cy="7305451"/>
-          </a:xfrm>
-          <a:custGeom>
-            <a:avLst/>
-            <a:gdLst/>
-            <a:ahLst/>
-            <a:cxnLst/>
-            <a:rect l="l" t="t" r="r" b="b"/>
-            <a:pathLst>
-              <a:path w="6521776" h="7305451" extrusionOk="0">
-                <a:moveTo>
-                  <a:pt x="0" y="0"/>
-                </a:moveTo>
-                <a:lnTo>
-                  <a:pt x="6521776" y="0"/>
-                </a:lnTo>
-                <a:lnTo>
-                  <a:pt x="6521776" y="7305452"/>
-                </a:lnTo>
-                <a:lnTo>
-                  <a:pt x="0" y="7305452"/>
-                </a:lnTo>
-                <a:lnTo>
-                  <a:pt x="0" y="0"/>
-                </a:lnTo>
-                <a:close/>
-              </a:path>
-            </a:pathLst>
-          </a:custGeom>
-          <a:blipFill rotWithShape="1">
-            <a:blip r:embed="rId3">
-              <a:alphaModFix/>
-            </a:blip>
-            <a:stretch>
-              <a:fillRect/>
-            </a:stretch>
-          </a:blipFill>
-          <a:ln>
-            <a:noFill/>
-          </a:ln>
-        </p:spPr>
-      </p:sp>
-      <p:sp>
-        <p:nvSpPr>
-          <p:cNvPr id="138" name="Google Shape;138;g3dbe1710380_1_211"/>
-          <p:cNvSpPr txBox="1"/>
-          <p:nvPr/>
-        </p:nvSpPr>
-        <p:spPr>
-          <a:xfrm>
-            <a:off x="1028700" y="2777601"/>
-            <a:ext cx="4530600" cy="554400"/>
-          </a:xfrm>
-          <a:prstGeom prst="rect">
-            <a:avLst/>
-          </a:prstGeom>
-          <a:noFill/>
-          <a:ln>
-            <a:noFill/>
-          </a:ln>
-        </p:spPr>
-        <p:txBody>
-          <a:bodyPr spcFirstLastPara="1" wrap="square" lIns="0" tIns="0" rIns="0" bIns="0" anchor="t" anchorCtr="0">
-            <a:spAutoFit/>
-          </a:bodyPr>
-          <a:lstStyle/>
-          <a:p>
-            <a:pPr marL="0" marR="0" lvl="0" indent="0" algn="l" rtl="0">
-              <a:lnSpc>
-                <a:spcPct val="121055"/>
-              </a:lnSpc>
-              <a:spcBef>
-                <a:spcPts val="0"/>
-              </a:spcBef>
-              <a:spcAft>
-                <a:spcPts val="0"/>
-              </a:spcAft>
-              <a:buNone/>
-            </a:pPr>
-            <a:r>
-              <a:rPr lang="en-US" sz="3601" b="1" dirty="0">
-                <a:solidFill>
-                  <a:srgbClr val="004AAD"/>
-                </a:solidFill>
-                <a:latin typeface="Poppins"/>
-                <a:ea typeface="Poppins"/>
-                <a:cs typeface="Poppins"/>
-                <a:sym typeface="Poppins"/>
-              </a:rPr>
-              <a:t>NUESTROS DATOS</a:t>
-            </a:r>
-            <a:endParaRPr dirty="0"/>
-          </a:p>
-        </p:txBody>
-      </p:sp>
-      <p:sp>
-        <p:nvSpPr>
-          <p:cNvPr id="139" name="Google Shape;139;g3dbe1710380_1_211"/>
-          <p:cNvSpPr txBox="1"/>
-          <p:nvPr/>
-        </p:nvSpPr>
-        <p:spPr>
-          <a:xfrm>
-            <a:off x="7941024" y="5524300"/>
-            <a:ext cx="4635000" cy="507831"/>
-          </a:xfrm>
-          <a:prstGeom prst="rect">
-            <a:avLst/>
-          </a:prstGeom>
-          <a:noFill/>
-          <a:ln>
-            <a:noFill/>
-          </a:ln>
-        </p:spPr>
-        <p:txBody>
-          <a:bodyPr spcFirstLastPara="1" wrap="square" lIns="0" tIns="0" rIns="0" bIns="0" anchor="t" anchorCtr="0">
-            <a:spAutoFit/>
-          </a:bodyPr>
-          <a:lstStyle/>
-          <a:p>
-            <a:pPr marL="0" marR="0" lvl="0" indent="0" algn="l" rtl="0">
-              <a:lnSpc>
-                <a:spcPct val="110000"/>
-              </a:lnSpc>
-              <a:spcBef>
-                <a:spcPts val="0"/>
-              </a:spcBef>
-              <a:spcAft>
-                <a:spcPts val="0"/>
-              </a:spcAft>
-              <a:buNone/>
-            </a:pPr>
-            <a:r>
-              <a:rPr lang="en-US" sz="3000" b="1" dirty="0" err="1">
-                <a:solidFill>
-                  <a:srgbClr val="004AAD"/>
-                </a:solidFill>
-                <a:latin typeface="Poppins"/>
-                <a:ea typeface="Poppins"/>
-                <a:cs typeface="Poppins"/>
-                <a:sym typeface="Poppins"/>
-              </a:rPr>
-              <a:t>Comunidad</a:t>
-            </a:r>
-            <a:r>
-              <a:rPr lang="en-US" sz="3000" b="1" dirty="0">
-                <a:solidFill>
-                  <a:srgbClr val="004AAD"/>
-                </a:solidFill>
-                <a:latin typeface="Poppins"/>
-                <a:ea typeface="Poppins"/>
-                <a:cs typeface="Poppins"/>
-                <a:sym typeface="Poppins"/>
-              </a:rPr>
-              <a:t> </a:t>
-            </a:r>
-            <a:r>
-              <a:rPr lang="en-US" sz="3000" b="1" dirty="0" err="1">
-                <a:solidFill>
-                  <a:srgbClr val="004AAD"/>
-                </a:solidFill>
-                <a:latin typeface="Poppins"/>
-                <a:ea typeface="Poppins"/>
-                <a:cs typeface="Poppins"/>
-                <a:sym typeface="Poppins"/>
-              </a:rPr>
-              <a:t>Autónoma</a:t>
-            </a:r>
-            <a:endParaRPr sz="3000" dirty="0"/>
-          </a:p>
-        </p:txBody>
-      </p:sp>
-      <p:sp>
-        <p:nvSpPr>
-          <p:cNvPr id="140" name="Google Shape;140;g3dbe1710380_1_211"/>
-          <p:cNvSpPr txBox="1"/>
-          <p:nvPr/>
-        </p:nvSpPr>
-        <p:spPr>
-          <a:xfrm>
-            <a:off x="8188931" y="6071781"/>
-            <a:ext cx="3805800" cy="775597"/>
-          </a:xfrm>
-          <a:prstGeom prst="rect">
-            <a:avLst/>
-          </a:prstGeom>
-          <a:noFill/>
-          <a:ln>
-            <a:noFill/>
-          </a:ln>
-        </p:spPr>
-        <p:txBody>
-          <a:bodyPr spcFirstLastPara="1" wrap="square" lIns="0" tIns="0" rIns="0" bIns="0" anchor="t" anchorCtr="0">
-            <a:spAutoFit/>
-          </a:bodyPr>
-          <a:lstStyle/>
-          <a:p>
-            <a:pPr marL="0" marR="0" lvl="0" indent="0" algn="l" rtl="0">
-              <a:lnSpc>
-                <a:spcPct val="140000"/>
-              </a:lnSpc>
-              <a:spcBef>
-                <a:spcPts val="0"/>
-              </a:spcBef>
-              <a:spcAft>
-                <a:spcPts val="0"/>
-              </a:spcAft>
-              <a:buNone/>
-            </a:pPr>
-            <a:r>
-              <a:rPr lang="en-US" sz="3600" dirty="0">
-                <a:solidFill>
-                  <a:srgbClr val="004AAD"/>
-                </a:solidFill>
-                <a:latin typeface="Poppins"/>
-                <a:cs typeface="Poppins"/>
-                <a:sym typeface="Poppins"/>
-              </a:rPr>
-              <a:t>Cataluña</a:t>
-            </a:r>
-            <a:endParaRPr sz="3600" dirty="0"/>
-          </a:p>
-        </p:txBody>
-      </p:sp>
-      <p:sp>
-        <p:nvSpPr>
-          <p:cNvPr id="141" name="Google Shape;141;g3dbe1710380_1_211"/>
-          <p:cNvSpPr txBox="1"/>
-          <p:nvPr/>
-        </p:nvSpPr>
-        <p:spPr>
-          <a:xfrm>
-            <a:off x="8045399" y="1121450"/>
-            <a:ext cx="4530600" cy="507831"/>
-          </a:xfrm>
-          <a:prstGeom prst="rect">
-            <a:avLst/>
-          </a:prstGeom>
-          <a:noFill/>
-          <a:ln>
-            <a:noFill/>
-          </a:ln>
-        </p:spPr>
-        <p:txBody>
-          <a:bodyPr spcFirstLastPara="1" wrap="square" lIns="0" tIns="0" rIns="0" bIns="0" anchor="t" anchorCtr="0">
-            <a:spAutoFit/>
-          </a:bodyPr>
-          <a:lstStyle/>
-          <a:p>
-            <a:pPr marL="0" marR="0" lvl="0" indent="0" algn="l" rtl="0">
-              <a:lnSpc>
-                <a:spcPct val="110000"/>
-              </a:lnSpc>
-              <a:spcBef>
-                <a:spcPts val="0"/>
-              </a:spcBef>
-              <a:spcAft>
-                <a:spcPts val="0"/>
-              </a:spcAft>
-              <a:buNone/>
-            </a:pPr>
-            <a:r>
-              <a:rPr lang="es-ES" sz="3000" b="1" dirty="0">
-                <a:solidFill>
-                  <a:srgbClr val="004AAD"/>
-                </a:solidFill>
-                <a:latin typeface="Poppins"/>
-                <a:cs typeface="Poppins"/>
-                <a:sym typeface="Poppins"/>
-              </a:rPr>
-              <a:t>Medios</a:t>
-            </a:r>
-            <a:r>
-              <a:rPr lang="en-US" sz="3000" b="1" dirty="0">
-                <a:solidFill>
-                  <a:srgbClr val="004AAD"/>
-                </a:solidFill>
-                <a:latin typeface="Poppins"/>
-                <a:cs typeface="Poppins"/>
-                <a:sym typeface="Poppins"/>
-              </a:rPr>
-              <a:t> de </a:t>
-            </a:r>
-            <a:r>
-              <a:rPr lang="en-US" sz="3000" b="1" dirty="0" err="1">
-                <a:solidFill>
-                  <a:srgbClr val="004AAD"/>
-                </a:solidFill>
-                <a:latin typeface="Poppins"/>
-                <a:cs typeface="Poppins"/>
-                <a:sym typeface="Poppins"/>
-              </a:rPr>
-              <a:t>Formación</a:t>
-            </a:r>
-            <a:endParaRPr sz="2600" dirty="0"/>
-          </a:p>
-        </p:txBody>
-      </p:sp>
-      <p:sp>
-        <p:nvSpPr>
-          <p:cNvPr id="142" name="Google Shape;142;g3dbe1710380_1_211"/>
-          <p:cNvSpPr txBox="1"/>
-          <p:nvPr/>
-        </p:nvSpPr>
-        <p:spPr>
-          <a:xfrm>
-            <a:off x="8294419" y="1583162"/>
-            <a:ext cx="3805800" cy="775597"/>
-          </a:xfrm>
-          <a:prstGeom prst="rect">
-            <a:avLst/>
-          </a:prstGeom>
-          <a:noFill/>
-          <a:ln>
-            <a:noFill/>
-          </a:ln>
-        </p:spPr>
-        <p:txBody>
-          <a:bodyPr spcFirstLastPara="1" wrap="square" lIns="0" tIns="0" rIns="0" bIns="0" anchor="t" anchorCtr="0">
-            <a:spAutoFit/>
-          </a:bodyPr>
-          <a:lstStyle/>
-          <a:p>
-            <a:pPr marL="0" marR="0" lvl="0" indent="0" algn="l" rtl="0">
-              <a:lnSpc>
-                <a:spcPct val="140000"/>
-              </a:lnSpc>
-              <a:spcBef>
-                <a:spcPts val="0"/>
-              </a:spcBef>
-              <a:spcAft>
-                <a:spcPts val="0"/>
-              </a:spcAft>
-              <a:buNone/>
-            </a:pPr>
-            <a:r>
-              <a:rPr lang="en-US" sz="3600" dirty="0">
-                <a:solidFill>
-                  <a:srgbClr val="004AAD"/>
-                </a:solidFill>
-                <a:latin typeface="Poppins"/>
-                <a:ea typeface="Poppins"/>
-                <a:cs typeface="Poppins"/>
-                <a:sym typeface="Poppins"/>
-              </a:rPr>
-              <a:t>5 </a:t>
-            </a:r>
-            <a:endParaRPr sz="3600" dirty="0"/>
-          </a:p>
-        </p:txBody>
-      </p:sp>
-      <p:sp>
-        <p:nvSpPr>
-          <p:cNvPr id="143" name="Google Shape;143;g3dbe1710380_1_211"/>
-          <p:cNvSpPr txBox="1"/>
-          <p:nvPr/>
-        </p:nvSpPr>
-        <p:spPr>
-          <a:xfrm>
-            <a:off x="7941031" y="3277218"/>
-            <a:ext cx="3805800" cy="507831"/>
-          </a:xfrm>
-          <a:prstGeom prst="rect">
-            <a:avLst/>
-          </a:prstGeom>
-          <a:noFill/>
-          <a:ln>
-            <a:noFill/>
-          </a:ln>
-        </p:spPr>
-        <p:txBody>
-          <a:bodyPr spcFirstLastPara="1" wrap="square" lIns="0" tIns="0" rIns="0" bIns="0" anchor="t" anchorCtr="0">
-            <a:spAutoFit/>
-          </a:bodyPr>
-          <a:lstStyle/>
-          <a:p>
-            <a:pPr marL="0" marR="0" lvl="0" indent="0" algn="l" rtl="0">
-              <a:lnSpc>
-                <a:spcPct val="110000"/>
-              </a:lnSpc>
-              <a:spcBef>
-                <a:spcPts val="0"/>
-              </a:spcBef>
-              <a:spcAft>
-                <a:spcPts val="0"/>
-              </a:spcAft>
-              <a:buNone/>
-            </a:pPr>
-            <a:r>
-              <a:rPr lang="en-US" sz="3000" b="1" dirty="0" err="1">
-                <a:solidFill>
-                  <a:srgbClr val="004AAD"/>
-                </a:solidFill>
-                <a:latin typeface="Poppins"/>
-                <a:cs typeface="Poppins"/>
-                <a:sym typeface="Poppins"/>
-              </a:rPr>
-              <a:t>Tamaño</a:t>
-            </a:r>
-            <a:r>
-              <a:rPr lang="en-US" sz="3000" b="1" dirty="0">
-                <a:solidFill>
-                  <a:srgbClr val="004AAD"/>
-                </a:solidFill>
-                <a:latin typeface="Poppins"/>
-                <a:cs typeface="Poppins"/>
-                <a:sym typeface="Poppins"/>
-              </a:rPr>
-              <a:t> </a:t>
-            </a:r>
-            <a:r>
-              <a:rPr lang="en-US" sz="3000" b="1" dirty="0" err="1">
-                <a:solidFill>
-                  <a:srgbClr val="004AAD"/>
-                </a:solidFill>
-                <a:latin typeface="Poppins"/>
-                <a:cs typeface="Poppins"/>
-                <a:sym typeface="Poppins"/>
-              </a:rPr>
-              <a:t>empresa</a:t>
-            </a:r>
-            <a:endParaRPr sz="2600" dirty="0"/>
-          </a:p>
-        </p:txBody>
-      </p:sp>
-      <p:sp>
-        <p:nvSpPr>
-          <p:cNvPr id="144" name="Google Shape;144;g3dbe1710380_1_211"/>
-          <p:cNvSpPr txBox="1"/>
-          <p:nvPr/>
-        </p:nvSpPr>
-        <p:spPr>
-          <a:xfrm>
-            <a:off x="8188931" y="3826745"/>
-            <a:ext cx="3805800" cy="554100"/>
-          </a:xfrm>
-          <a:prstGeom prst="rect">
-            <a:avLst/>
-          </a:prstGeom>
-          <a:noFill/>
-          <a:ln>
-            <a:noFill/>
-          </a:ln>
-        </p:spPr>
-        <p:txBody>
-          <a:bodyPr spcFirstLastPara="1" wrap="square" lIns="0" tIns="0" rIns="0" bIns="0" anchor="t" anchorCtr="0">
-            <a:spAutoFit/>
-          </a:bodyPr>
-          <a:lstStyle/>
-          <a:p>
-            <a:pPr marL="0" marR="0" lvl="0" indent="0" algn="l" rtl="0">
-              <a:lnSpc>
-                <a:spcPct val="140000"/>
-              </a:lnSpc>
-              <a:spcBef>
-                <a:spcPts val="0"/>
-              </a:spcBef>
-              <a:spcAft>
-                <a:spcPts val="0"/>
-              </a:spcAft>
-              <a:buNone/>
-            </a:pPr>
-            <a:r>
-              <a:rPr lang="en-US" sz="3600">
-                <a:solidFill>
-                  <a:srgbClr val="004AAD"/>
-                </a:solidFill>
-                <a:latin typeface="Poppins"/>
-                <a:ea typeface="Poppins"/>
-                <a:cs typeface="Poppins"/>
-                <a:sym typeface="Poppins"/>
-              </a:rPr>
-              <a:t>386</a:t>
-            </a:r>
-            <a:endParaRPr sz="3600"/>
-          </a:p>
-        </p:txBody>
-      </p:sp>
-      <p:sp>
-        <p:nvSpPr>
-          <p:cNvPr id="145" name="Google Shape;145;g3dbe1710380_1_211"/>
-          <p:cNvSpPr txBox="1"/>
-          <p:nvPr/>
-        </p:nvSpPr>
-        <p:spPr>
-          <a:xfrm>
-            <a:off x="8045398" y="7870425"/>
-            <a:ext cx="5150700" cy="490904"/>
-          </a:xfrm>
-          <a:prstGeom prst="rect">
-            <a:avLst/>
-          </a:prstGeom>
-          <a:noFill/>
-          <a:ln>
-            <a:noFill/>
-          </a:ln>
-        </p:spPr>
-        <p:txBody>
-          <a:bodyPr spcFirstLastPara="1" wrap="square" lIns="0" tIns="0" rIns="0" bIns="0" anchor="t" anchorCtr="0">
-            <a:spAutoFit/>
-          </a:bodyPr>
-          <a:lstStyle/>
-          <a:p>
-            <a:pPr marL="0" marR="0" lvl="0" indent="0" algn="l" rtl="0">
-              <a:lnSpc>
-                <a:spcPct val="110000"/>
-              </a:lnSpc>
-              <a:spcBef>
-                <a:spcPts val="0"/>
-              </a:spcBef>
-              <a:spcAft>
-                <a:spcPts val="0"/>
-              </a:spcAft>
-              <a:buNone/>
-            </a:pPr>
-            <a:r>
-              <a:rPr lang="en-US" sz="2900" b="1" dirty="0" err="1">
-                <a:solidFill>
-                  <a:srgbClr val="004AAD"/>
-                </a:solidFill>
-                <a:latin typeface="Poppins"/>
-                <a:cs typeface="Poppins"/>
-                <a:sym typeface="Poppins"/>
-              </a:rPr>
-              <a:t>Estrategias</a:t>
-            </a:r>
-            <a:r>
-              <a:rPr lang="en-US" sz="2900" b="1" dirty="0">
-                <a:solidFill>
-                  <a:srgbClr val="004AAD"/>
-                </a:solidFill>
-                <a:latin typeface="Poppins"/>
-                <a:cs typeface="Poppins"/>
-                <a:sym typeface="Poppins"/>
-              </a:rPr>
-              <a:t> </a:t>
-            </a:r>
-            <a:r>
-              <a:rPr lang="en-US" sz="2900" b="1" dirty="0" err="1">
-                <a:solidFill>
-                  <a:srgbClr val="004AAD"/>
-                </a:solidFill>
-                <a:latin typeface="Poppins"/>
-                <a:cs typeface="Poppins"/>
-                <a:sym typeface="Poppins"/>
-              </a:rPr>
-              <a:t>Formación</a:t>
-            </a:r>
-            <a:endParaRPr sz="2900" dirty="0"/>
-          </a:p>
-        </p:txBody>
-      </p:sp>
-      <p:sp>
-        <p:nvSpPr>
-          <p:cNvPr id="146" name="Google Shape;146;g3dbe1710380_1_211"/>
-          <p:cNvSpPr txBox="1"/>
-          <p:nvPr/>
-        </p:nvSpPr>
-        <p:spPr>
-          <a:xfrm>
-            <a:off x="8188919" y="8316815"/>
-            <a:ext cx="3805800" cy="775597"/>
-          </a:xfrm>
-          <a:prstGeom prst="rect">
-            <a:avLst/>
-          </a:prstGeom>
-          <a:noFill/>
-          <a:ln>
-            <a:noFill/>
-          </a:ln>
-        </p:spPr>
-        <p:txBody>
-          <a:bodyPr spcFirstLastPara="1" wrap="square" lIns="0" tIns="0" rIns="0" bIns="0" anchor="t" anchorCtr="0">
-            <a:spAutoFit/>
-          </a:bodyPr>
-          <a:lstStyle/>
-          <a:p>
-            <a:pPr marL="0" marR="0" lvl="0" indent="0" algn="l" rtl="0">
-              <a:lnSpc>
-                <a:spcPct val="140000"/>
-              </a:lnSpc>
-              <a:spcBef>
-                <a:spcPts val="0"/>
-              </a:spcBef>
-              <a:spcAft>
-                <a:spcPts val="0"/>
-              </a:spcAft>
-              <a:buNone/>
-            </a:pPr>
-            <a:r>
-              <a:rPr lang="en-US" sz="3600" dirty="0">
-                <a:solidFill>
-                  <a:srgbClr val="004AAD"/>
-                </a:solidFill>
-                <a:latin typeface="Poppins"/>
-                <a:cs typeface="Poppins"/>
-                <a:sym typeface="Poppins"/>
-              </a:rPr>
-              <a:t>?</a:t>
-            </a:r>
-            <a:endParaRPr sz="3600" dirty="0"/>
-          </a:p>
-        </p:txBody>
-      </p:sp>
-      <p:grpSp>
-        <p:nvGrpSpPr>
-          <p:cNvPr id="147" name="Google Shape;147;g3dbe1710380_1_211"/>
-          <p:cNvGrpSpPr/>
-          <p:nvPr/>
-        </p:nvGrpSpPr>
-        <p:grpSpPr>
-          <a:xfrm>
-            <a:off x="0" y="5"/>
-            <a:ext cx="2163413" cy="1886345"/>
-            <a:chOff x="12784175" y="3675030"/>
-            <a:chExt cx="2163413" cy="1886345"/>
-          </a:xfrm>
-        </p:grpSpPr>
-        <p:sp>
-          <p:nvSpPr>
-            <p:cNvPr id="148" name="Google Shape;148;g3dbe1710380_1_211"/>
-            <p:cNvSpPr txBox="1"/>
-            <p:nvPr/>
-          </p:nvSpPr>
-          <p:spPr>
-            <a:xfrm rot="1830973">
-              <a:off x="12805773" y="4425496"/>
-              <a:ext cx="2081405" cy="652657"/>
-            </a:xfrm>
-            <a:prstGeom prst="rect">
-              <a:avLst/>
-            </a:prstGeom>
-            <a:noFill/>
-            <a:ln>
-              <a:noFill/>
-            </a:ln>
-          </p:spPr>
-          <p:txBody>
-            <a:bodyPr spcFirstLastPara="1" wrap="square" lIns="91425" tIns="91425" rIns="91425" bIns="91425" anchor="t" anchorCtr="0">
-              <a:noAutofit/>
-            </a:bodyPr>
-            <a:lstStyle/>
-            <a:p>
-              <a:pPr marL="0" lvl="0" indent="0" algn="l" rtl="0">
-                <a:spcBef>
-                  <a:spcPts val="0"/>
-                </a:spcBef>
-                <a:spcAft>
-                  <a:spcPts val="0"/>
-                </a:spcAft>
-                <a:buNone/>
-              </a:pPr>
-              <a:r>
-                <a:rPr lang="en-US" sz="2300" b="1" i="1">
-                  <a:solidFill>
-                    <a:srgbClr val="E69138"/>
-                  </a:solidFill>
-                  <a:latin typeface="Calibri"/>
-                  <a:ea typeface="Calibri"/>
-                  <a:cs typeface="Calibri"/>
-                  <a:sym typeface="Calibri"/>
-                </a:rPr>
-                <a:t>RAPID EXPRESS </a:t>
-              </a:r>
-              <a:endParaRPr sz="2300" b="1" i="1">
-                <a:solidFill>
-                  <a:srgbClr val="E69138"/>
-                </a:solidFill>
-                <a:latin typeface="Calibri"/>
-                <a:ea typeface="Calibri"/>
-                <a:cs typeface="Calibri"/>
-                <a:sym typeface="Calibri"/>
-              </a:endParaRPr>
-            </a:p>
-          </p:txBody>
-        </p:sp>
-        <p:sp>
-          <p:nvSpPr>
-            <p:cNvPr id="149" name="Google Shape;149;g3dbe1710380_1_211"/>
-            <p:cNvSpPr/>
-            <p:nvPr/>
-          </p:nvSpPr>
-          <p:spPr>
-            <a:xfrm>
-              <a:off x="13335203" y="3675030"/>
-              <a:ext cx="1612385" cy="1275250"/>
-            </a:xfrm>
-            <a:custGeom>
-              <a:avLst/>
-              <a:gdLst/>
-              <a:ahLst/>
-              <a:cxnLst/>
-              <a:rect l="l" t="t" r="r" b="b"/>
-              <a:pathLst>
-                <a:path w="1612385" h="1275250" extrusionOk="0">
-                  <a:moveTo>
-                    <a:pt x="0" y="0"/>
-                  </a:moveTo>
-                  <a:lnTo>
-                    <a:pt x="1612384" y="0"/>
-                  </a:lnTo>
-                  <a:lnTo>
-                    <a:pt x="1612384" y="1275249"/>
-                  </a:lnTo>
-                  <a:lnTo>
-                    <a:pt x="0" y="1275249"/>
-                  </a:lnTo>
-                  <a:lnTo>
-                    <a:pt x="0" y="0"/>
-                  </a:lnTo>
-                  <a:close/>
-                </a:path>
-              </a:pathLst>
-            </a:custGeom>
-            <a:blipFill rotWithShape="1">
-              <a:blip r:embed="rId4">
-                <a:alphaModFix/>
-              </a:blip>
-              <a:stretch>
-                <a:fillRect/>
-              </a:stretch>
-            </a:blipFill>
-            <a:ln>
-              <a:noFill/>
-            </a:ln>
-          </p:spPr>
-        </p:sp>
-      </p:grpSp>
-    </p:spTree>
-  </p:cSld>
-  <p:clrMapOvr>
-    <a:masterClrMapping/>
-  </p:clrMapOvr>
-</p:sld>
-</file>
-
-<file path=ppt/slides/slide5.xml><?xml version="1.0" encoding="utf-8"?>
-<p:sld xmlns:a="http://schemas.openxmlformats.org/drawingml/2006/main" xmlns:r="http://schemas.openxmlformats.org/officeDocument/2006/relationships" xmlns:p="http://schemas.openxmlformats.org/presentationml/2006/main">
-  <p:cSld>
     <p:spTree>
       <p:nvGrpSpPr>
         <p:cNvPr id="1" name="Shape 149"/>
@@ -36502,7 +34617,7 @@
 </p:sld>
 </file>
 
-<file path=ppt/slides/slide6.xml><?xml version="1.0" encoding="utf-8"?>
+<file path=ppt/slides/slide5.xml><?xml version="1.0" encoding="utf-8"?>
 <p:sld xmlns:a="http://schemas.openxmlformats.org/drawingml/2006/main" xmlns:r="http://schemas.openxmlformats.org/officeDocument/2006/relationships" xmlns:p="http://schemas.openxmlformats.org/presentationml/2006/main">
   <p:cSld>
     <p:spTree>
@@ -37824,7 +35939,7 @@
 </p:sld>
 </file>
 
-<file path=ppt/slides/slide7.xml><?xml version="1.0" encoding="utf-8"?>
+<file path=ppt/slides/slide6.xml><?xml version="1.0" encoding="utf-8"?>
 <p:sld xmlns:a="http://schemas.openxmlformats.org/drawingml/2006/main" xmlns:r="http://schemas.openxmlformats.org/officeDocument/2006/relationships" xmlns:p="http://schemas.openxmlformats.org/presentationml/2006/main">
   <p:cSld>
     <p:bg>
@@ -38180,7 +36295,7 @@
 </p:sld>
 </file>
 
-<file path=ppt/slides/slide8.xml><?xml version="1.0" encoding="utf-8"?>
+<file path=ppt/slides/slide7.xml><?xml version="1.0" encoding="utf-8"?>
 <p:sld xmlns:a="http://schemas.openxmlformats.org/drawingml/2006/main" xmlns:r="http://schemas.openxmlformats.org/officeDocument/2006/relationships" xmlns:p="http://schemas.openxmlformats.org/presentationml/2006/main">
   <p:cSld>
     <p:bg>
@@ -38661,7 +36776,7 @@
 </p:sld>
 </file>
 
-<file path=ppt/slides/slide9.xml><?xml version="1.0" encoding="utf-8"?>
+<file path=ppt/slides/slide8.xml><?xml version="1.0" encoding="utf-8"?>
 <p:sld xmlns:a="http://schemas.openxmlformats.org/drawingml/2006/main" xmlns:r="http://schemas.openxmlformats.org/officeDocument/2006/relationships" xmlns:p="http://schemas.openxmlformats.org/presentationml/2006/main">
   <p:cSld>
     <p:bg>
@@ -39133,6 +37248,487 @@
     <p:extLst>
       <p:ext uri="{BB962C8B-B14F-4D97-AF65-F5344CB8AC3E}">
         <p14:creationId xmlns:p14="http://schemas.microsoft.com/office/powerpoint/2010/main" val="3046405668"/>
+      </p:ext>
+    </p:extLst>
+  </p:cSld>
+  <p:clrMapOvr>
+    <a:masterClrMapping/>
+  </p:clrMapOvr>
+</p:sld>
+</file>
+
+<file path=ppt/slides/slide9.xml><?xml version="1.0" encoding="utf-8"?>
+<p:sld xmlns:a="http://schemas.openxmlformats.org/drawingml/2006/main" xmlns:r="http://schemas.openxmlformats.org/officeDocument/2006/relationships" xmlns:p="http://schemas.openxmlformats.org/presentationml/2006/main">
+  <p:cSld>
+    <p:bg>
+      <p:bgPr>
+        <a:solidFill>
+          <a:srgbClr val="E0E9F9"/>
+        </a:solidFill>
+        <a:effectLst/>
+      </p:bgPr>
+    </p:bg>
+    <p:spTree>
+      <p:nvGrpSpPr>
+        <p:cNvPr id="1" name="Shape 138"/>
+        <p:cNvGrpSpPr/>
+        <p:nvPr/>
+      </p:nvGrpSpPr>
+      <p:grpSpPr>
+        <a:xfrm>
+          <a:off x="0" y="0"/>
+          <a:ext cx="0" cy="0"/>
+          <a:chOff x="0" y="0"/>
+          <a:chExt cx="0" cy="0"/>
+        </a:xfrm>
+      </p:grpSpPr>
+      <p:sp>
+        <p:nvSpPr>
+          <p:cNvPr id="11" name="Google Shape;150;p17">
+            <a:extLst>
+              <a:ext uri="{FF2B5EF4-FFF2-40B4-BE49-F238E27FC236}">
+                <a16:creationId xmlns:a16="http://schemas.microsoft.com/office/drawing/2014/main" id="{DC31FCA6-E624-4F0D-9CEA-5147EAFF7540}"/>
+              </a:ext>
+            </a:extLst>
+          </p:cNvPr>
+          <p:cNvSpPr/>
+          <p:nvPr/>
+        </p:nvSpPr>
+        <p:spPr>
+          <a:xfrm>
+            <a:off x="13727091" y="2555717"/>
+            <a:ext cx="4065560" cy="5646612"/>
+          </a:xfrm>
+          <a:custGeom>
+            <a:avLst/>
+            <a:gdLst/>
+            <a:ahLst/>
+            <a:cxnLst/>
+            <a:rect l="l" t="t" r="r" b="b"/>
+            <a:pathLst>
+              <a:path w="6557355" h="9107438" extrusionOk="0">
+                <a:moveTo>
+                  <a:pt x="0" y="0"/>
+                </a:moveTo>
+                <a:lnTo>
+                  <a:pt x="6557355" y="0"/>
+                </a:lnTo>
+                <a:lnTo>
+                  <a:pt x="6557355" y="9107438"/>
+                </a:lnTo>
+                <a:lnTo>
+                  <a:pt x="0" y="9107438"/>
+                </a:lnTo>
+                <a:lnTo>
+                  <a:pt x="0" y="0"/>
+                </a:lnTo>
+                <a:close/>
+              </a:path>
+            </a:pathLst>
+          </a:custGeom>
+          <a:blipFill rotWithShape="1">
+            <a:blip r:embed="rId3">
+              <a:alphaModFix/>
+            </a:blip>
+            <a:stretch>
+              <a:fillRect/>
+            </a:stretch>
+          </a:blipFill>
+          <a:ln>
+            <a:noFill/>
+          </a:ln>
+        </p:spPr>
+        <p:txBody>
+          <a:bodyPr/>
+          <a:lstStyle/>
+          <a:p>
+            <a:endParaRPr lang="es-ES_tradnl" dirty="0"/>
+          </a:p>
+        </p:txBody>
+      </p:sp>
+      <p:pic>
+        <p:nvPicPr>
+          <p:cNvPr id="4" name="Imatge 3">
+            <a:extLst>
+              <a:ext uri="{FF2B5EF4-FFF2-40B4-BE49-F238E27FC236}">
+                <a16:creationId xmlns:a16="http://schemas.microsoft.com/office/drawing/2014/main" id="{42D5B2CC-4A8D-4CDB-8063-732212E764BB}"/>
+              </a:ext>
+            </a:extLst>
+          </p:cNvPr>
+          <p:cNvPicPr>
+            <a:picLocks noChangeAspect="1"/>
+          </p:cNvPicPr>
+          <p:nvPr/>
+        </p:nvPicPr>
+        <p:blipFill>
+          <a:blip r:embed="rId4"/>
+          <a:stretch>
+            <a:fillRect/>
+          </a:stretch>
+        </p:blipFill>
+        <p:spPr>
+          <a:xfrm>
+            <a:off x="2714395" y="1275255"/>
+            <a:ext cx="10200871" cy="8929706"/>
+          </a:xfrm>
+          <a:prstGeom prst="rect">
+            <a:avLst/>
+          </a:prstGeom>
+        </p:spPr>
+      </p:pic>
+      <p:sp>
+        <p:nvSpPr>
+          <p:cNvPr id="142" name="Google Shape;142;p16"/>
+          <p:cNvSpPr txBox="1"/>
+          <p:nvPr/>
+        </p:nvSpPr>
+        <p:spPr>
+          <a:xfrm>
+            <a:off x="4000546" y="524304"/>
+            <a:ext cx="9594965" cy="670505"/>
+          </a:xfrm>
+          <a:prstGeom prst="rect">
+            <a:avLst/>
+          </a:prstGeom>
+          <a:noFill/>
+          <a:ln>
+            <a:noFill/>
+          </a:ln>
+        </p:spPr>
+        <p:txBody>
+          <a:bodyPr spcFirstLastPara="1" wrap="square" lIns="0" tIns="0" rIns="0" bIns="0" anchor="t" anchorCtr="0">
+            <a:spAutoFit/>
+          </a:bodyPr>
+          <a:lstStyle/>
+          <a:p>
+            <a:pPr marL="0" marR="0" lvl="0" indent="0" algn="l" rtl="0">
+              <a:lnSpc>
+                <a:spcPct val="121055"/>
+              </a:lnSpc>
+              <a:spcBef>
+                <a:spcPts val="0"/>
+              </a:spcBef>
+              <a:spcAft>
+                <a:spcPts val="0"/>
+              </a:spcAft>
+              <a:buNone/>
+            </a:pPr>
+            <a:r>
+              <a:rPr lang="es-ES_tradnl" sz="3601" b="1" i="0" u="none" strike="noStrike" cap="none" dirty="0">
+                <a:solidFill>
+                  <a:srgbClr val="004AAD"/>
+                </a:solidFill>
+                <a:latin typeface="Poppins"/>
+                <a:ea typeface="Poppins"/>
+                <a:cs typeface="Poppins"/>
+                <a:sym typeface="Poppins"/>
+              </a:rPr>
+              <a:t>Análisis </a:t>
+            </a:r>
+            <a:r>
+              <a:rPr lang="es-ES_tradnl" sz="3601" b="1" dirty="0">
+                <a:solidFill>
+                  <a:srgbClr val="004AAD"/>
+                </a:solidFill>
+                <a:latin typeface="Poppins"/>
+                <a:ea typeface="Poppins"/>
+                <a:cs typeface="Poppins"/>
+                <a:sym typeface="Poppins"/>
+              </a:rPr>
+              <a:t>por</a:t>
+            </a:r>
+            <a:r>
+              <a:rPr lang="es-ES_tradnl" sz="3601" b="1" i="0" u="none" strike="noStrike" cap="none" dirty="0">
+                <a:solidFill>
+                  <a:srgbClr val="004AAD"/>
+                </a:solidFill>
+                <a:latin typeface="Poppins"/>
+                <a:ea typeface="Poppins"/>
+                <a:cs typeface="Poppins"/>
+                <a:sym typeface="Poppins"/>
+              </a:rPr>
+              <a:t> sector económico</a:t>
+            </a:r>
+            <a:endParaRPr lang="es-ES_tradnl" dirty="0"/>
+          </a:p>
+        </p:txBody>
+      </p:sp>
+      <p:grpSp>
+        <p:nvGrpSpPr>
+          <p:cNvPr id="143" name="Google Shape;143;p16"/>
+          <p:cNvGrpSpPr/>
+          <p:nvPr/>
+        </p:nvGrpSpPr>
+        <p:grpSpPr>
+          <a:xfrm>
+            <a:off x="0" y="5"/>
+            <a:ext cx="2163413" cy="1886345"/>
+            <a:chOff x="12784175" y="3675030"/>
+            <a:chExt cx="2163413" cy="1886345"/>
+          </a:xfrm>
+        </p:grpSpPr>
+        <p:sp>
+          <p:nvSpPr>
+            <p:cNvPr id="144" name="Google Shape;144;p16"/>
+            <p:cNvSpPr txBox="1"/>
+            <p:nvPr/>
+          </p:nvSpPr>
+          <p:spPr>
+            <a:xfrm rot="1830973">
+              <a:off x="12805773" y="4425496"/>
+              <a:ext cx="2081405" cy="652657"/>
+            </a:xfrm>
+            <a:prstGeom prst="rect">
+              <a:avLst/>
+            </a:prstGeom>
+            <a:noFill/>
+            <a:ln>
+              <a:noFill/>
+            </a:ln>
+          </p:spPr>
+          <p:txBody>
+            <a:bodyPr spcFirstLastPara="1" wrap="square" lIns="91425" tIns="91425" rIns="91425" bIns="91425" anchor="t" anchorCtr="0">
+              <a:noAutofit/>
+            </a:bodyPr>
+            <a:lstStyle/>
+            <a:p>
+              <a:pPr marL="0" lvl="0" indent="0" algn="l" rtl="0">
+                <a:spcBef>
+                  <a:spcPts val="0"/>
+                </a:spcBef>
+                <a:spcAft>
+                  <a:spcPts val="0"/>
+                </a:spcAft>
+                <a:buNone/>
+              </a:pPr>
+              <a:r>
+                <a:rPr lang="es-ES_tradnl" sz="2300" b="1" i="1" dirty="0">
+                  <a:solidFill>
+                    <a:srgbClr val="E69138"/>
+                  </a:solidFill>
+                  <a:latin typeface="Calibri"/>
+                  <a:ea typeface="Calibri"/>
+                  <a:cs typeface="Calibri"/>
+                  <a:sym typeface="Calibri"/>
+                </a:rPr>
+                <a:t>RAPID EXPRESS </a:t>
+              </a:r>
+            </a:p>
+          </p:txBody>
+        </p:sp>
+        <p:sp>
+          <p:nvSpPr>
+            <p:cNvPr id="145" name="Google Shape;145;p16"/>
+            <p:cNvSpPr/>
+            <p:nvPr/>
+          </p:nvSpPr>
+          <p:spPr>
+            <a:xfrm>
+              <a:off x="13335203" y="3675030"/>
+              <a:ext cx="1612385" cy="1275250"/>
+            </a:xfrm>
+            <a:custGeom>
+              <a:avLst/>
+              <a:gdLst/>
+              <a:ahLst/>
+              <a:cxnLst/>
+              <a:rect l="l" t="t" r="r" b="b"/>
+              <a:pathLst>
+                <a:path w="1612385" h="1275250" extrusionOk="0">
+                  <a:moveTo>
+                    <a:pt x="0" y="0"/>
+                  </a:moveTo>
+                  <a:lnTo>
+                    <a:pt x="1612384" y="0"/>
+                  </a:lnTo>
+                  <a:lnTo>
+                    <a:pt x="1612384" y="1275249"/>
+                  </a:lnTo>
+                  <a:lnTo>
+                    <a:pt x="0" y="1275249"/>
+                  </a:lnTo>
+                  <a:lnTo>
+                    <a:pt x="0" y="0"/>
+                  </a:lnTo>
+                  <a:close/>
+                </a:path>
+              </a:pathLst>
+            </a:custGeom>
+            <a:blipFill rotWithShape="1">
+              <a:blip r:embed="rId5">
+                <a:alphaModFix/>
+              </a:blip>
+              <a:stretch>
+                <a:fillRect/>
+              </a:stretch>
+            </a:blipFill>
+            <a:ln>
+              <a:noFill/>
+            </a:ln>
+          </p:spPr>
+          <p:txBody>
+            <a:bodyPr/>
+            <a:lstStyle/>
+            <a:p>
+              <a:endParaRPr lang="es-ES_tradnl" dirty="0"/>
+            </a:p>
+          </p:txBody>
+        </p:sp>
+      </p:grpSp>
+      <p:sp>
+        <p:nvSpPr>
+          <p:cNvPr id="5" name="Rectángulo redondeado 4">
+            <a:extLst>
+              <a:ext uri="{FF2B5EF4-FFF2-40B4-BE49-F238E27FC236}">
+                <a16:creationId xmlns:a16="http://schemas.microsoft.com/office/drawing/2014/main" id="{4662BFC3-4DAD-4767-15A8-BAC1AD191C5D}"/>
+              </a:ext>
+            </a:extLst>
+          </p:cNvPr>
+          <p:cNvSpPr/>
+          <p:nvPr/>
+        </p:nvSpPr>
+        <p:spPr>
+          <a:xfrm rot="5400000">
+            <a:off x="5260632" y="2354376"/>
+            <a:ext cx="2598821" cy="1034324"/>
+          </a:xfrm>
+          <a:prstGeom prst="roundRect">
+            <a:avLst/>
+          </a:prstGeom>
+          <a:noFill/>
+          <a:ln w="28575">
+            <a:solidFill>
+              <a:schemeClr val="accent6">
+                <a:lumMod val="75000"/>
+              </a:schemeClr>
+            </a:solidFill>
+          </a:ln>
+        </p:spPr>
+        <p:style>
+          <a:lnRef idx="2">
+            <a:schemeClr val="accent1">
+              <a:shade val="15000"/>
+            </a:schemeClr>
+          </a:lnRef>
+          <a:fillRef idx="1">
+            <a:schemeClr val="accent1"/>
+          </a:fillRef>
+          <a:effectRef idx="0">
+            <a:schemeClr val="accent1"/>
+          </a:effectRef>
+          <a:fontRef idx="minor">
+            <a:schemeClr val="lt1"/>
+          </a:fontRef>
+        </p:style>
+        <p:txBody>
+          <a:bodyPr rtlCol="0" anchor="ctr"/>
+          <a:lstStyle/>
+          <a:p>
+            <a:pPr algn="ctr"/>
+            <a:endParaRPr lang="es-ES"/>
+          </a:p>
+        </p:txBody>
+      </p:sp>
+      <p:sp>
+        <p:nvSpPr>
+          <p:cNvPr id="10" name="QuadreDeText 9">
+            <a:extLst>
+              <a:ext uri="{FF2B5EF4-FFF2-40B4-BE49-F238E27FC236}">
+                <a16:creationId xmlns:a16="http://schemas.microsoft.com/office/drawing/2014/main" id="{BFD99AF1-9DAA-451E-83AF-1058AB19BE6B}"/>
+              </a:ext>
+            </a:extLst>
+          </p:cNvPr>
+          <p:cNvSpPr txBox="1"/>
+          <p:nvPr/>
+        </p:nvSpPr>
+        <p:spPr>
+          <a:xfrm>
+            <a:off x="11587397" y="9295283"/>
+            <a:ext cx="9173980" cy="307777"/>
+          </a:xfrm>
+          <a:prstGeom prst="rect">
+            <a:avLst/>
+          </a:prstGeom>
+          <a:noFill/>
+        </p:spPr>
+        <p:txBody>
+          <a:bodyPr wrap="square">
+            <a:spAutoFit/>
+          </a:bodyPr>
+          <a:lstStyle/>
+          <a:p>
+            <a:r>
+              <a:rPr lang="es-ES" dirty="0"/>
+              <a:t>Fuente: </a:t>
+            </a:r>
+            <a:r>
+              <a:rPr lang="es-ES" dirty="0">
+                <a:hlinkClick r:id="rId6"/>
+              </a:rPr>
+              <a:t>Encuesta Anual Laboral. Ministerio de Trabajo y Economía Social</a:t>
+            </a:r>
+            <a:endParaRPr lang="es-ES" dirty="0"/>
+          </a:p>
+        </p:txBody>
+      </p:sp>
+      <p:sp>
+        <p:nvSpPr>
+          <p:cNvPr id="12" name="Rectángulo redondeado 4">
+            <a:extLst>
+              <a:ext uri="{FF2B5EF4-FFF2-40B4-BE49-F238E27FC236}">
+                <a16:creationId xmlns:a16="http://schemas.microsoft.com/office/drawing/2014/main" id="{EBBBF2B7-0BAE-486F-B9FD-CBE0F700B7FD}"/>
+              </a:ext>
+            </a:extLst>
+          </p:cNvPr>
+          <p:cNvSpPr/>
+          <p:nvPr/>
+        </p:nvSpPr>
+        <p:spPr>
+          <a:xfrm rot="5400000">
+            <a:off x="5284696" y="5266018"/>
+            <a:ext cx="2598821" cy="1034324"/>
+          </a:xfrm>
+          <a:prstGeom prst="roundRect">
+            <a:avLst/>
+          </a:prstGeom>
+          <a:noFill/>
+          <a:ln w="28575">
+            <a:solidFill>
+              <a:schemeClr val="accent6">
+                <a:lumMod val="75000"/>
+              </a:schemeClr>
+            </a:solidFill>
+          </a:ln>
+        </p:spPr>
+        <p:style>
+          <a:lnRef idx="2">
+            <a:schemeClr val="accent1">
+              <a:shade val="15000"/>
+            </a:schemeClr>
+          </a:lnRef>
+          <a:fillRef idx="1">
+            <a:schemeClr val="accent1"/>
+          </a:fillRef>
+          <a:effectRef idx="0">
+            <a:schemeClr val="accent1"/>
+          </a:effectRef>
+          <a:fontRef idx="minor">
+            <a:schemeClr val="lt1"/>
+          </a:fontRef>
+        </p:style>
+        <p:txBody>
+          <a:bodyPr rtlCol="0" anchor="ctr"/>
+          <a:lstStyle/>
+          <a:p>
+            <a:pPr algn="ctr"/>
+            <a:endParaRPr lang="es-ES"/>
+          </a:p>
+        </p:txBody>
+      </p:sp>
+    </p:spTree>
+    <p:extLst>
+      <p:ext uri="{BB962C8B-B14F-4D97-AF65-F5344CB8AC3E}">
+        <p14:creationId xmlns:p14="http://schemas.microsoft.com/office/powerpoint/2010/main" val="1860337386"/>
       </p:ext>
     </p:extLst>
   </p:cSld>
